--- a/presentations/weekly_20261029/weekly_20261029_english_final.pptx
+++ b/presentations/weekly_20261029/weekly_20261029_english_final.pptx
@@ -2,21 +2,21 @@
 <file path=ppt/presentation.xml><?xml version="1.0" encoding="utf-8"?>
 <p:presentation xmlns:p="http://schemas.openxmlformats.org/presentationml/2006/main">
   <p:sldMasterIdLst>
-    <p:sldMasterId xmlns:r="http://schemas.openxmlformats.org/officeDocument/2006/relationships" id="2147483648" r:id="R1e04743f05634287"/>
+    <p:sldMasterId xmlns:r="http://schemas.openxmlformats.org/officeDocument/2006/relationships" id="2147483648" r:id="R09c843f01ba941b1"/>
   </p:sldMasterIdLst>
   <p:notesMasterIdLst>
-    <p:notesMasterId xmlns:r="http://schemas.openxmlformats.org/officeDocument/2006/relationships" r:id="Ra5e764182cd94e59"/>
+    <p:notesMasterId xmlns:r="http://schemas.openxmlformats.org/officeDocument/2006/relationships" r:id="Rc856f750f0f04893"/>
   </p:notesMasterIdLst>
   <p:sldIdLst>
-    <p:sldId xmlns:r="http://schemas.openxmlformats.org/officeDocument/2006/relationships" id="256" r:id="R1f2cdba2a4c94bed"/>
-    <p:sldId xmlns:r="http://schemas.openxmlformats.org/officeDocument/2006/relationships" id="257" r:id="R9c6bda0486414b4f"/>
-    <p:sldId xmlns:r="http://schemas.openxmlformats.org/officeDocument/2006/relationships" id="258" r:id="R3151545a97c746c0"/>
-    <p:sldId xmlns:r="http://schemas.openxmlformats.org/officeDocument/2006/relationships" id="259" r:id="R0e4d269612f2468e"/>
-    <p:sldId xmlns:r="http://schemas.openxmlformats.org/officeDocument/2006/relationships" id="260" r:id="R121bc53f6ac2467e"/>
-    <p:sldId xmlns:r="http://schemas.openxmlformats.org/officeDocument/2006/relationships" id="261" r:id="R129d804fc12246fa"/>
-    <p:sldId xmlns:r="http://schemas.openxmlformats.org/officeDocument/2006/relationships" id="262" r:id="Ra1486ee1166c49a4"/>
-    <p:sldId xmlns:r="http://schemas.openxmlformats.org/officeDocument/2006/relationships" id="263" r:id="R85eb96487cad461c"/>
-    <p:sldId xmlns:r="http://schemas.openxmlformats.org/officeDocument/2006/relationships" id="264" r:id="R6884cbf967094c11"/>
+    <p:sldId xmlns:r="http://schemas.openxmlformats.org/officeDocument/2006/relationships" id="256" r:id="R123cab274e67496c"/>
+    <p:sldId xmlns:r="http://schemas.openxmlformats.org/officeDocument/2006/relationships" id="257" r:id="Rfe61f2beb0a14048"/>
+    <p:sldId xmlns:r="http://schemas.openxmlformats.org/officeDocument/2006/relationships" id="258" r:id="R6ffc911ed1e9403c"/>
+    <p:sldId xmlns:r="http://schemas.openxmlformats.org/officeDocument/2006/relationships" id="259" r:id="Rcc2c9da573d24c9d"/>
+    <p:sldId xmlns:r="http://schemas.openxmlformats.org/officeDocument/2006/relationships" id="260" r:id="R92ff495921b6451f"/>
+    <p:sldId xmlns:r="http://schemas.openxmlformats.org/officeDocument/2006/relationships" id="261" r:id="Rd736ca64e6794b2b"/>
+    <p:sldId xmlns:r="http://schemas.openxmlformats.org/officeDocument/2006/relationships" id="262" r:id="R689367b79af54dab"/>
+    <p:sldId xmlns:r="http://schemas.openxmlformats.org/officeDocument/2006/relationships" id="263" r:id="R27441670c4c543b8"/>
+    <p:sldId xmlns:r="http://schemas.openxmlformats.org/officeDocument/2006/relationships" id="264" r:id="Rdf3daf8d7eea4e16"/>
   </p:sldIdLst>
   <p:sldSz cx="12192000" cy="6858000"/>
   <p:notesSz cx="6858000" cy="9144000"/>
@@ -590,7 +590,7 @@
           <a:lstStyle xmlns:a="http://schemas.openxmlformats.org/drawingml/2006/main"/>
           <a:p xmlns:a="http://schemas.openxmlformats.org/drawingml/2006/main">
             <a:r>
-              <a:t>Proposed scheduler, not implemented/validated. t_ready denotes decoded reconstruction inputs ready. T_display and safety margin must be measured/reserved. Current implementation covers fixed-center ROI reconstruction and latency profiles.</a:t>
+              <a:t>Proposed adaptive mechanism, not implemented/validated. After inputs are ready, more remaining reconstruction time allows a larger full-resolution region; less time calls for a smaller region. The half-resolution base still covers the full image. Region sizes in this schematic are illustrative, not quantitative. Current implementation covers a fixed-center FOV sweep and latency profiles.</a:t>
             </a:r>
           </a:p>
         </p:txBody>
@@ -660,7 +660,7 @@
           <a:lstStyle xmlns:a="http://schemas.openxmlformats.org/drawingml/2006/main"/>
           <a:p xmlns:a="http://schemas.openxmlformats.org/drawingml/2006/main">
             <a:r>
-              <a:t>Source: results/fov_levels_xavier_full_20261027/README.md; overview.csv; summary.csv. Commit 0f1506c. Date 2026-10-27. Raw evidence: evidence.tar.gz. Mechanism reflects current half base + padded full-resolution ROI + feather overlay. ROI dimensions are pixels, not angles.</a:t>
+              <a:t>Source: results/fov_levels_xavier_full_20261027/README.md; overview.csv; summary.csv. Commit 0f1506c. Date 2026-10-27. Raw evidence: evidence.tar.gz. Mechanism: half-resolution base + padded full-resolution ROI + feather overlay. Region percentages are spatial coverage of a 960x540 image: 80x46=0.7098765%, 160x90=2.7777778%, 320x180=11.1111111%, 480x270=25%, 640x360=44.4444444%. The base samples at 50% width and 50% height, giving 25% as many pixels (480x270), while covering the entire image. Region coverage and sampling resolution are different quantities.</a:t>
             </a:r>
           </a:p>
         </p:txBody>
@@ -800,7 +800,7 @@
           <a:lstStyle xmlns:a="http://schemas.openxmlformats.org/drawingml/2006/main"/>
           <a:p xmlns:a="http://schemas.openxmlformats.org/drawingml/2006/main">
             <a:r>
-              <a:t>Source: results/fov_levels_xavier_full_20261027/README.md; overview.csv; summary.csv. Commit 0f1506c. Date 2026-10-27. Raw evidence: evidence.tar.gz. Chart uses pooled timing medians. Full baseline is separately measured per level. Fast resample enabled. Each series value corresponds to all 1068 supported frames.</a:t>
+              <a:t>Source: results/fov_levels_xavier_full_20261027/README.md; overview.csv; summary.csv. Commit 0f1506c. Date 2026-10-27. Raw evidence: evidence.tar.gz. Arithmetic means of all 5340 timing samples in each level/timing/mode group, computed by compute_means.py into mean_timings.json. No sample trimming. Full baseline measured separately per level. Fast resample enabled. Each value covers all 1068 supported frames. Speedup is mean(full resident)/mean(FOV resident) at the same region level. Region labels are image-area coverage, not sampling resolution.</a:t>
             </a:r>
           </a:p>
         </p:txBody>
@@ -940,7 +940,7 @@
           <a:lstStyle xmlns:a="http://schemas.openxmlformats.org/drawingml/2006/main"/>
           <a:p xmlns:a="http://schemas.openxmlformats.org/drawingml/2006/main">
             <a:r>
-              <a:t>Source: results/numba_xavier_20261029/mode7_15w/result.json, environment.txt, run.log. Four workloads, frame39 only, 100 timing samples per method, Numba0.58.1/Python3.8/CUDA11.4. Original source-function calls include allocations/transfers/debug copies and show warmup drift; not directly comparable to resident timing.</a:t>
+              <a:t>Source: results/numba_xavier_20261029/mode7_15w/result.json, environment.txt, run.log. Arithmetic means from mean_timings.json of 100 timing samples per method, four workloads, frame39 only. No confidence intervals. Numba0.58.1/Python3.8/CUDA11.4. Original source-function calls include allocations/transfers/debug copies and show warmup drift; not directly comparable to resident timing.</a:t>
             </a:r>
           </a:p>
         </p:txBody>
@@ -1057,7 +1057,7 @@
           <p:cNvPr id="3" name="Title">
             <a:extLst xmlns:a="http://schemas.openxmlformats.org/drawingml/2006/main">
               <a:ext uri="{FF2B5EF4-FFF2-40B4-BE49-F238E27FC236}">
-                <a16:creationId xmlns:a16="http://schemas.microsoft.com/office/drawing/2014/main" id="{F87A274B-23C3-4683-9493-F1B431FC228F}"/>
+                <a16:creationId xmlns:a16="http://schemas.microsoft.com/office/drawing/2014/main" id="{D9A63AD5-3777-4FC1-8337-60A53ACA883A}"/>
               </a:ext>
             </a:extLst>
           </p:cNvPr>
@@ -1286,7 +1286,7 @@
           <p:cNvPr id="2" name="Subtitle">
             <a:extLst xmlns:a="http://schemas.openxmlformats.org/drawingml/2006/main">
               <a:ext uri="{FF2B5EF4-FFF2-40B4-BE49-F238E27FC236}">
-                <a16:creationId xmlns:a16="http://schemas.microsoft.com/office/drawing/2014/main" id="{4643C067-CDDA-4922-9468-01CCE9ED2FA8}"/>
+                <a16:creationId xmlns:a16="http://schemas.microsoft.com/office/drawing/2014/main" id="{053E3716-2EC3-4BD8-A0A7-6957CBBD83CD}"/>
               </a:ext>
             </a:extLst>
           </p:cNvPr>
@@ -1532,7 +1532,7 @@
           <p:cNvPr id="2" name="Section title">
             <a:extLst xmlns:a="http://schemas.openxmlformats.org/drawingml/2006/main">
               <a:ext uri="{FF2B5EF4-FFF2-40B4-BE49-F238E27FC236}">
-                <a16:creationId xmlns:a16="http://schemas.microsoft.com/office/drawing/2014/main" id="{E6F6807B-926B-47DB-935C-3B5304323119}"/>
+                <a16:creationId xmlns:a16="http://schemas.microsoft.com/office/drawing/2014/main" id="{7876FEFE-0513-46F3-B756-112FD06A45D6}"/>
               </a:ext>
             </a:extLst>
           </p:cNvPr>
@@ -1778,7 +1778,7 @@
           <p:cNvPr id="3" name="Title">
             <a:extLst xmlns:a="http://schemas.openxmlformats.org/drawingml/2006/main">
               <a:ext uri="{FF2B5EF4-FFF2-40B4-BE49-F238E27FC236}">
-                <a16:creationId xmlns:a16="http://schemas.microsoft.com/office/drawing/2014/main" id="{A05EFF7F-276E-40FE-A46D-4265930CEB49}"/>
+                <a16:creationId xmlns:a16="http://schemas.microsoft.com/office/drawing/2014/main" id="{5C0EE840-23F6-42AA-B962-0ED5D25AB7EF}"/>
               </a:ext>
             </a:extLst>
           </p:cNvPr>
@@ -2007,7 +2007,7 @@
           <p:cNvPr id="2" name="Body">
             <a:extLst xmlns:a="http://schemas.openxmlformats.org/drawingml/2006/main">
               <a:ext uri="{FF2B5EF4-FFF2-40B4-BE49-F238E27FC236}">
-                <a16:creationId xmlns:a16="http://schemas.microsoft.com/office/drawing/2014/main" id="{C16A17C9-6BCE-4E84-8A75-164359C62D49}"/>
+                <a16:creationId xmlns:a16="http://schemas.microsoft.com/office/drawing/2014/main" id="{3F7ACA96-7AAB-4C58-9E2A-CA7B7A97E79E}"/>
               </a:ext>
             </a:extLst>
           </p:cNvPr>
@@ -2253,7 +2253,7 @@
           <p:cNvPr id="4" name="Title">
             <a:extLst xmlns:a="http://schemas.openxmlformats.org/drawingml/2006/main">
               <a:ext uri="{FF2B5EF4-FFF2-40B4-BE49-F238E27FC236}">
-                <a16:creationId xmlns:a16="http://schemas.microsoft.com/office/drawing/2014/main" id="{301D4EFF-1F68-42BF-B480-C6EAA62420F6}"/>
+                <a16:creationId xmlns:a16="http://schemas.microsoft.com/office/drawing/2014/main" id="{4CB04557-F37A-4A68-9B85-700F266BB817}"/>
               </a:ext>
             </a:extLst>
           </p:cNvPr>
@@ -2482,7 +2482,7 @@
           <p:cNvPr id="2" name="Left column">
             <a:extLst xmlns:a="http://schemas.openxmlformats.org/drawingml/2006/main">
               <a:ext uri="{FF2B5EF4-FFF2-40B4-BE49-F238E27FC236}">
-                <a16:creationId xmlns:a16="http://schemas.microsoft.com/office/drawing/2014/main" id="{C57A78BF-8637-4A5F-9A0F-34F3D8EA9DC5}"/>
+                <a16:creationId xmlns:a16="http://schemas.microsoft.com/office/drawing/2014/main" id="{AF02A5BE-8798-44DA-9D8D-5B1F162861C2}"/>
               </a:ext>
             </a:extLst>
           </p:cNvPr>
@@ -2711,7 +2711,7 @@
           <p:cNvPr id="3" name="Right column">
             <a:extLst xmlns:a="http://schemas.openxmlformats.org/drawingml/2006/main">
               <a:ext uri="{FF2B5EF4-FFF2-40B4-BE49-F238E27FC236}">
-                <a16:creationId xmlns:a16="http://schemas.microsoft.com/office/drawing/2014/main" id="{A75E4833-4A9E-4A72-B22A-EDE6C0EAA8DF}"/>
+                <a16:creationId xmlns:a16="http://schemas.microsoft.com/office/drawing/2014/main" id="{0609C1B5-CF67-4B71-B890-0ADBADD75B32}"/>
               </a:ext>
             </a:extLst>
           </p:cNvPr>
@@ -2957,7 +2957,7 @@
           <p:cNvPr id="3" name="Title">
             <a:extLst xmlns:a="http://schemas.openxmlformats.org/drawingml/2006/main">
               <a:ext uri="{FF2B5EF4-FFF2-40B4-BE49-F238E27FC236}">
-                <a16:creationId xmlns:a16="http://schemas.microsoft.com/office/drawing/2014/main" id="{D9FD2F19-D1F7-402C-836F-2370F0B2EA5C}"/>
+                <a16:creationId xmlns:a16="http://schemas.microsoft.com/office/drawing/2014/main" id="{F3412BC9-CD2D-4B57-9A16-7CBDEBF10F49}"/>
               </a:ext>
             </a:extLst>
           </p:cNvPr>
@@ -3186,7 +3186,7 @@
           <p:cNvPr id="2" name="Left column">
             <a:extLst xmlns:a="http://schemas.openxmlformats.org/drawingml/2006/main">
               <a:ext uri="{FF2B5EF4-FFF2-40B4-BE49-F238E27FC236}">
-                <a16:creationId xmlns:a16="http://schemas.microsoft.com/office/drawing/2014/main" id="{7AE028CA-6EA0-4F99-BCB4-1FA5806F204C}"/>
+                <a16:creationId xmlns:a16="http://schemas.microsoft.com/office/drawing/2014/main" id="{5F3DF24C-31D7-44AB-954F-446AD853126E}"/>
               </a:ext>
             </a:extLst>
           </p:cNvPr>
@@ -3453,12 +3453,12 @@
   </p:cSld>
   <p:clrMap bg1="lt1" tx1="dk1" bg2="lt2" tx2="dk2" accent1="accent1" accent2="accent2" accent3="accent3" accent4="accent4" accent5="accent5" accent6="accent6" hlink="hlink" folHlink="folHlink"/>
   <p:sldLayoutIdLst>
-    <p:sldLayoutId xmlns:r="http://schemas.openxmlformats.org/officeDocument/2006/relationships" id="2147483649" r:id="R6c94b5861b5e4029"/>
-    <p:sldLayoutId xmlns:r="http://schemas.openxmlformats.org/officeDocument/2006/relationships" id="2147483650" r:id="R489a32629c6e45ca"/>
-    <p:sldLayoutId xmlns:r="http://schemas.openxmlformats.org/officeDocument/2006/relationships" id="2147483651" r:id="Rd9e7f01cd4264adf"/>
-    <p:sldLayoutId xmlns:r="http://schemas.openxmlformats.org/officeDocument/2006/relationships" id="2147483652" r:id="Rdd470765e3304876"/>
-    <p:sldLayoutId xmlns:r="http://schemas.openxmlformats.org/officeDocument/2006/relationships" id="2147483653" r:id="R3d3d2ead46f6434f"/>
-    <p:sldLayoutId xmlns:r="http://schemas.openxmlformats.org/officeDocument/2006/relationships" id="2147483654" r:id="R8ccb95f084bb4225"/>
+    <p:sldLayoutId xmlns:r="http://schemas.openxmlformats.org/officeDocument/2006/relationships" id="2147483649" r:id="R14a75297092c4a59"/>
+    <p:sldLayoutId xmlns:r="http://schemas.openxmlformats.org/officeDocument/2006/relationships" id="2147483650" r:id="R17e1092499094ff7"/>
+    <p:sldLayoutId xmlns:r="http://schemas.openxmlformats.org/officeDocument/2006/relationships" id="2147483651" r:id="R3b734a060c344908"/>
+    <p:sldLayoutId xmlns:r="http://schemas.openxmlformats.org/officeDocument/2006/relationships" id="2147483652" r:id="R336a01e1e53c4755"/>
+    <p:sldLayoutId xmlns:r="http://schemas.openxmlformats.org/officeDocument/2006/relationships" id="2147483653" r:id="R06c8d27b7e9a4545"/>
+    <p:sldLayoutId xmlns:r="http://schemas.openxmlformats.org/officeDocument/2006/relationships" id="2147483654" r:id="R16905c455c0f4716"/>
   </p:sldLayoutIdLst>
   <p:txStyles>
     <p:titleStyle>
@@ -3990,8 +3990,9 @@
   <c:lang val="en-US"/>
   <c:chart>
     <c:plotArea>
-      <c:lineChart>
-        <c:grouping val="standard"/>
+      <c:barChart>
+        <c:barDir val="col"/>
+        <c:grouping val="clustered"/>
         <c:varyColors val="0"/>
         <c:ser>
           <c:idx val="0"/>
@@ -4004,28 +4005,26 @@
               <a:srgbClr val="086B93"/>
             </a:solidFill>
           </c:spPr>
-          <c:marker>
-            <c:symbol val="none"/>
-          </c:marker>
+          <c:invertIfNegative val="0"/>
           <c:cat>
             <c:strRef>
               <c:f>'Chart Data'!$A$2:$A$6</c:f>
               <c:strCache>
                 <c:ptCount val="5"/>
                 <c:pt idx="0">
-                  <c:v>80×46</c:v>
+                  <c:v>0.7%</c:v>
                 </c:pt>
                 <c:pt idx="1">
-                  <c:v>160×90</c:v>
+                  <c:v>2.8%</c:v>
                 </c:pt>
                 <c:pt idx="2">
-                  <c:v>320×180</c:v>
+                  <c:v>11.1%</c:v>
                 </c:pt>
                 <c:pt idx="3">
-                  <c:v>480×270</c:v>
+                  <c:v>25.0%</c:v>
                 </c:pt>
                 <c:pt idx="4">
-                  <c:v>640×360</c:v>
+                  <c:v>44.4%</c:v>
                 </c:pt>
               </c:strCache>
             </c:strRef>
@@ -4037,19 +4036,19 @@
                 <c:formatCode>General</c:formatCode>
                 <c:ptCount val="5"/>
                 <c:pt idx="0">
-                  <c:v>4.367</c:v>
+                  <c:v>4.562</c:v>
                 </c:pt>
                 <c:pt idx="1">
-                  <c:v>4.637</c:v>
+                  <c:v>4.77</c:v>
                 </c:pt>
                 <c:pt idx="2">
-                  <c:v>5.788</c:v>
+                  <c:v>5.998</c:v>
                 </c:pt>
                 <c:pt idx="3">
-                  <c:v>7.582</c:v>
+                  <c:v>7.772</c:v>
                 </c:pt>
                 <c:pt idx="4">
-                  <c:v>10.142</c:v>
+                  <c:v>10.425</c:v>
                 </c:pt>
               </c:numCache>
             </c:numRef>
@@ -4066,28 +4065,26 @@
               <a:srgbClr val="D17B28"/>
             </a:solidFill>
           </c:spPr>
-          <c:marker>
-            <c:symbol val="none"/>
-          </c:marker>
+          <c:invertIfNegative val="0"/>
           <c:cat>
             <c:strRef>
               <c:f>'Chart Data'!$C$2:$C$6</c:f>
               <c:strCache>
                 <c:ptCount val="5"/>
                 <c:pt idx="0">
-                  <c:v>80×46</c:v>
+                  <c:v>0.7%</c:v>
                 </c:pt>
                 <c:pt idx="1">
-                  <c:v>160×90</c:v>
+                  <c:v>2.8%</c:v>
                 </c:pt>
                 <c:pt idx="2">
-                  <c:v>320×180</c:v>
+                  <c:v>11.1%</c:v>
                 </c:pt>
                 <c:pt idx="3">
-                  <c:v>480×270</c:v>
+                  <c:v>25.0%</c:v>
                 </c:pt>
                 <c:pt idx="4">
-                  <c:v>640×360</c:v>
+                  <c:v>44.4%</c:v>
                 </c:pt>
               </c:strCache>
             </c:strRef>
@@ -4099,19 +4096,19 @@
                 <c:formatCode>General</c:formatCode>
                 <c:ptCount val="5"/>
                 <c:pt idx="0">
-                  <c:v>6.285</c:v>
+                  <c:v>6.364</c:v>
                 </c:pt>
                 <c:pt idx="1">
-                  <c:v>6.557</c:v>
+                  <c:v>6.728</c:v>
                 </c:pt>
                 <c:pt idx="2">
-                  <c:v>7.717</c:v>
+                  <c:v>7.839</c:v>
                 </c:pt>
                 <c:pt idx="3">
-                  <c:v>9.519</c:v>
+                  <c:v>9.655</c:v>
                 </c:pt>
                 <c:pt idx="4">
-                  <c:v>12.09</c:v>
+                  <c:v>12.193</c:v>
                 </c:pt>
               </c:numCache>
             </c:numRef>
@@ -4128,28 +4125,26 @@
               <a:srgbClr val="536675"/>
             </a:solidFill>
           </c:spPr>
-          <c:marker>
-            <c:symbol val="none"/>
-          </c:marker>
+          <c:invertIfNegative val="0"/>
           <c:cat>
             <c:strRef>
               <c:f>'Chart Data'!$E$2:$E$6</c:f>
               <c:strCache>
                 <c:ptCount val="5"/>
                 <c:pt idx="0">
-                  <c:v>80×46</c:v>
+                  <c:v>0.7%</c:v>
                 </c:pt>
                 <c:pt idx="1">
-                  <c:v>160×90</c:v>
+                  <c:v>2.8%</c:v>
                 </c:pt>
                 <c:pt idx="2">
-                  <c:v>320×180</c:v>
+                  <c:v>11.1%</c:v>
                 </c:pt>
                 <c:pt idx="3">
-                  <c:v>480×270</c:v>
+                  <c:v>25.0%</c:v>
                 </c:pt>
                 <c:pt idx="4">
-                  <c:v>640×360</c:v>
+                  <c:v>44.4%</c:v>
                 </c:pt>
               </c:strCache>
             </c:strRef>
@@ -4161,19 +4156,19 @@
                 <c:formatCode>General</c:formatCode>
                 <c:ptCount val="5"/>
                 <c:pt idx="0">
-                  <c:v>10.763</c:v>
+                  <c:v>11.187</c:v>
                 </c:pt>
                 <c:pt idx="1">
-                  <c:v>10.764</c:v>
+                  <c:v>11.022</c:v>
                 </c:pt>
                 <c:pt idx="2">
-                  <c:v>10.774</c:v>
+                  <c:v>11.144</c:v>
                 </c:pt>
                 <c:pt idx="3">
-                  <c:v>10.771</c:v>
+                  <c:v>11.042</c:v>
                 </c:pt>
                 <c:pt idx="4">
-                  <c:v>10.774</c:v>
+                  <c:v>11.087</c:v>
                 </c:pt>
               </c:numCache>
             </c:numRef>
@@ -4201,9 +4196,11 @@
           <c:showBubbleSize val="0"/>
           <c:showLeaderLines val="0"/>
         </c:dLbls>
+        <c:gapWidth val="75"/>
+        <c:overlap val="0"/>
         <c:axId val="48650112"/>
         <c:axId val="48672768"/>
-      </c:lineChart>
+      </c:barChart>
       <c:catAx>
         <c:axId val="48650112"/>
         <c:scaling>
@@ -4270,7 +4267,7 @@
                     <a:ea typeface="Arial"/>
                     <a:cs typeface="Arial"/>
                   </a:rPr>
-                  <a:t>p50 latency (ms)</a:t>
+                  <a:t>Mean latency (ms)</a:t>
                 </a:r>
               </a:p>
             </c:rich>
@@ -4381,7 +4378,7 @@
           <p:cNvPr id="5" name="">
             <a:extLst xmlns:a="http://schemas.openxmlformats.org/drawingml/2006/main">
               <a:ext uri="{FF2B5EF4-FFF2-40B4-BE49-F238E27FC236}">
-                <a16:creationId xmlns:a16="http://schemas.microsoft.com/office/drawing/2014/main" id="{B702EEB3-788F-4ED5-A664-9F5AE4022D9C}"/>
+                <a16:creationId xmlns:a16="http://schemas.microsoft.com/office/drawing/2014/main" id="{2E13C21E-6624-42DF-AEB2-718C3465DFA6}"/>
               </a:ext>
             </a:extLst>
           </p:cNvPr>
@@ -4439,7 +4436,7 @@
           <p:cNvPr id="2" name="">
             <a:extLst xmlns:a="http://schemas.openxmlformats.org/drawingml/2006/main">
               <a:ext uri="{FF2B5EF4-FFF2-40B4-BE49-F238E27FC236}">
-                <a16:creationId xmlns:a16="http://schemas.microsoft.com/office/drawing/2014/main" id="{90CBC617-9461-4608-931D-E22E3F48184A}"/>
+                <a16:creationId xmlns:a16="http://schemas.microsoft.com/office/drawing/2014/main" id="{7CD29BAD-BEA0-4E61-8C5F-AD18BFF3EC9D}"/>
               </a:ext>
             </a:extLst>
           </p:cNvPr>
@@ -4484,7 +4481,7 @@
           <p:cNvPr id="3" name="">
             <a:extLst xmlns:a="http://schemas.openxmlformats.org/drawingml/2006/main">
               <a:ext uri="{FF2B5EF4-FFF2-40B4-BE49-F238E27FC236}">
-                <a16:creationId xmlns:a16="http://schemas.microsoft.com/office/drawing/2014/main" id="{505695AA-4798-4420-8907-D01242B9F5B7}"/>
+                <a16:creationId xmlns:a16="http://schemas.microsoft.com/office/drawing/2014/main" id="{FEFA931A-CA88-4832-AA76-4C28C06386B6}"/>
               </a:ext>
             </a:extLst>
           </p:cNvPr>
@@ -4529,7 +4526,7 @@
           <p:cNvPr id="4" name="">
             <a:extLst xmlns:a="http://schemas.openxmlformats.org/drawingml/2006/main">
               <a:ext uri="{FF2B5EF4-FFF2-40B4-BE49-F238E27FC236}">
-                <a16:creationId xmlns:a16="http://schemas.microsoft.com/office/drawing/2014/main" id="{51208E2D-864E-4107-8115-EAD74B3F334D}"/>
+                <a16:creationId xmlns:a16="http://schemas.microsoft.com/office/drawing/2014/main" id="{1D3680A6-40DF-46D1-A20E-732F3A6094FD}"/>
               </a:ext>
             </a:extLst>
           </p:cNvPr>
@@ -4572,7 +4569,7 @@
     </p:spTree>
     <p:extLst>
       <p:ext uri="{BB962C8B-B14F-4D97-AF65-F5344CB8AC3E}">
-        <p14:creationId xmlns:p14="http://schemas.microsoft.com/office/powerpoint/2010/main" val="854278163"/>
+        <p14:creationId xmlns:p14="http://schemas.microsoft.com/office/powerpoint/2010/main" val="2146358697"/>
       </p:ext>
     </p:extLst>
   </p:cSld>
@@ -4603,7 +4600,7 @@
           <p:cNvPr id="29" name="">
             <a:extLst xmlns:a="http://schemas.openxmlformats.org/drawingml/2006/main">
               <a:ext uri="{FF2B5EF4-FFF2-40B4-BE49-F238E27FC236}">
-                <a16:creationId xmlns:a16="http://schemas.microsoft.com/office/drawing/2014/main" id="{BDC6E868-0ABE-43EA-8F28-3175E0C03650}"/>
+                <a16:creationId xmlns:a16="http://schemas.microsoft.com/office/drawing/2014/main" id="{F2342A68-7BEA-4C73-B1FC-90195014725F}"/>
               </a:ext>
             </a:extLst>
           </p:cNvPr>
@@ -4648,7 +4645,7 @@
           <p:cNvPr id="2" name="">
             <a:extLst xmlns:a="http://schemas.openxmlformats.org/drawingml/2006/main">
               <a:ext uri="{FF2B5EF4-FFF2-40B4-BE49-F238E27FC236}">
-                <a16:creationId xmlns:a16="http://schemas.microsoft.com/office/drawing/2014/main" id="{963D368B-C1B2-4AF4-9FC7-E0E674E97E68}"/>
+                <a16:creationId xmlns:a16="http://schemas.microsoft.com/office/drawing/2014/main" id="{3A0C2060-EF3F-428E-BE8F-29ABCC8079BA}"/>
               </a:ext>
             </a:extLst>
           </p:cNvPr>
@@ -4678,7 +4675,7 @@
           <p:cNvPr id="3" name="">
             <a:extLst xmlns:a="http://schemas.openxmlformats.org/drawingml/2006/main">
               <a:ext uri="{FF2B5EF4-FFF2-40B4-BE49-F238E27FC236}">
-                <a16:creationId xmlns:a16="http://schemas.microsoft.com/office/drawing/2014/main" id="{B80E5FCA-344B-46D5-91DA-379C5E5FBD58}"/>
+                <a16:creationId xmlns:a16="http://schemas.microsoft.com/office/drawing/2014/main" id="{F51C1250-86A7-42FD-A74C-318B1A6D90B2}"/>
               </a:ext>
             </a:extLst>
           </p:cNvPr>
@@ -4723,7 +4720,7 @@
           <p:cNvPr id="4" name="">
             <a:extLst xmlns:a="http://schemas.openxmlformats.org/drawingml/2006/main">
               <a:ext uri="{FF2B5EF4-FFF2-40B4-BE49-F238E27FC236}">
-                <a16:creationId xmlns:a16="http://schemas.microsoft.com/office/drawing/2014/main" id="{5F582A2A-8936-4FBD-807B-281AF94932C5}"/>
+                <a16:creationId xmlns:a16="http://schemas.microsoft.com/office/drawing/2014/main" id="{494ADCC3-40B7-4C42-8468-07442D492241}"/>
               </a:ext>
             </a:extLst>
           </p:cNvPr>
@@ -4768,7 +4765,7 @@
           <p:cNvPr id="5" name="">
             <a:extLst xmlns:a="http://schemas.openxmlformats.org/drawingml/2006/main">
               <a:ext uri="{FF2B5EF4-FFF2-40B4-BE49-F238E27FC236}">
-                <a16:creationId xmlns:a16="http://schemas.microsoft.com/office/drawing/2014/main" id="{258DDC34-B3BC-4469-AF95-2BB26E1116D6}"/>
+                <a16:creationId xmlns:a16="http://schemas.microsoft.com/office/drawing/2014/main" id="{49D77F94-29ED-400B-A453-11CC813D6294}"/>
               </a:ext>
             </a:extLst>
           </p:cNvPr>
@@ -4813,7 +4810,7 @@
           <p:cNvPr id="6" name="">
             <a:extLst xmlns:a="http://schemas.openxmlformats.org/drawingml/2006/main">
               <a:ext uri="{FF2B5EF4-FFF2-40B4-BE49-F238E27FC236}">
-                <a16:creationId xmlns:a16="http://schemas.microsoft.com/office/drawing/2014/main" id="{C9D850A1-00A4-4D10-94DA-7D728B0A12D3}"/>
+                <a16:creationId xmlns:a16="http://schemas.microsoft.com/office/drawing/2014/main" id="{619C3095-4850-437E-AFC6-E6A4748B5969}"/>
               </a:ext>
             </a:extLst>
           </p:cNvPr>
@@ -4845,7 +4842,7 @@
           <p:cNvPr id="7" name="">
             <a:extLst xmlns:a="http://schemas.openxmlformats.org/drawingml/2006/main">
               <a:ext uri="{FF2B5EF4-FFF2-40B4-BE49-F238E27FC236}">
-                <a16:creationId xmlns:a16="http://schemas.microsoft.com/office/drawing/2014/main" id="{5A3BB536-CAD8-468B-B01B-4CC603D0A2D2}"/>
+                <a16:creationId xmlns:a16="http://schemas.microsoft.com/office/drawing/2014/main" id="{A9C0645E-4270-438E-93E4-E751DA765FE5}"/>
               </a:ext>
             </a:extLst>
           </p:cNvPr>
@@ -4877,7 +4874,7 @@
           <p:cNvPr id="8" name="">
             <a:extLst xmlns:a="http://schemas.openxmlformats.org/drawingml/2006/main">
               <a:ext uri="{FF2B5EF4-FFF2-40B4-BE49-F238E27FC236}">
-                <a16:creationId xmlns:a16="http://schemas.microsoft.com/office/drawing/2014/main" id="{2E94EE25-AF36-45F7-B826-CE92676C3B98}"/>
+                <a16:creationId xmlns:a16="http://schemas.microsoft.com/office/drawing/2014/main" id="{F3190E43-5B34-4E07-B60B-279E7956421B}"/>
               </a:ext>
             </a:extLst>
           </p:cNvPr>
@@ -4909,7 +4906,7 @@
           <p:cNvPr id="9" name="">
             <a:extLst xmlns:a="http://schemas.openxmlformats.org/drawingml/2006/main">
               <a:ext uri="{FF2B5EF4-FFF2-40B4-BE49-F238E27FC236}">
-                <a16:creationId xmlns:a16="http://schemas.microsoft.com/office/drawing/2014/main" id="{F051A50A-5917-4904-B933-2DBF1564C133}"/>
+                <a16:creationId xmlns:a16="http://schemas.microsoft.com/office/drawing/2014/main" id="{C2639C88-B470-4ED6-A748-2D8F318FDD34}"/>
               </a:ext>
             </a:extLst>
           </p:cNvPr>
@@ -4954,7 +4951,7 @@
           <p:cNvPr id="10" name="">
             <a:extLst xmlns:a="http://schemas.openxmlformats.org/drawingml/2006/main">
               <a:ext uri="{FF2B5EF4-FFF2-40B4-BE49-F238E27FC236}">
-                <a16:creationId xmlns:a16="http://schemas.microsoft.com/office/drawing/2014/main" id="{76A16AD5-47D6-4B84-BB44-83E58E969E4C}"/>
+                <a16:creationId xmlns:a16="http://schemas.microsoft.com/office/drawing/2014/main" id="{87EA1317-F091-430B-917A-EE574FF9E998}"/>
               </a:ext>
             </a:extLst>
           </p:cNvPr>
@@ -4984,7 +4981,7 @@
           <p:cNvPr id="11" name="">
             <a:extLst xmlns:a="http://schemas.openxmlformats.org/drawingml/2006/main">
               <a:ext uri="{FF2B5EF4-FFF2-40B4-BE49-F238E27FC236}">
-                <a16:creationId xmlns:a16="http://schemas.microsoft.com/office/drawing/2014/main" id="{47C6D9E7-2744-46C6-A902-4B1E78B92A6B}"/>
+                <a16:creationId xmlns:a16="http://schemas.microsoft.com/office/drawing/2014/main" id="{9665462C-2ED9-4DE6-AC5D-93E24F1F5057}"/>
               </a:ext>
             </a:extLst>
           </p:cNvPr>
@@ -5029,7 +5026,7 @@
           <p:cNvPr id="12" name="">
             <a:extLst xmlns:a="http://schemas.openxmlformats.org/drawingml/2006/main">
               <a:ext uri="{FF2B5EF4-FFF2-40B4-BE49-F238E27FC236}">
-                <a16:creationId xmlns:a16="http://schemas.microsoft.com/office/drawing/2014/main" id="{D4B3CE53-AB77-42B9-BF6F-A1FF4D35F364}"/>
+                <a16:creationId xmlns:a16="http://schemas.microsoft.com/office/drawing/2014/main" id="{C3900C90-1CB1-4AE2-A610-6AC1DA6D3070}"/>
               </a:ext>
             </a:extLst>
           </p:cNvPr>
@@ -5061,7 +5058,7 @@
           <p:cNvPr id="13" name="">
             <a:extLst xmlns:a="http://schemas.openxmlformats.org/drawingml/2006/main">
               <a:ext uri="{FF2B5EF4-FFF2-40B4-BE49-F238E27FC236}">
-                <a16:creationId xmlns:a16="http://schemas.microsoft.com/office/drawing/2014/main" id="{87562EA8-9B66-4A36-9172-8ED74E57A425}"/>
+                <a16:creationId xmlns:a16="http://schemas.microsoft.com/office/drawing/2014/main" id="{001C72FD-F894-4C3A-B7A7-B75C28D0FC8B}"/>
               </a:ext>
             </a:extLst>
           </p:cNvPr>
@@ -5093,7 +5090,7 @@
           <p:cNvPr id="14" name="">
             <a:extLst xmlns:a="http://schemas.openxmlformats.org/drawingml/2006/main">
               <a:ext uri="{FF2B5EF4-FFF2-40B4-BE49-F238E27FC236}">
-                <a16:creationId xmlns:a16="http://schemas.microsoft.com/office/drawing/2014/main" id="{A67712F1-B510-41E9-9AF8-609D3DDFA740}"/>
+                <a16:creationId xmlns:a16="http://schemas.microsoft.com/office/drawing/2014/main" id="{47FDF968-FD55-4FDB-860E-2F2DF91EAEE9}"/>
               </a:ext>
             </a:extLst>
           </p:cNvPr>
@@ -5125,7 +5122,7 @@
           <p:cNvPr id="15" name="">
             <a:extLst xmlns:a="http://schemas.openxmlformats.org/drawingml/2006/main">
               <a:ext uri="{FF2B5EF4-FFF2-40B4-BE49-F238E27FC236}">
-                <a16:creationId xmlns:a16="http://schemas.microsoft.com/office/drawing/2014/main" id="{4DCA1DFE-0BD8-4BF2-8E10-62D61FF71DA4}"/>
+                <a16:creationId xmlns:a16="http://schemas.microsoft.com/office/drawing/2014/main" id="{A5269646-205F-42B9-B516-37C9328C28FE}"/>
               </a:ext>
             </a:extLst>
           </p:cNvPr>
@@ -5170,7 +5167,7 @@
           <p:cNvPr id="16" name="">
             <a:extLst xmlns:a="http://schemas.openxmlformats.org/drawingml/2006/main">
               <a:ext uri="{FF2B5EF4-FFF2-40B4-BE49-F238E27FC236}">
-                <a16:creationId xmlns:a16="http://schemas.microsoft.com/office/drawing/2014/main" id="{0BD151D0-A61D-478A-BAD6-EF580F52D5F8}"/>
+                <a16:creationId xmlns:a16="http://schemas.microsoft.com/office/drawing/2014/main" id="{AFD310D2-FCA6-4C9D-8921-0F925F455D24}"/>
               </a:ext>
             </a:extLst>
           </p:cNvPr>
@@ -5200,7 +5197,7 @@
           <p:cNvPr id="17" name="">
             <a:extLst xmlns:a="http://schemas.openxmlformats.org/drawingml/2006/main">
               <a:ext uri="{FF2B5EF4-FFF2-40B4-BE49-F238E27FC236}">
-                <a16:creationId xmlns:a16="http://schemas.microsoft.com/office/drawing/2014/main" id="{6BD5CB58-5E54-4C14-9265-31254BFB8324}"/>
+                <a16:creationId xmlns:a16="http://schemas.microsoft.com/office/drawing/2014/main" id="{7908D3BC-513B-47F7-85A6-1C13AC7B79FC}"/>
               </a:ext>
             </a:extLst>
           </p:cNvPr>
@@ -5245,7 +5242,7 @@
           <p:cNvPr id="18" name="">
             <a:extLst xmlns:a="http://schemas.openxmlformats.org/drawingml/2006/main">
               <a:ext uri="{FF2B5EF4-FFF2-40B4-BE49-F238E27FC236}">
-                <a16:creationId xmlns:a16="http://schemas.microsoft.com/office/drawing/2014/main" id="{EF66A9D0-FEDB-45BB-A927-8283A588D47B}"/>
+                <a16:creationId xmlns:a16="http://schemas.microsoft.com/office/drawing/2014/main" id="{E86F1033-B061-4284-BCE4-63F2F796B8C9}"/>
               </a:ext>
             </a:extLst>
           </p:cNvPr>
@@ -5277,7 +5274,7 @@
           <p:cNvPr id="19" name="">
             <a:extLst xmlns:a="http://schemas.openxmlformats.org/drawingml/2006/main">
               <a:ext uri="{FF2B5EF4-FFF2-40B4-BE49-F238E27FC236}">
-                <a16:creationId xmlns:a16="http://schemas.microsoft.com/office/drawing/2014/main" id="{EBC87498-D935-49D8-B5C6-0EF901C55E3B}"/>
+                <a16:creationId xmlns:a16="http://schemas.microsoft.com/office/drawing/2014/main" id="{D057D32E-E5BB-4108-85FB-05D87F533077}"/>
               </a:ext>
             </a:extLst>
           </p:cNvPr>
@@ -5309,7 +5306,7 @@
           <p:cNvPr id="20" name="">
             <a:extLst xmlns:a="http://schemas.openxmlformats.org/drawingml/2006/main">
               <a:ext uri="{FF2B5EF4-FFF2-40B4-BE49-F238E27FC236}">
-                <a16:creationId xmlns:a16="http://schemas.microsoft.com/office/drawing/2014/main" id="{AEB8E07C-D950-4B18-BEFF-DF7093A532EB}"/>
+                <a16:creationId xmlns:a16="http://schemas.microsoft.com/office/drawing/2014/main" id="{BEA68B25-A12D-4352-A6F1-80A39914F1EC}"/>
               </a:ext>
             </a:extLst>
           </p:cNvPr>
@@ -5341,7 +5338,7 @@
           <p:cNvPr id="21" name="">
             <a:extLst xmlns:a="http://schemas.openxmlformats.org/drawingml/2006/main">
               <a:ext uri="{FF2B5EF4-FFF2-40B4-BE49-F238E27FC236}">
-                <a16:creationId xmlns:a16="http://schemas.microsoft.com/office/drawing/2014/main" id="{C2C1B058-7314-45A0-8A5C-422A6267282B}"/>
+                <a16:creationId xmlns:a16="http://schemas.microsoft.com/office/drawing/2014/main" id="{5635C5EA-BEAC-41CF-B2AE-F0B4C25C1DB2}"/>
               </a:ext>
             </a:extLst>
           </p:cNvPr>
@@ -5386,7 +5383,7 @@
           <p:cNvPr id="22" name="">
             <a:extLst xmlns:a="http://schemas.openxmlformats.org/drawingml/2006/main">
               <a:ext uri="{FF2B5EF4-FFF2-40B4-BE49-F238E27FC236}">
-                <a16:creationId xmlns:a16="http://schemas.microsoft.com/office/drawing/2014/main" id="{C478FE27-51BA-490B-AAA7-43752D30EEBD}"/>
+                <a16:creationId xmlns:a16="http://schemas.microsoft.com/office/drawing/2014/main" id="{0EB1CF7F-D6BC-4FB3-8615-147F54698B48}"/>
               </a:ext>
             </a:extLst>
           </p:cNvPr>
@@ -5416,7 +5413,7 @@
           <p:cNvPr id="23" name="">
             <a:extLst xmlns:a="http://schemas.openxmlformats.org/drawingml/2006/main">
               <a:ext uri="{FF2B5EF4-FFF2-40B4-BE49-F238E27FC236}">
-                <a16:creationId xmlns:a16="http://schemas.microsoft.com/office/drawing/2014/main" id="{96447E2F-E531-45D9-8EA8-8E97999F8A82}"/>
+                <a16:creationId xmlns:a16="http://schemas.microsoft.com/office/drawing/2014/main" id="{1B34E83C-893A-445E-B8D8-2A9D6FE34E05}"/>
               </a:ext>
             </a:extLst>
           </p:cNvPr>
@@ -5446,7 +5443,7 @@
           <p:cNvPr id="24" name="">
             <a:extLst xmlns:a="http://schemas.openxmlformats.org/drawingml/2006/main">
               <a:ext uri="{FF2B5EF4-FFF2-40B4-BE49-F238E27FC236}">
-                <a16:creationId xmlns:a16="http://schemas.microsoft.com/office/drawing/2014/main" id="{2FE41374-00E9-408C-929C-0DFE67C78FCC}"/>
+                <a16:creationId xmlns:a16="http://schemas.microsoft.com/office/drawing/2014/main" id="{FF1206A2-0750-4E0F-BAC1-0D1213BFFCCA}"/>
               </a:ext>
             </a:extLst>
           </p:cNvPr>
@@ -5491,7 +5488,7 @@
           <p:cNvPr id="25" name="">
             <a:extLst xmlns:a="http://schemas.openxmlformats.org/drawingml/2006/main">
               <a:ext uri="{FF2B5EF4-FFF2-40B4-BE49-F238E27FC236}">
-                <a16:creationId xmlns:a16="http://schemas.microsoft.com/office/drawing/2014/main" id="{DB3650CC-83E2-4DE5-8A5A-DD1A28AE1E8A}"/>
+                <a16:creationId xmlns:a16="http://schemas.microsoft.com/office/drawing/2014/main" id="{B26119EE-F3DC-4E1F-A900-EE9700DA02BB}"/>
               </a:ext>
             </a:extLst>
           </p:cNvPr>
@@ -5536,7 +5533,7 @@
           <p:cNvPr id="26" name="">
             <a:extLst xmlns:a="http://schemas.openxmlformats.org/drawingml/2006/main">
               <a:ext uri="{FF2B5EF4-FFF2-40B4-BE49-F238E27FC236}">
-                <a16:creationId xmlns:a16="http://schemas.microsoft.com/office/drawing/2014/main" id="{6C777F20-8D32-475F-9136-9D2CC7589C47}"/>
+                <a16:creationId xmlns:a16="http://schemas.microsoft.com/office/drawing/2014/main" id="{37834E2D-E57D-451C-92C4-E2F5C0B2465C}"/>
               </a:ext>
             </a:extLst>
           </p:cNvPr>
@@ -5581,7 +5578,7 @@
           <p:cNvPr id="27" name="">
             <a:extLst xmlns:a="http://schemas.openxmlformats.org/drawingml/2006/main">
               <a:ext uri="{FF2B5EF4-FFF2-40B4-BE49-F238E27FC236}">
-                <a16:creationId xmlns:a16="http://schemas.microsoft.com/office/drawing/2014/main" id="{E888F68B-8DD1-432E-A474-A4D939F68FEE}"/>
+                <a16:creationId xmlns:a16="http://schemas.microsoft.com/office/drawing/2014/main" id="{092AAC4B-E05D-4095-9239-04E845912FD5}"/>
               </a:ext>
             </a:extLst>
           </p:cNvPr>
@@ -5626,7 +5623,7 @@
           <p:cNvPr id="28" name="">
             <a:extLst xmlns:a="http://schemas.openxmlformats.org/drawingml/2006/main">
               <a:ext uri="{FF2B5EF4-FFF2-40B4-BE49-F238E27FC236}">
-                <a16:creationId xmlns:a16="http://schemas.microsoft.com/office/drawing/2014/main" id="{EEBC1B98-7CBB-49B8-8AB8-0E0AA383513B}"/>
+                <a16:creationId xmlns:a16="http://schemas.microsoft.com/office/drawing/2014/main" id="{9A13D29C-B7B0-40AA-BBCA-3C41F91A1714}"/>
               </a:ext>
             </a:extLst>
           </p:cNvPr>
@@ -5669,7 +5666,7 @@
     </p:spTree>
     <p:extLst>
       <p:ext uri="{BB962C8B-B14F-4D97-AF65-F5344CB8AC3E}">
-        <p14:creationId xmlns:p14="http://schemas.microsoft.com/office/powerpoint/2010/main" val="1703972598"/>
+        <p14:creationId xmlns:p14="http://schemas.microsoft.com/office/powerpoint/2010/main" val="652198131"/>
       </p:ext>
     </p:extLst>
   </p:cSld>
@@ -5697,10 +5694,10 @@
       </p:grpSpPr>
       <p:sp>
         <p:nvSpPr>
-          <p:cNvPr id="22" name="">
-            <a:extLst xmlns:a="http://schemas.openxmlformats.org/drawingml/2006/main">
-              <a:ext uri="{FF2B5EF4-FFF2-40B4-BE49-F238E27FC236}">
-                <a16:creationId xmlns:a16="http://schemas.microsoft.com/office/drawing/2014/main" id="{3FEBD178-71E8-4BA1-AAC4-A87C35AEBE6A}"/>
+          <p:cNvPr id="15" name="">
+            <a:extLst xmlns:a="http://schemas.openxmlformats.org/drawingml/2006/main">
+              <a:ext uri="{FF2B5EF4-FFF2-40B4-BE49-F238E27FC236}">
+                <a16:creationId xmlns:a16="http://schemas.microsoft.com/office/drawing/2014/main" id="{DBFA02D4-34CA-46C8-A78A-8714A0C1ED8E}"/>
               </a:ext>
             </a:extLst>
           </p:cNvPr>
@@ -5735,7 +5732,7 @@
                 <a:ea typeface="Arial"/>
                 <a:cs typeface="Arial"/>
               </a:rPr>
-              <a:t>Budget-based reconstruction selection</a:t>
+              <a:t>Adapt the full-resolution region to available time</a:t>
             </a:r>
           </a:p>
         </p:txBody>
@@ -5745,7 +5742,7 @@
           <p:cNvPr id="2" name="">
             <a:extLst xmlns:a="http://schemas.openxmlformats.org/drawingml/2006/main">
               <a:ext uri="{FF2B5EF4-FFF2-40B4-BE49-F238E27FC236}">
-                <a16:creationId xmlns:a16="http://schemas.microsoft.com/office/drawing/2014/main" id="{47D37D8F-E06C-49CC-BB56-BFB5B82F3C8C}"/>
+                <a16:creationId xmlns:a16="http://schemas.microsoft.com/office/drawing/2014/main" id="{9BA0FC7C-ACFA-4C5C-A296-A52C240328D4}"/>
               </a:ext>
             </a:extLst>
           </p:cNvPr>
@@ -5775,7 +5772,7 @@
           <p:cNvPr id="3" name="">
             <a:extLst xmlns:a="http://schemas.openxmlformats.org/drawingml/2006/main">
               <a:ext uri="{FF2B5EF4-FFF2-40B4-BE49-F238E27FC236}">
-                <a16:creationId xmlns:a16="http://schemas.microsoft.com/office/drawing/2014/main" id="{7BEC055D-265A-483B-90D1-B446BDBD8F00}"/>
+                <a16:creationId xmlns:a16="http://schemas.microsoft.com/office/drawing/2014/main" id="{B3E98372-ACD3-468C-9EDD-9A8BAD3749E9}"/>
               </a:ext>
             </a:extLst>
           </p:cNvPr>
@@ -5820,7 +5817,7 @@
           <p:cNvPr id="4" name="">
             <a:extLst xmlns:a="http://schemas.openxmlformats.org/drawingml/2006/main">
               <a:ext uri="{FF2B5EF4-FFF2-40B4-BE49-F238E27FC236}">
-                <a16:creationId xmlns:a16="http://schemas.microsoft.com/office/drawing/2014/main" id="{2C7E3E80-5C4D-432B-A62A-D6391429A799}"/>
+                <a16:creationId xmlns:a16="http://schemas.microsoft.com/office/drawing/2014/main" id="{4D187F60-C43A-467F-B748-ACC026F69998}"/>
               </a:ext>
             </a:extLst>
           </p:cNvPr>
@@ -5831,8 +5828,117 @@
         </p:nvSpPr>
         <p:spPr>
           <a:xfrm xmlns:a="http://schemas.openxmlformats.org/drawingml/2006/main">
-            <a:off x="609600" y="2171700"/>
-            <a:ext cx="1943100" cy="1219200"/>
+            <a:off x="609600" y="2219325"/>
+            <a:ext cx="3333750" cy="552450"/>
+          </a:xfrm>
+          <a:prstGeom xmlns:a="http://schemas.openxmlformats.org/drawingml/2006/main" prst="rect">
+            <a:avLst/>
+          </a:prstGeom>
+          <a:noFill xmlns:a="http://schemas.openxmlformats.org/drawingml/2006/main"/>
+          <a:ln xmlns:a="http://schemas.openxmlformats.org/drawingml/2006/main" w="0">
+            <a:noFill/>
+          </a:ln>
+        </p:spPr>
+        <p:txBody>
+          <a:bodyPr xmlns:a="http://schemas.openxmlformats.org/drawingml/2006/main" lIns="0" tIns="0" rIns="0" bIns="0"/>
+          <a:lstStyle xmlns:a="http://schemas.openxmlformats.org/drawingml/2006/main"/>
+          <a:p xmlns:a="http://schemas.openxmlformats.org/drawingml/2006/main">
+            <a:r>
+              <a:rPr sz="2925" b="1">
+                <a:solidFill>
+                  <a:srgbClr val="086B93"/>
+                </a:solidFill>
+                <a:latin typeface="Arial"/>
+                <a:ea typeface="Arial"/>
+                <a:cs typeface="Arial"/>
+              </a:rPr>
+              <a:t>More time</a:t>
+            </a:r>
+          </a:p>
+        </p:txBody>
+      </p:sp>
+      <p:sp>
+        <p:nvSpPr>
+          <p:cNvPr id="5" name="">
+            <a:extLst xmlns:a="http://schemas.openxmlformats.org/drawingml/2006/main">
+              <a:ext uri="{FF2B5EF4-FFF2-40B4-BE49-F238E27FC236}">
+                <a16:creationId xmlns:a16="http://schemas.microsoft.com/office/drawing/2014/main" id="{03D79613-A731-4B8D-9B50-ADB54B522186}"/>
+              </a:ext>
+            </a:extLst>
+          </p:cNvPr>
+          <p:cNvSpPr>
+            <a:spLocks xmlns:a="http://schemas.openxmlformats.org/drawingml/2006/main" noGrp="1"/>
+          </p:cNvSpPr>
+          <p:nvPr/>
+        </p:nvSpPr>
+        <p:spPr>
+          <a:xfrm xmlns:a="http://schemas.openxmlformats.org/drawingml/2006/main">
+            <a:off x="3238500" y="2362200"/>
+            <a:ext cx="1333500" cy="238125"/>
+          </a:xfrm>
+          <a:prstGeom xmlns:a="http://schemas.openxmlformats.org/drawingml/2006/main" prst="rightArrow">
+            <a:avLst/>
+          </a:prstGeom>
+          <a:solidFill xmlns:a="http://schemas.openxmlformats.org/drawingml/2006/main">
+            <a:srgbClr val="086B93"/>
+          </a:solidFill>
+          <a:ln xmlns:a="http://schemas.openxmlformats.org/drawingml/2006/main" w="0">
+            <a:solidFill>
+              <a:srgbClr val="086B93"/>
+            </a:solidFill>
+          </a:ln>
+        </p:spPr>
+      </p:sp>
+      <p:sp>
+        <p:nvSpPr>
+          <p:cNvPr id="6" name="">
+            <a:extLst xmlns:a="http://schemas.openxmlformats.org/drawingml/2006/main">
+              <a:ext uri="{FF2B5EF4-FFF2-40B4-BE49-F238E27FC236}">
+                <a16:creationId xmlns:a16="http://schemas.microsoft.com/office/drawing/2014/main" id="{9C7D5C41-6B5B-49AB-B907-3D9A0CE7B2DD}"/>
+              </a:ext>
+            </a:extLst>
+          </p:cNvPr>
+          <p:cNvSpPr>
+            <a:spLocks xmlns:a="http://schemas.openxmlformats.org/drawingml/2006/main" noGrp="1"/>
+          </p:cNvSpPr>
+          <p:nvPr/>
+        </p:nvSpPr>
+        <p:spPr>
+          <a:xfrm xmlns:a="http://schemas.openxmlformats.org/drawingml/2006/main">
+            <a:off x="5095875" y="1714500"/>
+            <a:ext cx="6191250" cy="1476375"/>
+          </a:xfrm>
+          <a:prstGeom xmlns:a="http://schemas.openxmlformats.org/drawingml/2006/main" prst="rect">
+            <a:avLst/>
+          </a:prstGeom>
+          <a:solidFill xmlns:a="http://schemas.openxmlformats.org/drawingml/2006/main">
+            <a:srgbClr val="EAF3F6"/>
+          </a:solidFill>
+          <a:ln xmlns:a="http://schemas.openxmlformats.org/drawingml/2006/main" w="14288">
+            <a:solidFill>
+              <a:srgbClr val="D7DFE5"/>
+            </a:solidFill>
+          </a:ln>
+        </p:spPr>
+      </p:sp>
+      <p:sp>
+        <p:nvSpPr>
+          <p:cNvPr id="7" name="">
+            <a:extLst xmlns:a="http://schemas.openxmlformats.org/drawingml/2006/main">
+              <a:ext uri="{FF2B5EF4-FFF2-40B4-BE49-F238E27FC236}">
+                <a16:creationId xmlns:a16="http://schemas.microsoft.com/office/drawing/2014/main" id="{FF3CF46F-630C-475B-BC6C-2F1EE723C620}"/>
+              </a:ext>
+            </a:extLst>
+          </p:cNvPr>
+          <p:cNvSpPr>
+            <a:spLocks xmlns:a="http://schemas.openxmlformats.org/drawingml/2006/main" noGrp="1"/>
+          </p:cNvSpPr>
+          <p:nvPr/>
+        </p:nvSpPr>
+        <p:spPr>
+          <a:xfrm xmlns:a="http://schemas.openxmlformats.org/drawingml/2006/main">
+            <a:off x="6381750" y="1905000"/>
+            <a:ext cx="3619500" cy="1095375"/>
           </a:xfrm>
           <a:prstGeom xmlns:a="http://schemas.openxmlformats.org/drawingml/2006/main" prst="rect">
             <a:avLst/>
@@ -5849,10 +5955,10 @@
       </p:sp>
       <p:sp>
         <p:nvSpPr>
-          <p:cNvPr id="5" name="">
-            <a:extLst xmlns:a="http://schemas.openxmlformats.org/drawingml/2006/main">
-              <a:ext uri="{FF2B5EF4-FFF2-40B4-BE49-F238E27FC236}">
-                <a16:creationId xmlns:a16="http://schemas.microsoft.com/office/drawing/2014/main" id="{7177E0DE-FBD7-4652-A889-CCA2C06C3963}"/>
+          <p:cNvPr id="8" name="">
+            <a:extLst xmlns:a="http://schemas.openxmlformats.org/drawingml/2006/main">
+              <a:ext uri="{FF2B5EF4-FFF2-40B4-BE49-F238E27FC236}">
+                <a16:creationId xmlns:a16="http://schemas.microsoft.com/office/drawing/2014/main" id="{4F86F205-F6B7-462E-9E8C-49C77D734D92}"/>
               </a:ext>
             </a:extLst>
           </p:cNvPr>
@@ -5863,8 +5969,8 @@
         </p:nvSpPr>
         <p:spPr>
           <a:xfrm xmlns:a="http://schemas.openxmlformats.org/drawingml/2006/main">
-            <a:off x="742950" y="2438400"/>
-            <a:ext cx="1676400" cy="857250"/>
+            <a:off x="6153150" y="3333750"/>
+            <a:ext cx="5286375" cy="428625"/>
           </a:xfrm>
           <a:prstGeom xmlns:a="http://schemas.openxmlformats.org/drawingml/2006/main" prst="rect">
             <a:avLst/>
@@ -5879,38 +5985,25 @@
           <a:lstStyle xmlns:a="http://schemas.openxmlformats.org/drawingml/2006/main"/>
           <a:p xmlns:a="http://schemas.openxmlformats.org/drawingml/2006/main">
             <a:r>
-              <a:rPr sz="1875" b="1">
-                <a:solidFill>
-                  <a:srgbClr val="152D43"/>
+              <a:rPr sz="2175" b="1">
+                <a:solidFill>
+                  <a:srgbClr val="086B93"/>
                 </a:solidFill>
                 <a:latin typeface="Arial"/>
                 <a:ea typeface="Arial"/>
                 <a:cs typeface="Arial"/>
               </a:rPr>
-              <a:t>Inputs ready</a:t>
-            </a:r>
-          </a:p>
-          <a:p xmlns:a="http://schemas.openxmlformats.org/drawingml/2006/main">
-            <a:r>
-              <a:rPr sz="1875" b="1">
-                <a:solidFill>
-                  <a:srgbClr val="152D43"/>
-                </a:solidFill>
-                <a:latin typeface="Arial"/>
-                <a:ea typeface="Arial"/>
-                <a:cs typeface="Arial"/>
-              </a:rPr>
-              <a:t>(after decode)</a:t>
+              <a:t>Larger full-resolution region</a:t>
             </a:r>
           </a:p>
         </p:txBody>
       </p:sp>
       <p:sp>
         <p:nvSpPr>
-          <p:cNvPr id="6" name="">
-            <a:extLst xmlns:a="http://schemas.openxmlformats.org/drawingml/2006/main">
-              <a:ext uri="{FF2B5EF4-FFF2-40B4-BE49-F238E27FC236}">
-                <a16:creationId xmlns:a16="http://schemas.microsoft.com/office/drawing/2014/main" id="{1B9514C7-6A99-4D5A-B695-55FA5F0A55AF}"/>
+          <p:cNvPr id="9" name="">
+            <a:extLst xmlns:a="http://schemas.openxmlformats.org/drawingml/2006/main">
+              <a:ext uri="{FF2B5EF4-FFF2-40B4-BE49-F238E27FC236}">
+                <a16:creationId xmlns:a16="http://schemas.microsoft.com/office/drawing/2014/main" id="{D31AD5F4-5434-4B9A-9AFC-6B654BDC9A48}"/>
               </a:ext>
             </a:extLst>
           </p:cNvPr>
@@ -5921,72 +6014,8 @@
         </p:nvSpPr>
         <p:spPr>
           <a:xfrm xmlns:a="http://schemas.openxmlformats.org/drawingml/2006/main">
-            <a:off x="2590800" y="2686050"/>
-            <a:ext cx="219075" cy="171450"/>
-          </a:xfrm>
-          <a:prstGeom xmlns:a="http://schemas.openxmlformats.org/drawingml/2006/main" prst="rightArrow">
-            <a:avLst/>
-          </a:prstGeom>
-          <a:solidFill xmlns:a="http://schemas.openxmlformats.org/drawingml/2006/main">
-            <a:srgbClr val="086B93"/>
-          </a:solidFill>
-          <a:ln xmlns:a="http://schemas.openxmlformats.org/drawingml/2006/main" w="0">
-            <a:solidFill>
-              <a:srgbClr val="086B93"/>
-            </a:solidFill>
-          </a:ln>
-        </p:spPr>
-      </p:sp>
-      <p:sp>
-        <p:nvSpPr>
-          <p:cNvPr id="7" name="">
-            <a:extLst xmlns:a="http://schemas.openxmlformats.org/drawingml/2006/main">
-              <a:ext uri="{FF2B5EF4-FFF2-40B4-BE49-F238E27FC236}">
-                <a16:creationId xmlns:a16="http://schemas.microsoft.com/office/drawing/2014/main" id="{CDF00EE4-20B5-40F9-B831-B130C24B109F}"/>
-              </a:ext>
-            </a:extLst>
-          </p:cNvPr>
-          <p:cNvSpPr>
-            <a:spLocks xmlns:a="http://schemas.openxmlformats.org/drawingml/2006/main" noGrp="1"/>
-          </p:cNvSpPr>
-          <p:nvPr/>
-        </p:nvSpPr>
-        <p:spPr>
-          <a:xfrm xmlns:a="http://schemas.openxmlformats.org/drawingml/2006/main">
-            <a:off x="2819400" y="2171700"/>
-            <a:ext cx="1943100" cy="1219200"/>
-          </a:xfrm>
-          <a:prstGeom xmlns:a="http://schemas.openxmlformats.org/drawingml/2006/main" prst="rect">
-            <a:avLst/>
-          </a:prstGeom>
-          <a:solidFill xmlns:a="http://schemas.openxmlformats.org/drawingml/2006/main">
-            <a:srgbClr val="FFFFFF"/>
-          </a:solidFill>
-          <a:ln xmlns:a="http://schemas.openxmlformats.org/drawingml/2006/main" w="14288">
-            <a:solidFill>
-              <a:srgbClr val="086B93"/>
-            </a:solidFill>
-          </a:ln>
-        </p:spPr>
-      </p:sp>
-      <p:sp>
-        <p:nvSpPr>
-          <p:cNvPr id="8" name="">
-            <a:extLst xmlns:a="http://schemas.openxmlformats.org/drawingml/2006/main">
-              <a:ext uri="{FF2B5EF4-FFF2-40B4-BE49-F238E27FC236}">
-                <a16:creationId xmlns:a16="http://schemas.microsoft.com/office/drawing/2014/main" id="{989E4B8D-F981-4EB1-B32A-452FFC8F011C}"/>
-              </a:ext>
-            </a:extLst>
-          </p:cNvPr>
-          <p:cNvSpPr>
-            <a:spLocks xmlns:a="http://schemas.openxmlformats.org/drawingml/2006/main" noGrp="1"/>
-          </p:cNvSpPr>
-          <p:nvPr/>
-        </p:nvSpPr>
-        <p:spPr>
-          <a:xfrm xmlns:a="http://schemas.openxmlformats.org/drawingml/2006/main">
-            <a:off x="2952750" y="2438400"/>
-            <a:ext cx="1676400" cy="857250"/>
+            <a:off x="609600" y="4248150"/>
+            <a:ext cx="3333750" cy="552450"/>
           </a:xfrm>
           <a:prstGeom xmlns:a="http://schemas.openxmlformats.org/drawingml/2006/main" prst="rect">
             <a:avLst/>
@@ -6001,38 +6030,25 @@
           <a:lstStyle xmlns:a="http://schemas.openxmlformats.org/drawingml/2006/main"/>
           <a:p xmlns:a="http://schemas.openxmlformats.org/drawingml/2006/main">
             <a:r>
-              <a:rPr sz="1875" b="1">
-                <a:solidFill>
-                  <a:srgbClr val="152D43"/>
+              <a:rPr sz="2925" b="1">
+                <a:solidFill>
+                  <a:srgbClr val="148B83"/>
                 </a:solidFill>
                 <a:latin typeface="Arial"/>
                 <a:ea typeface="Arial"/>
                 <a:cs typeface="Arial"/>
               </a:rPr>
-              <a:t>Estimate</a:t>
-            </a:r>
-          </a:p>
-          <a:p xmlns:a="http://schemas.openxmlformats.org/drawingml/2006/main">
-            <a:r>
-              <a:rPr sz="1875" b="1">
-                <a:solidFill>
-                  <a:srgbClr val="152D43"/>
-                </a:solidFill>
-                <a:latin typeface="Arial"/>
-                <a:ea typeface="Arial"/>
-                <a:cs typeface="Arial"/>
-              </a:rPr>
-              <a:t>budget B</a:t>
+              <a:t>Less time</a:t>
             </a:r>
           </a:p>
         </p:txBody>
       </p:sp>
       <p:sp>
         <p:nvSpPr>
-          <p:cNvPr id="9" name="">
-            <a:extLst xmlns:a="http://schemas.openxmlformats.org/drawingml/2006/main">
-              <a:ext uri="{FF2B5EF4-FFF2-40B4-BE49-F238E27FC236}">
-                <a16:creationId xmlns:a16="http://schemas.microsoft.com/office/drawing/2014/main" id="{F02BFE5D-FE35-4F65-B727-D98F682A534C}"/>
+          <p:cNvPr id="10" name="">
+            <a:extLst xmlns:a="http://schemas.openxmlformats.org/drawingml/2006/main">
+              <a:ext uri="{FF2B5EF4-FFF2-40B4-BE49-F238E27FC236}">
+                <a16:creationId xmlns:a16="http://schemas.microsoft.com/office/drawing/2014/main" id="{E004B8E9-9C49-4CD2-A02F-BA4E0DF93912}"/>
               </a:ext>
             </a:extLst>
           </p:cNvPr>
@@ -6043,28 +6059,28 @@
         </p:nvSpPr>
         <p:spPr>
           <a:xfrm xmlns:a="http://schemas.openxmlformats.org/drawingml/2006/main">
-            <a:off x="4800600" y="2686050"/>
-            <a:ext cx="219075" cy="171450"/>
+            <a:off x="3238500" y="4391025"/>
+            <a:ext cx="1333500" cy="238125"/>
           </a:xfrm>
           <a:prstGeom xmlns:a="http://schemas.openxmlformats.org/drawingml/2006/main" prst="rightArrow">
             <a:avLst/>
           </a:prstGeom>
           <a:solidFill xmlns:a="http://schemas.openxmlformats.org/drawingml/2006/main">
-            <a:srgbClr val="086B93"/>
+            <a:srgbClr val="148B83"/>
           </a:solidFill>
           <a:ln xmlns:a="http://schemas.openxmlformats.org/drawingml/2006/main" w="0">
             <a:solidFill>
-              <a:srgbClr val="086B93"/>
+              <a:srgbClr val="148B83"/>
             </a:solidFill>
           </a:ln>
         </p:spPr>
       </p:sp>
       <p:sp>
         <p:nvSpPr>
-          <p:cNvPr id="10" name="">
-            <a:extLst xmlns:a="http://schemas.openxmlformats.org/drawingml/2006/main">
-              <a:ext uri="{FF2B5EF4-FFF2-40B4-BE49-F238E27FC236}">
-                <a16:creationId xmlns:a16="http://schemas.microsoft.com/office/drawing/2014/main" id="{1967ED87-1A53-47A0-BE78-E0E81306BEAB}"/>
+          <p:cNvPr id="11" name="">
+            <a:extLst xmlns:a="http://schemas.openxmlformats.org/drawingml/2006/main">
+              <a:ext uri="{FF2B5EF4-FFF2-40B4-BE49-F238E27FC236}">
+                <a16:creationId xmlns:a16="http://schemas.microsoft.com/office/drawing/2014/main" id="{E8A44C94-09FA-4032-9EEF-220A698C2F56}"/>
               </a:ext>
             </a:extLst>
           </p:cNvPr>
@@ -6075,28 +6091,28 @@
         </p:nvSpPr>
         <p:spPr>
           <a:xfrm xmlns:a="http://schemas.openxmlformats.org/drawingml/2006/main">
-            <a:off x="5029200" y="2171700"/>
-            <a:ext cx="1943100" cy="1219200"/>
+            <a:off x="5095875" y="3857625"/>
+            <a:ext cx="6191250" cy="1476375"/>
           </a:xfrm>
           <a:prstGeom xmlns:a="http://schemas.openxmlformats.org/drawingml/2006/main" prst="rect">
             <a:avLst/>
           </a:prstGeom>
           <a:solidFill xmlns:a="http://schemas.openxmlformats.org/drawingml/2006/main">
-            <a:srgbClr val="FFFFFF"/>
+            <a:srgbClr val="EAF3F6"/>
           </a:solidFill>
           <a:ln xmlns:a="http://schemas.openxmlformats.org/drawingml/2006/main" w="14288">
             <a:solidFill>
-              <a:srgbClr val="086B93"/>
+              <a:srgbClr val="D7DFE5"/>
             </a:solidFill>
           </a:ln>
         </p:spPr>
       </p:sp>
       <p:sp>
         <p:nvSpPr>
-          <p:cNvPr id="11" name="">
-            <a:extLst xmlns:a="http://schemas.openxmlformats.org/drawingml/2006/main">
-              <a:ext uri="{FF2B5EF4-FFF2-40B4-BE49-F238E27FC236}">
-                <a16:creationId xmlns:a16="http://schemas.microsoft.com/office/drawing/2014/main" id="{E43DFE62-8B5A-4711-AFAF-957B853593D4}"/>
+          <p:cNvPr id="12" name="">
+            <a:extLst xmlns:a="http://schemas.openxmlformats.org/drawingml/2006/main">
+              <a:ext uri="{FF2B5EF4-FFF2-40B4-BE49-F238E27FC236}">
+                <a16:creationId xmlns:a16="http://schemas.microsoft.com/office/drawing/2014/main" id="{4CC0A1AA-BA52-4672-9797-E663104EC06D}"/>
               </a:ext>
             </a:extLst>
           </p:cNvPr>
@@ -6107,104 +6123,14 @@
         </p:nvSpPr>
         <p:spPr>
           <a:xfrm xmlns:a="http://schemas.openxmlformats.org/drawingml/2006/main">
-            <a:off x="5162550" y="2438400"/>
-            <a:ext cx="1676400" cy="857250"/>
+            <a:off x="7667625" y="4305300"/>
+            <a:ext cx="1047750" cy="590550"/>
           </a:xfrm>
           <a:prstGeom xmlns:a="http://schemas.openxmlformats.org/drawingml/2006/main" prst="rect">
             <a:avLst/>
           </a:prstGeom>
-          <a:noFill xmlns:a="http://schemas.openxmlformats.org/drawingml/2006/main"/>
-          <a:ln xmlns:a="http://schemas.openxmlformats.org/drawingml/2006/main" w="0">
-            <a:noFill/>
-          </a:ln>
-        </p:spPr>
-        <p:txBody>
-          <a:bodyPr xmlns:a="http://schemas.openxmlformats.org/drawingml/2006/main" lIns="0" tIns="0" rIns="0" bIns="0"/>
-          <a:lstStyle xmlns:a="http://schemas.openxmlformats.org/drawingml/2006/main"/>
-          <a:p xmlns:a="http://schemas.openxmlformats.org/drawingml/2006/main">
-            <a:r>
-              <a:rPr sz="1875" b="1">
-                <a:solidFill>
-                  <a:srgbClr val="152D43"/>
-                </a:solidFill>
-                <a:latin typeface="Arial"/>
-                <a:ea typeface="Arial"/>
-                <a:cs typeface="Arial"/>
-              </a:rPr>
-              <a:t>Latency profile</a:t>
-            </a:r>
-          </a:p>
-          <a:p xmlns:a="http://schemas.openxmlformats.org/drawingml/2006/main">
-            <a:r>
-              <a:rPr sz="1875" b="1">
-                <a:solidFill>
-                  <a:srgbClr val="152D43"/>
-                </a:solidFill>
-                <a:latin typeface="Arial"/>
-                <a:ea typeface="Arial"/>
-                <a:cs typeface="Arial"/>
-              </a:rPr>
-              <a:t>ROI selection</a:t>
-            </a:r>
-          </a:p>
-        </p:txBody>
-      </p:sp>
-      <p:sp>
-        <p:nvSpPr>
-          <p:cNvPr id="12" name="">
-            <a:extLst xmlns:a="http://schemas.openxmlformats.org/drawingml/2006/main">
-              <a:ext uri="{FF2B5EF4-FFF2-40B4-BE49-F238E27FC236}">
-                <a16:creationId xmlns:a16="http://schemas.microsoft.com/office/drawing/2014/main" id="{ADCCAD91-34E0-47D4-8CA1-7ED3C056065A}"/>
-              </a:ext>
-            </a:extLst>
-          </p:cNvPr>
-          <p:cNvSpPr>
-            <a:spLocks xmlns:a="http://schemas.openxmlformats.org/drawingml/2006/main" noGrp="1"/>
-          </p:cNvSpPr>
-          <p:nvPr/>
-        </p:nvSpPr>
-        <p:spPr>
-          <a:xfrm xmlns:a="http://schemas.openxmlformats.org/drawingml/2006/main">
-            <a:off x="7010400" y="2686050"/>
-            <a:ext cx="219075" cy="171450"/>
-          </a:xfrm>
-          <a:prstGeom xmlns:a="http://schemas.openxmlformats.org/drawingml/2006/main" prst="rightArrow">
-            <a:avLst/>
-          </a:prstGeom>
           <a:solidFill xmlns:a="http://schemas.openxmlformats.org/drawingml/2006/main">
-            <a:srgbClr val="086B93"/>
-          </a:solidFill>
-          <a:ln xmlns:a="http://schemas.openxmlformats.org/drawingml/2006/main" w="0">
-            <a:solidFill>
-              <a:srgbClr val="086B93"/>
-            </a:solidFill>
-          </a:ln>
-        </p:spPr>
-      </p:sp>
-      <p:sp>
-        <p:nvSpPr>
-          <p:cNvPr id="13" name="">
-            <a:extLst xmlns:a="http://schemas.openxmlformats.org/drawingml/2006/main">
-              <a:ext uri="{FF2B5EF4-FFF2-40B4-BE49-F238E27FC236}">
-                <a16:creationId xmlns:a16="http://schemas.microsoft.com/office/drawing/2014/main" id="{11F1BA39-C7A5-44D7-A47E-C77F2381941A}"/>
-              </a:ext>
-            </a:extLst>
-          </p:cNvPr>
-          <p:cNvSpPr>
-            <a:spLocks xmlns:a="http://schemas.openxmlformats.org/drawingml/2006/main" noGrp="1"/>
-          </p:cNvSpPr>
-          <p:nvPr/>
-        </p:nvSpPr>
-        <p:spPr>
-          <a:xfrm xmlns:a="http://schemas.openxmlformats.org/drawingml/2006/main">
-            <a:off x="7239000" y="2171700"/>
-            <a:ext cx="1943100" cy="1219200"/>
-          </a:xfrm>
-          <a:prstGeom xmlns:a="http://schemas.openxmlformats.org/drawingml/2006/main" prst="rect">
-            <a:avLst/>
-          </a:prstGeom>
-          <a:solidFill xmlns:a="http://schemas.openxmlformats.org/drawingml/2006/main">
-            <a:srgbClr val="EAF3F6"/>
+            <a:srgbClr val="FFFFFF"/>
           </a:solidFill>
           <a:ln xmlns:a="http://schemas.openxmlformats.org/drawingml/2006/main" w="14288">
             <a:solidFill>
@@ -6215,10 +6141,10 @@
       </p:sp>
       <p:sp>
         <p:nvSpPr>
-          <p:cNvPr id="14" name="">
-            <a:extLst xmlns:a="http://schemas.openxmlformats.org/drawingml/2006/main">
-              <a:ext uri="{FF2B5EF4-FFF2-40B4-BE49-F238E27FC236}">
-                <a16:creationId xmlns:a16="http://schemas.microsoft.com/office/drawing/2014/main" id="{0DB68100-B62B-4D9F-A229-1AB7C0875981}"/>
+          <p:cNvPr id="13" name="">
+            <a:extLst xmlns:a="http://schemas.openxmlformats.org/drawingml/2006/main">
+              <a:ext uri="{FF2B5EF4-FFF2-40B4-BE49-F238E27FC236}">
+                <a16:creationId xmlns:a16="http://schemas.microsoft.com/office/drawing/2014/main" id="{1FF1BF6B-83E0-4BFF-A9A8-0A4E286765ED}"/>
               </a:ext>
             </a:extLst>
           </p:cNvPr>
@@ -6229,188 +6155,8 @@
         </p:nvSpPr>
         <p:spPr>
           <a:xfrm xmlns:a="http://schemas.openxmlformats.org/drawingml/2006/main">
-            <a:off x="7372350" y="2438400"/>
-            <a:ext cx="1676400" cy="857250"/>
-          </a:xfrm>
-          <a:prstGeom xmlns:a="http://schemas.openxmlformats.org/drawingml/2006/main" prst="rect">
-            <a:avLst/>
-          </a:prstGeom>
-          <a:noFill xmlns:a="http://schemas.openxmlformats.org/drawingml/2006/main"/>
-          <a:ln xmlns:a="http://schemas.openxmlformats.org/drawingml/2006/main" w="0">
-            <a:noFill/>
-          </a:ln>
-        </p:spPr>
-        <p:txBody>
-          <a:bodyPr xmlns:a="http://schemas.openxmlformats.org/drawingml/2006/main" lIns="0" tIns="0" rIns="0" bIns="0"/>
-          <a:lstStyle xmlns:a="http://schemas.openxmlformats.org/drawingml/2006/main"/>
-          <a:p xmlns:a="http://schemas.openxmlformats.org/drawingml/2006/main">
-            <a:r>
-              <a:rPr sz="1875" b="1">
-                <a:solidFill>
-                  <a:srgbClr val="152D43"/>
-                </a:solidFill>
-                <a:latin typeface="Arial"/>
-                <a:ea typeface="Arial"/>
-                <a:cs typeface="Arial"/>
-              </a:rPr>
-              <a:t>Reconstruct</a:t>
-            </a:r>
-          </a:p>
-          <a:p xmlns:a="http://schemas.openxmlformats.org/drawingml/2006/main">
-            <a:r>
-              <a:rPr sz="1875" b="1">
-                <a:solidFill>
-                  <a:srgbClr val="152D43"/>
-                </a:solidFill>
-                <a:latin typeface="Arial"/>
-                <a:ea typeface="Arial"/>
-                <a:cs typeface="Arial"/>
-              </a:rPr>
-              <a:t>and blend</a:t>
-            </a:r>
-          </a:p>
-        </p:txBody>
-      </p:sp>
-      <p:sp>
-        <p:nvSpPr>
-          <p:cNvPr id="15" name="">
-            <a:extLst xmlns:a="http://schemas.openxmlformats.org/drawingml/2006/main">
-              <a:ext uri="{FF2B5EF4-FFF2-40B4-BE49-F238E27FC236}">
-                <a16:creationId xmlns:a16="http://schemas.microsoft.com/office/drawing/2014/main" id="{A02AF523-13C6-49AB-ABBF-028065E2FA19}"/>
-              </a:ext>
-            </a:extLst>
-          </p:cNvPr>
-          <p:cNvSpPr>
-            <a:spLocks xmlns:a="http://schemas.openxmlformats.org/drawingml/2006/main" noGrp="1"/>
-          </p:cNvSpPr>
-          <p:nvPr/>
-        </p:nvSpPr>
-        <p:spPr>
-          <a:xfrm xmlns:a="http://schemas.openxmlformats.org/drawingml/2006/main">
-            <a:off x="9220200" y="2686050"/>
-            <a:ext cx="219075" cy="171450"/>
-          </a:xfrm>
-          <a:prstGeom xmlns:a="http://schemas.openxmlformats.org/drawingml/2006/main" prst="rightArrow">
-            <a:avLst/>
-          </a:prstGeom>
-          <a:solidFill xmlns:a="http://schemas.openxmlformats.org/drawingml/2006/main">
-            <a:srgbClr val="086B93"/>
-          </a:solidFill>
-          <a:ln xmlns:a="http://schemas.openxmlformats.org/drawingml/2006/main" w="0">
-            <a:solidFill>
-              <a:srgbClr val="086B93"/>
-            </a:solidFill>
-          </a:ln>
-        </p:spPr>
-      </p:sp>
-      <p:sp>
-        <p:nvSpPr>
-          <p:cNvPr id="16" name="">
-            <a:extLst xmlns:a="http://schemas.openxmlformats.org/drawingml/2006/main">
-              <a:ext uri="{FF2B5EF4-FFF2-40B4-BE49-F238E27FC236}">
-                <a16:creationId xmlns:a16="http://schemas.microsoft.com/office/drawing/2014/main" id="{6A57F035-A82B-4516-A956-53CDFD9E251C}"/>
-              </a:ext>
-            </a:extLst>
-          </p:cNvPr>
-          <p:cNvSpPr>
-            <a:spLocks xmlns:a="http://schemas.openxmlformats.org/drawingml/2006/main" noGrp="1"/>
-          </p:cNvSpPr>
-          <p:nvPr/>
-        </p:nvSpPr>
-        <p:spPr>
-          <a:xfrm xmlns:a="http://schemas.openxmlformats.org/drawingml/2006/main">
-            <a:off x="9448800" y="2171700"/>
-            <a:ext cx="1943100" cy="1219200"/>
-          </a:xfrm>
-          <a:prstGeom xmlns:a="http://schemas.openxmlformats.org/drawingml/2006/main" prst="rect">
-            <a:avLst/>
-          </a:prstGeom>
-          <a:solidFill xmlns:a="http://schemas.openxmlformats.org/drawingml/2006/main">
-            <a:srgbClr val="FFFFFF"/>
-          </a:solidFill>
-          <a:ln xmlns:a="http://schemas.openxmlformats.org/drawingml/2006/main" w="14288">
-            <a:solidFill>
-              <a:srgbClr val="086B93"/>
-            </a:solidFill>
-          </a:ln>
-        </p:spPr>
-      </p:sp>
-      <p:sp>
-        <p:nvSpPr>
-          <p:cNvPr id="17" name="">
-            <a:extLst xmlns:a="http://schemas.openxmlformats.org/drawingml/2006/main">
-              <a:ext uri="{FF2B5EF4-FFF2-40B4-BE49-F238E27FC236}">
-                <a16:creationId xmlns:a16="http://schemas.microsoft.com/office/drawing/2014/main" id="{3BF181D2-CD69-416B-B6E4-6307EC096CA9}"/>
-              </a:ext>
-            </a:extLst>
-          </p:cNvPr>
-          <p:cNvSpPr>
-            <a:spLocks xmlns:a="http://schemas.openxmlformats.org/drawingml/2006/main" noGrp="1"/>
-          </p:cNvSpPr>
-          <p:nvPr/>
-        </p:nvSpPr>
-        <p:spPr>
-          <a:xfrm xmlns:a="http://schemas.openxmlformats.org/drawingml/2006/main">
-            <a:off x="9582150" y="2438400"/>
-            <a:ext cx="1676400" cy="857250"/>
-          </a:xfrm>
-          <a:prstGeom xmlns:a="http://schemas.openxmlformats.org/drawingml/2006/main" prst="rect">
-            <a:avLst/>
-          </a:prstGeom>
-          <a:noFill xmlns:a="http://schemas.openxmlformats.org/drawingml/2006/main"/>
-          <a:ln xmlns:a="http://schemas.openxmlformats.org/drawingml/2006/main" w="0">
-            <a:noFill/>
-          </a:ln>
-        </p:spPr>
-        <p:txBody>
-          <a:bodyPr xmlns:a="http://schemas.openxmlformats.org/drawingml/2006/main" lIns="0" tIns="0" rIns="0" bIns="0"/>
-          <a:lstStyle xmlns:a="http://schemas.openxmlformats.org/drawingml/2006/main"/>
-          <a:p xmlns:a="http://schemas.openxmlformats.org/drawingml/2006/main">
-            <a:r>
-              <a:rPr sz="1875" b="1">
-                <a:solidFill>
-                  <a:srgbClr val="152D43"/>
-                </a:solidFill>
-                <a:latin typeface="Arial"/>
-                <a:ea typeface="Arial"/>
-                <a:cs typeface="Arial"/>
-              </a:rPr>
-              <a:t>Submit</a:t>
-            </a:r>
-          </a:p>
-          <a:p xmlns:a="http://schemas.openxmlformats.org/drawingml/2006/main">
-            <a:r>
-              <a:rPr sz="1875" b="1">
-                <a:solidFill>
-                  <a:srgbClr val="152D43"/>
-                </a:solidFill>
-                <a:latin typeface="Arial"/>
-                <a:ea typeface="Arial"/>
-                <a:cs typeface="Arial"/>
-              </a:rPr>
-              <a:t>for display</a:t>
-            </a:r>
-          </a:p>
-        </p:txBody>
-      </p:sp>
-      <p:sp>
-        <p:nvSpPr>
-          <p:cNvPr id="18" name="">
-            <a:extLst xmlns:a="http://schemas.openxmlformats.org/drawingml/2006/main">
-              <a:ext uri="{FF2B5EF4-FFF2-40B4-BE49-F238E27FC236}">
-                <a16:creationId xmlns:a16="http://schemas.microsoft.com/office/drawing/2014/main" id="{DE0F1C75-A03D-4B93-9093-1B3912A26EA1}"/>
-              </a:ext>
-            </a:extLst>
-          </p:cNvPr>
-          <p:cNvSpPr>
-            <a:spLocks xmlns:a="http://schemas.openxmlformats.org/drawingml/2006/main" noGrp="1"/>
-          </p:cNvSpPr>
-          <p:nvPr/>
-        </p:nvSpPr>
-        <p:spPr>
-          <a:xfrm xmlns:a="http://schemas.openxmlformats.org/drawingml/2006/main">
-            <a:off x="609600" y="4010025"/>
-            <a:ext cx="2000250" cy="428625"/>
+            <a:off x="5953125" y="5476875"/>
+            <a:ext cx="5524500" cy="381000"/>
           </a:xfrm>
           <a:prstGeom xmlns:a="http://schemas.openxmlformats.org/drawingml/2006/main" prst="rect">
             <a:avLst/>
@@ -6427,113 +6173,23 @@
             <a:r>
               <a:rPr sz="2175" b="1">
                 <a:solidFill>
-                  <a:srgbClr val="086B93"/>
+                  <a:srgbClr val="148B83"/>
                 </a:solidFill>
                 <a:latin typeface="Arial"/>
                 <a:ea typeface="Arial"/>
                 <a:cs typeface="Arial"/>
               </a:rPr>
-              <a:t>Proposed rule</a:t>
+              <a:t>Smaller full-resolution region</a:t>
             </a:r>
           </a:p>
         </p:txBody>
       </p:sp>
       <p:sp>
         <p:nvSpPr>
-          <p:cNvPr id="19" name="">
-            <a:extLst xmlns:a="http://schemas.openxmlformats.org/drawingml/2006/main">
-              <a:ext uri="{FF2B5EF4-FFF2-40B4-BE49-F238E27FC236}">
-                <a16:creationId xmlns:a16="http://schemas.microsoft.com/office/drawing/2014/main" id="{03D8A181-46E7-4F32-A758-B21CF3BFC1AE}"/>
-              </a:ext>
-            </a:extLst>
-          </p:cNvPr>
-          <p:cNvSpPr>
-            <a:spLocks xmlns:a="http://schemas.openxmlformats.org/drawingml/2006/main" noGrp="1"/>
-          </p:cNvSpPr>
-          <p:nvPr/>
-        </p:nvSpPr>
-        <p:spPr>
-          <a:xfrm xmlns:a="http://schemas.openxmlformats.org/drawingml/2006/main">
-            <a:off x="2667000" y="4010025"/>
-            <a:ext cx="8810625" cy="457200"/>
-          </a:xfrm>
-          <a:prstGeom xmlns:a="http://schemas.openxmlformats.org/drawingml/2006/main" prst="rect">
-            <a:avLst/>
-          </a:prstGeom>
-          <a:noFill xmlns:a="http://schemas.openxmlformats.org/drawingml/2006/main"/>
-          <a:ln xmlns:a="http://schemas.openxmlformats.org/drawingml/2006/main" w="0">
-            <a:noFill/>
-          </a:ln>
-        </p:spPr>
-        <p:txBody>
-          <a:bodyPr xmlns:a="http://schemas.openxmlformats.org/drawingml/2006/main" lIns="0" tIns="0" rIns="0" bIns="0"/>
-          <a:lstStyle xmlns:a="http://schemas.openxmlformats.org/drawingml/2006/main"/>
-          <a:p xmlns:a="http://schemas.openxmlformats.org/drawingml/2006/main">
-            <a:r>
-              <a:rPr sz="2400" b="1">
-                <a:solidFill>
-                  <a:srgbClr val="152D43"/>
-                </a:solidFill>
-                <a:latin typeface="Arial"/>
-                <a:ea typeface="Arial"/>
-                <a:cs typeface="Arial"/>
-              </a:rPr>
-              <a:t>Choose the highest-quality level with T̂(level) ≤ B</a:t>
-            </a:r>
-          </a:p>
-        </p:txBody>
-      </p:sp>
-      <p:sp>
-        <p:nvSpPr>
-          <p:cNvPr id="20" name="">
-            <a:extLst xmlns:a="http://schemas.openxmlformats.org/drawingml/2006/main">
-              <a:ext uri="{FF2B5EF4-FFF2-40B4-BE49-F238E27FC236}">
-                <a16:creationId xmlns:a16="http://schemas.microsoft.com/office/drawing/2014/main" id="{B86CA594-5560-4E3C-9476-D1673083F8F2}"/>
-              </a:ext>
-            </a:extLst>
-          </p:cNvPr>
-          <p:cNvSpPr>
-            <a:spLocks xmlns:a="http://schemas.openxmlformats.org/drawingml/2006/main" noGrp="1"/>
-          </p:cNvSpPr>
-          <p:nvPr/>
-        </p:nvSpPr>
-        <p:spPr>
-          <a:xfrm xmlns:a="http://schemas.openxmlformats.org/drawingml/2006/main">
-            <a:off x="2667000" y="4572000"/>
-            <a:ext cx="8810625" cy="438150"/>
-          </a:xfrm>
-          <a:prstGeom xmlns:a="http://schemas.openxmlformats.org/drawingml/2006/main" prst="rect">
-            <a:avLst/>
-          </a:prstGeom>
-          <a:noFill xmlns:a="http://schemas.openxmlformats.org/drawingml/2006/main"/>
-          <a:ln xmlns:a="http://schemas.openxmlformats.org/drawingml/2006/main" w="0">
-            <a:noFill/>
-          </a:ln>
-        </p:spPr>
-        <p:txBody>
-          <a:bodyPr xmlns:a="http://schemas.openxmlformats.org/drawingml/2006/main" lIns="0" tIns="0" rIns="0" bIns="0"/>
-          <a:lstStyle xmlns:a="http://schemas.openxmlformats.org/drawingml/2006/main"/>
-          <a:p xmlns:a="http://schemas.openxmlformats.org/drawingml/2006/main">
-            <a:r>
-              <a:rPr sz="2025" b="0">
-                <a:solidFill>
-                  <a:srgbClr val="536675"/>
-                </a:solidFill>
-                <a:latin typeface="Arial"/>
-                <a:ea typeface="Arial"/>
-                <a:cs typeface="Arial"/>
-              </a:rPr>
-              <a:t>Use a conservative latency percentile. Validate prediction error and margin.</a:t>
-            </a:r>
-          </a:p>
-        </p:txBody>
-      </p:sp>
-      <p:sp>
-        <p:nvSpPr>
-          <p:cNvPr id="21" name="">
-            <a:extLst xmlns:a="http://schemas.openxmlformats.org/drawingml/2006/main">
-              <a:ext uri="{FF2B5EF4-FFF2-40B4-BE49-F238E27FC236}">
-                <a16:creationId xmlns:a16="http://schemas.microsoft.com/office/drawing/2014/main" id="{6D686258-7281-43AA-88F1-DD31FFBE56BC}"/>
+          <p:cNvPr id="14" name="">
+            <a:extLst xmlns:a="http://schemas.openxmlformats.org/drawingml/2006/main">
+              <a:ext uri="{FF2B5EF4-FFF2-40B4-BE49-F238E27FC236}">
+                <a16:creationId xmlns:a16="http://schemas.microsoft.com/office/drawing/2014/main" id="{FB44A4A3-42E4-4062-8234-5D55D14E67AC}"/>
               </a:ext>
             </a:extLst>
           </p:cNvPr>
@@ -6568,7 +6224,7 @@
                 <a:ea typeface="Arial"/>
                 <a:cs typeface="Arial"/>
               </a:rPr>
-              <a:t>Implemented: fixed-center FOV sweep and latency profiles. Dynamic scheduling and deadline-miss reduction remain unverified.</a:t>
+              <a:t>Proposed adaptation. Fixed-center levels are measured; scheduling and deadline-miss reduction remain unverified.</a:t>
             </a:r>
           </a:p>
         </p:txBody>
@@ -6576,7 +6232,7 @@
     </p:spTree>
     <p:extLst>
       <p:ext uri="{BB962C8B-B14F-4D97-AF65-F5344CB8AC3E}">
-        <p14:creationId xmlns:p14="http://schemas.microsoft.com/office/powerpoint/2010/main" val="1329092911"/>
+        <p14:creationId xmlns:p14="http://schemas.microsoft.com/office/powerpoint/2010/main" val="888056795"/>
       </p:ext>
     </p:extLst>
   </p:cSld>
@@ -6607,7 +6263,7 @@
           <p:cNvPr id="20" name="">
             <a:extLst xmlns:a="http://schemas.openxmlformats.org/drawingml/2006/main">
               <a:ext uri="{FF2B5EF4-FFF2-40B4-BE49-F238E27FC236}">
-                <a16:creationId xmlns:a16="http://schemas.microsoft.com/office/drawing/2014/main" id="{EEEEDAA3-B3D7-442D-99EB-470C054FD068}"/>
+                <a16:creationId xmlns:a16="http://schemas.microsoft.com/office/drawing/2014/main" id="{B713977B-D709-4BB7-B690-C6AA28040960}"/>
               </a:ext>
             </a:extLst>
           </p:cNvPr>
@@ -6652,7 +6308,7 @@
           <p:cNvPr id="2" name="">
             <a:extLst xmlns:a="http://schemas.openxmlformats.org/drawingml/2006/main">
               <a:ext uri="{FF2B5EF4-FFF2-40B4-BE49-F238E27FC236}">
-                <a16:creationId xmlns:a16="http://schemas.microsoft.com/office/drawing/2014/main" id="{BBA7A2F2-AC1E-43E5-8AA4-E7C3CB4A2FA3}"/>
+                <a16:creationId xmlns:a16="http://schemas.microsoft.com/office/drawing/2014/main" id="{5561E7DD-429E-4595-A175-1D92A7D4795D}"/>
               </a:ext>
             </a:extLst>
           </p:cNvPr>
@@ -6682,7 +6338,7 @@
           <p:cNvPr id="3" name="">
             <a:extLst xmlns:a="http://schemas.openxmlformats.org/drawingml/2006/main">
               <a:ext uri="{FF2B5EF4-FFF2-40B4-BE49-F238E27FC236}">
-                <a16:creationId xmlns:a16="http://schemas.microsoft.com/office/drawing/2014/main" id="{7DE48D4C-1825-422D-9C2D-509618E4A063}"/>
+                <a16:creationId xmlns:a16="http://schemas.microsoft.com/office/drawing/2014/main" id="{79704B26-C801-4B49-B780-B412D8B1FA94}"/>
               </a:ext>
             </a:extLst>
           </p:cNvPr>
@@ -6727,7 +6383,7 @@
           <p:cNvPr id="4" name="">
             <a:extLst xmlns:a="http://schemas.openxmlformats.org/drawingml/2006/main">
               <a:ext uri="{FF2B5EF4-FFF2-40B4-BE49-F238E27FC236}">
-                <a16:creationId xmlns:a16="http://schemas.microsoft.com/office/drawing/2014/main" id="{F30B250A-6DC6-45AD-B68F-79C3B26AA281}"/>
+                <a16:creationId xmlns:a16="http://schemas.microsoft.com/office/drawing/2014/main" id="{ED93B088-F150-44D7-9FFA-297703C80191}"/>
               </a:ext>
             </a:extLst>
           </p:cNvPr>
@@ -6772,7 +6428,7 @@
           <p:cNvPr id="5" name="">
             <a:extLst xmlns:a="http://schemas.openxmlformats.org/drawingml/2006/main">
               <a:ext uri="{FF2B5EF4-FFF2-40B4-BE49-F238E27FC236}">
-                <a16:creationId xmlns:a16="http://schemas.microsoft.com/office/drawing/2014/main" id="{C58E1445-0955-4A04-BE7E-B8D462F9E33F}"/>
+                <a16:creationId xmlns:a16="http://schemas.microsoft.com/office/drawing/2014/main" id="{F7CCBAB2-F4FE-4BE3-8F11-781FF62616FD}"/>
               </a:ext>
             </a:extLst>
           </p:cNvPr>
@@ -6804,7 +6460,7 @@
           <p:cNvPr id="6" name="">
             <a:extLst xmlns:a="http://schemas.openxmlformats.org/drawingml/2006/main">
               <a:ext uri="{FF2B5EF4-FFF2-40B4-BE49-F238E27FC236}">
-                <a16:creationId xmlns:a16="http://schemas.microsoft.com/office/drawing/2014/main" id="{657AAC80-ABD1-4AD8-B8EE-93C5785AC8B0}"/>
+                <a16:creationId xmlns:a16="http://schemas.microsoft.com/office/drawing/2014/main" id="{BAB42BCE-956C-4B58-9DFE-6CDAF1591031}"/>
               </a:ext>
             </a:extLst>
           </p:cNvPr>
@@ -6815,8 +6471,8 @@
         </p:nvSpPr>
         <p:spPr>
           <a:xfrm xmlns:a="http://schemas.openxmlformats.org/drawingml/2006/main">
-            <a:off x="1352550" y="2762250"/>
-            <a:ext cx="2238375" cy="762000"/>
+            <a:off x="1066800" y="2667000"/>
+            <a:ext cx="2667000" cy="1066800"/>
           </a:xfrm>
           <a:prstGeom xmlns:a="http://schemas.openxmlformats.org/drawingml/2006/main" prst="rect">
             <a:avLst/>
@@ -6831,7 +6487,7 @@
           <a:lstStyle xmlns:a="http://schemas.openxmlformats.org/drawingml/2006/main"/>
           <a:p xmlns:a="http://schemas.openxmlformats.org/drawingml/2006/main">
             <a:r>
-              <a:rPr sz="2100" b="1">
+              <a:rPr sz="1950" b="1">
                 <a:solidFill>
                   <a:srgbClr val="086B93"/>
                 </a:solidFill>
@@ -6839,12 +6495,12 @@
                 <a:ea typeface="Arial"/>
                 <a:cs typeface="Arial"/>
               </a:rPr>
-              <a:t>Full-image base</a:t>
+              <a:t>Base sampling</a:t>
             </a:r>
           </a:p>
           <a:p xmlns:a="http://schemas.openxmlformats.org/drawingml/2006/main">
             <a:r>
-              <a:rPr sz="2100" b="1">
+              <a:rPr sz="1950" b="1">
                 <a:solidFill>
                   <a:srgbClr val="086B93"/>
                 </a:solidFill>
@@ -6852,7 +6508,20 @@
                 <a:ea typeface="Arial"/>
                 <a:cs typeface="Arial"/>
               </a:rPr>
-              <a:t>480 × 270</a:t>
+              <a:t>50% W × 50% H</a:t>
+            </a:r>
+          </a:p>
+          <a:p xmlns:a="http://schemas.openxmlformats.org/drawingml/2006/main">
+            <a:r>
+              <a:rPr sz="1950" b="1">
+                <a:solidFill>
+                  <a:srgbClr val="086B93"/>
+                </a:solidFill>
+                <a:latin typeface="Arial"/>
+                <a:ea typeface="Arial"/>
+                <a:cs typeface="Arial"/>
+              </a:rPr>
+              <a:t>(25% of pixels)</a:t>
             </a:r>
           </a:p>
         </p:txBody>
@@ -6862,7 +6531,7 @@
           <p:cNvPr id="7" name="">
             <a:extLst xmlns:a="http://schemas.openxmlformats.org/drawingml/2006/main">
               <a:ext uri="{FF2B5EF4-FFF2-40B4-BE49-F238E27FC236}">
-                <a16:creationId xmlns:a16="http://schemas.microsoft.com/office/drawing/2014/main" id="{CD52B89B-0897-4BB5-A357-E90874CFCBEC}"/>
+                <a16:creationId xmlns:a16="http://schemas.microsoft.com/office/drawing/2014/main" id="{771B6DC3-5BDC-499E-91F8-EC19C26E4837}"/>
               </a:ext>
             </a:extLst>
           </p:cNvPr>
@@ -6897,7 +6566,7 @@
                 <a:ea typeface="Arial"/>
                 <a:cs typeface="Arial"/>
               </a:rPr>
-              <a:t>Half resolution in the periphery</a:t>
+              <a:t>Base covers the whole image</a:t>
             </a:r>
           </a:p>
         </p:txBody>
@@ -6907,7 +6576,7 @@
           <p:cNvPr id="8" name="">
             <a:extLst xmlns:a="http://schemas.openxmlformats.org/drawingml/2006/main">
               <a:ext uri="{FF2B5EF4-FFF2-40B4-BE49-F238E27FC236}">
-                <a16:creationId xmlns:a16="http://schemas.microsoft.com/office/drawing/2014/main" id="{DEC31FA1-608D-4E67-80E8-E0D7BEF5A91B}"/>
+                <a16:creationId xmlns:a16="http://schemas.microsoft.com/office/drawing/2014/main" id="{8CA93F99-69B0-4F7C-AA4F-569378E58408}"/>
               </a:ext>
             </a:extLst>
           </p:cNvPr>
@@ -6939,7 +6608,7 @@
           <p:cNvPr id="9" name="">
             <a:extLst xmlns:a="http://schemas.openxmlformats.org/drawingml/2006/main">
               <a:ext uri="{FF2B5EF4-FFF2-40B4-BE49-F238E27FC236}">
-                <a16:creationId xmlns:a16="http://schemas.microsoft.com/office/drawing/2014/main" id="{78C3AFFD-5B96-4B35-9CF3-93C2821F47E7}"/>
+                <a16:creationId xmlns:a16="http://schemas.microsoft.com/office/drawing/2014/main" id="{8B77AD6D-A84E-40EF-8AD0-C497546B9785}"/>
               </a:ext>
             </a:extLst>
           </p:cNvPr>
@@ -6971,7 +6640,7 @@
           <p:cNvPr id="10" name="">
             <a:extLst xmlns:a="http://schemas.openxmlformats.org/drawingml/2006/main">
               <a:ext uri="{FF2B5EF4-FFF2-40B4-BE49-F238E27FC236}">
-                <a16:creationId xmlns:a16="http://schemas.microsoft.com/office/drawing/2014/main" id="{37B1AAA3-D139-4A68-9C46-87FC788FDE60}"/>
+                <a16:creationId xmlns:a16="http://schemas.microsoft.com/office/drawing/2014/main" id="{B09BEA43-FA69-4DB1-B667-C01F717EEF96}"/>
               </a:ext>
             </a:extLst>
           </p:cNvPr>
@@ -7016,7 +6685,7 @@
           <p:cNvPr id="11" name="">
             <a:extLst xmlns:a="http://schemas.openxmlformats.org/drawingml/2006/main">
               <a:ext uri="{FF2B5EF4-FFF2-40B4-BE49-F238E27FC236}">
-                <a16:creationId xmlns:a16="http://schemas.microsoft.com/office/drawing/2014/main" id="{D74C16C3-BC19-4FF6-87CB-239C277335C9}"/>
+                <a16:creationId xmlns:a16="http://schemas.microsoft.com/office/drawing/2014/main" id="{91A57F85-3489-4E8F-8304-2C2159F50D90}"/>
               </a:ext>
             </a:extLst>
           </p:cNvPr>
@@ -7061,7 +6730,7 @@
           <p:cNvPr id="12" name="">
             <a:extLst xmlns:a="http://schemas.openxmlformats.org/drawingml/2006/main">
               <a:ext uri="{FF2B5EF4-FFF2-40B4-BE49-F238E27FC236}">
-                <a16:creationId xmlns:a16="http://schemas.microsoft.com/office/drawing/2014/main" id="{F8C6FC62-6789-4C77-B5FF-D21854BA7F9E}"/>
+                <a16:creationId xmlns:a16="http://schemas.microsoft.com/office/drawing/2014/main" id="{C6FB3402-331A-4020-AE34-8819C95A1312}"/>
               </a:ext>
             </a:extLst>
           </p:cNvPr>
@@ -7106,7 +6775,7 @@
           <p:cNvPr id="13" name="">
             <a:extLst xmlns:a="http://schemas.openxmlformats.org/drawingml/2006/main">
               <a:ext uri="{FF2B5EF4-FFF2-40B4-BE49-F238E27FC236}">
-                <a16:creationId xmlns:a16="http://schemas.microsoft.com/office/drawing/2014/main" id="{AF171BCA-A3B9-4900-AED6-B383CD069F33}"/>
+                <a16:creationId xmlns:a16="http://schemas.microsoft.com/office/drawing/2014/main" id="{9BBCEFC9-21B8-4208-A9AF-20CF7AF91824}"/>
               </a:ext>
             </a:extLst>
           </p:cNvPr>
@@ -7138,7 +6807,7 @@
           <p:cNvPr id="14" name="">
             <a:extLst xmlns:a="http://schemas.openxmlformats.org/drawingml/2006/main">
               <a:ext uri="{FF2B5EF4-FFF2-40B4-BE49-F238E27FC236}">
-                <a16:creationId xmlns:a16="http://schemas.microsoft.com/office/drawing/2014/main" id="{62C6A5CE-6CAC-481C-A5CD-EA872EF889D7}"/>
+                <a16:creationId xmlns:a16="http://schemas.microsoft.com/office/drawing/2014/main" id="{B0EE98C2-B5F4-4E91-B177-E726B3EE03C7}"/>
               </a:ext>
             </a:extLst>
           </p:cNvPr>
@@ -7170,7 +6839,7 @@
           <p:cNvPr id="15" name="">
             <a:extLst xmlns:a="http://schemas.openxmlformats.org/drawingml/2006/main">
               <a:ext uri="{FF2B5EF4-FFF2-40B4-BE49-F238E27FC236}">
-                <a16:creationId xmlns:a16="http://schemas.microsoft.com/office/drawing/2014/main" id="{D8213E30-2484-4C9D-9831-DEEBDAB6AC00}"/>
+                <a16:creationId xmlns:a16="http://schemas.microsoft.com/office/drawing/2014/main" id="{86239C24-2DE8-4502-AD50-48DD9BAFB804}"/>
               </a:ext>
             </a:extLst>
           </p:cNvPr>
@@ -7202,7 +6871,7 @@
           <p:cNvPr id="16" name="">
             <a:extLst xmlns:a="http://schemas.openxmlformats.org/drawingml/2006/main">
               <a:ext uri="{FF2B5EF4-FFF2-40B4-BE49-F238E27FC236}">
-                <a16:creationId xmlns:a16="http://schemas.microsoft.com/office/drawing/2014/main" id="{609E5583-22E9-41EA-826D-26F44FEFB37D}"/>
+                <a16:creationId xmlns:a16="http://schemas.microsoft.com/office/drawing/2014/main" id="{1D57CC5E-6893-4592-9B7C-38CD4C37B8A0}"/>
               </a:ext>
             </a:extLst>
           </p:cNvPr>
@@ -7247,7 +6916,7 @@
           <p:cNvPr id="17" name="">
             <a:extLst xmlns:a="http://schemas.openxmlformats.org/drawingml/2006/main">
               <a:ext uri="{FF2B5EF4-FFF2-40B4-BE49-F238E27FC236}">
-                <a16:creationId xmlns:a16="http://schemas.microsoft.com/office/drawing/2014/main" id="{B01DFD5B-A934-43CB-BA52-69CD1B2184C5}"/>
+                <a16:creationId xmlns:a16="http://schemas.microsoft.com/office/drawing/2014/main" id="{3A91CCFC-48D6-465B-A7B2-4736DF38E50A}"/>
               </a:ext>
             </a:extLst>
           </p:cNvPr>
@@ -7292,7 +6961,7 @@
           <p:cNvPr id="18" name="">
             <a:extLst xmlns:a="http://schemas.openxmlformats.org/drawingml/2006/main">
               <a:ext uri="{FF2B5EF4-FFF2-40B4-BE49-F238E27FC236}">
-                <a16:creationId xmlns:a16="http://schemas.microsoft.com/office/drawing/2014/main" id="{664D3F72-E75A-4892-ABBD-08C6DD94EE16}"/>
+                <a16:creationId xmlns:a16="http://schemas.microsoft.com/office/drawing/2014/main" id="{B351ECC3-C297-47C9-81FA-99412AE98F8C}"/>
               </a:ext>
             </a:extLst>
           </p:cNvPr>
@@ -7327,7 +6996,7 @@
                 <a:ea typeface="Arial"/>
                 <a:cs typeface="Arial"/>
               </a:rPr>
-              <a:t>ROI sizes: 80×46, 160×90, 320×180, 480×270, 640×360</a:t>
+              <a:t>Full-resolution region: 0.7%, 2.8%, 11.1%, 25.0%, 44.4% of image</a:t>
             </a:r>
           </a:p>
         </p:txBody>
@@ -7337,7 +7006,7 @@
           <p:cNvPr id="19" name="">
             <a:extLst xmlns:a="http://schemas.openxmlformats.org/drawingml/2006/main">
               <a:ext uri="{FF2B5EF4-FFF2-40B4-BE49-F238E27FC236}">
-                <a16:creationId xmlns:a16="http://schemas.microsoft.com/office/drawing/2014/main" id="{162883A9-AF83-4F48-8763-0D0AA2DFF589}"/>
+                <a16:creationId xmlns:a16="http://schemas.microsoft.com/office/drawing/2014/main" id="{2C1E9F28-9CFD-4106-A208-54E6F7FA210D}"/>
               </a:ext>
             </a:extLst>
           </p:cNvPr>
@@ -7372,7 +7041,7 @@
                 <a:ea typeface="Arial"/>
                 <a:cs typeface="Arial"/>
               </a:rPr>
-              <a:t>Fixed center, 3 px halo, and edge blending. Diagram not to scale. Eye tracking is not integrated.</a:t>
+              <a:t>Region % means image-area coverage; base sampling is separate. Fixed center, 3 px halo; no eye tracking.</a:t>
             </a:r>
           </a:p>
         </p:txBody>
@@ -7380,7 +7049,7 @@
     </p:spTree>
     <p:extLst>
       <p:ext uri="{BB962C8B-B14F-4D97-AF65-F5344CB8AC3E}">
-        <p14:creationId xmlns:p14="http://schemas.microsoft.com/office/powerpoint/2010/main" val="984219423"/>
+        <p14:creationId xmlns:p14="http://schemas.microsoft.com/office/powerpoint/2010/main" val="277694981"/>
       </p:ext>
     </p:extLst>
   </p:cSld>
@@ -7411,7 +7080,7 @@
           <p:cNvPr id="9" name="">
             <a:extLst xmlns:a="http://schemas.openxmlformats.org/drawingml/2006/main">
               <a:ext uri="{FF2B5EF4-FFF2-40B4-BE49-F238E27FC236}">
-                <a16:creationId xmlns:a16="http://schemas.microsoft.com/office/drawing/2014/main" id="{D91DCE78-B136-4953-ACB5-C81198A9BE01}"/>
+                <a16:creationId xmlns:a16="http://schemas.microsoft.com/office/drawing/2014/main" id="{BB7369A1-ECEE-4D3E-81EE-9E2C4DBFACC0}"/>
               </a:ext>
             </a:extLst>
           </p:cNvPr>
@@ -7456,7 +7125,7 @@
           <p:cNvPr id="2" name="">
             <a:extLst xmlns:a="http://schemas.openxmlformats.org/drawingml/2006/main">
               <a:ext uri="{FF2B5EF4-FFF2-40B4-BE49-F238E27FC236}">
-                <a16:creationId xmlns:a16="http://schemas.microsoft.com/office/drawing/2014/main" id="{6D9A9AA1-92C6-4E74-AF7F-EA838C381D25}"/>
+                <a16:creationId xmlns:a16="http://schemas.microsoft.com/office/drawing/2014/main" id="{624ED659-73F1-4E5B-9F05-0CAFE760F18C}"/>
               </a:ext>
             </a:extLst>
           </p:cNvPr>
@@ -7486,7 +7155,7 @@
           <p:cNvPr id="3" name="">
             <a:extLst xmlns:a="http://schemas.openxmlformats.org/drawingml/2006/main">
               <a:ext uri="{FF2B5EF4-FFF2-40B4-BE49-F238E27FC236}">
-                <a16:creationId xmlns:a16="http://schemas.microsoft.com/office/drawing/2014/main" id="{7F676A93-A66F-4BFD-B4F7-C433AFFE6A97}"/>
+                <a16:creationId xmlns:a16="http://schemas.microsoft.com/office/drawing/2014/main" id="{9F02563F-29A2-46F5-A7FD-3A4F973A4ECF}"/>
               </a:ext>
             </a:extLst>
           </p:cNvPr>
@@ -7531,7 +7200,7 @@
           <p:cNvPr id="4" name="">
             <a:extLst xmlns:a="http://schemas.openxmlformats.org/drawingml/2006/main">
               <a:ext uri="{FF2B5EF4-FFF2-40B4-BE49-F238E27FC236}">
-                <a16:creationId xmlns:a16="http://schemas.microsoft.com/office/drawing/2014/main" id="{55B85B44-8B9C-4B59-B1E0-4234DE72F0CD}"/>
+                <a16:creationId xmlns:a16="http://schemas.microsoft.com/office/drawing/2014/main" id="{6E1A96FF-5A92-40CB-BD71-AF3CECD93A1E}"/>
               </a:ext>
             </a:extLst>
           </p:cNvPr>
@@ -8158,7 +7827,7 @@
           <p:cNvPr id="5" name="">
             <a:extLst xmlns:a="http://schemas.openxmlformats.org/drawingml/2006/main">
               <a:ext uri="{FF2B5EF4-FFF2-40B4-BE49-F238E27FC236}">
-                <a16:creationId xmlns:a16="http://schemas.microsoft.com/office/drawing/2014/main" id="{02885F77-8164-468F-8043-D8E437B1AA77}"/>
+                <a16:creationId xmlns:a16="http://schemas.microsoft.com/office/drawing/2014/main" id="{D4F78BFE-937B-483B-87BA-574634A70822}"/>
               </a:ext>
             </a:extLst>
           </p:cNvPr>
@@ -8203,7 +7872,7 @@
           <p:cNvPr id="6" name="">
             <a:extLst xmlns:a="http://schemas.openxmlformats.org/drawingml/2006/main">
               <a:ext uri="{FF2B5EF4-FFF2-40B4-BE49-F238E27FC236}">
-                <a16:creationId xmlns:a16="http://schemas.microsoft.com/office/drawing/2014/main" id="{1C749E97-2BC4-4CCD-A272-84F6A70A58B9}"/>
+                <a16:creationId xmlns:a16="http://schemas.microsoft.com/office/drawing/2014/main" id="{CA7C8BF2-569A-4393-A4CA-BBE9F904AB39}"/>
               </a:ext>
             </a:extLst>
           </p:cNvPr>
@@ -8287,7 +7956,7 @@
           <p:cNvPr id="7" name="">
             <a:extLst xmlns:a="http://schemas.openxmlformats.org/drawingml/2006/main">
               <a:ext uri="{FF2B5EF4-FFF2-40B4-BE49-F238E27FC236}">
-                <a16:creationId xmlns:a16="http://schemas.microsoft.com/office/drawing/2014/main" id="{624B9368-17C9-4E16-8F66-F5AE02387996}"/>
+                <a16:creationId xmlns:a16="http://schemas.microsoft.com/office/drawing/2014/main" id="{8ABFA3FD-1334-4A04-BB97-B37E0DF400F6}"/>
               </a:ext>
             </a:extLst>
           </p:cNvPr>
@@ -8345,7 +8014,7 @@
           <p:cNvPr id="8" name="">
             <a:extLst xmlns:a="http://schemas.openxmlformats.org/drawingml/2006/main">
               <a:ext uri="{FF2B5EF4-FFF2-40B4-BE49-F238E27FC236}">
-                <a16:creationId xmlns:a16="http://schemas.microsoft.com/office/drawing/2014/main" id="{50CCD8DB-40CF-4CAC-8FA5-50E48D3CADD9}"/>
+                <a16:creationId xmlns:a16="http://schemas.microsoft.com/office/drawing/2014/main" id="{8510017C-5FE8-4DE1-915A-24D2238088AE}"/>
               </a:ext>
             </a:extLst>
           </p:cNvPr>
@@ -8388,7 +8057,7 @@
     </p:spTree>
     <p:extLst>
       <p:ext uri="{BB962C8B-B14F-4D97-AF65-F5344CB8AC3E}">
-        <p14:creationId xmlns:p14="http://schemas.microsoft.com/office/powerpoint/2010/main" val="1534637917"/>
+        <p14:creationId xmlns:p14="http://schemas.microsoft.com/office/powerpoint/2010/main" val="131127879"/>
       </p:ext>
     </p:extLst>
   </p:cSld>
@@ -8419,7 +8088,7 @@
           <p:cNvPr id="11" name="">
             <a:extLst xmlns:a="http://schemas.openxmlformats.org/drawingml/2006/main">
               <a:ext uri="{FF2B5EF4-FFF2-40B4-BE49-F238E27FC236}">
-                <a16:creationId xmlns:a16="http://schemas.microsoft.com/office/drawing/2014/main" id="{159037B5-D6E8-499A-86F3-4E81B7BF5BE9}"/>
+                <a16:creationId xmlns:a16="http://schemas.microsoft.com/office/drawing/2014/main" id="{4ADB4BFB-34C4-4B90-8181-C53A36F60831}"/>
               </a:ext>
             </a:extLst>
           </p:cNvPr>
@@ -8454,7 +8123,7 @@
                 <a:ea typeface="Arial"/>
                 <a:cs typeface="Arial"/>
               </a:rPr>
-              <a:t>Smaller ROIs reduce reconstruction latency</a:t>
+              <a:t>Smaller regions reduce mean reconstruction latency</a:t>
             </a:r>
           </a:p>
         </p:txBody>
@@ -8464,7 +8133,7 @@
           <p:cNvPr id="2" name="">
             <a:extLst xmlns:a="http://schemas.openxmlformats.org/drawingml/2006/main">
               <a:ext uri="{FF2B5EF4-FFF2-40B4-BE49-F238E27FC236}">
-                <a16:creationId xmlns:a16="http://schemas.microsoft.com/office/drawing/2014/main" id="{61BAFDB1-8DF9-4A81-AA82-3C007B810952}"/>
+                <a16:creationId xmlns:a16="http://schemas.microsoft.com/office/drawing/2014/main" id="{2A272761-80DE-40EC-A22D-ABA5ED33A7EA}"/>
               </a:ext>
             </a:extLst>
           </p:cNvPr>
@@ -8494,7 +8163,7 @@
           <p:cNvPr id="3" name="">
             <a:extLst xmlns:a="http://schemas.openxmlformats.org/drawingml/2006/main">
               <a:ext uri="{FF2B5EF4-FFF2-40B4-BE49-F238E27FC236}">
-                <a16:creationId xmlns:a16="http://schemas.microsoft.com/office/drawing/2014/main" id="{5E4B7DCC-786B-4049-84FC-CF66DCBC316D}"/>
+                <a16:creationId xmlns:a16="http://schemas.microsoft.com/office/drawing/2014/main" id="{D180BEBD-FF4F-48E6-8B3F-9B6A3DA5CCB4}"/>
               </a:ext>
             </a:extLst>
           </p:cNvPr>
@@ -8539,7 +8208,7 @@
           <p:cNvPr id="4" name="Chart">
             <a:extLst xmlns:a="http://schemas.openxmlformats.org/drawingml/2006/main">
               <a:ext uri="{FF2B5EF4-FFF2-40B4-BE49-F238E27FC236}">
-                <a16:creationId xmlns:a16="http://schemas.microsoft.com/office/drawing/2014/main" id="{6879EB65-2339-4500-B855-83CD35645EE0}"/>
+                <a16:creationId xmlns:a16="http://schemas.microsoft.com/office/drawing/2014/main" id="{CD33B910-C7B2-4659-9753-207749475AEB}"/>
               </a:ext>
             </a:extLst>
           </p:cNvPr>
@@ -8552,7 +8221,7 @@
         </p:xfrm>
         <a:graphic xmlns:a="http://schemas.openxmlformats.org/drawingml/2006/main">
           <a:graphicData uri="http://schemas.openxmlformats.org/drawingml/2006/chart">
-            <c:chart xmlns:r="http://schemas.openxmlformats.org/officeDocument/2006/relationships" xmlns:c="http://schemas.openxmlformats.org/drawingml/2006/chart" r:id="Rfe44980139134222"/>
+            <c:chart xmlns:r="http://schemas.openxmlformats.org/officeDocument/2006/relationships" xmlns:c="http://schemas.openxmlformats.org/drawingml/2006/chart" r:id="R6fe50d0e34524fae"/>
           </a:graphicData>
         </a:graphic>
       </p:graphicFrame>
@@ -8561,7 +8230,7 @@
           <p:cNvPr id="5" name="">
             <a:extLst xmlns:a="http://schemas.openxmlformats.org/drawingml/2006/main">
               <a:ext uri="{FF2B5EF4-FFF2-40B4-BE49-F238E27FC236}">
-                <a16:creationId xmlns:a16="http://schemas.microsoft.com/office/drawing/2014/main" id="{2BE28F57-DCEF-4234-844B-F2CE730F7E89}"/>
+                <a16:creationId xmlns:a16="http://schemas.microsoft.com/office/drawing/2014/main" id="{344F4255-94A1-4AFC-AA83-3CEE682EEC26}"/>
               </a:ext>
             </a:extLst>
           </p:cNvPr>
@@ -8596,7 +8265,7 @@
                 <a:ea typeface="Arial"/>
                 <a:cs typeface="Arial"/>
               </a:rPr>
-              <a:t>160 × 90</a:t>
+              <a:t>2.8% region</a:t>
             </a:r>
           </a:p>
         </p:txBody>
@@ -8606,7 +8275,7 @@
           <p:cNvPr id="6" name="">
             <a:extLst xmlns:a="http://schemas.openxmlformats.org/drawingml/2006/main">
               <a:ext uri="{FF2B5EF4-FFF2-40B4-BE49-F238E27FC236}">
-                <a16:creationId xmlns:a16="http://schemas.microsoft.com/office/drawing/2014/main" id="{826B61A3-AC58-456F-96AE-F44C9060C116}"/>
+                <a16:creationId xmlns:a16="http://schemas.microsoft.com/office/drawing/2014/main" id="{1BA3FF1E-0086-4129-B500-3C2A1CF3346B}"/>
               </a:ext>
             </a:extLst>
           </p:cNvPr>
@@ -8641,7 +8310,7 @@
                 <a:ea typeface="Arial"/>
                 <a:cs typeface="Arial"/>
               </a:rPr>
-              <a:t>4.637 ms</a:t>
+              <a:t>4.770 ms</a:t>
             </a:r>
           </a:p>
         </p:txBody>
@@ -8651,7 +8320,7 @@
           <p:cNvPr id="7" name="">
             <a:extLst xmlns:a="http://schemas.openxmlformats.org/drawingml/2006/main">
               <a:ext uri="{FF2B5EF4-FFF2-40B4-BE49-F238E27FC236}">
-                <a16:creationId xmlns:a16="http://schemas.microsoft.com/office/drawing/2014/main" id="{B2F8C96E-E53C-40C8-8131-8FBDADDA5774}"/>
+                <a16:creationId xmlns:a16="http://schemas.microsoft.com/office/drawing/2014/main" id="{54B98CA0-2DE1-4979-9864-3F9F4F5D4D00}"/>
               </a:ext>
             </a:extLst>
           </p:cNvPr>
@@ -8686,7 +8355,7 @@
                 <a:ea typeface="Arial"/>
                 <a:cs typeface="Arial"/>
               </a:rPr>
-              <a:t>resident p50</a:t>
+              <a:t>resident mean</a:t>
             </a:r>
           </a:p>
         </p:txBody>
@@ -8696,7 +8365,7 @@
           <p:cNvPr id="8" name="">
             <a:extLst xmlns:a="http://schemas.openxmlformats.org/drawingml/2006/main">
               <a:ext uri="{FF2B5EF4-FFF2-40B4-BE49-F238E27FC236}">
-                <a16:creationId xmlns:a16="http://schemas.microsoft.com/office/drawing/2014/main" id="{B8BD9D79-49E0-4A6A-AFDD-15AFC17DF6CD}"/>
+                <a16:creationId xmlns:a16="http://schemas.microsoft.com/office/drawing/2014/main" id="{FD55F184-05A2-4D7B-ABE0-18E177EF365A}"/>
               </a:ext>
             </a:extLst>
           </p:cNvPr>
@@ -8731,7 +8400,7 @@
                 <a:ea typeface="Arial"/>
                 <a:cs typeface="Arial"/>
               </a:rPr>
-              <a:t>2.32×</a:t>
+              <a:t>2.31×</a:t>
             </a:r>
           </a:p>
         </p:txBody>
@@ -8741,7 +8410,7 @@
           <p:cNvPr id="9" name="">
             <a:extLst xmlns:a="http://schemas.openxmlformats.org/drawingml/2006/main">
               <a:ext uri="{FF2B5EF4-FFF2-40B4-BE49-F238E27FC236}">
-                <a16:creationId xmlns:a16="http://schemas.microsoft.com/office/drawing/2014/main" id="{C5DA8CA3-7CF0-48FE-B260-7E19C27BE8E6}"/>
+                <a16:creationId xmlns:a16="http://schemas.microsoft.com/office/drawing/2014/main" id="{563B1E9E-B94F-4E86-8203-7D61A7439F98}"/>
               </a:ext>
             </a:extLst>
           </p:cNvPr>
@@ -8786,7 +8455,7 @@
           <p:cNvPr id="10" name="">
             <a:extLst xmlns:a="http://schemas.openxmlformats.org/drawingml/2006/main">
               <a:ext uri="{FF2B5EF4-FFF2-40B4-BE49-F238E27FC236}">
-                <a16:creationId xmlns:a16="http://schemas.microsoft.com/office/drawing/2014/main" id="{8F93F5BE-6DE6-4A9E-8B64-CFDB0E522965}"/>
+                <a16:creationId xmlns:a16="http://schemas.microsoft.com/office/drawing/2014/main" id="{E44916F6-F2B9-42F8-8E6D-4859535A2C9D}"/>
               </a:ext>
             </a:extLst>
           </p:cNvPr>
@@ -8829,7 +8498,7 @@
     </p:spTree>
     <p:extLst>
       <p:ext uri="{BB962C8B-B14F-4D97-AF65-F5344CB8AC3E}">
-        <p14:creationId xmlns:p14="http://schemas.microsoft.com/office/powerpoint/2010/main" val="907630767"/>
+        <p14:creationId xmlns:p14="http://schemas.microsoft.com/office/powerpoint/2010/main" val="724990584"/>
       </p:ext>
     </p:extLst>
   </p:cSld>
@@ -8860,7 +8529,7 @@
           <p:cNvPr id="8" name="">
             <a:extLst xmlns:a="http://schemas.openxmlformats.org/drawingml/2006/main">
               <a:ext uri="{FF2B5EF4-FFF2-40B4-BE49-F238E27FC236}">
-                <a16:creationId xmlns:a16="http://schemas.microsoft.com/office/drawing/2014/main" id="{C6D0B137-96C4-473A-9E1C-795494FC27D6}"/>
+                <a16:creationId xmlns:a16="http://schemas.microsoft.com/office/drawing/2014/main" id="{99BDEB03-94C3-4F85-A8BD-F22D45934F32}"/>
               </a:ext>
             </a:extLst>
           </p:cNvPr>
@@ -8905,7 +8574,7 @@
           <p:cNvPr id="2" name="">
             <a:extLst xmlns:a="http://schemas.openxmlformats.org/drawingml/2006/main">
               <a:ext uri="{FF2B5EF4-FFF2-40B4-BE49-F238E27FC236}">
-                <a16:creationId xmlns:a16="http://schemas.microsoft.com/office/drawing/2014/main" id="{F7B9FF6C-89F3-4682-9B82-EFF3B97D0319}"/>
+                <a16:creationId xmlns:a16="http://schemas.microsoft.com/office/drawing/2014/main" id="{D0FEB489-62CA-4624-9ED2-338E2E06FB11}"/>
               </a:ext>
             </a:extLst>
           </p:cNvPr>
@@ -8935,7 +8604,7 @@
           <p:cNvPr id="3" name="">
             <a:extLst xmlns:a="http://schemas.openxmlformats.org/drawingml/2006/main">
               <a:ext uri="{FF2B5EF4-FFF2-40B4-BE49-F238E27FC236}">
-                <a16:creationId xmlns:a16="http://schemas.microsoft.com/office/drawing/2014/main" id="{B12D5BC5-B08B-46A2-8F8C-B41DD64EFB62}"/>
+                <a16:creationId xmlns:a16="http://schemas.microsoft.com/office/drawing/2014/main" id="{12C368B3-E133-41D2-A1AA-128ADCB2E0DE}"/>
               </a:ext>
             </a:extLst>
           </p:cNvPr>
@@ -8980,7 +8649,7 @@
           <p:cNvPr id="4" name="">
             <a:extLst xmlns:a="http://schemas.openxmlformats.org/drawingml/2006/main">
               <a:ext uri="{FF2B5EF4-FFF2-40B4-BE49-F238E27FC236}">
-                <a16:creationId xmlns:a16="http://schemas.microsoft.com/office/drawing/2014/main" id="{E328D3EE-F070-4E0C-97E2-9C292D027963}"/>
+                <a16:creationId xmlns:a16="http://schemas.microsoft.com/office/drawing/2014/main" id="{88D90900-5DE1-41F3-B3D3-3E359679A66A}"/>
               </a:ext>
             </a:extLst>
           </p:cNvPr>
@@ -8996,8 +8665,8 @@
             <a:tbl>
               <a:tblPr/>
               <a:tblGrid>
-                <a:gridCol w="1857375"/>
-                <a:gridCol w="3286125"/>
+                <a:gridCol w="2524125"/>
+                <a:gridCol w="2619375"/>
                 <a:gridCol w="2724150"/>
                 <a:gridCol w="3105150"/>
               </a:tblGrid>
@@ -9016,7 +8685,7 @@
                           <a:ea typeface="Arial"/>
                           <a:cs typeface="Arial"/>
                         </a:rPr>
-                        <a:t>ROI</a:t>
+                        <a:t>Region (% of image)</a:t>
                       </a:r>
                     </a:p>
                   </a:txBody>
@@ -9064,7 +8733,7 @@
                           <a:ea typeface="Arial"/>
                           <a:cs typeface="Arial"/>
                         </a:rPr>
-                        <a:t>resident p50 / p95</a:t>
+                        <a:t>Mean latency</a:t>
                       </a:r>
                     </a:p>
                   </a:txBody>
@@ -9192,7 +8861,7 @@
                           <a:ea typeface="Arial"/>
                           <a:cs typeface="Arial"/>
                         </a:rPr>
-                        <a:t>80×46</a:t>
+                        <a:t>0.7%</a:t>
                       </a:r>
                     </a:p>
                   </a:txBody>
@@ -9234,7 +8903,7 @@
                           <a:ea typeface="Arial"/>
                           <a:cs typeface="Arial"/>
                         </a:rPr>
-                        <a:t>4.367 / 4.782 ms</a:t>
+                        <a:t>4.562 ms</a:t>
                       </a:r>
                     </a:p>
                   </a:txBody>
@@ -9344,7 +9013,7 @@
                           <a:ea typeface="Arial"/>
                           <a:cs typeface="Arial"/>
                         </a:rPr>
-                        <a:t>160×90</a:t>
+                        <a:t>2.8%</a:t>
                       </a:r>
                     </a:p>
                   </a:txBody>
@@ -9386,7 +9055,7 @@
                           <a:ea typeface="Arial"/>
                           <a:cs typeface="Arial"/>
                         </a:rPr>
-                        <a:t>4.637 / 5.016 ms</a:t>
+                        <a:t>4.770 ms</a:t>
                       </a:r>
                     </a:p>
                   </a:txBody>
@@ -9496,7 +9165,7 @@
                           <a:ea typeface="Arial"/>
                           <a:cs typeface="Arial"/>
                         </a:rPr>
-                        <a:t>320×180</a:t>
+                        <a:t>11.1%</a:t>
                       </a:r>
                     </a:p>
                   </a:txBody>
@@ -9538,7 +9207,7 @@
                           <a:ea typeface="Arial"/>
                           <a:cs typeface="Arial"/>
                         </a:rPr>
-                        <a:t>5.788 / 6.220 ms</a:t>
+                        <a:t>5.998 ms</a:t>
                       </a:r>
                     </a:p>
                   </a:txBody>
@@ -9648,7 +9317,7 @@
                           <a:ea typeface="Arial"/>
                           <a:cs typeface="Arial"/>
                         </a:rPr>
-                        <a:t>480×270</a:t>
+                        <a:t>25.0%</a:t>
                       </a:r>
                     </a:p>
                   </a:txBody>
@@ -9690,7 +9359,7 @@
                           <a:ea typeface="Arial"/>
                           <a:cs typeface="Arial"/>
                         </a:rPr>
-                        <a:t>7.582 / 8.009 ms</a:t>
+                        <a:t>7.772 ms</a:t>
                       </a:r>
                     </a:p>
                   </a:txBody>
@@ -9800,7 +9469,7 @@
                           <a:ea typeface="Arial"/>
                           <a:cs typeface="Arial"/>
                         </a:rPr>
-                        <a:t>640×360</a:t>
+                        <a:t>44.4%</a:t>
                       </a:r>
                     </a:p>
                   </a:txBody>
@@ -9842,7 +9511,7 @@
                           <a:ea typeface="Arial"/>
                           <a:cs typeface="Arial"/>
                         </a:rPr>
-                        <a:t>10.142 / 10.633 ms</a:t>
+                        <a:t>10.425 ms</a:t>
                       </a:r>
                     </a:p>
                   </a:txBody>
@@ -9946,7 +9615,7 @@
           <p:cNvPr id="5" name="">
             <a:extLst xmlns:a="http://schemas.openxmlformats.org/drawingml/2006/main">
               <a:ext uri="{FF2B5EF4-FFF2-40B4-BE49-F238E27FC236}">
-                <a16:creationId xmlns:a16="http://schemas.microsoft.com/office/drawing/2014/main" id="{C1DDDF4F-399D-4A77-B343-80B7BD53DABA}"/>
+                <a16:creationId xmlns:a16="http://schemas.microsoft.com/office/drawing/2014/main" id="{5FC05E40-E6A0-429B-B055-7F5AFE1849F1}"/>
               </a:ext>
             </a:extLst>
           </p:cNvPr>
@@ -9991,7 +9660,7 @@
           <p:cNvPr id="6" name="">
             <a:extLst xmlns:a="http://schemas.openxmlformats.org/drawingml/2006/main">
               <a:ext uri="{FF2B5EF4-FFF2-40B4-BE49-F238E27FC236}">
-                <a16:creationId xmlns:a16="http://schemas.microsoft.com/office/drawing/2014/main" id="{F0B496E0-8A3E-49A0-8B5E-345277B3764B}"/>
+                <a16:creationId xmlns:a16="http://schemas.microsoft.com/office/drawing/2014/main" id="{73C3F9B4-C175-4DB3-91DB-DA77957E6C8E}"/>
               </a:ext>
             </a:extLst>
           </p:cNvPr>
@@ -10036,7 +9705,7 @@
           <p:cNvPr id="7" name="">
             <a:extLst xmlns:a="http://schemas.openxmlformats.org/drawingml/2006/main">
               <a:ext uri="{FF2B5EF4-FFF2-40B4-BE49-F238E27FC236}">
-                <a16:creationId xmlns:a16="http://schemas.microsoft.com/office/drawing/2014/main" id="{406A9112-544B-470F-99F6-23EFF9EBE0ED}"/>
+                <a16:creationId xmlns:a16="http://schemas.microsoft.com/office/drawing/2014/main" id="{E2216766-BD64-4B78-AA06-850E8AECC58E}"/>
               </a:ext>
             </a:extLst>
           </p:cNvPr>
@@ -10079,7 +9748,7 @@
     </p:spTree>
     <p:extLst>
       <p:ext uri="{BB962C8B-B14F-4D97-AF65-F5344CB8AC3E}">
-        <p14:creationId xmlns:p14="http://schemas.microsoft.com/office/powerpoint/2010/main" val="1989724727"/>
+        <p14:creationId xmlns:p14="http://schemas.microsoft.com/office/powerpoint/2010/main" val="1884823736"/>
       </p:ext>
     </p:extLst>
   </p:cSld>
@@ -10110,7 +9779,7 @@
           <p:cNvPr id="8" name="">
             <a:extLst xmlns:a="http://schemas.openxmlformats.org/drawingml/2006/main">
               <a:ext uri="{FF2B5EF4-FFF2-40B4-BE49-F238E27FC236}">
-                <a16:creationId xmlns:a16="http://schemas.microsoft.com/office/drawing/2014/main" id="{55F20226-30BC-4012-A5D8-D03A7CF24F84}"/>
+                <a16:creationId xmlns:a16="http://schemas.microsoft.com/office/drawing/2014/main" id="{861CFD4F-196D-4187-B4E1-37CE9FB5D040}"/>
               </a:ext>
             </a:extLst>
           </p:cNvPr>
@@ -10155,7 +9824,7 @@
           <p:cNvPr id="2" name="">
             <a:extLst xmlns:a="http://schemas.openxmlformats.org/drawingml/2006/main">
               <a:ext uri="{FF2B5EF4-FFF2-40B4-BE49-F238E27FC236}">
-                <a16:creationId xmlns:a16="http://schemas.microsoft.com/office/drawing/2014/main" id="{8474A939-3E61-49EB-BB4E-5F0D7D7A6779}"/>
+                <a16:creationId xmlns:a16="http://schemas.microsoft.com/office/drawing/2014/main" id="{72AC12A9-5F94-4132-8AE3-2A64471FE985}"/>
               </a:ext>
             </a:extLst>
           </p:cNvPr>
@@ -10185,7 +9854,7 @@
           <p:cNvPr id="3" name="">
             <a:extLst xmlns:a="http://schemas.openxmlformats.org/drawingml/2006/main">
               <a:ext uri="{FF2B5EF4-FFF2-40B4-BE49-F238E27FC236}">
-                <a16:creationId xmlns:a16="http://schemas.microsoft.com/office/drawing/2014/main" id="{F33769DB-7BD3-4E61-A7A5-A794A0F7DA3B}"/>
+                <a16:creationId xmlns:a16="http://schemas.microsoft.com/office/drawing/2014/main" id="{816C0584-468D-4BEB-A1CD-FA6733995531}"/>
               </a:ext>
             </a:extLst>
           </p:cNvPr>
@@ -10230,7 +9899,7 @@
           <p:cNvPr id="4" name="">
             <a:extLst xmlns:a="http://schemas.openxmlformats.org/drawingml/2006/main">
               <a:ext uri="{FF2B5EF4-FFF2-40B4-BE49-F238E27FC236}">
-                <a16:creationId xmlns:a16="http://schemas.microsoft.com/office/drawing/2014/main" id="{DE72B5A8-59EA-4640-AF17-0E588DE3916E}"/>
+                <a16:creationId xmlns:a16="http://schemas.microsoft.com/office/drawing/2014/main" id="{63C6A5E1-5966-422B-826E-618720D26433}"/>
               </a:ext>
             </a:extLst>
           </p:cNvPr>
@@ -10356,7 +10025,7 @@
                           <a:ea typeface="Arial"/>
                           <a:cs typeface="Arial"/>
                         </a:rPr>
-                        <a:t>ROI 160×90</a:t>
+                        <a:t>Region 2.8%</a:t>
                       </a:r>
                     </a:p>
                   </a:txBody>
@@ -10398,7 +10067,7 @@
                           <a:ea typeface="Arial"/>
                           <a:cs typeface="Arial"/>
                         </a:rPr>
-                        <a:t>ROI 320×180</a:t>
+                        <a:t>Region 11.1%</a:t>
                       </a:r>
                     </a:p>
                   </a:txBody>
@@ -10484,7 +10153,7 @@
                           <a:ea typeface="Arial"/>
                           <a:cs typeface="Arial"/>
                         </a:rPr>
-                        <a:t>14.653</a:t>
+                        <a:t>14.661</a:t>
                       </a:r>
                     </a:p>
                   </a:txBody>
@@ -10520,7 +10189,7 @@
                           <a:ea typeface="Arial"/>
                           <a:cs typeface="Arial"/>
                         </a:rPr>
-                        <a:t>8.923</a:t>
+                        <a:t>8.924</a:t>
                       </a:r>
                     </a:p>
                   </a:txBody>
@@ -10556,7 +10225,7 @@
                           <a:ea typeface="Arial"/>
                           <a:cs typeface="Arial"/>
                         </a:rPr>
-                        <a:t>10.299</a:t>
+                        <a:t>10.304</a:t>
                       </a:r>
                     </a:p>
                   </a:txBody>
@@ -10636,7 +10305,7 @@
                           <a:ea typeface="Arial"/>
                           <a:cs typeface="Arial"/>
                         </a:rPr>
-                        <a:t>14.421</a:t>
+                        <a:t>14.433</a:t>
                       </a:r>
                     </a:p>
                   </a:txBody>
@@ -10672,7 +10341,7 @@
                           <a:ea typeface="Arial"/>
                           <a:cs typeface="Arial"/>
                         </a:rPr>
-                        <a:t>8.900</a:t>
+                        <a:t>8.910</a:t>
                       </a:r>
                     </a:p>
                   </a:txBody>
@@ -10708,7 +10377,7 @@
                           <a:ea typeface="Arial"/>
                           <a:cs typeface="Arial"/>
                         </a:rPr>
-                        <a:t>10.280</a:t>
+                        <a:t>10.282</a:t>
                       </a:r>
                     </a:p>
                   </a:txBody>
@@ -10788,7 +10457,7 @@
                           <a:ea typeface="Arial"/>
                           <a:cs typeface="Arial"/>
                         </a:rPr>
-                        <a:t>14.536</a:t>
+                        <a:t>14.537</a:t>
                       </a:r>
                     </a:p>
                   </a:txBody>
@@ -10824,7 +10493,7 @@
                           <a:ea typeface="Arial"/>
                           <a:cs typeface="Arial"/>
                         </a:rPr>
-                        <a:t>8.910</a:t>
+                        <a:t>8.911</a:t>
                       </a:r>
                     </a:p>
                   </a:txBody>
@@ -10860,7 +10529,7 @@
                           <a:ea typeface="Arial"/>
                           <a:cs typeface="Arial"/>
                         </a:rPr>
-                        <a:t>10.322</a:t>
+                        <a:t>10.323</a:t>
                       </a:r>
                     </a:p>
                   </a:txBody>
@@ -10940,7 +10609,7 @@
                           <a:ea typeface="Arial"/>
                           <a:cs typeface="Arial"/>
                         </a:rPr>
-                        <a:t>14.534</a:t>
+                        <a:t>14.567</a:t>
                       </a:r>
                     </a:p>
                   </a:txBody>
@@ -10976,7 +10645,7 @@
                           <a:ea typeface="Arial"/>
                           <a:cs typeface="Arial"/>
                         </a:rPr>
-                        <a:t>8.936</a:t>
+                        <a:t>8.959</a:t>
                       </a:r>
                     </a:p>
                   </a:txBody>
@@ -11012,7 +10681,7 @@
                           <a:ea typeface="Arial"/>
                           <a:cs typeface="Arial"/>
                         </a:rPr>
-                        <a:t>10.331</a:t>
+                        <a:t>10.372</a:t>
                       </a:r>
                     </a:p>
                   </a:txBody>
@@ -11044,7 +10713,7 @@
           <p:cNvPr id="5" name="">
             <a:extLst xmlns:a="http://schemas.openxmlformats.org/drawingml/2006/main">
               <a:ext uri="{FF2B5EF4-FFF2-40B4-BE49-F238E27FC236}">
-                <a16:creationId xmlns:a16="http://schemas.microsoft.com/office/drawing/2014/main" id="{1E63FD27-E509-4108-841B-6F969C70278A}"/>
+                <a16:creationId xmlns:a16="http://schemas.microsoft.com/office/drawing/2014/main" id="{A1718091-5726-434A-9740-62A41D7B4F92}"/>
               </a:ext>
             </a:extLst>
           </p:cNvPr>
@@ -11079,7 +10748,7 @@
                 <a:ea typeface="Arial"/>
                 <a:cs typeface="Arial"/>
               </a:rPr>
-              <a:t>15W. Frame 39 per sequence, 100 repeats. Preallocated resident-path p50.</a:t>
+              <a:t>15W. Frame 39 per sequence, 100 repeats. Preallocated resident-path mean.</a:t>
             </a:r>
           </a:p>
         </p:txBody>
@@ -11089,7 +10758,7 @@
           <p:cNvPr id="6" name="">
             <a:extLst xmlns:a="http://schemas.openxmlformats.org/drawingml/2006/main">
               <a:ext uri="{FF2B5EF4-FFF2-40B4-BE49-F238E27FC236}">
-                <a16:creationId xmlns:a16="http://schemas.microsoft.com/office/drawing/2014/main" id="{5949EFA3-7A4E-4C44-A579-FFC55D5E8F01}"/>
+                <a16:creationId xmlns:a16="http://schemas.microsoft.com/office/drawing/2014/main" id="{AC302475-2710-4259-AA04-8A5C74A2CFE9}"/>
               </a:ext>
             </a:extLst>
           </p:cNvPr>
@@ -11147,7 +10816,7 @@
           <p:cNvPr id="7" name="">
             <a:extLst xmlns:a="http://schemas.openxmlformats.org/drawingml/2006/main">
               <a:ext uri="{FF2B5EF4-FFF2-40B4-BE49-F238E27FC236}">
-                <a16:creationId xmlns:a16="http://schemas.microsoft.com/office/drawing/2014/main" id="{942C828E-A88C-4A8E-99D2-A389E9465E8B}"/>
+                <a16:creationId xmlns:a16="http://schemas.microsoft.com/office/drawing/2014/main" id="{888C63B8-D0AA-4A9B-B137-A61348C5E26F}"/>
               </a:ext>
             </a:extLst>
           </p:cNvPr>
@@ -11182,7 +10851,7 @@
                 <a:ea typeface="Arial"/>
                 <a:cs typeface="Arial"/>
               </a:rPr>
-              <a:t>Original generate_right also runs, with allocation/transfer and startup drift. 30W awaits an authenticated power-mode switch.</a:t>
+              <a:t>Original generate_right also runs with allocation/transfer and startup drift. See the companion deck for 30W.</a:t>
             </a:r>
           </a:p>
         </p:txBody>
@@ -11190,7 +10859,7 @@
     </p:spTree>
     <p:extLst>
       <p:ext uri="{BB962C8B-B14F-4D97-AF65-F5344CB8AC3E}">
-        <p14:creationId xmlns:p14="http://schemas.microsoft.com/office/powerpoint/2010/main" val="145402256"/>
+        <p14:creationId xmlns:p14="http://schemas.microsoft.com/office/powerpoint/2010/main" val="360118"/>
       </p:ext>
     </p:extLst>
   </p:cSld>
@@ -11221,7 +10890,7 @@
           <p:cNvPr id="14" name="">
             <a:extLst xmlns:a="http://schemas.openxmlformats.org/drawingml/2006/main">
               <a:ext uri="{FF2B5EF4-FFF2-40B4-BE49-F238E27FC236}">
-                <a16:creationId xmlns:a16="http://schemas.microsoft.com/office/drawing/2014/main" id="{407DF122-3D27-4782-9121-8681FDCF1191}"/>
+                <a16:creationId xmlns:a16="http://schemas.microsoft.com/office/drawing/2014/main" id="{28C68A00-B345-43AA-A2D5-A51C63EBB164}"/>
               </a:ext>
             </a:extLst>
           </p:cNvPr>
@@ -11266,7 +10935,7 @@
           <p:cNvPr id="2" name="">
             <a:extLst xmlns:a="http://schemas.openxmlformats.org/drawingml/2006/main">
               <a:ext uri="{FF2B5EF4-FFF2-40B4-BE49-F238E27FC236}">
-                <a16:creationId xmlns:a16="http://schemas.microsoft.com/office/drawing/2014/main" id="{5BE06667-6C81-4395-B134-59242FB86C0C}"/>
+                <a16:creationId xmlns:a16="http://schemas.microsoft.com/office/drawing/2014/main" id="{5E7725BE-6B20-4D8F-AE6F-E788F362167A}"/>
               </a:ext>
             </a:extLst>
           </p:cNvPr>
@@ -11296,7 +10965,7 @@
           <p:cNvPr id="3" name="">
             <a:extLst xmlns:a="http://schemas.openxmlformats.org/drawingml/2006/main">
               <a:ext uri="{FF2B5EF4-FFF2-40B4-BE49-F238E27FC236}">
-                <a16:creationId xmlns:a16="http://schemas.microsoft.com/office/drawing/2014/main" id="{FD481E1A-A0A2-4B83-8AA6-61380BCEF3AD}"/>
+                <a16:creationId xmlns:a16="http://schemas.microsoft.com/office/drawing/2014/main" id="{40A01C89-F0AC-48B0-9A2B-D868556E8005}"/>
               </a:ext>
             </a:extLst>
           </p:cNvPr>
@@ -11341,7 +11010,7 @@
           <p:cNvPr id="4" name="">
             <a:extLst xmlns:a="http://schemas.openxmlformats.org/drawingml/2006/main">
               <a:ext uri="{FF2B5EF4-FFF2-40B4-BE49-F238E27FC236}">
-                <a16:creationId xmlns:a16="http://schemas.microsoft.com/office/drawing/2014/main" id="{306F45A1-317B-4620-9459-379E86A7CD62}"/>
+                <a16:creationId xmlns:a16="http://schemas.microsoft.com/office/drawing/2014/main" id="{2C10F6C8-EDC2-44EE-B052-128992A334D7}"/>
               </a:ext>
             </a:extLst>
           </p:cNvPr>
@@ -11386,7 +11055,7 @@
           <p:cNvPr id="5" name="">
             <a:extLst xmlns:a="http://schemas.openxmlformats.org/drawingml/2006/main">
               <a:ext uri="{FF2B5EF4-FFF2-40B4-BE49-F238E27FC236}">
-                <a16:creationId xmlns:a16="http://schemas.microsoft.com/office/drawing/2014/main" id="{0418A054-5307-4647-B1E9-1C253012A43F}"/>
+                <a16:creationId xmlns:a16="http://schemas.microsoft.com/office/drawing/2014/main" id="{46A73E9B-4789-4A5E-8E25-7A04C276412A}"/>
               </a:ext>
             </a:extLst>
           </p:cNvPr>
@@ -11431,7 +11100,7 @@
           <p:cNvPr id="6" name="">
             <a:extLst xmlns:a="http://schemas.openxmlformats.org/drawingml/2006/main">
               <a:ext uri="{FF2B5EF4-FFF2-40B4-BE49-F238E27FC236}">
-                <a16:creationId xmlns:a16="http://schemas.microsoft.com/office/drawing/2014/main" id="{0E6B6DFE-8DAE-4348-9AF5-B844193EEAD7}"/>
+                <a16:creationId xmlns:a16="http://schemas.microsoft.com/office/drawing/2014/main" id="{14212434-C80A-4BED-AE3B-EABEBC9F5A4F}"/>
               </a:ext>
             </a:extLst>
           </p:cNvPr>
@@ -11476,7 +11145,7 @@
           <p:cNvPr id="7" name="">
             <a:extLst xmlns:a="http://schemas.openxmlformats.org/drawingml/2006/main">
               <a:ext uri="{FF2B5EF4-FFF2-40B4-BE49-F238E27FC236}">
-                <a16:creationId xmlns:a16="http://schemas.microsoft.com/office/drawing/2014/main" id="{7D9F79C0-007C-49D2-BE59-C6F36E86BE1C}"/>
+                <a16:creationId xmlns:a16="http://schemas.microsoft.com/office/drawing/2014/main" id="{D9D49649-CF60-4732-A9D2-3B9454CA8F6C}"/>
               </a:ext>
             </a:extLst>
           </p:cNvPr>
@@ -11521,7 +11190,7 @@
           <p:cNvPr id="8" name="">
             <a:extLst xmlns:a="http://schemas.openxmlformats.org/drawingml/2006/main">
               <a:ext uri="{FF2B5EF4-FFF2-40B4-BE49-F238E27FC236}">
-                <a16:creationId xmlns:a16="http://schemas.microsoft.com/office/drawing/2014/main" id="{59AF5CFA-4BC3-4EC4-A439-A935544BBD66}"/>
+                <a16:creationId xmlns:a16="http://schemas.microsoft.com/office/drawing/2014/main" id="{983EB2CB-D45B-49B2-907E-47D03D3A11C6}"/>
               </a:ext>
             </a:extLst>
           </p:cNvPr>
@@ -11566,7 +11235,7 @@
           <p:cNvPr id="9" name="">
             <a:extLst xmlns:a="http://schemas.openxmlformats.org/drawingml/2006/main">
               <a:ext uri="{FF2B5EF4-FFF2-40B4-BE49-F238E27FC236}">
-                <a16:creationId xmlns:a16="http://schemas.microsoft.com/office/drawing/2014/main" id="{58A890D5-8B03-40F8-BEFE-66E3F8055FB2}"/>
+                <a16:creationId xmlns:a16="http://schemas.microsoft.com/office/drawing/2014/main" id="{70E17360-475E-4994-B6AF-C744956E562E}"/>
               </a:ext>
             </a:extLst>
           </p:cNvPr>
@@ -11611,7 +11280,7 @@
           <p:cNvPr id="10" name="">
             <a:extLst xmlns:a="http://schemas.openxmlformats.org/drawingml/2006/main">
               <a:ext uri="{FF2B5EF4-FFF2-40B4-BE49-F238E27FC236}">
-                <a16:creationId xmlns:a16="http://schemas.microsoft.com/office/drawing/2014/main" id="{57700896-B886-4EC7-A12F-80D2F6822423}"/>
+                <a16:creationId xmlns:a16="http://schemas.microsoft.com/office/drawing/2014/main" id="{94B0689C-66D6-4568-B695-B0EE61A7F8CD}"/>
               </a:ext>
             </a:extLst>
           </p:cNvPr>
@@ -11656,7 +11325,7 @@
           <p:cNvPr id="11" name="">
             <a:extLst xmlns:a="http://schemas.openxmlformats.org/drawingml/2006/main">
               <a:ext uri="{FF2B5EF4-FFF2-40B4-BE49-F238E27FC236}">
-                <a16:creationId xmlns:a16="http://schemas.microsoft.com/office/drawing/2014/main" id="{5130A238-F2CE-4BA6-87FE-52229B148356}"/>
+                <a16:creationId xmlns:a16="http://schemas.microsoft.com/office/drawing/2014/main" id="{2EF3CB6E-847C-485F-A785-912CC74E3FDF}"/>
               </a:ext>
             </a:extLst>
           </p:cNvPr>
@@ -11701,7 +11370,7 @@
           <p:cNvPr id="12" name="">
             <a:extLst xmlns:a="http://schemas.openxmlformats.org/drawingml/2006/main">
               <a:ext uri="{FF2B5EF4-FFF2-40B4-BE49-F238E27FC236}">
-                <a16:creationId xmlns:a16="http://schemas.microsoft.com/office/drawing/2014/main" id="{DF183BD2-6284-402A-80D6-7FECBBBE0AC8}"/>
+                <a16:creationId xmlns:a16="http://schemas.microsoft.com/office/drawing/2014/main" id="{7E148619-09B9-4A6C-B7FB-675940E1F930}"/>
               </a:ext>
             </a:extLst>
           </p:cNvPr>
@@ -11746,7 +11415,7 @@
           <p:cNvPr id="13" name="">
             <a:extLst xmlns:a="http://schemas.openxmlformats.org/drawingml/2006/main">
               <a:ext uri="{FF2B5EF4-FFF2-40B4-BE49-F238E27FC236}">
-                <a16:creationId xmlns:a16="http://schemas.microsoft.com/office/drawing/2014/main" id="{528362FE-1559-4D43-9D43-E174FC8E0F24}"/>
+                <a16:creationId xmlns:a16="http://schemas.microsoft.com/office/drawing/2014/main" id="{65848F9E-45D3-4C03-8D80-0EBC3FD96678}"/>
               </a:ext>
             </a:extLst>
           </p:cNvPr>
@@ -11789,7 +11458,7 @@
     </p:spTree>
     <p:extLst>
       <p:ext uri="{BB962C8B-B14F-4D97-AF65-F5344CB8AC3E}">
-        <p14:creationId xmlns:p14="http://schemas.microsoft.com/office/powerpoint/2010/main" val="1001598602"/>
+        <p14:creationId xmlns:p14="http://schemas.microsoft.com/office/powerpoint/2010/main" val="957824658"/>
       </p:ext>
     </p:extLst>
   </p:cSld>

--- a/presentations/weekly_20261029/weekly_20261029_english_final.pptx
+++ b/presentations/weekly_20261029/weekly_20261029_english_final.pptx
@@ -2,21 +2,21 @@
 <file path=ppt/presentation.xml><?xml version="1.0" encoding="utf-8"?>
 <p:presentation xmlns:p="http://schemas.openxmlformats.org/presentationml/2006/main">
   <p:sldMasterIdLst>
-    <p:sldMasterId xmlns:r="http://schemas.openxmlformats.org/officeDocument/2006/relationships" id="2147483648" r:id="R09c843f01ba941b1"/>
+    <p:sldMasterId xmlns:r="http://schemas.openxmlformats.org/officeDocument/2006/relationships" id="2147483648" r:id="R1d28d5bff2984739"/>
   </p:sldMasterIdLst>
   <p:notesMasterIdLst>
-    <p:notesMasterId xmlns:r="http://schemas.openxmlformats.org/officeDocument/2006/relationships" r:id="Rc856f750f0f04893"/>
+    <p:notesMasterId xmlns:r="http://schemas.openxmlformats.org/officeDocument/2006/relationships" r:id="R9ad6c2b3b66c4593"/>
   </p:notesMasterIdLst>
   <p:sldIdLst>
-    <p:sldId xmlns:r="http://schemas.openxmlformats.org/officeDocument/2006/relationships" id="256" r:id="R123cab274e67496c"/>
-    <p:sldId xmlns:r="http://schemas.openxmlformats.org/officeDocument/2006/relationships" id="257" r:id="Rfe61f2beb0a14048"/>
-    <p:sldId xmlns:r="http://schemas.openxmlformats.org/officeDocument/2006/relationships" id="258" r:id="R6ffc911ed1e9403c"/>
-    <p:sldId xmlns:r="http://schemas.openxmlformats.org/officeDocument/2006/relationships" id="259" r:id="Rcc2c9da573d24c9d"/>
-    <p:sldId xmlns:r="http://schemas.openxmlformats.org/officeDocument/2006/relationships" id="260" r:id="R92ff495921b6451f"/>
-    <p:sldId xmlns:r="http://schemas.openxmlformats.org/officeDocument/2006/relationships" id="261" r:id="Rd736ca64e6794b2b"/>
-    <p:sldId xmlns:r="http://schemas.openxmlformats.org/officeDocument/2006/relationships" id="262" r:id="R689367b79af54dab"/>
-    <p:sldId xmlns:r="http://schemas.openxmlformats.org/officeDocument/2006/relationships" id="263" r:id="R27441670c4c543b8"/>
-    <p:sldId xmlns:r="http://schemas.openxmlformats.org/officeDocument/2006/relationships" id="264" r:id="Rdf3daf8d7eea4e16"/>
+    <p:sldId xmlns:r="http://schemas.openxmlformats.org/officeDocument/2006/relationships" id="256" r:id="R86523a8357324f71"/>
+    <p:sldId xmlns:r="http://schemas.openxmlformats.org/officeDocument/2006/relationships" id="257" r:id="R49e6f032974a4b9a"/>
+    <p:sldId xmlns:r="http://schemas.openxmlformats.org/officeDocument/2006/relationships" id="258" r:id="R9b232c0cc1fb4505"/>
+    <p:sldId xmlns:r="http://schemas.openxmlformats.org/officeDocument/2006/relationships" id="259" r:id="R8ea4c28ea05a4e7a"/>
+    <p:sldId xmlns:r="http://schemas.openxmlformats.org/officeDocument/2006/relationships" id="260" r:id="R98922a20f9274911"/>
+    <p:sldId xmlns:r="http://schemas.openxmlformats.org/officeDocument/2006/relationships" id="261" r:id="R6554c7a9d046406e"/>
+    <p:sldId xmlns:r="http://schemas.openxmlformats.org/officeDocument/2006/relationships" id="262" r:id="Rcac3df4b1fec4e79"/>
+    <p:sldId xmlns:r="http://schemas.openxmlformats.org/officeDocument/2006/relationships" id="263" r:id="R00d84e3d6bd142ca"/>
+    <p:sldId xmlns:r="http://schemas.openxmlformats.org/officeDocument/2006/relationships" id="264" r:id="R9c53e31c17dc4402"/>
   </p:sldIdLst>
   <p:sldSz cx="12192000" cy="6858000"/>
   <p:notesSz cx="6858000" cy="9144000"/>
@@ -730,7 +730,7 @@
           <a:lstStyle xmlns:a="http://schemas.openxmlformats.org/drawingml/2006/main"/>
           <a:p xmlns:a="http://schemas.openxmlformats.org/drawingml/2006/main">
             <a:r>
-              <a:t>Source: results/fov_levels_xavier_full_20261027/README.md; overview.csv; summary.csv. Commit 0f1506c. Date 2026-10-27. Raw evidence: evidence.tar.gz.</a:t>
+              <a:t>Source: results/fov_levels_xavier_full_20261027/README.md; overview.csv; summary.csv. Commit 0f1506c. Date 2026-10-27. Raw evidence: evidence.tar.gz. Measured timing excludes decoding. Slides 6 and 7 add one fixed 2 ms decoding budget per frame to measured means; derived budget totals are not measured end-to-end latency. No joint RGB, depth and flow decoding measurement is claimed.</a:t>
             </a:r>
           </a:p>
         </p:txBody>
@@ -800,7 +800,7 @@
           <a:lstStyle xmlns:a="http://schemas.openxmlformats.org/drawingml/2006/main"/>
           <a:p xmlns:a="http://schemas.openxmlformats.org/drawingml/2006/main">
             <a:r>
-              <a:t>Source: results/fov_levels_xavier_full_20261027/README.md; overview.csv; summary.csv. Commit 0f1506c. Date 2026-10-27. Raw evidence: evidence.tar.gz. Arithmetic means of all 5340 timing samples in each level/timing/mode group, computed by compute_means.py into mean_timings.json. No sample trimming. Full baseline measured separately per level. Fast resample enabled. Each value covers all 1068 supported frames. Speedup is mean(full resident)/mean(FOV resident) at the same region level. Region labels are image-area coverage, not sampling resolution.</a:t>
+              <a:t>Source: results/fov_levels_xavier_full_20261027/README.md; overview.csv; summary.csv. Commit 0f1506c. Date 2026-10-27. Raw evidence: evidence.tar.gz. Arithmetic means of all 5340 timing samples in each level/timing/mode group, computed by compute_means.py into mean_timings.json. No sample trimming. Full baseline measured separately per level. Fast resample enabled. Each value covers all 1068 supported frames. Adds a fixed 2 ms decode budget once per frame. Speedup is (2 + mean(full resident))/(2 + mean(FOV resident)) at the same region level. This is a derived budget, not measured end-to-end timing or measured joint RGB/depth/flow decoding. See results/fov_decode_budget_2ms_20261029/README.md and summary.csv. Region labels are image-area coverage, not sampling resolution.</a:t>
             </a:r>
           </a:p>
         </p:txBody>
@@ -870,7 +870,7 @@
           <a:lstStyle xmlns:a="http://schemas.openxmlformats.org/drawingml/2006/main"/>
           <a:p xmlns:a="http://schemas.openxmlformats.org/drawingml/2006/main">
             <a:r>
-              <a:t>Source: results/fov_levels_xavier_full_20261027/README.md; overview.csv; summary.csv. Commit 0f1506c. Date 2026-10-27. Raw evidence: evidence.tar.gz. Original uint8-overflow PSNR preserved. Stereo delta is derived only if left eye remains unchanged and per-eye PSNR dB is averaged. Timing is never divided by two.</a:t>
+              <a:t>Source: results/fov_levels_xavier_full_20261027/README.md; overview.csv; summary.csv. Commit 0f1506c. Date 2026-10-27. Raw evidence: evidence.tar.gz. Original uint8-overflow PSNR preserved. Stereo delta is derived only if left eye remains unchanged and per-eye PSNR dB is averaged. Timing is never divided by two. Latency adds a fixed 2 ms per-frame decode budget once, not measured decoding or end-to-end latency. Source: results/fov_decode_budget_2ms_20261029/summary.csv.</a:t>
             </a:r>
           </a:p>
         </p:txBody>
@@ -1010,7 +1010,7 @@
           <a:lstStyle xmlns:a="http://schemas.openxmlformats.org/drawingml/2006/main"/>
           <a:p xmlns:a="http://schemas.openxmlformats.org/drawingml/2006/main">
             <a:r>
-              <a:t>Proposed future work; no measured jitter trace or deadline-miss reduction exists in the current experiment. All values on earlier slides are local reconstruction measurements, not end-to-end VR results.</a:t>
+              <a:t>Proposed future work; no measured jitter trace or deadline-miss reduction exists in the current experiment. Slides 6–7 add a fixed 2 ms decode budget to local reconstruction means. Other timing values are local reconstruction measurements. None are measured end-to-end VR results.</a:t>
             </a:r>
           </a:p>
         </p:txBody>
@@ -1057,7 +1057,7 @@
           <p:cNvPr id="3" name="Title">
             <a:extLst xmlns:a="http://schemas.openxmlformats.org/drawingml/2006/main">
               <a:ext uri="{FF2B5EF4-FFF2-40B4-BE49-F238E27FC236}">
-                <a16:creationId xmlns:a16="http://schemas.microsoft.com/office/drawing/2014/main" id="{D9A63AD5-3777-4FC1-8337-60A53ACA883A}"/>
+                <a16:creationId xmlns:a16="http://schemas.microsoft.com/office/drawing/2014/main" id="{260202D6-66F6-446A-9D19-4E28AA2ECB5A}"/>
               </a:ext>
             </a:extLst>
           </p:cNvPr>
@@ -1286,7 +1286,7 @@
           <p:cNvPr id="2" name="Subtitle">
             <a:extLst xmlns:a="http://schemas.openxmlformats.org/drawingml/2006/main">
               <a:ext uri="{FF2B5EF4-FFF2-40B4-BE49-F238E27FC236}">
-                <a16:creationId xmlns:a16="http://schemas.microsoft.com/office/drawing/2014/main" id="{053E3716-2EC3-4BD8-A0A7-6957CBBD83CD}"/>
+                <a16:creationId xmlns:a16="http://schemas.microsoft.com/office/drawing/2014/main" id="{EC432F84-1FC5-4B96-A410-BC3B9B0E2067}"/>
               </a:ext>
             </a:extLst>
           </p:cNvPr>
@@ -1532,7 +1532,7 @@
           <p:cNvPr id="2" name="Section title">
             <a:extLst xmlns:a="http://schemas.openxmlformats.org/drawingml/2006/main">
               <a:ext uri="{FF2B5EF4-FFF2-40B4-BE49-F238E27FC236}">
-                <a16:creationId xmlns:a16="http://schemas.microsoft.com/office/drawing/2014/main" id="{7876FEFE-0513-46F3-B756-112FD06A45D6}"/>
+                <a16:creationId xmlns:a16="http://schemas.microsoft.com/office/drawing/2014/main" id="{B33D13FC-3C23-4525-876A-47EF871F7F44}"/>
               </a:ext>
             </a:extLst>
           </p:cNvPr>
@@ -1778,7 +1778,7 @@
           <p:cNvPr id="3" name="Title">
             <a:extLst xmlns:a="http://schemas.openxmlformats.org/drawingml/2006/main">
               <a:ext uri="{FF2B5EF4-FFF2-40B4-BE49-F238E27FC236}">
-                <a16:creationId xmlns:a16="http://schemas.microsoft.com/office/drawing/2014/main" id="{5C0EE840-23F6-42AA-B962-0ED5D25AB7EF}"/>
+                <a16:creationId xmlns:a16="http://schemas.microsoft.com/office/drawing/2014/main" id="{481CFF03-C619-4C1E-BC91-D83BF42F1604}"/>
               </a:ext>
             </a:extLst>
           </p:cNvPr>
@@ -2007,7 +2007,7 @@
           <p:cNvPr id="2" name="Body">
             <a:extLst xmlns:a="http://schemas.openxmlformats.org/drawingml/2006/main">
               <a:ext uri="{FF2B5EF4-FFF2-40B4-BE49-F238E27FC236}">
-                <a16:creationId xmlns:a16="http://schemas.microsoft.com/office/drawing/2014/main" id="{3F7ACA96-7AAB-4C58-9E2A-CA7B7A97E79E}"/>
+                <a16:creationId xmlns:a16="http://schemas.microsoft.com/office/drawing/2014/main" id="{209EA446-6FE5-47E1-8D9B-46839CC87E17}"/>
               </a:ext>
             </a:extLst>
           </p:cNvPr>
@@ -2253,7 +2253,7 @@
           <p:cNvPr id="4" name="Title">
             <a:extLst xmlns:a="http://schemas.openxmlformats.org/drawingml/2006/main">
               <a:ext uri="{FF2B5EF4-FFF2-40B4-BE49-F238E27FC236}">
-                <a16:creationId xmlns:a16="http://schemas.microsoft.com/office/drawing/2014/main" id="{4CB04557-F37A-4A68-9B85-700F266BB817}"/>
+                <a16:creationId xmlns:a16="http://schemas.microsoft.com/office/drawing/2014/main" id="{24F5C477-EAE6-49C1-9526-C577320F5885}"/>
               </a:ext>
             </a:extLst>
           </p:cNvPr>
@@ -2482,7 +2482,7 @@
           <p:cNvPr id="2" name="Left column">
             <a:extLst xmlns:a="http://schemas.openxmlformats.org/drawingml/2006/main">
               <a:ext uri="{FF2B5EF4-FFF2-40B4-BE49-F238E27FC236}">
-                <a16:creationId xmlns:a16="http://schemas.microsoft.com/office/drawing/2014/main" id="{AF02A5BE-8798-44DA-9D8D-5B1F162861C2}"/>
+                <a16:creationId xmlns:a16="http://schemas.microsoft.com/office/drawing/2014/main" id="{1428896D-C596-4C41-8018-748795CEA35E}"/>
               </a:ext>
             </a:extLst>
           </p:cNvPr>
@@ -2711,7 +2711,7 @@
           <p:cNvPr id="3" name="Right column">
             <a:extLst xmlns:a="http://schemas.openxmlformats.org/drawingml/2006/main">
               <a:ext uri="{FF2B5EF4-FFF2-40B4-BE49-F238E27FC236}">
-                <a16:creationId xmlns:a16="http://schemas.microsoft.com/office/drawing/2014/main" id="{0609C1B5-CF67-4B71-B890-0ADBADD75B32}"/>
+                <a16:creationId xmlns:a16="http://schemas.microsoft.com/office/drawing/2014/main" id="{DE8BF08F-8B5D-4F07-957A-E8431505595A}"/>
               </a:ext>
             </a:extLst>
           </p:cNvPr>
@@ -2957,7 +2957,7 @@
           <p:cNvPr id="3" name="Title">
             <a:extLst xmlns:a="http://schemas.openxmlformats.org/drawingml/2006/main">
               <a:ext uri="{FF2B5EF4-FFF2-40B4-BE49-F238E27FC236}">
-                <a16:creationId xmlns:a16="http://schemas.microsoft.com/office/drawing/2014/main" id="{F3412BC9-CD2D-4B57-9A16-7CBDEBF10F49}"/>
+                <a16:creationId xmlns:a16="http://schemas.microsoft.com/office/drawing/2014/main" id="{6828EA7A-5B8D-4D50-9B22-B9DD3F1CE2CD}"/>
               </a:ext>
             </a:extLst>
           </p:cNvPr>
@@ -3186,7 +3186,7 @@
           <p:cNvPr id="2" name="Left column">
             <a:extLst xmlns:a="http://schemas.openxmlformats.org/drawingml/2006/main">
               <a:ext uri="{FF2B5EF4-FFF2-40B4-BE49-F238E27FC236}">
-                <a16:creationId xmlns:a16="http://schemas.microsoft.com/office/drawing/2014/main" id="{5F3DF24C-31D7-44AB-954F-446AD853126E}"/>
+                <a16:creationId xmlns:a16="http://schemas.microsoft.com/office/drawing/2014/main" id="{1E5A9C51-DE3B-4A6D-A420-5D239AD90F81}"/>
               </a:ext>
             </a:extLst>
           </p:cNvPr>
@@ -3453,12 +3453,12 @@
   </p:cSld>
   <p:clrMap bg1="lt1" tx1="dk1" bg2="lt2" tx2="dk2" accent1="accent1" accent2="accent2" accent3="accent3" accent4="accent4" accent5="accent5" accent6="accent6" hlink="hlink" folHlink="folHlink"/>
   <p:sldLayoutIdLst>
-    <p:sldLayoutId xmlns:r="http://schemas.openxmlformats.org/officeDocument/2006/relationships" id="2147483649" r:id="R14a75297092c4a59"/>
-    <p:sldLayoutId xmlns:r="http://schemas.openxmlformats.org/officeDocument/2006/relationships" id="2147483650" r:id="R17e1092499094ff7"/>
-    <p:sldLayoutId xmlns:r="http://schemas.openxmlformats.org/officeDocument/2006/relationships" id="2147483651" r:id="R3b734a060c344908"/>
-    <p:sldLayoutId xmlns:r="http://schemas.openxmlformats.org/officeDocument/2006/relationships" id="2147483652" r:id="R336a01e1e53c4755"/>
-    <p:sldLayoutId xmlns:r="http://schemas.openxmlformats.org/officeDocument/2006/relationships" id="2147483653" r:id="R06c8d27b7e9a4545"/>
-    <p:sldLayoutId xmlns:r="http://schemas.openxmlformats.org/officeDocument/2006/relationships" id="2147483654" r:id="R16905c455c0f4716"/>
+    <p:sldLayoutId xmlns:r="http://schemas.openxmlformats.org/officeDocument/2006/relationships" id="2147483649" r:id="R0f52c718a43b452e"/>
+    <p:sldLayoutId xmlns:r="http://schemas.openxmlformats.org/officeDocument/2006/relationships" id="2147483650" r:id="R780d896a238949f1"/>
+    <p:sldLayoutId xmlns:r="http://schemas.openxmlformats.org/officeDocument/2006/relationships" id="2147483651" r:id="Rdf272a2667af43fc"/>
+    <p:sldLayoutId xmlns:r="http://schemas.openxmlformats.org/officeDocument/2006/relationships" id="2147483652" r:id="Rd21685694f5f471f"/>
+    <p:sldLayoutId xmlns:r="http://schemas.openxmlformats.org/officeDocument/2006/relationships" id="2147483653" r:id="R3e3037fcb7af4d5e"/>
+    <p:sldLayoutId xmlns:r="http://schemas.openxmlformats.org/officeDocument/2006/relationships" id="2147483654" r:id="R879fc5647b6c4aa3"/>
   </p:sldLayoutIdLst>
   <p:txStyles>
     <p:titleStyle>
@@ -3998,7 +3998,7 @@
           <c:idx val="0"/>
           <c:order val="0"/>
           <c:tx>
-            <c:v>FOV resident</c:v>
+            <c:v>FOV resident + decode</c:v>
           </c:tx>
           <c:spPr>
             <a:solidFill xmlns:a="http://schemas.openxmlformats.org/drawingml/2006/main">
@@ -4036,19 +4036,19 @@
                 <c:formatCode>General</c:formatCode>
                 <c:ptCount val="5"/>
                 <c:pt idx="0">
-                  <c:v>4.562</c:v>
+                  <c:v>6.562</c:v>
                 </c:pt>
                 <c:pt idx="1">
-                  <c:v>4.77</c:v>
+                  <c:v>6.77</c:v>
                 </c:pt>
                 <c:pt idx="2">
-                  <c:v>5.998</c:v>
+                  <c:v>7.998</c:v>
                 </c:pt>
                 <c:pt idx="3">
-                  <c:v>7.772</c:v>
+                  <c:v>9.772</c:v>
                 </c:pt>
                 <c:pt idx="4">
-                  <c:v>10.425</c:v>
+                  <c:v>12.425</c:v>
                 </c:pt>
               </c:numCache>
             </c:numRef>
@@ -4058,7 +4058,7 @@
           <c:idx val="1"/>
           <c:order val="1"/>
           <c:tx>
-            <c:v>FOV stream</c:v>
+            <c:v>FOV stream + decode</c:v>
           </c:tx>
           <c:spPr>
             <a:solidFill xmlns:a="http://schemas.openxmlformats.org/drawingml/2006/main">
@@ -4096,19 +4096,19 @@
                 <c:formatCode>General</c:formatCode>
                 <c:ptCount val="5"/>
                 <c:pt idx="0">
-                  <c:v>6.364</c:v>
+                  <c:v>8.364</c:v>
                 </c:pt>
                 <c:pt idx="1">
-                  <c:v>6.728</c:v>
+                  <c:v>8.728</c:v>
                 </c:pt>
                 <c:pt idx="2">
-                  <c:v>7.839</c:v>
+                  <c:v>9.839</c:v>
                 </c:pt>
                 <c:pt idx="3">
-                  <c:v>9.655</c:v>
+                  <c:v>11.655</c:v>
                 </c:pt>
                 <c:pt idx="4">
-                  <c:v>12.193</c:v>
+                  <c:v>14.193</c:v>
                 </c:pt>
               </c:numCache>
             </c:numRef>
@@ -4118,7 +4118,7 @@
           <c:idx val="2"/>
           <c:order val="2"/>
           <c:tx>
-            <c:v>Full resident</c:v>
+            <c:v>Full resident + decode</c:v>
           </c:tx>
           <c:spPr>
             <a:solidFill xmlns:a="http://schemas.openxmlformats.org/drawingml/2006/main">
@@ -4156,19 +4156,19 @@
                 <c:formatCode>General</c:formatCode>
                 <c:ptCount val="5"/>
                 <c:pt idx="0">
-                  <c:v>11.187</c:v>
+                  <c:v>13.187</c:v>
                 </c:pt>
                 <c:pt idx="1">
-                  <c:v>11.022</c:v>
+                  <c:v>13.022</c:v>
                 </c:pt>
                 <c:pt idx="2">
-                  <c:v>11.144</c:v>
+                  <c:v>13.144</c:v>
                 </c:pt>
                 <c:pt idx="3">
-                  <c:v>11.042</c:v>
+                  <c:v>13.042</c:v>
                 </c:pt>
                 <c:pt idx="4">
-                  <c:v>11.087</c:v>
+                  <c:v>13.087</c:v>
                 </c:pt>
               </c:numCache>
             </c:numRef>
@@ -4241,7 +4241,7 @@
         <c:axId val="48672768"/>
         <c:scaling>
           <c:orientation val="minMax"/>
-          <c:max val="14"/>
+          <c:max val="16"/>
           <c:min val="0"/>
         </c:scaling>
         <c:delete val="0"/>
@@ -4267,7 +4267,7 @@
                     <a:ea typeface="Arial"/>
                     <a:cs typeface="Arial"/>
                   </a:rPr>
-                  <a:t>Mean latency (ms)</a:t>
+                  <a:t>Decode + recon mean (ms)</a:t>
                 </a:r>
               </a:p>
             </c:rich>
@@ -4332,7 +4332,7 @@
         <a:lstStyle xmlns:a="http://schemas.openxmlformats.org/drawingml/2006/main"/>
         <a:p xmlns:a="http://schemas.openxmlformats.org/drawingml/2006/main">
           <a:pPr>
-            <a:defRPr sz="1650">
+            <a:defRPr sz="1350">
               <a:latin typeface="Arial"/>
               <a:ea typeface="Arial"/>
               <a:cs typeface="Arial"/>
@@ -4378,7 +4378,7 @@
           <p:cNvPr id="5" name="">
             <a:extLst xmlns:a="http://schemas.openxmlformats.org/drawingml/2006/main">
               <a:ext uri="{FF2B5EF4-FFF2-40B4-BE49-F238E27FC236}">
-                <a16:creationId xmlns:a16="http://schemas.microsoft.com/office/drawing/2014/main" id="{2E13C21E-6624-42DF-AEB2-718C3465DFA6}"/>
+                <a16:creationId xmlns:a16="http://schemas.microsoft.com/office/drawing/2014/main" id="{72546043-8B75-4006-84B6-2AAC0D4C7AE1}"/>
               </a:ext>
             </a:extLst>
           </p:cNvPr>
@@ -4436,7 +4436,7 @@
           <p:cNvPr id="2" name="">
             <a:extLst xmlns:a="http://schemas.openxmlformats.org/drawingml/2006/main">
               <a:ext uri="{FF2B5EF4-FFF2-40B4-BE49-F238E27FC236}">
-                <a16:creationId xmlns:a16="http://schemas.microsoft.com/office/drawing/2014/main" id="{7CD29BAD-BEA0-4E61-8C5F-AD18BFF3EC9D}"/>
+                <a16:creationId xmlns:a16="http://schemas.microsoft.com/office/drawing/2014/main" id="{67B6487C-3836-4563-81E7-18E12B20C632}"/>
               </a:ext>
             </a:extLst>
           </p:cNvPr>
@@ -4481,7 +4481,7 @@
           <p:cNvPr id="3" name="">
             <a:extLst xmlns:a="http://schemas.openxmlformats.org/drawingml/2006/main">
               <a:ext uri="{FF2B5EF4-FFF2-40B4-BE49-F238E27FC236}">
-                <a16:creationId xmlns:a16="http://schemas.microsoft.com/office/drawing/2014/main" id="{FEFA931A-CA88-4832-AA76-4C28C06386B6}"/>
+                <a16:creationId xmlns:a16="http://schemas.microsoft.com/office/drawing/2014/main" id="{7BD9607B-E435-4003-9DFE-836F1C8D02F5}"/>
               </a:ext>
             </a:extLst>
           </p:cNvPr>
@@ -4526,7 +4526,7 @@
           <p:cNvPr id="4" name="">
             <a:extLst xmlns:a="http://schemas.openxmlformats.org/drawingml/2006/main">
               <a:ext uri="{FF2B5EF4-FFF2-40B4-BE49-F238E27FC236}">
-                <a16:creationId xmlns:a16="http://schemas.microsoft.com/office/drawing/2014/main" id="{1D3680A6-40DF-46D1-A20E-732F3A6094FD}"/>
+                <a16:creationId xmlns:a16="http://schemas.microsoft.com/office/drawing/2014/main" id="{C0F2F1CE-49CA-4EB8-B7F6-513CA4F6C814}"/>
               </a:ext>
             </a:extLst>
           </p:cNvPr>
@@ -4569,7 +4569,7 @@
     </p:spTree>
     <p:extLst>
       <p:ext uri="{BB962C8B-B14F-4D97-AF65-F5344CB8AC3E}">
-        <p14:creationId xmlns:p14="http://schemas.microsoft.com/office/powerpoint/2010/main" val="2146358697"/>
+        <p14:creationId xmlns:p14="http://schemas.microsoft.com/office/powerpoint/2010/main" val="315980664"/>
       </p:ext>
     </p:extLst>
   </p:cSld>
@@ -4600,7 +4600,7 @@
           <p:cNvPr id="29" name="">
             <a:extLst xmlns:a="http://schemas.openxmlformats.org/drawingml/2006/main">
               <a:ext uri="{FF2B5EF4-FFF2-40B4-BE49-F238E27FC236}">
-                <a16:creationId xmlns:a16="http://schemas.microsoft.com/office/drawing/2014/main" id="{F2342A68-7BEA-4C73-B1FC-90195014725F}"/>
+                <a16:creationId xmlns:a16="http://schemas.microsoft.com/office/drawing/2014/main" id="{4630386B-2046-4D8F-A0B0-9EAF80D7A41C}"/>
               </a:ext>
             </a:extLst>
           </p:cNvPr>
@@ -4645,7 +4645,7 @@
           <p:cNvPr id="2" name="">
             <a:extLst xmlns:a="http://schemas.openxmlformats.org/drawingml/2006/main">
               <a:ext uri="{FF2B5EF4-FFF2-40B4-BE49-F238E27FC236}">
-                <a16:creationId xmlns:a16="http://schemas.microsoft.com/office/drawing/2014/main" id="{3A0C2060-EF3F-428E-BE8F-29ABCC8079BA}"/>
+                <a16:creationId xmlns:a16="http://schemas.microsoft.com/office/drawing/2014/main" id="{A598C776-7A13-4079-9C04-E786025E9E5A}"/>
               </a:ext>
             </a:extLst>
           </p:cNvPr>
@@ -4675,7 +4675,7 @@
           <p:cNvPr id="3" name="">
             <a:extLst xmlns:a="http://schemas.openxmlformats.org/drawingml/2006/main">
               <a:ext uri="{FF2B5EF4-FFF2-40B4-BE49-F238E27FC236}">
-                <a16:creationId xmlns:a16="http://schemas.microsoft.com/office/drawing/2014/main" id="{F51C1250-86A7-42FD-A74C-318B1A6D90B2}"/>
+                <a16:creationId xmlns:a16="http://schemas.microsoft.com/office/drawing/2014/main" id="{376CA10E-ECBD-4533-9842-7B140995B949}"/>
               </a:ext>
             </a:extLst>
           </p:cNvPr>
@@ -4720,7 +4720,7 @@
           <p:cNvPr id="4" name="">
             <a:extLst xmlns:a="http://schemas.openxmlformats.org/drawingml/2006/main">
               <a:ext uri="{FF2B5EF4-FFF2-40B4-BE49-F238E27FC236}">
-                <a16:creationId xmlns:a16="http://schemas.microsoft.com/office/drawing/2014/main" id="{494ADCC3-40B7-4C42-8468-07442D492241}"/>
+                <a16:creationId xmlns:a16="http://schemas.microsoft.com/office/drawing/2014/main" id="{80612A60-3C3E-4585-991B-C51FE9EE976D}"/>
               </a:ext>
             </a:extLst>
           </p:cNvPr>
@@ -4765,7 +4765,7 @@
           <p:cNvPr id="5" name="">
             <a:extLst xmlns:a="http://schemas.openxmlformats.org/drawingml/2006/main">
               <a:ext uri="{FF2B5EF4-FFF2-40B4-BE49-F238E27FC236}">
-                <a16:creationId xmlns:a16="http://schemas.microsoft.com/office/drawing/2014/main" id="{49D77F94-29ED-400B-A453-11CC813D6294}"/>
+                <a16:creationId xmlns:a16="http://schemas.microsoft.com/office/drawing/2014/main" id="{DDE9F982-C601-4C1E-A5BC-293585836932}"/>
               </a:ext>
             </a:extLst>
           </p:cNvPr>
@@ -4810,7 +4810,7 @@
           <p:cNvPr id="6" name="">
             <a:extLst xmlns:a="http://schemas.openxmlformats.org/drawingml/2006/main">
               <a:ext uri="{FF2B5EF4-FFF2-40B4-BE49-F238E27FC236}">
-                <a16:creationId xmlns:a16="http://schemas.microsoft.com/office/drawing/2014/main" id="{619C3095-4850-437E-AFC6-E6A4748B5969}"/>
+                <a16:creationId xmlns:a16="http://schemas.microsoft.com/office/drawing/2014/main" id="{5642D2F7-F26A-41DD-8E6F-FDB25479D00F}"/>
               </a:ext>
             </a:extLst>
           </p:cNvPr>
@@ -4842,7 +4842,7 @@
           <p:cNvPr id="7" name="">
             <a:extLst xmlns:a="http://schemas.openxmlformats.org/drawingml/2006/main">
               <a:ext uri="{FF2B5EF4-FFF2-40B4-BE49-F238E27FC236}">
-                <a16:creationId xmlns:a16="http://schemas.microsoft.com/office/drawing/2014/main" id="{A9C0645E-4270-438E-93E4-E751DA765FE5}"/>
+                <a16:creationId xmlns:a16="http://schemas.microsoft.com/office/drawing/2014/main" id="{6D927D3C-E5D5-47E6-BF18-9784502F2B58}"/>
               </a:ext>
             </a:extLst>
           </p:cNvPr>
@@ -4874,7 +4874,7 @@
           <p:cNvPr id="8" name="">
             <a:extLst xmlns:a="http://schemas.openxmlformats.org/drawingml/2006/main">
               <a:ext uri="{FF2B5EF4-FFF2-40B4-BE49-F238E27FC236}">
-                <a16:creationId xmlns:a16="http://schemas.microsoft.com/office/drawing/2014/main" id="{F3190E43-5B34-4E07-B60B-279E7956421B}"/>
+                <a16:creationId xmlns:a16="http://schemas.microsoft.com/office/drawing/2014/main" id="{B9C798B8-5E4B-403A-9455-300AFF334C43}"/>
               </a:ext>
             </a:extLst>
           </p:cNvPr>
@@ -4906,7 +4906,7 @@
           <p:cNvPr id="9" name="">
             <a:extLst xmlns:a="http://schemas.openxmlformats.org/drawingml/2006/main">
               <a:ext uri="{FF2B5EF4-FFF2-40B4-BE49-F238E27FC236}">
-                <a16:creationId xmlns:a16="http://schemas.microsoft.com/office/drawing/2014/main" id="{C2639C88-B470-4ED6-A748-2D8F318FDD34}"/>
+                <a16:creationId xmlns:a16="http://schemas.microsoft.com/office/drawing/2014/main" id="{2DC37855-E08E-4BA8-B42D-33A275F380D8}"/>
               </a:ext>
             </a:extLst>
           </p:cNvPr>
@@ -4951,7 +4951,7 @@
           <p:cNvPr id="10" name="">
             <a:extLst xmlns:a="http://schemas.openxmlformats.org/drawingml/2006/main">
               <a:ext uri="{FF2B5EF4-FFF2-40B4-BE49-F238E27FC236}">
-                <a16:creationId xmlns:a16="http://schemas.microsoft.com/office/drawing/2014/main" id="{87EA1317-F091-430B-917A-EE574FF9E998}"/>
+                <a16:creationId xmlns:a16="http://schemas.microsoft.com/office/drawing/2014/main" id="{C8B3EB67-8D1D-4BEC-AA6E-ECF77D0B52EE}"/>
               </a:ext>
             </a:extLst>
           </p:cNvPr>
@@ -4981,7 +4981,7 @@
           <p:cNvPr id="11" name="">
             <a:extLst xmlns:a="http://schemas.openxmlformats.org/drawingml/2006/main">
               <a:ext uri="{FF2B5EF4-FFF2-40B4-BE49-F238E27FC236}">
-                <a16:creationId xmlns:a16="http://schemas.microsoft.com/office/drawing/2014/main" id="{9665462C-2ED9-4DE6-AC5D-93E24F1F5057}"/>
+                <a16:creationId xmlns:a16="http://schemas.microsoft.com/office/drawing/2014/main" id="{1BAB262C-431D-4BF7-B47A-BED8F0B23715}"/>
               </a:ext>
             </a:extLst>
           </p:cNvPr>
@@ -5026,7 +5026,7 @@
           <p:cNvPr id="12" name="">
             <a:extLst xmlns:a="http://schemas.openxmlformats.org/drawingml/2006/main">
               <a:ext uri="{FF2B5EF4-FFF2-40B4-BE49-F238E27FC236}">
-                <a16:creationId xmlns:a16="http://schemas.microsoft.com/office/drawing/2014/main" id="{C3900C90-1CB1-4AE2-A610-6AC1DA6D3070}"/>
+                <a16:creationId xmlns:a16="http://schemas.microsoft.com/office/drawing/2014/main" id="{881A749D-1D20-47E7-9F9B-470D396067E5}"/>
               </a:ext>
             </a:extLst>
           </p:cNvPr>
@@ -5058,7 +5058,7 @@
           <p:cNvPr id="13" name="">
             <a:extLst xmlns:a="http://schemas.openxmlformats.org/drawingml/2006/main">
               <a:ext uri="{FF2B5EF4-FFF2-40B4-BE49-F238E27FC236}">
-                <a16:creationId xmlns:a16="http://schemas.microsoft.com/office/drawing/2014/main" id="{001C72FD-F894-4C3A-B7A7-B75C28D0FC8B}"/>
+                <a16:creationId xmlns:a16="http://schemas.microsoft.com/office/drawing/2014/main" id="{4CE396C1-AB0B-488D-B2D2-0EA5E98694A2}"/>
               </a:ext>
             </a:extLst>
           </p:cNvPr>
@@ -5090,7 +5090,7 @@
           <p:cNvPr id="14" name="">
             <a:extLst xmlns:a="http://schemas.openxmlformats.org/drawingml/2006/main">
               <a:ext uri="{FF2B5EF4-FFF2-40B4-BE49-F238E27FC236}">
-                <a16:creationId xmlns:a16="http://schemas.microsoft.com/office/drawing/2014/main" id="{47FDF968-FD55-4FDB-860E-2F2DF91EAEE9}"/>
+                <a16:creationId xmlns:a16="http://schemas.microsoft.com/office/drawing/2014/main" id="{7617926B-E3B2-4B07-97F4-B46D1DED2A76}"/>
               </a:ext>
             </a:extLst>
           </p:cNvPr>
@@ -5122,7 +5122,7 @@
           <p:cNvPr id="15" name="">
             <a:extLst xmlns:a="http://schemas.openxmlformats.org/drawingml/2006/main">
               <a:ext uri="{FF2B5EF4-FFF2-40B4-BE49-F238E27FC236}">
-                <a16:creationId xmlns:a16="http://schemas.microsoft.com/office/drawing/2014/main" id="{A5269646-205F-42B9-B516-37C9328C28FE}"/>
+                <a16:creationId xmlns:a16="http://schemas.microsoft.com/office/drawing/2014/main" id="{6A9C6A87-90D3-4F98-8BE0-1A63560E9D63}"/>
               </a:ext>
             </a:extLst>
           </p:cNvPr>
@@ -5167,7 +5167,7 @@
           <p:cNvPr id="16" name="">
             <a:extLst xmlns:a="http://schemas.openxmlformats.org/drawingml/2006/main">
               <a:ext uri="{FF2B5EF4-FFF2-40B4-BE49-F238E27FC236}">
-                <a16:creationId xmlns:a16="http://schemas.microsoft.com/office/drawing/2014/main" id="{AFD310D2-FCA6-4C9D-8921-0F925F455D24}"/>
+                <a16:creationId xmlns:a16="http://schemas.microsoft.com/office/drawing/2014/main" id="{906D914A-7D6A-4810-9566-38FD4B92F906}"/>
               </a:ext>
             </a:extLst>
           </p:cNvPr>
@@ -5197,7 +5197,7 @@
           <p:cNvPr id="17" name="">
             <a:extLst xmlns:a="http://schemas.openxmlformats.org/drawingml/2006/main">
               <a:ext uri="{FF2B5EF4-FFF2-40B4-BE49-F238E27FC236}">
-                <a16:creationId xmlns:a16="http://schemas.microsoft.com/office/drawing/2014/main" id="{7908D3BC-513B-47F7-85A6-1C13AC7B79FC}"/>
+                <a16:creationId xmlns:a16="http://schemas.microsoft.com/office/drawing/2014/main" id="{FA3E719F-AC2F-400E-A0B4-7D60E48DA7BA}"/>
               </a:ext>
             </a:extLst>
           </p:cNvPr>
@@ -5242,7 +5242,7 @@
           <p:cNvPr id="18" name="">
             <a:extLst xmlns:a="http://schemas.openxmlformats.org/drawingml/2006/main">
               <a:ext uri="{FF2B5EF4-FFF2-40B4-BE49-F238E27FC236}">
-                <a16:creationId xmlns:a16="http://schemas.microsoft.com/office/drawing/2014/main" id="{E86F1033-B061-4284-BCE4-63F2F796B8C9}"/>
+                <a16:creationId xmlns:a16="http://schemas.microsoft.com/office/drawing/2014/main" id="{59E87DA5-E0E3-4E52-B3BA-F45FF3559BA5}"/>
               </a:ext>
             </a:extLst>
           </p:cNvPr>
@@ -5274,7 +5274,7 @@
           <p:cNvPr id="19" name="">
             <a:extLst xmlns:a="http://schemas.openxmlformats.org/drawingml/2006/main">
               <a:ext uri="{FF2B5EF4-FFF2-40B4-BE49-F238E27FC236}">
-                <a16:creationId xmlns:a16="http://schemas.microsoft.com/office/drawing/2014/main" id="{D057D32E-E5BB-4108-85FB-05D87F533077}"/>
+                <a16:creationId xmlns:a16="http://schemas.microsoft.com/office/drawing/2014/main" id="{74DE50BD-1DC6-4770-A398-BDA3A6A1A2AA}"/>
               </a:ext>
             </a:extLst>
           </p:cNvPr>
@@ -5306,7 +5306,7 @@
           <p:cNvPr id="20" name="">
             <a:extLst xmlns:a="http://schemas.openxmlformats.org/drawingml/2006/main">
               <a:ext uri="{FF2B5EF4-FFF2-40B4-BE49-F238E27FC236}">
-                <a16:creationId xmlns:a16="http://schemas.microsoft.com/office/drawing/2014/main" id="{BEA68B25-A12D-4352-A6F1-80A39914F1EC}"/>
+                <a16:creationId xmlns:a16="http://schemas.microsoft.com/office/drawing/2014/main" id="{E797BB50-7EA4-4CFD-B66A-863B283E4EC8}"/>
               </a:ext>
             </a:extLst>
           </p:cNvPr>
@@ -5338,7 +5338,7 @@
           <p:cNvPr id="21" name="">
             <a:extLst xmlns:a="http://schemas.openxmlformats.org/drawingml/2006/main">
               <a:ext uri="{FF2B5EF4-FFF2-40B4-BE49-F238E27FC236}">
-                <a16:creationId xmlns:a16="http://schemas.microsoft.com/office/drawing/2014/main" id="{5635C5EA-BEAC-41CF-B2AE-F0B4C25C1DB2}"/>
+                <a16:creationId xmlns:a16="http://schemas.microsoft.com/office/drawing/2014/main" id="{17A14051-3DFE-4E62-8ADA-6D449342B659}"/>
               </a:ext>
             </a:extLst>
           </p:cNvPr>
@@ -5383,7 +5383,7 @@
           <p:cNvPr id="22" name="">
             <a:extLst xmlns:a="http://schemas.openxmlformats.org/drawingml/2006/main">
               <a:ext uri="{FF2B5EF4-FFF2-40B4-BE49-F238E27FC236}">
-                <a16:creationId xmlns:a16="http://schemas.microsoft.com/office/drawing/2014/main" id="{0EB1CF7F-D6BC-4FB3-8615-147F54698B48}"/>
+                <a16:creationId xmlns:a16="http://schemas.microsoft.com/office/drawing/2014/main" id="{389B8C25-12A9-48B4-88E4-6F763B1219F3}"/>
               </a:ext>
             </a:extLst>
           </p:cNvPr>
@@ -5413,7 +5413,7 @@
           <p:cNvPr id="23" name="">
             <a:extLst xmlns:a="http://schemas.openxmlformats.org/drawingml/2006/main">
               <a:ext uri="{FF2B5EF4-FFF2-40B4-BE49-F238E27FC236}">
-                <a16:creationId xmlns:a16="http://schemas.microsoft.com/office/drawing/2014/main" id="{1B34E83C-893A-445E-B8D8-2A9D6FE34E05}"/>
+                <a16:creationId xmlns:a16="http://schemas.microsoft.com/office/drawing/2014/main" id="{C11C01D2-3DCF-4273-89DC-8958C60D9AA6}"/>
               </a:ext>
             </a:extLst>
           </p:cNvPr>
@@ -5443,7 +5443,7 @@
           <p:cNvPr id="24" name="">
             <a:extLst xmlns:a="http://schemas.openxmlformats.org/drawingml/2006/main">
               <a:ext uri="{FF2B5EF4-FFF2-40B4-BE49-F238E27FC236}">
-                <a16:creationId xmlns:a16="http://schemas.microsoft.com/office/drawing/2014/main" id="{FF1206A2-0750-4E0F-BAC1-0D1213BFFCCA}"/>
+                <a16:creationId xmlns:a16="http://schemas.microsoft.com/office/drawing/2014/main" id="{5301AA13-3984-42F1-A4B4-793C2AE9182E}"/>
               </a:ext>
             </a:extLst>
           </p:cNvPr>
@@ -5488,7 +5488,7 @@
           <p:cNvPr id="25" name="">
             <a:extLst xmlns:a="http://schemas.openxmlformats.org/drawingml/2006/main">
               <a:ext uri="{FF2B5EF4-FFF2-40B4-BE49-F238E27FC236}">
-                <a16:creationId xmlns:a16="http://schemas.microsoft.com/office/drawing/2014/main" id="{B26119EE-F3DC-4E1F-A900-EE9700DA02BB}"/>
+                <a16:creationId xmlns:a16="http://schemas.microsoft.com/office/drawing/2014/main" id="{C3663E82-2AD8-4F0B-982E-4BDD7C4C218D}"/>
               </a:ext>
             </a:extLst>
           </p:cNvPr>
@@ -5533,7 +5533,7 @@
           <p:cNvPr id="26" name="">
             <a:extLst xmlns:a="http://schemas.openxmlformats.org/drawingml/2006/main">
               <a:ext uri="{FF2B5EF4-FFF2-40B4-BE49-F238E27FC236}">
-                <a16:creationId xmlns:a16="http://schemas.microsoft.com/office/drawing/2014/main" id="{37834E2D-E57D-451C-92C4-E2F5C0B2465C}"/>
+                <a16:creationId xmlns:a16="http://schemas.microsoft.com/office/drawing/2014/main" id="{00FCBA04-7CF1-4042-BD0C-AECA5FFFEC6E}"/>
               </a:ext>
             </a:extLst>
           </p:cNvPr>
@@ -5578,7 +5578,7 @@
           <p:cNvPr id="27" name="">
             <a:extLst xmlns:a="http://schemas.openxmlformats.org/drawingml/2006/main">
               <a:ext uri="{FF2B5EF4-FFF2-40B4-BE49-F238E27FC236}">
-                <a16:creationId xmlns:a16="http://schemas.microsoft.com/office/drawing/2014/main" id="{092AAC4B-E05D-4095-9239-04E845912FD5}"/>
+                <a16:creationId xmlns:a16="http://schemas.microsoft.com/office/drawing/2014/main" id="{AEB65EE6-34FB-4589-AE8F-B22BE8BA8847}"/>
               </a:ext>
             </a:extLst>
           </p:cNvPr>
@@ -5623,7 +5623,7 @@
           <p:cNvPr id="28" name="">
             <a:extLst xmlns:a="http://schemas.openxmlformats.org/drawingml/2006/main">
               <a:ext uri="{FF2B5EF4-FFF2-40B4-BE49-F238E27FC236}">
-                <a16:creationId xmlns:a16="http://schemas.microsoft.com/office/drawing/2014/main" id="{9A13D29C-B7B0-40AA-BBCA-3C41F91A1714}"/>
+                <a16:creationId xmlns:a16="http://schemas.microsoft.com/office/drawing/2014/main" id="{6B7C06A9-3E3D-43C3-9F3C-5E7B83C4BDD6}"/>
               </a:ext>
             </a:extLst>
           </p:cNvPr>
@@ -5666,7 +5666,7 @@
     </p:spTree>
     <p:extLst>
       <p:ext uri="{BB962C8B-B14F-4D97-AF65-F5344CB8AC3E}">
-        <p14:creationId xmlns:p14="http://schemas.microsoft.com/office/powerpoint/2010/main" val="652198131"/>
+        <p14:creationId xmlns:p14="http://schemas.microsoft.com/office/powerpoint/2010/main" val="598182676"/>
       </p:ext>
     </p:extLst>
   </p:cSld>
@@ -5697,7 +5697,7 @@
           <p:cNvPr id="15" name="">
             <a:extLst xmlns:a="http://schemas.openxmlformats.org/drawingml/2006/main">
               <a:ext uri="{FF2B5EF4-FFF2-40B4-BE49-F238E27FC236}">
-                <a16:creationId xmlns:a16="http://schemas.microsoft.com/office/drawing/2014/main" id="{DBFA02D4-34CA-46C8-A78A-8714A0C1ED8E}"/>
+                <a16:creationId xmlns:a16="http://schemas.microsoft.com/office/drawing/2014/main" id="{35209851-4663-45F8-8DC5-9285BC4BEE43}"/>
               </a:ext>
             </a:extLst>
           </p:cNvPr>
@@ -5742,7 +5742,7 @@
           <p:cNvPr id="2" name="">
             <a:extLst xmlns:a="http://schemas.openxmlformats.org/drawingml/2006/main">
               <a:ext uri="{FF2B5EF4-FFF2-40B4-BE49-F238E27FC236}">
-                <a16:creationId xmlns:a16="http://schemas.microsoft.com/office/drawing/2014/main" id="{9BA0FC7C-ACFA-4C5C-A296-A52C240328D4}"/>
+                <a16:creationId xmlns:a16="http://schemas.microsoft.com/office/drawing/2014/main" id="{90BE06E5-EF4E-46BA-8EEE-6D49561FE5DF}"/>
               </a:ext>
             </a:extLst>
           </p:cNvPr>
@@ -5772,7 +5772,7 @@
           <p:cNvPr id="3" name="">
             <a:extLst xmlns:a="http://schemas.openxmlformats.org/drawingml/2006/main">
               <a:ext uri="{FF2B5EF4-FFF2-40B4-BE49-F238E27FC236}">
-                <a16:creationId xmlns:a16="http://schemas.microsoft.com/office/drawing/2014/main" id="{B3E98372-ACD3-468C-9EDD-9A8BAD3749E9}"/>
+                <a16:creationId xmlns:a16="http://schemas.microsoft.com/office/drawing/2014/main" id="{42E09036-ED0C-458B-A586-72A8F4616CE0}"/>
               </a:ext>
             </a:extLst>
           </p:cNvPr>
@@ -5817,7 +5817,7 @@
           <p:cNvPr id="4" name="">
             <a:extLst xmlns:a="http://schemas.openxmlformats.org/drawingml/2006/main">
               <a:ext uri="{FF2B5EF4-FFF2-40B4-BE49-F238E27FC236}">
-                <a16:creationId xmlns:a16="http://schemas.microsoft.com/office/drawing/2014/main" id="{4D187F60-C43A-467F-B748-ACC026F69998}"/>
+                <a16:creationId xmlns:a16="http://schemas.microsoft.com/office/drawing/2014/main" id="{E4B72B12-94A9-482B-9052-8D5300C03A08}"/>
               </a:ext>
             </a:extLst>
           </p:cNvPr>
@@ -5862,7 +5862,7 @@
           <p:cNvPr id="5" name="">
             <a:extLst xmlns:a="http://schemas.openxmlformats.org/drawingml/2006/main">
               <a:ext uri="{FF2B5EF4-FFF2-40B4-BE49-F238E27FC236}">
-                <a16:creationId xmlns:a16="http://schemas.microsoft.com/office/drawing/2014/main" id="{03D79613-A731-4B8D-9B50-ADB54B522186}"/>
+                <a16:creationId xmlns:a16="http://schemas.microsoft.com/office/drawing/2014/main" id="{7DC66F9A-58E2-495E-BBFC-3E88F4344104}"/>
               </a:ext>
             </a:extLst>
           </p:cNvPr>
@@ -5894,7 +5894,7 @@
           <p:cNvPr id="6" name="">
             <a:extLst xmlns:a="http://schemas.openxmlformats.org/drawingml/2006/main">
               <a:ext uri="{FF2B5EF4-FFF2-40B4-BE49-F238E27FC236}">
-                <a16:creationId xmlns:a16="http://schemas.microsoft.com/office/drawing/2014/main" id="{9C7D5C41-6B5B-49AB-B907-3D9A0CE7B2DD}"/>
+                <a16:creationId xmlns:a16="http://schemas.microsoft.com/office/drawing/2014/main" id="{B4E22581-728F-438B-A140-C491EBEFF239}"/>
               </a:ext>
             </a:extLst>
           </p:cNvPr>
@@ -5926,7 +5926,7 @@
           <p:cNvPr id="7" name="">
             <a:extLst xmlns:a="http://schemas.openxmlformats.org/drawingml/2006/main">
               <a:ext uri="{FF2B5EF4-FFF2-40B4-BE49-F238E27FC236}">
-                <a16:creationId xmlns:a16="http://schemas.microsoft.com/office/drawing/2014/main" id="{FF3CF46F-630C-475B-BC6C-2F1EE723C620}"/>
+                <a16:creationId xmlns:a16="http://schemas.microsoft.com/office/drawing/2014/main" id="{4D72B803-FC46-4E31-A950-318E3898B16D}"/>
               </a:ext>
             </a:extLst>
           </p:cNvPr>
@@ -5958,7 +5958,7 @@
           <p:cNvPr id="8" name="">
             <a:extLst xmlns:a="http://schemas.openxmlformats.org/drawingml/2006/main">
               <a:ext uri="{FF2B5EF4-FFF2-40B4-BE49-F238E27FC236}">
-                <a16:creationId xmlns:a16="http://schemas.microsoft.com/office/drawing/2014/main" id="{4F86F205-F6B7-462E-9E8C-49C77D734D92}"/>
+                <a16:creationId xmlns:a16="http://schemas.microsoft.com/office/drawing/2014/main" id="{AE7FBC34-0D68-4C1E-9B5E-C644523C10E5}"/>
               </a:ext>
             </a:extLst>
           </p:cNvPr>
@@ -6003,7 +6003,7 @@
           <p:cNvPr id="9" name="">
             <a:extLst xmlns:a="http://schemas.openxmlformats.org/drawingml/2006/main">
               <a:ext uri="{FF2B5EF4-FFF2-40B4-BE49-F238E27FC236}">
-                <a16:creationId xmlns:a16="http://schemas.microsoft.com/office/drawing/2014/main" id="{D31AD5F4-5434-4B9A-9AFC-6B654BDC9A48}"/>
+                <a16:creationId xmlns:a16="http://schemas.microsoft.com/office/drawing/2014/main" id="{7E231DF7-8F03-466C-AD4B-9AA56EFE182F}"/>
               </a:ext>
             </a:extLst>
           </p:cNvPr>
@@ -6048,7 +6048,7 @@
           <p:cNvPr id="10" name="">
             <a:extLst xmlns:a="http://schemas.openxmlformats.org/drawingml/2006/main">
               <a:ext uri="{FF2B5EF4-FFF2-40B4-BE49-F238E27FC236}">
-                <a16:creationId xmlns:a16="http://schemas.microsoft.com/office/drawing/2014/main" id="{E004B8E9-9C49-4CD2-A02F-BA4E0DF93912}"/>
+                <a16:creationId xmlns:a16="http://schemas.microsoft.com/office/drawing/2014/main" id="{CE2EA1C6-22F3-49CC-910D-C3411376AB5E}"/>
               </a:ext>
             </a:extLst>
           </p:cNvPr>
@@ -6080,7 +6080,7 @@
           <p:cNvPr id="11" name="">
             <a:extLst xmlns:a="http://schemas.openxmlformats.org/drawingml/2006/main">
               <a:ext uri="{FF2B5EF4-FFF2-40B4-BE49-F238E27FC236}">
-                <a16:creationId xmlns:a16="http://schemas.microsoft.com/office/drawing/2014/main" id="{E8A44C94-09FA-4032-9EEF-220A698C2F56}"/>
+                <a16:creationId xmlns:a16="http://schemas.microsoft.com/office/drawing/2014/main" id="{BB5CA3C3-9B4D-47EB-BB30-14B6D33E0DB7}"/>
               </a:ext>
             </a:extLst>
           </p:cNvPr>
@@ -6112,7 +6112,7 @@
           <p:cNvPr id="12" name="">
             <a:extLst xmlns:a="http://schemas.openxmlformats.org/drawingml/2006/main">
               <a:ext uri="{FF2B5EF4-FFF2-40B4-BE49-F238E27FC236}">
-                <a16:creationId xmlns:a16="http://schemas.microsoft.com/office/drawing/2014/main" id="{4CC0A1AA-BA52-4672-9797-E663104EC06D}"/>
+                <a16:creationId xmlns:a16="http://schemas.microsoft.com/office/drawing/2014/main" id="{05C13839-4267-4375-8D42-F6BE0D1AAA3B}"/>
               </a:ext>
             </a:extLst>
           </p:cNvPr>
@@ -6144,7 +6144,7 @@
           <p:cNvPr id="13" name="">
             <a:extLst xmlns:a="http://schemas.openxmlformats.org/drawingml/2006/main">
               <a:ext uri="{FF2B5EF4-FFF2-40B4-BE49-F238E27FC236}">
-                <a16:creationId xmlns:a16="http://schemas.microsoft.com/office/drawing/2014/main" id="{1FF1BF6B-83E0-4BFF-A9A8-0A4E286765ED}"/>
+                <a16:creationId xmlns:a16="http://schemas.microsoft.com/office/drawing/2014/main" id="{20AB44F1-35B5-49E9-A247-1E2A2A09B747}"/>
               </a:ext>
             </a:extLst>
           </p:cNvPr>
@@ -6189,7 +6189,7 @@
           <p:cNvPr id="14" name="">
             <a:extLst xmlns:a="http://schemas.openxmlformats.org/drawingml/2006/main">
               <a:ext uri="{FF2B5EF4-FFF2-40B4-BE49-F238E27FC236}">
-                <a16:creationId xmlns:a16="http://schemas.microsoft.com/office/drawing/2014/main" id="{FB44A4A3-42E4-4062-8234-5D55D14E67AC}"/>
+                <a16:creationId xmlns:a16="http://schemas.microsoft.com/office/drawing/2014/main" id="{F93A980C-C791-4C25-AA0E-E839603783F5}"/>
               </a:ext>
             </a:extLst>
           </p:cNvPr>
@@ -6232,7 +6232,7 @@
     </p:spTree>
     <p:extLst>
       <p:ext uri="{BB962C8B-B14F-4D97-AF65-F5344CB8AC3E}">
-        <p14:creationId xmlns:p14="http://schemas.microsoft.com/office/powerpoint/2010/main" val="888056795"/>
+        <p14:creationId xmlns:p14="http://schemas.microsoft.com/office/powerpoint/2010/main" val="1689662890"/>
       </p:ext>
     </p:extLst>
   </p:cSld>
@@ -6263,7 +6263,7 @@
           <p:cNvPr id="20" name="">
             <a:extLst xmlns:a="http://schemas.openxmlformats.org/drawingml/2006/main">
               <a:ext uri="{FF2B5EF4-FFF2-40B4-BE49-F238E27FC236}">
-                <a16:creationId xmlns:a16="http://schemas.microsoft.com/office/drawing/2014/main" id="{B713977B-D709-4BB7-B690-C6AA28040960}"/>
+                <a16:creationId xmlns:a16="http://schemas.microsoft.com/office/drawing/2014/main" id="{5B0AEB41-87B8-462C-987C-E2211B1A4BA6}"/>
               </a:ext>
             </a:extLst>
           </p:cNvPr>
@@ -6308,7 +6308,7 @@
           <p:cNvPr id="2" name="">
             <a:extLst xmlns:a="http://schemas.openxmlformats.org/drawingml/2006/main">
               <a:ext uri="{FF2B5EF4-FFF2-40B4-BE49-F238E27FC236}">
-                <a16:creationId xmlns:a16="http://schemas.microsoft.com/office/drawing/2014/main" id="{5561E7DD-429E-4595-A175-1D92A7D4795D}"/>
+                <a16:creationId xmlns:a16="http://schemas.microsoft.com/office/drawing/2014/main" id="{6E948853-7BBA-45D0-9E80-F90A08DE3CDA}"/>
               </a:ext>
             </a:extLst>
           </p:cNvPr>
@@ -6338,7 +6338,7 @@
           <p:cNvPr id="3" name="">
             <a:extLst xmlns:a="http://schemas.openxmlformats.org/drawingml/2006/main">
               <a:ext uri="{FF2B5EF4-FFF2-40B4-BE49-F238E27FC236}">
-                <a16:creationId xmlns:a16="http://schemas.microsoft.com/office/drawing/2014/main" id="{79704B26-C801-4B49-B780-B412D8B1FA94}"/>
+                <a16:creationId xmlns:a16="http://schemas.microsoft.com/office/drawing/2014/main" id="{642742EC-52E2-4870-97FC-1DBD8F7109FF}"/>
               </a:ext>
             </a:extLst>
           </p:cNvPr>
@@ -6383,7 +6383,7 @@
           <p:cNvPr id="4" name="">
             <a:extLst xmlns:a="http://schemas.openxmlformats.org/drawingml/2006/main">
               <a:ext uri="{FF2B5EF4-FFF2-40B4-BE49-F238E27FC236}">
-                <a16:creationId xmlns:a16="http://schemas.microsoft.com/office/drawing/2014/main" id="{ED93B088-F150-44D7-9FFA-297703C80191}"/>
+                <a16:creationId xmlns:a16="http://schemas.microsoft.com/office/drawing/2014/main" id="{A1EAE896-0A09-4C7B-87DE-D9F8FDBAB31D}"/>
               </a:ext>
             </a:extLst>
           </p:cNvPr>
@@ -6428,7 +6428,7 @@
           <p:cNvPr id="5" name="">
             <a:extLst xmlns:a="http://schemas.openxmlformats.org/drawingml/2006/main">
               <a:ext uri="{FF2B5EF4-FFF2-40B4-BE49-F238E27FC236}">
-                <a16:creationId xmlns:a16="http://schemas.microsoft.com/office/drawing/2014/main" id="{F7CCBAB2-F4FE-4BE3-8F11-781FF62616FD}"/>
+                <a16:creationId xmlns:a16="http://schemas.microsoft.com/office/drawing/2014/main" id="{C81D4A3A-9041-4CF4-BBEF-131E8CA4F122}"/>
               </a:ext>
             </a:extLst>
           </p:cNvPr>
@@ -6460,7 +6460,7 @@
           <p:cNvPr id="6" name="">
             <a:extLst xmlns:a="http://schemas.openxmlformats.org/drawingml/2006/main">
               <a:ext uri="{FF2B5EF4-FFF2-40B4-BE49-F238E27FC236}">
-                <a16:creationId xmlns:a16="http://schemas.microsoft.com/office/drawing/2014/main" id="{BAB42BCE-956C-4B58-9DFE-6CDAF1591031}"/>
+                <a16:creationId xmlns:a16="http://schemas.microsoft.com/office/drawing/2014/main" id="{F1C8FAAB-AD43-40E7-8D23-1547FDA1EF27}"/>
               </a:ext>
             </a:extLst>
           </p:cNvPr>
@@ -6531,7 +6531,7 @@
           <p:cNvPr id="7" name="">
             <a:extLst xmlns:a="http://schemas.openxmlformats.org/drawingml/2006/main">
               <a:ext uri="{FF2B5EF4-FFF2-40B4-BE49-F238E27FC236}">
-                <a16:creationId xmlns:a16="http://schemas.microsoft.com/office/drawing/2014/main" id="{771B6DC3-5BDC-499E-91F8-EC19C26E4837}"/>
+                <a16:creationId xmlns:a16="http://schemas.microsoft.com/office/drawing/2014/main" id="{72EC5FA0-2A4D-4C1E-96FF-0108677519C4}"/>
               </a:ext>
             </a:extLst>
           </p:cNvPr>
@@ -6576,7 +6576,7 @@
           <p:cNvPr id="8" name="">
             <a:extLst xmlns:a="http://schemas.openxmlformats.org/drawingml/2006/main">
               <a:ext uri="{FF2B5EF4-FFF2-40B4-BE49-F238E27FC236}">
-                <a16:creationId xmlns:a16="http://schemas.microsoft.com/office/drawing/2014/main" id="{8CA93F99-69B0-4F7C-AA4F-569378E58408}"/>
+                <a16:creationId xmlns:a16="http://schemas.microsoft.com/office/drawing/2014/main" id="{78E6A66F-BE09-4796-8314-D5E9354B4843}"/>
               </a:ext>
             </a:extLst>
           </p:cNvPr>
@@ -6608,7 +6608,7 @@
           <p:cNvPr id="9" name="">
             <a:extLst xmlns:a="http://schemas.openxmlformats.org/drawingml/2006/main">
               <a:ext uri="{FF2B5EF4-FFF2-40B4-BE49-F238E27FC236}">
-                <a16:creationId xmlns:a16="http://schemas.microsoft.com/office/drawing/2014/main" id="{8B77AD6D-A84E-40EF-8AD0-C497546B9785}"/>
+                <a16:creationId xmlns:a16="http://schemas.microsoft.com/office/drawing/2014/main" id="{9AAE30CE-47AA-4059-81C0-650A8E8FBB65}"/>
               </a:ext>
             </a:extLst>
           </p:cNvPr>
@@ -6640,7 +6640,7 @@
           <p:cNvPr id="10" name="">
             <a:extLst xmlns:a="http://schemas.openxmlformats.org/drawingml/2006/main">
               <a:ext uri="{FF2B5EF4-FFF2-40B4-BE49-F238E27FC236}">
-                <a16:creationId xmlns:a16="http://schemas.microsoft.com/office/drawing/2014/main" id="{B09BEA43-FA69-4DB1-B667-C01F717EEF96}"/>
+                <a16:creationId xmlns:a16="http://schemas.microsoft.com/office/drawing/2014/main" id="{415ADF54-99C5-4D0B-BAD4-5157236A4297}"/>
               </a:ext>
             </a:extLst>
           </p:cNvPr>
@@ -6685,7 +6685,7 @@
           <p:cNvPr id="11" name="">
             <a:extLst xmlns:a="http://schemas.openxmlformats.org/drawingml/2006/main">
               <a:ext uri="{FF2B5EF4-FFF2-40B4-BE49-F238E27FC236}">
-                <a16:creationId xmlns:a16="http://schemas.microsoft.com/office/drawing/2014/main" id="{91A57F85-3489-4E8F-8304-2C2159F50D90}"/>
+                <a16:creationId xmlns:a16="http://schemas.microsoft.com/office/drawing/2014/main" id="{E6537F4C-EC8D-4994-B2A2-0E30C9C42192}"/>
               </a:ext>
             </a:extLst>
           </p:cNvPr>
@@ -6730,7 +6730,7 @@
           <p:cNvPr id="12" name="">
             <a:extLst xmlns:a="http://schemas.openxmlformats.org/drawingml/2006/main">
               <a:ext uri="{FF2B5EF4-FFF2-40B4-BE49-F238E27FC236}">
-                <a16:creationId xmlns:a16="http://schemas.microsoft.com/office/drawing/2014/main" id="{C6FB3402-331A-4020-AE34-8819C95A1312}"/>
+                <a16:creationId xmlns:a16="http://schemas.microsoft.com/office/drawing/2014/main" id="{3E5BAB75-22C1-4854-86EF-1B0658742DD1}"/>
               </a:ext>
             </a:extLst>
           </p:cNvPr>
@@ -6775,7 +6775,7 @@
           <p:cNvPr id="13" name="">
             <a:extLst xmlns:a="http://schemas.openxmlformats.org/drawingml/2006/main">
               <a:ext uri="{FF2B5EF4-FFF2-40B4-BE49-F238E27FC236}">
-                <a16:creationId xmlns:a16="http://schemas.microsoft.com/office/drawing/2014/main" id="{9BBCEFC9-21B8-4208-A9AF-20CF7AF91824}"/>
+                <a16:creationId xmlns:a16="http://schemas.microsoft.com/office/drawing/2014/main" id="{6AAB3D01-8DB3-4972-94B8-B6DAE0C8EC63}"/>
               </a:ext>
             </a:extLst>
           </p:cNvPr>
@@ -6807,7 +6807,7 @@
           <p:cNvPr id="14" name="">
             <a:extLst xmlns:a="http://schemas.openxmlformats.org/drawingml/2006/main">
               <a:ext uri="{FF2B5EF4-FFF2-40B4-BE49-F238E27FC236}">
-                <a16:creationId xmlns:a16="http://schemas.microsoft.com/office/drawing/2014/main" id="{B0EE98C2-B5F4-4E91-B177-E726B3EE03C7}"/>
+                <a16:creationId xmlns:a16="http://schemas.microsoft.com/office/drawing/2014/main" id="{8AE53A71-907B-4F6A-9F07-8326617A5488}"/>
               </a:ext>
             </a:extLst>
           </p:cNvPr>
@@ -6839,7 +6839,7 @@
           <p:cNvPr id="15" name="">
             <a:extLst xmlns:a="http://schemas.openxmlformats.org/drawingml/2006/main">
               <a:ext uri="{FF2B5EF4-FFF2-40B4-BE49-F238E27FC236}">
-                <a16:creationId xmlns:a16="http://schemas.microsoft.com/office/drawing/2014/main" id="{86239C24-2DE8-4502-AD50-48DD9BAFB804}"/>
+                <a16:creationId xmlns:a16="http://schemas.microsoft.com/office/drawing/2014/main" id="{68F524B3-C296-4DF0-8C8C-2D8C3048A15A}"/>
               </a:ext>
             </a:extLst>
           </p:cNvPr>
@@ -6871,7 +6871,7 @@
           <p:cNvPr id="16" name="">
             <a:extLst xmlns:a="http://schemas.openxmlformats.org/drawingml/2006/main">
               <a:ext uri="{FF2B5EF4-FFF2-40B4-BE49-F238E27FC236}">
-                <a16:creationId xmlns:a16="http://schemas.microsoft.com/office/drawing/2014/main" id="{1D57CC5E-6893-4592-9B7C-38CD4C37B8A0}"/>
+                <a16:creationId xmlns:a16="http://schemas.microsoft.com/office/drawing/2014/main" id="{57003087-D654-4554-A6AD-0546A57B6867}"/>
               </a:ext>
             </a:extLst>
           </p:cNvPr>
@@ -6916,7 +6916,7 @@
           <p:cNvPr id="17" name="">
             <a:extLst xmlns:a="http://schemas.openxmlformats.org/drawingml/2006/main">
               <a:ext uri="{FF2B5EF4-FFF2-40B4-BE49-F238E27FC236}">
-                <a16:creationId xmlns:a16="http://schemas.microsoft.com/office/drawing/2014/main" id="{3A91CCFC-48D6-465B-A7B2-4736DF38E50A}"/>
+                <a16:creationId xmlns:a16="http://schemas.microsoft.com/office/drawing/2014/main" id="{B69CCD30-D48D-4E0D-A5A6-BDB55F8B1285}"/>
               </a:ext>
             </a:extLst>
           </p:cNvPr>
@@ -6961,7 +6961,7 @@
           <p:cNvPr id="18" name="">
             <a:extLst xmlns:a="http://schemas.openxmlformats.org/drawingml/2006/main">
               <a:ext uri="{FF2B5EF4-FFF2-40B4-BE49-F238E27FC236}">
-                <a16:creationId xmlns:a16="http://schemas.microsoft.com/office/drawing/2014/main" id="{B351ECC3-C297-47C9-81FA-99412AE98F8C}"/>
+                <a16:creationId xmlns:a16="http://schemas.microsoft.com/office/drawing/2014/main" id="{2FB1C413-1306-4ACD-A3F6-EBB8479D4D34}"/>
               </a:ext>
             </a:extLst>
           </p:cNvPr>
@@ -7006,7 +7006,7 @@
           <p:cNvPr id="19" name="">
             <a:extLst xmlns:a="http://schemas.openxmlformats.org/drawingml/2006/main">
               <a:ext uri="{FF2B5EF4-FFF2-40B4-BE49-F238E27FC236}">
-                <a16:creationId xmlns:a16="http://schemas.microsoft.com/office/drawing/2014/main" id="{2C1E9F28-9CFD-4106-A208-54E6F7FA210D}"/>
+                <a16:creationId xmlns:a16="http://schemas.microsoft.com/office/drawing/2014/main" id="{E7400971-A8AD-4690-8ADE-5E658A9CF16F}"/>
               </a:ext>
             </a:extLst>
           </p:cNvPr>
@@ -7049,7 +7049,7 @@
     </p:spTree>
     <p:extLst>
       <p:ext uri="{BB962C8B-B14F-4D97-AF65-F5344CB8AC3E}">
-        <p14:creationId xmlns:p14="http://schemas.microsoft.com/office/powerpoint/2010/main" val="277694981"/>
+        <p14:creationId xmlns:p14="http://schemas.microsoft.com/office/powerpoint/2010/main" val="750579159"/>
       </p:ext>
     </p:extLst>
   </p:cSld>
@@ -7080,7 +7080,7 @@
           <p:cNvPr id="9" name="">
             <a:extLst xmlns:a="http://schemas.openxmlformats.org/drawingml/2006/main">
               <a:ext uri="{FF2B5EF4-FFF2-40B4-BE49-F238E27FC236}">
-                <a16:creationId xmlns:a16="http://schemas.microsoft.com/office/drawing/2014/main" id="{BB7369A1-ECEE-4D3E-81EE-9E2C4DBFACC0}"/>
+                <a16:creationId xmlns:a16="http://schemas.microsoft.com/office/drawing/2014/main" id="{5E093253-589B-4A99-BB74-4927A6F2C4A2}"/>
               </a:ext>
             </a:extLst>
           </p:cNvPr>
@@ -7125,7 +7125,7 @@
           <p:cNvPr id="2" name="">
             <a:extLst xmlns:a="http://schemas.openxmlformats.org/drawingml/2006/main">
               <a:ext uri="{FF2B5EF4-FFF2-40B4-BE49-F238E27FC236}">
-                <a16:creationId xmlns:a16="http://schemas.microsoft.com/office/drawing/2014/main" id="{624ED659-73F1-4E5B-9F05-0CAFE760F18C}"/>
+                <a16:creationId xmlns:a16="http://schemas.microsoft.com/office/drawing/2014/main" id="{D2C322D7-1BB8-4566-961E-2B44BCC89AF9}"/>
               </a:ext>
             </a:extLst>
           </p:cNvPr>
@@ -7155,7 +7155,7 @@
           <p:cNvPr id="3" name="">
             <a:extLst xmlns:a="http://schemas.openxmlformats.org/drawingml/2006/main">
               <a:ext uri="{FF2B5EF4-FFF2-40B4-BE49-F238E27FC236}">
-                <a16:creationId xmlns:a16="http://schemas.microsoft.com/office/drawing/2014/main" id="{9F02563F-29A2-46F5-A7FD-3A4F973A4ECF}"/>
+                <a16:creationId xmlns:a16="http://schemas.microsoft.com/office/drawing/2014/main" id="{1205A624-7AA7-4BB2-B1BC-DCBFD5A91631}"/>
               </a:ext>
             </a:extLst>
           </p:cNvPr>
@@ -7200,7 +7200,7 @@
           <p:cNvPr id="4" name="">
             <a:extLst xmlns:a="http://schemas.openxmlformats.org/drawingml/2006/main">
               <a:ext uri="{FF2B5EF4-FFF2-40B4-BE49-F238E27FC236}">
-                <a16:creationId xmlns:a16="http://schemas.microsoft.com/office/drawing/2014/main" id="{6E1A96FF-5A92-40CB-BD71-AF3CECD93A1E}"/>
+                <a16:creationId xmlns:a16="http://schemas.microsoft.com/office/drawing/2014/main" id="{0C8F48B1-A15A-4301-8366-B4362D945F53}"/>
               </a:ext>
             </a:extLst>
           </p:cNvPr>
@@ -7827,7 +7827,7 @@
           <p:cNvPr id="5" name="">
             <a:extLst xmlns:a="http://schemas.openxmlformats.org/drawingml/2006/main">
               <a:ext uri="{FF2B5EF4-FFF2-40B4-BE49-F238E27FC236}">
-                <a16:creationId xmlns:a16="http://schemas.microsoft.com/office/drawing/2014/main" id="{D4F78BFE-937B-483B-87BA-574634A70822}"/>
+                <a16:creationId xmlns:a16="http://schemas.microsoft.com/office/drawing/2014/main" id="{D6859824-037B-458E-9743-931BBC63DF86}"/>
               </a:ext>
             </a:extLst>
           </p:cNvPr>
@@ -7872,7 +7872,7 @@
           <p:cNvPr id="6" name="">
             <a:extLst xmlns:a="http://schemas.openxmlformats.org/drawingml/2006/main">
               <a:ext uri="{FF2B5EF4-FFF2-40B4-BE49-F238E27FC236}">
-                <a16:creationId xmlns:a16="http://schemas.microsoft.com/office/drawing/2014/main" id="{CA7C8BF2-569A-4393-A4CA-BBE9F904AB39}"/>
+                <a16:creationId xmlns:a16="http://schemas.microsoft.com/office/drawing/2014/main" id="{BC6CFA04-864E-4989-AD8B-F92148238611}"/>
               </a:ext>
             </a:extLst>
           </p:cNvPr>
@@ -7956,7 +7956,7 @@
           <p:cNvPr id="7" name="">
             <a:extLst xmlns:a="http://schemas.openxmlformats.org/drawingml/2006/main">
               <a:ext uri="{FF2B5EF4-FFF2-40B4-BE49-F238E27FC236}">
-                <a16:creationId xmlns:a16="http://schemas.microsoft.com/office/drawing/2014/main" id="{8ABFA3FD-1334-4A04-BB97-B37E0DF400F6}"/>
+                <a16:creationId xmlns:a16="http://schemas.microsoft.com/office/drawing/2014/main" id="{E0F6A439-6874-40AD-AE5B-893F24596A05}"/>
               </a:ext>
             </a:extLst>
           </p:cNvPr>
@@ -7967,8 +7967,8 @@
         </p:nvSpPr>
         <p:spPr>
           <a:xfrm xmlns:a="http://schemas.openxmlformats.org/drawingml/2006/main">
-            <a:off x="609600" y="5010150"/>
-            <a:ext cx="10810875" cy="742950"/>
+            <a:off x="609600" y="4905375"/>
+            <a:ext cx="10810875" cy="942975"/>
           </a:xfrm>
           <a:prstGeom xmlns:a="http://schemas.openxmlformats.org/drawingml/2006/main" prst="rect">
             <a:avLst/>
@@ -7983,7 +7983,7 @@
           <a:lstStyle xmlns:a="http://schemas.openxmlformats.org/drawingml/2006/main"/>
           <a:p xmlns:a="http://schemas.openxmlformats.org/drawingml/2006/main">
             <a:r>
-              <a:rPr sz="2025" b="0">
+              <a:rPr sz="1800" b="0">
                 <a:solidFill>
                   <a:srgbClr val="152D43"/>
                 </a:solidFill>
@@ -7996,7 +7996,7 @@
           </a:p>
           <a:p xmlns:a="http://schemas.openxmlformats.org/drawingml/2006/main">
             <a:r>
-              <a:rPr sz="2025" b="0">
+              <a:rPr sz="1800" b="0">
                 <a:solidFill>
                   <a:srgbClr val="152D43"/>
                 </a:solidFill>
@@ -8007,6 +8007,19 @@
               <a:t>Stream: also includes input upload and output download</a:t>
             </a:r>
           </a:p>
+          <a:p xmlns:a="http://schemas.openxmlformats.org/drawingml/2006/main">
+            <a:r>
+              <a:rPr sz="1800" b="0">
+                <a:solidFill>
+                  <a:srgbClr val="152D43"/>
+                </a:solidFill>
+                <a:latin typeface="Arial"/>
+                <a:ea typeface="Arial"/>
+                <a:cs typeface="Arial"/>
+              </a:rPr>
+              <a:t>Slides 6–7 add a fixed 2 ms/frame decode budget; not measured end-to-end.</a:t>
+            </a:r>
+          </a:p>
         </p:txBody>
       </p:sp>
       <p:sp>
@@ -8014,7 +8027,7 @@
           <p:cNvPr id="8" name="">
             <a:extLst xmlns:a="http://schemas.openxmlformats.org/drawingml/2006/main">
               <a:ext uri="{FF2B5EF4-FFF2-40B4-BE49-F238E27FC236}">
-                <a16:creationId xmlns:a16="http://schemas.microsoft.com/office/drawing/2014/main" id="{8510017C-5FE8-4DE1-915A-24D2238088AE}"/>
+                <a16:creationId xmlns:a16="http://schemas.microsoft.com/office/drawing/2014/main" id="{21EBE73C-E127-46FA-A13D-8FF497D6E203}"/>
               </a:ext>
             </a:extLst>
           </p:cNvPr>
@@ -8057,7 +8070,7 @@
     </p:spTree>
     <p:extLst>
       <p:ext uri="{BB962C8B-B14F-4D97-AF65-F5344CB8AC3E}">
-        <p14:creationId xmlns:p14="http://schemas.microsoft.com/office/powerpoint/2010/main" val="131127879"/>
+        <p14:creationId xmlns:p14="http://schemas.microsoft.com/office/powerpoint/2010/main" val="996184294"/>
       </p:ext>
     </p:extLst>
   </p:cSld>
@@ -8085,10 +8098,10 @@
       </p:grpSpPr>
       <p:sp>
         <p:nvSpPr>
-          <p:cNvPr id="11" name="">
-            <a:extLst xmlns:a="http://schemas.openxmlformats.org/drawingml/2006/main">
-              <a:ext uri="{FF2B5EF4-FFF2-40B4-BE49-F238E27FC236}">
-                <a16:creationId xmlns:a16="http://schemas.microsoft.com/office/drawing/2014/main" id="{4ADB4BFB-34C4-4B90-8181-C53A36F60831}"/>
+          <p:cNvPr id="12" name="">
+            <a:extLst xmlns:a="http://schemas.openxmlformats.org/drawingml/2006/main">
+              <a:ext uri="{FF2B5EF4-FFF2-40B4-BE49-F238E27FC236}">
+                <a16:creationId xmlns:a16="http://schemas.microsoft.com/office/drawing/2014/main" id="{40716465-5DFD-43FD-956D-AC3E27B7DC9E}"/>
               </a:ext>
             </a:extLst>
           </p:cNvPr>
@@ -8123,7 +8136,7 @@
                 <a:ea typeface="Arial"/>
                 <a:cs typeface="Arial"/>
               </a:rPr>
-              <a:t>Smaller regions reduce mean reconstruction latency</a:t>
+              <a:t>Decode budget + reconstruction across FOV levels</a:t>
             </a:r>
           </a:p>
         </p:txBody>
@@ -8133,7 +8146,7 @@
           <p:cNvPr id="2" name="">
             <a:extLst xmlns:a="http://schemas.openxmlformats.org/drawingml/2006/main">
               <a:ext uri="{FF2B5EF4-FFF2-40B4-BE49-F238E27FC236}">
-                <a16:creationId xmlns:a16="http://schemas.microsoft.com/office/drawing/2014/main" id="{2A272761-80DE-40EC-A22D-ABA5ED33A7EA}"/>
+                <a16:creationId xmlns:a16="http://schemas.microsoft.com/office/drawing/2014/main" id="{2ED23C7B-1B1A-4C4B-8BA2-AE338F10B291}"/>
               </a:ext>
             </a:extLst>
           </p:cNvPr>
@@ -8163,7 +8176,7 @@
           <p:cNvPr id="3" name="">
             <a:extLst xmlns:a="http://schemas.openxmlformats.org/drawingml/2006/main">
               <a:ext uri="{FF2B5EF4-FFF2-40B4-BE49-F238E27FC236}">
-                <a16:creationId xmlns:a16="http://schemas.microsoft.com/office/drawing/2014/main" id="{D180BEBD-FF4F-48E6-8B3F-9B6A3DA5CCB4}"/>
+                <a16:creationId xmlns:a16="http://schemas.microsoft.com/office/drawing/2014/main" id="{3D255288-C5BD-4756-A0E9-326AA8AD0C15}"/>
               </a:ext>
             </a:extLst>
           </p:cNvPr>
@@ -8208,7 +8221,7 @@
           <p:cNvPr id="4" name="Chart">
             <a:extLst xmlns:a="http://schemas.openxmlformats.org/drawingml/2006/main">
               <a:ext uri="{FF2B5EF4-FFF2-40B4-BE49-F238E27FC236}">
-                <a16:creationId xmlns:a16="http://schemas.microsoft.com/office/drawing/2014/main" id="{CD33B910-C7B2-4659-9753-207749475AEB}"/>
+                <a16:creationId xmlns:a16="http://schemas.microsoft.com/office/drawing/2014/main" id="{A734A4D1-0F26-4149-B21C-D59BCB964061}"/>
               </a:ext>
             </a:extLst>
           </p:cNvPr>
@@ -8221,7 +8234,7 @@
         </p:xfrm>
         <a:graphic xmlns:a="http://schemas.openxmlformats.org/drawingml/2006/main">
           <a:graphicData uri="http://schemas.openxmlformats.org/drawingml/2006/chart">
-            <c:chart xmlns:r="http://schemas.openxmlformats.org/officeDocument/2006/relationships" xmlns:c="http://schemas.openxmlformats.org/drawingml/2006/chart" r:id="R6fe50d0e34524fae"/>
+            <c:chart xmlns:r="http://schemas.openxmlformats.org/officeDocument/2006/relationships" xmlns:c="http://schemas.openxmlformats.org/drawingml/2006/chart" r:id="R34dd640846da483d"/>
           </a:graphicData>
         </a:graphic>
       </p:graphicFrame>
@@ -8230,7 +8243,7 @@
           <p:cNvPr id="5" name="">
             <a:extLst xmlns:a="http://schemas.openxmlformats.org/drawingml/2006/main">
               <a:ext uri="{FF2B5EF4-FFF2-40B4-BE49-F238E27FC236}">
-                <a16:creationId xmlns:a16="http://schemas.microsoft.com/office/drawing/2014/main" id="{344F4255-94A1-4AFC-AA83-3CEE682EEC26}"/>
+                <a16:creationId xmlns:a16="http://schemas.microsoft.com/office/drawing/2014/main" id="{D83CB0E8-0CA3-4E7A-BB44-7A0CAF4754B0}"/>
               </a:ext>
             </a:extLst>
           </p:cNvPr>
@@ -8275,7 +8288,7 @@
           <p:cNvPr id="6" name="">
             <a:extLst xmlns:a="http://schemas.openxmlformats.org/drawingml/2006/main">
               <a:ext uri="{FF2B5EF4-FFF2-40B4-BE49-F238E27FC236}">
-                <a16:creationId xmlns:a16="http://schemas.microsoft.com/office/drawing/2014/main" id="{1BA3FF1E-0086-4129-B500-3C2A1CF3346B}"/>
+                <a16:creationId xmlns:a16="http://schemas.microsoft.com/office/drawing/2014/main" id="{EE168E92-924B-476D-A8E1-BC0FC2705FA1}"/>
               </a:ext>
             </a:extLst>
           </p:cNvPr>
@@ -8310,7 +8323,7 @@
                 <a:ea typeface="Arial"/>
                 <a:cs typeface="Arial"/>
               </a:rPr>
-              <a:t>4.770 ms</a:t>
+              <a:t>6.770 ms</a:t>
             </a:r>
           </a:p>
         </p:txBody>
@@ -8320,7 +8333,7 @@
           <p:cNvPr id="7" name="">
             <a:extLst xmlns:a="http://schemas.openxmlformats.org/drawingml/2006/main">
               <a:ext uri="{FF2B5EF4-FFF2-40B4-BE49-F238E27FC236}">
-                <a16:creationId xmlns:a16="http://schemas.microsoft.com/office/drawing/2014/main" id="{54B98CA0-2DE1-4979-9864-3F9F4F5D4D00}"/>
+                <a16:creationId xmlns:a16="http://schemas.microsoft.com/office/drawing/2014/main" id="{8740F7CB-83C9-4C3B-853F-3A10B3F396E8}"/>
               </a:ext>
             </a:extLst>
           </p:cNvPr>
@@ -8355,7 +8368,7 @@
                 <a:ea typeface="Arial"/>
                 <a:cs typeface="Arial"/>
               </a:rPr>
-              <a:t>resident mean</a:t>
+              <a:t>decode + resident</a:t>
             </a:r>
           </a:p>
         </p:txBody>
@@ -8365,7 +8378,7 @@
           <p:cNvPr id="8" name="">
             <a:extLst xmlns:a="http://schemas.openxmlformats.org/drawingml/2006/main">
               <a:ext uri="{FF2B5EF4-FFF2-40B4-BE49-F238E27FC236}">
-                <a16:creationId xmlns:a16="http://schemas.microsoft.com/office/drawing/2014/main" id="{FD55F184-05A2-4D7B-ABE0-18E177EF365A}"/>
+                <a16:creationId xmlns:a16="http://schemas.microsoft.com/office/drawing/2014/main" id="{50EA0787-17AF-4B40-8C71-1787783BF23E}"/>
               </a:ext>
             </a:extLst>
           </p:cNvPr>
@@ -8400,7 +8413,7 @@
                 <a:ea typeface="Arial"/>
                 <a:cs typeface="Arial"/>
               </a:rPr>
-              <a:t>2.31×</a:t>
+              <a:t>1.92×</a:t>
             </a:r>
           </a:p>
         </p:txBody>
@@ -8410,7 +8423,7 @@
           <p:cNvPr id="9" name="">
             <a:extLst xmlns:a="http://schemas.openxmlformats.org/drawingml/2006/main">
               <a:ext uri="{FF2B5EF4-FFF2-40B4-BE49-F238E27FC236}">
-                <a16:creationId xmlns:a16="http://schemas.microsoft.com/office/drawing/2014/main" id="{563B1E9E-B94F-4E86-8203-7D61A7439F98}"/>
+                <a16:creationId xmlns:a16="http://schemas.microsoft.com/office/drawing/2014/main" id="{64AF9CED-3C51-4A88-B080-EBED15F200F2}"/>
               </a:ext>
             </a:extLst>
           </p:cNvPr>
@@ -8445,7 +8458,7 @@
                 <a:ea typeface="Arial"/>
                 <a:cs typeface="Arial"/>
               </a:rPr>
-              <a:t>versus measured full</a:t>
+              <a:t>versus full + decode</a:t>
             </a:r>
           </a:p>
         </p:txBody>
@@ -8455,7 +8468,52 @@
           <p:cNvPr id="10" name="">
             <a:extLst xmlns:a="http://schemas.openxmlformats.org/drawingml/2006/main">
               <a:ext uri="{FF2B5EF4-FFF2-40B4-BE49-F238E27FC236}">
-                <a16:creationId xmlns:a16="http://schemas.microsoft.com/office/drawing/2014/main" id="{E44916F6-F2B9-42F8-8E6D-4859535A2C9D}"/>
+                <a16:creationId xmlns:a16="http://schemas.microsoft.com/office/drawing/2014/main" id="{314273A1-9CC8-4371-84B0-D3CCD51894E9}"/>
+              </a:ext>
+            </a:extLst>
+          </p:cNvPr>
+          <p:cNvSpPr>
+            <a:spLocks xmlns:a="http://schemas.openxmlformats.org/drawingml/2006/main" noGrp="1"/>
+          </p:cNvSpPr>
+          <p:nvPr/>
+        </p:nvSpPr>
+        <p:spPr>
+          <a:xfrm xmlns:a="http://schemas.openxmlformats.org/drawingml/2006/main">
+            <a:off x="609600" y="1381125"/>
+            <a:ext cx="10906125" cy="295275"/>
+          </a:xfrm>
+          <a:prstGeom xmlns:a="http://schemas.openxmlformats.org/drawingml/2006/main" prst="rect">
+            <a:avLst/>
+          </a:prstGeom>
+          <a:noFill xmlns:a="http://schemas.openxmlformats.org/drawingml/2006/main"/>
+          <a:ln xmlns:a="http://schemas.openxmlformats.org/drawingml/2006/main" w="0">
+            <a:noFill/>
+          </a:ln>
+        </p:spPr>
+        <p:txBody>
+          <a:bodyPr xmlns:a="http://schemas.openxmlformats.org/drawingml/2006/main" lIns="0" tIns="0" rIns="0" bIns="0"/>
+          <a:lstStyle xmlns:a="http://schemas.openxmlformats.org/drawingml/2006/main"/>
+          <a:p xmlns:a="http://schemas.openxmlformats.org/drawingml/2006/main">
+            <a:r>
+              <a:rPr sz="1725" b="1">
+                <a:solidFill>
+                  <a:srgbClr val="086B93"/>
+                </a:solidFill>
+                <a:latin typeface="Arial"/>
+                <a:ea typeface="Arial"/>
+                <a:cs typeface="Arial"/>
+              </a:rPr>
+              <a:t>Fixed decode budget: 2 ms/frame + measured reconstruction; stream also includes copies.</a:t>
+            </a:r>
+          </a:p>
+        </p:txBody>
+      </p:sp>
+      <p:sp>
+        <p:nvSpPr>
+          <p:cNvPr id="11" name="">
+            <a:extLst xmlns:a="http://schemas.openxmlformats.org/drawingml/2006/main">
+              <a:ext uri="{FF2B5EF4-FFF2-40B4-BE49-F238E27FC236}">
+                <a16:creationId xmlns:a16="http://schemas.microsoft.com/office/drawing/2014/main" id="{462B419C-F7DA-422F-A8D9-5A5BE585F39F}"/>
               </a:ext>
             </a:extLst>
           </p:cNvPr>
@@ -8490,7 +8548,7 @@
                 <a:ea typeface="Arial"/>
                 <a:cs typeface="Arial"/>
               </a:rPr>
-              <a:t>Fast resampling enabled. Cross-implementation gains also include upsampling changes, not only FOV. No claim of an optimal full baseline.</a:t>
+              <a:t>Derived budget, not measured end-to-end. Fast resampling enabled; gains also include upsampling changes. No optimal-baseline claim.</a:t>
             </a:r>
           </a:p>
         </p:txBody>
@@ -8498,7 +8556,7 @@
     </p:spTree>
     <p:extLst>
       <p:ext uri="{BB962C8B-B14F-4D97-AF65-F5344CB8AC3E}">
-        <p14:creationId xmlns:p14="http://schemas.microsoft.com/office/powerpoint/2010/main" val="724990584"/>
+        <p14:creationId xmlns:p14="http://schemas.microsoft.com/office/powerpoint/2010/main" val="1781705979"/>
       </p:ext>
     </p:extLst>
   </p:cSld>
@@ -8529,7 +8587,7 @@
           <p:cNvPr id="8" name="">
             <a:extLst xmlns:a="http://schemas.openxmlformats.org/drawingml/2006/main">
               <a:ext uri="{FF2B5EF4-FFF2-40B4-BE49-F238E27FC236}">
-                <a16:creationId xmlns:a16="http://schemas.microsoft.com/office/drawing/2014/main" id="{99BDEB03-94C3-4F85-A8BD-F22D45934F32}"/>
+                <a16:creationId xmlns:a16="http://schemas.microsoft.com/office/drawing/2014/main" id="{80482416-2AF0-4E75-B599-E070C53FC053}"/>
               </a:ext>
             </a:extLst>
           </p:cNvPr>
@@ -8574,7 +8632,7 @@
           <p:cNvPr id="2" name="">
             <a:extLst xmlns:a="http://schemas.openxmlformats.org/drawingml/2006/main">
               <a:ext uri="{FF2B5EF4-FFF2-40B4-BE49-F238E27FC236}">
-                <a16:creationId xmlns:a16="http://schemas.microsoft.com/office/drawing/2014/main" id="{D0FEB489-62CA-4624-9ED2-338E2E06FB11}"/>
+                <a16:creationId xmlns:a16="http://schemas.microsoft.com/office/drawing/2014/main" id="{3140D622-621A-4EC6-A1A4-F6DB096B2AF0}"/>
               </a:ext>
             </a:extLst>
           </p:cNvPr>
@@ -8604,7 +8662,7 @@
           <p:cNvPr id="3" name="">
             <a:extLst xmlns:a="http://schemas.openxmlformats.org/drawingml/2006/main">
               <a:ext uri="{FF2B5EF4-FFF2-40B4-BE49-F238E27FC236}">
-                <a16:creationId xmlns:a16="http://schemas.microsoft.com/office/drawing/2014/main" id="{12C368B3-E133-41D2-A1AA-128ADCB2E0DE}"/>
+                <a16:creationId xmlns:a16="http://schemas.microsoft.com/office/drawing/2014/main" id="{EF561C32-3A6F-45FF-8BC0-D7E3AAA04247}"/>
               </a:ext>
             </a:extLst>
           </p:cNvPr>
@@ -8649,7 +8707,7 @@
           <p:cNvPr id="4" name="">
             <a:extLst xmlns:a="http://schemas.openxmlformats.org/drawingml/2006/main">
               <a:ext uri="{FF2B5EF4-FFF2-40B4-BE49-F238E27FC236}">
-                <a16:creationId xmlns:a16="http://schemas.microsoft.com/office/drawing/2014/main" id="{88D90900-5DE1-41F3-B3D3-3E359679A66A}"/>
+                <a16:creationId xmlns:a16="http://schemas.microsoft.com/office/drawing/2014/main" id="{7251B9C5-D091-4C6C-8D97-8EC47B5578F9}"/>
               </a:ext>
             </a:extLst>
           </p:cNvPr>
@@ -8733,7 +8791,7 @@
                           <a:ea typeface="Arial"/>
                           <a:cs typeface="Arial"/>
                         </a:rPr>
-                        <a:t>Mean latency</a:t>
+                        <a:t>Decode + recon mean</a:t>
                       </a:r>
                     </a:p>
                   </a:txBody>
@@ -8903,7 +8961,7 @@
                           <a:ea typeface="Arial"/>
                           <a:cs typeface="Arial"/>
                         </a:rPr>
-                        <a:t>4.562 ms</a:t>
+                        <a:t>6.562 ms</a:t>
                       </a:r>
                     </a:p>
                   </a:txBody>
@@ -9055,7 +9113,7 @@
                           <a:ea typeface="Arial"/>
                           <a:cs typeface="Arial"/>
                         </a:rPr>
-                        <a:t>4.770 ms</a:t>
+                        <a:t>6.770 ms</a:t>
                       </a:r>
                     </a:p>
                   </a:txBody>
@@ -9207,7 +9265,7 @@
                           <a:ea typeface="Arial"/>
                           <a:cs typeface="Arial"/>
                         </a:rPr>
-                        <a:t>5.998 ms</a:t>
+                        <a:t>7.998 ms</a:t>
                       </a:r>
                     </a:p>
                   </a:txBody>
@@ -9359,7 +9417,7 @@
                           <a:ea typeface="Arial"/>
                           <a:cs typeface="Arial"/>
                         </a:rPr>
-                        <a:t>7.772 ms</a:t>
+                        <a:t>9.772 ms</a:t>
                       </a:r>
                     </a:p>
                   </a:txBody>
@@ -9511,7 +9569,7 @@
                           <a:ea typeface="Arial"/>
                           <a:cs typeface="Arial"/>
                         </a:rPr>
-                        <a:t>10.425 ms</a:t>
+                        <a:t>12.425 ms</a:t>
                       </a:r>
                     </a:p>
                   </a:txBody>
@@ -9615,7 +9673,7 @@
           <p:cNvPr id="5" name="">
             <a:extLst xmlns:a="http://schemas.openxmlformats.org/drawingml/2006/main">
               <a:ext uri="{FF2B5EF4-FFF2-40B4-BE49-F238E27FC236}">
-                <a16:creationId xmlns:a16="http://schemas.microsoft.com/office/drawing/2014/main" id="{5FC05E40-E6A0-429B-B055-7F5AFE1849F1}"/>
+                <a16:creationId xmlns:a16="http://schemas.microsoft.com/office/drawing/2014/main" id="{9D79713E-FC1D-47ED-9640-BFEA73351E22}"/>
               </a:ext>
             </a:extLst>
           </p:cNvPr>
@@ -9660,7 +9718,7 @@
           <p:cNvPr id="6" name="">
             <a:extLst xmlns:a="http://schemas.openxmlformats.org/drawingml/2006/main">
               <a:ext uri="{FF2B5EF4-FFF2-40B4-BE49-F238E27FC236}">
-                <a16:creationId xmlns:a16="http://schemas.microsoft.com/office/drawing/2014/main" id="{73C3F9B4-C175-4DB3-91DB-DA77957E6C8E}"/>
+                <a16:creationId xmlns:a16="http://schemas.microsoft.com/office/drawing/2014/main" id="{A974D0D0-EB24-4086-B320-03D2D299BEB8}"/>
               </a:ext>
             </a:extLst>
           </p:cNvPr>
@@ -9705,7 +9763,7 @@
           <p:cNvPr id="7" name="">
             <a:extLst xmlns:a="http://schemas.openxmlformats.org/drawingml/2006/main">
               <a:ext uri="{FF2B5EF4-FFF2-40B4-BE49-F238E27FC236}">
-                <a16:creationId xmlns:a16="http://schemas.microsoft.com/office/drawing/2014/main" id="{E2216766-BD64-4B78-AA06-850E8AECC58E}"/>
+                <a16:creationId xmlns:a16="http://schemas.microsoft.com/office/drawing/2014/main" id="{6C4EA699-9380-4A47-92D1-775281A90AA5}"/>
               </a:ext>
             </a:extLst>
           </p:cNvPr>
@@ -9740,7 +9798,7 @@
                 <a:ea typeface="Arial"/>
                 <a:cs typeface="Arial"/>
               </a:rPr>
-              <a:t>Stereo values are derived; latency is not halved. Non-atomic writes remain. SSIM/LPIPS are not measured.</a:t>
+              <a:t>Fixed 2 ms decode budget + resident reconstruction. Stereo values derived; non-atomic writes remain. No SSIM/LPIPS.</a:t>
             </a:r>
           </a:p>
         </p:txBody>
@@ -9748,7 +9806,7 @@
     </p:spTree>
     <p:extLst>
       <p:ext uri="{BB962C8B-B14F-4D97-AF65-F5344CB8AC3E}">
-        <p14:creationId xmlns:p14="http://schemas.microsoft.com/office/powerpoint/2010/main" val="1884823736"/>
+        <p14:creationId xmlns:p14="http://schemas.microsoft.com/office/powerpoint/2010/main" val="1193876524"/>
       </p:ext>
     </p:extLst>
   </p:cSld>
@@ -9779,7 +9837,7 @@
           <p:cNvPr id="8" name="">
             <a:extLst xmlns:a="http://schemas.openxmlformats.org/drawingml/2006/main">
               <a:ext uri="{FF2B5EF4-FFF2-40B4-BE49-F238E27FC236}">
-                <a16:creationId xmlns:a16="http://schemas.microsoft.com/office/drawing/2014/main" id="{861CFD4F-196D-4187-B4E1-37CE9FB5D040}"/>
+                <a16:creationId xmlns:a16="http://schemas.microsoft.com/office/drawing/2014/main" id="{C55E6F62-EBB3-43F0-8ED6-EB48F289846E}"/>
               </a:ext>
             </a:extLst>
           </p:cNvPr>
@@ -9824,7 +9882,7 @@
           <p:cNvPr id="2" name="">
             <a:extLst xmlns:a="http://schemas.openxmlformats.org/drawingml/2006/main">
               <a:ext uri="{FF2B5EF4-FFF2-40B4-BE49-F238E27FC236}">
-                <a16:creationId xmlns:a16="http://schemas.microsoft.com/office/drawing/2014/main" id="{72AC12A9-5F94-4132-8AE3-2A64471FE985}"/>
+                <a16:creationId xmlns:a16="http://schemas.microsoft.com/office/drawing/2014/main" id="{A9F8C08C-CA05-41E5-9EB3-E1BFBCC80604}"/>
               </a:ext>
             </a:extLst>
           </p:cNvPr>
@@ -9854,7 +9912,7 @@
           <p:cNvPr id="3" name="">
             <a:extLst xmlns:a="http://schemas.openxmlformats.org/drawingml/2006/main">
               <a:ext uri="{FF2B5EF4-FFF2-40B4-BE49-F238E27FC236}">
-                <a16:creationId xmlns:a16="http://schemas.microsoft.com/office/drawing/2014/main" id="{816C0584-468D-4BEB-A1CD-FA6733995531}"/>
+                <a16:creationId xmlns:a16="http://schemas.microsoft.com/office/drawing/2014/main" id="{0021250B-1562-4CBB-8C75-3A073FA567A1}"/>
               </a:ext>
             </a:extLst>
           </p:cNvPr>
@@ -9899,7 +9957,7 @@
           <p:cNvPr id="4" name="">
             <a:extLst xmlns:a="http://schemas.openxmlformats.org/drawingml/2006/main">
               <a:ext uri="{FF2B5EF4-FFF2-40B4-BE49-F238E27FC236}">
-                <a16:creationId xmlns:a16="http://schemas.microsoft.com/office/drawing/2014/main" id="{63C6A5E1-5966-422B-826E-618720D26433}"/>
+                <a16:creationId xmlns:a16="http://schemas.microsoft.com/office/drawing/2014/main" id="{954C22D5-FAC4-4342-B681-3BE7E85E3D51}"/>
               </a:ext>
             </a:extLst>
           </p:cNvPr>
@@ -10713,7 +10771,7 @@
           <p:cNvPr id="5" name="">
             <a:extLst xmlns:a="http://schemas.openxmlformats.org/drawingml/2006/main">
               <a:ext uri="{FF2B5EF4-FFF2-40B4-BE49-F238E27FC236}">
-                <a16:creationId xmlns:a16="http://schemas.microsoft.com/office/drawing/2014/main" id="{A1718091-5726-434A-9740-62A41D7B4F92}"/>
+                <a16:creationId xmlns:a16="http://schemas.microsoft.com/office/drawing/2014/main" id="{B913266B-49D1-4C63-BC99-ACB18153BB7A}"/>
               </a:ext>
             </a:extLst>
           </p:cNvPr>
@@ -10748,7 +10806,7 @@
                 <a:ea typeface="Arial"/>
                 <a:cs typeface="Arial"/>
               </a:rPr>
-              <a:t>15W. Frame 39 per sequence, 100 repeats. Preallocated resident-path mean.</a:t>
+              <a:t>15W. Frame 39 per sequence, 100 repeats. Resident reconstruction means; no decode.</a:t>
             </a:r>
           </a:p>
         </p:txBody>
@@ -10758,7 +10816,7 @@
           <p:cNvPr id="6" name="">
             <a:extLst xmlns:a="http://schemas.openxmlformats.org/drawingml/2006/main">
               <a:ext uri="{FF2B5EF4-FFF2-40B4-BE49-F238E27FC236}">
-                <a16:creationId xmlns:a16="http://schemas.microsoft.com/office/drawing/2014/main" id="{AC302475-2710-4259-AA04-8A5C74A2CFE9}"/>
+                <a16:creationId xmlns:a16="http://schemas.microsoft.com/office/drawing/2014/main" id="{FC140971-D6F5-443A-AB1C-386A2EC47AC0}"/>
               </a:ext>
             </a:extLst>
           </p:cNvPr>
@@ -10816,7 +10874,7 @@
           <p:cNvPr id="7" name="">
             <a:extLst xmlns:a="http://schemas.openxmlformats.org/drawingml/2006/main">
               <a:ext uri="{FF2B5EF4-FFF2-40B4-BE49-F238E27FC236}">
-                <a16:creationId xmlns:a16="http://schemas.microsoft.com/office/drawing/2014/main" id="{888C63B8-D0AA-4A9B-B137-A61348C5E26F}"/>
+                <a16:creationId xmlns:a16="http://schemas.microsoft.com/office/drawing/2014/main" id="{EF98E2B2-2B20-496F-B676-7BA9B68AA19D}"/>
               </a:ext>
             </a:extLst>
           </p:cNvPr>
@@ -10859,7 +10917,7 @@
     </p:spTree>
     <p:extLst>
       <p:ext uri="{BB962C8B-B14F-4D97-AF65-F5344CB8AC3E}">
-        <p14:creationId xmlns:p14="http://schemas.microsoft.com/office/powerpoint/2010/main" val="360118"/>
+        <p14:creationId xmlns:p14="http://schemas.microsoft.com/office/powerpoint/2010/main" val="2020730281"/>
       </p:ext>
     </p:extLst>
   </p:cSld>
@@ -10890,7 +10948,7 @@
           <p:cNvPr id="14" name="">
             <a:extLst xmlns:a="http://schemas.openxmlformats.org/drawingml/2006/main">
               <a:ext uri="{FF2B5EF4-FFF2-40B4-BE49-F238E27FC236}">
-                <a16:creationId xmlns:a16="http://schemas.microsoft.com/office/drawing/2014/main" id="{28C68A00-B345-43AA-A2D5-A51C63EBB164}"/>
+                <a16:creationId xmlns:a16="http://schemas.microsoft.com/office/drawing/2014/main" id="{B493C514-7CBA-4265-B300-6875A26701E8}"/>
               </a:ext>
             </a:extLst>
           </p:cNvPr>
@@ -10935,7 +10993,7 @@
           <p:cNvPr id="2" name="">
             <a:extLst xmlns:a="http://schemas.openxmlformats.org/drawingml/2006/main">
               <a:ext uri="{FF2B5EF4-FFF2-40B4-BE49-F238E27FC236}">
-                <a16:creationId xmlns:a16="http://schemas.microsoft.com/office/drawing/2014/main" id="{5E7725BE-6B20-4D8F-AE6F-E788F362167A}"/>
+                <a16:creationId xmlns:a16="http://schemas.microsoft.com/office/drawing/2014/main" id="{A54560FE-5FB7-4883-81E9-A2C27E12A60E}"/>
               </a:ext>
             </a:extLst>
           </p:cNvPr>
@@ -10965,7 +11023,7 @@
           <p:cNvPr id="3" name="">
             <a:extLst xmlns:a="http://schemas.openxmlformats.org/drawingml/2006/main">
               <a:ext uri="{FF2B5EF4-FFF2-40B4-BE49-F238E27FC236}">
-                <a16:creationId xmlns:a16="http://schemas.microsoft.com/office/drawing/2014/main" id="{40A01C89-F0AC-48B0-9A2B-D868556E8005}"/>
+                <a16:creationId xmlns:a16="http://schemas.microsoft.com/office/drawing/2014/main" id="{339A00CF-18B1-4FC9-A101-58948D0AD27A}"/>
               </a:ext>
             </a:extLst>
           </p:cNvPr>
@@ -11010,7 +11068,7 @@
           <p:cNvPr id="4" name="">
             <a:extLst xmlns:a="http://schemas.openxmlformats.org/drawingml/2006/main">
               <a:ext uri="{FF2B5EF4-FFF2-40B4-BE49-F238E27FC236}">
-                <a16:creationId xmlns:a16="http://schemas.microsoft.com/office/drawing/2014/main" id="{2C10F6C8-EDC2-44EE-B052-128992A334D7}"/>
+                <a16:creationId xmlns:a16="http://schemas.microsoft.com/office/drawing/2014/main" id="{D08AFF7F-992D-480B-A104-3845F52FDBFD}"/>
               </a:ext>
             </a:extLst>
           </p:cNvPr>
@@ -11055,7 +11113,7 @@
           <p:cNvPr id="5" name="">
             <a:extLst xmlns:a="http://schemas.openxmlformats.org/drawingml/2006/main">
               <a:ext uri="{FF2B5EF4-FFF2-40B4-BE49-F238E27FC236}">
-                <a16:creationId xmlns:a16="http://schemas.microsoft.com/office/drawing/2014/main" id="{46A73E9B-4789-4A5E-8E25-7A04C276412A}"/>
+                <a16:creationId xmlns:a16="http://schemas.microsoft.com/office/drawing/2014/main" id="{A3B2E728-EC90-458C-AD3E-D989F5BD63C2}"/>
               </a:ext>
             </a:extLst>
           </p:cNvPr>
@@ -11100,7 +11158,7 @@
           <p:cNvPr id="6" name="">
             <a:extLst xmlns:a="http://schemas.openxmlformats.org/drawingml/2006/main">
               <a:ext uri="{FF2B5EF4-FFF2-40B4-BE49-F238E27FC236}">
-                <a16:creationId xmlns:a16="http://schemas.microsoft.com/office/drawing/2014/main" id="{14212434-C80A-4BED-AE3B-EABEBC9F5A4F}"/>
+                <a16:creationId xmlns:a16="http://schemas.microsoft.com/office/drawing/2014/main" id="{2CD95DB8-BBE9-4165-9113-3C62B6DA4FD9}"/>
               </a:ext>
             </a:extLst>
           </p:cNvPr>
@@ -11145,7 +11203,7 @@
           <p:cNvPr id="7" name="">
             <a:extLst xmlns:a="http://schemas.openxmlformats.org/drawingml/2006/main">
               <a:ext uri="{FF2B5EF4-FFF2-40B4-BE49-F238E27FC236}">
-                <a16:creationId xmlns:a16="http://schemas.microsoft.com/office/drawing/2014/main" id="{D9D49649-CF60-4732-A9D2-3B9454CA8F6C}"/>
+                <a16:creationId xmlns:a16="http://schemas.microsoft.com/office/drawing/2014/main" id="{46299FB1-47FC-4FC7-A9F2-AB8BA75A050F}"/>
               </a:ext>
             </a:extLst>
           </p:cNvPr>
@@ -11190,7 +11248,7 @@
           <p:cNvPr id="8" name="">
             <a:extLst xmlns:a="http://schemas.openxmlformats.org/drawingml/2006/main">
               <a:ext uri="{FF2B5EF4-FFF2-40B4-BE49-F238E27FC236}">
-                <a16:creationId xmlns:a16="http://schemas.microsoft.com/office/drawing/2014/main" id="{983EB2CB-D45B-49B2-907E-47D03D3A11C6}"/>
+                <a16:creationId xmlns:a16="http://schemas.microsoft.com/office/drawing/2014/main" id="{EBA894BE-42A4-49CA-8AE3-E2ED1ECBCAB1}"/>
               </a:ext>
             </a:extLst>
           </p:cNvPr>
@@ -11235,7 +11293,7 @@
           <p:cNvPr id="9" name="">
             <a:extLst xmlns:a="http://schemas.openxmlformats.org/drawingml/2006/main">
               <a:ext uri="{FF2B5EF4-FFF2-40B4-BE49-F238E27FC236}">
-                <a16:creationId xmlns:a16="http://schemas.microsoft.com/office/drawing/2014/main" id="{70E17360-475E-4994-B6AF-C744956E562E}"/>
+                <a16:creationId xmlns:a16="http://schemas.microsoft.com/office/drawing/2014/main" id="{2C44DF22-CEB3-421A-81CD-0A598E99002B}"/>
               </a:ext>
             </a:extLst>
           </p:cNvPr>
@@ -11280,7 +11338,7 @@
           <p:cNvPr id="10" name="">
             <a:extLst xmlns:a="http://schemas.openxmlformats.org/drawingml/2006/main">
               <a:ext uri="{FF2B5EF4-FFF2-40B4-BE49-F238E27FC236}">
-                <a16:creationId xmlns:a16="http://schemas.microsoft.com/office/drawing/2014/main" id="{94B0689C-66D6-4568-B695-B0EE61A7F8CD}"/>
+                <a16:creationId xmlns:a16="http://schemas.microsoft.com/office/drawing/2014/main" id="{F6E61D53-8033-407F-9BB8-644F90E7FFE3}"/>
               </a:ext>
             </a:extLst>
           </p:cNvPr>
@@ -11325,7 +11383,7 @@
           <p:cNvPr id="11" name="">
             <a:extLst xmlns:a="http://schemas.openxmlformats.org/drawingml/2006/main">
               <a:ext uri="{FF2B5EF4-FFF2-40B4-BE49-F238E27FC236}">
-                <a16:creationId xmlns:a16="http://schemas.microsoft.com/office/drawing/2014/main" id="{2EF3CB6E-847C-485F-A785-912CC74E3FDF}"/>
+                <a16:creationId xmlns:a16="http://schemas.microsoft.com/office/drawing/2014/main" id="{AD7CD40C-C76D-4057-8D52-D84F77AAAE50}"/>
               </a:ext>
             </a:extLst>
           </p:cNvPr>
@@ -11370,7 +11428,7 @@
           <p:cNvPr id="12" name="">
             <a:extLst xmlns:a="http://schemas.openxmlformats.org/drawingml/2006/main">
               <a:ext uri="{FF2B5EF4-FFF2-40B4-BE49-F238E27FC236}">
-                <a16:creationId xmlns:a16="http://schemas.microsoft.com/office/drawing/2014/main" id="{7E148619-09B9-4A6C-B7FB-675940E1F930}"/>
+                <a16:creationId xmlns:a16="http://schemas.microsoft.com/office/drawing/2014/main" id="{5134FAC6-4219-4EE4-A0AD-955CB789D2B6}"/>
               </a:ext>
             </a:extLst>
           </p:cNvPr>
@@ -11415,7 +11473,7 @@
           <p:cNvPr id="13" name="">
             <a:extLst xmlns:a="http://schemas.openxmlformats.org/drawingml/2006/main">
               <a:ext uri="{FF2B5EF4-FFF2-40B4-BE49-F238E27FC236}">
-                <a16:creationId xmlns:a16="http://schemas.microsoft.com/office/drawing/2014/main" id="{65848F9E-45D3-4C03-8D80-0EBC3FD96678}"/>
+                <a16:creationId xmlns:a16="http://schemas.microsoft.com/office/drawing/2014/main" id="{0741A27A-C832-4BD0-81C5-07988DF988DA}"/>
               </a:ext>
             </a:extLst>
           </p:cNvPr>
@@ -11458,7 +11516,7 @@
     </p:spTree>
     <p:extLst>
       <p:ext uri="{BB962C8B-B14F-4D97-AF65-F5344CB8AC3E}">
-        <p14:creationId xmlns:p14="http://schemas.microsoft.com/office/powerpoint/2010/main" val="957824658"/>
+        <p14:creationId xmlns:p14="http://schemas.microsoft.com/office/powerpoint/2010/main" val="1201806577"/>
       </p:ext>
     </p:extLst>
   </p:cSld>

--- a/presentations/weekly_20261029/weekly_20261029_english_final.pptx
+++ b/presentations/weekly_20261029/weekly_20261029_english_final.pptx
@@ -2,21 +2,20 @@
 <file path=ppt/presentation.xml><?xml version="1.0" encoding="utf-8"?>
 <p:presentation xmlns:p="http://schemas.openxmlformats.org/presentationml/2006/main">
   <p:sldMasterIdLst>
-    <p:sldMasterId xmlns:r="http://schemas.openxmlformats.org/officeDocument/2006/relationships" id="2147483648" r:id="R1d28d5bff2984739"/>
+    <p:sldMasterId xmlns:r="http://schemas.openxmlformats.org/officeDocument/2006/relationships" id="2147483648" r:id="R7ca1053cbf0c485f"/>
   </p:sldMasterIdLst>
   <p:notesMasterIdLst>
-    <p:notesMasterId xmlns:r="http://schemas.openxmlformats.org/officeDocument/2006/relationships" r:id="R9ad6c2b3b66c4593"/>
+    <p:notesMasterId xmlns:r="http://schemas.openxmlformats.org/officeDocument/2006/relationships" r:id="Rde2cca9fd979416c"/>
   </p:notesMasterIdLst>
   <p:sldIdLst>
-    <p:sldId xmlns:r="http://schemas.openxmlformats.org/officeDocument/2006/relationships" id="256" r:id="R86523a8357324f71"/>
-    <p:sldId xmlns:r="http://schemas.openxmlformats.org/officeDocument/2006/relationships" id="257" r:id="R49e6f032974a4b9a"/>
-    <p:sldId xmlns:r="http://schemas.openxmlformats.org/officeDocument/2006/relationships" id="258" r:id="R9b232c0cc1fb4505"/>
-    <p:sldId xmlns:r="http://schemas.openxmlformats.org/officeDocument/2006/relationships" id="259" r:id="R8ea4c28ea05a4e7a"/>
-    <p:sldId xmlns:r="http://schemas.openxmlformats.org/officeDocument/2006/relationships" id="260" r:id="R98922a20f9274911"/>
-    <p:sldId xmlns:r="http://schemas.openxmlformats.org/officeDocument/2006/relationships" id="261" r:id="R6554c7a9d046406e"/>
-    <p:sldId xmlns:r="http://schemas.openxmlformats.org/officeDocument/2006/relationships" id="262" r:id="Rcac3df4b1fec4e79"/>
-    <p:sldId xmlns:r="http://schemas.openxmlformats.org/officeDocument/2006/relationships" id="263" r:id="R00d84e3d6bd142ca"/>
-    <p:sldId xmlns:r="http://schemas.openxmlformats.org/officeDocument/2006/relationships" id="264" r:id="R9c53e31c17dc4402"/>
+    <p:sldId xmlns:r="http://schemas.openxmlformats.org/officeDocument/2006/relationships" id="256" r:id="Rc44a82475b684fc6"/>
+    <p:sldId xmlns:r="http://schemas.openxmlformats.org/officeDocument/2006/relationships" id="257" r:id="Re391d4f25ddb4bba"/>
+    <p:sldId xmlns:r="http://schemas.openxmlformats.org/officeDocument/2006/relationships" id="258" r:id="Recac69d6359c4db1"/>
+    <p:sldId xmlns:r="http://schemas.openxmlformats.org/officeDocument/2006/relationships" id="259" r:id="R5b46e918a1164032"/>
+    <p:sldId xmlns:r="http://schemas.openxmlformats.org/officeDocument/2006/relationships" id="260" r:id="R158a05bf337b4ffd"/>
+    <p:sldId xmlns:r="http://schemas.openxmlformats.org/officeDocument/2006/relationships" id="261" r:id="Rda2e366a379d4fe3"/>
+    <p:sldId xmlns:r="http://schemas.openxmlformats.org/officeDocument/2006/relationships" id="262" r:id="R095801c8aa8e474b"/>
+    <p:sldId xmlns:r="http://schemas.openxmlformats.org/officeDocument/2006/relationships" id="263" r:id="R3b354d18e76c4f09"/>
   </p:sldIdLst>
   <p:sldSz cx="12192000" cy="6858000"/>
   <p:notesSz cx="6858000" cy="9144000"/>
@@ -730,7 +729,7 @@
           <a:lstStyle xmlns:a="http://schemas.openxmlformats.org/drawingml/2006/main"/>
           <a:p xmlns:a="http://schemas.openxmlformats.org/drawingml/2006/main">
             <a:r>
-              <a:t>Source: results/fov_levels_xavier_full_20261027/README.md; overview.csv; summary.csv. Commit 0f1506c. Date 2026-10-27. Raw evidence: evidence.tar.gz. Measured timing excludes decoding. Slides 6 and 7 add one fixed 2 ms decoding budget per frame to measured means; derived budget totals are not measured end-to-end latency. No joint RGB, depth and flow decoding measurement is claimed.</a:t>
+              <a:t>Source: results/fov_levels_xavier_full_20261027/README.md; overview.csv; summary.csv. Commit 0f1506c. Date 2026-10-27. Raw evidence: evidence.tar.gz. Timing source: results/cu_breakdown_xavier_20261029/README.md and results/fov_decode_budget_2ms_20261029/summary.csv. Timing: 30W 4CORE mode5, unlocked clocks, four driving workloads each frame39, 10 warmups and 100 timed repetitions per path. Staged CUDA-event GPU timeline, not wall time; events can include launch gaps. Quality: previous 15W evaluation, 1068 valid forward odd frames, one quality output per configuration and frame. These are separate experiments, not jointly measured quality-latency pairs.</a:t>
             </a:r>
           </a:p>
         </p:txBody>
@@ -800,7 +799,7 @@
           <a:lstStyle xmlns:a="http://schemas.openxmlformats.org/drawingml/2006/main"/>
           <a:p xmlns:a="http://schemas.openxmlformats.org/drawingml/2006/main">
             <a:r>
-              <a:t>Source: results/fov_levels_xavier_full_20261027/README.md; overview.csv; summary.csv. Commit 0f1506c. Date 2026-10-27. Raw evidence: evidence.tar.gz. Arithmetic means of all 5340 timing samples in each level/timing/mode group, computed by compute_means.py into mean_timings.json. No sample trimming. Full baseline measured separately per level. Fast resample enabled. Each value covers all 1068 supported frames. Adds a fixed 2 ms decode budget once per frame. Speedup is (2 + mean(full resident))/(2 + mean(FOV resident)) at the same region level. This is a derived budget, not measured end-to-end timing or measured joint RGB/depth/flow decoding. See results/fov_decode_budget_2ms_20261029/README.md and summary.csv. Region labels are image-area coverage, not sampling resolution.</a:t>
+              <a:t>Sources: results/cu_breakdown_xavier_20261029/README.md; results/fov_decode_budget_2ms_20261029/summary.csv. Four workloads, each frame39; 10 warmups and 100 timed runs per path. Arithmetic means of staged resident GPU timelines, not wall time. Full uses the paired baseline from the 2.8% configuration. Fixed decode budget is 2 ms once per frame, not measured joint RGB/depth/flow decoding or measured end-to-end timing. No input/output copies, network or display. Fast resampling enabled. Clearing dominates Full and accounts for about 58% of the Full-to-2.8% reconstruction saving, so the gain cannot be attributed entirely to reduced reprojection computation. No claim of an optimal Full baseline.</a:t>
             </a:r>
           </a:p>
         </p:txBody>
@@ -870,7 +869,7 @@
           <a:lstStyle xmlns:a="http://schemas.openxmlformats.org/drawingml/2006/main"/>
           <a:p xmlns:a="http://schemas.openxmlformats.org/drawingml/2006/main">
             <a:r>
-              <a:t>Source: results/fov_levels_xavier_full_20261027/README.md; overview.csv; summary.csv. Commit 0f1506c. Date 2026-10-27. Raw evidence: evidence.tar.gz. Original uint8-overflow PSNR preserved. Stereo delta is derived only if left eye remains unchanged and per-eye PSNR dB is averaged. Timing is never divided by two. Latency adds a fixed 2 ms per-frame decode budget once, not measured decoding or end-to-end latency. Source: results/fov_decode_budget_2ms_20261029/summary.csv.</a:t>
+              <a:t>Source: results/fov_levels_xavier_full_20261027/README.md; overview.csv; summary.csv. Commit 0f1506c. Date 2026-10-27. Raw evidence: evidence.tar.gz. Original uint8-overflow PSNR preserved. Stereo delta is derived only if left eye remains unchanged and per-eye PSNR dB is averaged. Quality: 15W, 1068 frames. Timing: separate 30W four-frame CUDA staged GPU experiment; not joint measurements and no new quality equivalence verified. Timing is never divided by two. Latency adds a fixed 2 ms per-frame decode budget once, not measured decoding or end-to-end latency. Source: results/fov_decode_budget_2ms_20261029/summary.csv.</a:t>
             </a:r>
           </a:p>
         </p:txBody>
@@ -940,76 +939,6 @@
           <a:lstStyle xmlns:a="http://schemas.openxmlformats.org/drawingml/2006/main"/>
           <a:p xmlns:a="http://schemas.openxmlformats.org/drawingml/2006/main">
             <a:r>
-              <a:t>Source: results/numba_xavier_20261029/mode7_15w/result.json, environment.txt, run.log. Arithmetic means from mean_timings.json of 100 timing samples per method, four workloads, frame39 only. No confidence intervals. Numba0.58.1/Python3.8/CUDA11.4. Original source-function calls include allocations/transfers/debug copies and show warmup drift; not directly comparable to resident timing.</a:t>
-            </a:r>
-          </a:p>
-        </p:txBody>
-      </p:sp>
-      <p:sp>
-        <p:nvSpPr>
-          <p:cNvPr id="4" name="Slide Number Placeholder 3"/>
-          <p:cNvSpPr>
-            <a:spLocks xmlns:a="http://schemas.openxmlformats.org/drawingml/2006/main" noGrp="1"/>
-          </p:cNvSpPr>
-          <p:nvPr>
-            <p:ph type="sldNum" idx="5"/>
-          </p:nvPr>
-        </p:nvSpPr>
-        <p:spPr/>
-        <p:txBody>
-          <a:bodyPr xmlns:a="http://schemas.openxmlformats.org/drawingml/2006/main"/>
-          <a:lstStyle xmlns:a="http://schemas.openxmlformats.org/drawingml/2006/main"/>
-          <a:p xmlns:a="http://schemas.openxmlformats.org/drawingml/2006/main"/>
-        </p:txBody>
-      </p:sp>
-    </p:spTree>
-  </p:cSld>
-  <p:clrMapOvr>
-    <a:masterClrMapping xmlns:a="http://schemas.openxmlformats.org/drawingml/2006/main"/>
-  </p:clrMapOvr>
-</p:notes>
-</file>
-
-<file path=ppt/notesSlides/notesSlide9.xml><?xml version="1.0" encoding="utf-8"?>
-<p:notes xmlns:p="http://schemas.openxmlformats.org/presentationml/2006/main">
-  <p:cSld>
-    <p:spTree>
-      <p:nvGrpSpPr>
-        <p:cNvPr id="1" name=""/>
-        <p:cNvGrpSpPr/>
-        <p:nvPr/>
-      </p:nvGrpSpPr>
-      <p:grpSpPr>
-        <a:xfrm xmlns:a="http://schemas.openxmlformats.org/drawingml/2006/main"/>
-      </p:grpSpPr>
-      <p:sp>
-        <p:nvSpPr>
-          <p:cNvPr id="2" name="Slide Image Placeholder 1"/>
-          <p:cNvSpPr>
-            <a:spLocks xmlns:a="http://schemas.openxmlformats.org/drawingml/2006/main" noGrp="1"/>
-          </p:cNvSpPr>
-          <p:nvPr>
-            <p:ph type="sldImg" idx="0"/>
-          </p:nvPr>
-        </p:nvSpPr>
-        <p:spPr/>
-      </p:sp>
-      <p:sp>
-        <p:nvSpPr>
-          <p:cNvPr id="3" name="Notes Placeholder 2"/>
-          <p:cNvSpPr>
-            <a:spLocks xmlns:a="http://schemas.openxmlformats.org/drawingml/2006/main" noGrp="1"/>
-          </p:cNvSpPr>
-          <p:nvPr>
-            <p:ph type="body" idx="1"/>
-          </p:nvPr>
-        </p:nvSpPr>
-        <p:spPr/>
-        <p:txBody>
-          <a:bodyPr xmlns:a="http://schemas.openxmlformats.org/drawingml/2006/main"/>
-          <a:lstStyle xmlns:a="http://schemas.openxmlformats.org/drawingml/2006/main"/>
-          <a:p xmlns:a="http://schemas.openxmlformats.org/drawingml/2006/main">
-            <a:r>
               <a:t>Proposed future work; no measured jitter trace or deadline-miss reduction exists in the current experiment. Slides 6–7 add a fixed 2 ms decode budget to local reconstruction means. Other timing values are local reconstruction measurements. None are measured end-to-end VR results.</a:t>
             </a:r>
           </a:p>
@@ -1057,7 +986,7 @@
           <p:cNvPr id="3" name="Title">
             <a:extLst xmlns:a="http://schemas.openxmlformats.org/drawingml/2006/main">
               <a:ext uri="{FF2B5EF4-FFF2-40B4-BE49-F238E27FC236}">
-                <a16:creationId xmlns:a16="http://schemas.microsoft.com/office/drawing/2014/main" id="{260202D6-66F6-446A-9D19-4E28AA2ECB5A}"/>
+                <a16:creationId xmlns:a16="http://schemas.microsoft.com/office/drawing/2014/main" id="{9FEE180B-B391-4566-B228-D1E047002823}"/>
               </a:ext>
             </a:extLst>
           </p:cNvPr>
@@ -1286,7 +1215,7 @@
           <p:cNvPr id="2" name="Subtitle">
             <a:extLst xmlns:a="http://schemas.openxmlformats.org/drawingml/2006/main">
               <a:ext uri="{FF2B5EF4-FFF2-40B4-BE49-F238E27FC236}">
-                <a16:creationId xmlns:a16="http://schemas.microsoft.com/office/drawing/2014/main" id="{EC432F84-1FC5-4B96-A410-BC3B9B0E2067}"/>
+                <a16:creationId xmlns:a16="http://schemas.microsoft.com/office/drawing/2014/main" id="{951D5504-1335-4E57-B3C8-C1B0E480ACF5}"/>
               </a:ext>
             </a:extLst>
           </p:cNvPr>
@@ -1532,7 +1461,7 @@
           <p:cNvPr id="2" name="Section title">
             <a:extLst xmlns:a="http://schemas.openxmlformats.org/drawingml/2006/main">
               <a:ext uri="{FF2B5EF4-FFF2-40B4-BE49-F238E27FC236}">
-                <a16:creationId xmlns:a16="http://schemas.microsoft.com/office/drawing/2014/main" id="{B33D13FC-3C23-4525-876A-47EF871F7F44}"/>
+                <a16:creationId xmlns:a16="http://schemas.microsoft.com/office/drawing/2014/main" id="{6DB74584-9611-4101-98B6-85A7848539A9}"/>
               </a:ext>
             </a:extLst>
           </p:cNvPr>
@@ -1778,7 +1707,7 @@
           <p:cNvPr id="3" name="Title">
             <a:extLst xmlns:a="http://schemas.openxmlformats.org/drawingml/2006/main">
               <a:ext uri="{FF2B5EF4-FFF2-40B4-BE49-F238E27FC236}">
-                <a16:creationId xmlns:a16="http://schemas.microsoft.com/office/drawing/2014/main" id="{481CFF03-C619-4C1E-BC91-D83BF42F1604}"/>
+                <a16:creationId xmlns:a16="http://schemas.microsoft.com/office/drawing/2014/main" id="{664199E0-B7F2-4DB6-AFC4-ECA2793DE071}"/>
               </a:ext>
             </a:extLst>
           </p:cNvPr>
@@ -2007,7 +1936,7 @@
           <p:cNvPr id="2" name="Body">
             <a:extLst xmlns:a="http://schemas.openxmlformats.org/drawingml/2006/main">
               <a:ext uri="{FF2B5EF4-FFF2-40B4-BE49-F238E27FC236}">
-                <a16:creationId xmlns:a16="http://schemas.microsoft.com/office/drawing/2014/main" id="{209EA446-6FE5-47E1-8D9B-46839CC87E17}"/>
+                <a16:creationId xmlns:a16="http://schemas.microsoft.com/office/drawing/2014/main" id="{55D6F6FE-A9BA-4DAC-8EAD-90FA03099A33}"/>
               </a:ext>
             </a:extLst>
           </p:cNvPr>
@@ -2253,7 +2182,7 @@
           <p:cNvPr id="4" name="Title">
             <a:extLst xmlns:a="http://schemas.openxmlformats.org/drawingml/2006/main">
               <a:ext uri="{FF2B5EF4-FFF2-40B4-BE49-F238E27FC236}">
-                <a16:creationId xmlns:a16="http://schemas.microsoft.com/office/drawing/2014/main" id="{24F5C477-EAE6-49C1-9526-C577320F5885}"/>
+                <a16:creationId xmlns:a16="http://schemas.microsoft.com/office/drawing/2014/main" id="{3484D47D-1E5D-4F41-9C39-4DEAB53DC7B9}"/>
               </a:ext>
             </a:extLst>
           </p:cNvPr>
@@ -2482,7 +2411,7 @@
           <p:cNvPr id="2" name="Left column">
             <a:extLst xmlns:a="http://schemas.openxmlformats.org/drawingml/2006/main">
               <a:ext uri="{FF2B5EF4-FFF2-40B4-BE49-F238E27FC236}">
-                <a16:creationId xmlns:a16="http://schemas.microsoft.com/office/drawing/2014/main" id="{1428896D-C596-4C41-8018-748795CEA35E}"/>
+                <a16:creationId xmlns:a16="http://schemas.microsoft.com/office/drawing/2014/main" id="{C707FB4C-70BE-4CB6-96D0-9FE41028427E}"/>
               </a:ext>
             </a:extLst>
           </p:cNvPr>
@@ -2711,7 +2640,7 @@
           <p:cNvPr id="3" name="Right column">
             <a:extLst xmlns:a="http://schemas.openxmlformats.org/drawingml/2006/main">
               <a:ext uri="{FF2B5EF4-FFF2-40B4-BE49-F238E27FC236}">
-                <a16:creationId xmlns:a16="http://schemas.microsoft.com/office/drawing/2014/main" id="{DE8BF08F-8B5D-4F07-957A-E8431505595A}"/>
+                <a16:creationId xmlns:a16="http://schemas.microsoft.com/office/drawing/2014/main" id="{BF24391E-9A9A-4004-AECC-7A5BAEB90E50}"/>
               </a:ext>
             </a:extLst>
           </p:cNvPr>
@@ -2957,7 +2886,7 @@
           <p:cNvPr id="3" name="Title">
             <a:extLst xmlns:a="http://schemas.openxmlformats.org/drawingml/2006/main">
               <a:ext uri="{FF2B5EF4-FFF2-40B4-BE49-F238E27FC236}">
-                <a16:creationId xmlns:a16="http://schemas.microsoft.com/office/drawing/2014/main" id="{6828EA7A-5B8D-4D50-9B22-B9DD3F1CE2CD}"/>
+                <a16:creationId xmlns:a16="http://schemas.microsoft.com/office/drawing/2014/main" id="{68E062D7-29BF-4D64-899A-3E9C73ABE2B5}"/>
               </a:ext>
             </a:extLst>
           </p:cNvPr>
@@ -3186,7 +3115,7 @@
           <p:cNvPr id="2" name="Left column">
             <a:extLst xmlns:a="http://schemas.openxmlformats.org/drawingml/2006/main">
               <a:ext uri="{FF2B5EF4-FFF2-40B4-BE49-F238E27FC236}">
-                <a16:creationId xmlns:a16="http://schemas.microsoft.com/office/drawing/2014/main" id="{1E5A9C51-DE3B-4A6D-A420-5D239AD90F81}"/>
+                <a16:creationId xmlns:a16="http://schemas.microsoft.com/office/drawing/2014/main" id="{2B3C3C8F-20C3-4776-8576-5E1973D9C271}"/>
               </a:ext>
             </a:extLst>
           </p:cNvPr>
@@ -3453,12 +3382,12 @@
   </p:cSld>
   <p:clrMap bg1="lt1" tx1="dk1" bg2="lt2" tx2="dk2" accent1="accent1" accent2="accent2" accent3="accent3" accent4="accent4" accent5="accent5" accent6="accent6" hlink="hlink" folHlink="folHlink"/>
   <p:sldLayoutIdLst>
-    <p:sldLayoutId xmlns:r="http://schemas.openxmlformats.org/officeDocument/2006/relationships" id="2147483649" r:id="R0f52c718a43b452e"/>
-    <p:sldLayoutId xmlns:r="http://schemas.openxmlformats.org/officeDocument/2006/relationships" id="2147483650" r:id="R780d896a238949f1"/>
-    <p:sldLayoutId xmlns:r="http://schemas.openxmlformats.org/officeDocument/2006/relationships" id="2147483651" r:id="Rdf272a2667af43fc"/>
-    <p:sldLayoutId xmlns:r="http://schemas.openxmlformats.org/officeDocument/2006/relationships" id="2147483652" r:id="Rd21685694f5f471f"/>
-    <p:sldLayoutId xmlns:r="http://schemas.openxmlformats.org/officeDocument/2006/relationships" id="2147483653" r:id="R3e3037fcb7af4d5e"/>
-    <p:sldLayoutId xmlns:r="http://schemas.openxmlformats.org/officeDocument/2006/relationships" id="2147483654" r:id="R879fc5647b6c4aa3"/>
+    <p:sldLayoutId xmlns:r="http://schemas.openxmlformats.org/officeDocument/2006/relationships" id="2147483649" r:id="Rf13116748e6548c0"/>
+    <p:sldLayoutId xmlns:r="http://schemas.openxmlformats.org/officeDocument/2006/relationships" id="2147483650" r:id="Rad1425ba87424009"/>
+    <p:sldLayoutId xmlns:r="http://schemas.openxmlformats.org/officeDocument/2006/relationships" id="2147483651" r:id="R3fb2548c22854566"/>
+    <p:sldLayoutId xmlns:r="http://schemas.openxmlformats.org/officeDocument/2006/relationships" id="2147483652" r:id="Ra6657312b3214369"/>
+    <p:sldLayoutId xmlns:r="http://schemas.openxmlformats.org/officeDocument/2006/relationships" id="2147483653" r:id="R4dcaf2e14cb44152"/>
+    <p:sldLayoutId xmlns:r="http://schemas.openxmlformats.org/officeDocument/2006/relationships" id="2147483654" r:id="Re59bd741f9e343e0"/>
   </p:sldLayoutIdLst>
   <p:txStyles>
     <p:titleStyle>
@@ -3992,13 +3921,13 @@
     <c:plotArea>
       <c:barChart>
         <c:barDir val="col"/>
-        <c:grouping val="clustered"/>
+        <c:grouping val="stacked"/>
         <c:varyColors val="0"/>
         <c:ser>
           <c:idx val="0"/>
           <c:order val="0"/>
           <c:tx>
-            <c:v>FOV resident + decode</c:v>
+            <c:v>Measured reconstruction</c:v>
           </c:tx>
           <c:spPr>
             <a:solidFill xmlns:a="http://schemas.openxmlformats.org/drawingml/2006/main">
@@ -4008,22 +3937,25 @@
           <c:invertIfNegative val="0"/>
           <c:cat>
             <c:strRef>
-              <c:f>'Chart Data'!$A$2:$A$6</c:f>
+              <c:f>'Chart Data'!$A$2:$A$7</c:f>
               <c:strCache>
-                <c:ptCount val="5"/>
+                <c:ptCount val="6"/>
                 <c:pt idx="0">
+                  <c:v>Full</c:v>
+                </c:pt>
+                <c:pt idx="1">
                   <c:v>0.7%</c:v>
                 </c:pt>
-                <c:pt idx="1">
+                <c:pt idx="2">
                   <c:v>2.8%</c:v>
                 </c:pt>
-                <c:pt idx="2">
+                <c:pt idx="3">
                   <c:v>11.1%</c:v>
                 </c:pt>
-                <c:pt idx="3">
+                <c:pt idx="4">
                   <c:v>25.0%</c:v>
                 </c:pt>
-                <c:pt idx="4">
+                <c:pt idx="5">
                   <c:v>44.4%</c:v>
                 </c:pt>
               </c:strCache>
@@ -4031,24 +3963,27 @@
           </c:cat>
           <c:val>
             <c:numRef>
-              <c:f>'Chart Data'!$B$2:$B$6</c:f>
+              <c:f>'Chart Data'!$B$2:$B$7</c:f>
               <c:numCache>
                 <c:formatCode>General</c:formatCode>
-                <c:ptCount val="5"/>
+                <c:ptCount val="6"/>
                 <c:pt idx="0">
-                  <c:v>6.562</c:v>
+                  <c:v>7.996</c:v>
                 </c:pt>
                 <c:pt idx="1">
-                  <c:v>6.77</c:v>
+                  <c:v>3.248</c:v>
                 </c:pt>
                 <c:pt idx="2">
-                  <c:v>7.998</c:v>
+                  <c:v>3.462</c:v>
                 </c:pt>
                 <c:pt idx="3">
-                  <c:v>9.772</c:v>
+                  <c:v>4.318</c:v>
                 </c:pt>
                 <c:pt idx="4">
-                  <c:v>12.425</c:v>
+                  <c:v>5.637</c:v>
+                </c:pt>
+                <c:pt idx="5">
+                  <c:v>7.543</c:v>
                 </c:pt>
               </c:numCache>
             </c:numRef>
@@ -4058,7 +3993,7 @@
           <c:idx val="1"/>
           <c:order val="1"/>
           <c:tx>
-            <c:v>FOV stream + decode</c:v>
+            <c:v>Fixed decode budget (2 ms)</c:v>
           </c:tx>
           <c:spPr>
             <a:solidFill xmlns:a="http://schemas.openxmlformats.org/drawingml/2006/main">
@@ -4068,22 +4003,25 @@
           <c:invertIfNegative val="0"/>
           <c:cat>
             <c:strRef>
-              <c:f>'Chart Data'!$C$2:$C$6</c:f>
+              <c:f>'Chart Data'!$C$2:$C$7</c:f>
               <c:strCache>
-                <c:ptCount val="5"/>
+                <c:ptCount val="6"/>
                 <c:pt idx="0">
+                  <c:v>Full</c:v>
+                </c:pt>
+                <c:pt idx="1">
                   <c:v>0.7%</c:v>
                 </c:pt>
-                <c:pt idx="1">
+                <c:pt idx="2">
                   <c:v>2.8%</c:v>
                 </c:pt>
-                <c:pt idx="2">
+                <c:pt idx="3">
                   <c:v>11.1%</c:v>
                 </c:pt>
-                <c:pt idx="3">
+                <c:pt idx="4">
                   <c:v>25.0%</c:v>
                 </c:pt>
-                <c:pt idx="4">
+                <c:pt idx="5">
                   <c:v>44.4%</c:v>
                 </c:pt>
               </c:strCache>
@@ -4091,84 +4029,27 @@
           </c:cat>
           <c:val>
             <c:numRef>
-              <c:f>'Chart Data'!$D$2:$D$6</c:f>
+              <c:f>'Chart Data'!$D$2:$D$7</c:f>
               <c:numCache>
                 <c:formatCode>General</c:formatCode>
-                <c:ptCount val="5"/>
+                <c:ptCount val="6"/>
                 <c:pt idx="0">
-                  <c:v>8.364</c:v>
+                  <c:v>2</c:v>
                 </c:pt>
                 <c:pt idx="1">
-                  <c:v>8.728</c:v>
+                  <c:v>2</c:v>
                 </c:pt>
                 <c:pt idx="2">
-                  <c:v>9.839</c:v>
+                  <c:v>2</c:v>
                 </c:pt>
                 <c:pt idx="3">
-                  <c:v>11.655</c:v>
+                  <c:v>2</c:v>
                 </c:pt>
                 <c:pt idx="4">
-                  <c:v>14.193</c:v>
+                  <c:v>2</c:v>
                 </c:pt>
-              </c:numCache>
-            </c:numRef>
-          </c:val>
-        </c:ser>
-        <c:ser>
-          <c:idx val="2"/>
-          <c:order val="2"/>
-          <c:tx>
-            <c:v>Full resident + decode</c:v>
-          </c:tx>
-          <c:spPr>
-            <a:solidFill xmlns:a="http://schemas.openxmlformats.org/drawingml/2006/main">
-              <a:srgbClr val="536675"/>
-            </a:solidFill>
-          </c:spPr>
-          <c:invertIfNegative val="0"/>
-          <c:cat>
-            <c:strRef>
-              <c:f>'Chart Data'!$E$2:$E$6</c:f>
-              <c:strCache>
-                <c:ptCount val="5"/>
-                <c:pt idx="0">
-                  <c:v>0.7%</c:v>
-                </c:pt>
-                <c:pt idx="1">
-                  <c:v>2.8%</c:v>
-                </c:pt>
-                <c:pt idx="2">
-                  <c:v>11.1%</c:v>
-                </c:pt>
-                <c:pt idx="3">
-                  <c:v>25.0%</c:v>
-                </c:pt>
-                <c:pt idx="4">
-                  <c:v>44.4%</c:v>
-                </c:pt>
-              </c:strCache>
-            </c:strRef>
-          </c:cat>
-          <c:val>
-            <c:numRef>
-              <c:f>'Chart Data'!$F$2:$F$6</c:f>
-              <c:numCache>
-                <c:formatCode>General</c:formatCode>
-                <c:ptCount val="5"/>
-                <c:pt idx="0">
-                  <c:v>13.187</c:v>
-                </c:pt>
-                <c:pt idx="1">
-                  <c:v>13.022</c:v>
-                </c:pt>
-                <c:pt idx="2">
-                  <c:v>13.144</c:v>
-                </c:pt>
-                <c:pt idx="3">
-                  <c:v>13.042</c:v>
-                </c:pt>
-                <c:pt idx="4">
-                  <c:v>13.087</c:v>
+                <c:pt idx="5">
+                  <c:v>2</c:v>
                 </c:pt>
               </c:numCache>
             </c:numRef>
@@ -4197,7 +4078,7 @@
           <c:showLeaderLines val="0"/>
         </c:dLbls>
         <c:gapWidth val="75"/>
-        <c:overlap val="0"/>
+        <c:overlap val="100"/>
         <c:axId val="48650112"/>
         <c:axId val="48672768"/>
       </c:barChart>
@@ -4241,7 +4122,7 @@
         <c:axId val="48672768"/>
         <c:scaling>
           <c:orientation val="minMax"/>
-          <c:max val="16"/>
+          <c:max val="12"/>
           <c:min val="0"/>
         </c:scaling>
         <c:delete val="0"/>
@@ -4267,7 +4148,7 @@
                     <a:ea typeface="Arial"/>
                     <a:cs typeface="Arial"/>
                   </a:rPr>
-                  <a:t>Decode + recon mean (ms)</a:t>
+                  <a:t>Decode + GPU reconstruction (ms)</a:t>
                 </a:r>
               </a:p>
             </c:rich>
@@ -4332,7 +4213,7 @@
         <a:lstStyle xmlns:a="http://schemas.openxmlformats.org/drawingml/2006/main"/>
         <a:p xmlns:a="http://schemas.openxmlformats.org/drawingml/2006/main">
           <a:pPr>
-            <a:defRPr sz="1350">
+            <a:defRPr sz="1500">
               <a:latin typeface="Arial"/>
               <a:ea typeface="Arial"/>
               <a:cs typeface="Arial"/>
@@ -4378,7 +4259,7 @@
           <p:cNvPr id="5" name="">
             <a:extLst xmlns:a="http://schemas.openxmlformats.org/drawingml/2006/main">
               <a:ext uri="{FF2B5EF4-FFF2-40B4-BE49-F238E27FC236}">
-                <a16:creationId xmlns:a16="http://schemas.microsoft.com/office/drawing/2014/main" id="{72546043-8B75-4006-84B6-2AAC0D4C7AE1}"/>
+                <a16:creationId xmlns:a16="http://schemas.microsoft.com/office/drawing/2014/main" id="{D3AC35FD-4B7A-4808-9C27-08FD8D2BA0C4}"/>
               </a:ext>
             </a:extLst>
           </p:cNvPr>
@@ -4436,7 +4317,7 @@
           <p:cNvPr id="2" name="">
             <a:extLst xmlns:a="http://schemas.openxmlformats.org/drawingml/2006/main">
               <a:ext uri="{FF2B5EF4-FFF2-40B4-BE49-F238E27FC236}">
-                <a16:creationId xmlns:a16="http://schemas.microsoft.com/office/drawing/2014/main" id="{67B6487C-3836-4563-81E7-18E12B20C632}"/>
+                <a16:creationId xmlns:a16="http://schemas.microsoft.com/office/drawing/2014/main" id="{21B3FB4B-F0FF-42E5-B558-758DC6360645}"/>
               </a:ext>
             </a:extLst>
           </p:cNvPr>
@@ -4481,7 +4362,7 @@
           <p:cNvPr id="3" name="">
             <a:extLst xmlns:a="http://schemas.openxmlformats.org/drawingml/2006/main">
               <a:ext uri="{FF2B5EF4-FFF2-40B4-BE49-F238E27FC236}">
-                <a16:creationId xmlns:a16="http://schemas.microsoft.com/office/drawing/2014/main" id="{7BD9607B-E435-4003-9DFE-836F1C8D02F5}"/>
+                <a16:creationId xmlns:a16="http://schemas.microsoft.com/office/drawing/2014/main" id="{BA478614-551E-40A4-9C4C-83C8A749492A}"/>
               </a:ext>
             </a:extLst>
           </p:cNvPr>
@@ -4526,7 +4407,7 @@
           <p:cNvPr id="4" name="">
             <a:extLst xmlns:a="http://schemas.openxmlformats.org/drawingml/2006/main">
               <a:ext uri="{FF2B5EF4-FFF2-40B4-BE49-F238E27FC236}">
-                <a16:creationId xmlns:a16="http://schemas.microsoft.com/office/drawing/2014/main" id="{C0F2F1CE-49CA-4EB8-B7F6-513CA4F6C814}"/>
+                <a16:creationId xmlns:a16="http://schemas.microsoft.com/office/drawing/2014/main" id="{7EC87427-EAF5-4E74-B91C-311D31F039B8}"/>
               </a:ext>
             </a:extLst>
           </p:cNvPr>
@@ -4569,7 +4450,7 @@
     </p:spTree>
     <p:extLst>
       <p:ext uri="{BB962C8B-B14F-4D97-AF65-F5344CB8AC3E}">
-        <p14:creationId xmlns:p14="http://schemas.microsoft.com/office/powerpoint/2010/main" val="315980664"/>
+        <p14:creationId xmlns:p14="http://schemas.microsoft.com/office/powerpoint/2010/main" val="293171933"/>
       </p:ext>
     </p:extLst>
   </p:cSld>
@@ -4600,7 +4481,7 @@
           <p:cNvPr id="29" name="">
             <a:extLst xmlns:a="http://schemas.openxmlformats.org/drawingml/2006/main">
               <a:ext uri="{FF2B5EF4-FFF2-40B4-BE49-F238E27FC236}">
-                <a16:creationId xmlns:a16="http://schemas.microsoft.com/office/drawing/2014/main" id="{4630386B-2046-4D8F-A0B0-9EAF80D7A41C}"/>
+                <a16:creationId xmlns:a16="http://schemas.microsoft.com/office/drawing/2014/main" id="{AD8FA9BA-C557-485C-863F-9E4BD7C6FE90}"/>
               </a:ext>
             </a:extLst>
           </p:cNvPr>
@@ -4645,7 +4526,7 @@
           <p:cNvPr id="2" name="">
             <a:extLst xmlns:a="http://schemas.openxmlformats.org/drawingml/2006/main">
               <a:ext uri="{FF2B5EF4-FFF2-40B4-BE49-F238E27FC236}">
-                <a16:creationId xmlns:a16="http://schemas.microsoft.com/office/drawing/2014/main" id="{A598C776-7A13-4079-9C04-E786025E9E5A}"/>
+                <a16:creationId xmlns:a16="http://schemas.microsoft.com/office/drawing/2014/main" id="{C4AE0170-D966-4095-B886-0226A2355A64}"/>
               </a:ext>
             </a:extLst>
           </p:cNvPr>
@@ -4675,7 +4556,7 @@
           <p:cNvPr id="3" name="">
             <a:extLst xmlns:a="http://schemas.openxmlformats.org/drawingml/2006/main">
               <a:ext uri="{FF2B5EF4-FFF2-40B4-BE49-F238E27FC236}">
-                <a16:creationId xmlns:a16="http://schemas.microsoft.com/office/drawing/2014/main" id="{376CA10E-ECBD-4533-9842-7B140995B949}"/>
+                <a16:creationId xmlns:a16="http://schemas.microsoft.com/office/drawing/2014/main" id="{56596B46-E5E5-4196-B3DF-D5421114F456}"/>
               </a:ext>
             </a:extLst>
           </p:cNvPr>
@@ -4720,7 +4601,7 @@
           <p:cNvPr id="4" name="">
             <a:extLst xmlns:a="http://schemas.openxmlformats.org/drawingml/2006/main">
               <a:ext uri="{FF2B5EF4-FFF2-40B4-BE49-F238E27FC236}">
-                <a16:creationId xmlns:a16="http://schemas.microsoft.com/office/drawing/2014/main" id="{80612A60-3C3E-4585-991B-C51FE9EE976D}"/>
+                <a16:creationId xmlns:a16="http://schemas.microsoft.com/office/drawing/2014/main" id="{B7540364-42D7-406D-8E0E-6990929CEFC2}"/>
               </a:ext>
             </a:extLst>
           </p:cNvPr>
@@ -4765,7 +4646,7 @@
           <p:cNvPr id="5" name="">
             <a:extLst xmlns:a="http://schemas.openxmlformats.org/drawingml/2006/main">
               <a:ext uri="{FF2B5EF4-FFF2-40B4-BE49-F238E27FC236}">
-                <a16:creationId xmlns:a16="http://schemas.microsoft.com/office/drawing/2014/main" id="{DDE9F982-C601-4C1E-A5BC-293585836932}"/>
+                <a16:creationId xmlns:a16="http://schemas.microsoft.com/office/drawing/2014/main" id="{D93EADF1-E3D4-418C-BA16-0342278335C5}"/>
               </a:ext>
             </a:extLst>
           </p:cNvPr>
@@ -4810,7 +4691,7 @@
           <p:cNvPr id="6" name="">
             <a:extLst xmlns:a="http://schemas.openxmlformats.org/drawingml/2006/main">
               <a:ext uri="{FF2B5EF4-FFF2-40B4-BE49-F238E27FC236}">
-                <a16:creationId xmlns:a16="http://schemas.microsoft.com/office/drawing/2014/main" id="{5642D2F7-F26A-41DD-8E6F-FDB25479D00F}"/>
+                <a16:creationId xmlns:a16="http://schemas.microsoft.com/office/drawing/2014/main" id="{B541D8E6-3EBF-4A77-AA35-638F27D55611}"/>
               </a:ext>
             </a:extLst>
           </p:cNvPr>
@@ -4842,7 +4723,7 @@
           <p:cNvPr id="7" name="">
             <a:extLst xmlns:a="http://schemas.openxmlformats.org/drawingml/2006/main">
               <a:ext uri="{FF2B5EF4-FFF2-40B4-BE49-F238E27FC236}">
-                <a16:creationId xmlns:a16="http://schemas.microsoft.com/office/drawing/2014/main" id="{6D927D3C-E5D5-47E6-BF18-9784502F2B58}"/>
+                <a16:creationId xmlns:a16="http://schemas.microsoft.com/office/drawing/2014/main" id="{A24B6D2B-3FA7-4708-B8B7-7FC2A10204DA}"/>
               </a:ext>
             </a:extLst>
           </p:cNvPr>
@@ -4874,7 +4755,7 @@
           <p:cNvPr id="8" name="">
             <a:extLst xmlns:a="http://schemas.openxmlformats.org/drawingml/2006/main">
               <a:ext uri="{FF2B5EF4-FFF2-40B4-BE49-F238E27FC236}">
-                <a16:creationId xmlns:a16="http://schemas.microsoft.com/office/drawing/2014/main" id="{B9C798B8-5E4B-403A-9455-300AFF334C43}"/>
+                <a16:creationId xmlns:a16="http://schemas.microsoft.com/office/drawing/2014/main" id="{75A00B2D-FC9F-4EED-821F-18DC9D38372D}"/>
               </a:ext>
             </a:extLst>
           </p:cNvPr>
@@ -4906,7 +4787,7 @@
           <p:cNvPr id="9" name="">
             <a:extLst xmlns:a="http://schemas.openxmlformats.org/drawingml/2006/main">
               <a:ext uri="{FF2B5EF4-FFF2-40B4-BE49-F238E27FC236}">
-                <a16:creationId xmlns:a16="http://schemas.microsoft.com/office/drawing/2014/main" id="{2DC37855-E08E-4BA8-B42D-33A275F380D8}"/>
+                <a16:creationId xmlns:a16="http://schemas.microsoft.com/office/drawing/2014/main" id="{EB0D189D-4CA2-45CA-B3BC-110853409893}"/>
               </a:ext>
             </a:extLst>
           </p:cNvPr>
@@ -4951,7 +4832,7 @@
           <p:cNvPr id="10" name="">
             <a:extLst xmlns:a="http://schemas.openxmlformats.org/drawingml/2006/main">
               <a:ext uri="{FF2B5EF4-FFF2-40B4-BE49-F238E27FC236}">
-                <a16:creationId xmlns:a16="http://schemas.microsoft.com/office/drawing/2014/main" id="{C8B3EB67-8D1D-4BEC-AA6E-ECF77D0B52EE}"/>
+                <a16:creationId xmlns:a16="http://schemas.microsoft.com/office/drawing/2014/main" id="{D6FAFB12-9041-40CE-8FE2-1F1A96B967A6}"/>
               </a:ext>
             </a:extLst>
           </p:cNvPr>
@@ -4981,7 +4862,7 @@
           <p:cNvPr id="11" name="">
             <a:extLst xmlns:a="http://schemas.openxmlformats.org/drawingml/2006/main">
               <a:ext uri="{FF2B5EF4-FFF2-40B4-BE49-F238E27FC236}">
-                <a16:creationId xmlns:a16="http://schemas.microsoft.com/office/drawing/2014/main" id="{1BAB262C-431D-4BF7-B47A-BED8F0B23715}"/>
+                <a16:creationId xmlns:a16="http://schemas.microsoft.com/office/drawing/2014/main" id="{F35D49DE-3FC1-4963-BD13-79383AFBC6EA}"/>
               </a:ext>
             </a:extLst>
           </p:cNvPr>
@@ -5026,7 +4907,7 @@
           <p:cNvPr id="12" name="">
             <a:extLst xmlns:a="http://schemas.openxmlformats.org/drawingml/2006/main">
               <a:ext uri="{FF2B5EF4-FFF2-40B4-BE49-F238E27FC236}">
-                <a16:creationId xmlns:a16="http://schemas.microsoft.com/office/drawing/2014/main" id="{881A749D-1D20-47E7-9F9B-470D396067E5}"/>
+                <a16:creationId xmlns:a16="http://schemas.microsoft.com/office/drawing/2014/main" id="{31F43E90-0D70-42ED-B4D3-6D269D9D26E3}"/>
               </a:ext>
             </a:extLst>
           </p:cNvPr>
@@ -5058,7 +4939,7 @@
           <p:cNvPr id="13" name="">
             <a:extLst xmlns:a="http://schemas.openxmlformats.org/drawingml/2006/main">
               <a:ext uri="{FF2B5EF4-FFF2-40B4-BE49-F238E27FC236}">
-                <a16:creationId xmlns:a16="http://schemas.microsoft.com/office/drawing/2014/main" id="{4CE396C1-AB0B-488D-B2D2-0EA5E98694A2}"/>
+                <a16:creationId xmlns:a16="http://schemas.microsoft.com/office/drawing/2014/main" id="{D66E8372-9D83-410B-BD78-E3590AF68F5D}"/>
               </a:ext>
             </a:extLst>
           </p:cNvPr>
@@ -5090,7 +4971,7 @@
           <p:cNvPr id="14" name="">
             <a:extLst xmlns:a="http://schemas.openxmlformats.org/drawingml/2006/main">
               <a:ext uri="{FF2B5EF4-FFF2-40B4-BE49-F238E27FC236}">
-                <a16:creationId xmlns:a16="http://schemas.microsoft.com/office/drawing/2014/main" id="{7617926B-E3B2-4B07-97F4-B46D1DED2A76}"/>
+                <a16:creationId xmlns:a16="http://schemas.microsoft.com/office/drawing/2014/main" id="{329C7A1A-15E0-423D-9372-92B7F73C852B}"/>
               </a:ext>
             </a:extLst>
           </p:cNvPr>
@@ -5122,7 +5003,7 @@
           <p:cNvPr id="15" name="">
             <a:extLst xmlns:a="http://schemas.openxmlformats.org/drawingml/2006/main">
               <a:ext uri="{FF2B5EF4-FFF2-40B4-BE49-F238E27FC236}">
-                <a16:creationId xmlns:a16="http://schemas.microsoft.com/office/drawing/2014/main" id="{6A9C6A87-90D3-4F98-8BE0-1A63560E9D63}"/>
+                <a16:creationId xmlns:a16="http://schemas.microsoft.com/office/drawing/2014/main" id="{CACCA813-F062-44AA-B921-6CDB667F05E5}"/>
               </a:ext>
             </a:extLst>
           </p:cNvPr>
@@ -5167,7 +5048,7 @@
           <p:cNvPr id="16" name="">
             <a:extLst xmlns:a="http://schemas.openxmlformats.org/drawingml/2006/main">
               <a:ext uri="{FF2B5EF4-FFF2-40B4-BE49-F238E27FC236}">
-                <a16:creationId xmlns:a16="http://schemas.microsoft.com/office/drawing/2014/main" id="{906D914A-7D6A-4810-9566-38FD4B92F906}"/>
+                <a16:creationId xmlns:a16="http://schemas.microsoft.com/office/drawing/2014/main" id="{4F6FB8BE-1FAF-4CA7-8E53-3C71FE676EB1}"/>
               </a:ext>
             </a:extLst>
           </p:cNvPr>
@@ -5197,7 +5078,7 @@
           <p:cNvPr id="17" name="">
             <a:extLst xmlns:a="http://schemas.openxmlformats.org/drawingml/2006/main">
               <a:ext uri="{FF2B5EF4-FFF2-40B4-BE49-F238E27FC236}">
-                <a16:creationId xmlns:a16="http://schemas.microsoft.com/office/drawing/2014/main" id="{FA3E719F-AC2F-400E-A0B4-7D60E48DA7BA}"/>
+                <a16:creationId xmlns:a16="http://schemas.microsoft.com/office/drawing/2014/main" id="{79B8B42B-D9CD-401D-8820-B7C9D6D15021}"/>
               </a:ext>
             </a:extLst>
           </p:cNvPr>
@@ -5242,7 +5123,7 @@
           <p:cNvPr id="18" name="">
             <a:extLst xmlns:a="http://schemas.openxmlformats.org/drawingml/2006/main">
               <a:ext uri="{FF2B5EF4-FFF2-40B4-BE49-F238E27FC236}">
-                <a16:creationId xmlns:a16="http://schemas.microsoft.com/office/drawing/2014/main" id="{59E87DA5-E0E3-4E52-B3BA-F45FF3559BA5}"/>
+                <a16:creationId xmlns:a16="http://schemas.microsoft.com/office/drawing/2014/main" id="{592C2AF6-43F4-4F05-8CB5-C372720D787A}"/>
               </a:ext>
             </a:extLst>
           </p:cNvPr>
@@ -5274,7 +5155,7 @@
           <p:cNvPr id="19" name="">
             <a:extLst xmlns:a="http://schemas.openxmlformats.org/drawingml/2006/main">
               <a:ext uri="{FF2B5EF4-FFF2-40B4-BE49-F238E27FC236}">
-                <a16:creationId xmlns:a16="http://schemas.microsoft.com/office/drawing/2014/main" id="{74DE50BD-1DC6-4770-A398-BDA3A6A1A2AA}"/>
+                <a16:creationId xmlns:a16="http://schemas.microsoft.com/office/drawing/2014/main" id="{FE806FD0-9AE0-42B5-AB9B-BA3CA9867CCE}"/>
               </a:ext>
             </a:extLst>
           </p:cNvPr>
@@ -5306,7 +5187,7 @@
           <p:cNvPr id="20" name="">
             <a:extLst xmlns:a="http://schemas.openxmlformats.org/drawingml/2006/main">
               <a:ext uri="{FF2B5EF4-FFF2-40B4-BE49-F238E27FC236}">
-                <a16:creationId xmlns:a16="http://schemas.microsoft.com/office/drawing/2014/main" id="{E797BB50-7EA4-4CFD-B66A-863B283E4EC8}"/>
+                <a16:creationId xmlns:a16="http://schemas.microsoft.com/office/drawing/2014/main" id="{E4568A97-AD65-459C-88E8-9736E3451974}"/>
               </a:ext>
             </a:extLst>
           </p:cNvPr>
@@ -5338,7 +5219,7 @@
           <p:cNvPr id="21" name="">
             <a:extLst xmlns:a="http://schemas.openxmlformats.org/drawingml/2006/main">
               <a:ext uri="{FF2B5EF4-FFF2-40B4-BE49-F238E27FC236}">
-                <a16:creationId xmlns:a16="http://schemas.microsoft.com/office/drawing/2014/main" id="{17A14051-3DFE-4E62-8ADA-6D449342B659}"/>
+                <a16:creationId xmlns:a16="http://schemas.microsoft.com/office/drawing/2014/main" id="{234A82CF-F4EF-4814-8645-BA109DE93118}"/>
               </a:ext>
             </a:extLst>
           </p:cNvPr>
@@ -5383,7 +5264,7 @@
           <p:cNvPr id="22" name="">
             <a:extLst xmlns:a="http://schemas.openxmlformats.org/drawingml/2006/main">
               <a:ext uri="{FF2B5EF4-FFF2-40B4-BE49-F238E27FC236}">
-                <a16:creationId xmlns:a16="http://schemas.microsoft.com/office/drawing/2014/main" id="{389B8C25-12A9-48B4-88E4-6F763B1219F3}"/>
+                <a16:creationId xmlns:a16="http://schemas.microsoft.com/office/drawing/2014/main" id="{A6DA4740-6DD5-438A-BA78-080B7B2871BF}"/>
               </a:ext>
             </a:extLst>
           </p:cNvPr>
@@ -5413,7 +5294,7 @@
           <p:cNvPr id="23" name="">
             <a:extLst xmlns:a="http://schemas.openxmlformats.org/drawingml/2006/main">
               <a:ext uri="{FF2B5EF4-FFF2-40B4-BE49-F238E27FC236}">
-                <a16:creationId xmlns:a16="http://schemas.microsoft.com/office/drawing/2014/main" id="{C11C01D2-3DCF-4273-89DC-8958C60D9AA6}"/>
+                <a16:creationId xmlns:a16="http://schemas.microsoft.com/office/drawing/2014/main" id="{3CDAE90E-9F00-4CA8-B816-9137592620C1}"/>
               </a:ext>
             </a:extLst>
           </p:cNvPr>
@@ -5443,7 +5324,7 @@
           <p:cNvPr id="24" name="">
             <a:extLst xmlns:a="http://schemas.openxmlformats.org/drawingml/2006/main">
               <a:ext uri="{FF2B5EF4-FFF2-40B4-BE49-F238E27FC236}">
-                <a16:creationId xmlns:a16="http://schemas.microsoft.com/office/drawing/2014/main" id="{5301AA13-3984-42F1-A4B4-793C2AE9182E}"/>
+                <a16:creationId xmlns:a16="http://schemas.microsoft.com/office/drawing/2014/main" id="{73F6C8AD-4EEE-4173-A633-5C709E7504AF}"/>
               </a:ext>
             </a:extLst>
           </p:cNvPr>
@@ -5488,7 +5369,7 @@
           <p:cNvPr id="25" name="">
             <a:extLst xmlns:a="http://schemas.openxmlformats.org/drawingml/2006/main">
               <a:ext uri="{FF2B5EF4-FFF2-40B4-BE49-F238E27FC236}">
-                <a16:creationId xmlns:a16="http://schemas.microsoft.com/office/drawing/2014/main" id="{C3663E82-2AD8-4F0B-982E-4BDD7C4C218D}"/>
+                <a16:creationId xmlns:a16="http://schemas.microsoft.com/office/drawing/2014/main" id="{6293FBF7-3991-4348-B208-61597910F068}"/>
               </a:ext>
             </a:extLst>
           </p:cNvPr>
@@ -5533,7 +5414,7 @@
           <p:cNvPr id="26" name="">
             <a:extLst xmlns:a="http://schemas.openxmlformats.org/drawingml/2006/main">
               <a:ext uri="{FF2B5EF4-FFF2-40B4-BE49-F238E27FC236}">
-                <a16:creationId xmlns:a16="http://schemas.microsoft.com/office/drawing/2014/main" id="{00FCBA04-7CF1-4042-BD0C-AECA5FFFEC6E}"/>
+                <a16:creationId xmlns:a16="http://schemas.microsoft.com/office/drawing/2014/main" id="{008CD56A-B1CA-4448-A649-5CAF8ECD9CF5}"/>
               </a:ext>
             </a:extLst>
           </p:cNvPr>
@@ -5578,7 +5459,7 @@
           <p:cNvPr id="27" name="">
             <a:extLst xmlns:a="http://schemas.openxmlformats.org/drawingml/2006/main">
               <a:ext uri="{FF2B5EF4-FFF2-40B4-BE49-F238E27FC236}">
-                <a16:creationId xmlns:a16="http://schemas.microsoft.com/office/drawing/2014/main" id="{AEB65EE6-34FB-4589-AE8F-B22BE8BA8847}"/>
+                <a16:creationId xmlns:a16="http://schemas.microsoft.com/office/drawing/2014/main" id="{A15931AA-CA09-4172-9590-BC2732046666}"/>
               </a:ext>
             </a:extLst>
           </p:cNvPr>
@@ -5623,7 +5504,7 @@
           <p:cNvPr id="28" name="">
             <a:extLst xmlns:a="http://schemas.openxmlformats.org/drawingml/2006/main">
               <a:ext uri="{FF2B5EF4-FFF2-40B4-BE49-F238E27FC236}">
-                <a16:creationId xmlns:a16="http://schemas.microsoft.com/office/drawing/2014/main" id="{6B7C06A9-3E3D-43C3-9F3C-5E7B83C4BDD6}"/>
+                <a16:creationId xmlns:a16="http://schemas.microsoft.com/office/drawing/2014/main" id="{BBC1D921-351D-4333-823D-70CF2BB502CA}"/>
               </a:ext>
             </a:extLst>
           </p:cNvPr>
@@ -5666,7 +5547,7 @@
     </p:spTree>
     <p:extLst>
       <p:ext uri="{BB962C8B-B14F-4D97-AF65-F5344CB8AC3E}">
-        <p14:creationId xmlns:p14="http://schemas.microsoft.com/office/powerpoint/2010/main" val="598182676"/>
+        <p14:creationId xmlns:p14="http://schemas.microsoft.com/office/powerpoint/2010/main" val="1281607458"/>
       </p:ext>
     </p:extLst>
   </p:cSld>
@@ -5697,7 +5578,7 @@
           <p:cNvPr id="15" name="">
             <a:extLst xmlns:a="http://schemas.openxmlformats.org/drawingml/2006/main">
               <a:ext uri="{FF2B5EF4-FFF2-40B4-BE49-F238E27FC236}">
-                <a16:creationId xmlns:a16="http://schemas.microsoft.com/office/drawing/2014/main" id="{35209851-4663-45F8-8DC5-9285BC4BEE43}"/>
+                <a16:creationId xmlns:a16="http://schemas.microsoft.com/office/drawing/2014/main" id="{A4C5F1E0-D8E0-437D-A671-9EE943966AED}"/>
               </a:ext>
             </a:extLst>
           </p:cNvPr>
@@ -5742,7 +5623,7 @@
           <p:cNvPr id="2" name="">
             <a:extLst xmlns:a="http://schemas.openxmlformats.org/drawingml/2006/main">
               <a:ext uri="{FF2B5EF4-FFF2-40B4-BE49-F238E27FC236}">
-                <a16:creationId xmlns:a16="http://schemas.microsoft.com/office/drawing/2014/main" id="{90BE06E5-EF4E-46BA-8EEE-6D49561FE5DF}"/>
+                <a16:creationId xmlns:a16="http://schemas.microsoft.com/office/drawing/2014/main" id="{0F639B5C-66C3-44DD-B4A8-88CF55414449}"/>
               </a:ext>
             </a:extLst>
           </p:cNvPr>
@@ -5772,7 +5653,7 @@
           <p:cNvPr id="3" name="">
             <a:extLst xmlns:a="http://schemas.openxmlformats.org/drawingml/2006/main">
               <a:ext uri="{FF2B5EF4-FFF2-40B4-BE49-F238E27FC236}">
-                <a16:creationId xmlns:a16="http://schemas.microsoft.com/office/drawing/2014/main" id="{42E09036-ED0C-458B-A586-72A8F4616CE0}"/>
+                <a16:creationId xmlns:a16="http://schemas.microsoft.com/office/drawing/2014/main" id="{1FE47D76-4B61-4E68-82AC-A0DB1580B2CF}"/>
               </a:ext>
             </a:extLst>
           </p:cNvPr>
@@ -5817,7 +5698,7 @@
           <p:cNvPr id="4" name="">
             <a:extLst xmlns:a="http://schemas.openxmlformats.org/drawingml/2006/main">
               <a:ext uri="{FF2B5EF4-FFF2-40B4-BE49-F238E27FC236}">
-                <a16:creationId xmlns:a16="http://schemas.microsoft.com/office/drawing/2014/main" id="{E4B72B12-94A9-482B-9052-8D5300C03A08}"/>
+                <a16:creationId xmlns:a16="http://schemas.microsoft.com/office/drawing/2014/main" id="{E49CCAB6-E288-47B9-AA09-6CCB2ACCE90A}"/>
               </a:ext>
             </a:extLst>
           </p:cNvPr>
@@ -5862,7 +5743,7 @@
           <p:cNvPr id="5" name="">
             <a:extLst xmlns:a="http://schemas.openxmlformats.org/drawingml/2006/main">
               <a:ext uri="{FF2B5EF4-FFF2-40B4-BE49-F238E27FC236}">
-                <a16:creationId xmlns:a16="http://schemas.microsoft.com/office/drawing/2014/main" id="{7DC66F9A-58E2-495E-BBFC-3E88F4344104}"/>
+                <a16:creationId xmlns:a16="http://schemas.microsoft.com/office/drawing/2014/main" id="{EB94666F-9FA1-437D-9032-63AE83984039}"/>
               </a:ext>
             </a:extLst>
           </p:cNvPr>
@@ -5894,7 +5775,7 @@
           <p:cNvPr id="6" name="">
             <a:extLst xmlns:a="http://schemas.openxmlformats.org/drawingml/2006/main">
               <a:ext uri="{FF2B5EF4-FFF2-40B4-BE49-F238E27FC236}">
-                <a16:creationId xmlns:a16="http://schemas.microsoft.com/office/drawing/2014/main" id="{B4E22581-728F-438B-A140-C491EBEFF239}"/>
+                <a16:creationId xmlns:a16="http://schemas.microsoft.com/office/drawing/2014/main" id="{698DF346-5E83-4826-8FE4-B2CB7A52EAF1}"/>
               </a:ext>
             </a:extLst>
           </p:cNvPr>
@@ -5926,7 +5807,7 @@
           <p:cNvPr id="7" name="">
             <a:extLst xmlns:a="http://schemas.openxmlformats.org/drawingml/2006/main">
               <a:ext uri="{FF2B5EF4-FFF2-40B4-BE49-F238E27FC236}">
-                <a16:creationId xmlns:a16="http://schemas.microsoft.com/office/drawing/2014/main" id="{4D72B803-FC46-4E31-A950-318E3898B16D}"/>
+                <a16:creationId xmlns:a16="http://schemas.microsoft.com/office/drawing/2014/main" id="{EBF3D435-193A-46AF-A6DF-EF36D7DA6D22}"/>
               </a:ext>
             </a:extLst>
           </p:cNvPr>
@@ -5958,7 +5839,7 @@
           <p:cNvPr id="8" name="">
             <a:extLst xmlns:a="http://schemas.openxmlformats.org/drawingml/2006/main">
               <a:ext uri="{FF2B5EF4-FFF2-40B4-BE49-F238E27FC236}">
-                <a16:creationId xmlns:a16="http://schemas.microsoft.com/office/drawing/2014/main" id="{AE7FBC34-0D68-4C1E-9B5E-C644523C10E5}"/>
+                <a16:creationId xmlns:a16="http://schemas.microsoft.com/office/drawing/2014/main" id="{DA81EFA4-E2F4-4914-AA4F-ACAC0D4CAB8F}"/>
               </a:ext>
             </a:extLst>
           </p:cNvPr>
@@ -6003,7 +5884,7 @@
           <p:cNvPr id="9" name="">
             <a:extLst xmlns:a="http://schemas.openxmlformats.org/drawingml/2006/main">
               <a:ext uri="{FF2B5EF4-FFF2-40B4-BE49-F238E27FC236}">
-                <a16:creationId xmlns:a16="http://schemas.microsoft.com/office/drawing/2014/main" id="{7E231DF7-8F03-466C-AD4B-9AA56EFE182F}"/>
+                <a16:creationId xmlns:a16="http://schemas.microsoft.com/office/drawing/2014/main" id="{E65B4E72-6CC4-4DFE-9C63-D6B76395A12F}"/>
               </a:ext>
             </a:extLst>
           </p:cNvPr>
@@ -6048,7 +5929,7 @@
           <p:cNvPr id="10" name="">
             <a:extLst xmlns:a="http://schemas.openxmlformats.org/drawingml/2006/main">
               <a:ext uri="{FF2B5EF4-FFF2-40B4-BE49-F238E27FC236}">
-                <a16:creationId xmlns:a16="http://schemas.microsoft.com/office/drawing/2014/main" id="{CE2EA1C6-22F3-49CC-910D-C3411376AB5E}"/>
+                <a16:creationId xmlns:a16="http://schemas.microsoft.com/office/drawing/2014/main" id="{406E9A6E-5726-474A-BC0D-28CDD7529F28}"/>
               </a:ext>
             </a:extLst>
           </p:cNvPr>
@@ -6080,7 +5961,7 @@
           <p:cNvPr id="11" name="">
             <a:extLst xmlns:a="http://schemas.openxmlformats.org/drawingml/2006/main">
               <a:ext uri="{FF2B5EF4-FFF2-40B4-BE49-F238E27FC236}">
-                <a16:creationId xmlns:a16="http://schemas.microsoft.com/office/drawing/2014/main" id="{BB5CA3C3-9B4D-47EB-BB30-14B6D33E0DB7}"/>
+                <a16:creationId xmlns:a16="http://schemas.microsoft.com/office/drawing/2014/main" id="{DDD9CF34-D6DD-46F4-A8ED-54FB513A4AAE}"/>
               </a:ext>
             </a:extLst>
           </p:cNvPr>
@@ -6112,7 +5993,7 @@
           <p:cNvPr id="12" name="">
             <a:extLst xmlns:a="http://schemas.openxmlformats.org/drawingml/2006/main">
               <a:ext uri="{FF2B5EF4-FFF2-40B4-BE49-F238E27FC236}">
-                <a16:creationId xmlns:a16="http://schemas.microsoft.com/office/drawing/2014/main" id="{05C13839-4267-4375-8D42-F6BE0D1AAA3B}"/>
+                <a16:creationId xmlns:a16="http://schemas.microsoft.com/office/drawing/2014/main" id="{33DD13F8-305F-415D-B184-2CC909298569}"/>
               </a:ext>
             </a:extLst>
           </p:cNvPr>
@@ -6144,7 +6025,7 @@
           <p:cNvPr id="13" name="">
             <a:extLst xmlns:a="http://schemas.openxmlformats.org/drawingml/2006/main">
               <a:ext uri="{FF2B5EF4-FFF2-40B4-BE49-F238E27FC236}">
-                <a16:creationId xmlns:a16="http://schemas.microsoft.com/office/drawing/2014/main" id="{20AB44F1-35B5-49E9-A247-1E2A2A09B747}"/>
+                <a16:creationId xmlns:a16="http://schemas.microsoft.com/office/drawing/2014/main" id="{BC87A948-516E-42C7-9A96-9F98249AC24D}"/>
               </a:ext>
             </a:extLst>
           </p:cNvPr>
@@ -6189,7 +6070,7 @@
           <p:cNvPr id="14" name="">
             <a:extLst xmlns:a="http://schemas.openxmlformats.org/drawingml/2006/main">
               <a:ext uri="{FF2B5EF4-FFF2-40B4-BE49-F238E27FC236}">
-                <a16:creationId xmlns:a16="http://schemas.microsoft.com/office/drawing/2014/main" id="{F93A980C-C791-4C25-AA0E-E839603783F5}"/>
+                <a16:creationId xmlns:a16="http://schemas.microsoft.com/office/drawing/2014/main" id="{F5334C83-4985-40E6-80BA-DF9E109029FF}"/>
               </a:ext>
             </a:extLst>
           </p:cNvPr>
@@ -6232,7 +6113,7 @@
     </p:spTree>
     <p:extLst>
       <p:ext uri="{BB962C8B-B14F-4D97-AF65-F5344CB8AC3E}">
-        <p14:creationId xmlns:p14="http://schemas.microsoft.com/office/powerpoint/2010/main" val="1689662890"/>
+        <p14:creationId xmlns:p14="http://schemas.microsoft.com/office/powerpoint/2010/main" val="1958041682"/>
       </p:ext>
     </p:extLst>
   </p:cSld>
@@ -6263,7 +6144,7 @@
           <p:cNvPr id="20" name="">
             <a:extLst xmlns:a="http://schemas.openxmlformats.org/drawingml/2006/main">
               <a:ext uri="{FF2B5EF4-FFF2-40B4-BE49-F238E27FC236}">
-                <a16:creationId xmlns:a16="http://schemas.microsoft.com/office/drawing/2014/main" id="{5B0AEB41-87B8-462C-987C-E2211B1A4BA6}"/>
+                <a16:creationId xmlns:a16="http://schemas.microsoft.com/office/drawing/2014/main" id="{CA3FB4C3-94F3-4805-9FD3-8A379BE1057C}"/>
               </a:ext>
             </a:extLst>
           </p:cNvPr>
@@ -6308,7 +6189,7 @@
           <p:cNvPr id="2" name="">
             <a:extLst xmlns:a="http://schemas.openxmlformats.org/drawingml/2006/main">
               <a:ext uri="{FF2B5EF4-FFF2-40B4-BE49-F238E27FC236}">
-                <a16:creationId xmlns:a16="http://schemas.microsoft.com/office/drawing/2014/main" id="{6E948853-7BBA-45D0-9E80-F90A08DE3CDA}"/>
+                <a16:creationId xmlns:a16="http://schemas.microsoft.com/office/drawing/2014/main" id="{0C537509-915D-4A62-9543-8C955297DAF0}"/>
               </a:ext>
             </a:extLst>
           </p:cNvPr>
@@ -6338,7 +6219,7 @@
           <p:cNvPr id="3" name="">
             <a:extLst xmlns:a="http://schemas.openxmlformats.org/drawingml/2006/main">
               <a:ext uri="{FF2B5EF4-FFF2-40B4-BE49-F238E27FC236}">
-                <a16:creationId xmlns:a16="http://schemas.microsoft.com/office/drawing/2014/main" id="{642742EC-52E2-4870-97FC-1DBD8F7109FF}"/>
+                <a16:creationId xmlns:a16="http://schemas.microsoft.com/office/drawing/2014/main" id="{DC0E841B-DE4E-481C-9207-9E3FB2CD60BE}"/>
               </a:ext>
             </a:extLst>
           </p:cNvPr>
@@ -6383,7 +6264,7 @@
           <p:cNvPr id="4" name="">
             <a:extLst xmlns:a="http://schemas.openxmlformats.org/drawingml/2006/main">
               <a:ext uri="{FF2B5EF4-FFF2-40B4-BE49-F238E27FC236}">
-                <a16:creationId xmlns:a16="http://schemas.microsoft.com/office/drawing/2014/main" id="{A1EAE896-0A09-4C7B-87DE-D9F8FDBAB31D}"/>
+                <a16:creationId xmlns:a16="http://schemas.microsoft.com/office/drawing/2014/main" id="{35439057-5086-417F-BCE9-D9AEC3EFC52F}"/>
               </a:ext>
             </a:extLst>
           </p:cNvPr>
@@ -6428,7 +6309,7 @@
           <p:cNvPr id="5" name="">
             <a:extLst xmlns:a="http://schemas.openxmlformats.org/drawingml/2006/main">
               <a:ext uri="{FF2B5EF4-FFF2-40B4-BE49-F238E27FC236}">
-                <a16:creationId xmlns:a16="http://schemas.microsoft.com/office/drawing/2014/main" id="{C81D4A3A-9041-4CF4-BBEF-131E8CA4F122}"/>
+                <a16:creationId xmlns:a16="http://schemas.microsoft.com/office/drawing/2014/main" id="{D47A1FDA-05A8-49F9-B9ED-815D7BBB2A81}"/>
               </a:ext>
             </a:extLst>
           </p:cNvPr>
@@ -6460,7 +6341,7 @@
           <p:cNvPr id="6" name="">
             <a:extLst xmlns:a="http://schemas.openxmlformats.org/drawingml/2006/main">
               <a:ext uri="{FF2B5EF4-FFF2-40B4-BE49-F238E27FC236}">
-                <a16:creationId xmlns:a16="http://schemas.microsoft.com/office/drawing/2014/main" id="{F1C8FAAB-AD43-40E7-8D23-1547FDA1EF27}"/>
+                <a16:creationId xmlns:a16="http://schemas.microsoft.com/office/drawing/2014/main" id="{5B4534B5-8557-48B8-B988-8A037B55A08A}"/>
               </a:ext>
             </a:extLst>
           </p:cNvPr>
@@ -6531,7 +6412,7 @@
           <p:cNvPr id="7" name="">
             <a:extLst xmlns:a="http://schemas.openxmlformats.org/drawingml/2006/main">
               <a:ext uri="{FF2B5EF4-FFF2-40B4-BE49-F238E27FC236}">
-                <a16:creationId xmlns:a16="http://schemas.microsoft.com/office/drawing/2014/main" id="{72EC5FA0-2A4D-4C1E-96FF-0108677519C4}"/>
+                <a16:creationId xmlns:a16="http://schemas.microsoft.com/office/drawing/2014/main" id="{9D141711-495B-48F2-A819-311F44AAF653}"/>
               </a:ext>
             </a:extLst>
           </p:cNvPr>
@@ -6576,7 +6457,7 @@
           <p:cNvPr id="8" name="">
             <a:extLst xmlns:a="http://schemas.openxmlformats.org/drawingml/2006/main">
               <a:ext uri="{FF2B5EF4-FFF2-40B4-BE49-F238E27FC236}">
-                <a16:creationId xmlns:a16="http://schemas.microsoft.com/office/drawing/2014/main" id="{78E6A66F-BE09-4796-8314-D5E9354B4843}"/>
+                <a16:creationId xmlns:a16="http://schemas.microsoft.com/office/drawing/2014/main" id="{77A7B5D5-95BB-42A3-BCF4-99AFCCCDEBE4}"/>
               </a:ext>
             </a:extLst>
           </p:cNvPr>
@@ -6608,7 +6489,7 @@
           <p:cNvPr id="9" name="">
             <a:extLst xmlns:a="http://schemas.openxmlformats.org/drawingml/2006/main">
               <a:ext uri="{FF2B5EF4-FFF2-40B4-BE49-F238E27FC236}">
-                <a16:creationId xmlns:a16="http://schemas.microsoft.com/office/drawing/2014/main" id="{9AAE30CE-47AA-4059-81C0-650A8E8FBB65}"/>
+                <a16:creationId xmlns:a16="http://schemas.microsoft.com/office/drawing/2014/main" id="{CDD86271-CDCF-45B0-9550-9C19D6868678}"/>
               </a:ext>
             </a:extLst>
           </p:cNvPr>
@@ -6640,7 +6521,7 @@
           <p:cNvPr id="10" name="">
             <a:extLst xmlns:a="http://schemas.openxmlformats.org/drawingml/2006/main">
               <a:ext uri="{FF2B5EF4-FFF2-40B4-BE49-F238E27FC236}">
-                <a16:creationId xmlns:a16="http://schemas.microsoft.com/office/drawing/2014/main" id="{415ADF54-99C5-4D0B-BAD4-5157236A4297}"/>
+                <a16:creationId xmlns:a16="http://schemas.microsoft.com/office/drawing/2014/main" id="{E89C1785-4BF8-4FF2-AF40-F0A53DD42F70}"/>
               </a:ext>
             </a:extLst>
           </p:cNvPr>
@@ -6685,7 +6566,7 @@
           <p:cNvPr id="11" name="">
             <a:extLst xmlns:a="http://schemas.openxmlformats.org/drawingml/2006/main">
               <a:ext uri="{FF2B5EF4-FFF2-40B4-BE49-F238E27FC236}">
-                <a16:creationId xmlns:a16="http://schemas.microsoft.com/office/drawing/2014/main" id="{E6537F4C-EC8D-4994-B2A2-0E30C9C42192}"/>
+                <a16:creationId xmlns:a16="http://schemas.microsoft.com/office/drawing/2014/main" id="{F632E18F-8B3D-4D4C-B2BD-8D9672EA8530}"/>
               </a:ext>
             </a:extLst>
           </p:cNvPr>
@@ -6730,7 +6611,7 @@
           <p:cNvPr id="12" name="">
             <a:extLst xmlns:a="http://schemas.openxmlformats.org/drawingml/2006/main">
               <a:ext uri="{FF2B5EF4-FFF2-40B4-BE49-F238E27FC236}">
-                <a16:creationId xmlns:a16="http://schemas.microsoft.com/office/drawing/2014/main" id="{3E5BAB75-22C1-4854-86EF-1B0658742DD1}"/>
+                <a16:creationId xmlns:a16="http://schemas.microsoft.com/office/drawing/2014/main" id="{A4CE812E-93DE-4038-93EF-1F5210FCE669}"/>
               </a:ext>
             </a:extLst>
           </p:cNvPr>
@@ -6775,7 +6656,7 @@
           <p:cNvPr id="13" name="">
             <a:extLst xmlns:a="http://schemas.openxmlformats.org/drawingml/2006/main">
               <a:ext uri="{FF2B5EF4-FFF2-40B4-BE49-F238E27FC236}">
-                <a16:creationId xmlns:a16="http://schemas.microsoft.com/office/drawing/2014/main" id="{6AAB3D01-8DB3-4972-94B8-B6DAE0C8EC63}"/>
+                <a16:creationId xmlns:a16="http://schemas.microsoft.com/office/drawing/2014/main" id="{F527E3FF-01E8-4A74-A1CD-41E283936DA6}"/>
               </a:ext>
             </a:extLst>
           </p:cNvPr>
@@ -6807,7 +6688,7 @@
           <p:cNvPr id="14" name="">
             <a:extLst xmlns:a="http://schemas.openxmlformats.org/drawingml/2006/main">
               <a:ext uri="{FF2B5EF4-FFF2-40B4-BE49-F238E27FC236}">
-                <a16:creationId xmlns:a16="http://schemas.microsoft.com/office/drawing/2014/main" id="{8AE53A71-907B-4F6A-9F07-8326617A5488}"/>
+                <a16:creationId xmlns:a16="http://schemas.microsoft.com/office/drawing/2014/main" id="{DBAC5BC3-ACF1-4E76-9C2F-456C06238439}"/>
               </a:ext>
             </a:extLst>
           </p:cNvPr>
@@ -6839,7 +6720,7 @@
           <p:cNvPr id="15" name="">
             <a:extLst xmlns:a="http://schemas.openxmlformats.org/drawingml/2006/main">
               <a:ext uri="{FF2B5EF4-FFF2-40B4-BE49-F238E27FC236}">
-                <a16:creationId xmlns:a16="http://schemas.microsoft.com/office/drawing/2014/main" id="{68F524B3-C296-4DF0-8C8C-2D8C3048A15A}"/>
+                <a16:creationId xmlns:a16="http://schemas.microsoft.com/office/drawing/2014/main" id="{F2F44C92-9528-403B-ACBE-FE929C791E1C}"/>
               </a:ext>
             </a:extLst>
           </p:cNvPr>
@@ -6871,7 +6752,7 @@
           <p:cNvPr id="16" name="">
             <a:extLst xmlns:a="http://schemas.openxmlformats.org/drawingml/2006/main">
               <a:ext uri="{FF2B5EF4-FFF2-40B4-BE49-F238E27FC236}">
-                <a16:creationId xmlns:a16="http://schemas.microsoft.com/office/drawing/2014/main" id="{57003087-D654-4554-A6AD-0546A57B6867}"/>
+                <a16:creationId xmlns:a16="http://schemas.microsoft.com/office/drawing/2014/main" id="{3E746905-0823-4CE1-B66D-BC1DDEE055AA}"/>
               </a:ext>
             </a:extLst>
           </p:cNvPr>
@@ -6916,7 +6797,7 @@
           <p:cNvPr id="17" name="">
             <a:extLst xmlns:a="http://schemas.openxmlformats.org/drawingml/2006/main">
               <a:ext uri="{FF2B5EF4-FFF2-40B4-BE49-F238E27FC236}">
-                <a16:creationId xmlns:a16="http://schemas.microsoft.com/office/drawing/2014/main" id="{B69CCD30-D48D-4E0D-A5A6-BDB55F8B1285}"/>
+                <a16:creationId xmlns:a16="http://schemas.microsoft.com/office/drawing/2014/main" id="{AA2EF3BB-3495-4307-9132-388F4EE42549}"/>
               </a:ext>
             </a:extLst>
           </p:cNvPr>
@@ -6961,7 +6842,7 @@
           <p:cNvPr id="18" name="">
             <a:extLst xmlns:a="http://schemas.openxmlformats.org/drawingml/2006/main">
               <a:ext uri="{FF2B5EF4-FFF2-40B4-BE49-F238E27FC236}">
-                <a16:creationId xmlns:a16="http://schemas.microsoft.com/office/drawing/2014/main" id="{2FB1C413-1306-4ACD-A3F6-EBB8479D4D34}"/>
+                <a16:creationId xmlns:a16="http://schemas.microsoft.com/office/drawing/2014/main" id="{682673DE-9A5E-45CD-8656-A967C9E14CE2}"/>
               </a:ext>
             </a:extLst>
           </p:cNvPr>
@@ -7006,7 +6887,7 @@
           <p:cNvPr id="19" name="">
             <a:extLst xmlns:a="http://schemas.openxmlformats.org/drawingml/2006/main">
               <a:ext uri="{FF2B5EF4-FFF2-40B4-BE49-F238E27FC236}">
-                <a16:creationId xmlns:a16="http://schemas.microsoft.com/office/drawing/2014/main" id="{E7400971-A8AD-4690-8ADE-5E658A9CF16F}"/>
+                <a16:creationId xmlns:a16="http://schemas.microsoft.com/office/drawing/2014/main" id="{46671EF0-8B2F-48D9-81DE-34308E15C558}"/>
               </a:ext>
             </a:extLst>
           </p:cNvPr>
@@ -7049,7 +6930,7 @@
     </p:spTree>
     <p:extLst>
       <p:ext uri="{BB962C8B-B14F-4D97-AF65-F5344CB8AC3E}">
-        <p14:creationId xmlns:p14="http://schemas.microsoft.com/office/powerpoint/2010/main" val="750579159"/>
+        <p14:creationId xmlns:p14="http://schemas.microsoft.com/office/powerpoint/2010/main" val="6378097"/>
       </p:ext>
     </p:extLst>
   </p:cSld>
@@ -7077,10 +6958,10 @@
       </p:grpSpPr>
       <p:sp>
         <p:nvSpPr>
-          <p:cNvPr id="9" name="">
-            <a:extLst xmlns:a="http://schemas.openxmlformats.org/drawingml/2006/main">
-              <a:ext uri="{FF2B5EF4-FFF2-40B4-BE49-F238E27FC236}">
-                <a16:creationId xmlns:a16="http://schemas.microsoft.com/office/drawing/2014/main" id="{5E093253-589B-4A99-BB74-4927A6F2C4A2}"/>
+          <p:cNvPr id="8" name="">
+            <a:extLst xmlns:a="http://schemas.openxmlformats.org/drawingml/2006/main">
+              <a:ext uri="{FF2B5EF4-FFF2-40B4-BE49-F238E27FC236}">
+                <a16:creationId xmlns:a16="http://schemas.microsoft.com/office/drawing/2014/main" id="{E1FB3CA8-73DD-4B0E-B51A-CFC573B4CEDE}"/>
               </a:ext>
             </a:extLst>
           </p:cNvPr>
@@ -7115,7 +6996,7 @@
                 <a:ea typeface="Arial"/>
                 <a:cs typeface="Arial"/>
               </a:rPr>
-              <a:t>Coverage and measurement scope</a:t>
+              <a:t>Timing and quality use separate measurement sets</a:t>
             </a:r>
           </a:p>
         </p:txBody>
@@ -7125,7 +7006,7 @@
           <p:cNvPr id="2" name="">
             <a:extLst xmlns:a="http://schemas.openxmlformats.org/drawingml/2006/main">
               <a:ext uri="{FF2B5EF4-FFF2-40B4-BE49-F238E27FC236}">
-                <a16:creationId xmlns:a16="http://schemas.microsoft.com/office/drawing/2014/main" id="{D2C322D7-1BB8-4566-961E-2B44BCC89AF9}"/>
+                <a16:creationId xmlns:a16="http://schemas.microsoft.com/office/drawing/2014/main" id="{5FF17C6B-992B-4B4C-92CA-5469B604381C}"/>
               </a:ext>
             </a:extLst>
           </p:cNvPr>
@@ -7155,7 +7036,7 @@
           <p:cNvPr id="3" name="">
             <a:extLst xmlns:a="http://schemas.openxmlformats.org/drawingml/2006/main">
               <a:ext uri="{FF2B5EF4-FFF2-40B4-BE49-F238E27FC236}">
-                <a16:creationId xmlns:a16="http://schemas.microsoft.com/office/drawing/2014/main" id="{1205A624-7AA7-4BB2-B1BC-DCBFD5A91631}"/>
+                <a16:creationId xmlns:a16="http://schemas.microsoft.com/office/drawing/2014/main" id="{87967DD5-575A-4DB3-B40F-7AA7A2BB1FD7}"/>
               </a:ext>
             </a:extLst>
           </p:cNvPr>
@@ -7200,7 +7081,7 @@
           <p:cNvPr id="4" name="">
             <a:extLst xmlns:a="http://schemas.openxmlformats.org/drawingml/2006/main">
               <a:ext uri="{FF2B5EF4-FFF2-40B4-BE49-F238E27FC236}">
-                <a16:creationId xmlns:a16="http://schemas.microsoft.com/office/drawing/2014/main" id="{0C8F48B1-A15A-4301-8366-B4362D945F53}"/>
+                <a16:creationId xmlns:a16="http://schemas.microsoft.com/office/drawing/2014/main" id="{A19D57B2-B38A-4AA0-83FA-A4BB8BD828B9}"/>
               </a:ext>
             </a:extLst>
           </p:cNvPr>
@@ -7208,26 +7089,26 @@
           <p:nvPr/>
         </p:nvGraphicFramePr>
         <p:xfrm>
-          <a:off xmlns:a="http://schemas.openxmlformats.org/drawingml/2006/main" x="609600" y="1590675"/>
-          <a:ext xmlns:a="http://schemas.openxmlformats.org/drawingml/2006/main" cx="6286500" cy="3143250"/>
+          <a:off xmlns:a="http://schemas.openxmlformats.org/drawingml/2006/main" x="609600" y="1638300"/>
+          <a:ext xmlns:a="http://schemas.openxmlformats.org/drawingml/2006/main" cx="10972800" cy="3314700"/>
         </p:xfrm>
         <a:graphic xmlns:a="http://schemas.openxmlformats.org/drawingml/2006/main">
           <a:graphicData uri="http://schemas.openxmlformats.org/drawingml/2006/table">
             <a:tbl>
               <a:tblPr/>
               <a:tblGrid>
-                <a:gridCol w="2286000"/>
-                <a:gridCol w="1333500"/>
-                <a:gridCol w="2667000"/>
+                <a:gridCol w="2476500"/>
+                <a:gridCol w="4248150"/>
+                <a:gridCol w="4248150"/>
               </a:tblGrid>
-              <a:tr h="628650">
+              <a:tr h="552450">
                 <a:tc>
                   <a:txBody>
                     <a:bodyPr/>
                     <a:lstStyle/>
                     <a:p>
                       <a:r>
-                        <a:rPr sz="1800" b="1">
+                        <a:rPr sz="1875" b="1">
                           <a:solidFill>
                             <a:srgbClr val="FFFFFF"/>
                           </a:solidFill>
@@ -7235,7 +7116,7 @@
                           <a:ea typeface="Arial"/>
                           <a:cs typeface="Arial"/>
                         </a:rPr>
-                        <a:t>Forward sequence</a:t>
+                        <a:t/>
                       </a:r>
                     </a:p>
                   </a:txBody>
@@ -7275,7 +7156,7 @@
                     <a:lstStyle/>
                     <a:p>
                       <a:r>
-                        <a:rPr sz="1800" b="1">
+                        <a:rPr sz="1875" b="1">
                           <a:solidFill>
                             <a:srgbClr val="FFFFFF"/>
                           </a:solidFill>
@@ -7283,7 +7164,7 @@
                           <a:ea typeface="Arial"/>
                           <a:cs typeface="Arial"/>
                         </a:rPr>
-                        <a:t>Frames</a:t>
+                        <a:t>Latest timing</a:t>
                       </a:r>
                     </a:p>
                   </a:txBody>
@@ -7317,7 +7198,7 @@
                     <a:lstStyle/>
                     <a:p>
                       <a:r>
-                        <a:rPr sz="1800" b="1">
+                        <a:rPr sz="1875" b="1">
                           <a:solidFill>
                             <a:srgbClr val="FFFFFF"/>
                           </a:solidFill>
@@ -7325,7 +7206,7 @@
                           <a:ea typeface="Arial"/>
                           <a:cs typeface="Arial"/>
                         </a:rPr>
-                        <a:t>Right-eye frame IDs</a:t>
+                        <a:t>Existing quality</a:t>
                       </a:r>
                     </a:p>
                   </a:txBody>
@@ -7354,14 +7235,14 @@
                   </a:tcPr>
                 </a:tc>
               </a:tr>
-              <a:tr h="628650">
+              <a:tr h="552450">
                 <a:tc>
                   <a:txBody>
                     <a:bodyPr/>
                     <a:lstStyle/>
                     <a:p>
                       <a:r>
-                        <a:rPr sz="1800" b="0">
+                        <a:rPr sz="1875" b="0">
                           <a:solidFill>
                             <a:srgbClr val="152D43"/>
                           </a:solidFill>
@@ -7369,7 +7250,7 @@
                           <a:ea typeface="Arial"/>
                           <a:cs typeface="Arial"/>
                         </a:rPr>
-                        <a:t>15 mm / 300</a:t>
+                        <a:t>Implementation</a:t>
                       </a:r>
                     </a:p>
                   </a:txBody>
@@ -7403,7 +7284,7 @@
                     <a:lstStyle/>
                     <a:p>
                       <a:r>
-                        <a:rPr sz="1800" b="0">
+                        <a:rPr sz="1875" b="0">
                           <a:solidFill>
                             <a:srgbClr val="152D43"/>
                           </a:solidFill>
@@ -7411,7 +7292,7 @@
                           <a:ea typeface="Arial"/>
                           <a:cs typeface="Arial"/>
                         </a:rPr>
-                        <a:t>147</a:t>
+                        <a:t>CUDA C++</a:t>
                       </a:r>
                     </a:p>
                   </a:txBody>
@@ -7439,7 +7320,7 @@
                     <a:lstStyle/>
                     <a:p>
                       <a:r>
-                        <a:rPr sz="1800" b="0">
+                        <a:rPr sz="1875" b="0">
                           <a:solidFill>
                             <a:srgbClr val="152D43"/>
                           </a:solidFill>
@@ -7447,7 +7328,7 @@
                           <a:ea typeface="Arial"/>
                           <a:cs typeface="Arial"/>
                         </a:rPr>
-                        <a:t>Odd frames 7–299</a:t>
+                        <a:t>CUDA C++</a:t>
                       </a:r>
                     </a:p>
                   </a:txBody>
@@ -7470,14 +7351,14 @@
                   </a:tcPr>
                 </a:tc>
               </a:tr>
-              <a:tr h="628650">
+              <a:tr h="552450">
                 <a:tc>
                   <a:txBody>
                     <a:bodyPr/>
                     <a:lstStyle/>
                     <a:p>
                       <a:r>
-                        <a:rPr sz="1800" b="0">
+                        <a:rPr sz="1875" b="0">
                           <a:solidFill>
                             <a:srgbClr val="152D43"/>
                           </a:solidFill>
@@ -7485,7 +7366,7 @@
                           <a:ea typeface="Arial"/>
                           <a:cs typeface="Arial"/>
                         </a:rPr>
-                        <a:t>15 mm / 800</a:t>
+                        <a:t>Xavier power mode</a:t>
                       </a:r>
                     </a:p>
                   </a:txBody>
@@ -7519,7 +7400,7 @@
                     <a:lstStyle/>
                     <a:p>
                       <a:r>
-                        <a:rPr sz="1800" b="0">
+                        <a:rPr sz="1875" b="0">
                           <a:solidFill>
                             <a:srgbClr val="152D43"/>
                           </a:solidFill>
@@ -7527,7 +7408,7 @@
                           <a:ea typeface="Arial"/>
                           <a:cs typeface="Arial"/>
                         </a:rPr>
-                        <a:t>387</a:t>
+                        <a:t>30W 4CORE, unlocked</a:t>
                       </a:r>
                     </a:p>
                   </a:txBody>
@@ -7555,7 +7436,7 @@
                     <a:lstStyle/>
                     <a:p>
                       <a:r>
-                        <a:rPr sz="1800" b="0">
+                        <a:rPr sz="1875" b="0">
                           <a:solidFill>
                             <a:srgbClr val="152D43"/>
                           </a:solidFill>
@@ -7563,7 +7444,7 @@
                           <a:ea typeface="Arial"/>
                           <a:cs typeface="Arial"/>
                         </a:rPr>
-                        <a:t>Odd frames 7–779</a:t>
+                        <a:t>15W Desktop, unlocked</a:t>
                       </a:r>
                     </a:p>
                   </a:txBody>
@@ -7586,14 +7467,14 @@
                   </a:tcPr>
                 </a:tc>
               </a:tr>
-              <a:tr h="628650">
+              <a:tr h="552450">
                 <a:tc>
                   <a:txBody>
                     <a:bodyPr/>
                     <a:lstStyle/>
                     <a:p>
                       <a:r>
-                        <a:rPr sz="1800" b="0">
+                        <a:rPr sz="1875" b="0">
                           <a:solidFill>
                             <a:srgbClr val="152D43"/>
                           </a:solidFill>
@@ -7601,7 +7482,7 @@
                           <a:ea typeface="Arial"/>
                           <a:cs typeface="Arial"/>
                         </a:rPr>
-                        <a:t>35 mm / 300</a:t>
+                        <a:t>Coverage</a:t>
                       </a:r>
                     </a:p>
                   </a:txBody>
@@ -7635,7 +7516,7 @@
                     <a:lstStyle/>
                     <a:p>
                       <a:r>
-                        <a:rPr sz="1800" b="0">
+                        <a:rPr sz="1875" b="0">
                           <a:solidFill>
                             <a:srgbClr val="152D43"/>
                           </a:solidFill>
@@ -7643,7 +7524,7 @@
                           <a:ea typeface="Arial"/>
                           <a:cs typeface="Arial"/>
                         </a:rPr>
-                        <a:t>147</a:t>
+                        <a:t>4 workloads × frame 39</a:t>
                       </a:r>
                     </a:p>
                   </a:txBody>
@@ -7671,7 +7552,7 @@
                     <a:lstStyle/>
                     <a:p>
                       <a:r>
-                        <a:rPr sz="1800" b="0">
+                        <a:rPr sz="1875" b="0">
                           <a:solidFill>
                             <a:srgbClr val="152D43"/>
                           </a:solidFill>
@@ -7679,7 +7560,7 @@
                           <a:ea typeface="Arial"/>
                           <a:cs typeface="Arial"/>
                         </a:rPr>
-                        <a:t>Odd frames 7–299</a:t>
+                        <a:t>1068 forward odd frames</a:t>
                       </a:r>
                     </a:p>
                   </a:txBody>
@@ -7702,14 +7583,14 @@
                   </a:tcPr>
                 </a:tc>
               </a:tr>
-              <a:tr h="628650">
+              <a:tr h="552450">
                 <a:tc>
                   <a:txBody>
                     <a:bodyPr/>
                     <a:lstStyle/>
                     <a:p>
                       <a:r>
-                        <a:rPr sz="1800" b="0">
+                        <a:rPr sz="1875" b="0">
                           <a:solidFill>
                             <a:srgbClr val="152D43"/>
                           </a:solidFill>
@@ -7717,7 +7598,7 @@
                           <a:ea typeface="Arial"/>
                           <a:cs typeface="Arial"/>
                         </a:rPr>
-                        <a:t>35 mm / 800</a:t>
+                        <a:t>Sampling</a:t>
                       </a:r>
                     </a:p>
                   </a:txBody>
@@ -7751,7 +7632,7 @@
                     <a:lstStyle/>
                     <a:p>
                       <a:r>
-                        <a:rPr sz="1800" b="0">
+                        <a:rPr sz="1875" b="0">
                           <a:solidFill>
                             <a:srgbClr val="152D43"/>
                           </a:solidFill>
@@ -7759,7 +7640,7 @@
                           <a:ea typeface="Arial"/>
                           <a:cs typeface="Arial"/>
                         </a:rPr>
-                        <a:t>387</a:t>
+                        <a:t>10 warmups + 100 runs/path</a:t>
                       </a:r>
                     </a:p>
                   </a:txBody>
@@ -7787,7 +7668,7 @@
                     <a:lstStyle/>
                     <a:p>
                       <a:r>
-                        <a:rPr sz="1800" b="0">
+                        <a:rPr sz="1875" b="0">
                           <a:solidFill>
                             <a:srgbClr val="152D43"/>
                           </a:solidFill>
@@ -7795,7 +7676,7 @@
                           <a:ea typeface="Arial"/>
                           <a:cs typeface="Arial"/>
                         </a:rPr>
-                        <a:t>Odd frames 7–779</a:t>
+                        <a:t>1 output/config/frame</a:t>
                       </a:r>
                     </a:p>
                   </a:txBody>
@@ -7818,6 +7699,122 @@
                   </a:tcPr>
                 </a:tc>
               </a:tr>
+              <a:tr h="552450">
+                <a:tc>
+                  <a:txBody>
+                    <a:bodyPr/>
+                    <a:lstStyle/>
+                    <a:p>
+                      <a:r>
+                        <a:rPr sz="1875" b="0">
+                          <a:solidFill>
+                            <a:srgbClr val="152D43"/>
+                          </a:solidFill>
+                          <a:latin typeface="Arial"/>
+                          <a:ea typeface="Arial"/>
+                          <a:cs typeface="Arial"/>
+                        </a:rPr>
+                        <a:t>Reported quantity</a:t>
+                      </a:r>
+                    </a:p>
+                  </a:txBody>
+                  <a:tcPr marL="91440" marR="91440" marT="45720" marB="45720">
+                    <a:lnL w="9525">
+                      <a:solidFill>
+                        <a:srgbClr val="D7DFE5"/>
+                      </a:solidFill>
+                      <a:prstDash val="solid"/>
+                    </a:lnL>
+                    <a:lnR w="9525">
+                      <a:solidFill>
+                        <a:srgbClr val="D7DFE5"/>
+                      </a:solidFill>
+                      <a:prstDash val="solid"/>
+                    </a:lnR>
+                    <a:lnB w="9525">
+                      <a:solidFill>
+                        <a:srgbClr val="D7DFE5"/>
+                      </a:solidFill>
+                      <a:prstDash val="solid"/>
+                    </a:lnB>
+                    <a:solidFill>
+                      <a:srgbClr val="FFFFFF"/>
+                    </a:solidFill>
+                  </a:tcPr>
+                </a:tc>
+                <a:tc>
+                  <a:txBody>
+                    <a:bodyPr/>
+                    <a:lstStyle/>
+                    <a:p>
+                      <a:r>
+                        <a:rPr sz="1875" b="0">
+                          <a:solidFill>
+                            <a:srgbClr val="152D43"/>
+                          </a:solidFill>
+                          <a:latin typeface="Arial"/>
+                          <a:ea typeface="Arial"/>
+                          <a:cs typeface="Arial"/>
+                        </a:rPr>
+                        <a:t>Staged GPU timeline mean</a:t>
+                      </a:r>
+                    </a:p>
+                  </a:txBody>
+                  <a:tcPr marL="91440" marR="91440" marT="45720" marB="45720">
+                    <a:lnR w="9525">
+                      <a:solidFill>
+                        <a:srgbClr val="D7DFE5"/>
+                      </a:solidFill>
+                      <a:prstDash val="solid"/>
+                    </a:lnR>
+                    <a:lnB w="9525">
+                      <a:solidFill>
+                        <a:srgbClr val="D7DFE5"/>
+                      </a:solidFill>
+                      <a:prstDash val="solid"/>
+                    </a:lnB>
+                    <a:solidFill>
+                      <a:srgbClr val="FFFFFF"/>
+                    </a:solidFill>
+                  </a:tcPr>
+                </a:tc>
+                <a:tc>
+                  <a:txBody>
+                    <a:bodyPr/>
+                    <a:lstStyle/>
+                    <a:p>
+                      <a:r>
+                        <a:rPr sz="1875" b="0">
+                          <a:solidFill>
+                            <a:srgbClr val="152D43"/>
+                          </a:solidFill>
+                          <a:latin typeface="Arial"/>
+                          <a:ea typeface="Arial"/>
+                          <a:cs typeface="Arial"/>
+                        </a:rPr>
+                        <a:t>Original overflow PSNR</a:t>
+                      </a:r>
+                    </a:p>
+                  </a:txBody>
+                  <a:tcPr marL="91440" marR="91440" marT="45720" marB="45720">
+                    <a:lnR w="9525">
+                      <a:solidFill>
+                        <a:srgbClr val="D7DFE5"/>
+                      </a:solidFill>
+                      <a:prstDash val="solid"/>
+                    </a:lnR>
+                    <a:lnB w="9525">
+                      <a:solidFill>
+                        <a:srgbClr val="D7DFE5"/>
+                      </a:solidFill>
+                      <a:prstDash val="solid"/>
+                    </a:lnB>
+                    <a:solidFill>
+                      <a:srgbClr val="FFFFFF"/>
+                    </a:solidFill>
+                  </a:tcPr>
+                </a:tc>
+              </a:tr>
             </a:tbl>
           </a:graphicData>
         </a:graphic>
@@ -7827,7 +7824,7 @@
           <p:cNvPr id="5" name="">
             <a:extLst xmlns:a="http://schemas.openxmlformats.org/drawingml/2006/main">
               <a:ext uri="{FF2B5EF4-FFF2-40B4-BE49-F238E27FC236}">
-                <a16:creationId xmlns:a16="http://schemas.microsoft.com/office/drawing/2014/main" id="{D6859824-037B-458E-9743-931BBC63DF86}"/>
+                <a16:creationId xmlns:a16="http://schemas.microsoft.com/office/drawing/2014/main" id="{8894DAC9-BB36-46E3-9A7A-1D6F66D65C05}"/>
               </a:ext>
             </a:extLst>
           </p:cNvPr>
@@ -7838,8 +7835,8 @@
         </p:nvSpPr>
         <p:spPr>
           <a:xfrm xmlns:a="http://schemas.openxmlformats.org/drawingml/2006/main">
-            <a:off x="7581900" y="1638300"/>
-            <a:ext cx="3429000" cy="666750"/>
+            <a:off x="609600" y="5191125"/>
+            <a:ext cx="10953750" cy="361950"/>
           </a:xfrm>
           <a:prstGeom xmlns:a="http://schemas.openxmlformats.org/drawingml/2006/main" prst="rect">
             <a:avLst/>
@@ -7854,15 +7851,15 @@
           <a:lstStyle xmlns:a="http://schemas.openxmlformats.org/drawingml/2006/main"/>
           <a:p xmlns:a="http://schemas.openxmlformats.org/drawingml/2006/main">
             <a:r>
-              <a:rPr sz="3600" b="1">
-                <a:solidFill>
-                  <a:srgbClr val="086B93"/>
+              <a:rPr sz="1875" b="0">
+                <a:solidFill>
+                  <a:srgbClr val="152D43"/>
                 </a:solidFill>
                 <a:latin typeface="Arial"/>
                 <a:ea typeface="Arial"/>
                 <a:cs typeface="Arial"/>
               </a:rPr>
-              <a:t>1068 frames</a:t>
+              <a:t>Timing excludes input/output copies, allocation, disk I/O, network, decoding, and display.</a:t>
             </a:r>
           </a:p>
         </p:txBody>
@@ -7872,7 +7869,7 @@
           <p:cNvPr id="6" name="">
             <a:extLst xmlns:a="http://schemas.openxmlformats.org/drawingml/2006/main">
               <a:ext uri="{FF2B5EF4-FFF2-40B4-BE49-F238E27FC236}">
-                <a16:creationId xmlns:a16="http://schemas.microsoft.com/office/drawing/2014/main" id="{BC6CFA04-864E-4989-AD8B-F92148238611}"/>
+                <a16:creationId xmlns:a16="http://schemas.microsoft.com/office/drawing/2014/main" id="{32090890-00C3-4E17-AC68-4B226388B7EA}"/>
               </a:ext>
             </a:extLst>
           </p:cNvPr>
@@ -7883,8 +7880,8 @@
         </p:nvSpPr>
         <p:spPr>
           <a:xfrm xmlns:a="http://schemas.openxmlformats.org/drawingml/2006/main">
-            <a:off x="7581900" y="2552700"/>
-            <a:ext cx="3810000" cy="1828800"/>
+            <a:off x="609600" y="5600700"/>
+            <a:ext cx="10953750" cy="361950"/>
           </a:xfrm>
           <a:prstGeom xmlns:a="http://schemas.openxmlformats.org/drawingml/2006/main" prst="rect">
             <a:avLst/>
@@ -7899,54 +7896,15 @@
           <a:lstStyle xmlns:a="http://schemas.openxmlformats.org/drawingml/2006/main"/>
           <a:p xmlns:a="http://schemas.openxmlformats.org/drawingml/2006/main">
             <a:r>
-              <a:rPr sz="1950" b="0">
-                <a:solidFill>
-                  <a:srgbClr val="152D43"/>
+              <a:rPr sz="1875" b="1">
+                <a:solidFill>
+                  <a:srgbClr val="086B93"/>
                 </a:solidFill>
                 <a:latin typeface="Arial"/>
                 <a:ea typeface="Arial"/>
                 <a:cs typeface="Arial"/>
               </a:rPr>
-              <a:t>Xavier 15W Desktop</a:t>
-            </a:r>
-          </a:p>
-          <a:p xmlns:a="http://schemas.openxmlformats.org/drawingml/2006/main">
-            <a:r>
-              <a:rPr sz="1950" b="0">
-                <a:solidFill>
-                  <a:srgbClr val="152D43"/>
-                </a:solidFill>
-                <a:latin typeface="Arial"/>
-                <a:ea typeface="Arial"/>
-                <a:cs typeface="Arial"/>
-              </a:rPr>
-              <a:t>CUDA 11.4, unlocked clocks</a:t>
-            </a:r>
-          </a:p>
-          <a:p xmlns:a="http://schemas.openxmlformats.org/drawingml/2006/main">
-            <a:r>
-              <a:rPr sz="1950" b="0">
-                <a:solidFill>
-                  <a:srgbClr val="152D43"/>
-                </a:solidFill>
-                <a:latin typeface="Arial"/>
-                <a:ea typeface="Arial"/>
-                <a:cs typeface="Arial"/>
-              </a:rPr>
-              <a:t>3 warmups + 5 timed runs/frame</a:t>
-            </a:r>
-          </a:p>
-          <a:p xmlns:a="http://schemas.openxmlformats.org/drawingml/2006/main">
-            <a:r>
-              <a:rPr sz="1950" b="0">
-                <a:solidFill>
-                  <a:srgbClr val="152D43"/>
-                </a:solidFill>
-                <a:latin typeface="Arial"/>
-                <a:ea typeface="Arial"/>
-                <a:cs typeface="Arial"/>
-              </a:rPr>
-              <a:t>One quality output/config/frame</a:t>
+              <a:t>Slides 6–7 add one fixed 2 ms/frame decode budget; this is not measured end-to-end.</a:t>
             </a:r>
           </a:p>
         </p:txBody>
@@ -7956,78 +7914,7 @@
           <p:cNvPr id="7" name="">
             <a:extLst xmlns:a="http://schemas.openxmlformats.org/drawingml/2006/main">
               <a:ext uri="{FF2B5EF4-FFF2-40B4-BE49-F238E27FC236}">
-                <a16:creationId xmlns:a16="http://schemas.microsoft.com/office/drawing/2014/main" id="{E0F6A439-6874-40AD-AE5B-893F24596A05}"/>
-              </a:ext>
-            </a:extLst>
-          </p:cNvPr>
-          <p:cNvSpPr>
-            <a:spLocks xmlns:a="http://schemas.openxmlformats.org/drawingml/2006/main" noGrp="1"/>
-          </p:cNvSpPr>
-          <p:nvPr/>
-        </p:nvSpPr>
-        <p:spPr>
-          <a:xfrm xmlns:a="http://schemas.openxmlformats.org/drawingml/2006/main">
-            <a:off x="609600" y="4905375"/>
-            <a:ext cx="10810875" cy="942975"/>
-          </a:xfrm>
-          <a:prstGeom xmlns:a="http://schemas.openxmlformats.org/drawingml/2006/main" prst="rect">
-            <a:avLst/>
-          </a:prstGeom>
-          <a:noFill xmlns:a="http://schemas.openxmlformats.org/drawingml/2006/main"/>
-          <a:ln xmlns:a="http://schemas.openxmlformats.org/drawingml/2006/main" w="0">
-            <a:noFill/>
-          </a:ln>
-        </p:spPr>
-        <p:txBody>
-          <a:bodyPr xmlns:a="http://schemas.openxmlformats.org/drawingml/2006/main" lIns="0" tIns="0" rIns="0" bIns="0"/>
-          <a:lstStyle xmlns:a="http://schemas.openxmlformats.org/drawingml/2006/main"/>
-          <a:p xmlns:a="http://schemas.openxmlformats.org/drawingml/2006/main">
-            <a:r>
-              <a:rPr sz="1800" b="0">
-                <a:solidFill>
-                  <a:srgbClr val="152D43"/>
-                </a:solidFill>
-                <a:latin typeface="Arial"/>
-                <a:ea typeface="Arial"/>
-                <a:cs typeface="Arial"/>
-              </a:rPr>
-              <a:t>Resident: GPU-resident inputs, reconstruction, upsampling, and blending</a:t>
-            </a:r>
-          </a:p>
-          <a:p xmlns:a="http://schemas.openxmlformats.org/drawingml/2006/main">
-            <a:r>
-              <a:rPr sz="1800" b="0">
-                <a:solidFill>
-                  <a:srgbClr val="152D43"/>
-                </a:solidFill>
-                <a:latin typeface="Arial"/>
-                <a:ea typeface="Arial"/>
-                <a:cs typeface="Arial"/>
-              </a:rPr>
-              <a:t>Stream: also includes input upload and output download</a:t>
-            </a:r>
-          </a:p>
-          <a:p xmlns:a="http://schemas.openxmlformats.org/drawingml/2006/main">
-            <a:r>
-              <a:rPr sz="1800" b="0">
-                <a:solidFill>
-                  <a:srgbClr val="152D43"/>
-                </a:solidFill>
-                <a:latin typeface="Arial"/>
-                <a:ea typeface="Arial"/>
-                <a:cs typeface="Arial"/>
-              </a:rPr>
-              <a:t>Slides 6–7 add a fixed 2 ms/frame decode budget; not measured end-to-end.</a:t>
-            </a:r>
-          </a:p>
-        </p:txBody>
-      </p:sp>
-      <p:sp>
-        <p:nvSpPr>
-          <p:cNvPr id="8" name="">
-            <a:extLst xmlns:a="http://schemas.openxmlformats.org/drawingml/2006/main">
-              <a:ext uri="{FF2B5EF4-FFF2-40B4-BE49-F238E27FC236}">
-                <a16:creationId xmlns:a16="http://schemas.microsoft.com/office/drawing/2014/main" id="{21EBE73C-E127-46FA-A13D-8FF497D6E203}"/>
+                <a16:creationId xmlns:a16="http://schemas.microsoft.com/office/drawing/2014/main" id="{A276807B-F1E4-43B9-9A84-8836807C2ED8}"/>
               </a:ext>
             </a:extLst>
           </p:cNvPr>
@@ -8062,7 +7949,7 @@
                 <a:ea typeface="Arial"/>
                 <a:cs typeface="Arial"/>
               </a:rPr>
-              <a:t>Excludes backward scenes, even frames, and unsupported tail frames. Timing excludes I/O, allocation, network, decoding, and display.</a:t>
+              <a:t>Timing and quality are from separate experiments. No new quality equivalence or jointly measured trade-off is claimed.</a:t>
             </a:r>
           </a:p>
         </p:txBody>
@@ -8070,7 +7957,7 @@
     </p:spTree>
     <p:extLst>
       <p:ext uri="{BB962C8B-B14F-4D97-AF65-F5344CB8AC3E}">
-        <p14:creationId xmlns:p14="http://schemas.microsoft.com/office/powerpoint/2010/main" val="996184294"/>
+        <p14:creationId xmlns:p14="http://schemas.microsoft.com/office/powerpoint/2010/main" val="1407810125"/>
       </p:ext>
     </p:extLst>
   </p:cSld>
@@ -8101,7 +7988,7 @@
           <p:cNvPr id="12" name="">
             <a:extLst xmlns:a="http://schemas.openxmlformats.org/drawingml/2006/main">
               <a:ext uri="{FF2B5EF4-FFF2-40B4-BE49-F238E27FC236}">
-                <a16:creationId xmlns:a16="http://schemas.microsoft.com/office/drawing/2014/main" id="{40716465-5DFD-43FD-956D-AC3E27B7DC9E}"/>
+                <a16:creationId xmlns:a16="http://schemas.microsoft.com/office/drawing/2014/main" id="{574119EA-2228-4ED6-8283-648A928414D9}"/>
               </a:ext>
             </a:extLst>
           </p:cNvPr>
@@ -8136,7 +8023,7 @@
                 <a:ea typeface="Arial"/>
                 <a:cs typeface="Arial"/>
               </a:rPr>
-              <a:t>Decode budget + reconstruction across FOV levels</a:t>
+              <a:t>30W CUDA C++: decode budget + reconstruction</a:t>
             </a:r>
           </a:p>
         </p:txBody>
@@ -8146,7 +8033,7 @@
           <p:cNvPr id="2" name="">
             <a:extLst xmlns:a="http://schemas.openxmlformats.org/drawingml/2006/main">
               <a:ext uri="{FF2B5EF4-FFF2-40B4-BE49-F238E27FC236}">
-                <a16:creationId xmlns:a16="http://schemas.microsoft.com/office/drawing/2014/main" id="{2ED23C7B-1B1A-4C4B-8BA2-AE338F10B291}"/>
+                <a16:creationId xmlns:a16="http://schemas.microsoft.com/office/drawing/2014/main" id="{19A0A1B8-59B0-4AA8-9822-2011A185E765}"/>
               </a:ext>
             </a:extLst>
           </p:cNvPr>
@@ -8176,7 +8063,7 @@
           <p:cNvPr id="3" name="">
             <a:extLst xmlns:a="http://schemas.openxmlformats.org/drawingml/2006/main">
               <a:ext uri="{FF2B5EF4-FFF2-40B4-BE49-F238E27FC236}">
-                <a16:creationId xmlns:a16="http://schemas.microsoft.com/office/drawing/2014/main" id="{3D255288-C5BD-4756-A0E9-326AA8AD0C15}"/>
+                <a16:creationId xmlns:a16="http://schemas.microsoft.com/office/drawing/2014/main" id="{2865A3A5-0A9D-4FF9-9788-719D611F0E18}"/>
               </a:ext>
             </a:extLst>
           </p:cNvPr>
@@ -8221,7 +8108,7 @@
           <p:cNvPr id="4" name="Chart">
             <a:extLst xmlns:a="http://schemas.openxmlformats.org/drawingml/2006/main">
               <a:ext uri="{FF2B5EF4-FFF2-40B4-BE49-F238E27FC236}">
-                <a16:creationId xmlns:a16="http://schemas.microsoft.com/office/drawing/2014/main" id="{A734A4D1-0F26-4149-B21C-D59BCB964061}"/>
+                <a16:creationId xmlns:a16="http://schemas.microsoft.com/office/drawing/2014/main" id="{E621F1A7-35AB-4CE2-B7EE-9A2C1624DF71}"/>
               </a:ext>
             </a:extLst>
           </p:cNvPr>
@@ -8229,12 +8116,12 @@
           <p:nvPr/>
         </p:nvGraphicFramePr>
         <p:xfrm>
-          <a:off xmlns:a="http://schemas.openxmlformats.org/drawingml/2006/main" x="609600" y="1676400"/>
-          <a:ext xmlns:a="http://schemas.openxmlformats.org/drawingml/2006/main" cx="7715250" cy="3905250"/>
+          <a:off xmlns:a="http://schemas.openxmlformats.org/drawingml/2006/main" x="609600" y="1828800"/>
+          <a:ext xmlns:a="http://schemas.openxmlformats.org/drawingml/2006/main" cx="7715250" cy="3752850"/>
         </p:xfrm>
         <a:graphic xmlns:a="http://schemas.openxmlformats.org/drawingml/2006/main">
           <a:graphicData uri="http://schemas.openxmlformats.org/drawingml/2006/chart">
-            <c:chart xmlns:r="http://schemas.openxmlformats.org/officeDocument/2006/relationships" xmlns:c="http://schemas.openxmlformats.org/drawingml/2006/chart" r:id="R34dd640846da483d"/>
+            <c:chart xmlns:r="http://schemas.openxmlformats.org/officeDocument/2006/relationships" xmlns:c="http://schemas.openxmlformats.org/drawingml/2006/chart" r:id="R50ab8559b0a64bd2"/>
           </a:graphicData>
         </a:graphic>
       </p:graphicFrame>
@@ -8243,7 +8130,7 @@
           <p:cNvPr id="5" name="">
             <a:extLst xmlns:a="http://schemas.openxmlformats.org/drawingml/2006/main">
               <a:ext uri="{FF2B5EF4-FFF2-40B4-BE49-F238E27FC236}">
-                <a16:creationId xmlns:a16="http://schemas.microsoft.com/office/drawing/2014/main" id="{D83CB0E8-0CA3-4E7A-BB44-7A0CAF4754B0}"/>
+                <a16:creationId xmlns:a16="http://schemas.microsoft.com/office/drawing/2014/main" id="{2DDA2F4B-09E7-4C10-9C42-E91AE1E4632F}"/>
               </a:ext>
             </a:extLst>
           </p:cNvPr>
@@ -8254,7 +8141,52 @@
         </p:nvSpPr>
         <p:spPr>
           <a:xfrm xmlns:a="http://schemas.openxmlformats.org/drawingml/2006/main">
-            <a:off x="8858250" y="1924050"/>
+            <a:off x="609600" y="1381125"/>
+            <a:ext cx="10906125" cy="333375"/>
+          </a:xfrm>
+          <a:prstGeom xmlns:a="http://schemas.openxmlformats.org/drawingml/2006/main" prst="rect">
+            <a:avLst/>
+          </a:prstGeom>
+          <a:noFill xmlns:a="http://schemas.openxmlformats.org/drawingml/2006/main"/>
+          <a:ln xmlns:a="http://schemas.openxmlformats.org/drawingml/2006/main" w="0">
+            <a:noFill/>
+          </a:ln>
+        </p:spPr>
+        <p:txBody>
+          <a:bodyPr xmlns:a="http://schemas.openxmlformats.org/drawingml/2006/main" lIns="0" tIns="0" rIns="0" bIns="0"/>
+          <a:lstStyle xmlns:a="http://schemas.openxmlformats.org/drawingml/2006/main"/>
+          <a:p xmlns:a="http://schemas.openxmlformats.org/drawingml/2006/main">
+            <a:r>
+              <a:rPr sz="1875" b="1">
+                <a:solidFill>
+                  <a:srgbClr val="086B93"/>
+                </a:solidFill>
+                <a:latin typeface="Arial"/>
+                <a:ea typeface="Arial"/>
+                <a:cs typeface="Arial"/>
+              </a:rPr>
+              <a:t>4 workloads × frame 39; 100 repetitions/path. GPU timeline, not wall time.</a:t>
+            </a:r>
+          </a:p>
+        </p:txBody>
+      </p:sp>
+      <p:sp>
+        <p:nvSpPr>
+          <p:cNvPr id="6" name="">
+            <a:extLst xmlns:a="http://schemas.openxmlformats.org/drawingml/2006/main">
+              <a:ext uri="{FF2B5EF4-FFF2-40B4-BE49-F238E27FC236}">
+                <a16:creationId xmlns:a16="http://schemas.microsoft.com/office/drawing/2014/main" id="{C0C809F9-13D3-411E-89D3-64A96C88D600}"/>
+              </a:ext>
+            </a:extLst>
+          </p:cNvPr>
+          <p:cNvSpPr>
+            <a:spLocks xmlns:a="http://schemas.openxmlformats.org/drawingml/2006/main" noGrp="1"/>
+          </p:cNvSpPr>
+          <p:nvPr/>
+        </p:nvSpPr>
+        <p:spPr>
+          <a:xfrm xmlns:a="http://schemas.openxmlformats.org/drawingml/2006/main">
+            <a:off x="8858250" y="2028825"/>
             <a:ext cx="2667000" cy="476250"/>
           </a:xfrm>
           <a:prstGeom xmlns:a="http://schemas.openxmlformats.org/drawingml/2006/main" prst="rect">
@@ -8285,10 +8217,10 @@
       </p:sp>
       <p:sp>
         <p:nvSpPr>
-          <p:cNvPr id="6" name="">
-            <a:extLst xmlns:a="http://schemas.openxmlformats.org/drawingml/2006/main">
-              <a:ext uri="{FF2B5EF4-FFF2-40B4-BE49-F238E27FC236}">
-                <a16:creationId xmlns:a16="http://schemas.microsoft.com/office/drawing/2014/main" id="{EE168E92-924B-476D-A8E1-BC0FC2705FA1}"/>
+          <p:cNvPr id="7" name="">
+            <a:extLst xmlns:a="http://schemas.openxmlformats.org/drawingml/2006/main">
+              <a:ext uri="{FF2B5EF4-FFF2-40B4-BE49-F238E27FC236}">
+                <a16:creationId xmlns:a16="http://schemas.microsoft.com/office/drawing/2014/main" id="{D00AA083-073B-4DE1-B673-55873BF297C0}"/>
               </a:ext>
             </a:extLst>
           </p:cNvPr>
@@ -8299,7 +8231,7 @@
         </p:nvSpPr>
         <p:spPr>
           <a:xfrm xmlns:a="http://schemas.openxmlformats.org/drawingml/2006/main">
-            <a:off x="8858250" y="2619375"/>
+            <a:off x="8858250" y="2695575"/>
             <a:ext cx="2857500" cy="619125"/>
           </a:xfrm>
           <a:prstGeom xmlns:a="http://schemas.openxmlformats.org/drawingml/2006/main" prst="rect">
@@ -8323,17 +8255,17 @@
                 <a:ea typeface="Arial"/>
                 <a:cs typeface="Arial"/>
               </a:rPr>
-              <a:t>6.770 ms</a:t>
+              <a:t>5.462 ms</a:t>
             </a:r>
           </a:p>
         </p:txBody>
       </p:sp>
       <p:sp>
         <p:nvSpPr>
-          <p:cNvPr id="7" name="">
-            <a:extLst xmlns:a="http://schemas.openxmlformats.org/drawingml/2006/main">
-              <a:ext uri="{FF2B5EF4-FFF2-40B4-BE49-F238E27FC236}">
-                <a16:creationId xmlns:a16="http://schemas.microsoft.com/office/drawing/2014/main" id="{8740F7CB-83C9-4C3B-853F-3A10B3F396E8}"/>
+          <p:cNvPr id="8" name="">
+            <a:extLst xmlns:a="http://schemas.openxmlformats.org/drawingml/2006/main">
+              <a:ext uri="{FF2B5EF4-FFF2-40B4-BE49-F238E27FC236}">
+                <a16:creationId xmlns:a16="http://schemas.microsoft.com/office/drawing/2014/main" id="{C5C18691-F595-4DC0-B750-4289900CCC51}"/>
               </a:ext>
             </a:extLst>
           </p:cNvPr>
@@ -8344,7 +8276,97 @@
         </p:nvSpPr>
         <p:spPr>
           <a:xfrm xmlns:a="http://schemas.openxmlformats.org/drawingml/2006/main">
-            <a:off x="8858250" y="3305175"/>
+            <a:off x="8620125" y="3352800"/>
+            <a:ext cx="2952750" cy="381000"/>
+          </a:xfrm>
+          <a:prstGeom xmlns:a="http://schemas.openxmlformats.org/drawingml/2006/main" prst="rect">
+            <a:avLst/>
+          </a:prstGeom>
+          <a:noFill xmlns:a="http://schemas.openxmlformats.org/drawingml/2006/main"/>
+          <a:ln xmlns:a="http://schemas.openxmlformats.org/drawingml/2006/main" w="0">
+            <a:noFill/>
+          </a:ln>
+        </p:spPr>
+        <p:txBody>
+          <a:bodyPr xmlns:a="http://schemas.openxmlformats.org/drawingml/2006/main" lIns="0" tIns="0" rIns="0" bIns="0"/>
+          <a:lstStyle xmlns:a="http://schemas.openxmlformats.org/drawingml/2006/main"/>
+          <a:p xmlns:a="http://schemas.openxmlformats.org/drawingml/2006/main">
+            <a:r>
+              <a:rPr sz="1725" b="0">
+                <a:solidFill>
+                  <a:srgbClr val="536675"/>
+                </a:solidFill>
+                <a:latin typeface="Arial"/>
+                <a:ea typeface="Arial"/>
+                <a:cs typeface="Arial"/>
+              </a:rPr>
+              <a:t>decode + reconstruction</a:t>
+            </a:r>
+          </a:p>
+        </p:txBody>
+      </p:sp>
+      <p:sp>
+        <p:nvSpPr>
+          <p:cNvPr id="9" name="">
+            <a:extLst xmlns:a="http://schemas.openxmlformats.org/drawingml/2006/main">
+              <a:ext uri="{FF2B5EF4-FFF2-40B4-BE49-F238E27FC236}">
+                <a16:creationId xmlns:a16="http://schemas.microsoft.com/office/drawing/2014/main" id="{B8D40134-A836-4C82-A068-06D41A87C6C9}"/>
+              </a:ext>
+            </a:extLst>
+          </p:cNvPr>
+          <p:cNvSpPr>
+            <a:spLocks xmlns:a="http://schemas.openxmlformats.org/drawingml/2006/main" noGrp="1"/>
+          </p:cNvSpPr>
+          <p:nvPr/>
+        </p:nvSpPr>
+        <p:spPr>
+          <a:xfrm xmlns:a="http://schemas.openxmlformats.org/drawingml/2006/main">
+            <a:off x="8858250" y="4019550"/>
+            <a:ext cx="2667000" cy="590550"/>
+          </a:xfrm>
+          <a:prstGeom xmlns:a="http://schemas.openxmlformats.org/drawingml/2006/main" prst="rect">
+            <a:avLst/>
+          </a:prstGeom>
+          <a:noFill xmlns:a="http://schemas.openxmlformats.org/drawingml/2006/main"/>
+          <a:ln xmlns:a="http://schemas.openxmlformats.org/drawingml/2006/main" w="0">
+            <a:noFill/>
+          </a:ln>
+        </p:spPr>
+        <p:txBody>
+          <a:bodyPr xmlns:a="http://schemas.openxmlformats.org/drawingml/2006/main" lIns="0" tIns="0" rIns="0" bIns="0"/>
+          <a:lstStyle xmlns:a="http://schemas.openxmlformats.org/drawingml/2006/main"/>
+          <a:p xmlns:a="http://schemas.openxmlformats.org/drawingml/2006/main">
+            <a:r>
+              <a:rPr sz="3450" b="1">
+                <a:solidFill>
+                  <a:srgbClr val="148B83"/>
+                </a:solidFill>
+                <a:latin typeface="Arial"/>
+                <a:ea typeface="Arial"/>
+                <a:cs typeface="Arial"/>
+              </a:rPr>
+              <a:t>1.83×</a:t>
+            </a:r>
+          </a:p>
+        </p:txBody>
+      </p:sp>
+      <p:sp>
+        <p:nvSpPr>
+          <p:cNvPr id="10" name="">
+            <a:extLst xmlns:a="http://schemas.openxmlformats.org/drawingml/2006/main">
+              <a:ext uri="{FF2B5EF4-FFF2-40B4-BE49-F238E27FC236}">
+                <a16:creationId xmlns:a16="http://schemas.microsoft.com/office/drawing/2014/main" id="{27525BB6-B97D-47EE-88BC-B323EA269B18}"/>
+              </a:ext>
+            </a:extLst>
+          </p:cNvPr>
+          <p:cNvSpPr>
+            <a:spLocks xmlns:a="http://schemas.openxmlformats.org/drawingml/2006/main" noGrp="1"/>
+          </p:cNvSpPr>
+          <p:nvPr/>
+        </p:nvSpPr>
+        <p:spPr>
+          <a:xfrm xmlns:a="http://schemas.openxmlformats.org/drawingml/2006/main">
+            <a:off x="8858250" y="4667250"/>
             <a:ext cx="2667000" cy="381000"/>
           </a:xfrm>
           <a:prstGeom xmlns:a="http://schemas.openxmlformats.org/drawingml/2006/main" prst="rect">
@@ -8368,152 +8390,17 @@
                 <a:ea typeface="Arial"/>
                 <a:cs typeface="Arial"/>
               </a:rPr>
-              <a:t>decode + resident</a:t>
+              <a:t>versus Full + decode</a:t>
             </a:r>
           </a:p>
         </p:txBody>
       </p:sp>
       <p:sp>
         <p:nvSpPr>
-          <p:cNvPr id="8" name="">
-            <a:extLst xmlns:a="http://schemas.openxmlformats.org/drawingml/2006/main">
-              <a:ext uri="{FF2B5EF4-FFF2-40B4-BE49-F238E27FC236}">
-                <a16:creationId xmlns:a16="http://schemas.microsoft.com/office/drawing/2014/main" id="{50EA0787-17AF-4B40-8C71-1787783BF23E}"/>
-              </a:ext>
-            </a:extLst>
-          </p:cNvPr>
-          <p:cNvSpPr>
-            <a:spLocks xmlns:a="http://schemas.openxmlformats.org/drawingml/2006/main" noGrp="1"/>
-          </p:cNvSpPr>
-          <p:nvPr/>
-        </p:nvSpPr>
-        <p:spPr>
-          <a:xfrm xmlns:a="http://schemas.openxmlformats.org/drawingml/2006/main">
-            <a:off x="8858250" y="3971925"/>
-            <a:ext cx="2667000" cy="590550"/>
-          </a:xfrm>
-          <a:prstGeom xmlns:a="http://schemas.openxmlformats.org/drawingml/2006/main" prst="rect">
-            <a:avLst/>
-          </a:prstGeom>
-          <a:noFill xmlns:a="http://schemas.openxmlformats.org/drawingml/2006/main"/>
-          <a:ln xmlns:a="http://schemas.openxmlformats.org/drawingml/2006/main" w="0">
-            <a:noFill/>
-          </a:ln>
-        </p:spPr>
-        <p:txBody>
-          <a:bodyPr xmlns:a="http://schemas.openxmlformats.org/drawingml/2006/main" lIns="0" tIns="0" rIns="0" bIns="0"/>
-          <a:lstStyle xmlns:a="http://schemas.openxmlformats.org/drawingml/2006/main"/>
-          <a:p xmlns:a="http://schemas.openxmlformats.org/drawingml/2006/main">
-            <a:r>
-              <a:rPr sz="3450" b="1">
-                <a:solidFill>
-                  <a:srgbClr val="148B83"/>
-                </a:solidFill>
-                <a:latin typeface="Arial"/>
-                <a:ea typeface="Arial"/>
-                <a:cs typeface="Arial"/>
-              </a:rPr>
-              <a:t>1.92×</a:t>
-            </a:r>
-          </a:p>
-        </p:txBody>
-      </p:sp>
-      <p:sp>
-        <p:nvSpPr>
-          <p:cNvPr id="9" name="">
-            <a:extLst xmlns:a="http://schemas.openxmlformats.org/drawingml/2006/main">
-              <a:ext uri="{FF2B5EF4-FFF2-40B4-BE49-F238E27FC236}">
-                <a16:creationId xmlns:a16="http://schemas.microsoft.com/office/drawing/2014/main" id="{64AF9CED-3C51-4A88-B080-EBED15F200F2}"/>
-              </a:ext>
-            </a:extLst>
-          </p:cNvPr>
-          <p:cNvSpPr>
-            <a:spLocks xmlns:a="http://schemas.openxmlformats.org/drawingml/2006/main" noGrp="1"/>
-          </p:cNvSpPr>
-          <p:nvPr/>
-        </p:nvSpPr>
-        <p:spPr>
-          <a:xfrm xmlns:a="http://schemas.openxmlformats.org/drawingml/2006/main">
-            <a:off x="8858250" y="4619625"/>
-            <a:ext cx="2667000" cy="381000"/>
-          </a:xfrm>
-          <a:prstGeom xmlns:a="http://schemas.openxmlformats.org/drawingml/2006/main" prst="rect">
-            <a:avLst/>
-          </a:prstGeom>
-          <a:noFill xmlns:a="http://schemas.openxmlformats.org/drawingml/2006/main"/>
-          <a:ln xmlns:a="http://schemas.openxmlformats.org/drawingml/2006/main" w="0">
-            <a:noFill/>
-          </a:ln>
-        </p:spPr>
-        <p:txBody>
-          <a:bodyPr xmlns:a="http://schemas.openxmlformats.org/drawingml/2006/main" lIns="0" tIns="0" rIns="0" bIns="0"/>
-          <a:lstStyle xmlns:a="http://schemas.openxmlformats.org/drawingml/2006/main"/>
-          <a:p xmlns:a="http://schemas.openxmlformats.org/drawingml/2006/main">
-            <a:r>
-              <a:rPr sz="1875" b="0">
-                <a:solidFill>
-                  <a:srgbClr val="536675"/>
-                </a:solidFill>
-                <a:latin typeface="Arial"/>
-                <a:ea typeface="Arial"/>
-                <a:cs typeface="Arial"/>
-              </a:rPr>
-              <a:t>versus full + decode</a:t>
-            </a:r>
-          </a:p>
-        </p:txBody>
-      </p:sp>
-      <p:sp>
-        <p:nvSpPr>
-          <p:cNvPr id="10" name="">
-            <a:extLst xmlns:a="http://schemas.openxmlformats.org/drawingml/2006/main">
-              <a:ext uri="{FF2B5EF4-FFF2-40B4-BE49-F238E27FC236}">
-                <a16:creationId xmlns:a16="http://schemas.microsoft.com/office/drawing/2014/main" id="{314273A1-9CC8-4371-84B0-D3CCD51894E9}"/>
-              </a:ext>
-            </a:extLst>
-          </p:cNvPr>
-          <p:cNvSpPr>
-            <a:spLocks xmlns:a="http://schemas.openxmlformats.org/drawingml/2006/main" noGrp="1"/>
-          </p:cNvSpPr>
-          <p:nvPr/>
-        </p:nvSpPr>
-        <p:spPr>
-          <a:xfrm xmlns:a="http://schemas.openxmlformats.org/drawingml/2006/main">
-            <a:off x="609600" y="1381125"/>
-            <a:ext cx="10906125" cy="295275"/>
-          </a:xfrm>
-          <a:prstGeom xmlns:a="http://schemas.openxmlformats.org/drawingml/2006/main" prst="rect">
-            <a:avLst/>
-          </a:prstGeom>
-          <a:noFill xmlns:a="http://schemas.openxmlformats.org/drawingml/2006/main"/>
-          <a:ln xmlns:a="http://schemas.openxmlformats.org/drawingml/2006/main" w="0">
-            <a:noFill/>
-          </a:ln>
-        </p:spPr>
-        <p:txBody>
-          <a:bodyPr xmlns:a="http://schemas.openxmlformats.org/drawingml/2006/main" lIns="0" tIns="0" rIns="0" bIns="0"/>
-          <a:lstStyle xmlns:a="http://schemas.openxmlformats.org/drawingml/2006/main"/>
-          <a:p xmlns:a="http://schemas.openxmlformats.org/drawingml/2006/main">
-            <a:r>
-              <a:rPr sz="1725" b="1">
-                <a:solidFill>
-                  <a:srgbClr val="086B93"/>
-                </a:solidFill>
-                <a:latin typeface="Arial"/>
-                <a:ea typeface="Arial"/>
-                <a:cs typeface="Arial"/>
-              </a:rPr>
-              <a:t>Fixed decode budget: 2 ms/frame + measured reconstruction; stream also includes copies.</a:t>
-            </a:r>
-          </a:p>
-        </p:txBody>
-      </p:sp>
-      <p:sp>
-        <p:nvSpPr>
           <p:cNvPr id="11" name="">
             <a:extLst xmlns:a="http://schemas.openxmlformats.org/drawingml/2006/main">
               <a:ext uri="{FF2B5EF4-FFF2-40B4-BE49-F238E27FC236}">
-                <a16:creationId xmlns:a16="http://schemas.microsoft.com/office/drawing/2014/main" id="{462B419C-F7DA-422F-A8D9-5A5BE585F39F}"/>
+                <a16:creationId xmlns:a16="http://schemas.microsoft.com/office/drawing/2014/main" id="{F4B321A8-C7D4-43A3-86BE-868ECA677C0B}"/>
               </a:ext>
             </a:extLst>
           </p:cNvPr>
@@ -8548,7 +8435,7 @@
                 <a:ea typeface="Arial"/>
                 <a:cs typeface="Arial"/>
               </a:rPr>
-              <a:t>Derived budget, not measured end-to-end. Fast resampling enabled; gains also include upsampling changes. No optimal-baseline claim.</a:t>
+              <a:t>Derived budget, not measured end-to-end. Copies excluded. Savings include reduced clearing work; no optimal-Full claim.</a:t>
             </a:r>
           </a:p>
         </p:txBody>
@@ -8556,7 +8443,7 @@
     </p:spTree>
     <p:extLst>
       <p:ext uri="{BB962C8B-B14F-4D97-AF65-F5344CB8AC3E}">
-        <p14:creationId xmlns:p14="http://schemas.microsoft.com/office/powerpoint/2010/main" val="1781705979"/>
+        <p14:creationId xmlns:p14="http://schemas.microsoft.com/office/powerpoint/2010/main" val="1158442540"/>
       </p:ext>
     </p:extLst>
   </p:cSld>
@@ -8587,7 +8474,7 @@
           <p:cNvPr id="8" name="">
             <a:extLst xmlns:a="http://schemas.openxmlformats.org/drawingml/2006/main">
               <a:ext uri="{FF2B5EF4-FFF2-40B4-BE49-F238E27FC236}">
-                <a16:creationId xmlns:a16="http://schemas.microsoft.com/office/drawing/2014/main" id="{80482416-2AF0-4E75-B599-E070C53FC053}"/>
+                <a16:creationId xmlns:a16="http://schemas.microsoft.com/office/drawing/2014/main" id="{D0C93BB5-639A-4E9F-9EF7-5155D388F81D}"/>
               </a:ext>
             </a:extLst>
           </p:cNvPr>
@@ -8622,7 +8509,7 @@
                 <a:ea typeface="Arial"/>
                 <a:cs typeface="Arial"/>
               </a:rPr>
-              <a:t>Quality–latency trade-off</a:t>
+              <a:t>Quality and timing across region sizes</a:t>
             </a:r>
           </a:p>
         </p:txBody>
@@ -8632,7 +8519,7 @@
           <p:cNvPr id="2" name="">
             <a:extLst xmlns:a="http://schemas.openxmlformats.org/drawingml/2006/main">
               <a:ext uri="{FF2B5EF4-FFF2-40B4-BE49-F238E27FC236}">
-                <a16:creationId xmlns:a16="http://schemas.microsoft.com/office/drawing/2014/main" id="{3140D622-621A-4EC6-A1A4-F6DB096B2AF0}"/>
+                <a16:creationId xmlns:a16="http://schemas.microsoft.com/office/drawing/2014/main" id="{B42CA62D-FF0C-4A0D-981C-818DC1703605}"/>
               </a:ext>
             </a:extLst>
           </p:cNvPr>
@@ -8662,7 +8549,7 @@
           <p:cNvPr id="3" name="">
             <a:extLst xmlns:a="http://schemas.openxmlformats.org/drawingml/2006/main">
               <a:ext uri="{FF2B5EF4-FFF2-40B4-BE49-F238E27FC236}">
-                <a16:creationId xmlns:a16="http://schemas.microsoft.com/office/drawing/2014/main" id="{EF561C32-3A6F-45FF-8BC0-D7E3AAA04247}"/>
+                <a16:creationId xmlns:a16="http://schemas.microsoft.com/office/drawing/2014/main" id="{993AE4C4-831A-4477-84B4-884783FBB323}"/>
               </a:ext>
             </a:extLst>
           </p:cNvPr>
@@ -8707,7 +8594,7 @@
           <p:cNvPr id="4" name="">
             <a:extLst xmlns:a="http://schemas.openxmlformats.org/drawingml/2006/main">
               <a:ext uri="{FF2B5EF4-FFF2-40B4-BE49-F238E27FC236}">
-                <a16:creationId xmlns:a16="http://schemas.microsoft.com/office/drawing/2014/main" id="{7251B9C5-D091-4C6C-8D97-8EC47B5578F9}"/>
+                <a16:creationId xmlns:a16="http://schemas.microsoft.com/office/drawing/2014/main" id="{37330260-036B-41E2-870C-ACCC5477FBCA}"/>
               </a:ext>
             </a:extLst>
           </p:cNvPr>
@@ -8961,7 +8848,7 @@
                           <a:ea typeface="Arial"/>
                           <a:cs typeface="Arial"/>
                         </a:rPr>
-                        <a:t>6.562 ms</a:t>
+                        <a:t>5.248 ms</a:t>
                       </a:r>
                     </a:p>
                   </a:txBody>
@@ -9113,7 +9000,7 @@
                           <a:ea typeface="Arial"/>
                           <a:cs typeface="Arial"/>
                         </a:rPr>
-                        <a:t>6.770 ms</a:t>
+                        <a:t>5.462 ms</a:t>
                       </a:r>
                     </a:p>
                   </a:txBody>
@@ -9265,7 +9152,7 @@
                           <a:ea typeface="Arial"/>
                           <a:cs typeface="Arial"/>
                         </a:rPr>
-                        <a:t>7.998 ms</a:t>
+                        <a:t>6.318 ms</a:t>
                       </a:r>
                     </a:p>
                   </a:txBody>
@@ -9417,7 +9304,7 @@
                           <a:ea typeface="Arial"/>
                           <a:cs typeface="Arial"/>
                         </a:rPr>
-                        <a:t>9.772 ms</a:t>
+                        <a:t>7.637 ms</a:t>
                       </a:r>
                     </a:p>
                   </a:txBody>
@@ -9569,7 +9456,7 @@
                           <a:ea typeface="Arial"/>
                           <a:cs typeface="Arial"/>
                         </a:rPr>
-                        <a:t>12.425 ms</a:t>
+                        <a:t>9.543 ms</a:t>
                       </a:r>
                     </a:p>
                   </a:txBody>
@@ -9673,7 +9560,7 @@
           <p:cNvPr id="5" name="">
             <a:extLst xmlns:a="http://schemas.openxmlformats.org/drawingml/2006/main">
               <a:ext uri="{FF2B5EF4-FFF2-40B4-BE49-F238E27FC236}">
-                <a16:creationId xmlns:a16="http://schemas.microsoft.com/office/drawing/2014/main" id="{9D79713E-FC1D-47ED-9640-BFEA73351E22}"/>
+                <a16:creationId xmlns:a16="http://schemas.microsoft.com/office/drawing/2014/main" id="{8AC007F9-DD58-463F-8146-32AD9C82D365}"/>
               </a:ext>
             </a:extLst>
           </p:cNvPr>
@@ -9718,7 +9605,7 @@
           <p:cNvPr id="6" name="">
             <a:extLst xmlns:a="http://schemas.openxmlformats.org/drawingml/2006/main">
               <a:ext uri="{FF2B5EF4-FFF2-40B4-BE49-F238E27FC236}">
-                <a16:creationId xmlns:a16="http://schemas.microsoft.com/office/drawing/2014/main" id="{A974D0D0-EB24-4086-B320-03D2D299BEB8}"/>
+                <a16:creationId xmlns:a16="http://schemas.microsoft.com/office/drawing/2014/main" id="{21008C5F-EDAD-4258-9678-28345C9F9F20}"/>
               </a:ext>
             </a:extLst>
           </p:cNvPr>
@@ -9763,7 +9650,7 @@
           <p:cNvPr id="7" name="">
             <a:extLst xmlns:a="http://schemas.openxmlformats.org/drawingml/2006/main">
               <a:ext uri="{FF2B5EF4-FFF2-40B4-BE49-F238E27FC236}">
-                <a16:creationId xmlns:a16="http://schemas.microsoft.com/office/drawing/2014/main" id="{6C4EA699-9380-4A47-92D1-775281A90AA5}"/>
+                <a16:creationId xmlns:a16="http://schemas.microsoft.com/office/drawing/2014/main" id="{8998305E-FED8-4D73-9EB1-22F36CA9C037}"/>
               </a:ext>
             </a:extLst>
           </p:cNvPr>
@@ -9798,7 +9685,7 @@
                 <a:ea typeface="Arial"/>
                 <a:cs typeface="Arial"/>
               </a:rPr>
-              <a:t>Fixed 2 ms decode budget + resident reconstruction. Stereo values derived; non-atomic writes remain. No SSIM/LPIPS.</a:t>
+              <a:t>Timing: 30W, 4 frames + fixed 2 ms decode. Quality: 15W, 1068 frames. Separate experiments, not jointly measured.</a:t>
             </a:r>
           </a:p>
         </p:txBody>
@@ -9806,7 +9693,7 @@
     </p:spTree>
     <p:extLst>
       <p:ext uri="{BB962C8B-B14F-4D97-AF65-F5344CB8AC3E}">
-        <p14:creationId xmlns:p14="http://schemas.microsoft.com/office/powerpoint/2010/main" val="1193876524"/>
+        <p14:creationId xmlns:p14="http://schemas.microsoft.com/office/powerpoint/2010/main" val="31864622"/>
       </p:ext>
     </p:extLst>
   </p:cSld>
@@ -9834,10 +9721,10 @@
       </p:grpSpPr>
       <p:sp>
         <p:nvSpPr>
-          <p:cNvPr id="8" name="">
-            <a:extLst xmlns:a="http://schemas.openxmlformats.org/drawingml/2006/main">
-              <a:ext uri="{FF2B5EF4-FFF2-40B4-BE49-F238E27FC236}">
-                <a16:creationId xmlns:a16="http://schemas.microsoft.com/office/drawing/2014/main" id="{C55E6F62-EBB3-43F0-8ED6-EB48F289846E}"/>
+          <p:cNvPr id="14" name="">
+            <a:extLst xmlns:a="http://schemas.openxmlformats.org/drawingml/2006/main">
+              <a:ext uri="{FF2B5EF4-FFF2-40B4-BE49-F238E27FC236}">
+                <a16:creationId xmlns:a16="http://schemas.microsoft.com/office/drawing/2014/main" id="{BF763828-6F42-4069-879B-9DE328BB3A47}"/>
               </a:ext>
             </a:extLst>
           </p:cNvPr>
@@ -9872,7 +9759,7 @@
                 <a:ea typeface="Arial"/>
                 <a:cs typeface="Arial"/>
               </a:rPr>
-              <a:t>Numba runs on Xavier: a small-sample check</a:t>
+              <a:t>Next: measure deadline behavior under jitter</a:t>
             </a:r>
           </a:p>
         </p:txBody>
@@ -9882,7 +9769,7 @@
           <p:cNvPr id="2" name="">
             <a:extLst xmlns:a="http://schemas.openxmlformats.org/drawingml/2006/main">
               <a:ext uri="{FF2B5EF4-FFF2-40B4-BE49-F238E27FC236}">
-                <a16:creationId xmlns:a16="http://schemas.microsoft.com/office/drawing/2014/main" id="{A9F8C08C-CA05-41E5-9EB3-E1BFBCC80604}"/>
+                <a16:creationId xmlns:a16="http://schemas.microsoft.com/office/drawing/2014/main" id="{52813728-1379-4089-8896-570BFF358632}"/>
               </a:ext>
             </a:extLst>
           </p:cNvPr>
@@ -9912,7 +9799,7 @@
           <p:cNvPr id="3" name="">
             <a:extLst xmlns:a="http://schemas.openxmlformats.org/drawingml/2006/main">
               <a:ext uri="{FF2B5EF4-FFF2-40B4-BE49-F238E27FC236}">
-                <a16:creationId xmlns:a16="http://schemas.microsoft.com/office/drawing/2014/main" id="{0021250B-1562-4CBB-8C75-3A073FA567A1}"/>
+                <a16:creationId xmlns:a16="http://schemas.microsoft.com/office/drawing/2014/main" id="{658D3C62-0DE4-4F5A-9936-D41BC514882D}"/>
               </a:ext>
             </a:extLst>
           </p:cNvPr>
@@ -9952,1123 +9839,12 @@
           </a:p>
         </p:txBody>
       </p:sp>
-      <p:graphicFrame>
-        <p:nvGraphicFramePr>
+      <p:sp>
+        <p:nvSpPr>
           <p:cNvPr id="4" name="">
             <a:extLst xmlns:a="http://schemas.openxmlformats.org/drawingml/2006/main">
               <a:ext uri="{FF2B5EF4-FFF2-40B4-BE49-F238E27FC236}">
-                <a16:creationId xmlns:a16="http://schemas.microsoft.com/office/drawing/2014/main" id="{954C22D5-FAC4-4342-B681-3BE7E85E3D51}"/>
-              </a:ext>
-            </a:extLst>
-          </p:cNvPr>
-          <p:cNvGraphicFramePr/>
-          <p:nvPr/>
-        </p:nvGraphicFramePr>
-        <p:xfrm>
-          <a:off xmlns:a="http://schemas.openxmlformats.org/drawingml/2006/main" x="609600" y="1714500"/>
-          <a:ext xmlns:a="http://schemas.openxmlformats.org/drawingml/2006/main" cx="10972800" cy="2714625"/>
-        </p:xfrm>
-        <a:graphic xmlns:a="http://schemas.openxmlformats.org/drawingml/2006/main">
-          <a:graphicData uri="http://schemas.openxmlformats.org/drawingml/2006/table">
-            <a:tbl>
-              <a:tblPr/>
-              <a:tblGrid>
-                <a:gridCol w="2667000"/>
-                <a:gridCol w="2667000"/>
-                <a:gridCol w="2819400"/>
-                <a:gridCol w="2819400"/>
-              </a:tblGrid>
-              <a:tr h="542925">
-                <a:tc>
-                  <a:txBody>
-                    <a:bodyPr/>
-                    <a:lstStyle/>
-                    <a:p>
-                      <a:r>
-                        <a:rPr sz="1950" b="1">
-                          <a:solidFill>
-                            <a:srgbClr val="FFFFFF"/>
-                          </a:solidFill>
-                          <a:latin typeface="Arial"/>
-                          <a:ea typeface="Arial"/>
-                          <a:cs typeface="Arial"/>
-                        </a:rPr>
-                        <a:t>Sequence</a:t>
-                      </a:r>
-                    </a:p>
-                  </a:txBody>
-                  <a:tcPr marL="91440" marR="91440" marT="45720" marB="45720">
-                    <a:lnL w="9525">
-                      <a:solidFill>
-                        <a:srgbClr val="D7DFE5"/>
-                      </a:solidFill>
-                      <a:prstDash val="solid"/>
-                    </a:lnL>
-                    <a:lnR w="9525">
-                      <a:solidFill>
-                        <a:srgbClr val="D7DFE5"/>
-                      </a:solidFill>
-                      <a:prstDash val="solid"/>
-                    </a:lnR>
-                    <a:lnT w="9525">
-                      <a:solidFill>
-                        <a:srgbClr val="D7DFE5"/>
-                      </a:solidFill>
-                      <a:prstDash val="solid"/>
-                    </a:lnT>
-                    <a:lnB w="9525">
-                      <a:solidFill>
-                        <a:srgbClr val="D7DFE5"/>
-                      </a:solidFill>
-                      <a:prstDash val="solid"/>
-                    </a:lnB>
-                    <a:solidFill>
-                      <a:srgbClr val="152D43"/>
-                    </a:solidFill>
-                  </a:tcPr>
-                </a:tc>
-                <a:tc>
-                  <a:txBody>
-                    <a:bodyPr/>
-                    <a:lstStyle/>
-                    <a:p>
-                      <a:r>
-                        <a:rPr sz="1950" b="1">
-                          <a:solidFill>
-                            <a:srgbClr val="FFFFFF"/>
-                          </a:solidFill>
-                          <a:latin typeface="Arial"/>
-                          <a:ea typeface="Arial"/>
-                          <a:cs typeface="Arial"/>
-                        </a:rPr>
-                        <a:t>Full (ms)</a:t>
-                      </a:r>
-                    </a:p>
-                  </a:txBody>
-                  <a:tcPr marL="91440" marR="91440" marT="45720" marB="45720">
-                    <a:lnR w="9525">
-                      <a:solidFill>
-                        <a:srgbClr val="D7DFE5"/>
-                      </a:solidFill>
-                      <a:prstDash val="solid"/>
-                    </a:lnR>
-                    <a:lnT w="9525">
-                      <a:solidFill>
-                        <a:srgbClr val="D7DFE5"/>
-                      </a:solidFill>
-                      <a:prstDash val="solid"/>
-                    </a:lnT>
-                    <a:lnB w="9525">
-                      <a:solidFill>
-                        <a:srgbClr val="D7DFE5"/>
-                      </a:solidFill>
-                      <a:prstDash val="solid"/>
-                    </a:lnB>
-                    <a:solidFill>
-                      <a:srgbClr val="152D43"/>
-                    </a:solidFill>
-                  </a:tcPr>
-                </a:tc>
-                <a:tc>
-                  <a:txBody>
-                    <a:bodyPr/>
-                    <a:lstStyle/>
-                    <a:p>
-                      <a:r>
-                        <a:rPr sz="1950" b="1">
-                          <a:solidFill>
-                            <a:srgbClr val="FFFFFF"/>
-                          </a:solidFill>
-                          <a:latin typeface="Arial"/>
-                          <a:ea typeface="Arial"/>
-                          <a:cs typeface="Arial"/>
-                        </a:rPr>
-                        <a:t>Region 2.8%</a:t>
-                      </a:r>
-                    </a:p>
-                  </a:txBody>
-                  <a:tcPr marL="91440" marR="91440" marT="45720" marB="45720">
-                    <a:lnR w="9525">
-                      <a:solidFill>
-                        <a:srgbClr val="D7DFE5"/>
-                      </a:solidFill>
-                      <a:prstDash val="solid"/>
-                    </a:lnR>
-                    <a:lnT w="9525">
-                      <a:solidFill>
-                        <a:srgbClr val="D7DFE5"/>
-                      </a:solidFill>
-                      <a:prstDash val="solid"/>
-                    </a:lnT>
-                    <a:lnB w="9525">
-                      <a:solidFill>
-                        <a:srgbClr val="D7DFE5"/>
-                      </a:solidFill>
-                      <a:prstDash val="solid"/>
-                    </a:lnB>
-                    <a:solidFill>
-                      <a:srgbClr val="152D43"/>
-                    </a:solidFill>
-                  </a:tcPr>
-                </a:tc>
-                <a:tc>
-                  <a:txBody>
-                    <a:bodyPr/>
-                    <a:lstStyle/>
-                    <a:p>
-                      <a:r>
-                        <a:rPr sz="1950" b="1">
-                          <a:solidFill>
-                            <a:srgbClr val="FFFFFF"/>
-                          </a:solidFill>
-                          <a:latin typeface="Arial"/>
-                          <a:ea typeface="Arial"/>
-                          <a:cs typeface="Arial"/>
-                        </a:rPr>
-                        <a:t>Region 11.1%</a:t>
-                      </a:r>
-                    </a:p>
-                  </a:txBody>
-                  <a:tcPr marL="91440" marR="91440" marT="45720" marB="45720">
-                    <a:lnR w="9525">
-                      <a:solidFill>
-                        <a:srgbClr val="D7DFE5"/>
-                      </a:solidFill>
-                      <a:prstDash val="solid"/>
-                    </a:lnR>
-                    <a:lnT w="9525">
-                      <a:solidFill>
-                        <a:srgbClr val="D7DFE5"/>
-                      </a:solidFill>
-                      <a:prstDash val="solid"/>
-                    </a:lnT>
-                    <a:lnB w="9525">
-                      <a:solidFill>
-                        <a:srgbClr val="D7DFE5"/>
-                      </a:solidFill>
-                      <a:prstDash val="solid"/>
-                    </a:lnB>
-                    <a:solidFill>
-                      <a:srgbClr val="152D43"/>
-                    </a:solidFill>
-                  </a:tcPr>
-                </a:tc>
-              </a:tr>
-              <a:tr h="542925">
-                <a:tc>
-                  <a:txBody>
-                    <a:bodyPr/>
-                    <a:lstStyle/>
-                    <a:p>
-                      <a:r>
-                        <a:rPr sz="1950" b="0">
-                          <a:solidFill>
-                            <a:srgbClr val="152D43"/>
-                          </a:solidFill>
-                          <a:latin typeface="Arial"/>
-                          <a:ea typeface="Arial"/>
-                          <a:cs typeface="Arial"/>
-                        </a:rPr>
-                        <a:t>15_300</a:t>
-                      </a:r>
-                    </a:p>
-                  </a:txBody>
-                  <a:tcPr marL="91440" marR="91440" marT="45720" marB="45720">
-                    <a:lnL w="9525">
-                      <a:solidFill>
-                        <a:srgbClr val="D7DFE5"/>
-                      </a:solidFill>
-                      <a:prstDash val="solid"/>
-                    </a:lnL>
-                    <a:lnR w="9525">
-                      <a:solidFill>
-                        <a:srgbClr val="D7DFE5"/>
-                      </a:solidFill>
-                      <a:prstDash val="solid"/>
-                    </a:lnR>
-                    <a:lnB w="9525">
-                      <a:solidFill>
-                        <a:srgbClr val="D7DFE5"/>
-                      </a:solidFill>
-                      <a:prstDash val="solid"/>
-                    </a:lnB>
-                    <a:solidFill>
-                      <a:srgbClr val="FFFFFF"/>
-                    </a:solidFill>
-                  </a:tcPr>
-                </a:tc>
-                <a:tc>
-                  <a:txBody>
-                    <a:bodyPr/>
-                    <a:lstStyle/>
-                    <a:p>
-                      <a:r>
-                        <a:rPr sz="1950" b="0">
-                          <a:solidFill>
-                            <a:srgbClr val="152D43"/>
-                          </a:solidFill>
-                          <a:latin typeface="Arial"/>
-                          <a:ea typeface="Arial"/>
-                          <a:cs typeface="Arial"/>
-                        </a:rPr>
-                        <a:t>14.661</a:t>
-                      </a:r>
-                    </a:p>
-                  </a:txBody>
-                  <a:tcPr marL="91440" marR="91440" marT="45720" marB="45720">
-                    <a:lnR w="9525">
-                      <a:solidFill>
-                        <a:srgbClr val="D7DFE5"/>
-                      </a:solidFill>
-                      <a:prstDash val="solid"/>
-                    </a:lnR>
-                    <a:lnB w="9525">
-                      <a:solidFill>
-                        <a:srgbClr val="D7DFE5"/>
-                      </a:solidFill>
-                      <a:prstDash val="solid"/>
-                    </a:lnB>
-                    <a:solidFill>
-                      <a:srgbClr val="FFFFFF"/>
-                    </a:solidFill>
-                  </a:tcPr>
-                </a:tc>
-                <a:tc>
-                  <a:txBody>
-                    <a:bodyPr/>
-                    <a:lstStyle/>
-                    <a:p>
-                      <a:r>
-                        <a:rPr sz="1950" b="0">
-                          <a:solidFill>
-                            <a:srgbClr val="152D43"/>
-                          </a:solidFill>
-                          <a:latin typeface="Arial"/>
-                          <a:ea typeface="Arial"/>
-                          <a:cs typeface="Arial"/>
-                        </a:rPr>
-                        <a:t>8.924</a:t>
-                      </a:r>
-                    </a:p>
-                  </a:txBody>
-                  <a:tcPr marL="91440" marR="91440" marT="45720" marB="45720">
-                    <a:lnR w="9525">
-                      <a:solidFill>
-                        <a:srgbClr val="D7DFE5"/>
-                      </a:solidFill>
-                      <a:prstDash val="solid"/>
-                    </a:lnR>
-                    <a:lnB w="9525">
-                      <a:solidFill>
-                        <a:srgbClr val="D7DFE5"/>
-                      </a:solidFill>
-                      <a:prstDash val="solid"/>
-                    </a:lnB>
-                    <a:solidFill>
-                      <a:srgbClr val="FFFFFF"/>
-                    </a:solidFill>
-                  </a:tcPr>
-                </a:tc>
-                <a:tc>
-                  <a:txBody>
-                    <a:bodyPr/>
-                    <a:lstStyle/>
-                    <a:p>
-                      <a:r>
-                        <a:rPr sz="1950" b="0">
-                          <a:solidFill>
-                            <a:srgbClr val="152D43"/>
-                          </a:solidFill>
-                          <a:latin typeface="Arial"/>
-                          <a:ea typeface="Arial"/>
-                          <a:cs typeface="Arial"/>
-                        </a:rPr>
-                        <a:t>10.304</a:t>
-                      </a:r>
-                    </a:p>
-                  </a:txBody>
-                  <a:tcPr marL="91440" marR="91440" marT="45720" marB="45720">
-                    <a:lnR w="9525">
-                      <a:solidFill>
-                        <a:srgbClr val="D7DFE5"/>
-                      </a:solidFill>
-                      <a:prstDash val="solid"/>
-                    </a:lnR>
-                    <a:lnB w="9525">
-                      <a:solidFill>
-                        <a:srgbClr val="D7DFE5"/>
-                      </a:solidFill>
-                      <a:prstDash val="solid"/>
-                    </a:lnB>
-                    <a:solidFill>
-                      <a:srgbClr val="FFFFFF"/>
-                    </a:solidFill>
-                  </a:tcPr>
-                </a:tc>
-              </a:tr>
-              <a:tr h="542925">
-                <a:tc>
-                  <a:txBody>
-                    <a:bodyPr/>
-                    <a:lstStyle/>
-                    <a:p>
-                      <a:r>
-                        <a:rPr sz="1950" b="0">
-                          <a:solidFill>
-                            <a:srgbClr val="152D43"/>
-                          </a:solidFill>
-                          <a:latin typeface="Arial"/>
-                          <a:ea typeface="Arial"/>
-                          <a:cs typeface="Arial"/>
-                        </a:rPr>
-                        <a:t>15_800</a:t>
-                      </a:r>
-                    </a:p>
-                  </a:txBody>
-                  <a:tcPr marL="91440" marR="91440" marT="45720" marB="45720">
-                    <a:lnL w="9525">
-                      <a:solidFill>
-                        <a:srgbClr val="D7DFE5"/>
-                      </a:solidFill>
-                      <a:prstDash val="solid"/>
-                    </a:lnL>
-                    <a:lnR w="9525">
-                      <a:solidFill>
-                        <a:srgbClr val="D7DFE5"/>
-                      </a:solidFill>
-                      <a:prstDash val="solid"/>
-                    </a:lnR>
-                    <a:lnB w="9525">
-                      <a:solidFill>
-                        <a:srgbClr val="D7DFE5"/>
-                      </a:solidFill>
-                      <a:prstDash val="solid"/>
-                    </a:lnB>
-                    <a:solidFill>
-                      <a:srgbClr val="EAF3F6"/>
-                    </a:solidFill>
-                  </a:tcPr>
-                </a:tc>
-                <a:tc>
-                  <a:txBody>
-                    <a:bodyPr/>
-                    <a:lstStyle/>
-                    <a:p>
-                      <a:r>
-                        <a:rPr sz="1950" b="0">
-                          <a:solidFill>
-                            <a:srgbClr val="152D43"/>
-                          </a:solidFill>
-                          <a:latin typeface="Arial"/>
-                          <a:ea typeface="Arial"/>
-                          <a:cs typeface="Arial"/>
-                        </a:rPr>
-                        <a:t>14.433</a:t>
-                      </a:r>
-                    </a:p>
-                  </a:txBody>
-                  <a:tcPr marL="91440" marR="91440" marT="45720" marB="45720">
-                    <a:lnR w="9525">
-                      <a:solidFill>
-                        <a:srgbClr val="D7DFE5"/>
-                      </a:solidFill>
-                      <a:prstDash val="solid"/>
-                    </a:lnR>
-                    <a:lnB w="9525">
-                      <a:solidFill>
-                        <a:srgbClr val="D7DFE5"/>
-                      </a:solidFill>
-                      <a:prstDash val="solid"/>
-                    </a:lnB>
-                    <a:solidFill>
-                      <a:srgbClr val="EAF3F6"/>
-                    </a:solidFill>
-                  </a:tcPr>
-                </a:tc>
-                <a:tc>
-                  <a:txBody>
-                    <a:bodyPr/>
-                    <a:lstStyle/>
-                    <a:p>
-                      <a:r>
-                        <a:rPr sz="1950" b="0">
-                          <a:solidFill>
-                            <a:srgbClr val="152D43"/>
-                          </a:solidFill>
-                          <a:latin typeface="Arial"/>
-                          <a:ea typeface="Arial"/>
-                          <a:cs typeface="Arial"/>
-                        </a:rPr>
-                        <a:t>8.910</a:t>
-                      </a:r>
-                    </a:p>
-                  </a:txBody>
-                  <a:tcPr marL="91440" marR="91440" marT="45720" marB="45720">
-                    <a:lnR w="9525">
-                      <a:solidFill>
-                        <a:srgbClr val="D7DFE5"/>
-                      </a:solidFill>
-                      <a:prstDash val="solid"/>
-                    </a:lnR>
-                    <a:lnB w="9525">
-                      <a:solidFill>
-                        <a:srgbClr val="D7DFE5"/>
-                      </a:solidFill>
-                      <a:prstDash val="solid"/>
-                    </a:lnB>
-                    <a:solidFill>
-                      <a:srgbClr val="EAF3F6"/>
-                    </a:solidFill>
-                  </a:tcPr>
-                </a:tc>
-                <a:tc>
-                  <a:txBody>
-                    <a:bodyPr/>
-                    <a:lstStyle/>
-                    <a:p>
-                      <a:r>
-                        <a:rPr sz="1950" b="0">
-                          <a:solidFill>
-                            <a:srgbClr val="152D43"/>
-                          </a:solidFill>
-                          <a:latin typeface="Arial"/>
-                          <a:ea typeface="Arial"/>
-                          <a:cs typeface="Arial"/>
-                        </a:rPr>
-                        <a:t>10.282</a:t>
-                      </a:r>
-                    </a:p>
-                  </a:txBody>
-                  <a:tcPr marL="91440" marR="91440" marT="45720" marB="45720">
-                    <a:lnR w="9525">
-                      <a:solidFill>
-                        <a:srgbClr val="D7DFE5"/>
-                      </a:solidFill>
-                      <a:prstDash val="solid"/>
-                    </a:lnR>
-                    <a:lnB w="9525">
-                      <a:solidFill>
-                        <a:srgbClr val="D7DFE5"/>
-                      </a:solidFill>
-                      <a:prstDash val="solid"/>
-                    </a:lnB>
-                    <a:solidFill>
-                      <a:srgbClr val="EAF3F6"/>
-                    </a:solidFill>
-                  </a:tcPr>
-                </a:tc>
-              </a:tr>
-              <a:tr h="542925">
-                <a:tc>
-                  <a:txBody>
-                    <a:bodyPr/>
-                    <a:lstStyle/>
-                    <a:p>
-                      <a:r>
-                        <a:rPr sz="1950" b="0">
-                          <a:solidFill>
-                            <a:srgbClr val="152D43"/>
-                          </a:solidFill>
-                          <a:latin typeface="Arial"/>
-                          <a:ea typeface="Arial"/>
-                          <a:cs typeface="Arial"/>
-                        </a:rPr>
-                        <a:t>35_300</a:t>
-                      </a:r>
-                    </a:p>
-                  </a:txBody>
-                  <a:tcPr marL="91440" marR="91440" marT="45720" marB="45720">
-                    <a:lnL w="9525">
-                      <a:solidFill>
-                        <a:srgbClr val="D7DFE5"/>
-                      </a:solidFill>
-                      <a:prstDash val="solid"/>
-                    </a:lnL>
-                    <a:lnR w="9525">
-                      <a:solidFill>
-                        <a:srgbClr val="D7DFE5"/>
-                      </a:solidFill>
-                      <a:prstDash val="solid"/>
-                    </a:lnR>
-                    <a:lnB w="9525">
-                      <a:solidFill>
-                        <a:srgbClr val="D7DFE5"/>
-                      </a:solidFill>
-                      <a:prstDash val="solid"/>
-                    </a:lnB>
-                    <a:solidFill>
-                      <a:srgbClr val="FFFFFF"/>
-                    </a:solidFill>
-                  </a:tcPr>
-                </a:tc>
-                <a:tc>
-                  <a:txBody>
-                    <a:bodyPr/>
-                    <a:lstStyle/>
-                    <a:p>
-                      <a:r>
-                        <a:rPr sz="1950" b="0">
-                          <a:solidFill>
-                            <a:srgbClr val="152D43"/>
-                          </a:solidFill>
-                          <a:latin typeface="Arial"/>
-                          <a:ea typeface="Arial"/>
-                          <a:cs typeface="Arial"/>
-                        </a:rPr>
-                        <a:t>14.537</a:t>
-                      </a:r>
-                    </a:p>
-                  </a:txBody>
-                  <a:tcPr marL="91440" marR="91440" marT="45720" marB="45720">
-                    <a:lnR w="9525">
-                      <a:solidFill>
-                        <a:srgbClr val="D7DFE5"/>
-                      </a:solidFill>
-                      <a:prstDash val="solid"/>
-                    </a:lnR>
-                    <a:lnB w="9525">
-                      <a:solidFill>
-                        <a:srgbClr val="D7DFE5"/>
-                      </a:solidFill>
-                      <a:prstDash val="solid"/>
-                    </a:lnB>
-                    <a:solidFill>
-                      <a:srgbClr val="FFFFFF"/>
-                    </a:solidFill>
-                  </a:tcPr>
-                </a:tc>
-                <a:tc>
-                  <a:txBody>
-                    <a:bodyPr/>
-                    <a:lstStyle/>
-                    <a:p>
-                      <a:r>
-                        <a:rPr sz="1950" b="0">
-                          <a:solidFill>
-                            <a:srgbClr val="152D43"/>
-                          </a:solidFill>
-                          <a:latin typeface="Arial"/>
-                          <a:ea typeface="Arial"/>
-                          <a:cs typeface="Arial"/>
-                        </a:rPr>
-                        <a:t>8.911</a:t>
-                      </a:r>
-                    </a:p>
-                  </a:txBody>
-                  <a:tcPr marL="91440" marR="91440" marT="45720" marB="45720">
-                    <a:lnR w="9525">
-                      <a:solidFill>
-                        <a:srgbClr val="D7DFE5"/>
-                      </a:solidFill>
-                      <a:prstDash val="solid"/>
-                    </a:lnR>
-                    <a:lnB w="9525">
-                      <a:solidFill>
-                        <a:srgbClr val="D7DFE5"/>
-                      </a:solidFill>
-                      <a:prstDash val="solid"/>
-                    </a:lnB>
-                    <a:solidFill>
-                      <a:srgbClr val="FFFFFF"/>
-                    </a:solidFill>
-                  </a:tcPr>
-                </a:tc>
-                <a:tc>
-                  <a:txBody>
-                    <a:bodyPr/>
-                    <a:lstStyle/>
-                    <a:p>
-                      <a:r>
-                        <a:rPr sz="1950" b="0">
-                          <a:solidFill>
-                            <a:srgbClr val="152D43"/>
-                          </a:solidFill>
-                          <a:latin typeface="Arial"/>
-                          <a:ea typeface="Arial"/>
-                          <a:cs typeface="Arial"/>
-                        </a:rPr>
-                        <a:t>10.323</a:t>
-                      </a:r>
-                    </a:p>
-                  </a:txBody>
-                  <a:tcPr marL="91440" marR="91440" marT="45720" marB="45720">
-                    <a:lnR w="9525">
-                      <a:solidFill>
-                        <a:srgbClr val="D7DFE5"/>
-                      </a:solidFill>
-                      <a:prstDash val="solid"/>
-                    </a:lnR>
-                    <a:lnB w="9525">
-                      <a:solidFill>
-                        <a:srgbClr val="D7DFE5"/>
-                      </a:solidFill>
-                      <a:prstDash val="solid"/>
-                    </a:lnB>
-                    <a:solidFill>
-                      <a:srgbClr val="FFFFFF"/>
-                    </a:solidFill>
-                  </a:tcPr>
-                </a:tc>
-              </a:tr>
-              <a:tr h="542925">
-                <a:tc>
-                  <a:txBody>
-                    <a:bodyPr/>
-                    <a:lstStyle/>
-                    <a:p>
-                      <a:r>
-                        <a:rPr sz="1950" b="0">
-                          <a:solidFill>
-                            <a:srgbClr val="152D43"/>
-                          </a:solidFill>
-                          <a:latin typeface="Arial"/>
-                          <a:ea typeface="Arial"/>
-                          <a:cs typeface="Arial"/>
-                        </a:rPr>
-                        <a:t>35_800</a:t>
-                      </a:r>
-                    </a:p>
-                  </a:txBody>
-                  <a:tcPr marL="91440" marR="91440" marT="45720" marB="45720">
-                    <a:lnL w="9525">
-                      <a:solidFill>
-                        <a:srgbClr val="D7DFE5"/>
-                      </a:solidFill>
-                      <a:prstDash val="solid"/>
-                    </a:lnL>
-                    <a:lnR w="9525">
-                      <a:solidFill>
-                        <a:srgbClr val="D7DFE5"/>
-                      </a:solidFill>
-                      <a:prstDash val="solid"/>
-                    </a:lnR>
-                    <a:lnB w="9525">
-                      <a:solidFill>
-                        <a:srgbClr val="D7DFE5"/>
-                      </a:solidFill>
-                      <a:prstDash val="solid"/>
-                    </a:lnB>
-                    <a:solidFill>
-                      <a:srgbClr val="EAF3F6"/>
-                    </a:solidFill>
-                  </a:tcPr>
-                </a:tc>
-                <a:tc>
-                  <a:txBody>
-                    <a:bodyPr/>
-                    <a:lstStyle/>
-                    <a:p>
-                      <a:r>
-                        <a:rPr sz="1950" b="0">
-                          <a:solidFill>
-                            <a:srgbClr val="152D43"/>
-                          </a:solidFill>
-                          <a:latin typeface="Arial"/>
-                          <a:ea typeface="Arial"/>
-                          <a:cs typeface="Arial"/>
-                        </a:rPr>
-                        <a:t>14.567</a:t>
-                      </a:r>
-                    </a:p>
-                  </a:txBody>
-                  <a:tcPr marL="91440" marR="91440" marT="45720" marB="45720">
-                    <a:lnR w="9525">
-                      <a:solidFill>
-                        <a:srgbClr val="D7DFE5"/>
-                      </a:solidFill>
-                      <a:prstDash val="solid"/>
-                    </a:lnR>
-                    <a:lnB w="9525">
-                      <a:solidFill>
-                        <a:srgbClr val="D7DFE5"/>
-                      </a:solidFill>
-                      <a:prstDash val="solid"/>
-                    </a:lnB>
-                    <a:solidFill>
-                      <a:srgbClr val="EAF3F6"/>
-                    </a:solidFill>
-                  </a:tcPr>
-                </a:tc>
-                <a:tc>
-                  <a:txBody>
-                    <a:bodyPr/>
-                    <a:lstStyle/>
-                    <a:p>
-                      <a:r>
-                        <a:rPr sz="1950" b="0">
-                          <a:solidFill>
-                            <a:srgbClr val="152D43"/>
-                          </a:solidFill>
-                          <a:latin typeface="Arial"/>
-                          <a:ea typeface="Arial"/>
-                          <a:cs typeface="Arial"/>
-                        </a:rPr>
-                        <a:t>8.959</a:t>
-                      </a:r>
-                    </a:p>
-                  </a:txBody>
-                  <a:tcPr marL="91440" marR="91440" marT="45720" marB="45720">
-                    <a:lnR w="9525">
-                      <a:solidFill>
-                        <a:srgbClr val="D7DFE5"/>
-                      </a:solidFill>
-                      <a:prstDash val="solid"/>
-                    </a:lnR>
-                    <a:lnB w="9525">
-                      <a:solidFill>
-                        <a:srgbClr val="D7DFE5"/>
-                      </a:solidFill>
-                      <a:prstDash val="solid"/>
-                    </a:lnB>
-                    <a:solidFill>
-                      <a:srgbClr val="EAF3F6"/>
-                    </a:solidFill>
-                  </a:tcPr>
-                </a:tc>
-                <a:tc>
-                  <a:txBody>
-                    <a:bodyPr/>
-                    <a:lstStyle/>
-                    <a:p>
-                      <a:r>
-                        <a:rPr sz="1950" b="0">
-                          <a:solidFill>
-                            <a:srgbClr val="152D43"/>
-                          </a:solidFill>
-                          <a:latin typeface="Arial"/>
-                          <a:ea typeface="Arial"/>
-                          <a:cs typeface="Arial"/>
-                        </a:rPr>
-                        <a:t>10.372</a:t>
-                      </a:r>
-                    </a:p>
-                  </a:txBody>
-                  <a:tcPr marL="91440" marR="91440" marT="45720" marB="45720">
-                    <a:lnR w="9525">
-                      <a:solidFill>
-                        <a:srgbClr val="D7DFE5"/>
-                      </a:solidFill>
-                      <a:prstDash val="solid"/>
-                    </a:lnR>
-                    <a:lnB w="9525">
-                      <a:solidFill>
-                        <a:srgbClr val="D7DFE5"/>
-                      </a:solidFill>
-                      <a:prstDash val="solid"/>
-                    </a:lnB>
-                    <a:solidFill>
-                      <a:srgbClr val="EAF3F6"/>
-                    </a:solidFill>
-                  </a:tcPr>
-                </a:tc>
-              </a:tr>
-            </a:tbl>
-          </a:graphicData>
-        </a:graphic>
-      </p:graphicFrame>
-      <p:sp>
-        <p:nvSpPr>
-          <p:cNvPr id="5" name="">
-            <a:extLst xmlns:a="http://schemas.openxmlformats.org/drawingml/2006/main">
-              <a:ext uri="{FF2B5EF4-FFF2-40B4-BE49-F238E27FC236}">
-                <a16:creationId xmlns:a16="http://schemas.microsoft.com/office/drawing/2014/main" id="{B913266B-49D1-4C63-BC99-ACB18153BB7A}"/>
-              </a:ext>
-            </a:extLst>
-          </p:cNvPr>
-          <p:cNvSpPr>
-            <a:spLocks xmlns:a="http://schemas.openxmlformats.org/drawingml/2006/main" noGrp="1"/>
-          </p:cNvSpPr>
-          <p:nvPr/>
-        </p:nvSpPr>
-        <p:spPr>
-          <a:xfrm xmlns:a="http://schemas.openxmlformats.org/drawingml/2006/main">
-            <a:off x="609600" y="4714875"/>
-            <a:ext cx="10972800" cy="381000"/>
-          </a:xfrm>
-          <a:prstGeom xmlns:a="http://schemas.openxmlformats.org/drawingml/2006/main" prst="rect">
-            <a:avLst/>
-          </a:prstGeom>
-          <a:noFill xmlns:a="http://schemas.openxmlformats.org/drawingml/2006/main"/>
-          <a:ln xmlns:a="http://schemas.openxmlformats.org/drawingml/2006/main" w="0">
-            <a:noFill/>
-          </a:ln>
-        </p:spPr>
-        <p:txBody>
-          <a:bodyPr xmlns:a="http://schemas.openxmlformats.org/drawingml/2006/main" lIns="0" tIns="0" rIns="0" bIns="0"/>
-          <a:lstStyle xmlns:a="http://schemas.openxmlformats.org/drawingml/2006/main"/>
-          <a:p xmlns:a="http://schemas.openxmlformats.org/drawingml/2006/main">
-            <a:r>
-              <a:rPr sz="1950" b="1">
-                <a:solidFill>
-                  <a:srgbClr val="086B93"/>
-                </a:solidFill>
-                <a:latin typeface="Arial"/>
-                <a:ea typeface="Arial"/>
-                <a:cs typeface="Arial"/>
-              </a:rPr>
-              <a:t>15W. Frame 39 per sequence, 100 repeats. Resident reconstruction means; no decode.</a:t>
-            </a:r>
-          </a:p>
-        </p:txBody>
-      </p:sp>
-      <p:sp>
-        <p:nvSpPr>
-          <p:cNvPr id="6" name="">
-            <a:extLst xmlns:a="http://schemas.openxmlformats.org/drawingml/2006/main">
-              <a:ext uri="{FF2B5EF4-FFF2-40B4-BE49-F238E27FC236}">
-                <a16:creationId xmlns:a16="http://schemas.microsoft.com/office/drawing/2014/main" id="{FC140971-D6F5-443A-AB1C-386A2EC47AC0}"/>
-              </a:ext>
-            </a:extLst>
-          </p:cNvPr>
-          <p:cNvSpPr>
-            <a:spLocks xmlns:a="http://schemas.openxmlformats.org/drawingml/2006/main" noGrp="1"/>
-          </p:cNvSpPr>
-          <p:nvPr/>
-        </p:nvSpPr>
-        <p:spPr>
-          <a:xfrm xmlns:a="http://schemas.openxmlformats.org/drawingml/2006/main">
-            <a:off x="609600" y="5238750"/>
-            <a:ext cx="10972800" cy="685800"/>
-          </a:xfrm>
-          <a:prstGeom xmlns:a="http://schemas.openxmlformats.org/drawingml/2006/main" prst="rect">
-            <a:avLst/>
-          </a:prstGeom>
-          <a:noFill xmlns:a="http://schemas.openxmlformats.org/drawingml/2006/main"/>
-          <a:ln xmlns:a="http://schemas.openxmlformats.org/drawingml/2006/main" w="0">
-            <a:noFill/>
-          </a:ln>
-        </p:spPr>
-        <p:txBody>
-          <a:bodyPr xmlns:a="http://schemas.openxmlformats.org/drawingml/2006/main" lIns="0" tIns="0" rIns="0" bIns="0"/>
-          <a:lstStyle xmlns:a="http://schemas.openxmlformats.org/drawingml/2006/main"/>
-          <a:p xmlns:a="http://schemas.openxmlformats.org/drawingml/2006/main">
-            <a:r>
-              <a:rPr sz="1875" b="0">
-                <a:solidFill>
-                  <a:srgbClr val="152D43"/>
-                </a:solidFill>
-                <a:latin typeface="Arial"/>
-                <a:ea typeface="Arial"/>
-                <a:cs typeface="Arial"/>
-              </a:rPr>
-              <a:t>Numba 0.58.1 + Python 3.8: real GPU JIT and execution passed.</a:t>
-            </a:r>
-          </a:p>
-          <a:p xmlns:a="http://schemas.openxmlformats.org/drawingml/2006/main">
-            <a:r>
-              <a:rPr sz="1875" b="0">
-                <a:solidFill>
-                  <a:srgbClr val="152D43"/>
-                </a:solidFill>
-                <a:latin typeface="Arial"/>
-                <a:ea typeface="Arial"/>
-                <a:cs typeface="Arial"/>
-              </a:rPr>
-              <a:t>Its upsampler differs from optimized CUDA C++; this is not a language-only comparison.</a:t>
-            </a:r>
-          </a:p>
-        </p:txBody>
-      </p:sp>
-      <p:sp>
-        <p:nvSpPr>
-          <p:cNvPr id="7" name="">
-            <a:extLst xmlns:a="http://schemas.openxmlformats.org/drawingml/2006/main">
-              <a:ext uri="{FF2B5EF4-FFF2-40B4-BE49-F238E27FC236}">
-                <a16:creationId xmlns:a16="http://schemas.microsoft.com/office/drawing/2014/main" id="{EF98E2B2-2B20-496F-B676-7BA9B68AA19D}"/>
-              </a:ext>
-            </a:extLst>
-          </p:cNvPr>
-          <p:cNvSpPr>
-            <a:spLocks xmlns:a="http://schemas.openxmlformats.org/drawingml/2006/main" noGrp="1"/>
-          </p:cNvSpPr>
-          <p:nvPr/>
-        </p:nvSpPr>
-        <p:spPr>
-          <a:xfrm xmlns:a="http://schemas.openxmlformats.org/drawingml/2006/main">
-            <a:off x="609600" y="5924550"/>
-            <a:ext cx="10715625" cy="457200"/>
-          </a:xfrm>
-          <a:prstGeom xmlns:a="http://schemas.openxmlformats.org/drawingml/2006/main" prst="rect">
-            <a:avLst/>
-          </a:prstGeom>
-          <a:noFill xmlns:a="http://schemas.openxmlformats.org/drawingml/2006/main"/>
-          <a:ln xmlns:a="http://schemas.openxmlformats.org/drawingml/2006/main" w="0">
-            <a:noFill/>
-          </a:ln>
-        </p:spPr>
-        <p:txBody>
-          <a:bodyPr xmlns:a="http://schemas.openxmlformats.org/drawingml/2006/main" lIns="0" tIns="0" rIns="0" bIns="0"/>
-          <a:lstStyle xmlns:a="http://schemas.openxmlformats.org/drawingml/2006/main"/>
-          <a:p xmlns:a="http://schemas.openxmlformats.org/drawingml/2006/main">
-            <a:r>
-              <a:rPr sz="1500" b="0">
-                <a:solidFill>
-                  <a:srgbClr val="536675"/>
-                </a:solidFill>
-                <a:latin typeface="Arial"/>
-                <a:ea typeface="Arial"/>
-                <a:cs typeface="Arial"/>
-              </a:rPr>
-              <a:t>Original generate_right also runs with allocation/transfer and startup drift. See the companion deck for 30W.</a:t>
-            </a:r>
-          </a:p>
-        </p:txBody>
-      </p:sp>
-    </p:spTree>
-    <p:extLst>
-      <p:ext uri="{BB962C8B-B14F-4D97-AF65-F5344CB8AC3E}">
-        <p14:creationId xmlns:p14="http://schemas.microsoft.com/office/powerpoint/2010/main" val="2020730281"/>
-      </p:ext>
-    </p:extLst>
-  </p:cSld>
-</p:sld>
-</file>
-
-<file path=ppt/slides/slide9.xml><?xml version="1.0" encoding="utf-8"?>
-<p:sld xmlns:p="http://schemas.openxmlformats.org/presentationml/2006/main">
-  <p:cSld>
-    <p:bg>
-      <p:bgPr>
-        <a:solidFill xmlns:a="http://schemas.openxmlformats.org/drawingml/2006/main">
-          <a:srgbClr val="FFFFFF"/>
-        </a:solidFill>
-      </p:bgPr>
-    </p:bg>
-    <p:spTree>
-      <p:nvGrpSpPr>
-        <p:cNvPr id="1" name=""/>
-        <p:cNvGrpSpPr/>
-        <p:nvPr/>
-      </p:nvGrpSpPr>
-      <p:grpSpPr>
-        <a:xfrm xmlns:a="http://schemas.openxmlformats.org/drawingml/2006/main"/>
-      </p:grpSpPr>
-      <p:sp>
-        <p:nvSpPr>
-          <p:cNvPr id="14" name="">
-            <a:extLst xmlns:a="http://schemas.openxmlformats.org/drawingml/2006/main">
-              <a:ext uri="{FF2B5EF4-FFF2-40B4-BE49-F238E27FC236}">
-                <a16:creationId xmlns:a16="http://schemas.microsoft.com/office/drawing/2014/main" id="{B493C514-7CBA-4265-B300-6875A26701E8}"/>
-              </a:ext>
-            </a:extLst>
-          </p:cNvPr>
-          <p:cNvSpPr>
-            <a:spLocks xmlns:a="http://schemas.openxmlformats.org/drawingml/2006/main" noGrp="1"/>
-          </p:cNvSpPr>
-          <p:nvPr/>
-        </p:nvSpPr>
-        <p:spPr>
-          <a:xfrm xmlns:a="http://schemas.openxmlformats.org/drawingml/2006/main">
-            <a:off x="609600" y="381000"/>
-            <a:ext cx="10906125" cy="628650"/>
-          </a:xfrm>
-          <a:prstGeom xmlns:a="http://schemas.openxmlformats.org/drawingml/2006/main" prst="rect">
-            <a:avLst/>
-          </a:prstGeom>
-          <a:noFill xmlns:a="http://schemas.openxmlformats.org/drawingml/2006/main"/>
-          <a:ln xmlns:a="http://schemas.openxmlformats.org/drawingml/2006/main" w="0">
-            <a:noFill/>
-          </a:ln>
-        </p:spPr>
-        <p:txBody>
-          <a:bodyPr xmlns:a="http://schemas.openxmlformats.org/drawingml/2006/main" lIns="0" tIns="0" rIns="0" bIns="0"/>
-          <a:lstStyle xmlns:a="http://schemas.openxmlformats.org/drawingml/2006/main"/>
-          <a:p xmlns:a="http://schemas.openxmlformats.org/drawingml/2006/main">
-            <a:r>
-              <a:rPr sz="3150" b="1">
-                <a:solidFill>
-                  <a:srgbClr val="152D43"/>
-                </a:solidFill>
-                <a:latin typeface="Arial"/>
-                <a:ea typeface="Arial"/>
-                <a:cs typeface="Arial"/>
-              </a:rPr>
-              <a:t>Next: measure deadline behavior under jitter</a:t>
-            </a:r>
-          </a:p>
-        </p:txBody>
-      </p:sp>
-      <p:sp>
-        <p:nvSpPr>
-          <p:cNvPr id="2" name="">
-            <a:extLst xmlns:a="http://schemas.openxmlformats.org/drawingml/2006/main">
-              <a:ext uri="{FF2B5EF4-FFF2-40B4-BE49-F238E27FC236}">
-                <a16:creationId xmlns:a16="http://schemas.microsoft.com/office/drawing/2014/main" id="{A54560FE-5FB7-4883-81E9-A2C27E12A60E}"/>
-              </a:ext>
-            </a:extLst>
-          </p:cNvPr>
-          <p:cNvSpPr>
-            <a:spLocks xmlns:a="http://schemas.openxmlformats.org/drawingml/2006/main" noGrp="1"/>
-          </p:cNvSpPr>
-          <p:nvPr/>
-        </p:nvSpPr>
-        <p:spPr>
-          <a:xfrm xmlns:a="http://schemas.openxmlformats.org/drawingml/2006/main">
-            <a:off x="609600" y="1162050"/>
-            <a:ext cx="10972800" cy="0"/>
-          </a:xfrm>
-          <a:prstGeom xmlns:a="http://schemas.openxmlformats.org/drawingml/2006/main" prst="line">
-            <a:avLst/>
-          </a:prstGeom>
-          <a:noFill xmlns:a="http://schemas.openxmlformats.org/drawingml/2006/main"/>
-          <a:ln xmlns:a="http://schemas.openxmlformats.org/drawingml/2006/main" w="9525">
-            <a:solidFill>
-              <a:srgbClr val="D7DFE5"/>
-            </a:solidFill>
-          </a:ln>
-        </p:spPr>
-      </p:sp>
-      <p:sp>
-        <p:nvSpPr>
-          <p:cNvPr id="3" name="">
-            <a:extLst xmlns:a="http://schemas.openxmlformats.org/drawingml/2006/main">
-              <a:ext uri="{FF2B5EF4-FFF2-40B4-BE49-F238E27FC236}">
-                <a16:creationId xmlns:a16="http://schemas.microsoft.com/office/drawing/2014/main" id="{339A00CF-18B1-4FC9-A101-58948D0AD27A}"/>
-              </a:ext>
-            </a:extLst>
-          </p:cNvPr>
-          <p:cNvSpPr>
-            <a:spLocks xmlns:a="http://schemas.openxmlformats.org/drawingml/2006/main" noGrp="1"/>
-          </p:cNvSpPr>
-          <p:nvPr/>
-        </p:nvSpPr>
-        <p:spPr>
-          <a:xfrm xmlns:a="http://schemas.openxmlformats.org/drawingml/2006/main">
-            <a:off x="11353800" y="6429375"/>
-            <a:ext cx="285750" cy="228600"/>
-          </a:xfrm>
-          <a:prstGeom xmlns:a="http://schemas.openxmlformats.org/drawingml/2006/main" prst="rect">
-            <a:avLst/>
-          </a:prstGeom>
-          <a:noFill xmlns:a="http://schemas.openxmlformats.org/drawingml/2006/main"/>
-          <a:ln xmlns:a="http://schemas.openxmlformats.org/drawingml/2006/main" w="0">
-            <a:noFill/>
-          </a:ln>
-        </p:spPr>
-        <p:txBody>
-          <a:bodyPr xmlns:a="http://schemas.openxmlformats.org/drawingml/2006/main" lIns="0" tIns="0" rIns="0" bIns="0"/>
-          <a:lstStyle xmlns:a="http://schemas.openxmlformats.org/drawingml/2006/main"/>
-          <a:p xmlns:a="http://schemas.openxmlformats.org/drawingml/2006/main">
-            <a:r>
-              <a:rPr sz="1275" b="0">
-                <a:solidFill>
-                  <a:srgbClr val="536675"/>
-                </a:solidFill>
-                <a:latin typeface="Arial"/>
-                <a:ea typeface="Arial"/>
-                <a:cs typeface="Arial"/>
-              </a:rPr>
-              <a:t>9</a:t>
-            </a:r>
-          </a:p>
-        </p:txBody>
-      </p:sp>
-      <p:sp>
-        <p:nvSpPr>
-          <p:cNvPr id="4" name="">
-            <a:extLst xmlns:a="http://schemas.openxmlformats.org/drawingml/2006/main">
-              <a:ext uri="{FF2B5EF4-FFF2-40B4-BE49-F238E27FC236}">
-                <a16:creationId xmlns:a16="http://schemas.microsoft.com/office/drawing/2014/main" id="{D08AFF7F-992D-480B-A104-3845F52FDBFD}"/>
+                <a16:creationId xmlns:a16="http://schemas.microsoft.com/office/drawing/2014/main" id="{839ED752-2FAE-4885-A5ED-BA7537F36560}"/>
               </a:ext>
             </a:extLst>
           </p:cNvPr>
@@ -11113,7 +9889,7 @@
           <p:cNvPr id="5" name="">
             <a:extLst xmlns:a="http://schemas.openxmlformats.org/drawingml/2006/main">
               <a:ext uri="{FF2B5EF4-FFF2-40B4-BE49-F238E27FC236}">
-                <a16:creationId xmlns:a16="http://schemas.microsoft.com/office/drawing/2014/main" id="{A3B2E728-EC90-458C-AD3E-D989F5BD63C2}"/>
+                <a16:creationId xmlns:a16="http://schemas.microsoft.com/office/drawing/2014/main" id="{8FB8FD4C-1F0A-4F61-A3A4-AC47E705C42B}"/>
               </a:ext>
             </a:extLst>
           </p:cNvPr>
@@ -11158,7 +9934,7 @@
           <p:cNvPr id="6" name="">
             <a:extLst xmlns:a="http://schemas.openxmlformats.org/drawingml/2006/main">
               <a:ext uri="{FF2B5EF4-FFF2-40B4-BE49-F238E27FC236}">
-                <a16:creationId xmlns:a16="http://schemas.microsoft.com/office/drawing/2014/main" id="{2CD95DB8-BBE9-4165-9113-3C62B6DA4FD9}"/>
+                <a16:creationId xmlns:a16="http://schemas.microsoft.com/office/drawing/2014/main" id="{BDEC2475-FD2A-4A2A-880A-2DC3F36F0720}"/>
               </a:ext>
             </a:extLst>
           </p:cNvPr>
@@ -11203,7 +9979,7 @@
           <p:cNvPr id="7" name="">
             <a:extLst xmlns:a="http://schemas.openxmlformats.org/drawingml/2006/main">
               <a:ext uri="{FF2B5EF4-FFF2-40B4-BE49-F238E27FC236}">
-                <a16:creationId xmlns:a16="http://schemas.microsoft.com/office/drawing/2014/main" id="{46299FB1-47FC-4FC7-A9F2-AB8BA75A050F}"/>
+                <a16:creationId xmlns:a16="http://schemas.microsoft.com/office/drawing/2014/main" id="{EB4507FE-7981-4F57-A6A0-08DA5FEC520E}"/>
               </a:ext>
             </a:extLst>
           </p:cNvPr>
@@ -11248,7 +10024,7 @@
           <p:cNvPr id="8" name="">
             <a:extLst xmlns:a="http://schemas.openxmlformats.org/drawingml/2006/main">
               <a:ext uri="{FF2B5EF4-FFF2-40B4-BE49-F238E27FC236}">
-                <a16:creationId xmlns:a16="http://schemas.microsoft.com/office/drawing/2014/main" id="{EBA894BE-42A4-49CA-8AE3-E2ED1ECBCAB1}"/>
+                <a16:creationId xmlns:a16="http://schemas.microsoft.com/office/drawing/2014/main" id="{3030DE88-AA80-44AA-ABC0-A6C7E5B96EE8}"/>
               </a:ext>
             </a:extLst>
           </p:cNvPr>
@@ -11293,7 +10069,7 @@
           <p:cNvPr id="9" name="">
             <a:extLst xmlns:a="http://schemas.openxmlformats.org/drawingml/2006/main">
               <a:ext uri="{FF2B5EF4-FFF2-40B4-BE49-F238E27FC236}">
-                <a16:creationId xmlns:a16="http://schemas.microsoft.com/office/drawing/2014/main" id="{2C44DF22-CEB3-421A-81CD-0A598E99002B}"/>
+                <a16:creationId xmlns:a16="http://schemas.microsoft.com/office/drawing/2014/main" id="{AC771EC7-3B38-43BA-8BBB-EAD1C0DB1877}"/>
               </a:ext>
             </a:extLst>
           </p:cNvPr>
@@ -11338,7 +10114,7 @@
           <p:cNvPr id="10" name="">
             <a:extLst xmlns:a="http://schemas.openxmlformats.org/drawingml/2006/main">
               <a:ext uri="{FF2B5EF4-FFF2-40B4-BE49-F238E27FC236}">
-                <a16:creationId xmlns:a16="http://schemas.microsoft.com/office/drawing/2014/main" id="{F6E61D53-8033-407F-9BB8-644F90E7FFE3}"/>
+                <a16:creationId xmlns:a16="http://schemas.microsoft.com/office/drawing/2014/main" id="{2870A9DD-E898-4B76-A813-98BB0C554932}"/>
               </a:ext>
             </a:extLst>
           </p:cNvPr>
@@ -11383,7 +10159,7 @@
           <p:cNvPr id="11" name="">
             <a:extLst xmlns:a="http://schemas.openxmlformats.org/drawingml/2006/main">
               <a:ext uri="{FF2B5EF4-FFF2-40B4-BE49-F238E27FC236}">
-                <a16:creationId xmlns:a16="http://schemas.microsoft.com/office/drawing/2014/main" id="{AD7CD40C-C76D-4057-8D52-D84F77AAAE50}"/>
+                <a16:creationId xmlns:a16="http://schemas.microsoft.com/office/drawing/2014/main" id="{7F2E25F4-C0D7-4EAA-B73F-0CA3FFFE0C52}"/>
               </a:ext>
             </a:extLst>
           </p:cNvPr>
@@ -11428,7 +10204,7 @@
           <p:cNvPr id="12" name="">
             <a:extLst xmlns:a="http://schemas.openxmlformats.org/drawingml/2006/main">
               <a:ext uri="{FF2B5EF4-FFF2-40B4-BE49-F238E27FC236}">
-                <a16:creationId xmlns:a16="http://schemas.microsoft.com/office/drawing/2014/main" id="{5134FAC6-4219-4EE4-A0AD-955CB789D2B6}"/>
+                <a16:creationId xmlns:a16="http://schemas.microsoft.com/office/drawing/2014/main" id="{414F6A07-370B-4EB0-938B-38372927B35D}"/>
               </a:ext>
             </a:extLst>
           </p:cNvPr>
@@ -11473,7 +10249,7 @@
           <p:cNvPr id="13" name="">
             <a:extLst xmlns:a="http://schemas.openxmlformats.org/drawingml/2006/main">
               <a:ext uri="{FF2B5EF4-FFF2-40B4-BE49-F238E27FC236}">
-                <a16:creationId xmlns:a16="http://schemas.microsoft.com/office/drawing/2014/main" id="{0741A27A-C832-4BD0-81C5-07988DF988DA}"/>
+                <a16:creationId xmlns:a16="http://schemas.microsoft.com/office/drawing/2014/main" id="{1BB1564C-B0BD-44F9-BEAA-30E6DF719FA0}"/>
               </a:ext>
             </a:extLst>
           </p:cNvPr>
@@ -11516,7 +10292,7 @@
     </p:spTree>
     <p:extLst>
       <p:ext uri="{BB962C8B-B14F-4D97-AF65-F5344CB8AC3E}">
-        <p14:creationId xmlns:p14="http://schemas.microsoft.com/office/powerpoint/2010/main" val="1201806577"/>
+        <p14:creationId xmlns:p14="http://schemas.microsoft.com/office/powerpoint/2010/main" val="844597229"/>
       </p:ext>
     </p:extLst>
   </p:cSld>

--- a/presentations/weekly_20261029/weekly_20261029_english_final.pptx
+++ b/presentations/weekly_20261029/weekly_20261029_english_final.pptx
@@ -2,20 +2,19 @@
 <file path=ppt/presentation.xml><?xml version="1.0" encoding="utf-8"?>
 <p:presentation xmlns:p="http://schemas.openxmlformats.org/presentationml/2006/main">
   <p:sldMasterIdLst>
-    <p:sldMasterId xmlns:r="http://schemas.openxmlformats.org/officeDocument/2006/relationships" id="2147483648" r:id="R7ca1053cbf0c485f"/>
+    <p:sldMasterId xmlns:r="http://schemas.openxmlformats.org/officeDocument/2006/relationships" id="2147483648" r:id="R179de33e494740a5"/>
   </p:sldMasterIdLst>
   <p:notesMasterIdLst>
-    <p:notesMasterId xmlns:r="http://schemas.openxmlformats.org/officeDocument/2006/relationships" r:id="Rde2cca9fd979416c"/>
+    <p:notesMasterId xmlns:r="http://schemas.openxmlformats.org/officeDocument/2006/relationships" r:id="R0de4b637a0494807"/>
   </p:notesMasterIdLst>
   <p:sldIdLst>
-    <p:sldId xmlns:r="http://schemas.openxmlformats.org/officeDocument/2006/relationships" id="256" r:id="Rc44a82475b684fc6"/>
-    <p:sldId xmlns:r="http://schemas.openxmlformats.org/officeDocument/2006/relationships" id="257" r:id="Re391d4f25ddb4bba"/>
-    <p:sldId xmlns:r="http://schemas.openxmlformats.org/officeDocument/2006/relationships" id="258" r:id="Recac69d6359c4db1"/>
-    <p:sldId xmlns:r="http://schemas.openxmlformats.org/officeDocument/2006/relationships" id="259" r:id="R5b46e918a1164032"/>
-    <p:sldId xmlns:r="http://schemas.openxmlformats.org/officeDocument/2006/relationships" id="260" r:id="R158a05bf337b4ffd"/>
-    <p:sldId xmlns:r="http://schemas.openxmlformats.org/officeDocument/2006/relationships" id="261" r:id="Rda2e366a379d4fe3"/>
-    <p:sldId xmlns:r="http://schemas.openxmlformats.org/officeDocument/2006/relationships" id="262" r:id="R095801c8aa8e474b"/>
-    <p:sldId xmlns:r="http://schemas.openxmlformats.org/officeDocument/2006/relationships" id="263" r:id="R3b354d18e76c4f09"/>
+    <p:sldId xmlns:r="http://schemas.openxmlformats.org/officeDocument/2006/relationships" id="256" r:id="Rdca792a4d3d74194"/>
+    <p:sldId xmlns:r="http://schemas.openxmlformats.org/officeDocument/2006/relationships" id="257" r:id="R6c7ae1ac5d6445e7"/>
+    <p:sldId xmlns:r="http://schemas.openxmlformats.org/officeDocument/2006/relationships" id="258" r:id="R94c45fc12e234211"/>
+    <p:sldId xmlns:r="http://schemas.openxmlformats.org/officeDocument/2006/relationships" id="259" r:id="Re64d9e9c336b470c"/>
+    <p:sldId xmlns:r="http://schemas.openxmlformats.org/officeDocument/2006/relationships" id="260" r:id="R6921852ecdc54e61"/>
+    <p:sldId xmlns:r="http://schemas.openxmlformats.org/officeDocument/2006/relationships" id="261" r:id="Rb1bd142a39464acd"/>
+    <p:sldId xmlns:r="http://schemas.openxmlformats.org/officeDocument/2006/relationships" id="262" r:id="Rb2d53381a81a4f98"/>
   </p:sldIdLst>
   <p:sldSz cx="12192000" cy="6858000"/>
   <p:notesSz cx="6858000" cy="9144000"/>
@@ -729,7 +728,7 @@
           <a:lstStyle xmlns:a="http://schemas.openxmlformats.org/drawingml/2006/main"/>
           <a:p xmlns:a="http://schemas.openxmlformats.org/drawingml/2006/main">
             <a:r>
-              <a:t>Source: results/fov_levels_xavier_full_20261027/README.md; overview.csv; summary.csv. Commit 0f1506c. Date 2026-10-27. Raw evidence: evidence.tar.gz. Timing source: results/cu_breakdown_xavier_20261029/README.md and results/fov_decode_budget_2ms_20261029/summary.csv. Timing: 30W 4CORE mode5, unlocked clocks, four driving workloads each frame39, 10 warmups and 100 timed repetitions per path. Staged CUDA-event GPU timeline, not wall time; events can include launch gaps. Quality: previous 15W evaluation, 1068 valid forward odd frames, one quality output per configuration and frame. These are separate experiments, not jointly measured quality-latency pairs.</a:t>
+              <a:t>Sources: results/cu_breakdown_xavier_20261029/README.md; results/fov_decode_budget_2ms_20261029/summary.csv. Four workloads, each frame39; 10 warmups and 100 timed runs per path. Arithmetic means of staged resident GPU timelines, not wall time. Full uses the paired baseline from the 2.8% configuration. Fixed decode budget is 2 ms once per frame, not measured joint RGB/depth/flow decoding or measured end-to-end timing. No input/output copies, network or display. Fast resampling enabled. Clearing dominates Full and accounts for about 58% of the Full-to-2.8% reconstruction saving, so the gain cannot be attributed entirely to reduced reprojection computation. No claim of an optimal Full baseline.</a:t>
             </a:r>
           </a:p>
         </p:txBody>
@@ -799,7 +798,7 @@
           <a:lstStyle xmlns:a="http://schemas.openxmlformats.org/drawingml/2006/main"/>
           <a:p xmlns:a="http://schemas.openxmlformats.org/drawingml/2006/main">
             <a:r>
-              <a:t>Sources: results/cu_breakdown_xavier_20261029/README.md; results/fov_decode_budget_2ms_20261029/summary.csv. Four workloads, each frame39; 10 warmups and 100 timed runs per path. Arithmetic means of staged resident GPU timelines, not wall time. Full uses the paired baseline from the 2.8% configuration. Fixed decode budget is 2 ms once per frame, not measured joint RGB/depth/flow decoding or measured end-to-end timing. No input/output copies, network or display. Fast resampling enabled. Clearing dominates Full and accounts for about 58% of the Full-to-2.8% reconstruction saving, so the gain cannot be attributed entirely to reduced reprojection computation. No claim of an optimal Full baseline.</a:t>
+              <a:t>Source: results/fov_levels_xavier_full_20261027/README.md; overview.csv; summary.csv. Commit 0f1506c. Date 2026-10-27. Raw evidence: evidence.tar.gz. Original uint8-overflow PSNR preserved. Stereo delta is derived only if left eye remains unchanged and per-eye PSNR dB is averaged. Quality: 15W, 1068 frames. Timing: separate 30W four-frame CUDA staged GPU experiment; not joint measurements and no new quality equivalence verified. Timing is never divided by two. Latency adds a fixed 2 ms per-frame decode budget once, not measured decoding or end-to-end latency. Source: results/fov_decode_budget_2ms_20261029/summary.csv.</a:t>
             </a:r>
           </a:p>
         </p:txBody>
@@ -869,77 +868,7 @@
           <a:lstStyle xmlns:a="http://schemas.openxmlformats.org/drawingml/2006/main"/>
           <a:p xmlns:a="http://schemas.openxmlformats.org/drawingml/2006/main">
             <a:r>
-              <a:t>Source: results/fov_levels_xavier_full_20261027/README.md; overview.csv; summary.csv. Commit 0f1506c. Date 2026-10-27. Raw evidence: evidence.tar.gz. Original uint8-overflow PSNR preserved. Stereo delta is derived only if left eye remains unchanged and per-eye PSNR dB is averaged. Quality: 15W, 1068 frames. Timing: separate 30W four-frame CUDA staged GPU experiment; not joint measurements and no new quality equivalence verified. Timing is never divided by two. Latency adds a fixed 2 ms per-frame decode budget once, not measured decoding or end-to-end latency. Source: results/fov_decode_budget_2ms_20261029/summary.csv.</a:t>
-            </a:r>
-          </a:p>
-        </p:txBody>
-      </p:sp>
-      <p:sp>
-        <p:nvSpPr>
-          <p:cNvPr id="4" name="Slide Number Placeholder 3"/>
-          <p:cNvSpPr>
-            <a:spLocks xmlns:a="http://schemas.openxmlformats.org/drawingml/2006/main" noGrp="1"/>
-          </p:cNvSpPr>
-          <p:nvPr>
-            <p:ph type="sldNum" idx="5"/>
-          </p:nvPr>
-        </p:nvSpPr>
-        <p:spPr/>
-        <p:txBody>
-          <a:bodyPr xmlns:a="http://schemas.openxmlformats.org/drawingml/2006/main"/>
-          <a:lstStyle xmlns:a="http://schemas.openxmlformats.org/drawingml/2006/main"/>
-          <a:p xmlns:a="http://schemas.openxmlformats.org/drawingml/2006/main"/>
-        </p:txBody>
-      </p:sp>
-    </p:spTree>
-  </p:cSld>
-  <p:clrMapOvr>
-    <a:masterClrMapping xmlns:a="http://schemas.openxmlformats.org/drawingml/2006/main"/>
-  </p:clrMapOvr>
-</p:notes>
-</file>
-
-<file path=ppt/notesSlides/notesSlide8.xml><?xml version="1.0" encoding="utf-8"?>
-<p:notes xmlns:p="http://schemas.openxmlformats.org/presentationml/2006/main">
-  <p:cSld>
-    <p:spTree>
-      <p:nvGrpSpPr>
-        <p:cNvPr id="1" name=""/>
-        <p:cNvGrpSpPr/>
-        <p:nvPr/>
-      </p:nvGrpSpPr>
-      <p:grpSpPr>
-        <a:xfrm xmlns:a="http://schemas.openxmlformats.org/drawingml/2006/main"/>
-      </p:grpSpPr>
-      <p:sp>
-        <p:nvSpPr>
-          <p:cNvPr id="2" name="Slide Image Placeholder 1"/>
-          <p:cNvSpPr>
-            <a:spLocks xmlns:a="http://schemas.openxmlformats.org/drawingml/2006/main" noGrp="1"/>
-          </p:cNvSpPr>
-          <p:nvPr>
-            <p:ph type="sldImg" idx="0"/>
-          </p:nvPr>
-        </p:nvSpPr>
-        <p:spPr/>
-      </p:sp>
-      <p:sp>
-        <p:nvSpPr>
-          <p:cNvPr id="3" name="Notes Placeholder 2"/>
-          <p:cNvSpPr>
-            <a:spLocks xmlns:a="http://schemas.openxmlformats.org/drawingml/2006/main" noGrp="1"/>
-          </p:cNvSpPr>
-          <p:nvPr>
-            <p:ph type="body" idx="1"/>
-          </p:nvPr>
-        </p:nvSpPr>
-        <p:spPr/>
-        <p:txBody>
-          <a:bodyPr xmlns:a="http://schemas.openxmlformats.org/drawingml/2006/main"/>
-          <a:lstStyle xmlns:a="http://schemas.openxmlformats.org/drawingml/2006/main"/>
-          <a:p xmlns:a="http://schemas.openxmlformats.org/drawingml/2006/main">
-            <a:r>
-              <a:t>Proposed future work; no measured jitter trace or deadline-miss reduction exists in the current experiment. Slides 6–7 add a fixed 2 ms decode budget to local reconstruction means. Other timing values are local reconstruction measurements. None are measured end-to-end VR results.</a:t>
+              <a:t>Proposed future work; no measured jitter trace or deadline-miss reduction exists in the current experiment. Slides 5–6 add a fixed 2 ms decode budget to local reconstruction means. Other timing values are local reconstruction measurements. None are measured end-to-end VR results.</a:t>
             </a:r>
           </a:p>
         </p:txBody>
@@ -986,7 +915,7 @@
           <p:cNvPr id="3" name="Title">
             <a:extLst xmlns:a="http://schemas.openxmlformats.org/drawingml/2006/main">
               <a:ext uri="{FF2B5EF4-FFF2-40B4-BE49-F238E27FC236}">
-                <a16:creationId xmlns:a16="http://schemas.microsoft.com/office/drawing/2014/main" id="{9FEE180B-B391-4566-B228-D1E047002823}"/>
+                <a16:creationId xmlns:a16="http://schemas.microsoft.com/office/drawing/2014/main" id="{2B873602-1825-4C9F-89B4-348F67A143DD}"/>
               </a:ext>
             </a:extLst>
           </p:cNvPr>
@@ -1215,7 +1144,7 @@
           <p:cNvPr id="2" name="Subtitle">
             <a:extLst xmlns:a="http://schemas.openxmlformats.org/drawingml/2006/main">
               <a:ext uri="{FF2B5EF4-FFF2-40B4-BE49-F238E27FC236}">
-                <a16:creationId xmlns:a16="http://schemas.microsoft.com/office/drawing/2014/main" id="{951D5504-1335-4E57-B3C8-C1B0E480ACF5}"/>
+                <a16:creationId xmlns:a16="http://schemas.microsoft.com/office/drawing/2014/main" id="{FDB43B04-B2BF-4150-86BA-AD2F926508E1}"/>
               </a:ext>
             </a:extLst>
           </p:cNvPr>
@@ -1461,7 +1390,7 @@
           <p:cNvPr id="2" name="Section title">
             <a:extLst xmlns:a="http://schemas.openxmlformats.org/drawingml/2006/main">
               <a:ext uri="{FF2B5EF4-FFF2-40B4-BE49-F238E27FC236}">
-                <a16:creationId xmlns:a16="http://schemas.microsoft.com/office/drawing/2014/main" id="{6DB74584-9611-4101-98B6-85A7848539A9}"/>
+                <a16:creationId xmlns:a16="http://schemas.microsoft.com/office/drawing/2014/main" id="{07304056-3C4A-42F0-9154-D26D831FA37F}"/>
               </a:ext>
             </a:extLst>
           </p:cNvPr>
@@ -1707,7 +1636,7 @@
           <p:cNvPr id="3" name="Title">
             <a:extLst xmlns:a="http://schemas.openxmlformats.org/drawingml/2006/main">
               <a:ext uri="{FF2B5EF4-FFF2-40B4-BE49-F238E27FC236}">
-                <a16:creationId xmlns:a16="http://schemas.microsoft.com/office/drawing/2014/main" id="{664199E0-B7F2-4DB6-AFC4-ECA2793DE071}"/>
+                <a16:creationId xmlns:a16="http://schemas.microsoft.com/office/drawing/2014/main" id="{746F2F85-032D-418F-8FF6-CB247A4A3586}"/>
               </a:ext>
             </a:extLst>
           </p:cNvPr>
@@ -1936,7 +1865,7 @@
           <p:cNvPr id="2" name="Body">
             <a:extLst xmlns:a="http://schemas.openxmlformats.org/drawingml/2006/main">
               <a:ext uri="{FF2B5EF4-FFF2-40B4-BE49-F238E27FC236}">
-                <a16:creationId xmlns:a16="http://schemas.microsoft.com/office/drawing/2014/main" id="{55D6F6FE-A9BA-4DAC-8EAD-90FA03099A33}"/>
+                <a16:creationId xmlns:a16="http://schemas.microsoft.com/office/drawing/2014/main" id="{575C660E-DC4A-4D2D-9454-10B999B867D4}"/>
               </a:ext>
             </a:extLst>
           </p:cNvPr>
@@ -2182,7 +2111,7 @@
           <p:cNvPr id="4" name="Title">
             <a:extLst xmlns:a="http://schemas.openxmlformats.org/drawingml/2006/main">
               <a:ext uri="{FF2B5EF4-FFF2-40B4-BE49-F238E27FC236}">
-                <a16:creationId xmlns:a16="http://schemas.microsoft.com/office/drawing/2014/main" id="{3484D47D-1E5D-4F41-9C39-4DEAB53DC7B9}"/>
+                <a16:creationId xmlns:a16="http://schemas.microsoft.com/office/drawing/2014/main" id="{4CDC0EFB-33C8-4675-824E-5713C8E462E5}"/>
               </a:ext>
             </a:extLst>
           </p:cNvPr>
@@ -2411,7 +2340,7 @@
           <p:cNvPr id="2" name="Left column">
             <a:extLst xmlns:a="http://schemas.openxmlformats.org/drawingml/2006/main">
               <a:ext uri="{FF2B5EF4-FFF2-40B4-BE49-F238E27FC236}">
-                <a16:creationId xmlns:a16="http://schemas.microsoft.com/office/drawing/2014/main" id="{C707FB4C-70BE-4CB6-96D0-9FE41028427E}"/>
+                <a16:creationId xmlns:a16="http://schemas.microsoft.com/office/drawing/2014/main" id="{ABDEF5BD-D96D-4E3C-9041-36AC92BAB0C4}"/>
               </a:ext>
             </a:extLst>
           </p:cNvPr>
@@ -2640,7 +2569,7 @@
           <p:cNvPr id="3" name="Right column">
             <a:extLst xmlns:a="http://schemas.openxmlformats.org/drawingml/2006/main">
               <a:ext uri="{FF2B5EF4-FFF2-40B4-BE49-F238E27FC236}">
-                <a16:creationId xmlns:a16="http://schemas.microsoft.com/office/drawing/2014/main" id="{BF24391E-9A9A-4004-AECC-7A5BAEB90E50}"/>
+                <a16:creationId xmlns:a16="http://schemas.microsoft.com/office/drawing/2014/main" id="{42695DE9-0F6C-42AB-B76C-CA2651021B19}"/>
               </a:ext>
             </a:extLst>
           </p:cNvPr>
@@ -2886,7 +2815,7 @@
           <p:cNvPr id="3" name="Title">
             <a:extLst xmlns:a="http://schemas.openxmlformats.org/drawingml/2006/main">
               <a:ext uri="{FF2B5EF4-FFF2-40B4-BE49-F238E27FC236}">
-                <a16:creationId xmlns:a16="http://schemas.microsoft.com/office/drawing/2014/main" id="{68E062D7-29BF-4D64-899A-3E9C73ABE2B5}"/>
+                <a16:creationId xmlns:a16="http://schemas.microsoft.com/office/drawing/2014/main" id="{A0EB5180-5B59-4F37-BE8F-B87E585B6CC4}"/>
               </a:ext>
             </a:extLst>
           </p:cNvPr>
@@ -3115,7 +3044,7 @@
           <p:cNvPr id="2" name="Left column">
             <a:extLst xmlns:a="http://schemas.openxmlformats.org/drawingml/2006/main">
               <a:ext uri="{FF2B5EF4-FFF2-40B4-BE49-F238E27FC236}">
-                <a16:creationId xmlns:a16="http://schemas.microsoft.com/office/drawing/2014/main" id="{2B3C3C8F-20C3-4776-8576-5E1973D9C271}"/>
+                <a16:creationId xmlns:a16="http://schemas.microsoft.com/office/drawing/2014/main" id="{FD8E5EC7-2F77-4ED2-BDFE-FDBDF54FADA9}"/>
               </a:ext>
             </a:extLst>
           </p:cNvPr>
@@ -3382,12 +3311,12 @@
   </p:cSld>
   <p:clrMap bg1="lt1" tx1="dk1" bg2="lt2" tx2="dk2" accent1="accent1" accent2="accent2" accent3="accent3" accent4="accent4" accent5="accent5" accent6="accent6" hlink="hlink" folHlink="folHlink"/>
   <p:sldLayoutIdLst>
-    <p:sldLayoutId xmlns:r="http://schemas.openxmlformats.org/officeDocument/2006/relationships" id="2147483649" r:id="Rf13116748e6548c0"/>
-    <p:sldLayoutId xmlns:r="http://schemas.openxmlformats.org/officeDocument/2006/relationships" id="2147483650" r:id="Rad1425ba87424009"/>
-    <p:sldLayoutId xmlns:r="http://schemas.openxmlformats.org/officeDocument/2006/relationships" id="2147483651" r:id="R3fb2548c22854566"/>
-    <p:sldLayoutId xmlns:r="http://schemas.openxmlformats.org/officeDocument/2006/relationships" id="2147483652" r:id="Ra6657312b3214369"/>
-    <p:sldLayoutId xmlns:r="http://schemas.openxmlformats.org/officeDocument/2006/relationships" id="2147483653" r:id="R4dcaf2e14cb44152"/>
-    <p:sldLayoutId xmlns:r="http://schemas.openxmlformats.org/officeDocument/2006/relationships" id="2147483654" r:id="Re59bd741f9e343e0"/>
+    <p:sldLayoutId xmlns:r="http://schemas.openxmlformats.org/officeDocument/2006/relationships" id="2147483649" r:id="R72a625dab0af494a"/>
+    <p:sldLayoutId xmlns:r="http://schemas.openxmlformats.org/officeDocument/2006/relationships" id="2147483650" r:id="Rd82813bafa7d4ac4"/>
+    <p:sldLayoutId xmlns:r="http://schemas.openxmlformats.org/officeDocument/2006/relationships" id="2147483651" r:id="R3ce94574400545e7"/>
+    <p:sldLayoutId xmlns:r="http://schemas.openxmlformats.org/officeDocument/2006/relationships" id="2147483652" r:id="Rebca27cfd7ae4322"/>
+    <p:sldLayoutId xmlns:r="http://schemas.openxmlformats.org/officeDocument/2006/relationships" id="2147483653" r:id="R61bdae2f7e984c52"/>
+    <p:sldLayoutId xmlns:r="http://schemas.openxmlformats.org/officeDocument/2006/relationships" id="2147483654" r:id="R95aab2068dac4af1"/>
   </p:sldLayoutIdLst>
   <p:txStyles>
     <p:titleStyle>
@@ -4259,7 +4188,7 @@
           <p:cNvPr id="5" name="">
             <a:extLst xmlns:a="http://schemas.openxmlformats.org/drawingml/2006/main">
               <a:ext uri="{FF2B5EF4-FFF2-40B4-BE49-F238E27FC236}">
-                <a16:creationId xmlns:a16="http://schemas.microsoft.com/office/drawing/2014/main" id="{D3AC35FD-4B7A-4808-9C27-08FD8D2BA0C4}"/>
+                <a16:creationId xmlns:a16="http://schemas.microsoft.com/office/drawing/2014/main" id="{7B329841-71F3-45D8-A5A2-5BFED7BE92E1}"/>
               </a:ext>
             </a:extLst>
           </p:cNvPr>
@@ -4317,7 +4246,7 @@
           <p:cNvPr id="2" name="">
             <a:extLst xmlns:a="http://schemas.openxmlformats.org/drawingml/2006/main">
               <a:ext uri="{FF2B5EF4-FFF2-40B4-BE49-F238E27FC236}">
-                <a16:creationId xmlns:a16="http://schemas.microsoft.com/office/drawing/2014/main" id="{21B3FB4B-F0FF-42E5-B558-758DC6360645}"/>
+                <a16:creationId xmlns:a16="http://schemas.microsoft.com/office/drawing/2014/main" id="{6EF72B89-AD12-43CF-A3D2-857E6E49EB85}"/>
               </a:ext>
             </a:extLst>
           </p:cNvPr>
@@ -4362,7 +4291,7 @@
           <p:cNvPr id="3" name="">
             <a:extLst xmlns:a="http://schemas.openxmlformats.org/drawingml/2006/main">
               <a:ext uri="{FF2B5EF4-FFF2-40B4-BE49-F238E27FC236}">
-                <a16:creationId xmlns:a16="http://schemas.microsoft.com/office/drawing/2014/main" id="{BA478614-551E-40A4-9C4C-83C8A749492A}"/>
+                <a16:creationId xmlns:a16="http://schemas.microsoft.com/office/drawing/2014/main" id="{BF2443F8-A1D6-4F14-B9ED-291E65E4D580}"/>
               </a:ext>
             </a:extLst>
           </p:cNvPr>
@@ -4407,7 +4336,7 @@
           <p:cNvPr id="4" name="">
             <a:extLst xmlns:a="http://schemas.openxmlformats.org/drawingml/2006/main">
               <a:ext uri="{FF2B5EF4-FFF2-40B4-BE49-F238E27FC236}">
-                <a16:creationId xmlns:a16="http://schemas.microsoft.com/office/drawing/2014/main" id="{7EC87427-EAF5-4E74-B91C-311D31F039B8}"/>
+                <a16:creationId xmlns:a16="http://schemas.microsoft.com/office/drawing/2014/main" id="{3144CD67-3E22-4238-BC7D-D7E1D8EFD421}"/>
               </a:ext>
             </a:extLst>
           </p:cNvPr>
@@ -4450,7 +4379,7 @@
     </p:spTree>
     <p:extLst>
       <p:ext uri="{BB962C8B-B14F-4D97-AF65-F5344CB8AC3E}">
-        <p14:creationId xmlns:p14="http://schemas.microsoft.com/office/powerpoint/2010/main" val="293171933"/>
+        <p14:creationId xmlns:p14="http://schemas.microsoft.com/office/powerpoint/2010/main" val="498036716"/>
       </p:ext>
     </p:extLst>
   </p:cSld>
@@ -4481,7 +4410,7 @@
           <p:cNvPr id="29" name="">
             <a:extLst xmlns:a="http://schemas.openxmlformats.org/drawingml/2006/main">
               <a:ext uri="{FF2B5EF4-FFF2-40B4-BE49-F238E27FC236}">
-                <a16:creationId xmlns:a16="http://schemas.microsoft.com/office/drawing/2014/main" id="{AD8FA9BA-C557-485C-863F-9E4BD7C6FE90}"/>
+                <a16:creationId xmlns:a16="http://schemas.microsoft.com/office/drawing/2014/main" id="{A3374315-5E62-4846-91D2-373249F6BD27}"/>
               </a:ext>
             </a:extLst>
           </p:cNvPr>
@@ -4526,7 +4455,7 @@
           <p:cNvPr id="2" name="">
             <a:extLst xmlns:a="http://schemas.openxmlformats.org/drawingml/2006/main">
               <a:ext uri="{FF2B5EF4-FFF2-40B4-BE49-F238E27FC236}">
-                <a16:creationId xmlns:a16="http://schemas.microsoft.com/office/drawing/2014/main" id="{C4AE0170-D966-4095-B886-0226A2355A64}"/>
+                <a16:creationId xmlns:a16="http://schemas.microsoft.com/office/drawing/2014/main" id="{335B14F7-50B1-4C94-9233-B0626B51A5B7}"/>
               </a:ext>
             </a:extLst>
           </p:cNvPr>
@@ -4556,7 +4485,7 @@
           <p:cNvPr id="3" name="">
             <a:extLst xmlns:a="http://schemas.openxmlformats.org/drawingml/2006/main">
               <a:ext uri="{FF2B5EF4-FFF2-40B4-BE49-F238E27FC236}">
-                <a16:creationId xmlns:a16="http://schemas.microsoft.com/office/drawing/2014/main" id="{56596B46-E5E5-4196-B3DF-D5421114F456}"/>
+                <a16:creationId xmlns:a16="http://schemas.microsoft.com/office/drawing/2014/main" id="{B197A882-C7C7-4194-8B62-BC075CC1E85D}"/>
               </a:ext>
             </a:extLst>
           </p:cNvPr>
@@ -4601,7 +4530,7 @@
           <p:cNvPr id="4" name="">
             <a:extLst xmlns:a="http://schemas.openxmlformats.org/drawingml/2006/main">
               <a:ext uri="{FF2B5EF4-FFF2-40B4-BE49-F238E27FC236}">
-                <a16:creationId xmlns:a16="http://schemas.microsoft.com/office/drawing/2014/main" id="{B7540364-42D7-406D-8E0E-6990929CEFC2}"/>
+                <a16:creationId xmlns:a16="http://schemas.microsoft.com/office/drawing/2014/main" id="{11A207DC-3B7D-48E8-89B6-C83C24F34AA0}"/>
               </a:ext>
             </a:extLst>
           </p:cNvPr>
@@ -4646,7 +4575,7 @@
           <p:cNvPr id="5" name="">
             <a:extLst xmlns:a="http://schemas.openxmlformats.org/drawingml/2006/main">
               <a:ext uri="{FF2B5EF4-FFF2-40B4-BE49-F238E27FC236}">
-                <a16:creationId xmlns:a16="http://schemas.microsoft.com/office/drawing/2014/main" id="{D93EADF1-E3D4-418C-BA16-0342278335C5}"/>
+                <a16:creationId xmlns:a16="http://schemas.microsoft.com/office/drawing/2014/main" id="{A2C23E07-BB3D-4466-9E98-446A3BB83CFF}"/>
               </a:ext>
             </a:extLst>
           </p:cNvPr>
@@ -4691,7 +4620,7 @@
           <p:cNvPr id="6" name="">
             <a:extLst xmlns:a="http://schemas.openxmlformats.org/drawingml/2006/main">
               <a:ext uri="{FF2B5EF4-FFF2-40B4-BE49-F238E27FC236}">
-                <a16:creationId xmlns:a16="http://schemas.microsoft.com/office/drawing/2014/main" id="{B541D8E6-3EBF-4A77-AA35-638F27D55611}"/>
+                <a16:creationId xmlns:a16="http://schemas.microsoft.com/office/drawing/2014/main" id="{28E01DD5-19A3-4F94-9DF1-5A66BC8D1A8E}"/>
               </a:ext>
             </a:extLst>
           </p:cNvPr>
@@ -4723,7 +4652,7 @@
           <p:cNvPr id="7" name="">
             <a:extLst xmlns:a="http://schemas.openxmlformats.org/drawingml/2006/main">
               <a:ext uri="{FF2B5EF4-FFF2-40B4-BE49-F238E27FC236}">
-                <a16:creationId xmlns:a16="http://schemas.microsoft.com/office/drawing/2014/main" id="{A24B6D2B-3FA7-4708-B8B7-7FC2A10204DA}"/>
+                <a16:creationId xmlns:a16="http://schemas.microsoft.com/office/drawing/2014/main" id="{8FCCEB64-880B-4EAC-B06B-82E405170BF4}"/>
               </a:ext>
             </a:extLst>
           </p:cNvPr>
@@ -4755,7 +4684,7 @@
           <p:cNvPr id="8" name="">
             <a:extLst xmlns:a="http://schemas.openxmlformats.org/drawingml/2006/main">
               <a:ext uri="{FF2B5EF4-FFF2-40B4-BE49-F238E27FC236}">
-                <a16:creationId xmlns:a16="http://schemas.microsoft.com/office/drawing/2014/main" id="{75A00B2D-FC9F-4EED-821F-18DC9D38372D}"/>
+                <a16:creationId xmlns:a16="http://schemas.microsoft.com/office/drawing/2014/main" id="{8785A3DB-6F13-458E-B129-B864948F3EA4}"/>
               </a:ext>
             </a:extLst>
           </p:cNvPr>
@@ -4787,7 +4716,7 @@
           <p:cNvPr id="9" name="">
             <a:extLst xmlns:a="http://schemas.openxmlformats.org/drawingml/2006/main">
               <a:ext uri="{FF2B5EF4-FFF2-40B4-BE49-F238E27FC236}">
-                <a16:creationId xmlns:a16="http://schemas.microsoft.com/office/drawing/2014/main" id="{EB0D189D-4CA2-45CA-B3BC-110853409893}"/>
+                <a16:creationId xmlns:a16="http://schemas.microsoft.com/office/drawing/2014/main" id="{EA1AAAAE-B75D-44EB-B6A5-353C240C3ED9}"/>
               </a:ext>
             </a:extLst>
           </p:cNvPr>
@@ -4832,7 +4761,7 @@
           <p:cNvPr id="10" name="">
             <a:extLst xmlns:a="http://schemas.openxmlformats.org/drawingml/2006/main">
               <a:ext uri="{FF2B5EF4-FFF2-40B4-BE49-F238E27FC236}">
-                <a16:creationId xmlns:a16="http://schemas.microsoft.com/office/drawing/2014/main" id="{D6FAFB12-9041-40CE-8FE2-1F1A96B967A6}"/>
+                <a16:creationId xmlns:a16="http://schemas.microsoft.com/office/drawing/2014/main" id="{B88A9E18-6631-4B7C-B186-47EC6A6D5C2F}"/>
               </a:ext>
             </a:extLst>
           </p:cNvPr>
@@ -4862,7 +4791,7 @@
           <p:cNvPr id="11" name="">
             <a:extLst xmlns:a="http://schemas.openxmlformats.org/drawingml/2006/main">
               <a:ext uri="{FF2B5EF4-FFF2-40B4-BE49-F238E27FC236}">
-                <a16:creationId xmlns:a16="http://schemas.microsoft.com/office/drawing/2014/main" id="{F35D49DE-3FC1-4963-BD13-79383AFBC6EA}"/>
+                <a16:creationId xmlns:a16="http://schemas.microsoft.com/office/drawing/2014/main" id="{C3281893-1F6F-491C-B0E1-910C5EF5686D}"/>
               </a:ext>
             </a:extLst>
           </p:cNvPr>
@@ -4907,7 +4836,7 @@
           <p:cNvPr id="12" name="">
             <a:extLst xmlns:a="http://schemas.openxmlformats.org/drawingml/2006/main">
               <a:ext uri="{FF2B5EF4-FFF2-40B4-BE49-F238E27FC236}">
-                <a16:creationId xmlns:a16="http://schemas.microsoft.com/office/drawing/2014/main" id="{31F43E90-0D70-42ED-B4D3-6D269D9D26E3}"/>
+                <a16:creationId xmlns:a16="http://schemas.microsoft.com/office/drawing/2014/main" id="{112DE810-0C11-4813-A48F-AFA37215893B}"/>
               </a:ext>
             </a:extLst>
           </p:cNvPr>
@@ -4939,7 +4868,7 @@
           <p:cNvPr id="13" name="">
             <a:extLst xmlns:a="http://schemas.openxmlformats.org/drawingml/2006/main">
               <a:ext uri="{FF2B5EF4-FFF2-40B4-BE49-F238E27FC236}">
-                <a16:creationId xmlns:a16="http://schemas.microsoft.com/office/drawing/2014/main" id="{D66E8372-9D83-410B-BD78-E3590AF68F5D}"/>
+                <a16:creationId xmlns:a16="http://schemas.microsoft.com/office/drawing/2014/main" id="{337180D7-7780-4E81-84DB-375B3A3065A3}"/>
               </a:ext>
             </a:extLst>
           </p:cNvPr>
@@ -4971,7 +4900,7 @@
           <p:cNvPr id="14" name="">
             <a:extLst xmlns:a="http://schemas.openxmlformats.org/drawingml/2006/main">
               <a:ext uri="{FF2B5EF4-FFF2-40B4-BE49-F238E27FC236}">
-                <a16:creationId xmlns:a16="http://schemas.microsoft.com/office/drawing/2014/main" id="{329C7A1A-15E0-423D-9372-92B7F73C852B}"/>
+                <a16:creationId xmlns:a16="http://schemas.microsoft.com/office/drawing/2014/main" id="{89EBDC18-0475-4C64-A4D1-F3A8F9994A94}"/>
               </a:ext>
             </a:extLst>
           </p:cNvPr>
@@ -5003,7 +4932,7 @@
           <p:cNvPr id="15" name="">
             <a:extLst xmlns:a="http://schemas.openxmlformats.org/drawingml/2006/main">
               <a:ext uri="{FF2B5EF4-FFF2-40B4-BE49-F238E27FC236}">
-                <a16:creationId xmlns:a16="http://schemas.microsoft.com/office/drawing/2014/main" id="{CACCA813-F062-44AA-B921-6CDB667F05E5}"/>
+                <a16:creationId xmlns:a16="http://schemas.microsoft.com/office/drawing/2014/main" id="{874A7636-527B-4300-B2F4-0BC2FD27A381}"/>
               </a:ext>
             </a:extLst>
           </p:cNvPr>
@@ -5048,7 +4977,7 @@
           <p:cNvPr id="16" name="">
             <a:extLst xmlns:a="http://schemas.openxmlformats.org/drawingml/2006/main">
               <a:ext uri="{FF2B5EF4-FFF2-40B4-BE49-F238E27FC236}">
-                <a16:creationId xmlns:a16="http://schemas.microsoft.com/office/drawing/2014/main" id="{4F6FB8BE-1FAF-4CA7-8E53-3C71FE676EB1}"/>
+                <a16:creationId xmlns:a16="http://schemas.microsoft.com/office/drawing/2014/main" id="{2D3F4508-6E20-404D-8B4E-DCD0A5840A14}"/>
               </a:ext>
             </a:extLst>
           </p:cNvPr>
@@ -5078,7 +5007,7 @@
           <p:cNvPr id="17" name="">
             <a:extLst xmlns:a="http://schemas.openxmlformats.org/drawingml/2006/main">
               <a:ext uri="{FF2B5EF4-FFF2-40B4-BE49-F238E27FC236}">
-                <a16:creationId xmlns:a16="http://schemas.microsoft.com/office/drawing/2014/main" id="{79B8B42B-D9CD-401D-8820-B7C9D6D15021}"/>
+                <a16:creationId xmlns:a16="http://schemas.microsoft.com/office/drawing/2014/main" id="{51C216B4-5F4B-4ECE-9B98-BE8B4814E2EE}"/>
               </a:ext>
             </a:extLst>
           </p:cNvPr>
@@ -5123,7 +5052,7 @@
           <p:cNvPr id="18" name="">
             <a:extLst xmlns:a="http://schemas.openxmlformats.org/drawingml/2006/main">
               <a:ext uri="{FF2B5EF4-FFF2-40B4-BE49-F238E27FC236}">
-                <a16:creationId xmlns:a16="http://schemas.microsoft.com/office/drawing/2014/main" id="{592C2AF6-43F4-4F05-8CB5-C372720D787A}"/>
+                <a16:creationId xmlns:a16="http://schemas.microsoft.com/office/drawing/2014/main" id="{F617FD9F-8FD9-4F94-9FB0-96DC55904C8C}"/>
               </a:ext>
             </a:extLst>
           </p:cNvPr>
@@ -5155,7 +5084,7 @@
           <p:cNvPr id="19" name="">
             <a:extLst xmlns:a="http://schemas.openxmlformats.org/drawingml/2006/main">
               <a:ext uri="{FF2B5EF4-FFF2-40B4-BE49-F238E27FC236}">
-                <a16:creationId xmlns:a16="http://schemas.microsoft.com/office/drawing/2014/main" id="{FE806FD0-9AE0-42B5-AB9B-BA3CA9867CCE}"/>
+                <a16:creationId xmlns:a16="http://schemas.microsoft.com/office/drawing/2014/main" id="{A64B526B-600B-401F-A256-9118E187A69D}"/>
               </a:ext>
             </a:extLst>
           </p:cNvPr>
@@ -5187,7 +5116,7 @@
           <p:cNvPr id="20" name="">
             <a:extLst xmlns:a="http://schemas.openxmlformats.org/drawingml/2006/main">
               <a:ext uri="{FF2B5EF4-FFF2-40B4-BE49-F238E27FC236}">
-                <a16:creationId xmlns:a16="http://schemas.microsoft.com/office/drawing/2014/main" id="{E4568A97-AD65-459C-88E8-9736E3451974}"/>
+                <a16:creationId xmlns:a16="http://schemas.microsoft.com/office/drawing/2014/main" id="{DD9E5178-FAA3-4886-9570-989CD76FB969}"/>
               </a:ext>
             </a:extLst>
           </p:cNvPr>
@@ -5219,7 +5148,7 @@
           <p:cNvPr id="21" name="">
             <a:extLst xmlns:a="http://schemas.openxmlformats.org/drawingml/2006/main">
               <a:ext uri="{FF2B5EF4-FFF2-40B4-BE49-F238E27FC236}">
-                <a16:creationId xmlns:a16="http://schemas.microsoft.com/office/drawing/2014/main" id="{234A82CF-F4EF-4814-8645-BA109DE93118}"/>
+                <a16:creationId xmlns:a16="http://schemas.microsoft.com/office/drawing/2014/main" id="{6B6006C2-B8F4-411C-8564-6FAD320329FA}"/>
               </a:ext>
             </a:extLst>
           </p:cNvPr>
@@ -5264,7 +5193,7 @@
           <p:cNvPr id="22" name="">
             <a:extLst xmlns:a="http://schemas.openxmlformats.org/drawingml/2006/main">
               <a:ext uri="{FF2B5EF4-FFF2-40B4-BE49-F238E27FC236}">
-                <a16:creationId xmlns:a16="http://schemas.microsoft.com/office/drawing/2014/main" id="{A6DA4740-6DD5-438A-BA78-080B7B2871BF}"/>
+                <a16:creationId xmlns:a16="http://schemas.microsoft.com/office/drawing/2014/main" id="{1876054E-77DF-4268-AC39-A83F0EAA506A}"/>
               </a:ext>
             </a:extLst>
           </p:cNvPr>
@@ -5294,7 +5223,7 @@
           <p:cNvPr id="23" name="">
             <a:extLst xmlns:a="http://schemas.openxmlformats.org/drawingml/2006/main">
               <a:ext uri="{FF2B5EF4-FFF2-40B4-BE49-F238E27FC236}">
-                <a16:creationId xmlns:a16="http://schemas.microsoft.com/office/drawing/2014/main" id="{3CDAE90E-9F00-4CA8-B816-9137592620C1}"/>
+                <a16:creationId xmlns:a16="http://schemas.microsoft.com/office/drawing/2014/main" id="{B6DC4478-DF8D-494F-A7EF-C248D10401CE}"/>
               </a:ext>
             </a:extLst>
           </p:cNvPr>
@@ -5324,7 +5253,7 @@
           <p:cNvPr id="24" name="">
             <a:extLst xmlns:a="http://schemas.openxmlformats.org/drawingml/2006/main">
               <a:ext uri="{FF2B5EF4-FFF2-40B4-BE49-F238E27FC236}">
-                <a16:creationId xmlns:a16="http://schemas.microsoft.com/office/drawing/2014/main" id="{73F6C8AD-4EEE-4173-A633-5C709E7504AF}"/>
+                <a16:creationId xmlns:a16="http://schemas.microsoft.com/office/drawing/2014/main" id="{335CBA70-DD47-4D17-B41B-7BC78208F659}"/>
               </a:ext>
             </a:extLst>
           </p:cNvPr>
@@ -5369,7 +5298,7 @@
           <p:cNvPr id="25" name="">
             <a:extLst xmlns:a="http://schemas.openxmlformats.org/drawingml/2006/main">
               <a:ext uri="{FF2B5EF4-FFF2-40B4-BE49-F238E27FC236}">
-                <a16:creationId xmlns:a16="http://schemas.microsoft.com/office/drawing/2014/main" id="{6293FBF7-3991-4348-B208-61597910F068}"/>
+                <a16:creationId xmlns:a16="http://schemas.microsoft.com/office/drawing/2014/main" id="{A3291467-25B4-4F59-99D4-DE69D47ABA0C}"/>
               </a:ext>
             </a:extLst>
           </p:cNvPr>
@@ -5414,7 +5343,7 @@
           <p:cNvPr id="26" name="">
             <a:extLst xmlns:a="http://schemas.openxmlformats.org/drawingml/2006/main">
               <a:ext uri="{FF2B5EF4-FFF2-40B4-BE49-F238E27FC236}">
-                <a16:creationId xmlns:a16="http://schemas.microsoft.com/office/drawing/2014/main" id="{008CD56A-B1CA-4448-A649-5CAF8ECD9CF5}"/>
+                <a16:creationId xmlns:a16="http://schemas.microsoft.com/office/drawing/2014/main" id="{5E374B4D-4E1E-4370-A018-4675F5C906F2}"/>
               </a:ext>
             </a:extLst>
           </p:cNvPr>
@@ -5459,7 +5388,7 @@
           <p:cNvPr id="27" name="">
             <a:extLst xmlns:a="http://schemas.openxmlformats.org/drawingml/2006/main">
               <a:ext uri="{FF2B5EF4-FFF2-40B4-BE49-F238E27FC236}">
-                <a16:creationId xmlns:a16="http://schemas.microsoft.com/office/drawing/2014/main" id="{A15931AA-CA09-4172-9590-BC2732046666}"/>
+                <a16:creationId xmlns:a16="http://schemas.microsoft.com/office/drawing/2014/main" id="{F5245022-2F24-4EA5-A4EF-60B65847FF00}"/>
               </a:ext>
             </a:extLst>
           </p:cNvPr>
@@ -5504,7 +5433,7 @@
           <p:cNvPr id="28" name="">
             <a:extLst xmlns:a="http://schemas.openxmlformats.org/drawingml/2006/main">
               <a:ext uri="{FF2B5EF4-FFF2-40B4-BE49-F238E27FC236}">
-                <a16:creationId xmlns:a16="http://schemas.microsoft.com/office/drawing/2014/main" id="{BBC1D921-351D-4333-823D-70CF2BB502CA}"/>
+                <a16:creationId xmlns:a16="http://schemas.microsoft.com/office/drawing/2014/main" id="{74D56FB4-12B3-4DA5-AB16-18FEFDDF4A6B}"/>
               </a:ext>
             </a:extLst>
           </p:cNvPr>
@@ -5547,7 +5476,7 @@
     </p:spTree>
     <p:extLst>
       <p:ext uri="{BB962C8B-B14F-4D97-AF65-F5344CB8AC3E}">
-        <p14:creationId xmlns:p14="http://schemas.microsoft.com/office/powerpoint/2010/main" val="1281607458"/>
+        <p14:creationId xmlns:p14="http://schemas.microsoft.com/office/powerpoint/2010/main" val="1832760697"/>
       </p:ext>
     </p:extLst>
   </p:cSld>
@@ -5578,7 +5507,7 @@
           <p:cNvPr id="15" name="">
             <a:extLst xmlns:a="http://schemas.openxmlformats.org/drawingml/2006/main">
               <a:ext uri="{FF2B5EF4-FFF2-40B4-BE49-F238E27FC236}">
-                <a16:creationId xmlns:a16="http://schemas.microsoft.com/office/drawing/2014/main" id="{A4C5F1E0-D8E0-437D-A671-9EE943966AED}"/>
+                <a16:creationId xmlns:a16="http://schemas.microsoft.com/office/drawing/2014/main" id="{2209CFF3-E307-4319-9953-EC9EFA8A0F89}"/>
               </a:ext>
             </a:extLst>
           </p:cNvPr>
@@ -5623,7 +5552,7 @@
           <p:cNvPr id="2" name="">
             <a:extLst xmlns:a="http://schemas.openxmlformats.org/drawingml/2006/main">
               <a:ext uri="{FF2B5EF4-FFF2-40B4-BE49-F238E27FC236}">
-                <a16:creationId xmlns:a16="http://schemas.microsoft.com/office/drawing/2014/main" id="{0F639B5C-66C3-44DD-B4A8-88CF55414449}"/>
+                <a16:creationId xmlns:a16="http://schemas.microsoft.com/office/drawing/2014/main" id="{1DCAA4AB-E29F-45C1-8EB3-A662D4F049F5}"/>
               </a:ext>
             </a:extLst>
           </p:cNvPr>
@@ -5653,7 +5582,7 @@
           <p:cNvPr id="3" name="">
             <a:extLst xmlns:a="http://schemas.openxmlformats.org/drawingml/2006/main">
               <a:ext uri="{FF2B5EF4-FFF2-40B4-BE49-F238E27FC236}">
-                <a16:creationId xmlns:a16="http://schemas.microsoft.com/office/drawing/2014/main" id="{1FE47D76-4B61-4E68-82AC-A0DB1580B2CF}"/>
+                <a16:creationId xmlns:a16="http://schemas.microsoft.com/office/drawing/2014/main" id="{031CD144-DDD5-4FC3-8821-1A0B304DCDA2}"/>
               </a:ext>
             </a:extLst>
           </p:cNvPr>
@@ -5698,19 +5627,19 @@
           <p:cNvPr id="4" name="">
             <a:extLst xmlns:a="http://schemas.openxmlformats.org/drawingml/2006/main">
               <a:ext uri="{FF2B5EF4-FFF2-40B4-BE49-F238E27FC236}">
-                <a16:creationId xmlns:a16="http://schemas.microsoft.com/office/drawing/2014/main" id="{E49CCAB6-E288-47B9-AA09-6CCB2ACCE90A}"/>
-              </a:ext>
-            </a:extLst>
-          </p:cNvPr>
-          <p:cNvSpPr>
-            <a:spLocks xmlns:a="http://schemas.openxmlformats.org/drawingml/2006/main" noGrp="1"/>
-          </p:cNvSpPr>
-          <p:nvPr/>
-        </p:nvSpPr>
-        <p:spPr>
-          <a:xfrm xmlns:a="http://schemas.openxmlformats.org/drawingml/2006/main">
-            <a:off x="609600" y="2219325"/>
-            <a:ext cx="3333750" cy="552450"/>
+                <a16:creationId xmlns:a16="http://schemas.microsoft.com/office/drawing/2014/main" id="{3E4B0435-2181-48B3-AB00-DF0482E7DA70}"/>
+              </a:ext>
+            </a:extLst>
+          </p:cNvPr>
+          <p:cNvSpPr>
+            <a:spLocks xmlns:a="http://schemas.openxmlformats.org/drawingml/2006/main" noGrp="1"/>
+          </p:cNvSpPr>
+          <p:nvPr/>
+        </p:nvSpPr>
+        <p:spPr>
+          <a:xfrm xmlns:a="http://schemas.openxmlformats.org/drawingml/2006/main">
+            <a:off x="762000" y="2333625"/>
+            <a:ext cx="2857500" cy="552450"/>
           </a:xfrm>
           <a:prstGeom xmlns:a="http://schemas.openxmlformats.org/drawingml/2006/main" prst="rect">
             <a:avLst/>
@@ -5743,19 +5672,19 @@
           <p:cNvPr id="5" name="">
             <a:extLst xmlns:a="http://schemas.openxmlformats.org/drawingml/2006/main">
               <a:ext uri="{FF2B5EF4-FFF2-40B4-BE49-F238E27FC236}">
-                <a16:creationId xmlns:a16="http://schemas.microsoft.com/office/drawing/2014/main" id="{EB94666F-9FA1-437D-9032-63AE83984039}"/>
-              </a:ext>
-            </a:extLst>
-          </p:cNvPr>
-          <p:cNvSpPr>
-            <a:spLocks xmlns:a="http://schemas.openxmlformats.org/drawingml/2006/main" noGrp="1"/>
-          </p:cNvSpPr>
-          <p:nvPr/>
-        </p:nvSpPr>
-        <p:spPr>
-          <a:xfrm xmlns:a="http://schemas.openxmlformats.org/drawingml/2006/main">
-            <a:off x="3238500" y="2362200"/>
-            <a:ext cx="1333500" cy="238125"/>
+                <a16:creationId xmlns:a16="http://schemas.microsoft.com/office/drawing/2014/main" id="{3FF9513A-B0B8-4C7C-8AB9-A3E5ABA616CD}"/>
+              </a:ext>
+            </a:extLst>
+          </p:cNvPr>
+          <p:cNvSpPr>
+            <a:spLocks xmlns:a="http://schemas.openxmlformats.org/drawingml/2006/main" noGrp="1"/>
+          </p:cNvSpPr>
+          <p:nvPr/>
+        </p:nvSpPr>
+        <p:spPr>
+          <a:xfrm xmlns:a="http://schemas.openxmlformats.org/drawingml/2006/main">
+            <a:off x="3524250" y="2505075"/>
+            <a:ext cx="1381125" cy="238125"/>
           </a:xfrm>
           <a:prstGeom xmlns:a="http://schemas.openxmlformats.org/drawingml/2006/main" prst="rightArrow">
             <a:avLst/>
@@ -5775,19 +5704,19 @@
           <p:cNvPr id="6" name="">
             <a:extLst xmlns:a="http://schemas.openxmlformats.org/drawingml/2006/main">
               <a:ext uri="{FF2B5EF4-FFF2-40B4-BE49-F238E27FC236}">
-                <a16:creationId xmlns:a16="http://schemas.microsoft.com/office/drawing/2014/main" id="{698DF346-5E83-4826-8FE4-B2CB7A52EAF1}"/>
-              </a:ext>
-            </a:extLst>
-          </p:cNvPr>
-          <p:cNvSpPr>
-            <a:spLocks xmlns:a="http://schemas.openxmlformats.org/drawingml/2006/main" noGrp="1"/>
-          </p:cNvSpPr>
-          <p:nvPr/>
-        </p:nvSpPr>
-        <p:spPr>
-          <a:xfrm xmlns:a="http://schemas.openxmlformats.org/drawingml/2006/main">
-            <a:off x="5095875" y="1714500"/>
-            <a:ext cx="6191250" cy="1476375"/>
+                <a16:creationId xmlns:a16="http://schemas.microsoft.com/office/drawing/2014/main" id="{4D1F1170-648D-4E00-9F09-D4C944A31B1B}"/>
+              </a:ext>
+            </a:extLst>
+          </p:cNvPr>
+          <p:cNvSpPr>
+            <a:spLocks xmlns:a="http://schemas.openxmlformats.org/drawingml/2006/main" noGrp="1"/>
+          </p:cNvSpPr>
+          <p:nvPr/>
+        </p:nvSpPr>
+        <p:spPr>
+          <a:xfrm xmlns:a="http://schemas.openxmlformats.org/drawingml/2006/main">
+            <a:off x="6667500" y="1514475"/>
+            <a:ext cx="3429000" cy="1928813"/>
           </a:xfrm>
           <a:prstGeom xmlns:a="http://schemas.openxmlformats.org/drawingml/2006/main" prst="rect">
             <a:avLst/>
@@ -5807,19 +5736,19 @@
           <p:cNvPr id="7" name="">
             <a:extLst xmlns:a="http://schemas.openxmlformats.org/drawingml/2006/main">
               <a:ext uri="{FF2B5EF4-FFF2-40B4-BE49-F238E27FC236}">
-                <a16:creationId xmlns:a16="http://schemas.microsoft.com/office/drawing/2014/main" id="{EBF3D435-193A-46AF-A6DF-EF36D7DA6D22}"/>
-              </a:ext>
-            </a:extLst>
-          </p:cNvPr>
-          <p:cNvSpPr>
-            <a:spLocks xmlns:a="http://schemas.openxmlformats.org/drawingml/2006/main" noGrp="1"/>
-          </p:cNvSpPr>
-          <p:nvPr/>
-        </p:nvSpPr>
-        <p:spPr>
-          <a:xfrm xmlns:a="http://schemas.openxmlformats.org/drawingml/2006/main">
-            <a:off x="6381750" y="1905000"/>
-            <a:ext cx="3619500" cy="1095375"/>
+                <a16:creationId xmlns:a16="http://schemas.microsoft.com/office/drawing/2014/main" id="{CA05F302-861F-4ABE-8E6F-CA051C37B17E}"/>
+              </a:ext>
+            </a:extLst>
+          </p:cNvPr>
+          <p:cNvSpPr>
+            <a:spLocks xmlns:a="http://schemas.openxmlformats.org/drawingml/2006/main" noGrp="1"/>
+          </p:cNvSpPr>
+          <p:nvPr/>
+        </p:nvSpPr>
+        <p:spPr>
+          <a:xfrm xmlns:a="http://schemas.openxmlformats.org/drawingml/2006/main">
+            <a:off x="7181850" y="1803797"/>
+            <a:ext cx="2400300" cy="1350169"/>
           </a:xfrm>
           <a:prstGeom xmlns:a="http://schemas.openxmlformats.org/drawingml/2006/main" prst="rect">
             <a:avLst/>
@@ -5839,19 +5768,19 @@
           <p:cNvPr id="8" name="">
             <a:extLst xmlns:a="http://schemas.openxmlformats.org/drawingml/2006/main">
               <a:ext uri="{FF2B5EF4-FFF2-40B4-BE49-F238E27FC236}">
-                <a16:creationId xmlns:a16="http://schemas.microsoft.com/office/drawing/2014/main" id="{DA81EFA4-E2F4-4914-AA4F-ACAC0D4CAB8F}"/>
-              </a:ext>
-            </a:extLst>
-          </p:cNvPr>
-          <p:cNvSpPr>
-            <a:spLocks xmlns:a="http://schemas.openxmlformats.org/drawingml/2006/main" noGrp="1"/>
-          </p:cNvSpPr>
-          <p:nvPr/>
-        </p:nvSpPr>
-        <p:spPr>
-          <a:xfrm xmlns:a="http://schemas.openxmlformats.org/drawingml/2006/main">
-            <a:off x="6153150" y="3333750"/>
-            <a:ext cx="5286375" cy="428625"/>
+                <a16:creationId xmlns:a16="http://schemas.microsoft.com/office/drawing/2014/main" id="{50F8B852-4217-4A38-917A-3867D45D4AEB}"/>
+              </a:ext>
+            </a:extLst>
+          </p:cNvPr>
+          <p:cNvSpPr>
+            <a:spLocks xmlns:a="http://schemas.openxmlformats.org/drawingml/2006/main" noGrp="1"/>
+          </p:cNvSpPr>
+          <p:nvPr/>
+        </p:nvSpPr>
+        <p:spPr>
+          <a:xfrm xmlns:a="http://schemas.openxmlformats.org/drawingml/2006/main">
+            <a:off x="857250" y="3076575"/>
+            <a:ext cx="5048250" cy="381000"/>
           </a:xfrm>
           <a:prstGeom xmlns:a="http://schemas.openxmlformats.org/drawingml/2006/main" prst="rect">
             <a:avLst/>
@@ -5866,7 +5795,7 @@
           <a:lstStyle xmlns:a="http://schemas.openxmlformats.org/drawingml/2006/main"/>
           <a:p xmlns:a="http://schemas.openxmlformats.org/drawingml/2006/main">
             <a:r>
-              <a:rPr sz="2175" b="1">
+              <a:rPr sz="2100" b="1">
                 <a:solidFill>
                   <a:srgbClr val="086B93"/>
                 </a:solidFill>
@@ -5884,19 +5813,19 @@
           <p:cNvPr id="9" name="">
             <a:extLst xmlns:a="http://schemas.openxmlformats.org/drawingml/2006/main">
               <a:ext uri="{FF2B5EF4-FFF2-40B4-BE49-F238E27FC236}">
-                <a16:creationId xmlns:a16="http://schemas.microsoft.com/office/drawing/2014/main" id="{E65B4E72-6CC4-4DFE-9C63-D6B76395A12F}"/>
-              </a:ext>
-            </a:extLst>
-          </p:cNvPr>
-          <p:cNvSpPr>
-            <a:spLocks xmlns:a="http://schemas.openxmlformats.org/drawingml/2006/main" noGrp="1"/>
-          </p:cNvSpPr>
-          <p:nvPr/>
-        </p:nvSpPr>
-        <p:spPr>
-          <a:xfrm xmlns:a="http://schemas.openxmlformats.org/drawingml/2006/main">
-            <a:off x="609600" y="4248150"/>
-            <a:ext cx="3333750" cy="552450"/>
+                <a16:creationId xmlns:a16="http://schemas.microsoft.com/office/drawing/2014/main" id="{180BB3A1-656D-47A2-83DC-F578B649150E}"/>
+              </a:ext>
+            </a:extLst>
+          </p:cNvPr>
+          <p:cNvSpPr>
+            <a:spLocks xmlns:a="http://schemas.openxmlformats.org/drawingml/2006/main" noGrp="1"/>
+          </p:cNvSpPr>
+          <p:nvPr/>
+        </p:nvSpPr>
+        <p:spPr>
+          <a:xfrm xmlns:a="http://schemas.openxmlformats.org/drawingml/2006/main">
+            <a:off x="762000" y="4505325"/>
+            <a:ext cx="2857500" cy="552450"/>
           </a:xfrm>
           <a:prstGeom xmlns:a="http://schemas.openxmlformats.org/drawingml/2006/main" prst="rect">
             <a:avLst/>
@@ -5929,19 +5858,19 @@
           <p:cNvPr id="10" name="">
             <a:extLst xmlns:a="http://schemas.openxmlformats.org/drawingml/2006/main">
               <a:ext uri="{FF2B5EF4-FFF2-40B4-BE49-F238E27FC236}">
-                <a16:creationId xmlns:a16="http://schemas.microsoft.com/office/drawing/2014/main" id="{406E9A6E-5726-474A-BC0D-28CDD7529F28}"/>
-              </a:ext>
-            </a:extLst>
-          </p:cNvPr>
-          <p:cNvSpPr>
-            <a:spLocks xmlns:a="http://schemas.openxmlformats.org/drawingml/2006/main" noGrp="1"/>
-          </p:cNvSpPr>
-          <p:nvPr/>
-        </p:nvSpPr>
-        <p:spPr>
-          <a:xfrm xmlns:a="http://schemas.openxmlformats.org/drawingml/2006/main">
-            <a:off x="3238500" y="4391025"/>
-            <a:ext cx="1333500" cy="238125"/>
+                <a16:creationId xmlns:a16="http://schemas.microsoft.com/office/drawing/2014/main" id="{5E1A5D89-E3CD-48D3-93C8-2CEC8764D4CC}"/>
+              </a:ext>
+            </a:extLst>
+          </p:cNvPr>
+          <p:cNvSpPr>
+            <a:spLocks xmlns:a="http://schemas.openxmlformats.org/drawingml/2006/main" noGrp="1"/>
+          </p:cNvSpPr>
+          <p:nvPr/>
+        </p:nvSpPr>
+        <p:spPr>
+          <a:xfrm xmlns:a="http://schemas.openxmlformats.org/drawingml/2006/main">
+            <a:off x="3524250" y="4676775"/>
+            <a:ext cx="1381125" cy="238125"/>
           </a:xfrm>
           <a:prstGeom xmlns:a="http://schemas.openxmlformats.org/drawingml/2006/main" prst="rightArrow">
             <a:avLst/>
@@ -5961,19 +5890,19 @@
           <p:cNvPr id="11" name="">
             <a:extLst xmlns:a="http://schemas.openxmlformats.org/drawingml/2006/main">
               <a:ext uri="{FF2B5EF4-FFF2-40B4-BE49-F238E27FC236}">
-                <a16:creationId xmlns:a16="http://schemas.microsoft.com/office/drawing/2014/main" id="{DDD9CF34-D6DD-46F4-A8ED-54FB513A4AAE}"/>
-              </a:ext>
-            </a:extLst>
-          </p:cNvPr>
-          <p:cNvSpPr>
-            <a:spLocks xmlns:a="http://schemas.openxmlformats.org/drawingml/2006/main" noGrp="1"/>
-          </p:cNvSpPr>
-          <p:nvPr/>
-        </p:nvSpPr>
-        <p:spPr>
-          <a:xfrm xmlns:a="http://schemas.openxmlformats.org/drawingml/2006/main">
-            <a:off x="5095875" y="3857625"/>
-            <a:ext cx="6191250" cy="1476375"/>
+                <a16:creationId xmlns:a16="http://schemas.microsoft.com/office/drawing/2014/main" id="{EE2B8706-E23C-4C1B-809B-F8EDCE283898}"/>
+              </a:ext>
+            </a:extLst>
+          </p:cNvPr>
+          <p:cNvSpPr>
+            <a:spLocks xmlns:a="http://schemas.openxmlformats.org/drawingml/2006/main" noGrp="1"/>
+          </p:cNvSpPr>
+          <p:nvPr/>
+        </p:nvSpPr>
+        <p:spPr>
+          <a:xfrm xmlns:a="http://schemas.openxmlformats.org/drawingml/2006/main">
+            <a:off x="6667500" y="3857625"/>
+            <a:ext cx="3429000" cy="1928813"/>
           </a:xfrm>
           <a:prstGeom xmlns:a="http://schemas.openxmlformats.org/drawingml/2006/main" prst="rect">
             <a:avLst/>
@@ -5993,19 +5922,19 @@
           <p:cNvPr id="12" name="">
             <a:extLst xmlns:a="http://schemas.openxmlformats.org/drawingml/2006/main">
               <a:ext uri="{FF2B5EF4-FFF2-40B4-BE49-F238E27FC236}">
-                <a16:creationId xmlns:a16="http://schemas.microsoft.com/office/drawing/2014/main" id="{33DD13F8-305F-415D-B184-2CC909298569}"/>
-              </a:ext>
-            </a:extLst>
-          </p:cNvPr>
-          <p:cNvSpPr>
-            <a:spLocks xmlns:a="http://schemas.openxmlformats.org/drawingml/2006/main" noGrp="1"/>
-          </p:cNvSpPr>
-          <p:nvPr/>
-        </p:nvSpPr>
-        <p:spPr>
-          <a:xfrm xmlns:a="http://schemas.openxmlformats.org/drawingml/2006/main">
-            <a:off x="7667625" y="4305300"/>
-            <a:ext cx="1047750" cy="590550"/>
+                <a16:creationId xmlns:a16="http://schemas.microsoft.com/office/drawing/2014/main" id="{25C1904A-A86C-4ED6-8A71-82271909787A}"/>
+              </a:ext>
+            </a:extLst>
+          </p:cNvPr>
+          <p:cNvSpPr>
+            <a:spLocks xmlns:a="http://schemas.openxmlformats.org/drawingml/2006/main" noGrp="1"/>
+          </p:cNvSpPr>
+          <p:nvPr/>
+        </p:nvSpPr>
+        <p:spPr>
+          <a:xfrm xmlns:a="http://schemas.openxmlformats.org/drawingml/2006/main">
+            <a:off x="7867650" y="4532709"/>
+            <a:ext cx="1028700" cy="578644"/>
           </a:xfrm>
           <a:prstGeom xmlns:a="http://schemas.openxmlformats.org/drawingml/2006/main" prst="rect">
             <a:avLst/>
@@ -6025,19 +5954,19 @@
           <p:cNvPr id="13" name="">
             <a:extLst xmlns:a="http://schemas.openxmlformats.org/drawingml/2006/main">
               <a:ext uri="{FF2B5EF4-FFF2-40B4-BE49-F238E27FC236}">
-                <a16:creationId xmlns:a16="http://schemas.microsoft.com/office/drawing/2014/main" id="{BC87A948-516E-42C7-9A96-9F98249AC24D}"/>
-              </a:ext>
-            </a:extLst>
-          </p:cNvPr>
-          <p:cNvSpPr>
-            <a:spLocks xmlns:a="http://schemas.openxmlformats.org/drawingml/2006/main" noGrp="1"/>
-          </p:cNvSpPr>
-          <p:nvPr/>
-        </p:nvSpPr>
-        <p:spPr>
-          <a:xfrm xmlns:a="http://schemas.openxmlformats.org/drawingml/2006/main">
-            <a:off x="5953125" y="5476875"/>
-            <a:ext cx="5524500" cy="381000"/>
+                <a16:creationId xmlns:a16="http://schemas.microsoft.com/office/drawing/2014/main" id="{FEBB12A1-6FC0-4760-BDA3-D748443FD5D6}"/>
+              </a:ext>
+            </a:extLst>
+          </p:cNvPr>
+          <p:cNvSpPr>
+            <a:spLocks xmlns:a="http://schemas.openxmlformats.org/drawingml/2006/main" noGrp="1"/>
+          </p:cNvSpPr>
+          <p:nvPr/>
+        </p:nvSpPr>
+        <p:spPr>
+          <a:xfrm xmlns:a="http://schemas.openxmlformats.org/drawingml/2006/main">
+            <a:off x="857250" y="5248275"/>
+            <a:ext cx="5048250" cy="381000"/>
           </a:xfrm>
           <a:prstGeom xmlns:a="http://schemas.openxmlformats.org/drawingml/2006/main" prst="rect">
             <a:avLst/>
@@ -6052,7 +5981,7 @@
           <a:lstStyle xmlns:a="http://schemas.openxmlformats.org/drawingml/2006/main"/>
           <a:p xmlns:a="http://schemas.openxmlformats.org/drawingml/2006/main">
             <a:r>
-              <a:rPr sz="2175" b="1">
+              <a:rPr sz="2100" b="1">
                 <a:solidFill>
                   <a:srgbClr val="148B83"/>
                 </a:solidFill>
@@ -6070,7 +5999,7 @@
           <p:cNvPr id="14" name="">
             <a:extLst xmlns:a="http://schemas.openxmlformats.org/drawingml/2006/main">
               <a:ext uri="{FF2B5EF4-FFF2-40B4-BE49-F238E27FC236}">
-                <a16:creationId xmlns:a16="http://schemas.microsoft.com/office/drawing/2014/main" id="{F5334C83-4985-40E6-80BA-DF9E109029FF}"/>
+                <a16:creationId xmlns:a16="http://schemas.microsoft.com/office/drawing/2014/main" id="{FED5BA41-A66F-46A4-AFC0-376DFB8D4183}"/>
               </a:ext>
             </a:extLst>
           </p:cNvPr>
@@ -6113,7 +6042,7 @@
     </p:spTree>
     <p:extLst>
       <p:ext uri="{BB962C8B-B14F-4D97-AF65-F5344CB8AC3E}">
-        <p14:creationId xmlns:p14="http://schemas.microsoft.com/office/powerpoint/2010/main" val="1958041682"/>
+        <p14:creationId xmlns:p14="http://schemas.microsoft.com/office/powerpoint/2010/main" val="1731396142"/>
       </p:ext>
     </p:extLst>
   </p:cSld>
@@ -6144,7 +6073,7 @@
           <p:cNvPr id="20" name="">
             <a:extLst xmlns:a="http://schemas.openxmlformats.org/drawingml/2006/main">
               <a:ext uri="{FF2B5EF4-FFF2-40B4-BE49-F238E27FC236}">
-                <a16:creationId xmlns:a16="http://schemas.microsoft.com/office/drawing/2014/main" id="{CA3FB4C3-94F3-4805-9FD3-8A379BE1057C}"/>
+                <a16:creationId xmlns:a16="http://schemas.microsoft.com/office/drawing/2014/main" id="{ABBF723A-A912-4A29-B2CB-A9C658D36BC4}"/>
               </a:ext>
             </a:extLst>
           </p:cNvPr>
@@ -6189,7 +6118,7 @@
           <p:cNvPr id="2" name="">
             <a:extLst xmlns:a="http://schemas.openxmlformats.org/drawingml/2006/main">
               <a:ext uri="{FF2B5EF4-FFF2-40B4-BE49-F238E27FC236}">
-                <a16:creationId xmlns:a16="http://schemas.microsoft.com/office/drawing/2014/main" id="{0C537509-915D-4A62-9543-8C955297DAF0}"/>
+                <a16:creationId xmlns:a16="http://schemas.microsoft.com/office/drawing/2014/main" id="{78F62F35-8203-44A6-B6A1-383CDB806B7B}"/>
               </a:ext>
             </a:extLst>
           </p:cNvPr>
@@ -6219,7 +6148,7 @@
           <p:cNvPr id="3" name="">
             <a:extLst xmlns:a="http://schemas.openxmlformats.org/drawingml/2006/main">
               <a:ext uri="{FF2B5EF4-FFF2-40B4-BE49-F238E27FC236}">
-                <a16:creationId xmlns:a16="http://schemas.microsoft.com/office/drawing/2014/main" id="{DC0E841B-DE4E-481C-9207-9E3FB2CD60BE}"/>
+                <a16:creationId xmlns:a16="http://schemas.microsoft.com/office/drawing/2014/main" id="{C136AC8E-5AE9-453D-8ADE-D3A1E234C3C7}"/>
               </a:ext>
             </a:extLst>
           </p:cNvPr>
@@ -6264,7 +6193,7 @@
           <p:cNvPr id="4" name="">
             <a:extLst xmlns:a="http://schemas.openxmlformats.org/drawingml/2006/main">
               <a:ext uri="{FF2B5EF4-FFF2-40B4-BE49-F238E27FC236}">
-                <a16:creationId xmlns:a16="http://schemas.microsoft.com/office/drawing/2014/main" id="{35439057-5086-417F-BCE9-D9AEC3EFC52F}"/>
+                <a16:creationId xmlns:a16="http://schemas.microsoft.com/office/drawing/2014/main" id="{E92BA7DB-6FD4-4AD7-A279-ADE527DBCE98}"/>
               </a:ext>
             </a:extLst>
           </p:cNvPr>
@@ -6309,7 +6238,7 @@
           <p:cNvPr id="5" name="">
             <a:extLst xmlns:a="http://schemas.openxmlformats.org/drawingml/2006/main">
               <a:ext uri="{FF2B5EF4-FFF2-40B4-BE49-F238E27FC236}">
-                <a16:creationId xmlns:a16="http://schemas.microsoft.com/office/drawing/2014/main" id="{D47A1FDA-05A8-49F9-B9ED-815D7BBB2A81}"/>
+                <a16:creationId xmlns:a16="http://schemas.microsoft.com/office/drawing/2014/main" id="{958393B4-F07F-4DB4-98D9-F74BF54A6376}"/>
               </a:ext>
             </a:extLst>
           </p:cNvPr>
@@ -6341,7 +6270,7 @@
           <p:cNvPr id="6" name="">
             <a:extLst xmlns:a="http://schemas.openxmlformats.org/drawingml/2006/main">
               <a:ext uri="{FF2B5EF4-FFF2-40B4-BE49-F238E27FC236}">
-                <a16:creationId xmlns:a16="http://schemas.microsoft.com/office/drawing/2014/main" id="{5B4534B5-8557-48B8-B988-8A037B55A08A}"/>
+                <a16:creationId xmlns:a16="http://schemas.microsoft.com/office/drawing/2014/main" id="{2942032C-1402-46F0-8641-D6CE8E48433C}"/>
               </a:ext>
             </a:extLst>
           </p:cNvPr>
@@ -6412,7 +6341,7 @@
           <p:cNvPr id="7" name="">
             <a:extLst xmlns:a="http://schemas.openxmlformats.org/drawingml/2006/main">
               <a:ext uri="{FF2B5EF4-FFF2-40B4-BE49-F238E27FC236}">
-                <a16:creationId xmlns:a16="http://schemas.microsoft.com/office/drawing/2014/main" id="{9D141711-495B-48F2-A819-311F44AAF653}"/>
+                <a16:creationId xmlns:a16="http://schemas.microsoft.com/office/drawing/2014/main" id="{B9695508-4155-43DC-927E-D9F4BF032A1C}"/>
               </a:ext>
             </a:extLst>
           </p:cNvPr>
@@ -6457,7 +6386,7 @@
           <p:cNvPr id="8" name="">
             <a:extLst xmlns:a="http://schemas.openxmlformats.org/drawingml/2006/main">
               <a:ext uri="{FF2B5EF4-FFF2-40B4-BE49-F238E27FC236}">
-                <a16:creationId xmlns:a16="http://schemas.microsoft.com/office/drawing/2014/main" id="{77A7B5D5-95BB-42A3-BCF4-99AFCCCDEBE4}"/>
+                <a16:creationId xmlns:a16="http://schemas.microsoft.com/office/drawing/2014/main" id="{D67F8474-E533-4C96-AB54-30AF87821599}"/>
               </a:ext>
             </a:extLst>
           </p:cNvPr>
@@ -6489,7 +6418,7 @@
           <p:cNvPr id="9" name="">
             <a:extLst xmlns:a="http://schemas.openxmlformats.org/drawingml/2006/main">
               <a:ext uri="{FF2B5EF4-FFF2-40B4-BE49-F238E27FC236}">
-                <a16:creationId xmlns:a16="http://schemas.microsoft.com/office/drawing/2014/main" id="{CDD86271-CDCF-45B0-9550-9C19D6868678}"/>
+                <a16:creationId xmlns:a16="http://schemas.microsoft.com/office/drawing/2014/main" id="{2E19CF6C-B043-4EF1-B9F9-B1E7F3DBCD02}"/>
               </a:ext>
             </a:extLst>
           </p:cNvPr>
@@ -6521,7 +6450,7 @@
           <p:cNvPr id="10" name="">
             <a:extLst xmlns:a="http://schemas.openxmlformats.org/drawingml/2006/main">
               <a:ext uri="{FF2B5EF4-FFF2-40B4-BE49-F238E27FC236}">
-                <a16:creationId xmlns:a16="http://schemas.microsoft.com/office/drawing/2014/main" id="{E89C1785-4BF8-4FF2-AF40-F0A53DD42F70}"/>
+                <a16:creationId xmlns:a16="http://schemas.microsoft.com/office/drawing/2014/main" id="{89AFB8B6-8473-4EA0-AB59-66848D08CA4D}"/>
               </a:ext>
             </a:extLst>
           </p:cNvPr>
@@ -6566,7 +6495,7 @@
           <p:cNvPr id="11" name="">
             <a:extLst xmlns:a="http://schemas.openxmlformats.org/drawingml/2006/main">
               <a:ext uri="{FF2B5EF4-FFF2-40B4-BE49-F238E27FC236}">
-                <a16:creationId xmlns:a16="http://schemas.microsoft.com/office/drawing/2014/main" id="{F632E18F-8B3D-4D4C-B2BD-8D9672EA8530}"/>
+                <a16:creationId xmlns:a16="http://schemas.microsoft.com/office/drawing/2014/main" id="{983E6B9A-4F84-4E0A-8821-92DA8AC8B566}"/>
               </a:ext>
             </a:extLst>
           </p:cNvPr>
@@ -6611,7 +6540,7 @@
           <p:cNvPr id="12" name="">
             <a:extLst xmlns:a="http://schemas.openxmlformats.org/drawingml/2006/main">
               <a:ext uri="{FF2B5EF4-FFF2-40B4-BE49-F238E27FC236}">
-                <a16:creationId xmlns:a16="http://schemas.microsoft.com/office/drawing/2014/main" id="{A4CE812E-93DE-4038-93EF-1F5210FCE669}"/>
+                <a16:creationId xmlns:a16="http://schemas.microsoft.com/office/drawing/2014/main" id="{94AD05D2-712F-4B7A-87C5-BA1CB15F96A7}"/>
               </a:ext>
             </a:extLst>
           </p:cNvPr>
@@ -6656,7 +6585,7 @@
           <p:cNvPr id="13" name="">
             <a:extLst xmlns:a="http://schemas.openxmlformats.org/drawingml/2006/main">
               <a:ext uri="{FF2B5EF4-FFF2-40B4-BE49-F238E27FC236}">
-                <a16:creationId xmlns:a16="http://schemas.microsoft.com/office/drawing/2014/main" id="{F527E3FF-01E8-4A74-A1CD-41E283936DA6}"/>
+                <a16:creationId xmlns:a16="http://schemas.microsoft.com/office/drawing/2014/main" id="{8AAFF49D-F64E-467B-AE0A-2AD43EF3F957}"/>
               </a:ext>
             </a:extLst>
           </p:cNvPr>
@@ -6688,7 +6617,7 @@
           <p:cNvPr id="14" name="">
             <a:extLst xmlns:a="http://schemas.openxmlformats.org/drawingml/2006/main">
               <a:ext uri="{FF2B5EF4-FFF2-40B4-BE49-F238E27FC236}">
-                <a16:creationId xmlns:a16="http://schemas.microsoft.com/office/drawing/2014/main" id="{DBAC5BC3-ACF1-4E76-9C2F-456C06238439}"/>
+                <a16:creationId xmlns:a16="http://schemas.microsoft.com/office/drawing/2014/main" id="{614E9256-1B6A-4A49-99CA-A3ECEE86FCFD}"/>
               </a:ext>
             </a:extLst>
           </p:cNvPr>
@@ -6720,7 +6649,7 @@
           <p:cNvPr id="15" name="">
             <a:extLst xmlns:a="http://schemas.openxmlformats.org/drawingml/2006/main">
               <a:ext uri="{FF2B5EF4-FFF2-40B4-BE49-F238E27FC236}">
-                <a16:creationId xmlns:a16="http://schemas.microsoft.com/office/drawing/2014/main" id="{F2F44C92-9528-403B-ACBE-FE929C791E1C}"/>
+                <a16:creationId xmlns:a16="http://schemas.microsoft.com/office/drawing/2014/main" id="{A002B53F-7975-48FC-BE17-82EC128DF4D6}"/>
               </a:ext>
             </a:extLst>
           </p:cNvPr>
@@ -6752,7 +6681,7 @@
           <p:cNvPr id="16" name="">
             <a:extLst xmlns:a="http://schemas.openxmlformats.org/drawingml/2006/main">
               <a:ext uri="{FF2B5EF4-FFF2-40B4-BE49-F238E27FC236}">
-                <a16:creationId xmlns:a16="http://schemas.microsoft.com/office/drawing/2014/main" id="{3E746905-0823-4CE1-B66D-BC1DDEE055AA}"/>
+                <a16:creationId xmlns:a16="http://schemas.microsoft.com/office/drawing/2014/main" id="{4C12CED7-8EF1-443E-BEB6-21F70C3263AC}"/>
               </a:ext>
             </a:extLst>
           </p:cNvPr>
@@ -6797,7 +6726,7 @@
           <p:cNvPr id="17" name="">
             <a:extLst xmlns:a="http://schemas.openxmlformats.org/drawingml/2006/main">
               <a:ext uri="{FF2B5EF4-FFF2-40B4-BE49-F238E27FC236}">
-                <a16:creationId xmlns:a16="http://schemas.microsoft.com/office/drawing/2014/main" id="{AA2EF3BB-3495-4307-9132-388F4EE42549}"/>
+                <a16:creationId xmlns:a16="http://schemas.microsoft.com/office/drawing/2014/main" id="{23EAB435-6491-41FF-AF55-DB7C02BF96B9}"/>
               </a:ext>
             </a:extLst>
           </p:cNvPr>
@@ -6842,7 +6771,7 @@
           <p:cNvPr id="18" name="">
             <a:extLst xmlns:a="http://schemas.openxmlformats.org/drawingml/2006/main">
               <a:ext uri="{FF2B5EF4-FFF2-40B4-BE49-F238E27FC236}">
-                <a16:creationId xmlns:a16="http://schemas.microsoft.com/office/drawing/2014/main" id="{682673DE-9A5E-45CD-8656-A967C9E14CE2}"/>
+                <a16:creationId xmlns:a16="http://schemas.microsoft.com/office/drawing/2014/main" id="{F746B42D-189B-4D7E-B05A-1AB7E058D48B}"/>
               </a:ext>
             </a:extLst>
           </p:cNvPr>
@@ -6887,7 +6816,7 @@
           <p:cNvPr id="19" name="">
             <a:extLst xmlns:a="http://schemas.openxmlformats.org/drawingml/2006/main">
               <a:ext uri="{FF2B5EF4-FFF2-40B4-BE49-F238E27FC236}">
-                <a16:creationId xmlns:a16="http://schemas.microsoft.com/office/drawing/2014/main" id="{46671EF0-8B2F-48D9-81DE-34308E15C558}"/>
+                <a16:creationId xmlns:a16="http://schemas.microsoft.com/office/drawing/2014/main" id="{1D8E51DD-0FE4-435C-AD7B-B514D1D3D42B}"/>
               </a:ext>
             </a:extLst>
           </p:cNvPr>
@@ -6930,7 +6859,7 @@
     </p:spTree>
     <p:extLst>
       <p:ext uri="{BB962C8B-B14F-4D97-AF65-F5344CB8AC3E}">
-        <p14:creationId xmlns:p14="http://schemas.microsoft.com/office/powerpoint/2010/main" val="6378097"/>
+        <p14:creationId xmlns:p14="http://schemas.microsoft.com/office/powerpoint/2010/main" val="590900306"/>
       </p:ext>
     </p:extLst>
   </p:cSld>
@@ -6958,10 +6887,10 @@
       </p:grpSpPr>
       <p:sp>
         <p:nvSpPr>
-          <p:cNvPr id="8" name="">
-            <a:extLst xmlns:a="http://schemas.openxmlformats.org/drawingml/2006/main">
-              <a:ext uri="{FF2B5EF4-FFF2-40B4-BE49-F238E27FC236}">
-                <a16:creationId xmlns:a16="http://schemas.microsoft.com/office/drawing/2014/main" id="{E1FB3CA8-73DD-4B0E-B51A-CFC573B4CEDE}"/>
+          <p:cNvPr id="12" name="">
+            <a:extLst xmlns:a="http://schemas.openxmlformats.org/drawingml/2006/main">
+              <a:ext uri="{FF2B5EF4-FFF2-40B4-BE49-F238E27FC236}">
+                <a16:creationId xmlns:a16="http://schemas.microsoft.com/office/drawing/2014/main" id="{58E7B120-2336-4508-AEDD-3A80E7F5DF37}"/>
               </a:ext>
             </a:extLst>
           </p:cNvPr>
@@ -6996,7 +6925,7 @@
                 <a:ea typeface="Arial"/>
                 <a:cs typeface="Arial"/>
               </a:rPr>
-              <a:t>Timing and quality use separate measurement sets</a:t>
+              <a:t>30W CUDA C++: decode budget + reconstruction</a:t>
             </a:r>
           </a:p>
         </p:txBody>
@@ -7006,7 +6935,7 @@
           <p:cNvPr id="2" name="">
             <a:extLst xmlns:a="http://schemas.openxmlformats.org/drawingml/2006/main">
               <a:ext uri="{FF2B5EF4-FFF2-40B4-BE49-F238E27FC236}">
-                <a16:creationId xmlns:a16="http://schemas.microsoft.com/office/drawing/2014/main" id="{5FF17C6B-992B-4B4C-92CA-5469B604381C}"/>
+                <a16:creationId xmlns:a16="http://schemas.microsoft.com/office/drawing/2014/main" id="{8EF7E9B1-56BC-4BB5-A378-6BD835267AA4}"/>
               </a:ext>
             </a:extLst>
           </p:cNvPr>
@@ -7036,7 +6965,7 @@
           <p:cNvPr id="3" name="">
             <a:extLst xmlns:a="http://schemas.openxmlformats.org/drawingml/2006/main">
               <a:ext uri="{FF2B5EF4-FFF2-40B4-BE49-F238E27FC236}">
-                <a16:creationId xmlns:a16="http://schemas.microsoft.com/office/drawing/2014/main" id="{87967DD5-575A-4DB3-B40F-7AA7A2BB1FD7}"/>
+                <a16:creationId xmlns:a16="http://schemas.microsoft.com/office/drawing/2014/main" id="{81366B18-9EAE-4369-B199-9FB6BAD3BC8C}"/>
               </a:ext>
             </a:extLst>
           </p:cNvPr>
@@ -7078,10 +7007,10 @@
       </p:sp>
       <p:graphicFrame>
         <p:nvGraphicFramePr>
-          <p:cNvPr id="4" name="">
-            <a:extLst xmlns:a="http://schemas.openxmlformats.org/drawingml/2006/main">
-              <a:ext uri="{FF2B5EF4-FFF2-40B4-BE49-F238E27FC236}">
-                <a16:creationId xmlns:a16="http://schemas.microsoft.com/office/drawing/2014/main" id="{A19D57B2-B38A-4AA0-83FA-A4BB8BD828B9}"/>
+          <p:cNvPr id="4" name="Chart">
+            <a:extLst xmlns:a="http://schemas.openxmlformats.org/drawingml/2006/main">
+              <a:ext uri="{FF2B5EF4-FFF2-40B4-BE49-F238E27FC236}">
+                <a16:creationId xmlns:a16="http://schemas.microsoft.com/office/drawing/2014/main" id="{E657DE70-47A4-4A50-A164-2D6474B474BF}"/>
               </a:ext>
             </a:extLst>
           </p:cNvPr>
@@ -7089,733 +7018,12 @@
           <p:nvPr/>
         </p:nvGraphicFramePr>
         <p:xfrm>
-          <a:off xmlns:a="http://schemas.openxmlformats.org/drawingml/2006/main" x="609600" y="1638300"/>
-          <a:ext xmlns:a="http://schemas.openxmlformats.org/drawingml/2006/main" cx="10972800" cy="3314700"/>
+          <a:off xmlns:a="http://schemas.openxmlformats.org/drawingml/2006/main" x="609600" y="1828800"/>
+          <a:ext xmlns:a="http://schemas.openxmlformats.org/drawingml/2006/main" cx="7715250" cy="3752850"/>
         </p:xfrm>
         <a:graphic xmlns:a="http://schemas.openxmlformats.org/drawingml/2006/main">
-          <a:graphicData uri="http://schemas.openxmlformats.org/drawingml/2006/table">
-            <a:tbl>
-              <a:tblPr/>
-              <a:tblGrid>
-                <a:gridCol w="2476500"/>
-                <a:gridCol w="4248150"/>
-                <a:gridCol w="4248150"/>
-              </a:tblGrid>
-              <a:tr h="552450">
-                <a:tc>
-                  <a:txBody>
-                    <a:bodyPr/>
-                    <a:lstStyle/>
-                    <a:p>
-                      <a:r>
-                        <a:rPr sz="1875" b="1">
-                          <a:solidFill>
-                            <a:srgbClr val="FFFFFF"/>
-                          </a:solidFill>
-                          <a:latin typeface="Arial"/>
-                          <a:ea typeface="Arial"/>
-                          <a:cs typeface="Arial"/>
-                        </a:rPr>
-                        <a:t/>
-                      </a:r>
-                    </a:p>
-                  </a:txBody>
-                  <a:tcPr marL="91440" marR="91440" marT="45720" marB="45720">
-                    <a:lnL w="9525">
-                      <a:solidFill>
-                        <a:srgbClr val="D7DFE5"/>
-                      </a:solidFill>
-                      <a:prstDash val="solid"/>
-                    </a:lnL>
-                    <a:lnR w="9525">
-                      <a:solidFill>
-                        <a:srgbClr val="D7DFE5"/>
-                      </a:solidFill>
-                      <a:prstDash val="solid"/>
-                    </a:lnR>
-                    <a:lnT w="9525">
-                      <a:solidFill>
-                        <a:srgbClr val="D7DFE5"/>
-                      </a:solidFill>
-                      <a:prstDash val="solid"/>
-                    </a:lnT>
-                    <a:lnB w="9525">
-                      <a:solidFill>
-                        <a:srgbClr val="D7DFE5"/>
-                      </a:solidFill>
-                      <a:prstDash val="solid"/>
-                    </a:lnB>
-                    <a:solidFill>
-                      <a:srgbClr val="152D43"/>
-                    </a:solidFill>
-                  </a:tcPr>
-                </a:tc>
-                <a:tc>
-                  <a:txBody>
-                    <a:bodyPr/>
-                    <a:lstStyle/>
-                    <a:p>
-                      <a:r>
-                        <a:rPr sz="1875" b="1">
-                          <a:solidFill>
-                            <a:srgbClr val="FFFFFF"/>
-                          </a:solidFill>
-                          <a:latin typeface="Arial"/>
-                          <a:ea typeface="Arial"/>
-                          <a:cs typeface="Arial"/>
-                        </a:rPr>
-                        <a:t>Latest timing</a:t>
-                      </a:r>
-                    </a:p>
-                  </a:txBody>
-                  <a:tcPr marL="91440" marR="91440" marT="45720" marB="45720">
-                    <a:lnR w="9525">
-                      <a:solidFill>
-                        <a:srgbClr val="D7DFE5"/>
-                      </a:solidFill>
-                      <a:prstDash val="solid"/>
-                    </a:lnR>
-                    <a:lnT w="9525">
-                      <a:solidFill>
-                        <a:srgbClr val="D7DFE5"/>
-                      </a:solidFill>
-                      <a:prstDash val="solid"/>
-                    </a:lnT>
-                    <a:lnB w="9525">
-                      <a:solidFill>
-                        <a:srgbClr val="D7DFE5"/>
-                      </a:solidFill>
-                      <a:prstDash val="solid"/>
-                    </a:lnB>
-                    <a:solidFill>
-                      <a:srgbClr val="152D43"/>
-                    </a:solidFill>
-                  </a:tcPr>
-                </a:tc>
-                <a:tc>
-                  <a:txBody>
-                    <a:bodyPr/>
-                    <a:lstStyle/>
-                    <a:p>
-                      <a:r>
-                        <a:rPr sz="1875" b="1">
-                          <a:solidFill>
-                            <a:srgbClr val="FFFFFF"/>
-                          </a:solidFill>
-                          <a:latin typeface="Arial"/>
-                          <a:ea typeface="Arial"/>
-                          <a:cs typeface="Arial"/>
-                        </a:rPr>
-                        <a:t>Existing quality</a:t>
-                      </a:r>
-                    </a:p>
-                  </a:txBody>
-                  <a:tcPr marL="91440" marR="91440" marT="45720" marB="45720">
-                    <a:lnR w="9525">
-                      <a:solidFill>
-                        <a:srgbClr val="D7DFE5"/>
-                      </a:solidFill>
-                      <a:prstDash val="solid"/>
-                    </a:lnR>
-                    <a:lnT w="9525">
-                      <a:solidFill>
-                        <a:srgbClr val="D7DFE5"/>
-                      </a:solidFill>
-                      <a:prstDash val="solid"/>
-                    </a:lnT>
-                    <a:lnB w="9525">
-                      <a:solidFill>
-                        <a:srgbClr val="D7DFE5"/>
-                      </a:solidFill>
-                      <a:prstDash val="solid"/>
-                    </a:lnB>
-                    <a:solidFill>
-                      <a:srgbClr val="152D43"/>
-                    </a:solidFill>
-                  </a:tcPr>
-                </a:tc>
-              </a:tr>
-              <a:tr h="552450">
-                <a:tc>
-                  <a:txBody>
-                    <a:bodyPr/>
-                    <a:lstStyle/>
-                    <a:p>
-                      <a:r>
-                        <a:rPr sz="1875" b="0">
-                          <a:solidFill>
-                            <a:srgbClr val="152D43"/>
-                          </a:solidFill>
-                          <a:latin typeface="Arial"/>
-                          <a:ea typeface="Arial"/>
-                          <a:cs typeface="Arial"/>
-                        </a:rPr>
-                        <a:t>Implementation</a:t>
-                      </a:r>
-                    </a:p>
-                  </a:txBody>
-                  <a:tcPr marL="91440" marR="91440" marT="45720" marB="45720">
-                    <a:lnL w="9525">
-                      <a:solidFill>
-                        <a:srgbClr val="D7DFE5"/>
-                      </a:solidFill>
-                      <a:prstDash val="solid"/>
-                    </a:lnL>
-                    <a:lnR w="9525">
-                      <a:solidFill>
-                        <a:srgbClr val="D7DFE5"/>
-                      </a:solidFill>
-                      <a:prstDash val="solid"/>
-                    </a:lnR>
-                    <a:lnB w="9525">
-                      <a:solidFill>
-                        <a:srgbClr val="D7DFE5"/>
-                      </a:solidFill>
-                      <a:prstDash val="solid"/>
-                    </a:lnB>
-                    <a:solidFill>
-                      <a:srgbClr val="FFFFFF"/>
-                    </a:solidFill>
-                  </a:tcPr>
-                </a:tc>
-                <a:tc>
-                  <a:txBody>
-                    <a:bodyPr/>
-                    <a:lstStyle/>
-                    <a:p>
-                      <a:r>
-                        <a:rPr sz="1875" b="0">
-                          <a:solidFill>
-                            <a:srgbClr val="152D43"/>
-                          </a:solidFill>
-                          <a:latin typeface="Arial"/>
-                          <a:ea typeface="Arial"/>
-                          <a:cs typeface="Arial"/>
-                        </a:rPr>
-                        <a:t>CUDA C++</a:t>
-                      </a:r>
-                    </a:p>
-                  </a:txBody>
-                  <a:tcPr marL="91440" marR="91440" marT="45720" marB="45720">
-                    <a:lnR w="9525">
-                      <a:solidFill>
-                        <a:srgbClr val="D7DFE5"/>
-                      </a:solidFill>
-                      <a:prstDash val="solid"/>
-                    </a:lnR>
-                    <a:lnB w="9525">
-                      <a:solidFill>
-                        <a:srgbClr val="D7DFE5"/>
-                      </a:solidFill>
-                      <a:prstDash val="solid"/>
-                    </a:lnB>
-                    <a:solidFill>
-                      <a:srgbClr val="FFFFFF"/>
-                    </a:solidFill>
-                  </a:tcPr>
-                </a:tc>
-                <a:tc>
-                  <a:txBody>
-                    <a:bodyPr/>
-                    <a:lstStyle/>
-                    <a:p>
-                      <a:r>
-                        <a:rPr sz="1875" b="0">
-                          <a:solidFill>
-                            <a:srgbClr val="152D43"/>
-                          </a:solidFill>
-                          <a:latin typeface="Arial"/>
-                          <a:ea typeface="Arial"/>
-                          <a:cs typeface="Arial"/>
-                        </a:rPr>
-                        <a:t>CUDA C++</a:t>
-                      </a:r>
-                    </a:p>
-                  </a:txBody>
-                  <a:tcPr marL="91440" marR="91440" marT="45720" marB="45720">
-                    <a:lnR w="9525">
-                      <a:solidFill>
-                        <a:srgbClr val="D7DFE5"/>
-                      </a:solidFill>
-                      <a:prstDash val="solid"/>
-                    </a:lnR>
-                    <a:lnB w="9525">
-                      <a:solidFill>
-                        <a:srgbClr val="D7DFE5"/>
-                      </a:solidFill>
-                      <a:prstDash val="solid"/>
-                    </a:lnB>
-                    <a:solidFill>
-                      <a:srgbClr val="FFFFFF"/>
-                    </a:solidFill>
-                  </a:tcPr>
-                </a:tc>
-              </a:tr>
-              <a:tr h="552450">
-                <a:tc>
-                  <a:txBody>
-                    <a:bodyPr/>
-                    <a:lstStyle/>
-                    <a:p>
-                      <a:r>
-                        <a:rPr sz="1875" b="0">
-                          <a:solidFill>
-                            <a:srgbClr val="152D43"/>
-                          </a:solidFill>
-                          <a:latin typeface="Arial"/>
-                          <a:ea typeface="Arial"/>
-                          <a:cs typeface="Arial"/>
-                        </a:rPr>
-                        <a:t>Xavier power mode</a:t>
-                      </a:r>
-                    </a:p>
-                  </a:txBody>
-                  <a:tcPr marL="91440" marR="91440" marT="45720" marB="45720">
-                    <a:lnL w="9525">
-                      <a:solidFill>
-                        <a:srgbClr val="D7DFE5"/>
-                      </a:solidFill>
-                      <a:prstDash val="solid"/>
-                    </a:lnL>
-                    <a:lnR w="9525">
-                      <a:solidFill>
-                        <a:srgbClr val="D7DFE5"/>
-                      </a:solidFill>
-                      <a:prstDash val="solid"/>
-                    </a:lnR>
-                    <a:lnB w="9525">
-                      <a:solidFill>
-                        <a:srgbClr val="D7DFE5"/>
-                      </a:solidFill>
-                      <a:prstDash val="solid"/>
-                    </a:lnB>
-                    <a:solidFill>
-                      <a:srgbClr val="EAF3F6"/>
-                    </a:solidFill>
-                  </a:tcPr>
-                </a:tc>
-                <a:tc>
-                  <a:txBody>
-                    <a:bodyPr/>
-                    <a:lstStyle/>
-                    <a:p>
-                      <a:r>
-                        <a:rPr sz="1875" b="0">
-                          <a:solidFill>
-                            <a:srgbClr val="152D43"/>
-                          </a:solidFill>
-                          <a:latin typeface="Arial"/>
-                          <a:ea typeface="Arial"/>
-                          <a:cs typeface="Arial"/>
-                        </a:rPr>
-                        <a:t>30W 4CORE, unlocked</a:t>
-                      </a:r>
-                    </a:p>
-                  </a:txBody>
-                  <a:tcPr marL="91440" marR="91440" marT="45720" marB="45720">
-                    <a:lnR w="9525">
-                      <a:solidFill>
-                        <a:srgbClr val="D7DFE5"/>
-                      </a:solidFill>
-                      <a:prstDash val="solid"/>
-                    </a:lnR>
-                    <a:lnB w="9525">
-                      <a:solidFill>
-                        <a:srgbClr val="D7DFE5"/>
-                      </a:solidFill>
-                      <a:prstDash val="solid"/>
-                    </a:lnB>
-                    <a:solidFill>
-                      <a:srgbClr val="EAF3F6"/>
-                    </a:solidFill>
-                  </a:tcPr>
-                </a:tc>
-                <a:tc>
-                  <a:txBody>
-                    <a:bodyPr/>
-                    <a:lstStyle/>
-                    <a:p>
-                      <a:r>
-                        <a:rPr sz="1875" b="0">
-                          <a:solidFill>
-                            <a:srgbClr val="152D43"/>
-                          </a:solidFill>
-                          <a:latin typeface="Arial"/>
-                          <a:ea typeface="Arial"/>
-                          <a:cs typeface="Arial"/>
-                        </a:rPr>
-                        <a:t>15W Desktop, unlocked</a:t>
-                      </a:r>
-                    </a:p>
-                  </a:txBody>
-                  <a:tcPr marL="91440" marR="91440" marT="45720" marB="45720">
-                    <a:lnR w="9525">
-                      <a:solidFill>
-                        <a:srgbClr val="D7DFE5"/>
-                      </a:solidFill>
-                      <a:prstDash val="solid"/>
-                    </a:lnR>
-                    <a:lnB w="9525">
-                      <a:solidFill>
-                        <a:srgbClr val="D7DFE5"/>
-                      </a:solidFill>
-                      <a:prstDash val="solid"/>
-                    </a:lnB>
-                    <a:solidFill>
-                      <a:srgbClr val="EAF3F6"/>
-                    </a:solidFill>
-                  </a:tcPr>
-                </a:tc>
-              </a:tr>
-              <a:tr h="552450">
-                <a:tc>
-                  <a:txBody>
-                    <a:bodyPr/>
-                    <a:lstStyle/>
-                    <a:p>
-                      <a:r>
-                        <a:rPr sz="1875" b="0">
-                          <a:solidFill>
-                            <a:srgbClr val="152D43"/>
-                          </a:solidFill>
-                          <a:latin typeface="Arial"/>
-                          <a:ea typeface="Arial"/>
-                          <a:cs typeface="Arial"/>
-                        </a:rPr>
-                        <a:t>Coverage</a:t>
-                      </a:r>
-                    </a:p>
-                  </a:txBody>
-                  <a:tcPr marL="91440" marR="91440" marT="45720" marB="45720">
-                    <a:lnL w="9525">
-                      <a:solidFill>
-                        <a:srgbClr val="D7DFE5"/>
-                      </a:solidFill>
-                      <a:prstDash val="solid"/>
-                    </a:lnL>
-                    <a:lnR w="9525">
-                      <a:solidFill>
-                        <a:srgbClr val="D7DFE5"/>
-                      </a:solidFill>
-                      <a:prstDash val="solid"/>
-                    </a:lnR>
-                    <a:lnB w="9525">
-                      <a:solidFill>
-                        <a:srgbClr val="D7DFE5"/>
-                      </a:solidFill>
-                      <a:prstDash val="solid"/>
-                    </a:lnB>
-                    <a:solidFill>
-                      <a:srgbClr val="FFFFFF"/>
-                    </a:solidFill>
-                  </a:tcPr>
-                </a:tc>
-                <a:tc>
-                  <a:txBody>
-                    <a:bodyPr/>
-                    <a:lstStyle/>
-                    <a:p>
-                      <a:r>
-                        <a:rPr sz="1875" b="0">
-                          <a:solidFill>
-                            <a:srgbClr val="152D43"/>
-                          </a:solidFill>
-                          <a:latin typeface="Arial"/>
-                          <a:ea typeface="Arial"/>
-                          <a:cs typeface="Arial"/>
-                        </a:rPr>
-                        <a:t>4 workloads × frame 39</a:t>
-                      </a:r>
-                    </a:p>
-                  </a:txBody>
-                  <a:tcPr marL="91440" marR="91440" marT="45720" marB="45720">
-                    <a:lnR w="9525">
-                      <a:solidFill>
-                        <a:srgbClr val="D7DFE5"/>
-                      </a:solidFill>
-                      <a:prstDash val="solid"/>
-                    </a:lnR>
-                    <a:lnB w="9525">
-                      <a:solidFill>
-                        <a:srgbClr val="D7DFE5"/>
-                      </a:solidFill>
-                      <a:prstDash val="solid"/>
-                    </a:lnB>
-                    <a:solidFill>
-                      <a:srgbClr val="FFFFFF"/>
-                    </a:solidFill>
-                  </a:tcPr>
-                </a:tc>
-                <a:tc>
-                  <a:txBody>
-                    <a:bodyPr/>
-                    <a:lstStyle/>
-                    <a:p>
-                      <a:r>
-                        <a:rPr sz="1875" b="0">
-                          <a:solidFill>
-                            <a:srgbClr val="152D43"/>
-                          </a:solidFill>
-                          <a:latin typeface="Arial"/>
-                          <a:ea typeface="Arial"/>
-                          <a:cs typeface="Arial"/>
-                        </a:rPr>
-                        <a:t>1068 forward odd frames</a:t>
-                      </a:r>
-                    </a:p>
-                  </a:txBody>
-                  <a:tcPr marL="91440" marR="91440" marT="45720" marB="45720">
-                    <a:lnR w="9525">
-                      <a:solidFill>
-                        <a:srgbClr val="D7DFE5"/>
-                      </a:solidFill>
-                      <a:prstDash val="solid"/>
-                    </a:lnR>
-                    <a:lnB w="9525">
-                      <a:solidFill>
-                        <a:srgbClr val="D7DFE5"/>
-                      </a:solidFill>
-                      <a:prstDash val="solid"/>
-                    </a:lnB>
-                    <a:solidFill>
-                      <a:srgbClr val="FFFFFF"/>
-                    </a:solidFill>
-                  </a:tcPr>
-                </a:tc>
-              </a:tr>
-              <a:tr h="552450">
-                <a:tc>
-                  <a:txBody>
-                    <a:bodyPr/>
-                    <a:lstStyle/>
-                    <a:p>
-                      <a:r>
-                        <a:rPr sz="1875" b="0">
-                          <a:solidFill>
-                            <a:srgbClr val="152D43"/>
-                          </a:solidFill>
-                          <a:latin typeface="Arial"/>
-                          <a:ea typeface="Arial"/>
-                          <a:cs typeface="Arial"/>
-                        </a:rPr>
-                        <a:t>Sampling</a:t>
-                      </a:r>
-                    </a:p>
-                  </a:txBody>
-                  <a:tcPr marL="91440" marR="91440" marT="45720" marB="45720">
-                    <a:lnL w="9525">
-                      <a:solidFill>
-                        <a:srgbClr val="D7DFE5"/>
-                      </a:solidFill>
-                      <a:prstDash val="solid"/>
-                    </a:lnL>
-                    <a:lnR w="9525">
-                      <a:solidFill>
-                        <a:srgbClr val="D7DFE5"/>
-                      </a:solidFill>
-                      <a:prstDash val="solid"/>
-                    </a:lnR>
-                    <a:lnB w="9525">
-                      <a:solidFill>
-                        <a:srgbClr val="D7DFE5"/>
-                      </a:solidFill>
-                      <a:prstDash val="solid"/>
-                    </a:lnB>
-                    <a:solidFill>
-                      <a:srgbClr val="EAF3F6"/>
-                    </a:solidFill>
-                  </a:tcPr>
-                </a:tc>
-                <a:tc>
-                  <a:txBody>
-                    <a:bodyPr/>
-                    <a:lstStyle/>
-                    <a:p>
-                      <a:r>
-                        <a:rPr sz="1875" b="0">
-                          <a:solidFill>
-                            <a:srgbClr val="152D43"/>
-                          </a:solidFill>
-                          <a:latin typeface="Arial"/>
-                          <a:ea typeface="Arial"/>
-                          <a:cs typeface="Arial"/>
-                        </a:rPr>
-                        <a:t>10 warmups + 100 runs/path</a:t>
-                      </a:r>
-                    </a:p>
-                  </a:txBody>
-                  <a:tcPr marL="91440" marR="91440" marT="45720" marB="45720">
-                    <a:lnR w="9525">
-                      <a:solidFill>
-                        <a:srgbClr val="D7DFE5"/>
-                      </a:solidFill>
-                      <a:prstDash val="solid"/>
-                    </a:lnR>
-                    <a:lnB w="9525">
-                      <a:solidFill>
-                        <a:srgbClr val="D7DFE5"/>
-                      </a:solidFill>
-                      <a:prstDash val="solid"/>
-                    </a:lnB>
-                    <a:solidFill>
-                      <a:srgbClr val="EAF3F6"/>
-                    </a:solidFill>
-                  </a:tcPr>
-                </a:tc>
-                <a:tc>
-                  <a:txBody>
-                    <a:bodyPr/>
-                    <a:lstStyle/>
-                    <a:p>
-                      <a:r>
-                        <a:rPr sz="1875" b="0">
-                          <a:solidFill>
-                            <a:srgbClr val="152D43"/>
-                          </a:solidFill>
-                          <a:latin typeface="Arial"/>
-                          <a:ea typeface="Arial"/>
-                          <a:cs typeface="Arial"/>
-                        </a:rPr>
-                        <a:t>1 output/config/frame</a:t>
-                      </a:r>
-                    </a:p>
-                  </a:txBody>
-                  <a:tcPr marL="91440" marR="91440" marT="45720" marB="45720">
-                    <a:lnR w="9525">
-                      <a:solidFill>
-                        <a:srgbClr val="D7DFE5"/>
-                      </a:solidFill>
-                      <a:prstDash val="solid"/>
-                    </a:lnR>
-                    <a:lnB w="9525">
-                      <a:solidFill>
-                        <a:srgbClr val="D7DFE5"/>
-                      </a:solidFill>
-                      <a:prstDash val="solid"/>
-                    </a:lnB>
-                    <a:solidFill>
-                      <a:srgbClr val="EAF3F6"/>
-                    </a:solidFill>
-                  </a:tcPr>
-                </a:tc>
-              </a:tr>
-              <a:tr h="552450">
-                <a:tc>
-                  <a:txBody>
-                    <a:bodyPr/>
-                    <a:lstStyle/>
-                    <a:p>
-                      <a:r>
-                        <a:rPr sz="1875" b="0">
-                          <a:solidFill>
-                            <a:srgbClr val="152D43"/>
-                          </a:solidFill>
-                          <a:latin typeface="Arial"/>
-                          <a:ea typeface="Arial"/>
-                          <a:cs typeface="Arial"/>
-                        </a:rPr>
-                        <a:t>Reported quantity</a:t>
-                      </a:r>
-                    </a:p>
-                  </a:txBody>
-                  <a:tcPr marL="91440" marR="91440" marT="45720" marB="45720">
-                    <a:lnL w="9525">
-                      <a:solidFill>
-                        <a:srgbClr val="D7DFE5"/>
-                      </a:solidFill>
-                      <a:prstDash val="solid"/>
-                    </a:lnL>
-                    <a:lnR w="9525">
-                      <a:solidFill>
-                        <a:srgbClr val="D7DFE5"/>
-                      </a:solidFill>
-                      <a:prstDash val="solid"/>
-                    </a:lnR>
-                    <a:lnB w="9525">
-                      <a:solidFill>
-                        <a:srgbClr val="D7DFE5"/>
-                      </a:solidFill>
-                      <a:prstDash val="solid"/>
-                    </a:lnB>
-                    <a:solidFill>
-                      <a:srgbClr val="FFFFFF"/>
-                    </a:solidFill>
-                  </a:tcPr>
-                </a:tc>
-                <a:tc>
-                  <a:txBody>
-                    <a:bodyPr/>
-                    <a:lstStyle/>
-                    <a:p>
-                      <a:r>
-                        <a:rPr sz="1875" b="0">
-                          <a:solidFill>
-                            <a:srgbClr val="152D43"/>
-                          </a:solidFill>
-                          <a:latin typeface="Arial"/>
-                          <a:ea typeface="Arial"/>
-                          <a:cs typeface="Arial"/>
-                        </a:rPr>
-                        <a:t>Staged GPU timeline mean</a:t>
-                      </a:r>
-                    </a:p>
-                  </a:txBody>
-                  <a:tcPr marL="91440" marR="91440" marT="45720" marB="45720">
-                    <a:lnR w="9525">
-                      <a:solidFill>
-                        <a:srgbClr val="D7DFE5"/>
-                      </a:solidFill>
-                      <a:prstDash val="solid"/>
-                    </a:lnR>
-                    <a:lnB w="9525">
-                      <a:solidFill>
-                        <a:srgbClr val="D7DFE5"/>
-                      </a:solidFill>
-                      <a:prstDash val="solid"/>
-                    </a:lnB>
-                    <a:solidFill>
-                      <a:srgbClr val="FFFFFF"/>
-                    </a:solidFill>
-                  </a:tcPr>
-                </a:tc>
-                <a:tc>
-                  <a:txBody>
-                    <a:bodyPr/>
-                    <a:lstStyle/>
-                    <a:p>
-                      <a:r>
-                        <a:rPr sz="1875" b="0">
-                          <a:solidFill>
-                            <a:srgbClr val="152D43"/>
-                          </a:solidFill>
-                          <a:latin typeface="Arial"/>
-                          <a:ea typeface="Arial"/>
-                          <a:cs typeface="Arial"/>
-                        </a:rPr>
-                        <a:t>Original overflow PSNR</a:t>
-                      </a:r>
-                    </a:p>
-                  </a:txBody>
-                  <a:tcPr marL="91440" marR="91440" marT="45720" marB="45720">
-                    <a:lnR w="9525">
-                      <a:solidFill>
-                        <a:srgbClr val="D7DFE5"/>
-                      </a:solidFill>
-                      <a:prstDash val="solid"/>
-                    </a:lnR>
-                    <a:lnB w="9525">
-                      <a:solidFill>
-                        <a:srgbClr val="D7DFE5"/>
-                      </a:solidFill>
-                      <a:prstDash val="solid"/>
-                    </a:lnB>
-                    <a:solidFill>
-                      <a:srgbClr val="FFFFFF"/>
-                    </a:solidFill>
-                  </a:tcPr>
-                </a:tc>
-              </a:tr>
-            </a:tbl>
+          <a:graphicData uri="http://schemas.openxmlformats.org/drawingml/2006/chart">
+            <c:chart xmlns:r="http://schemas.openxmlformats.org/officeDocument/2006/relationships" xmlns:c="http://schemas.openxmlformats.org/drawingml/2006/chart" r:id="R0f94985e972f4ef5"/>
           </a:graphicData>
         </a:graphic>
       </p:graphicFrame>
@@ -7824,19 +7032,244 @@
           <p:cNvPr id="5" name="">
             <a:extLst xmlns:a="http://schemas.openxmlformats.org/drawingml/2006/main">
               <a:ext uri="{FF2B5EF4-FFF2-40B4-BE49-F238E27FC236}">
-                <a16:creationId xmlns:a16="http://schemas.microsoft.com/office/drawing/2014/main" id="{8894DAC9-BB36-46E3-9A7A-1D6F66D65C05}"/>
-              </a:ext>
-            </a:extLst>
-          </p:cNvPr>
-          <p:cNvSpPr>
-            <a:spLocks xmlns:a="http://schemas.openxmlformats.org/drawingml/2006/main" noGrp="1"/>
-          </p:cNvSpPr>
-          <p:nvPr/>
-        </p:nvSpPr>
-        <p:spPr>
-          <a:xfrm xmlns:a="http://schemas.openxmlformats.org/drawingml/2006/main">
-            <a:off x="609600" y="5191125"/>
-            <a:ext cx="10953750" cy="361950"/>
+                <a16:creationId xmlns:a16="http://schemas.microsoft.com/office/drawing/2014/main" id="{FC8587D0-E7AA-4B18-8103-CB9E233E9980}"/>
+              </a:ext>
+            </a:extLst>
+          </p:cNvPr>
+          <p:cNvSpPr>
+            <a:spLocks xmlns:a="http://schemas.openxmlformats.org/drawingml/2006/main" noGrp="1"/>
+          </p:cNvSpPr>
+          <p:nvPr/>
+        </p:nvSpPr>
+        <p:spPr>
+          <a:xfrm xmlns:a="http://schemas.openxmlformats.org/drawingml/2006/main">
+            <a:off x="609600" y="1381125"/>
+            <a:ext cx="10906125" cy="333375"/>
+          </a:xfrm>
+          <a:prstGeom xmlns:a="http://schemas.openxmlformats.org/drawingml/2006/main" prst="rect">
+            <a:avLst/>
+          </a:prstGeom>
+          <a:noFill xmlns:a="http://schemas.openxmlformats.org/drawingml/2006/main"/>
+          <a:ln xmlns:a="http://schemas.openxmlformats.org/drawingml/2006/main" w="0">
+            <a:noFill/>
+          </a:ln>
+        </p:spPr>
+        <p:txBody>
+          <a:bodyPr xmlns:a="http://schemas.openxmlformats.org/drawingml/2006/main" lIns="0" tIns="0" rIns="0" bIns="0"/>
+          <a:lstStyle xmlns:a="http://schemas.openxmlformats.org/drawingml/2006/main"/>
+          <a:p xmlns:a="http://schemas.openxmlformats.org/drawingml/2006/main">
+            <a:r>
+              <a:rPr sz="1875" b="1">
+                <a:solidFill>
+                  <a:srgbClr val="086B93"/>
+                </a:solidFill>
+                <a:latin typeface="Arial"/>
+                <a:ea typeface="Arial"/>
+                <a:cs typeface="Arial"/>
+              </a:rPr>
+              <a:t>4 workloads × frame 39; 100 repetitions/path. GPU timeline, not wall time.</a:t>
+            </a:r>
+          </a:p>
+        </p:txBody>
+      </p:sp>
+      <p:sp>
+        <p:nvSpPr>
+          <p:cNvPr id="6" name="">
+            <a:extLst xmlns:a="http://schemas.openxmlformats.org/drawingml/2006/main">
+              <a:ext uri="{FF2B5EF4-FFF2-40B4-BE49-F238E27FC236}">
+                <a16:creationId xmlns:a16="http://schemas.microsoft.com/office/drawing/2014/main" id="{5B1C1FE3-DC60-44C2-8E0A-0AA8C4B070F1}"/>
+              </a:ext>
+            </a:extLst>
+          </p:cNvPr>
+          <p:cNvSpPr>
+            <a:spLocks xmlns:a="http://schemas.openxmlformats.org/drawingml/2006/main" noGrp="1"/>
+          </p:cNvSpPr>
+          <p:nvPr/>
+        </p:nvSpPr>
+        <p:spPr>
+          <a:xfrm xmlns:a="http://schemas.openxmlformats.org/drawingml/2006/main">
+            <a:off x="8858250" y="2028825"/>
+            <a:ext cx="2667000" cy="476250"/>
+          </a:xfrm>
+          <a:prstGeom xmlns:a="http://schemas.openxmlformats.org/drawingml/2006/main" prst="rect">
+            <a:avLst/>
+          </a:prstGeom>
+          <a:noFill xmlns:a="http://schemas.openxmlformats.org/drawingml/2006/main"/>
+          <a:ln xmlns:a="http://schemas.openxmlformats.org/drawingml/2006/main" w="0">
+            <a:noFill/>
+          </a:ln>
+        </p:spPr>
+        <p:txBody>
+          <a:bodyPr xmlns:a="http://schemas.openxmlformats.org/drawingml/2006/main" lIns="0" tIns="0" rIns="0" bIns="0"/>
+          <a:lstStyle xmlns:a="http://schemas.openxmlformats.org/drawingml/2006/main"/>
+          <a:p xmlns:a="http://schemas.openxmlformats.org/drawingml/2006/main">
+            <a:r>
+              <a:rPr sz="2625" b="1">
+                <a:solidFill>
+                  <a:srgbClr val="086B93"/>
+                </a:solidFill>
+                <a:latin typeface="Arial"/>
+                <a:ea typeface="Arial"/>
+                <a:cs typeface="Arial"/>
+              </a:rPr>
+              <a:t>2.8% region</a:t>
+            </a:r>
+          </a:p>
+        </p:txBody>
+      </p:sp>
+      <p:sp>
+        <p:nvSpPr>
+          <p:cNvPr id="7" name="">
+            <a:extLst xmlns:a="http://schemas.openxmlformats.org/drawingml/2006/main">
+              <a:ext uri="{FF2B5EF4-FFF2-40B4-BE49-F238E27FC236}">
+                <a16:creationId xmlns:a16="http://schemas.microsoft.com/office/drawing/2014/main" id="{399E4EE5-A198-4B0B-B86E-B0A3A6031AC7}"/>
+              </a:ext>
+            </a:extLst>
+          </p:cNvPr>
+          <p:cNvSpPr>
+            <a:spLocks xmlns:a="http://schemas.openxmlformats.org/drawingml/2006/main" noGrp="1"/>
+          </p:cNvSpPr>
+          <p:nvPr/>
+        </p:nvSpPr>
+        <p:spPr>
+          <a:xfrm xmlns:a="http://schemas.openxmlformats.org/drawingml/2006/main">
+            <a:off x="8858250" y="2695575"/>
+            <a:ext cx="2857500" cy="619125"/>
+          </a:xfrm>
+          <a:prstGeom xmlns:a="http://schemas.openxmlformats.org/drawingml/2006/main" prst="rect">
+            <a:avLst/>
+          </a:prstGeom>
+          <a:noFill xmlns:a="http://schemas.openxmlformats.org/drawingml/2006/main"/>
+          <a:ln xmlns:a="http://schemas.openxmlformats.org/drawingml/2006/main" w="0">
+            <a:noFill/>
+          </a:ln>
+        </p:spPr>
+        <p:txBody>
+          <a:bodyPr xmlns:a="http://schemas.openxmlformats.org/drawingml/2006/main" lIns="0" tIns="0" rIns="0" bIns="0"/>
+          <a:lstStyle xmlns:a="http://schemas.openxmlformats.org/drawingml/2006/main"/>
+          <a:p xmlns:a="http://schemas.openxmlformats.org/drawingml/2006/main">
+            <a:r>
+              <a:rPr sz="3375" b="1">
+                <a:solidFill>
+                  <a:srgbClr val="152D43"/>
+                </a:solidFill>
+                <a:latin typeface="Arial"/>
+                <a:ea typeface="Arial"/>
+                <a:cs typeface="Arial"/>
+              </a:rPr>
+              <a:t>5.462 ms</a:t>
+            </a:r>
+          </a:p>
+        </p:txBody>
+      </p:sp>
+      <p:sp>
+        <p:nvSpPr>
+          <p:cNvPr id="8" name="">
+            <a:extLst xmlns:a="http://schemas.openxmlformats.org/drawingml/2006/main">
+              <a:ext uri="{FF2B5EF4-FFF2-40B4-BE49-F238E27FC236}">
+                <a16:creationId xmlns:a16="http://schemas.microsoft.com/office/drawing/2014/main" id="{4891ECD1-451A-4461-A687-264117661EBE}"/>
+              </a:ext>
+            </a:extLst>
+          </p:cNvPr>
+          <p:cNvSpPr>
+            <a:spLocks xmlns:a="http://schemas.openxmlformats.org/drawingml/2006/main" noGrp="1"/>
+          </p:cNvSpPr>
+          <p:nvPr/>
+        </p:nvSpPr>
+        <p:spPr>
+          <a:xfrm xmlns:a="http://schemas.openxmlformats.org/drawingml/2006/main">
+            <a:off x="8620125" y="3352800"/>
+            <a:ext cx="2952750" cy="381000"/>
+          </a:xfrm>
+          <a:prstGeom xmlns:a="http://schemas.openxmlformats.org/drawingml/2006/main" prst="rect">
+            <a:avLst/>
+          </a:prstGeom>
+          <a:noFill xmlns:a="http://schemas.openxmlformats.org/drawingml/2006/main"/>
+          <a:ln xmlns:a="http://schemas.openxmlformats.org/drawingml/2006/main" w="0">
+            <a:noFill/>
+          </a:ln>
+        </p:spPr>
+        <p:txBody>
+          <a:bodyPr xmlns:a="http://schemas.openxmlformats.org/drawingml/2006/main" lIns="0" tIns="0" rIns="0" bIns="0"/>
+          <a:lstStyle xmlns:a="http://schemas.openxmlformats.org/drawingml/2006/main"/>
+          <a:p xmlns:a="http://schemas.openxmlformats.org/drawingml/2006/main">
+            <a:r>
+              <a:rPr sz="1725" b="0">
+                <a:solidFill>
+                  <a:srgbClr val="536675"/>
+                </a:solidFill>
+                <a:latin typeface="Arial"/>
+                <a:ea typeface="Arial"/>
+                <a:cs typeface="Arial"/>
+              </a:rPr>
+              <a:t>decode + reconstruction</a:t>
+            </a:r>
+          </a:p>
+        </p:txBody>
+      </p:sp>
+      <p:sp>
+        <p:nvSpPr>
+          <p:cNvPr id="9" name="">
+            <a:extLst xmlns:a="http://schemas.openxmlformats.org/drawingml/2006/main">
+              <a:ext uri="{FF2B5EF4-FFF2-40B4-BE49-F238E27FC236}">
+                <a16:creationId xmlns:a16="http://schemas.microsoft.com/office/drawing/2014/main" id="{052CEAE3-571A-4803-8325-765F7E19F323}"/>
+              </a:ext>
+            </a:extLst>
+          </p:cNvPr>
+          <p:cNvSpPr>
+            <a:spLocks xmlns:a="http://schemas.openxmlformats.org/drawingml/2006/main" noGrp="1"/>
+          </p:cNvSpPr>
+          <p:nvPr/>
+        </p:nvSpPr>
+        <p:spPr>
+          <a:xfrm xmlns:a="http://schemas.openxmlformats.org/drawingml/2006/main">
+            <a:off x="8858250" y="4019550"/>
+            <a:ext cx="2667000" cy="590550"/>
+          </a:xfrm>
+          <a:prstGeom xmlns:a="http://schemas.openxmlformats.org/drawingml/2006/main" prst="rect">
+            <a:avLst/>
+          </a:prstGeom>
+          <a:noFill xmlns:a="http://schemas.openxmlformats.org/drawingml/2006/main"/>
+          <a:ln xmlns:a="http://schemas.openxmlformats.org/drawingml/2006/main" w="0">
+            <a:noFill/>
+          </a:ln>
+        </p:spPr>
+        <p:txBody>
+          <a:bodyPr xmlns:a="http://schemas.openxmlformats.org/drawingml/2006/main" lIns="0" tIns="0" rIns="0" bIns="0"/>
+          <a:lstStyle xmlns:a="http://schemas.openxmlformats.org/drawingml/2006/main"/>
+          <a:p xmlns:a="http://schemas.openxmlformats.org/drawingml/2006/main">
+            <a:r>
+              <a:rPr sz="3450" b="1">
+                <a:solidFill>
+                  <a:srgbClr val="148B83"/>
+                </a:solidFill>
+                <a:latin typeface="Arial"/>
+                <a:ea typeface="Arial"/>
+                <a:cs typeface="Arial"/>
+              </a:rPr>
+              <a:t>1.83×</a:t>
+            </a:r>
+          </a:p>
+        </p:txBody>
+      </p:sp>
+      <p:sp>
+        <p:nvSpPr>
+          <p:cNvPr id="10" name="">
+            <a:extLst xmlns:a="http://schemas.openxmlformats.org/drawingml/2006/main">
+              <a:ext uri="{FF2B5EF4-FFF2-40B4-BE49-F238E27FC236}">
+                <a16:creationId xmlns:a16="http://schemas.microsoft.com/office/drawing/2014/main" id="{CA760181-77EA-41D6-A00C-EAA672DAD0CC}"/>
+              </a:ext>
+            </a:extLst>
+          </p:cNvPr>
+          <p:cNvSpPr>
+            <a:spLocks xmlns:a="http://schemas.openxmlformats.org/drawingml/2006/main" noGrp="1"/>
+          </p:cNvSpPr>
+          <p:nvPr/>
+        </p:nvSpPr>
+        <p:spPr>
+          <a:xfrm xmlns:a="http://schemas.openxmlformats.org/drawingml/2006/main">
+            <a:off x="8858250" y="4667250"/>
+            <a:ext cx="2667000" cy="381000"/>
           </a:xfrm>
           <a:prstGeom xmlns:a="http://schemas.openxmlformats.org/drawingml/2006/main" prst="rect">
             <a:avLst/>
@@ -7853,68 +7286,23 @@
             <a:r>
               <a:rPr sz="1875" b="0">
                 <a:solidFill>
-                  <a:srgbClr val="152D43"/>
+                  <a:srgbClr val="536675"/>
                 </a:solidFill>
                 <a:latin typeface="Arial"/>
                 <a:ea typeface="Arial"/>
                 <a:cs typeface="Arial"/>
               </a:rPr>
-              <a:t>Timing excludes input/output copies, allocation, disk I/O, network, decoding, and display.</a:t>
+              <a:t>versus Full + decode</a:t>
             </a:r>
           </a:p>
         </p:txBody>
       </p:sp>
       <p:sp>
         <p:nvSpPr>
-          <p:cNvPr id="6" name="">
-            <a:extLst xmlns:a="http://schemas.openxmlformats.org/drawingml/2006/main">
-              <a:ext uri="{FF2B5EF4-FFF2-40B4-BE49-F238E27FC236}">
-                <a16:creationId xmlns:a16="http://schemas.microsoft.com/office/drawing/2014/main" id="{32090890-00C3-4E17-AC68-4B226388B7EA}"/>
-              </a:ext>
-            </a:extLst>
-          </p:cNvPr>
-          <p:cNvSpPr>
-            <a:spLocks xmlns:a="http://schemas.openxmlformats.org/drawingml/2006/main" noGrp="1"/>
-          </p:cNvSpPr>
-          <p:nvPr/>
-        </p:nvSpPr>
-        <p:spPr>
-          <a:xfrm xmlns:a="http://schemas.openxmlformats.org/drawingml/2006/main">
-            <a:off x="609600" y="5600700"/>
-            <a:ext cx="10953750" cy="361950"/>
-          </a:xfrm>
-          <a:prstGeom xmlns:a="http://schemas.openxmlformats.org/drawingml/2006/main" prst="rect">
-            <a:avLst/>
-          </a:prstGeom>
-          <a:noFill xmlns:a="http://schemas.openxmlformats.org/drawingml/2006/main"/>
-          <a:ln xmlns:a="http://schemas.openxmlformats.org/drawingml/2006/main" w="0">
-            <a:noFill/>
-          </a:ln>
-        </p:spPr>
-        <p:txBody>
-          <a:bodyPr xmlns:a="http://schemas.openxmlformats.org/drawingml/2006/main" lIns="0" tIns="0" rIns="0" bIns="0"/>
-          <a:lstStyle xmlns:a="http://schemas.openxmlformats.org/drawingml/2006/main"/>
-          <a:p xmlns:a="http://schemas.openxmlformats.org/drawingml/2006/main">
-            <a:r>
-              <a:rPr sz="1875" b="1">
-                <a:solidFill>
-                  <a:srgbClr val="086B93"/>
-                </a:solidFill>
-                <a:latin typeface="Arial"/>
-                <a:ea typeface="Arial"/>
-                <a:cs typeface="Arial"/>
-              </a:rPr>
-              <a:t>Slides 6–7 add one fixed 2 ms/frame decode budget; this is not measured end-to-end.</a:t>
-            </a:r>
-          </a:p>
-        </p:txBody>
-      </p:sp>
-      <p:sp>
-        <p:nvSpPr>
-          <p:cNvPr id="7" name="">
-            <a:extLst xmlns:a="http://schemas.openxmlformats.org/drawingml/2006/main">
-              <a:ext uri="{FF2B5EF4-FFF2-40B4-BE49-F238E27FC236}">
-                <a16:creationId xmlns:a16="http://schemas.microsoft.com/office/drawing/2014/main" id="{A276807B-F1E4-43B9-9A84-8836807C2ED8}"/>
+          <p:cNvPr id="11" name="">
+            <a:extLst xmlns:a="http://schemas.openxmlformats.org/drawingml/2006/main">
+              <a:ext uri="{FF2B5EF4-FFF2-40B4-BE49-F238E27FC236}">
+                <a16:creationId xmlns:a16="http://schemas.microsoft.com/office/drawing/2014/main" id="{5AAB3EC2-6239-40D6-BC60-602C8853129C}"/>
               </a:ext>
             </a:extLst>
           </p:cNvPr>
@@ -7949,7 +7337,7 @@
                 <a:ea typeface="Arial"/>
                 <a:cs typeface="Arial"/>
               </a:rPr>
-              <a:t>Timing and quality are from separate experiments. No new quality equivalence or jointly measured trade-off is claimed.</a:t>
+              <a:t>Derived budget, not measured end-to-end. Copies excluded. Savings include reduced clearing work; no optimal-Full claim.</a:t>
             </a:r>
           </a:p>
         </p:txBody>
@@ -7957,7 +7345,7 @@
     </p:spTree>
     <p:extLst>
       <p:ext uri="{BB962C8B-B14F-4D97-AF65-F5344CB8AC3E}">
-        <p14:creationId xmlns:p14="http://schemas.microsoft.com/office/powerpoint/2010/main" val="1407810125"/>
+        <p14:creationId xmlns:p14="http://schemas.microsoft.com/office/powerpoint/2010/main" val="1223246617"/>
       </p:ext>
     </p:extLst>
   </p:cSld>
@@ -7985,10 +7373,10 @@
       </p:grpSpPr>
       <p:sp>
         <p:nvSpPr>
-          <p:cNvPr id="12" name="">
-            <a:extLst xmlns:a="http://schemas.openxmlformats.org/drawingml/2006/main">
-              <a:ext uri="{FF2B5EF4-FFF2-40B4-BE49-F238E27FC236}">
-                <a16:creationId xmlns:a16="http://schemas.microsoft.com/office/drawing/2014/main" id="{574119EA-2228-4ED6-8283-648A928414D9}"/>
+          <p:cNvPr id="8" name="">
+            <a:extLst xmlns:a="http://schemas.openxmlformats.org/drawingml/2006/main">
+              <a:ext uri="{FF2B5EF4-FFF2-40B4-BE49-F238E27FC236}">
+                <a16:creationId xmlns:a16="http://schemas.microsoft.com/office/drawing/2014/main" id="{25297BD3-542B-42B4-A0BE-9AC4C6BAB68E}"/>
               </a:ext>
             </a:extLst>
           </p:cNvPr>
@@ -8023,7 +7411,7 @@
                 <a:ea typeface="Arial"/>
                 <a:cs typeface="Arial"/>
               </a:rPr>
-              <a:t>30W CUDA C++: decode budget + reconstruction</a:t>
+              <a:t>Quality and timing across region sizes</a:t>
             </a:r>
           </a:p>
         </p:txBody>
@@ -8033,7 +7421,7 @@
           <p:cNvPr id="2" name="">
             <a:extLst xmlns:a="http://schemas.openxmlformats.org/drawingml/2006/main">
               <a:ext uri="{FF2B5EF4-FFF2-40B4-BE49-F238E27FC236}">
-                <a16:creationId xmlns:a16="http://schemas.microsoft.com/office/drawing/2014/main" id="{19A0A1B8-59B0-4AA8-9822-2011A185E765}"/>
+                <a16:creationId xmlns:a16="http://schemas.microsoft.com/office/drawing/2014/main" id="{7A42AC4E-0C09-4651-80AE-F2A753F72686}"/>
               </a:ext>
             </a:extLst>
           </p:cNvPr>
@@ -8063,7 +7451,7 @@
           <p:cNvPr id="3" name="">
             <a:extLst xmlns:a="http://schemas.openxmlformats.org/drawingml/2006/main">
               <a:ext uri="{FF2B5EF4-FFF2-40B4-BE49-F238E27FC236}">
-                <a16:creationId xmlns:a16="http://schemas.microsoft.com/office/drawing/2014/main" id="{2865A3A5-0A9D-4FF9-9788-719D611F0E18}"/>
+                <a16:creationId xmlns:a16="http://schemas.microsoft.com/office/drawing/2014/main" id="{AB764DB4-DBBE-485A-A0BD-3495CBDA0574}"/>
               </a:ext>
             </a:extLst>
           </p:cNvPr>
@@ -8105,496 +7493,10 @@
       </p:sp>
       <p:graphicFrame>
         <p:nvGraphicFramePr>
-          <p:cNvPr id="4" name="Chart">
-            <a:extLst xmlns:a="http://schemas.openxmlformats.org/drawingml/2006/main">
-              <a:ext uri="{FF2B5EF4-FFF2-40B4-BE49-F238E27FC236}">
-                <a16:creationId xmlns:a16="http://schemas.microsoft.com/office/drawing/2014/main" id="{E621F1A7-35AB-4CE2-B7EE-9A2C1624DF71}"/>
-              </a:ext>
-            </a:extLst>
-          </p:cNvPr>
-          <p:cNvGraphicFramePr/>
-          <p:nvPr/>
-        </p:nvGraphicFramePr>
-        <p:xfrm>
-          <a:off xmlns:a="http://schemas.openxmlformats.org/drawingml/2006/main" x="609600" y="1828800"/>
-          <a:ext xmlns:a="http://schemas.openxmlformats.org/drawingml/2006/main" cx="7715250" cy="3752850"/>
-        </p:xfrm>
-        <a:graphic xmlns:a="http://schemas.openxmlformats.org/drawingml/2006/main">
-          <a:graphicData uri="http://schemas.openxmlformats.org/drawingml/2006/chart">
-            <c:chart xmlns:r="http://schemas.openxmlformats.org/officeDocument/2006/relationships" xmlns:c="http://schemas.openxmlformats.org/drawingml/2006/chart" r:id="R50ab8559b0a64bd2"/>
-          </a:graphicData>
-        </a:graphic>
-      </p:graphicFrame>
-      <p:sp>
-        <p:nvSpPr>
-          <p:cNvPr id="5" name="">
-            <a:extLst xmlns:a="http://schemas.openxmlformats.org/drawingml/2006/main">
-              <a:ext uri="{FF2B5EF4-FFF2-40B4-BE49-F238E27FC236}">
-                <a16:creationId xmlns:a16="http://schemas.microsoft.com/office/drawing/2014/main" id="{2DDA2F4B-09E7-4C10-9C42-E91AE1E4632F}"/>
-              </a:ext>
-            </a:extLst>
-          </p:cNvPr>
-          <p:cNvSpPr>
-            <a:spLocks xmlns:a="http://schemas.openxmlformats.org/drawingml/2006/main" noGrp="1"/>
-          </p:cNvSpPr>
-          <p:nvPr/>
-        </p:nvSpPr>
-        <p:spPr>
-          <a:xfrm xmlns:a="http://schemas.openxmlformats.org/drawingml/2006/main">
-            <a:off x="609600" y="1381125"/>
-            <a:ext cx="10906125" cy="333375"/>
-          </a:xfrm>
-          <a:prstGeom xmlns:a="http://schemas.openxmlformats.org/drawingml/2006/main" prst="rect">
-            <a:avLst/>
-          </a:prstGeom>
-          <a:noFill xmlns:a="http://schemas.openxmlformats.org/drawingml/2006/main"/>
-          <a:ln xmlns:a="http://schemas.openxmlformats.org/drawingml/2006/main" w="0">
-            <a:noFill/>
-          </a:ln>
-        </p:spPr>
-        <p:txBody>
-          <a:bodyPr xmlns:a="http://schemas.openxmlformats.org/drawingml/2006/main" lIns="0" tIns="0" rIns="0" bIns="0"/>
-          <a:lstStyle xmlns:a="http://schemas.openxmlformats.org/drawingml/2006/main"/>
-          <a:p xmlns:a="http://schemas.openxmlformats.org/drawingml/2006/main">
-            <a:r>
-              <a:rPr sz="1875" b="1">
-                <a:solidFill>
-                  <a:srgbClr val="086B93"/>
-                </a:solidFill>
-                <a:latin typeface="Arial"/>
-                <a:ea typeface="Arial"/>
-                <a:cs typeface="Arial"/>
-              </a:rPr>
-              <a:t>4 workloads × frame 39; 100 repetitions/path. GPU timeline, not wall time.</a:t>
-            </a:r>
-          </a:p>
-        </p:txBody>
-      </p:sp>
-      <p:sp>
-        <p:nvSpPr>
-          <p:cNvPr id="6" name="">
-            <a:extLst xmlns:a="http://schemas.openxmlformats.org/drawingml/2006/main">
-              <a:ext uri="{FF2B5EF4-FFF2-40B4-BE49-F238E27FC236}">
-                <a16:creationId xmlns:a16="http://schemas.microsoft.com/office/drawing/2014/main" id="{C0C809F9-13D3-411E-89D3-64A96C88D600}"/>
-              </a:ext>
-            </a:extLst>
-          </p:cNvPr>
-          <p:cNvSpPr>
-            <a:spLocks xmlns:a="http://schemas.openxmlformats.org/drawingml/2006/main" noGrp="1"/>
-          </p:cNvSpPr>
-          <p:nvPr/>
-        </p:nvSpPr>
-        <p:spPr>
-          <a:xfrm xmlns:a="http://schemas.openxmlformats.org/drawingml/2006/main">
-            <a:off x="8858250" y="2028825"/>
-            <a:ext cx="2667000" cy="476250"/>
-          </a:xfrm>
-          <a:prstGeom xmlns:a="http://schemas.openxmlformats.org/drawingml/2006/main" prst="rect">
-            <a:avLst/>
-          </a:prstGeom>
-          <a:noFill xmlns:a="http://schemas.openxmlformats.org/drawingml/2006/main"/>
-          <a:ln xmlns:a="http://schemas.openxmlformats.org/drawingml/2006/main" w="0">
-            <a:noFill/>
-          </a:ln>
-        </p:spPr>
-        <p:txBody>
-          <a:bodyPr xmlns:a="http://schemas.openxmlformats.org/drawingml/2006/main" lIns="0" tIns="0" rIns="0" bIns="0"/>
-          <a:lstStyle xmlns:a="http://schemas.openxmlformats.org/drawingml/2006/main"/>
-          <a:p xmlns:a="http://schemas.openxmlformats.org/drawingml/2006/main">
-            <a:r>
-              <a:rPr sz="2625" b="1">
-                <a:solidFill>
-                  <a:srgbClr val="086B93"/>
-                </a:solidFill>
-                <a:latin typeface="Arial"/>
-                <a:ea typeface="Arial"/>
-                <a:cs typeface="Arial"/>
-              </a:rPr>
-              <a:t>2.8% region</a:t>
-            </a:r>
-          </a:p>
-        </p:txBody>
-      </p:sp>
-      <p:sp>
-        <p:nvSpPr>
-          <p:cNvPr id="7" name="">
-            <a:extLst xmlns:a="http://schemas.openxmlformats.org/drawingml/2006/main">
-              <a:ext uri="{FF2B5EF4-FFF2-40B4-BE49-F238E27FC236}">
-                <a16:creationId xmlns:a16="http://schemas.microsoft.com/office/drawing/2014/main" id="{D00AA083-073B-4DE1-B673-55873BF297C0}"/>
-              </a:ext>
-            </a:extLst>
-          </p:cNvPr>
-          <p:cNvSpPr>
-            <a:spLocks xmlns:a="http://schemas.openxmlformats.org/drawingml/2006/main" noGrp="1"/>
-          </p:cNvSpPr>
-          <p:nvPr/>
-        </p:nvSpPr>
-        <p:spPr>
-          <a:xfrm xmlns:a="http://schemas.openxmlformats.org/drawingml/2006/main">
-            <a:off x="8858250" y="2695575"/>
-            <a:ext cx="2857500" cy="619125"/>
-          </a:xfrm>
-          <a:prstGeom xmlns:a="http://schemas.openxmlformats.org/drawingml/2006/main" prst="rect">
-            <a:avLst/>
-          </a:prstGeom>
-          <a:noFill xmlns:a="http://schemas.openxmlformats.org/drawingml/2006/main"/>
-          <a:ln xmlns:a="http://schemas.openxmlformats.org/drawingml/2006/main" w="0">
-            <a:noFill/>
-          </a:ln>
-        </p:spPr>
-        <p:txBody>
-          <a:bodyPr xmlns:a="http://schemas.openxmlformats.org/drawingml/2006/main" lIns="0" tIns="0" rIns="0" bIns="0"/>
-          <a:lstStyle xmlns:a="http://schemas.openxmlformats.org/drawingml/2006/main"/>
-          <a:p xmlns:a="http://schemas.openxmlformats.org/drawingml/2006/main">
-            <a:r>
-              <a:rPr sz="3375" b="1">
-                <a:solidFill>
-                  <a:srgbClr val="152D43"/>
-                </a:solidFill>
-                <a:latin typeface="Arial"/>
-                <a:ea typeface="Arial"/>
-                <a:cs typeface="Arial"/>
-              </a:rPr>
-              <a:t>5.462 ms</a:t>
-            </a:r>
-          </a:p>
-        </p:txBody>
-      </p:sp>
-      <p:sp>
-        <p:nvSpPr>
-          <p:cNvPr id="8" name="">
-            <a:extLst xmlns:a="http://schemas.openxmlformats.org/drawingml/2006/main">
-              <a:ext uri="{FF2B5EF4-FFF2-40B4-BE49-F238E27FC236}">
-                <a16:creationId xmlns:a16="http://schemas.microsoft.com/office/drawing/2014/main" id="{C5C18691-F595-4DC0-B750-4289900CCC51}"/>
-              </a:ext>
-            </a:extLst>
-          </p:cNvPr>
-          <p:cNvSpPr>
-            <a:spLocks xmlns:a="http://schemas.openxmlformats.org/drawingml/2006/main" noGrp="1"/>
-          </p:cNvSpPr>
-          <p:nvPr/>
-        </p:nvSpPr>
-        <p:spPr>
-          <a:xfrm xmlns:a="http://schemas.openxmlformats.org/drawingml/2006/main">
-            <a:off x="8620125" y="3352800"/>
-            <a:ext cx="2952750" cy="381000"/>
-          </a:xfrm>
-          <a:prstGeom xmlns:a="http://schemas.openxmlformats.org/drawingml/2006/main" prst="rect">
-            <a:avLst/>
-          </a:prstGeom>
-          <a:noFill xmlns:a="http://schemas.openxmlformats.org/drawingml/2006/main"/>
-          <a:ln xmlns:a="http://schemas.openxmlformats.org/drawingml/2006/main" w="0">
-            <a:noFill/>
-          </a:ln>
-        </p:spPr>
-        <p:txBody>
-          <a:bodyPr xmlns:a="http://schemas.openxmlformats.org/drawingml/2006/main" lIns="0" tIns="0" rIns="0" bIns="0"/>
-          <a:lstStyle xmlns:a="http://schemas.openxmlformats.org/drawingml/2006/main"/>
-          <a:p xmlns:a="http://schemas.openxmlformats.org/drawingml/2006/main">
-            <a:r>
-              <a:rPr sz="1725" b="0">
-                <a:solidFill>
-                  <a:srgbClr val="536675"/>
-                </a:solidFill>
-                <a:latin typeface="Arial"/>
-                <a:ea typeface="Arial"/>
-                <a:cs typeface="Arial"/>
-              </a:rPr>
-              <a:t>decode + reconstruction</a:t>
-            </a:r>
-          </a:p>
-        </p:txBody>
-      </p:sp>
-      <p:sp>
-        <p:nvSpPr>
-          <p:cNvPr id="9" name="">
-            <a:extLst xmlns:a="http://schemas.openxmlformats.org/drawingml/2006/main">
-              <a:ext uri="{FF2B5EF4-FFF2-40B4-BE49-F238E27FC236}">
-                <a16:creationId xmlns:a16="http://schemas.microsoft.com/office/drawing/2014/main" id="{B8D40134-A836-4C82-A068-06D41A87C6C9}"/>
-              </a:ext>
-            </a:extLst>
-          </p:cNvPr>
-          <p:cNvSpPr>
-            <a:spLocks xmlns:a="http://schemas.openxmlformats.org/drawingml/2006/main" noGrp="1"/>
-          </p:cNvSpPr>
-          <p:nvPr/>
-        </p:nvSpPr>
-        <p:spPr>
-          <a:xfrm xmlns:a="http://schemas.openxmlformats.org/drawingml/2006/main">
-            <a:off x="8858250" y="4019550"/>
-            <a:ext cx="2667000" cy="590550"/>
-          </a:xfrm>
-          <a:prstGeom xmlns:a="http://schemas.openxmlformats.org/drawingml/2006/main" prst="rect">
-            <a:avLst/>
-          </a:prstGeom>
-          <a:noFill xmlns:a="http://schemas.openxmlformats.org/drawingml/2006/main"/>
-          <a:ln xmlns:a="http://schemas.openxmlformats.org/drawingml/2006/main" w="0">
-            <a:noFill/>
-          </a:ln>
-        </p:spPr>
-        <p:txBody>
-          <a:bodyPr xmlns:a="http://schemas.openxmlformats.org/drawingml/2006/main" lIns="0" tIns="0" rIns="0" bIns="0"/>
-          <a:lstStyle xmlns:a="http://schemas.openxmlformats.org/drawingml/2006/main"/>
-          <a:p xmlns:a="http://schemas.openxmlformats.org/drawingml/2006/main">
-            <a:r>
-              <a:rPr sz="3450" b="1">
-                <a:solidFill>
-                  <a:srgbClr val="148B83"/>
-                </a:solidFill>
-                <a:latin typeface="Arial"/>
-                <a:ea typeface="Arial"/>
-                <a:cs typeface="Arial"/>
-              </a:rPr>
-              <a:t>1.83×</a:t>
-            </a:r>
-          </a:p>
-        </p:txBody>
-      </p:sp>
-      <p:sp>
-        <p:nvSpPr>
-          <p:cNvPr id="10" name="">
-            <a:extLst xmlns:a="http://schemas.openxmlformats.org/drawingml/2006/main">
-              <a:ext uri="{FF2B5EF4-FFF2-40B4-BE49-F238E27FC236}">
-                <a16:creationId xmlns:a16="http://schemas.microsoft.com/office/drawing/2014/main" id="{27525BB6-B97D-47EE-88BC-B323EA269B18}"/>
-              </a:ext>
-            </a:extLst>
-          </p:cNvPr>
-          <p:cNvSpPr>
-            <a:spLocks xmlns:a="http://schemas.openxmlformats.org/drawingml/2006/main" noGrp="1"/>
-          </p:cNvSpPr>
-          <p:nvPr/>
-        </p:nvSpPr>
-        <p:spPr>
-          <a:xfrm xmlns:a="http://schemas.openxmlformats.org/drawingml/2006/main">
-            <a:off x="8858250" y="4667250"/>
-            <a:ext cx="2667000" cy="381000"/>
-          </a:xfrm>
-          <a:prstGeom xmlns:a="http://schemas.openxmlformats.org/drawingml/2006/main" prst="rect">
-            <a:avLst/>
-          </a:prstGeom>
-          <a:noFill xmlns:a="http://schemas.openxmlformats.org/drawingml/2006/main"/>
-          <a:ln xmlns:a="http://schemas.openxmlformats.org/drawingml/2006/main" w="0">
-            <a:noFill/>
-          </a:ln>
-        </p:spPr>
-        <p:txBody>
-          <a:bodyPr xmlns:a="http://schemas.openxmlformats.org/drawingml/2006/main" lIns="0" tIns="0" rIns="0" bIns="0"/>
-          <a:lstStyle xmlns:a="http://schemas.openxmlformats.org/drawingml/2006/main"/>
-          <a:p xmlns:a="http://schemas.openxmlformats.org/drawingml/2006/main">
-            <a:r>
-              <a:rPr sz="1875" b="0">
-                <a:solidFill>
-                  <a:srgbClr val="536675"/>
-                </a:solidFill>
-                <a:latin typeface="Arial"/>
-                <a:ea typeface="Arial"/>
-                <a:cs typeface="Arial"/>
-              </a:rPr>
-              <a:t>versus Full + decode</a:t>
-            </a:r>
-          </a:p>
-        </p:txBody>
-      </p:sp>
-      <p:sp>
-        <p:nvSpPr>
-          <p:cNvPr id="11" name="">
-            <a:extLst xmlns:a="http://schemas.openxmlformats.org/drawingml/2006/main">
-              <a:ext uri="{FF2B5EF4-FFF2-40B4-BE49-F238E27FC236}">
-                <a16:creationId xmlns:a16="http://schemas.microsoft.com/office/drawing/2014/main" id="{F4B321A8-C7D4-43A3-86BE-868ECA677C0B}"/>
-              </a:ext>
-            </a:extLst>
-          </p:cNvPr>
-          <p:cNvSpPr>
-            <a:spLocks xmlns:a="http://schemas.openxmlformats.org/drawingml/2006/main" noGrp="1"/>
-          </p:cNvSpPr>
-          <p:nvPr/>
-        </p:nvSpPr>
-        <p:spPr>
-          <a:xfrm xmlns:a="http://schemas.openxmlformats.org/drawingml/2006/main">
-            <a:off x="609600" y="5924550"/>
-            <a:ext cx="10715625" cy="457200"/>
-          </a:xfrm>
-          <a:prstGeom xmlns:a="http://schemas.openxmlformats.org/drawingml/2006/main" prst="rect">
-            <a:avLst/>
-          </a:prstGeom>
-          <a:noFill xmlns:a="http://schemas.openxmlformats.org/drawingml/2006/main"/>
-          <a:ln xmlns:a="http://schemas.openxmlformats.org/drawingml/2006/main" w="0">
-            <a:noFill/>
-          </a:ln>
-        </p:spPr>
-        <p:txBody>
-          <a:bodyPr xmlns:a="http://schemas.openxmlformats.org/drawingml/2006/main" lIns="0" tIns="0" rIns="0" bIns="0"/>
-          <a:lstStyle xmlns:a="http://schemas.openxmlformats.org/drawingml/2006/main"/>
-          <a:p xmlns:a="http://schemas.openxmlformats.org/drawingml/2006/main">
-            <a:r>
-              <a:rPr sz="1500" b="0">
-                <a:solidFill>
-                  <a:srgbClr val="536675"/>
-                </a:solidFill>
-                <a:latin typeface="Arial"/>
-                <a:ea typeface="Arial"/>
-                <a:cs typeface="Arial"/>
-              </a:rPr>
-              <a:t>Derived budget, not measured end-to-end. Copies excluded. Savings include reduced clearing work; no optimal-Full claim.</a:t>
-            </a:r>
-          </a:p>
-        </p:txBody>
-      </p:sp>
-    </p:spTree>
-    <p:extLst>
-      <p:ext uri="{BB962C8B-B14F-4D97-AF65-F5344CB8AC3E}">
-        <p14:creationId xmlns:p14="http://schemas.microsoft.com/office/powerpoint/2010/main" val="1158442540"/>
-      </p:ext>
-    </p:extLst>
-  </p:cSld>
-</p:sld>
-</file>
-
-<file path=ppt/slides/slide7.xml><?xml version="1.0" encoding="utf-8"?>
-<p:sld xmlns:p="http://schemas.openxmlformats.org/presentationml/2006/main">
-  <p:cSld>
-    <p:bg>
-      <p:bgPr>
-        <a:solidFill xmlns:a="http://schemas.openxmlformats.org/drawingml/2006/main">
-          <a:srgbClr val="FFFFFF"/>
-        </a:solidFill>
-      </p:bgPr>
-    </p:bg>
-    <p:spTree>
-      <p:nvGrpSpPr>
-        <p:cNvPr id="1" name=""/>
-        <p:cNvGrpSpPr/>
-        <p:nvPr/>
-      </p:nvGrpSpPr>
-      <p:grpSpPr>
-        <a:xfrm xmlns:a="http://schemas.openxmlformats.org/drawingml/2006/main"/>
-      </p:grpSpPr>
-      <p:sp>
-        <p:nvSpPr>
-          <p:cNvPr id="8" name="">
-            <a:extLst xmlns:a="http://schemas.openxmlformats.org/drawingml/2006/main">
-              <a:ext uri="{FF2B5EF4-FFF2-40B4-BE49-F238E27FC236}">
-                <a16:creationId xmlns:a16="http://schemas.microsoft.com/office/drawing/2014/main" id="{D0C93BB5-639A-4E9F-9EF7-5155D388F81D}"/>
-              </a:ext>
-            </a:extLst>
-          </p:cNvPr>
-          <p:cNvSpPr>
-            <a:spLocks xmlns:a="http://schemas.openxmlformats.org/drawingml/2006/main" noGrp="1"/>
-          </p:cNvSpPr>
-          <p:nvPr/>
-        </p:nvSpPr>
-        <p:spPr>
-          <a:xfrm xmlns:a="http://schemas.openxmlformats.org/drawingml/2006/main">
-            <a:off x="609600" y="381000"/>
-            <a:ext cx="10906125" cy="628650"/>
-          </a:xfrm>
-          <a:prstGeom xmlns:a="http://schemas.openxmlformats.org/drawingml/2006/main" prst="rect">
-            <a:avLst/>
-          </a:prstGeom>
-          <a:noFill xmlns:a="http://schemas.openxmlformats.org/drawingml/2006/main"/>
-          <a:ln xmlns:a="http://schemas.openxmlformats.org/drawingml/2006/main" w="0">
-            <a:noFill/>
-          </a:ln>
-        </p:spPr>
-        <p:txBody>
-          <a:bodyPr xmlns:a="http://schemas.openxmlformats.org/drawingml/2006/main" lIns="0" tIns="0" rIns="0" bIns="0"/>
-          <a:lstStyle xmlns:a="http://schemas.openxmlformats.org/drawingml/2006/main"/>
-          <a:p xmlns:a="http://schemas.openxmlformats.org/drawingml/2006/main">
-            <a:r>
-              <a:rPr sz="3150" b="1">
-                <a:solidFill>
-                  <a:srgbClr val="152D43"/>
-                </a:solidFill>
-                <a:latin typeface="Arial"/>
-                <a:ea typeface="Arial"/>
-                <a:cs typeface="Arial"/>
-              </a:rPr>
-              <a:t>Quality and timing across region sizes</a:t>
-            </a:r>
-          </a:p>
-        </p:txBody>
-      </p:sp>
-      <p:sp>
-        <p:nvSpPr>
-          <p:cNvPr id="2" name="">
-            <a:extLst xmlns:a="http://schemas.openxmlformats.org/drawingml/2006/main">
-              <a:ext uri="{FF2B5EF4-FFF2-40B4-BE49-F238E27FC236}">
-                <a16:creationId xmlns:a16="http://schemas.microsoft.com/office/drawing/2014/main" id="{B42CA62D-FF0C-4A0D-981C-818DC1703605}"/>
-              </a:ext>
-            </a:extLst>
-          </p:cNvPr>
-          <p:cNvSpPr>
-            <a:spLocks xmlns:a="http://schemas.openxmlformats.org/drawingml/2006/main" noGrp="1"/>
-          </p:cNvSpPr>
-          <p:nvPr/>
-        </p:nvSpPr>
-        <p:spPr>
-          <a:xfrm xmlns:a="http://schemas.openxmlformats.org/drawingml/2006/main">
-            <a:off x="609600" y="1162050"/>
-            <a:ext cx="10972800" cy="0"/>
-          </a:xfrm>
-          <a:prstGeom xmlns:a="http://schemas.openxmlformats.org/drawingml/2006/main" prst="line">
-            <a:avLst/>
-          </a:prstGeom>
-          <a:noFill xmlns:a="http://schemas.openxmlformats.org/drawingml/2006/main"/>
-          <a:ln xmlns:a="http://schemas.openxmlformats.org/drawingml/2006/main" w="9525">
-            <a:solidFill>
-              <a:srgbClr val="D7DFE5"/>
-            </a:solidFill>
-          </a:ln>
-        </p:spPr>
-      </p:sp>
-      <p:sp>
-        <p:nvSpPr>
-          <p:cNvPr id="3" name="">
-            <a:extLst xmlns:a="http://schemas.openxmlformats.org/drawingml/2006/main">
-              <a:ext uri="{FF2B5EF4-FFF2-40B4-BE49-F238E27FC236}">
-                <a16:creationId xmlns:a16="http://schemas.microsoft.com/office/drawing/2014/main" id="{993AE4C4-831A-4477-84B4-884783FBB323}"/>
-              </a:ext>
-            </a:extLst>
-          </p:cNvPr>
-          <p:cNvSpPr>
-            <a:spLocks xmlns:a="http://schemas.openxmlformats.org/drawingml/2006/main" noGrp="1"/>
-          </p:cNvSpPr>
-          <p:nvPr/>
-        </p:nvSpPr>
-        <p:spPr>
-          <a:xfrm xmlns:a="http://schemas.openxmlformats.org/drawingml/2006/main">
-            <a:off x="11353800" y="6429375"/>
-            <a:ext cx="285750" cy="228600"/>
-          </a:xfrm>
-          <a:prstGeom xmlns:a="http://schemas.openxmlformats.org/drawingml/2006/main" prst="rect">
-            <a:avLst/>
-          </a:prstGeom>
-          <a:noFill xmlns:a="http://schemas.openxmlformats.org/drawingml/2006/main"/>
-          <a:ln xmlns:a="http://schemas.openxmlformats.org/drawingml/2006/main" w="0">
-            <a:noFill/>
-          </a:ln>
-        </p:spPr>
-        <p:txBody>
-          <a:bodyPr xmlns:a="http://schemas.openxmlformats.org/drawingml/2006/main" lIns="0" tIns="0" rIns="0" bIns="0"/>
-          <a:lstStyle xmlns:a="http://schemas.openxmlformats.org/drawingml/2006/main"/>
-          <a:p xmlns:a="http://schemas.openxmlformats.org/drawingml/2006/main">
-            <a:r>
-              <a:rPr sz="1275" b="0">
-                <a:solidFill>
-                  <a:srgbClr val="536675"/>
-                </a:solidFill>
-                <a:latin typeface="Arial"/>
-                <a:ea typeface="Arial"/>
-                <a:cs typeface="Arial"/>
-              </a:rPr>
-              <a:t>7</a:t>
-            </a:r>
-          </a:p>
-        </p:txBody>
-      </p:sp>
-      <p:graphicFrame>
-        <p:nvGraphicFramePr>
           <p:cNvPr id="4" name="">
             <a:extLst xmlns:a="http://schemas.openxmlformats.org/drawingml/2006/main">
               <a:ext uri="{FF2B5EF4-FFF2-40B4-BE49-F238E27FC236}">
-                <a16:creationId xmlns:a16="http://schemas.microsoft.com/office/drawing/2014/main" id="{37330260-036B-41E2-870C-ACCC5477FBCA}"/>
+                <a16:creationId xmlns:a16="http://schemas.microsoft.com/office/drawing/2014/main" id="{5DEF8852-C2C1-4ADB-859B-F517255A89B0}"/>
               </a:ext>
             </a:extLst>
           </p:cNvPr>
@@ -9560,7 +8462,7 @@
           <p:cNvPr id="5" name="">
             <a:extLst xmlns:a="http://schemas.openxmlformats.org/drawingml/2006/main">
               <a:ext uri="{FF2B5EF4-FFF2-40B4-BE49-F238E27FC236}">
-                <a16:creationId xmlns:a16="http://schemas.microsoft.com/office/drawing/2014/main" id="{8AC007F9-DD58-463F-8146-32AD9C82D365}"/>
+                <a16:creationId xmlns:a16="http://schemas.microsoft.com/office/drawing/2014/main" id="{46DB63B0-91DC-489B-ADA1-9398EE9360A9}"/>
               </a:ext>
             </a:extLst>
           </p:cNvPr>
@@ -9605,7 +8507,7 @@
           <p:cNvPr id="6" name="">
             <a:extLst xmlns:a="http://schemas.openxmlformats.org/drawingml/2006/main">
               <a:ext uri="{FF2B5EF4-FFF2-40B4-BE49-F238E27FC236}">
-                <a16:creationId xmlns:a16="http://schemas.microsoft.com/office/drawing/2014/main" id="{21008C5F-EDAD-4258-9678-28345C9F9F20}"/>
+                <a16:creationId xmlns:a16="http://schemas.microsoft.com/office/drawing/2014/main" id="{5FBE0DC4-FC57-4BD1-A116-68C3A2C953A4}"/>
               </a:ext>
             </a:extLst>
           </p:cNvPr>
@@ -9650,7 +8552,7 @@
           <p:cNvPr id="7" name="">
             <a:extLst xmlns:a="http://schemas.openxmlformats.org/drawingml/2006/main">
               <a:ext uri="{FF2B5EF4-FFF2-40B4-BE49-F238E27FC236}">
-                <a16:creationId xmlns:a16="http://schemas.microsoft.com/office/drawing/2014/main" id="{8998305E-FED8-4D73-9EB1-22F36CA9C037}"/>
+                <a16:creationId xmlns:a16="http://schemas.microsoft.com/office/drawing/2014/main" id="{1107472D-2F8D-4D76-9B9E-82B27A7CEAEC}"/>
               </a:ext>
             </a:extLst>
           </p:cNvPr>
@@ -9693,14 +8595,14 @@
     </p:spTree>
     <p:extLst>
       <p:ext uri="{BB962C8B-B14F-4D97-AF65-F5344CB8AC3E}">
-        <p14:creationId xmlns:p14="http://schemas.microsoft.com/office/powerpoint/2010/main" val="31864622"/>
+        <p14:creationId xmlns:p14="http://schemas.microsoft.com/office/powerpoint/2010/main" val="419475429"/>
       </p:ext>
     </p:extLst>
   </p:cSld>
 </p:sld>
 </file>
 
-<file path=ppt/slides/slide8.xml><?xml version="1.0" encoding="utf-8"?>
+<file path=ppt/slides/slide7.xml><?xml version="1.0" encoding="utf-8"?>
 <p:sld xmlns:p="http://schemas.openxmlformats.org/presentationml/2006/main">
   <p:cSld>
     <p:bg>
@@ -9724,7 +8626,7 @@
           <p:cNvPr id="14" name="">
             <a:extLst xmlns:a="http://schemas.openxmlformats.org/drawingml/2006/main">
               <a:ext uri="{FF2B5EF4-FFF2-40B4-BE49-F238E27FC236}">
-                <a16:creationId xmlns:a16="http://schemas.microsoft.com/office/drawing/2014/main" id="{BF763828-6F42-4069-879B-9DE328BB3A47}"/>
+                <a16:creationId xmlns:a16="http://schemas.microsoft.com/office/drawing/2014/main" id="{A75F8F7F-DA8E-46EA-BA12-F2623080626D}"/>
               </a:ext>
             </a:extLst>
           </p:cNvPr>
@@ -9769,7 +8671,7 @@
           <p:cNvPr id="2" name="">
             <a:extLst xmlns:a="http://schemas.openxmlformats.org/drawingml/2006/main">
               <a:ext uri="{FF2B5EF4-FFF2-40B4-BE49-F238E27FC236}">
-                <a16:creationId xmlns:a16="http://schemas.microsoft.com/office/drawing/2014/main" id="{52813728-1379-4089-8896-570BFF358632}"/>
+                <a16:creationId xmlns:a16="http://schemas.microsoft.com/office/drawing/2014/main" id="{27BFB765-84FA-4F13-A723-7C915DC7BF82}"/>
               </a:ext>
             </a:extLst>
           </p:cNvPr>
@@ -9799,7 +8701,7 @@
           <p:cNvPr id="3" name="">
             <a:extLst xmlns:a="http://schemas.openxmlformats.org/drawingml/2006/main">
               <a:ext uri="{FF2B5EF4-FFF2-40B4-BE49-F238E27FC236}">
-                <a16:creationId xmlns:a16="http://schemas.microsoft.com/office/drawing/2014/main" id="{658D3C62-0DE4-4F5A-9936-D41BC514882D}"/>
+                <a16:creationId xmlns:a16="http://schemas.microsoft.com/office/drawing/2014/main" id="{762F258C-CD4F-44D3-85E2-87334FFFD6B8}"/>
               </a:ext>
             </a:extLst>
           </p:cNvPr>
@@ -9834,7 +8736,7 @@
                 <a:ea typeface="Arial"/>
                 <a:cs typeface="Arial"/>
               </a:rPr>
-              <a:t>8</a:t>
+              <a:t>7</a:t>
             </a:r>
           </a:p>
         </p:txBody>
@@ -9844,7 +8746,7 @@
           <p:cNvPr id="4" name="">
             <a:extLst xmlns:a="http://schemas.openxmlformats.org/drawingml/2006/main">
               <a:ext uri="{FF2B5EF4-FFF2-40B4-BE49-F238E27FC236}">
-                <a16:creationId xmlns:a16="http://schemas.microsoft.com/office/drawing/2014/main" id="{839ED752-2FAE-4885-A5ED-BA7537F36560}"/>
+                <a16:creationId xmlns:a16="http://schemas.microsoft.com/office/drawing/2014/main" id="{D275C36C-BE03-4069-BA14-873A54FC347C}"/>
               </a:ext>
             </a:extLst>
           </p:cNvPr>
@@ -9889,7 +8791,7 @@
           <p:cNvPr id="5" name="">
             <a:extLst xmlns:a="http://schemas.openxmlformats.org/drawingml/2006/main">
               <a:ext uri="{FF2B5EF4-FFF2-40B4-BE49-F238E27FC236}">
-                <a16:creationId xmlns:a16="http://schemas.microsoft.com/office/drawing/2014/main" id="{8FB8FD4C-1F0A-4F61-A3A4-AC47E705C42B}"/>
+                <a16:creationId xmlns:a16="http://schemas.microsoft.com/office/drawing/2014/main" id="{3DFC9158-FDF4-400B-B3DC-0A57964A60A1}"/>
               </a:ext>
             </a:extLst>
           </p:cNvPr>
@@ -9934,7 +8836,7 @@
           <p:cNvPr id="6" name="">
             <a:extLst xmlns:a="http://schemas.openxmlformats.org/drawingml/2006/main">
               <a:ext uri="{FF2B5EF4-FFF2-40B4-BE49-F238E27FC236}">
-                <a16:creationId xmlns:a16="http://schemas.microsoft.com/office/drawing/2014/main" id="{BDEC2475-FD2A-4A2A-880A-2DC3F36F0720}"/>
+                <a16:creationId xmlns:a16="http://schemas.microsoft.com/office/drawing/2014/main" id="{59F6AEF3-0CFC-4618-9644-830E1267C7FA}"/>
               </a:ext>
             </a:extLst>
           </p:cNvPr>
@@ -9979,7 +8881,7 @@
           <p:cNvPr id="7" name="">
             <a:extLst xmlns:a="http://schemas.openxmlformats.org/drawingml/2006/main">
               <a:ext uri="{FF2B5EF4-FFF2-40B4-BE49-F238E27FC236}">
-                <a16:creationId xmlns:a16="http://schemas.microsoft.com/office/drawing/2014/main" id="{EB4507FE-7981-4F57-A6A0-08DA5FEC520E}"/>
+                <a16:creationId xmlns:a16="http://schemas.microsoft.com/office/drawing/2014/main" id="{52CDF492-2069-4A3A-825E-13C1BF3FEEFC}"/>
               </a:ext>
             </a:extLst>
           </p:cNvPr>
@@ -10024,7 +8926,7 @@
           <p:cNvPr id="8" name="">
             <a:extLst xmlns:a="http://schemas.openxmlformats.org/drawingml/2006/main">
               <a:ext uri="{FF2B5EF4-FFF2-40B4-BE49-F238E27FC236}">
-                <a16:creationId xmlns:a16="http://schemas.microsoft.com/office/drawing/2014/main" id="{3030DE88-AA80-44AA-ABC0-A6C7E5B96EE8}"/>
+                <a16:creationId xmlns:a16="http://schemas.microsoft.com/office/drawing/2014/main" id="{4DE6C9AC-9B16-40DF-B1F0-646E85554935}"/>
               </a:ext>
             </a:extLst>
           </p:cNvPr>
@@ -10069,7 +8971,7 @@
           <p:cNvPr id="9" name="">
             <a:extLst xmlns:a="http://schemas.openxmlformats.org/drawingml/2006/main">
               <a:ext uri="{FF2B5EF4-FFF2-40B4-BE49-F238E27FC236}">
-                <a16:creationId xmlns:a16="http://schemas.microsoft.com/office/drawing/2014/main" id="{AC771EC7-3B38-43BA-8BBB-EAD1C0DB1877}"/>
+                <a16:creationId xmlns:a16="http://schemas.microsoft.com/office/drawing/2014/main" id="{C80D1267-E581-47CF-B687-A0CAFA5CC4C9}"/>
               </a:ext>
             </a:extLst>
           </p:cNvPr>
@@ -10114,7 +9016,7 @@
           <p:cNvPr id="10" name="">
             <a:extLst xmlns:a="http://schemas.openxmlformats.org/drawingml/2006/main">
               <a:ext uri="{FF2B5EF4-FFF2-40B4-BE49-F238E27FC236}">
-                <a16:creationId xmlns:a16="http://schemas.microsoft.com/office/drawing/2014/main" id="{2870A9DD-E898-4B76-A813-98BB0C554932}"/>
+                <a16:creationId xmlns:a16="http://schemas.microsoft.com/office/drawing/2014/main" id="{CC0E7798-7DB6-4851-8166-3B519818628E}"/>
               </a:ext>
             </a:extLst>
           </p:cNvPr>
@@ -10159,7 +9061,7 @@
           <p:cNvPr id="11" name="">
             <a:extLst xmlns:a="http://schemas.openxmlformats.org/drawingml/2006/main">
               <a:ext uri="{FF2B5EF4-FFF2-40B4-BE49-F238E27FC236}">
-                <a16:creationId xmlns:a16="http://schemas.microsoft.com/office/drawing/2014/main" id="{7F2E25F4-C0D7-4EAA-B73F-0CA3FFFE0C52}"/>
+                <a16:creationId xmlns:a16="http://schemas.microsoft.com/office/drawing/2014/main" id="{FBE63E59-E48B-4956-ABA1-6EB52E07A454}"/>
               </a:ext>
             </a:extLst>
           </p:cNvPr>
@@ -10204,7 +9106,7 @@
           <p:cNvPr id="12" name="">
             <a:extLst xmlns:a="http://schemas.openxmlformats.org/drawingml/2006/main">
               <a:ext uri="{FF2B5EF4-FFF2-40B4-BE49-F238E27FC236}">
-                <a16:creationId xmlns:a16="http://schemas.microsoft.com/office/drawing/2014/main" id="{414F6A07-370B-4EB0-938B-38372927B35D}"/>
+                <a16:creationId xmlns:a16="http://schemas.microsoft.com/office/drawing/2014/main" id="{69048389-D926-49A7-94BD-A69FEDFC5712}"/>
               </a:ext>
             </a:extLst>
           </p:cNvPr>
@@ -10249,7 +9151,7 @@
           <p:cNvPr id="13" name="">
             <a:extLst xmlns:a="http://schemas.openxmlformats.org/drawingml/2006/main">
               <a:ext uri="{FF2B5EF4-FFF2-40B4-BE49-F238E27FC236}">
-                <a16:creationId xmlns:a16="http://schemas.microsoft.com/office/drawing/2014/main" id="{1BB1564C-B0BD-44F9-BEAA-30E6DF719FA0}"/>
+                <a16:creationId xmlns:a16="http://schemas.microsoft.com/office/drawing/2014/main" id="{D866EAEF-0C2A-40EC-BE87-7977C55B1FE0}"/>
               </a:ext>
             </a:extLst>
           </p:cNvPr>
@@ -10292,7 +9194,7 @@
     </p:spTree>
     <p:extLst>
       <p:ext uri="{BB962C8B-B14F-4D97-AF65-F5344CB8AC3E}">
-        <p14:creationId xmlns:p14="http://schemas.microsoft.com/office/powerpoint/2010/main" val="844597229"/>
+        <p14:creationId xmlns:p14="http://schemas.microsoft.com/office/powerpoint/2010/main" val="1860536445"/>
       </p:ext>
     </p:extLst>
   </p:cSld>

--- a/presentations/weekly_20261029/weekly_20261029_english_final.pptx
+++ b/presentations/weekly_20261029/weekly_20261029_english_final.pptx
@@ -2,19 +2,19 @@
 <file path=ppt/presentation.xml><?xml version="1.0" encoding="utf-8"?>
 <p:presentation xmlns:p="http://schemas.openxmlformats.org/presentationml/2006/main">
   <p:sldMasterIdLst>
-    <p:sldMasterId xmlns:r="http://schemas.openxmlformats.org/officeDocument/2006/relationships" id="2147483648" r:id="R179de33e494740a5"/>
+    <p:sldMasterId xmlns:r="http://schemas.openxmlformats.org/officeDocument/2006/relationships" id="2147483648" r:id="Rdfa590dddc3543e5"/>
   </p:sldMasterIdLst>
   <p:notesMasterIdLst>
-    <p:notesMasterId xmlns:r="http://schemas.openxmlformats.org/officeDocument/2006/relationships" r:id="R0de4b637a0494807"/>
+    <p:notesMasterId xmlns:r="http://schemas.openxmlformats.org/officeDocument/2006/relationships" r:id="Rb143149f0eee46ec"/>
   </p:notesMasterIdLst>
   <p:sldIdLst>
-    <p:sldId xmlns:r="http://schemas.openxmlformats.org/officeDocument/2006/relationships" id="256" r:id="Rdca792a4d3d74194"/>
-    <p:sldId xmlns:r="http://schemas.openxmlformats.org/officeDocument/2006/relationships" id="257" r:id="R6c7ae1ac5d6445e7"/>
-    <p:sldId xmlns:r="http://schemas.openxmlformats.org/officeDocument/2006/relationships" id="258" r:id="R94c45fc12e234211"/>
-    <p:sldId xmlns:r="http://schemas.openxmlformats.org/officeDocument/2006/relationships" id="259" r:id="Re64d9e9c336b470c"/>
-    <p:sldId xmlns:r="http://schemas.openxmlformats.org/officeDocument/2006/relationships" id="260" r:id="R6921852ecdc54e61"/>
-    <p:sldId xmlns:r="http://schemas.openxmlformats.org/officeDocument/2006/relationships" id="261" r:id="Rb1bd142a39464acd"/>
-    <p:sldId xmlns:r="http://schemas.openxmlformats.org/officeDocument/2006/relationships" id="262" r:id="Rb2d53381a81a4f98"/>
+    <p:sldId xmlns:r="http://schemas.openxmlformats.org/officeDocument/2006/relationships" id="256" r:id="Reddbe7665d5843a2"/>
+    <p:sldId xmlns:r="http://schemas.openxmlformats.org/officeDocument/2006/relationships" id="257" r:id="Rcd35bc86e509448d"/>
+    <p:sldId xmlns:r="http://schemas.openxmlformats.org/officeDocument/2006/relationships" id="258" r:id="Rb06a29f4d6704829"/>
+    <p:sldId xmlns:r="http://schemas.openxmlformats.org/officeDocument/2006/relationships" id="259" r:id="R8a4e8d52555d4578"/>
+    <p:sldId xmlns:r="http://schemas.openxmlformats.org/officeDocument/2006/relationships" id="260" r:id="R252f7c1b18b24f23"/>
+    <p:sldId xmlns:r="http://schemas.openxmlformats.org/officeDocument/2006/relationships" id="261" r:id="R2cf0c1cf2cd74d70"/>
+    <p:sldId xmlns:r="http://schemas.openxmlformats.org/officeDocument/2006/relationships" id="262" r:id="Rcf73cdef08b142a3"/>
   </p:sldIdLst>
   <p:sldSz cx="12192000" cy="6858000"/>
   <p:notesSz cx="6858000" cy="9144000"/>
@@ -658,7 +658,7 @@
           <a:lstStyle xmlns:a="http://schemas.openxmlformats.org/drawingml/2006/main"/>
           <a:p xmlns:a="http://schemas.openxmlformats.org/drawingml/2006/main">
             <a:r>
-              <a:t>Source: results/fov_levels_xavier_full_20261027/README.md; overview.csv; summary.csv. Commit 0f1506c. Date 2026-10-27. Raw evidence: evidence.tar.gz. Mechanism: half-resolution base + padded full-resolution ROI + feather overlay. Region percentages are spatial coverage of a 960x540 image: 80x46=0.7098765%, 160x90=2.7777778%, 320x180=11.1111111%, 480x270=25%, 640x360=44.4444444%. The base samples at 50% width and 50% height, giving 25% as many pixels (480x270), while covering the entire image. Region coverage and sampling resolution are different quantities.</a:t>
+              <a:t>Source: results/fov_levels_xavier_full_20261027/README.md; overview.csv; summary.csv. Commit 0f1506c. Date 2026-10-27. Raw evidence: evidence.tar.gz. Mechanism: half-resolution base + padded full-resolution ROI + feather overlay. The full output is 960x540 (1.0x). Region scale is ROI width divided by full-image width: 80x46 =&gt; 0.083333x, 160x90 =&gt; 0.166667x, 320x180 =&gt; 0.333333x, 480x270 =&gt; 0.5x, 640x360 =&gt; 0.666667x. Height approximately follows the same scale; the smallest ROI uses height46 for even alignment, instead of45. ROI extent scale is not sampling resolution: pixels within the ROI remain full-resolution. The base samples at 0.5x width and 0.5x height (480x270) while covering the entire image.</a:t>
             </a:r>
           </a:p>
         </p:txBody>
@@ -915,7 +915,7 @@
           <p:cNvPr id="3" name="Title">
             <a:extLst xmlns:a="http://schemas.openxmlformats.org/drawingml/2006/main">
               <a:ext uri="{FF2B5EF4-FFF2-40B4-BE49-F238E27FC236}">
-                <a16:creationId xmlns:a16="http://schemas.microsoft.com/office/drawing/2014/main" id="{2B873602-1825-4C9F-89B4-348F67A143DD}"/>
+                <a16:creationId xmlns:a16="http://schemas.microsoft.com/office/drawing/2014/main" id="{DF09009B-1A47-4272-A1AF-D68F93D8D408}"/>
               </a:ext>
             </a:extLst>
           </p:cNvPr>
@@ -1144,7 +1144,7 @@
           <p:cNvPr id="2" name="Subtitle">
             <a:extLst xmlns:a="http://schemas.openxmlformats.org/drawingml/2006/main">
               <a:ext uri="{FF2B5EF4-FFF2-40B4-BE49-F238E27FC236}">
-                <a16:creationId xmlns:a16="http://schemas.microsoft.com/office/drawing/2014/main" id="{FDB43B04-B2BF-4150-86BA-AD2F926508E1}"/>
+                <a16:creationId xmlns:a16="http://schemas.microsoft.com/office/drawing/2014/main" id="{7651BADE-C19C-4607-825A-F3D5CEF0D18A}"/>
               </a:ext>
             </a:extLst>
           </p:cNvPr>
@@ -1390,7 +1390,7 @@
           <p:cNvPr id="2" name="Section title">
             <a:extLst xmlns:a="http://schemas.openxmlformats.org/drawingml/2006/main">
               <a:ext uri="{FF2B5EF4-FFF2-40B4-BE49-F238E27FC236}">
-                <a16:creationId xmlns:a16="http://schemas.microsoft.com/office/drawing/2014/main" id="{07304056-3C4A-42F0-9154-D26D831FA37F}"/>
+                <a16:creationId xmlns:a16="http://schemas.microsoft.com/office/drawing/2014/main" id="{74BD0149-78AC-4464-AF1D-C8930323768C}"/>
               </a:ext>
             </a:extLst>
           </p:cNvPr>
@@ -1636,7 +1636,7 @@
           <p:cNvPr id="3" name="Title">
             <a:extLst xmlns:a="http://schemas.openxmlformats.org/drawingml/2006/main">
               <a:ext uri="{FF2B5EF4-FFF2-40B4-BE49-F238E27FC236}">
-                <a16:creationId xmlns:a16="http://schemas.microsoft.com/office/drawing/2014/main" id="{746F2F85-032D-418F-8FF6-CB247A4A3586}"/>
+                <a16:creationId xmlns:a16="http://schemas.microsoft.com/office/drawing/2014/main" id="{F92AA6D3-9972-4C18-AF53-12E189C62EFD}"/>
               </a:ext>
             </a:extLst>
           </p:cNvPr>
@@ -1865,7 +1865,7 @@
           <p:cNvPr id="2" name="Body">
             <a:extLst xmlns:a="http://schemas.openxmlformats.org/drawingml/2006/main">
               <a:ext uri="{FF2B5EF4-FFF2-40B4-BE49-F238E27FC236}">
-                <a16:creationId xmlns:a16="http://schemas.microsoft.com/office/drawing/2014/main" id="{575C660E-DC4A-4D2D-9454-10B999B867D4}"/>
+                <a16:creationId xmlns:a16="http://schemas.microsoft.com/office/drawing/2014/main" id="{DAA1C96D-AD45-466C-8D64-86FA687108C9}"/>
               </a:ext>
             </a:extLst>
           </p:cNvPr>
@@ -2111,7 +2111,7 @@
           <p:cNvPr id="4" name="Title">
             <a:extLst xmlns:a="http://schemas.openxmlformats.org/drawingml/2006/main">
               <a:ext uri="{FF2B5EF4-FFF2-40B4-BE49-F238E27FC236}">
-                <a16:creationId xmlns:a16="http://schemas.microsoft.com/office/drawing/2014/main" id="{4CDC0EFB-33C8-4675-824E-5713C8E462E5}"/>
+                <a16:creationId xmlns:a16="http://schemas.microsoft.com/office/drawing/2014/main" id="{66EA457B-E80C-4F55-B0A0-EE9E4DBB12CE}"/>
               </a:ext>
             </a:extLst>
           </p:cNvPr>
@@ -2340,7 +2340,7 @@
           <p:cNvPr id="2" name="Left column">
             <a:extLst xmlns:a="http://schemas.openxmlformats.org/drawingml/2006/main">
               <a:ext uri="{FF2B5EF4-FFF2-40B4-BE49-F238E27FC236}">
-                <a16:creationId xmlns:a16="http://schemas.microsoft.com/office/drawing/2014/main" id="{ABDEF5BD-D96D-4E3C-9041-36AC92BAB0C4}"/>
+                <a16:creationId xmlns:a16="http://schemas.microsoft.com/office/drawing/2014/main" id="{BAD570F6-20C3-4265-9E50-E123F543FEE7}"/>
               </a:ext>
             </a:extLst>
           </p:cNvPr>
@@ -2569,7 +2569,7 @@
           <p:cNvPr id="3" name="Right column">
             <a:extLst xmlns:a="http://schemas.openxmlformats.org/drawingml/2006/main">
               <a:ext uri="{FF2B5EF4-FFF2-40B4-BE49-F238E27FC236}">
-                <a16:creationId xmlns:a16="http://schemas.microsoft.com/office/drawing/2014/main" id="{42695DE9-0F6C-42AB-B76C-CA2651021B19}"/>
+                <a16:creationId xmlns:a16="http://schemas.microsoft.com/office/drawing/2014/main" id="{B33ADD3E-A083-4557-B64C-334442F7BEF8}"/>
               </a:ext>
             </a:extLst>
           </p:cNvPr>
@@ -2815,7 +2815,7 @@
           <p:cNvPr id="3" name="Title">
             <a:extLst xmlns:a="http://schemas.openxmlformats.org/drawingml/2006/main">
               <a:ext uri="{FF2B5EF4-FFF2-40B4-BE49-F238E27FC236}">
-                <a16:creationId xmlns:a16="http://schemas.microsoft.com/office/drawing/2014/main" id="{A0EB5180-5B59-4F37-BE8F-B87E585B6CC4}"/>
+                <a16:creationId xmlns:a16="http://schemas.microsoft.com/office/drawing/2014/main" id="{FCF3CE29-133F-465D-835B-AD89879F852D}"/>
               </a:ext>
             </a:extLst>
           </p:cNvPr>
@@ -3044,7 +3044,7 @@
           <p:cNvPr id="2" name="Left column">
             <a:extLst xmlns:a="http://schemas.openxmlformats.org/drawingml/2006/main">
               <a:ext uri="{FF2B5EF4-FFF2-40B4-BE49-F238E27FC236}">
-                <a16:creationId xmlns:a16="http://schemas.microsoft.com/office/drawing/2014/main" id="{FD8E5EC7-2F77-4ED2-BDFE-FDBDF54FADA9}"/>
+                <a16:creationId xmlns:a16="http://schemas.microsoft.com/office/drawing/2014/main" id="{427D6870-A1F9-4897-81D5-344E699834EB}"/>
               </a:ext>
             </a:extLst>
           </p:cNvPr>
@@ -3311,12 +3311,12 @@
   </p:cSld>
   <p:clrMap bg1="lt1" tx1="dk1" bg2="lt2" tx2="dk2" accent1="accent1" accent2="accent2" accent3="accent3" accent4="accent4" accent5="accent5" accent6="accent6" hlink="hlink" folHlink="folHlink"/>
   <p:sldLayoutIdLst>
-    <p:sldLayoutId xmlns:r="http://schemas.openxmlformats.org/officeDocument/2006/relationships" id="2147483649" r:id="R72a625dab0af494a"/>
-    <p:sldLayoutId xmlns:r="http://schemas.openxmlformats.org/officeDocument/2006/relationships" id="2147483650" r:id="Rd82813bafa7d4ac4"/>
-    <p:sldLayoutId xmlns:r="http://schemas.openxmlformats.org/officeDocument/2006/relationships" id="2147483651" r:id="R3ce94574400545e7"/>
-    <p:sldLayoutId xmlns:r="http://schemas.openxmlformats.org/officeDocument/2006/relationships" id="2147483652" r:id="Rebca27cfd7ae4322"/>
-    <p:sldLayoutId xmlns:r="http://schemas.openxmlformats.org/officeDocument/2006/relationships" id="2147483653" r:id="R61bdae2f7e984c52"/>
-    <p:sldLayoutId xmlns:r="http://schemas.openxmlformats.org/officeDocument/2006/relationships" id="2147483654" r:id="R95aab2068dac4af1"/>
+    <p:sldLayoutId xmlns:r="http://schemas.openxmlformats.org/officeDocument/2006/relationships" id="2147483649" r:id="R56a1220e3f764421"/>
+    <p:sldLayoutId xmlns:r="http://schemas.openxmlformats.org/officeDocument/2006/relationships" id="2147483650" r:id="Rdb37c5a3c1f14175"/>
+    <p:sldLayoutId xmlns:r="http://schemas.openxmlformats.org/officeDocument/2006/relationships" id="2147483651" r:id="R0d71e67c7e2a4467"/>
+    <p:sldLayoutId xmlns:r="http://schemas.openxmlformats.org/officeDocument/2006/relationships" id="2147483652" r:id="Recb73b78be3d49e5"/>
+    <p:sldLayoutId xmlns:r="http://schemas.openxmlformats.org/officeDocument/2006/relationships" id="2147483653" r:id="Rdfa5bbec01004df8"/>
+    <p:sldLayoutId xmlns:r="http://schemas.openxmlformats.org/officeDocument/2006/relationships" id="2147483654" r:id="Rcd4490f23ec3440f"/>
   </p:sldLayoutIdLst>
   <p:txStyles>
     <p:titleStyle>
@@ -4188,7 +4188,7 @@
           <p:cNvPr id="5" name="">
             <a:extLst xmlns:a="http://schemas.openxmlformats.org/drawingml/2006/main">
               <a:ext uri="{FF2B5EF4-FFF2-40B4-BE49-F238E27FC236}">
-                <a16:creationId xmlns:a16="http://schemas.microsoft.com/office/drawing/2014/main" id="{7B329841-71F3-45D8-A5A2-5BFED7BE92E1}"/>
+                <a16:creationId xmlns:a16="http://schemas.microsoft.com/office/drawing/2014/main" id="{8839185C-01FE-48E9-8E68-11D433472E8F}"/>
               </a:ext>
             </a:extLst>
           </p:cNvPr>
@@ -4246,7 +4246,7 @@
           <p:cNvPr id="2" name="">
             <a:extLst xmlns:a="http://schemas.openxmlformats.org/drawingml/2006/main">
               <a:ext uri="{FF2B5EF4-FFF2-40B4-BE49-F238E27FC236}">
-                <a16:creationId xmlns:a16="http://schemas.microsoft.com/office/drawing/2014/main" id="{6EF72B89-AD12-43CF-A3D2-857E6E49EB85}"/>
+                <a16:creationId xmlns:a16="http://schemas.microsoft.com/office/drawing/2014/main" id="{BBCC9B25-B5F1-49D7-A870-7DE736A735F6}"/>
               </a:ext>
             </a:extLst>
           </p:cNvPr>
@@ -4291,7 +4291,7 @@
           <p:cNvPr id="3" name="">
             <a:extLst xmlns:a="http://schemas.openxmlformats.org/drawingml/2006/main">
               <a:ext uri="{FF2B5EF4-FFF2-40B4-BE49-F238E27FC236}">
-                <a16:creationId xmlns:a16="http://schemas.microsoft.com/office/drawing/2014/main" id="{BF2443F8-A1D6-4F14-B9ED-291E65E4D580}"/>
+                <a16:creationId xmlns:a16="http://schemas.microsoft.com/office/drawing/2014/main" id="{DD3926AD-B103-49A7-84B2-3971E0728361}"/>
               </a:ext>
             </a:extLst>
           </p:cNvPr>
@@ -4336,7 +4336,7 @@
           <p:cNvPr id="4" name="">
             <a:extLst xmlns:a="http://schemas.openxmlformats.org/drawingml/2006/main">
               <a:ext uri="{FF2B5EF4-FFF2-40B4-BE49-F238E27FC236}">
-                <a16:creationId xmlns:a16="http://schemas.microsoft.com/office/drawing/2014/main" id="{3144CD67-3E22-4238-BC7D-D7E1D8EFD421}"/>
+                <a16:creationId xmlns:a16="http://schemas.microsoft.com/office/drawing/2014/main" id="{4BB6D7B6-E683-4CB7-8FF8-40832E568E3D}"/>
               </a:ext>
             </a:extLst>
           </p:cNvPr>
@@ -4379,7 +4379,7 @@
     </p:spTree>
     <p:extLst>
       <p:ext uri="{BB962C8B-B14F-4D97-AF65-F5344CB8AC3E}">
-        <p14:creationId xmlns:p14="http://schemas.microsoft.com/office/powerpoint/2010/main" val="498036716"/>
+        <p14:creationId xmlns:p14="http://schemas.microsoft.com/office/powerpoint/2010/main" val="1845059078"/>
       </p:ext>
     </p:extLst>
   </p:cSld>
@@ -4410,7 +4410,7 @@
           <p:cNvPr id="29" name="">
             <a:extLst xmlns:a="http://schemas.openxmlformats.org/drawingml/2006/main">
               <a:ext uri="{FF2B5EF4-FFF2-40B4-BE49-F238E27FC236}">
-                <a16:creationId xmlns:a16="http://schemas.microsoft.com/office/drawing/2014/main" id="{A3374315-5E62-4846-91D2-373249F6BD27}"/>
+                <a16:creationId xmlns:a16="http://schemas.microsoft.com/office/drawing/2014/main" id="{40889156-0D14-4233-A9F7-DD2D38BC91D0}"/>
               </a:ext>
             </a:extLst>
           </p:cNvPr>
@@ -4455,7 +4455,7 @@
           <p:cNvPr id="2" name="">
             <a:extLst xmlns:a="http://schemas.openxmlformats.org/drawingml/2006/main">
               <a:ext uri="{FF2B5EF4-FFF2-40B4-BE49-F238E27FC236}">
-                <a16:creationId xmlns:a16="http://schemas.microsoft.com/office/drawing/2014/main" id="{335B14F7-50B1-4C94-9233-B0626B51A5B7}"/>
+                <a16:creationId xmlns:a16="http://schemas.microsoft.com/office/drawing/2014/main" id="{7AFBA3E8-37EC-40F9-96B5-41503E79D16C}"/>
               </a:ext>
             </a:extLst>
           </p:cNvPr>
@@ -4485,7 +4485,7 @@
           <p:cNvPr id="3" name="">
             <a:extLst xmlns:a="http://schemas.openxmlformats.org/drawingml/2006/main">
               <a:ext uri="{FF2B5EF4-FFF2-40B4-BE49-F238E27FC236}">
-                <a16:creationId xmlns:a16="http://schemas.microsoft.com/office/drawing/2014/main" id="{B197A882-C7C7-4194-8B62-BC075CC1E85D}"/>
+                <a16:creationId xmlns:a16="http://schemas.microsoft.com/office/drawing/2014/main" id="{0D9D112C-CD28-4A5E-A1D4-485B66C00625}"/>
               </a:ext>
             </a:extLst>
           </p:cNvPr>
@@ -4530,7 +4530,7 @@
           <p:cNvPr id="4" name="">
             <a:extLst xmlns:a="http://schemas.openxmlformats.org/drawingml/2006/main">
               <a:ext uri="{FF2B5EF4-FFF2-40B4-BE49-F238E27FC236}">
-                <a16:creationId xmlns:a16="http://schemas.microsoft.com/office/drawing/2014/main" id="{11A207DC-3B7D-48E8-89B6-C83C24F34AA0}"/>
+                <a16:creationId xmlns:a16="http://schemas.microsoft.com/office/drawing/2014/main" id="{C4C3B468-A151-46B7-999B-708ED9381852}"/>
               </a:ext>
             </a:extLst>
           </p:cNvPr>
@@ -4575,7 +4575,7 @@
           <p:cNvPr id="5" name="">
             <a:extLst xmlns:a="http://schemas.openxmlformats.org/drawingml/2006/main">
               <a:ext uri="{FF2B5EF4-FFF2-40B4-BE49-F238E27FC236}">
-                <a16:creationId xmlns:a16="http://schemas.microsoft.com/office/drawing/2014/main" id="{A2C23E07-BB3D-4466-9E98-446A3BB83CFF}"/>
+                <a16:creationId xmlns:a16="http://schemas.microsoft.com/office/drawing/2014/main" id="{D2E6AB31-0113-418D-A4C0-0200BD8A2383}"/>
               </a:ext>
             </a:extLst>
           </p:cNvPr>
@@ -4620,7 +4620,7 @@
           <p:cNvPr id="6" name="">
             <a:extLst xmlns:a="http://schemas.openxmlformats.org/drawingml/2006/main">
               <a:ext uri="{FF2B5EF4-FFF2-40B4-BE49-F238E27FC236}">
-                <a16:creationId xmlns:a16="http://schemas.microsoft.com/office/drawing/2014/main" id="{28E01DD5-19A3-4F94-9DF1-5A66BC8D1A8E}"/>
+                <a16:creationId xmlns:a16="http://schemas.microsoft.com/office/drawing/2014/main" id="{063279DA-3A5F-44C0-9820-B1F3CA01C409}"/>
               </a:ext>
             </a:extLst>
           </p:cNvPr>
@@ -4652,7 +4652,7 @@
           <p:cNvPr id="7" name="">
             <a:extLst xmlns:a="http://schemas.openxmlformats.org/drawingml/2006/main">
               <a:ext uri="{FF2B5EF4-FFF2-40B4-BE49-F238E27FC236}">
-                <a16:creationId xmlns:a16="http://schemas.microsoft.com/office/drawing/2014/main" id="{8FCCEB64-880B-4EAC-B06B-82E405170BF4}"/>
+                <a16:creationId xmlns:a16="http://schemas.microsoft.com/office/drawing/2014/main" id="{342DD79D-C86F-4565-B208-60DB8B234A22}"/>
               </a:ext>
             </a:extLst>
           </p:cNvPr>
@@ -4684,7 +4684,7 @@
           <p:cNvPr id="8" name="">
             <a:extLst xmlns:a="http://schemas.openxmlformats.org/drawingml/2006/main">
               <a:ext uri="{FF2B5EF4-FFF2-40B4-BE49-F238E27FC236}">
-                <a16:creationId xmlns:a16="http://schemas.microsoft.com/office/drawing/2014/main" id="{8785A3DB-6F13-458E-B129-B864948F3EA4}"/>
+                <a16:creationId xmlns:a16="http://schemas.microsoft.com/office/drawing/2014/main" id="{85F02417-D056-4586-BE2B-59F2B6817E75}"/>
               </a:ext>
             </a:extLst>
           </p:cNvPr>
@@ -4716,7 +4716,7 @@
           <p:cNvPr id="9" name="">
             <a:extLst xmlns:a="http://schemas.openxmlformats.org/drawingml/2006/main">
               <a:ext uri="{FF2B5EF4-FFF2-40B4-BE49-F238E27FC236}">
-                <a16:creationId xmlns:a16="http://schemas.microsoft.com/office/drawing/2014/main" id="{EA1AAAAE-B75D-44EB-B6A5-353C240C3ED9}"/>
+                <a16:creationId xmlns:a16="http://schemas.microsoft.com/office/drawing/2014/main" id="{D3CF5134-F031-496E-B91C-2CCB310E687F}"/>
               </a:ext>
             </a:extLst>
           </p:cNvPr>
@@ -4761,7 +4761,7 @@
           <p:cNvPr id="10" name="">
             <a:extLst xmlns:a="http://schemas.openxmlformats.org/drawingml/2006/main">
               <a:ext uri="{FF2B5EF4-FFF2-40B4-BE49-F238E27FC236}">
-                <a16:creationId xmlns:a16="http://schemas.microsoft.com/office/drawing/2014/main" id="{B88A9E18-6631-4B7C-B186-47EC6A6D5C2F}"/>
+                <a16:creationId xmlns:a16="http://schemas.microsoft.com/office/drawing/2014/main" id="{E144674D-F33D-4B17-9C2D-D1DC5A794903}"/>
               </a:ext>
             </a:extLst>
           </p:cNvPr>
@@ -4791,7 +4791,7 @@
           <p:cNvPr id="11" name="">
             <a:extLst xmlns:a="http://schemas.openxmlformats.org/drawingml/2006/main">
               <a:ext uri="{FF2B5EF4-FFF2-40B4-BE49-F238E27FC236}">
-                <a16:creationId xmlns:a16="http://schemas.microsoft.com/office/drawing/2014/main" id="{C3281893-1F6F-491C-B0E1-910C5EF5686D}"/>
+                <a16:creationId xmlns:a16="http://schemas.microsoft.com/office/drawing/2014/main" id="{5B1812AF-268D-4C19-A6C9-A77F1B1F669E}"/>
               </a:ext>
             </a:extLst>
           </p:cNvPr>
@@ -4836,7 +4836,7 @@
           <p:cNvPr id="12" name="">
             <a:extLst xmlns:a="http://schemas.openxmlformats.org/drawingml/2006/main">
               <a:ext uri="{FF2B5EF4-FFF2-40B4-BE49-F238E27FC236}">
-                <a16:creationId xmlns:a16="http://schemas.microsoft.com/office/drawing/2014/main" id="{112DE810-0C11-4813-A48F-AFA37215893B}"/>
+                <a16:creationId xmlns:a16="http://schemas.microsoft.com/office/drawing/2014/main" id="{5150D6F9-C8EB-44A6-A6DD-51EA68FBE4CB}"/>
               </a:ext>
             </a:extLst>
           </p:cNvPr>
@@ -4868,7 +4868,7 @@
           <p:cNvPr id="13" name="">
             <a:extLst xmlns:a="http://schemas.openxmlformats.org/drawingml/2006/main">
               <a:ext uri="{FF2B5EF4-FFF2-40B4-BE49-F238E27FC236}">
-                <a16:creationId xmlns:a16="http://schemas.microsoft.com/office/drawing/2014/main" id="{337180D7-7780-4E81-84DB-375B3A3065A3}"/>
+                <a16:creationId xmlns:a16="http://schemas.microsoft.com/office/drawing/2014/main" id="{30449A39-7FDB-4443-A6E0-59FD68A8DA1F}"/>
               </a:ext>
             </a:extLst>
           </p:cNvPr>
@@ -4900,7 +4900,7 @@
           <p:cNvPr id="14" name="">
             <a:extLst xmlns:a="http://schemas.openxmlformats.org/drawingml/2006/main">
               <a:ext uri="{FF2B5EF4-FFF2-40B4-BE49-F238E27FC236}">
-                <a16:creationId xmlns:a16="http://schemas.microsoft.com/office/drawing/2014/main" id="{89EBDC18-0475-4C64-A4D1-F3A8F9994A94}"/>
+                <a16:creationId xmlns:a16="http://schemas.microsoft.com/office/drawing/2014/main" id="{44478E5B-4CF3-4388-B4C3-8467765F43AF}"/>
               </a:ext>
             </a:extLst>
           </p:cNvPr>
@@ -4932,7 +4932,7 @@
           <p:cNvPr id="15" name="">
             <a:extLst xmlns:a="http://schemas.openxmlformats.org/drawingml/2006/main">
               <a:ext uri="{FF2B5EF4-FFF2-40B4-BE49-F238E27FC236}">
-                <a16:creationId xmlns:a16="http://schemas.microsoft.com/office/drawing/2014/main" id="{874A7636-527B-4300-B2F4-0BC2FD27A381}"/>
+                <a16:creationId xmlns:a16="http://schemas.microsoft.com/office/drawing/2014/main" id="{E759F7FA-B562-4D0C-9458-7912B2CB4A11}"/>
               </a:ext>
             </a:extLst>
           </p:cNvPr>
@@ -4977,7 +4977,7 @@
           <p:cNvPr id="16" name="">
             <a:extLst xmlns:a="http://schemas.openxmlformats.org/drawingml/2006/main">
               <a:ext uri="{FF2B5EF4-FFF2-40B4-BE49-F238E27FC236}">
-                <a16:creationId xmlns:a16="http://schemas.microsoft.com/office/drawing/2014/main" id="{2D3F4508-6E20-404D-8B4E-DCD0A5840A14}"/>
+                <a16:creationId xmlns:a16="http://schemas.microsoft.com/office/drawing/2014/main" id="{7BBFB918-8402-4C93-B258-E3158B51EC69}"/>
               </a:ext>
             </a:extLst>
           </p:cNvPr>
@@ -5007,7 +5007,7 @@
           <p:cNvPr id="17" name="">
             <a:extLst xmlns:a="http://schemas.openxmlformats.org/drawingml/2006/main">
               <a:ext uri="{FF2B5EF4-FFF2-40B4-BE49-F238E27FC236}">
-                <a16:creationId xmlns:a16="http://schemas.microsoft.com/office/drawing/2014/main" id="{51C216B4-5F4B-4ECE-9B98-BE8B4814E2EE}"/>
+                <a16:creationId xmlns:a16="http://schemas.microsoft.com/office/drawing/2014/main" id="{D71FD7E6-A4D8-4AEB-88B6-AE1F3F6F82DA}"/>
               </a:ext>
             </a:extLst>
           </p:cNvPr>
@@ -5052,7 +5052,7 @@
           <p:cNvPr id="18" name="">
             <a:extLst xmlns:a="http://schemas.openxmlformats.org/drawingml/2006/main">
               <a:ext uri="{FF2B5EF4-FFF2-40B4-BE49-F238E27FC236}">
-                <a16:creationId xmlns:a16="http://schemas.microsoft.com/office/drawing/2014/main" id="{F617FD9F-8FD9-4F94-9FB0-96DC55904C8C}"/>
+                <a16:creationId xmlns:a16="http://schemas.microsoft.com/office/drawing/2014/main" id="{67790418-9369-4D10-8321-415940EB71A0}"/>
               </a:ext>
             </a:extLst>
           </p:cNvPr>
@@ -5084,7 +5084,7 @@
           <p:cNvPr id="19" name="">
             <a:extLst xmlns:a="http://schemas.openxmlformats.org/drawingml/2006/main">
               <a:ext uri="{FF2B5EF4-FFF2-40B4-BE49-F238E27FC236}">
-                <a16:creationId xmlns:a16="http://schemas.microsoft.com/office/drawing/2014/main" id="{A64B526B-600B-401F-A256-9118E187A69D}"/>
+                <a16:creationId xmlns:a16="http://schemas.microsoft.com/office/drawing/2014/main" id="{B5B3ACBC-3BC9-450F-8B81-52DD49042863}"/>
               </a:ext>
             </a:extLst>
           </p:cNvPr>
@@ -5116,7 +5116,7 @@
           <p:cNvPr id="20" name="">
             <a:extLst xmlns:a="http://schemas.openxmlformats.org/drawingml/2006/main">
               <a:ext uri="{FF2B5EF4-FFF2-40B4-BE49-F238E27FC236}">
-                <a16:creationId xmlns:a16="http://schemas.microsoft.com/office/drawing/2014/main" id="{DD9E5178-FAA3-4886-9570-989CD76FB969}"/>
+                <a16:creationId xmlns:a16="http://schemas.microsoft.com/office/drawing/2014/main" id="{9973351F-262A-4398-8909-31892CCA2E85}"/>
               </a:ext>
             </a:extLst>
           </p:cNvPr>
@@ -5148,7 +5148,7 @@
           <p:cNvPr id="21" name="">
             <a:extLst xmlns:a="http://schemas.openxmlformats.org/drawingml/2006/main">
               <a:ext uri="{FF2B5EF4-FFF2-40B4-BE49-F238E27FC236}">
-                <a16:creationId xmlns:a16="http://schemas.microsoft.com/office/drawing/2014/main" id="{6B6006C2-B8F4-411C-8564-6FAD320329FA}"/>
+                <a16:creationId xmlns:a16="http://schemas.microsoft.com/office/drawing/2014/main" id="{2266F7D3-B078-444D-BA1C-0C9B19A04BAD}"/>
               </a:ext>
             </a:extLst>
           </p:cNvPr>
@@ -5193,7 +5193,7 @@
           <p:cNvPr id="22" name="">
             <a:extLst xmlns:a="http://schemas.openxmlformats.org/drawingml/2006/main">
               <a:ext uri="{FF2B5EF4-FFF2-40B4-BE49-F238E27FC236}">
-                <a16:creationId xmlns:a16="http://schemas.microsoft.com/office/drawing/2014/main" id="{1876054E-77DF-4268-AC39-A83F0EAA506A}"/>
+                <a16:creationId xmlns:a16="http://schemas.microsoft.com/office/drawing/2014/main" id="{D05B0D14-396F-4EA8-AEF2-F6E3986C7836}"/>
               </a:ext>
             </a:extLst>
           </p:cNvPr>
@@ -5223,7 +5223,7 @@
           <p:cNvPr id="23" name="">
             <a:extLst xmlns:a="http://schemas.openxmlformats.org/drawingml/2006/main">
               <a:ext uri="{FF2B5EF4-FFF2-40B4-BE49-F238E27FC236}">
-                <a16:creationId xmlns:a16="http://schemas.microsoft.com/office/drawing/2014/main" id="{B6DC4478-DF8D-494F-A7EF-C248D10401CE}"/>
+                <a16:creationId xmlns:a16="http://schemas.microsoft.com/office/drawing/2014/main" id="{4D389395-F859-43DE-9FA6-1C5AA1B008A3}"/>
               </a:ext>
             </a:extLst>
           </p:cNvPr>
@@ -5253,7 +5253,7 @@
           <p:cNvPr id="24" name="">
             <a:extLst xmlns:a="http://schemas.openxmlformats.org/drawingml/2006/main">
               <a:ext uri="{FF2B5EF4-FFF2-40B4-BE49-F238E27FC236}">
-                <a16:creationId xmlns:a16="http://schemas.microsoft.com/office/drawing/2014/main" id="{335CBA70-DD47-4D17-B41B-7BC78208F659}"/>
+                <a16:creationId xmlns:a16="http://schemas.microsoft.com/office/drawing/2014/main" id="{EA5CD671-9298-47D5-AB30-EA232745E808}"/>
               </a:ext>
             </a:extLst>
           </p:cNvPr>
@@ -5298,7 +5298,7 @@
           <p:cNvPr id="25" name="">
             <a:extLst xmlns:a="http://schemas.openxmlformats.org/drawingml/2006/main">
               <a:ext uri="{FF2B5EF4-FFF2-40B4-BE49-F238E27FC236}">
-                <a16:creationId xmlns:a16="http://schemas.microsoft.com/office/drawing/2014/main" id="{A3291467-25B4-4F59-99D4-DE69D47ABA0C}"/>
+                <a16:creationId xmlns:a16="http://schemas.microsoft.com/office/drawing/2014/main" id="{46C4900D-D60D-4953-9336-51E315F3F84B}"/>
               </a:ext>
             </a:extLst>
           </p:cNvPr>
@@ -5343,7 +5343,7 @@
           <p:cNvPr id="26" name="">
             <a:extLst xmlns:a="http://schemas.openxmlformats.org/drawingml/2006/main">
               <a:ext uri="{FF2B5EF4-FFF2-40B4-BE49-F238E27FC236}">
-                <a16:creationId xmlns:a16="http://schemas.microsoft.com/office/drawing/2014/main" id="{5E374B4D-4E1E-4370-A018-4675F5C906F2}"/>
+                <a16:creationId xmlns:a16="http://schemas.microsoft.com/office/drawing/2014/main" id="{6356077A-D621-4F95-9B34-56913F862669}"/>
               </a:ext>
             </a:extLst>
           </p:cNvPr>
@@ -5388,7 +5388,7 @@
           <p:cNvPr id="27" name="">
             <a:extLst xmlns:a="http://schemas.openxmlformats.org/drawingml/2006/main">
               <a:ext uri="{FF2B5EF4-FFF2-40B4-BE49-F238E27FC236}">
-                <a16:creationId xmlns:a16="http://schemas.microsoft.com/office/drawing/2014/main" id="{F5245022-2F24-4EA5-A4EF-60B65847FF00}"/>
+                <a16:creationId xmlns:a16="http://schemas.microsoft.com/office/drawing/2014/main" id="{2D68AF76-8A31-4F7C-ACC4-82D4B8D31A4A}"/>
               </a:ext>
             </a:extLst>
           </p:cNvPr>
@@ -5433,7 +5433,7 @@
           <p:cNvPr id="28" name="">
             <a:extLst xmlns:a="http://schemas.openxmlformats.org/drawingml/2006/main">
               <a:ext uri="{FF2B5EF4-FFF2-40B4-BE49-F238E27FC236}">
-                <a16:creationId xmlns:a16="http://schemas.microsoft.com/office/drawing/2014/main" id="{74D56FB4-12B3-4DA5-AB16-18FEFDDF4A6B}"/>
+                <a16:creationId xmlns:a16="http://schemas.microsoft.com/office/drawing/2014/main" id="{60C9C0CE-3DFA-46E8-B4EF-F2636F72A8F4}"/>
               </a:ext>
             </a:extLst>
           </p:cNvPr>
@@ -5476,7 +5476,7 @@
     </p:spTree>
     <p:extLst>
       <p:ext uri="{BB962C8B-B14F-4D97-AF65-F5344CB8AC3E}">
-        <p14:creationId xmlns:p14="http://schemas.microsoft.com/office/powerpoint/2010/main" val="1832760697"/>
+        <p14:creationId xmlns:p14="http://schemas.microsoft.com/office/powerpoint/2010/main" val="1409362772"/>
       </p:ext>
     </p:extLst>
   </p:cSld>
@@ -5507,7 +5507,7 @@
           <p:cNvPr id="15" name="">
             <a:extLst xmlns:a="http://schemas.openxmlformats.org/drawingml/2006/main">
               <a:ext uri="{FF2B5EF4-FFF2-40B4-BE49-F238E27FC236}">
-                <a16:creationId xmlns:a16="http://schemas.microsoft.com/office/drawing/2014/main" id="{2209CFF3-E307-4319-9953-EC9EFA8A0F89}"/>
+                <a16:creationId xmlns:a16="http://schemas.microsoft.com/office/drawing/2014/main" id="{6CA318F4-ADA3-4F82-A7E5-1F9C5BF427A3}"/>
               </a:ext>
             </a:extLst>
           </p:cNvPr>
@@ -5552,7 +5552,7 @@
           <p:cNvPr id="2" name="">
             <a:extLst xmlns:a="http://schemas.openxmlformats.org/drawingml/2006/main">
               <a:ext uri="{FF2B5EF4-FFF2-40B4-BE49-F238E27FC236}">
-                <a16:creationId xmlns:a16="http://schemas.microsoft.com/office/drawing/2014/main" id="{1DCAA4AB-E29F-45C1-8EB3-A662D4F049F5}"/>
+                <a16:creationId xmlns:a16="http://schemas.microsoft.com/office/drawing/2014/main" id="{1551F25F-479F-4A1A-9DDD-8CE04CE68DBE}"/>
               </a:ext>
             </a:extLst>
           </p:cNvPr>
@@ -5582,7 +5582,7 @@
           <p:cNvPr id="3" name="">
             <a:extLst xmlns:a="http://schemas.openxmlformats.org/drawingml/2006/main">
               <a:ext uri="{FF2B5EF4-FFF2-40B4-BE49-F238E27FC236}">
-                <a16:creationId xmlns:a16="http://schemas.microsoft.com/office/drawing/2014/main" id="{031CD144-DDD5-4FC3-8821-1A0B304DCDA2}"/>
+                <a16:creationId xmlns:a16="http://schemas.microsoft.com/office/drawing/2014/main" id="{9A8182CE-5FA7-4CF6-B813-3AD3EAFBFAFF}"/>
               </a:ext>
             </a:extLst>
           </p:cNvPr>
@@ -5627,7 +5627,7 @@
           <p:cNvPr id="4" name="">
             <a:extLst xmlns:a="http://schemas.openxmlformats.org/drawingml/2006/main">
               <a:ext uri="{FF2B5EF4-FFF2-40B4-BE49-F238E27FC236}">
-                <a16:creationId xmlns:a16="http://schemas.microsoft.com/office/drawing/2014/main" id="{3E4B0435-2181-48B3-AB00-DF0482E7DA70}"/>
+                <a16:creationId xmlns:a16="http://schemas.microsoft.com/office/drawing/2014/main" id="{06158392-017D-4F5B-95C7-4C215A1149AF}"/>
               </a:ext>
             </a:extLst>
           </p:cNvPr>
@@ -5672,7 +5672,7 @@
           <p:cNvPr id="5" name="">
             <a:extLst xmlns:a="http://schemas.openxmlformats.org/drawingml/2006/main">
               <a:ext uri="{FF2B5EF4-FFF2-40B4-BE49-F238E27FC236}">
-                <a16:creationId xmlns:a16="http://schemas.microsoft.com/office/drawing/2014/main" id="{3FF9513A-B0B8-4C7C-8AB9-A3E5ABA616CD}"/>
+                <a16:creationId xmlns:a16="http://schemas.microsoft.com/office/drawing/2014/main" id="{C50EC432-D71D-464D-B3C0-7AF4DEF4EB04}"/>
               </a:ext>
             </a:extLst>
           </p:cNvPr>
@@ -5704,7 +5704,7 @@
           <p:cNvPr id="6" name="">
             <a:extLst xmlns:a="http://schemas.openxmlformats.org/drawingml/2006/main">
               <a:ext uri="{FF2B5EF4-FFF2-40B4-BE49-F238E27FC236}">
-                <a16:creationId xmlns:a16="http://schemas.microsoft.com/office/drawing/2014/main" id="{4D1F1170-648D-4E00-9F09-D4C944A31B1B}"/>
+                <a16:creationId xmlns:a16="http://schemas.microsoft.com/office/drawing/2014/main" id="{CC2CD2D0-A0FC-4CE1-8556-FBC272F32C57}"/>
               </a:ext>
             </a:extLst>
           </p:cNvPr>
@@ -5736,7 +5736,7 @@
           <p:cNvPr id="7" name="">
             <a:extLst xmlns:a="http://schemas.openxmlformats.org/drawingml/2006/main">
               <a:ext uri="{FF2B5EF4-FFF2-40B4-BE49-F238E27FC236}">
-                <a16:creationId xmlns:a16="http://schemas.microsoft.com/office/drawing/2014/main" id="{CA05F302-861F-4ABE-8E6F-CA051C37B17E}"/>
+                <a16:creationId xmlns:a16="http://schemas.microsoft.com/office/drawing/2014/main" id="{0923FC36-C0DF-47EB-BBBF-6C2F22B53F79}"/>
               </a:ext>
             </a:extLst>
           </p:cNvPr>
@@ -5768,7 +5768,7 @@
           <p:cNvPr id="8" name="">
             <a:extLst xmlns:a="http://schemas.openxmlformats.org/drawingml/2006/main">
               <a:ext uri="{FF2B5EF4-FFF2-40B4-BE49-F238E27FC236}">
-                <a16:creationId xmlns:a16="http://schemas.microsoft.com/office/drawing/2014/main" id="{50F8B852-4217-4A38-917A-3867D45D4AEB}"/>
+                <a16:creationId xmlns:a16="http://schemas.microsoft.com/office/drawing/2014/main" id="{E9406F8D-7381-4317-9570-3F24E8595381}"/>
               </a:ext>
             </a:extLst>
           </p:cNvPr>
@@ -5813,7 +5813,7 @@
           <p:cNvPr id="9" name="">
             <a:extLst xmlns:a="http://schemas.openxmlformats.org/drawingml/2006/main">
               <a:ext uri="{FF2B5EF4-FFF2-40B4-BE49-F238E27FC236}">
-                <a16:creationId xmlns:a16="http://schemas.microsoft.com/office/drawing/2014/main" id="{180BB3A1-656D-47A2-83DC-F578B649150E}"/>
+                <a16:creationId xmlns:a16="http://schemas.microsoft.com/office/drawing/2014/main" id="{F324F411-56E3-49DE-8ACF-5848DCBCB53E}"/>
               </a:ext>
             </a:extLst>
           </p:cNvPr>
@@ -5858,7 +5858,7 @@
           <p:cNvPr id="10" name="">
             <a:extLst xmlns:a="http://schemas.openxmlformats.org/drawingml/2006/main">
               <a:ext uri="{FF2B5EF4-FFF2-40B4-BE49-F238E27FC236}">
-                <a16:creationId xmlns:a16="http://schemas.microsoft.com/office/drawing/2014/main" id="{5E1A5D89-E3CD-48D3-93C8-2CEC8764D4CC}"/>
+                <a16:creationId xmlns:a16="http://schemas.microsoft.com/office/drawing/2014/main" id="{14959647-6806-4C2B-BEDD-9528253068B8}"/>
               </a:ext>
             </a:extLst>
           </p:cNvPr>
@@ -5890,7 +5890,7 @@
           <p:cNvPr id="11" name="">
             <a:extLst xmlns:a="http://schemas.openxmlformats.org/drawingml/2006/main">
               <a:ext uri="{FF2B5EF4-FFF2-40B4-BE49-F238E27FC236}">
-                <a16:creationId xmlns:a16="http://schemas.microsoft.com/office/drawing/2014/main" id="{EE2B8706-E23C-4C1B-809B-F8EDCE283898}"/>
+                <a16:creationId xmlns:a16="http://schemas.microsoft.com/office/drawing/2014/main" id="{671CCFD7-C78B-44DB-8759-DDB7CFEB13B7}"/>
               </a:ext>
             </a:extLst>
           </p:cNvPr>
@@ -5922,7 +5922,7 @@
           <p:cNvPr id="12" name="">
             <a:extLst xmlns:a="http://schemas.openxmlformats.org/drawingml/2006/main">
               <a:ext uri="{FF2B5EF4-FFF2-40B4-BE49-F238E27FC236}">
-                <a16:creationId xmlns:a16="http://schemas.microsoft.com/office/drawing/2014/main" id="{25C1904A-A86C-4ED6-8A71-82271909787A}"/>
+                <a16:creationId xmlns:a16="http://schemas.microsoft.com/office/drawing/2014/main" id="{EC192CC3-3BA5-4E45-AA27-9176397A5252}"/>
               </a:ext>
             </a:extLst>
           </p:cNvPr>
@@ -5954,7 +5954,7 @@
           <p:cNvPr id="13" name="">
             <a:extLst xmlns:a="http://schemas.openxmlformats.org/drawingml/2006/main">
               <a:ext uri="{FF2B5EF4-FFF2-40B4-BE49-F238E27FC236}">
-                <a16:creationId xmlns:a16="http://schemas.microsoft.com/office/drawing/2014/main" id="{FEBB12A1-6FC0-4760-BDA3-D748443FD5D6}"/>
+                <a16:creationId xmlns:a16="http://schemas.microsoft.com/office/drawing/2014/main" id="{45399602-0D6B-4F66-B196-C16617BBD894}"/>
               </a:ext>
             </a:extLst>
           </p:cNvPr>
@@ -5999,7 +5999,7 @@
           <p:cNvPr id="14" name="">
             <a:extLst xmlns:a="http://schemas.openxmlformats.org/drawingml/2006/main">
               <a:ext uri="{FF2B5EF4-FFF2-40B4-BE49-F238E27FC236}">
-                <a16:creationId xmlns:a16="http://schemas.microsoft.com/office/drawing/2014/main" id="{FED5BA41-A66F-46A4-AFC0-376DFB8D4183}"/>
+                <a16:creationId xmlns:a16="http://schemas.microsoft.com/office/drawing/2014/main" id="{FAF618C8-29F6-4152-A5FB-4237E39A7076}"/>
               </a:ext>
             </a:extLst>
           </p:cNvPr>
@@ -6042,7 +6042,7 @@
     </p:spTree>
     <p:extLst>
       <p:ext uri="{BB962C8B-B14F-4D97-AF65-F5344CB8AC3E}">
-        <p14:creationId xmlns:p14="http://schemas.microsoft.com/office/powerpoint/2010/main" val="1731396142"/>
+        <p14:creationId xmlns:p14="http://schemas.microsoft.com/office/powerpoint/2010/main" val="520135501"/>
       </p:ext>
     </p:extLst>
   </p:cSld>
@@ -6073,7 +6073,7 @@
           <p:cNvPr id="20" name="">
             <a:extLst xmlns:a="http://schemas.openxmlformats.org/drawingml/2006/main">
               <a:ext uri="{FF2B5EF4-FFF2-40B4-BE49-F238E27FC236}">
-                <a16:creationId xmlns:a16="http://schemas.microsoft.com/office/drawing/2014/main" id="{ABBF723A-A912-4A29-B2CB-A9C658D36BC4}"/>
+                <a16:creationId xmlns:a16="http://schemas.microsoft.com/office/drawing/2014/main" id="{B590E7BC-F5E2-414A-AC52-863D442E1D29}"/>
               </a:ext>
             </a:extLst>
           </p:cNvPr>
@@ -6118,7 +6118,7 @@
           <p:cNvPr id="2" name="">
             <a:extLst xmlns:a="http://schemas.openxmlformats.org/drawingml/2006/main">
               <a:ext uri="{FF2B5EF4-FFF2-40B4-BE49-F238E27FC236}">
-                <a16:creationId xmlns:a16="http://schemas.microsoft.com/office/drawing/2014/main" id="{78F62F35-8203-44A6-B6A1-383CDB806B7B}"/>
+                <a16:creationId xmlns:a16="http://schemas.microsoft.com/office/drawing/2014/main" id="{09311848-0E3F-4D59-8A38-88896869BAFF}"/>
               </a:ext>
             </a:extLst>
           </p:cNvPr>
@@ -6148,7 +6148,7 @@
           <p:cNvPr id="3" name="">
             <a:extLst xmlns:a="http://schemas.openxmlformats.org/drawingml/2006/main">
               <a:ext uri="{FF2B5EF4-FFF2-40B4-BE49-F238E27FC236}">
-                <a16:creationId xmlns:a16="http://schemas.microsoft.com/office/drawing/2014/main" id="{C136AC8E-5AE9-453D-8ADE-D3A1E234C3C7}"/>
+                <a16:creationId xmlns:a16="http://schemas.microsoft.com/office/drawing/2014/main" id="{DB7B14C4-A3A3-437F-829F-C3366F696123}"/>
               </a:ext>
             </a:extLst>
           </p:cNvPr>
@@ -6193,7 +6193,7 @@
           <p:cNvPr id="4" name="">
             <a:extLst xmlns:a="http://schemas.openxmlformats.org/drawingml/2006/main">
               <a:ext uri="{FF2B5EF4-FFF2-40B4-BE49-F238E27FC236}">
-                <a16:creationId xmlns:a16="http://schemas.microsoft.com/office/drawing/2014/main" id="{E92BA7DB-6FD4-4AD7-A279-ADE527DBCE98}"/>
+                <a16:creationId xmlns:a16="http://schemas.microsoft.com/office/drawing/2014/main" id="{32CA59B4-FA89-44A1-99D7-724FB0F08AB5}"/>
               </a:ext>
             </a:extLst>
           </p:cNvPr>
@@ -6238,7 +6238,7 @@
           <p:cNvPr id="5" name="">
             <a:extLst xmlns:a="http://schemas.openxmlformats.org/drawingml/2006/main">
               <a:ext uri="{FF2B5EF4-FFF2-40B4-BE49-F238E27FC236}">
-                <a16:creationId xmlns:a16="http://schemas.microsoft.com/office/drawing/2014/main" id="{958393B4-F07F-4DB4-98D9-F74BF54A6376}"/>
+                <a16:creationId xmlns:a16="http://schemas.microsoft.com/office/drawing/2014/main" id="{D4B6C474-24DB-45FD-B544-7E797567C1CD}"/>
               </a:ext>
             </a:extLst>
           </p:cNvPr>
@@ -6270,7 +6270,7 @@
           <p:cNvPr id="6" name="">
             <a:extLst xmlns:a="http://schemas.openxmlformats.org/drawingml/2006/main">
               <a:ext uri="{FF2B5EF4-FFF2-40B4-BE49-F238E27FC236}">
-                <a16:creationId xmlns:a16="http://schemas.microsoft.com/office/drawing/2014/main" id="{2942032C-1402-46F0-8641-D6CE8E48433C}"/>
+                <a16:creationId xmlns:a16="http://schemas.microsoft.com/office/drawing/2014/main" id="{70E5C0ED-197E-49DC-9B2E-82474062517B}"/>
               </a:ext>
             </a:extLst>
           </p:cNvPr>
@@ -6318,7 +6318,7 @@
                 <a:ea typeface="Arial"/>
                 <a:cs typeface="Arial"/>
               </a:rPr>
-              <a:t>50% W × 50% H</a:t>
+              <a:t>0.5× width</a:t>
             </a:r>
           </a:p>
           <a:p xmlns:a="http://schemas.openxmlformats.org/drawingml/2006/main">
@@ -6331,7 +6331,7 @@
                 <a:ea typeface="Arial"/>
                 <a:cs typeface="Arial"/>
               </a:rPr>
-              <a:t>(25% of pixels)</a:t>
+              <a:t>0.5× height</a:t>
             </a:r>
           </a:p>
         </p:txBody>
@@ -6341,7 +6341,7 @@
           <p:cNvPr id="7" name="">
             <a:extLst xmlns:a="http://schemas.openxmlformats.org/drawingml/2006/main">
               <a:ext uri="{FF2B5EF4-FFF2-40B4-BE49-F238E27FC236}">
-                <a16:creationId xmlns:a16="http://schemas.microsoft.com/office/drawing/2014/main" id="{B9695508-4155-43DC-927E-D9F4BF032A1C}"/>
+                <a16:creationId xmlns:a16="http://schemas.microsoft.com/office/drawing/2014/main" id="{8558AE41-8932-445C-90D5-E48CECC27755}"/>
               </a:ext>
             </a:extLst>
           </p:cNvPr>
@@ -6386,7 +6386,7 @@
           <p:cNvPr id="8" name="">
             <a:extLst xmlns:a="http://schemas.openxmlformats.org/drawingml/2006/main">
               <a:ext uri="{FF2B5EF4-FFF2-40B4-BE49-F238E27FC236}">
-                <a16:creationId xmlns:a16="http://schemas.microsoft.com/office/drawing/2014/main" id="{D67F8474-E533-4C96-AB54-30AF87821599}"/>
+                <a16:creationId xmlns:a16="http://schemas.microsoft.com/office/drawing/2014/main" id="{03650FF8-98B7-4E6E-9DE9-A9F2A655B22B}"/>
               </a:ext>
             </a:extLst>
           </p:cNvPr>
@@ -6418,7 +6418,7 @@
           <p:cNvPr id="9" name="">
             <a:extLst xmlns:a="http://schemas.openxmlformats.org/drawingml/2006/main">
               <a:ext uri="{FF2B5EF4-FFF2-40B4-BE49-F238E27FC236}">
-                <a16:creationId xmlns:a16="http://schemas.microsoft.com/office/drawing/2014/main" id="{2E19CF6C-B043-4EF1-B9F9-B1E7F3DBCD02}"/>
+                <a16:creationId xmlns:a16="http://schemas.microsoft.com/office/drawing/2014/main" id="{338A9744-7733-4338-B2EA-754BBD0111EC}"/>
               </a:ext>
             </a:extLst>
           </p:cNvPr>
@@ -6450,7 +6450,7 @@
           <p:cNvPr id="10" name="">
             <a:extLst xmlns:a="http://schemas.openxmlformats.org/drawingml/2006/main">
               <a:ext uri="{FF2B5EF4-FFF2-40B4-BE49-F238E27FC236}">
-                <a16:creationId xmlns:a16="http://schemas.microsoft.com/office/drawing/2014/main" id="{89AFB8B6-8473-4EA0-AB59-66848D08CA4D}"/>
+                <a16:creationId xmlns:a16="http://schemas.microsoft.com/office/drawing/2014/main" id="{64E1D8D4-54D2-4F20-B837-C90A7FD111D7}"/>
               </a:ext>
             </a:extLst>
           </p:cNvPr>
@@ -6495,7 +6495,7 @@
           <p:cNvPr id="11" name="">
             <a:extLst xmlns:a="http://schemas.openxmlformats.org/drawingml/2006/main">
               <a:ext uri="{FF2B5EF4-FFF2-40B4-BE49-F238E27FC236}">
-                <a16:creationId xmlns:a16="http://schemas.microsoft.com/office/drawing/2014/main" id="{983E6B9A-4F84-4E0A-8821-92DA8AC8B566}"/>
+                <a16:creationId xmlns:a16="http://schemas.microsoft.com/office/drawing/2014/main" id="{6E0CA3C0-C7FE-4D04-A534-0407DD321B55}"/>
               </a:ext>
             </a:extLst>
           </p:cNvPr>
@@ -6540,7 +6540,7 @@
           <p:cNvPr id="12" name="">
             <a:extLst xmlns:a="http://schemas.openxmlformats.org/drawingml/2006/main">
               <a:ext uri="{FF2B5EF4-FFF2-40B4-BE49-F238E27FC236}">
-                <a16:creationId xmlns:a16="http://schemas.microsoft.com/office/drawing/2014/main" id="{94AD05D2-712F-4B7A-87C5-BA1CB15F96A7}"/>
+                <a16:creationId xmlns:a16="http://schemas.microsoft.com/office/drawing/2014/main" id="{ADAE545E-C88B-45D1-BE3D-904282A5F47D}"/>
               </a:ext>
             </a:extLst>
           </p:cNvPr>
@@ -6585,7 +6585,7 @@
           <p:cNvPr id="13" name="">
             <a:extLst xmlns:a="http://schemas.openxmlformats.org/drawingml/2006/main">
               <a:ext uri="{FF2B5EF4-FFF2-40B4-BE49-F238E27FC236}">
-                <a16:creationId xmlns:a16="http://schemas.microsoft.com/office/drawing/2014/main" id="{8AAFF49D-F64E-467B-AE0A-2AD43EF3F957}"/>
+                <a16:creationId xmlns:a16="http://schemas.microsoft.com/office/drawing/2014/main" id="{340BC6D5-EF0D-49EC-8B90-982C96F689DB}"/>
               </a:ext>
             </a:extLst>
           </p:cNvPr>
@@ -6617,7 +6617,7 @@
           <p:cNvPr id="14" name="">
             <a:extLst xmlns:a="http://schemas.openxmlformats.org/drawingml/2006/main">
               <a:ext uri="{FF2B5EF4-FFF2-40B4-BE49-F238E27FC236}">
-                <a16:creationId xmlns:a16="http://schemas.microsoft.com/office/drawing/2014/main" id="{614E9256-1B6A-4A49-99CA-A3ECEE86FCFD}"/>
+                <a16:creationId xmlns:a16="http://schemas.microsoft.com/office/drawing/2014/main" id="{C27E8751-4EDD-4021-9553-55DC26EB54B3}"/>
               </a:ext>
             </a:extLst>
           </p:cNvPr>
@@ -6649,7 +6649,7 @@
           <p:cNvPr id="15" name="">
             <a:extLst xmlns:a="http://schemas.openxmlformats.org/drawingml/2006/main">
               <a:ext uri="{FF2B5EF4-FFF2-40B4-BE49-F238E27FC236}">
-                <a16:creationId xmlns:a16="http://schemas.microsoft.com/office/drawing/2014/main" id="{A002B53F-7975-48FC-BE17-82EC128DF4D6}"/>
+                <a16:creationId xmlns:a16="http://schemas.microsoft.com/office/drawing/2014/main" id="{D9E2F185-C79A-4AE2-9115-82DDDB9F2002}"/>
               </a:ext>
             </a:extLst>
           </p:cNvPr>
@@ -6681,7 +6681,7 @@
           <p:cNvPr id="16" name="">
             <a:extLst xmlns:a="http://schemas.openxmlformats.org/drawingml/2006/main">
               <a:ext uri="{FF2B5EF4-FFF2-40B4-BE49-F238E27FC236}">
-                <a16:creationId xmlns:a16="http://schemas.microsoft.com/office/drawing/2014/main" id="{4C12CED7-8EF1-443E-BEB6-21F70C3263AC}"/>
+                <a16:creationId xmlns:a16="http://schemas.microsoft.com/office/drawing/2014/main" id="{AA0E4506-D1E4-4CAE-B56E-2526D1A7DC15}"/>
               </a:ext>
             </a:extLst>
           </p:cNvPr>
@@ -6726,7 +6726,7 @@
           <p:cNvPr id="17" name="">
             <a:extLst xmlns:a="http://schemas.openxmlformats.org/drawingml/2006/main">
               <a:ext uri="{FF2B5EF4-FFF2-40B4-BE49-F238E27FC236}">
-                <a16:creationId xmlns:a16="http://schemas.microsoft.com/office/drawing/2014/main" id="{23EAB435-6491-41FF-AF55-DB7C02BF96B9}"/>
+                <a16:creationId xmlns:a16="http://schemas.microsoft.com/office/drawing/2014/main" id="{934B62B1-220F-4C6D-8CAB-24CD4B07F020}"/>
               </a:ext>
             </a:extLst>
           </p:cNvPr>
@@ -6761,7 +6761,7 @@
                 <a:ea typeface="Arial"/>
                 <a:cs typeface="Arial"/>
               </a:rPr>
-              <a:t>960 × 540 output</a:t>
+              <a:t>1.0× output</a:t>
             </a:r>
           </a:p>
         </p:txBody>
@@ -6771,7 +6771,7 @@
           <p:cNvPr id="18" name="">
             <a:extLst xmlns:a="http://schemas.openxmlformats.org/drawingml/2006/main">
               <a:ext uri="{FF2B5EF4-FFF2-40B4-BE49-F238E27FC236}">
-                <a16:creationId xmlns:a16="http://schemas.microsoft.com/office/drawing/2014/main" id="{F746B42D-189B-4D7E-B05A-1AB7E058D48B}"/>
+                <a16:creationId xmlns:a16="http://schemas.microsoft.com/office/drawing/2014/main" id="{D8A7DF32-B0A9-4602-B8A4-002DCC5A153C}"/>
               </a:ext>
             </a:extLst>
           </p:cNvPr>
@@ -6806,7 +6806,7 @@
                 <a:ea typeface="Arial"/>
                 <a:cs typeface="Arial"/>
               </a:rPr>
-              <a:t>Full-resolution region: 0.7%, 2.8%, 11.1%, 25.0%, 44.4% of image</a:t>
+              <a:t>Full-resolution region width: 0.08×, 0.17×, 0.33×, 0.50×, 0.67×</a:t>
             </a:r>
           </a:p>
         </p:txBody>
@@ -6816,7 +6816,7 @@
           <p:cNvPr id="19" name="">
             <a:extLst xmlns:a="http://schemas.openxmlformats.org/drawingml/2006/main">
               <a:ext uri="{FF2B5EF4-FFF2-40B4-BE49-F238E27FC236}">
-                <a16:creationId xmlns:a16="http://schemas.microsoft.com/office/drawing/2014/main" id="{1D8E51DD-0FE4-435C-AD7B-B514D1D3D42B}"/>
+                <a16:creationId xmlns:a16="http://schemas.microsoft.com/office/drawing/2014/main" id="{EE9D7666-F742-47FC-9761-89CBA26D813F}"/>
               </a:ext>
             </a:extLst>
           </p:cNvPr>
@@ -6851,7 +6851,7 @@
                 <a:ea typeface="Arial"/>
                 <a:cs typeface="Arial"/>
               </a:rPr>
-              <a:t>Region % means image-area coverage; base sampling is separate. Fixed center, 3 px halo; no eye tracking.</a:t>
+              <a:t>Region scale = region width / image width. Sampling inside the region stays at full resolution.</a:t>
             </a:r>
           </a:p>
         </p:txBody>
@@ -6859,7 +6859,7 @@
     </p:spTree>
     <p:extLst>
       <p:ext uri="{BB962C8B-B14F-4D97-AF65-F5344CB8AC3E}">
-        <p14:creationId xmlns:p14="http://schemas.microsoft.com/office/powerpoint/2010/main" val="590900306"/>
+        <p14:creationId xmlns:p14="http://schemas.microsoft.com/office/powerpoint/2010/main" val="606043869"/>
       </p:ext>
     </p:extLst>
   </p:cSld>
@@ -6890,7 +6890,7 @@
           <p:cNvPr id="12" name="">
             <a:extLst xmlns:a="http://schemas.openxmlformats.org/drawingml/2006/main">
               <a:ext uri="{FF2B5EF4-FFF2-40B4-BE49-F238E27FC236}">
-                <a16:creationId xmlns:a16="http://schemas.microsoft.com/office/drawing/2014/main" id="{58E7B120-2336-4508-AEDD-3A80E7F5DF37}"/>
+                <a16:creationId xmlns:a16="http://schemas.microsoft.com/office/drawing/2014/main" id="{C2A0E4F3-1574-411F-878A-BD7553CEB9CA}"/>
               </a:ext>
             </a:extLst>
           </p:cNvPr>
@@ -6935,7 +6935,7 @@
           <p:cNvPr id="2" name="">
             <a:extLst xmlns:a="http://schemas.openxmlformats.org/drawingml/2006/main">
               <a:ext uri="{FF2B5EF4-FFF2-40B4-BE49-F238E27FC236}">
-                <a16:creationId xmlns:a16="http://schemas.microsoft.com/office/drawing/2014/main" id="{8EF7E9B1-56BC-4BB5-A378-6BD835267AA4}"/>
+                <a16:creationId xmlns:a16="http://schemas.microsoft.com/office/drawing/2014/main" id="{B2A2A012-794B-45CC-A04B-FDDCC9FFDF20}"/>
               </a:ext>
             </a:extLst>
           </p:cNvPr>
@@ -6965,7 +6965,7 @@
           <p:cNvPr id="3" name="">
             <a:extLst xmlns:a="http://schemas.openxmlformats.org/drawingml/2006/main">
               <a:ext uri="{FF2B5EF4-FFF2-40B4-BE49-F238E27FC236}">
-                <a16:creationId xmlns:a16="http://schemas.microsoft.com/office/drawing/2014/main" id="{81366B18-9EAE-4369-B199-9FB6BAD3BC8C}"/>
+                <a16:creationId xmlns:a16="http://schemas.microsoft.com/office/drawing/2014/main" id="{F7E29E61-CB9C-44DB-8A4A-59D3EE23E28E}"/>
               </a:ext>
             </a:extLst>
           </p:cNvPr>
@@ -7010,7 +7010,7 @@
           <p:cNvPr id="4" name="Chart">
             <a:extLst xmlns:a="http://schemas.openxmlformats.org/drawingml/2006/main">
               <a:ext uri="{FF2B5EF4-FFF2-40B4-BE49-F238E27FC236}">
-                <a16:creationId xmlns:a16="http://schemas.microsoft.com/office/drawing/2014/main" id="{E657DE70-47A4-4A50-A164-2D6474B474BF}"/>
+                <a16:creationId xmlns:a16="http://schemas.microsoft.com/office/drawing/2014/main" id="{59844BE6-ECD9-439B-AC1C-7836C10B5F24}"/>
               </a:ext>
             </a:extLst>
           </p:cNvPr>
@@ -7023,7 +7023,7 @@
         </p:xfrm>
         <a:graphic xmlns:a="http://schemas.openxmlformats.org/drawingml/2006/main">
           <a:graphicData uri="http://schemas.openxmlformats.org/drawingml/2006/chart">
-            <c:chart xmlns:r="http://schemas.openxmlformats.org/officeDocument/2006/relationships" xmlns:c="http://schemas.openxmlformats.org/drawingml/2006/chart" r:id="R0f94985e972f4ef5"/>
+            <c:chart xmlns:r="http://schemas.openxmlformats.org/officeDocument/2006/relationships" xmlns:c="http://schemas.openxmlformats.org/drawingml/2006/chart" r:id="Ra00bb7ec55c04ba2"/>
           </a:graphicData>
         </a:graphic>
       </p:graphicFrame>
@@ -7032,7 +7032,7 @@
           <p:cNvPr id="5" name="">
             <a:extLst xmlns:a="http://schemas.openxmlformats.org/drawingml/2006/main">
               <a:ext uri="{FF2B5EF4-FFF2-40B4-BE49-F238E27FC236}">
-                <a16:creationId xmlns:a16="http://schemas.microsoft.com/office/drawing/2014/main" id="{FC8587D0-E7AA-4B18-8103-CB9E233E9980}"/>
+                <a16:creationId xmlns:a16="http://schemas.microsoft.com/office/drawing/2014/main" id="{62565BA1-E81E-4E51-8B2C-2505B4052BF3}"/>
               </a:ext>
             </a:extLst>
           </p:cNvPr>
@@ -7077,7 +7077,7 @@
           <p:cNvPr id="6" name="">
             <a:extLst xmlns:a="http://schemas.openxmlformats.org/drawingml/2006/main">
               <a:ext uri="{FF2B5EF4-FFF2-40B4-BE49-F238E27FC236}">
-                <a16:creationId xmlns:a16="http://schemas.microsoft.com/office/drawing/2014/main" id="{5B1C1FE3-DC60-44C2-8E0A-0AA8C4B070F1}"/>
+                <a16:creationId xmlns:a16="http://schemas.microsoft.com/office/drawing/2014/main" id="{81D8E702-AF40-4E3C-9C30-6C3DB5B75771}"/>
               </a:ext>
             </a:extLst>
           </p:cNvPr>
@@ -7122,7 +7122,7 @@
           <p:cNvPr id="7" name="">
             <a:extLst xmlns:a="http://schemas.openxmlformats.org/drawingml/2006/main">
               <a:ext uri="{FF2B5EF4-FFF2-40B4-BE49-F238E27FC236}">
-                <a16:creationId xmlns:a16="http://schemas.microsoft.com/office/drawing/2014/main" id="{399E4EE5-A198-4B0B-B86E-B0A3A6031AC7}"/>
+                <a16:creationId xmlns:a16="http://schemas.microsoft.com/office/drawing/2014/main" id="{9FD1AA88-549B-4459-937A-49F95284C1BE}"/>
               </a:ext>
             </a:extLst>
           </p:cNvPr>
@@ -7167,7 +7167,7 @@
           <p:cNvPr id="8" name="">
             <a:extLst xmlns:a="http://schemas.openxmlformats.org/drawingml/2006/main">
               <a:ext uri="{FF2B5EF4-FFF2-40B4-BE49-F238E27FC236}">
-                <a16:creationId xmlns:a16="http://schemas.microsoft.com/office/drawing/2014/main" id="{4891ECD1-451A-4461-A687-264117661EBE}"/>
+                <a16:creationId xmlns:a16="http://schemas.microsoft.com/office/drawing/2014/main" id="{DF1E08D9-DE6D-463C-81B3-16C85A2A3EF7}"/>
               </a:ext>
             </a:extLst>
           </p:cNvPr>
@@ -7212,7 +7212,7 @@
           <p:cNvPr id="9" name="">
             <a:extLst xmlns:a="http://schemas.openxmlformats.org/drawingml/2006/main">
               <a:ext uri="{FF2B5EF4-FFF2-40B4-BE49-F238E27FC236}">
-                <a16:creationId xmlns:a16="http://schemas.microsoft.com/office/drawing/2014/main" id="{052CEAE3-571A-4803-8325-765F7E19F323}"/>
+                <a16:creationId xmlns:a16="http://schemas.microsoft.com/office/drawing/2014/main" id="{255AA6EB-02FB-42A5-94DD-924562B9C9BC}"/>
               </a:ext>
             </a:extLst>
           </p:cNvPr>
@@ -7257,7 +7257,7 @@
           <p:cNvPr id="10" name="">
             <a:extLst xmlns:a="http://schemas.openxmlformats.org/drawingml/2006/main">
               <a:ext uri="{FF2B5EF4-FFF2-40B4-BE49-F238E27FC236}">
-                <a16:creationId xmlns:a16="http://schemas.microsoft.com/office/drawing/2014/main" id="{CA760181-77EA-41D6-A00C-EAA672DAD0CC}"/>
+                <a16:creationId xmlns:a16="http://schemas.microsoft.com/office/drawing/2014/main" id="{F136F32D-FC77-4962-BD3A-22FF1BAB31B2}"/>
               </a:ext>
             </a:extLst>
           </p:cNvPr>
@@ -7302,7 +7302,7 @@
           <p:cNvPr id="11" name="">
             <a:extLst xmlns:a="http://schemas.openxmlformats.org/drawingml/2006/main">
               <a:ext uri="{FF2B5EF4-FFF2-40B4-BE49-F238E27FC236}">
-                <a16:creationId xmlns:a16="http://schemas.microsoft.com/office/drawing/2014/main" id="{5AAB3EC2-6239-40D6-BC60-602C8853129C}"/>
+                <a16:creationId xmlns:a16="http://schemas.microsoft.com/office/drawing/2014/main" id="{59332637-B9D4-4203-822C-4D17BE9FCD7C}"/>
               </a:ext>
             </a:extLst>
           </p:cNvPr>
@@ -7345,7 +7345,7 @@
     </p:spTree>
     <p:extLst>
       <p:ext uri="{BB962C8B-B14F-4D97-AF65-F5344CB8AC3E}">
-        <p14:creationId xmlns:p14="http://schemas.microsoft.com/office/powerpoint/2010/main" val="1223246617"/>
+        <p14:creationId xmlns:p14="http://schemas.microsoft.com/office/powerpoint/2010/main" val="584151859"/>
       </p:ext>
     </p:extLst>
   </p:cSld>
@@ -7376,7 +7376,7 @@
           <p:cNvPr id="8" name="">
             <a:extLst xmlns:a="http://schemas.openxmlformats.org/drawingml/2006/main">
               <a:ext uri="{FF2B5EF4-FFF2-40B4-BE49-F238E27FC236}">
-                <a16:creationId xmlns:a16="http://schemas.microsoft.com/office/drawing/2014/main" id="{25297BD3-542B-42B4-A0BE-9AC4C6BAB68E}"/>
+                <a16:creationId xmlns:a16="http://schemas.microsoft.com/office/drawing/2014/main" id="{7E4CE1E8-BF96-4F64-B6E3-D44062434E1A}"/>
               </a:ext>
             </a:extLst>
           </p:cNvPr>
@@ -7421,7 +7421,7 @@
           <p:cNvPr id="2" name="">
             <a:extLst xmlns:a="http://schemas.openxmlformats.org/drawingml/2006/main">
               <a:ext uri="{FF2B5EF4-FFF2-40B4-BE49-F238E27FC236}">
-                <a16:creationId xmlns:a16="http://schemas.microsoft.com/office/drawing/2014/main" id="{7A42AC4E-0C09-4651-80AE-F2A753F72686}"/>
+                <a16:creationId xmlns:a16="http://schemas.microsoft.com/office/drawing/2014/main" id="{02F3FBD6-E63F-40FA-97D3-82A6A5963E3F}"/>
               </a:ext>
             </a:extLst>
           </p:cNvPr>
@@ -7451,7 +7451,7 @@
           <p:cNvPr id="3" name="">
             <a:extLst xmlns:a="http://schemas.openxmlformats.org/drawingml/2006/main">
               <a:ext uri="{FF2B5EF4-FFF2-40B4-BE49-F238E27FC236}">
-                <a16:creationId xmlns:a16="http://schemas.microsoft.com/office/drawing/2014/main" id="{AB764DB4-DBBE-485A-A0BD-3495CBDA0574}"/>
+                <a16:creationId xmlns:a16="http://schemas.microsoft.com/office/drawing/2014/main" id="{4C75864A-465E-4583-9191-F1556CA59891}"/>
               </a:ext>
             </a:extLst>
           </p:cNvPr>
@@ -7496,7 +7496,7 @@
           <p:cNvPr id="4" name="">
             <a:extLst xmlns:a="http://schemas.openxmlformats.org/drawingml/2006/main">
               <a:ext uri="{FF2B5EF4-FFF2-40B4-BE49-F238E27FC236}">
-                <a16:creationId xmlns:a16="http://schemas.microsoft.com/office/drawing/2014/main" id="{5DEF8852-C2C1-4ADB-859B-F517255A89B0}"/>
+                <a16:creationId xmlns:a16="http://schemas.microsoft.com/office/drawing/2014/main" id="{806A95FC-757C-4E87-A70C-188BC0811CD4}"/>
               </a:ext>
             </a:extLst>
           </p:cNvPr>
@@ -8462,7 +8462,7 @@
           <p:cNvPr id="5" name="">
             <a:extLst xmlns:a="http://schemas.openxmlformats.org/drawingml/2006/main">
               <a:ext uri="{FF2B5EF4-FFF2-40B4-BE49-F238E27FC236}">
-                <a16:creationId xmlns:a16="http://schemas.microsoft.com/office/drawing/2014/main" id="{46DB63B0-91DC-489B-ADA1-9398EE9360A9}"/>
+                <a16:creationId xmlns:a16="http://schemas.microsoft.com/office/drawing/2014/main" id="{A311A780-70FE-47B1-91FD-A2859593565F}"/>
               </a:ext>
             </a:extLst>
           </p:cNvPr>
@@ -8507,7 +8507,7 @@
           <p:cNvPr id="6" name="">
             <a:extLst xmlns:a="http://schemas.openxmlformats.org/drawingml/2006/main">
               <a:ext uri="{FF2B5EF4-FFF2-40B4-BE49-F238E27FC236}">
-                <a16:creationId xmlns:a16="http://schemas.microsoft.com/office/drawing/2014/main" id="{5FBE0DC4-FC57-4BD1-A116-68C3A2C953A4}"/>
+                <a16:creationId xmlns:a16="http://schemas.microsoft.com/office/drawing/2014/main" id="{578622C3-34F2-42B1-9079-660A3A787005}"/>
               </a:ext>
             </a:extLst>
           </p:cNvPr>
@@ -8552,7 +8552,7 @@
           <p:cNvPr id="7" name="">
             <a:extLst xmlns:a="http://schemas.openxmlformats.org/drawingml/2006/main">
               <a:ext uri="{FF2B5EF4-FFF2-40B4-BE49-F238E27FC236}">
-                <a16:creationId xmlns:a16="http://schemas.microsoft.com/office/drawing/2014/main" id="{1107472D-2F8D-4D76-9B9E-82B27A7CEAEC}"/>
+                <a16:creationId xmlns:a16="http://schemas.microsoft.com/office/drawing/2014/main" id="{C11FCAC2-791E-4524-A062-83BE093C56AB}"/>
               </a:ext>
             </a:extLst>
           </p:cNvPr>
@@ -8595,7 +8595,7 @@
     </p:spTree>
     <p:extLst>
       <p:ext uri="{BB962C8B-B14F-4D97-AF65-F5344CB8AC3E}">
-        <p14:creationId xmlns:p14="http://schemas.microsoft.com/office/powerpoint/2010/main" val="419475429"/>
+        <p14:creationId xmlns:p14="http://schemas.microsoft.com/office/powerpoint/2010/main" val="97320965"/>
       </p:ext>
     </p:extLst>
   </p:cSld>
@@ -8626,7 +8626,7 @@
           <p:cNvPr id="14" name="">
             <a:extLst xmlns:a="http://schemas.openxmlformats.org/drawingml/2006/main">
               <a:ext uri="{FF2B5EF4-FFF2-40B4-BE49-F238E27FC236}">
-                <a16:creationId xmlns:a16="http://schemas.microsoft.com/office/drawing/2014/main" id="{A75F8F7F-DA8E-46EA-BA12-F2623080626D}"/>
+                <a16:creationId xmlns:a16="http://schemas.microsoft.com/office/drawing/2014/main" id="{84061BC2-1C04-4E6D-88A4-723A6807EB9F}"/>
               </a:ext>
             </a:extLst>
           </p:cNvPr>
@@ -8671,7 +8671,7 @@
           <p:cNvPr id="2" name="">
             <a:extLst xmlns:a="http://schemas.openxmlformats.org/drawingml/2006/main">
               <a:ext uri="{FF2B5EF4-FFF2-40B4-BE49-F238E27FC236}">
-                <a16:creationId xmlns:a16="http://schemas.microsoft.com/office/drawing/2014/main" id="{27BFB765-84FA-4F13-A723-7C915DC7BF82}"/>
+                <a16:creationId xmlns:a16="http://schemas.microsoft.com/office/drawing/2014/main" id="{A961DC4C-62F7-429A-AAA8-F8055C952384}"/>
               </a:ext>
             </a:extLst>
           </p:cNvPr>
@@ -8701,7 +8701,7 @@
           <p:cNvPr id="3" name="">
             <a:extLst xmlns:a="http://schemas.openxmlformats.org/drawingml/2006/main">
               <a:ext uri="{FF2B5EF4-FFF2-40B4-BE49-F238E27FC236}">
-                <a16:creationId xmlns:a16="http://schemas.microsoft.com/office/drawing/2014/main" id="{762F258C-CD4F-44D3-85E2-87334FFFD6B8}"/>
+                <a16:creationId xmlns:a16="http://schemas.microsoft.com/office/drawing/2014/main" id="{A13B84C5-357B-4A37-A60E-1478AA8444C1}"/>
               </a:ext>
             </a:extLst>
           </p:cNvPr>
@@ -8746,7 +8746,7 @@
           <p:cNvPr id="4" name="">
             <a:extLst xmlns:a="http://schemas.openxmlformats.org/drawingml/2006/main">
               <a:ext uri="{FF2B5EF4-FFF2-40B4-BE49-F238E27FC236}">
-                <a16:creationId xmlns:a16="http://schemas.microsoft.com/office/drawing/2014/main" id="{D275C36C-BE03-4069-BA14-873A54FC347C}"/>
+                <a16:creationId xmlns:a16="http://schemas.microsoft.com/office/drawing/2014/main" id="{BF394C24-AB06-4D11-9010-997A298A3726}"/>
               </a:ext>
             </a:extLst>
           </p:cNvPr>
@@ -8791,7 +8791,7 @@
           <p:cNvPr id="5" name="">
             <a:extLst xmlns:a="http://schemas.openxmlformats.org/drawingml/2006/main">
               <a:ext uri="{FF2B5EF4-FFF2-40B4-BE49-F238E27FC236}">
-                <a16:creationId xmlns:a16="http://schemas.microsoft.com/office/drawing/2014/main" id="{3DFC9158-FDF4-400B-B3DC-0A57964A60A1}"/>
+                <a16:creationId xmlns:a16="http://schemas.microsoft.com/office/drawing/2014/main" id="{3DCA773A-821F-4D39-B1B2-1E8D9CED399B}"/>
               </a:ext>
             </a:extLst>
           </p:cNvPr>
@@ -8836,7 +8836,7 @@
           <p:cNvPr id="6" name="">
             <a:extLst xmlns:a="http://schemas.openxmlformats.org/drawingml/2006/main">
               <a:ext uri="{FF2B5EF4-FFF2-40B4-BE49-F238E27FC236}">
-                <a16:creationId xmlns:a16="http://schemas.microsoft.com/office/drawing/2014/main" id="{59F6AEF3-0CFC-4618-9644-830E1267C7FA}"/>
+                <a16:creationId xmlns:a16="http://schemas.microsoft.com/office/drawing/2014/main" id="{6B8B170B-B280-487B-83A8-F96A8E4DA29A}"/>
               </a:ext>
             </a:extLst>
           </p:cNvPr>
@@ -8881,7 +8881,7 @@
           <p:cNvPr id="7" name="">
             <a:extLst xmlns:a="http://schemas.openxmlformats.org/drawingml/2006/main">
               <a:ext uri="{FF2B5EF4-FFF2-40B4-BE49-F238E27FC236}">
-                <a16:creationId xmlns:a16="http://schemas.microsoft.com/office/drawing/2014/main" id="{52CDF492-2069-4A3A-825E-13C1BF3FEEFC}"/>
+                <a16:creationId xmlns:a16="http://schemas.microsoft.com/office/drawing/2014/main" id="{6267466E-2A78-44A0-8807-651FEE27E726}"/>
               </a:ext>
             </a:extLst>
           </p:cNvPr>
@@ -8926,7 +8926,7 @@
           <p:cNvPr id="8" name="">
             <a:extLst xmlns:a="http://schemas.openxmlformats.org/drawingml/2006/main">
               <a:ext uri="{FF2B5EF4-FFF2-40B4-BE49-F238E27FC236}">
-                <a16:creationId xmlns:a16="http://schemas.microsoft.com/office/drawing/2014/main" id="{4DE6C9AC-9B16-40DF-B1F0-646E85554935}"/>
+                <a16:creationId xmlns:a16="http://schemas.microsoft.com/office/drawing/2014/main" id="{48D26CF3-E8ED-4B4A-BF09-D9105063FCDA}"/>
               </a:ext>
             </a:extLst>
           </p:cNvPr>
@@ -8971,7 +8971,7 @@
           <p:cNvPr id="9" name="">
             <a:extLst xmlns:a="http://schemas.openxmlformats.org/drawingml/2006/main">
               <a:ext uri="{FF2B5EF4-FFF2-40B4-BE49-F238E27FC236}">
-                <a16:creationId xmlns:a16="http://schemas.microsoft.com/office/drawing/2014/main" id="{C80D1267-E581-47CF-B687-A0CAFA5CC4C9}"/>
+                <a16:creationId xmlns:a16="http://schemas.microsoft.com/office/drawing/2014/main" id="{8904E76B-2401-4993-AC76-6830022A959A}"/>
               </a:ext>
             </a:extLst>
           </p:cNvPr>
@@ -9016,7 +9016,7 @@
           <p:cNvPr id="10" name="">
             <a:extLst xmlns:a="http://schemas.openxmlformats.org/drawingml/2006/main">
               <a:ext uri="{FF2B5EF4-FFF2-40B4-BE49-F238E27FC236}">
-                <a16:creationId xmlns:a16="http://schemas.microsoft.com/office/drawing/2014/main" id="{CC0E7798-7DB6-4851-8166-3B519818628E}"/>
+                <a16:creationId xmlns:a16="http://schemas.microsoft.com/office/drawing/2014/main" id="{580E08B7-8360-42A4-9E2E-425511FD99AF}"/>
               </a:ext>
             </a:extLst>
           </p:cNvPr>
@@ -9061,7 +9061,7 @@
           <p:cNvPr id="11" name="">
             <a:extLst xmlns:a="http://schemas.openxmlformats.org/drawingml/2006/main">
               <a:ext uri="{FF2B5EF4-FFF2-40B4-BE49-F238E27FC236}">
-                <a16:creationId xmlns:a16="http://schemas.microsoft.com/office/drawing/2014/main" id="{FBE63E59-E48B-4956-ABA1-6EB52E07A454}"/>
+                <a16:creationId xmlns:a16="http://schemas.microsoft.com/office/drawing/2014/main" id="{FF2DCCC0-0A43-4FE8-9C63-1C6971E50A4E}"/>
               </a:ext>
             </a:extLst>
           </p:cNvPr>
@@ -9106,7 +9106,7 @@
           <p:cNvPr id="12" name="">
             <a:extLst xmlns:a="http://schemas.openxmlformats.org/drawingml/2006/main">
               <a:ext uri="{FF2B5EF4-FFF2-40B4-BE49-F238E27FC236}">
-                <a16:creationId xmlns:a16="http://schemas.microsoft.com/office/drawing/2014/main" id="{69048389-D926-49A7-94BD-A69FEDFC5712}"/>
+                <a16:creationId xmlns:a16="http://schemas.microsoft.com/office/drawing/2014/main" id="{B501E293-2794-4830-B726-E157A1D6A1DF}"/>
               </a:ext>
             </a:extLst>
           </p:cNvPr>
@@ -9151,7 +9151,7 @@
           <p:cNvPr id="13" name="">
             <a:extLst xmlns:a="http://schemas.openxmlformats.org/drawingml/2006/main">
               <a:ext uri="{FF2B5EF4-FFF2-40B4-BE49-F238E27FC236}">
-                <a16:creationId xmlns:a16="http://schemas.microsoft.com/office/drawing/2014/main" id="{D866EAEF-0C2A-40EC-BE87-7977C55B1FE0}"/>
+                <a16:creationId xmlns:a16="http://schemas.microsoft.com/office/drawing/2014/main" id="{7ADC0EEC-5BEE-45E7-B4AD-66BF4878C4C9}"/>
               </a:ext>
             </a:extLst>
           </p:cNvPr>
@@ -9194,7 +9194,7 @@
     </p:spTree>
     <p:extLst>
       <p:ext uri="{BB962C8B-B14F-4D97-AF65-F5344CB8AC3E}">
-        <p14:creationId xmlns:p14="http://schemas.microsoft.com/office/powerpoint/2010/main" val="1860536445"/>
+        <p14:creationId xmlns:p14="http://schemas.microsoft.com/office/powerpoint/2010/main" val="1884115885"/>
       </p:ext>
     </p:extLst>
   </p:cSld>

--- a/presentations/weekly_20261029/weekly_20261029_english_final.pptx
+++ b/presentations/weekly_20261029/weekly_20261029_english_final.pptx
@@ -2,19 +2,19 @@
 <file path=ppt/presentation.xml><?xml version="1.0" encoding="utf-8"?>
 <p:presentation xmlns:p="http://schemas.openxmlformats.org/presentationml/2006/main">
   <p:sldMasterIdLst>
-    <p:sldMasterId xmlns:r="http://schemas.openxmlformats.org/officeDocument/2006/relationships" id="2147483648" r:id="Rdfa590dddc3543e5"/>
+    <p:sldMasterId xmlns:r="http://schemas.openxmlformats.org/officeDocument/2006/relationships" id="2147483648" r:id="Rf308f94b18b34d62"/>
   </p:sldMasterIdLst>
   <p:notesMasterIdLst>
-    <p:notesMasterId xmlns:r="http://schemas.openxmlformats.org/officeDocument/2006/relationships" r:id="Rb143149f0eee46ec"/>
+    <p:notesMasterId xmlns:r="http://schemas.openxmlformats.org/officeDocument/2006/relationships" r:id="Rd2e34191d92b40dd"/>
   </p:notesMasterIdLst>
   <p:sldIdLst>
-    <p:sldId xmlns:r="http://schemas.openxmlformats.org/officeDocument/2006/relationships" id="256" r:id="Reddbe7665d5843a2"/>
-    <p:sldId xmlns:r="http://schemas.openxmlformats.org/officeDocument/2006/relationships" id="257" r:id="Rcd35bc86e509448d"/>
-    <p:sldId xmlns:r="http://schemas.openxmlformats.org/officeDocument/2006/relationships" id="258" r:id="Rb06a29f4d6704829"/>
-    <p:sldId xmlns:r="http://schemas.openxmlformats.org/officeDocument/2006/relationships" id="259" r:id="R8a4e8d52555d4578"/>
-    <p:sldId xmlns:r="http://schemas.openxmlformats.org/officeDocument/2006/relationships" id="260" r:id="R252f7c1b18b24f23"/>
-    <p:sldId xmlns:r="http://schemas.openxmlformats.org/officeDocument/2006/relationships" id="261" r:id="R2cf0c1cf2cd74d70"/>
-    <p:sldId xmlns:r="http://schemas.openxmlformats.org/officeDocument/2006/relationships" id="262" r:id="Rcf73cdef08b142a3"/>
+    <p:sldId xmlns:r="http://schemas.openxmlformats.org/officeDocument/2006/relationships" id="256" r:id="Rb539c0c24beb475e"/>
+    <p:sldId xmlns:r="http://schemas.openxmlformats.org/officeDocument/2006/relationships" id="257" r:id="R1a2cb4e75b2646eb"/>
+    <p:sldId xmlns:r="http://schemas.openxmlformats.org/officeDocument/2006/relationships" id="258" r:id="Re2ec917e25a44556"/>
+    <p:sldId xmlns:r="http://schemas.openxmlformats.org/officeDocument/2006/relationships" id="259" r:id="R615b38e118dc4a08"/>
+    <p:sldId xmlns:r="http://schemas.openxmlformats.org/officeDocument/2006/relationships" id="260" r:id="R51e1c74341c047bc"/>
+    <p:sldId xmlns:r="http://schemas.openxmlformats.org/officeDocument/2006/relationships" id="261" r:id="Ra90747cd58984512"/>
+    <p:sldId xmlns:r="http://schemas.openxmlformats.org/officeDocument/2006/relationships" id="262" r:id="Rf0bc18ac014d4af4"/>
   </p:sldIdLst>
   <p:sldSz cx="12192000" cy="6858000"/>
   <p:notesSz cx="6858000" cy="9144000"/>
@@ -658,7 +658,7 @@
           <a:lstStyle xmlns:a="http://schemas.openxmlformats.org/drawingml/2006/main"/>
           <a:p xmlns:a="http://schemas.openxmlformats.org/drawingml/2006/main">
             <a:r>
-              <a:t>Source: results/fov_levels_xavier_full_20261027/README.md; overview.csv; summary.csv. Commit 0f1506c. Date 2026-10-27. Raw evidence: evidence.tar.gz. Mechanism: half-resolution base + padded full-resolution ROI + feather overlay. The full output is 960x540 (1.0x). Region scale is ROI width divided by full-image width: 80x46 =&gt; 0.083333x, 160x90 =&gt; 0.166667x, 320x180 =&gt; 0.333333x, 480x270 =&gt; 0.5x, 640x360 =&gt; 0.666667x. Height approximately follows the same scale; the smallest ROI uses height46 for even alignment, instead of45. ROI extent scale is not sampling resolution: pixels within the ROI remain full-resolution. The base samples at 0.5x width and 0.5x height (480x270) while covering the entire image.</a:t>
+              <a:t>Source: results/fov_scales_full_20261029/scale_results.json and README.md. Same 30W CUDA C++ run: 1068 valid forward odd frames, 3 warmups, 5 timed repetitions per frame, one quality output per configuration/frame. Resident whole-pipeline GPU event timing without internal stage markers, fast resampling, dynamic clocks. This differs from the previous small-sample staged experiment. Mechanism: half-resolution base + padded full-resolution ROI + feather overlay. The full output is 960x540 (1.0x). Region scale is ROI width divided by full-image width: 96x54 =&gt; 0.1x, 240x135 =&gt; 0.25x, 480x270 =&gt; 0.5x, 720x405 =&gt; 0.75x. Width and height both follow these scales. ROI extent scale is not sampling resolution: pixels within the ROI remain full-resolution. The base samples at 0.5x width and 0.5x height (480x270) while covering the entire image.</a:t>
             </a:r>
           </a:p>
         </p:txBody>
@@ -728,7 +728,7 @@
           <a:lstStyle xmlns:a="http://schemas.openxmlformats.org/drawingml/2006/main"/>
           <a:p xmlns:a="http://schemas.openxmlformats.org/drawingml/2006/main">
             <a:r>
-              <a:t>Sources: results/cu_breakdown_xavier_20261029/README.md; results/fov_decode_budget_2ms_20261029/summary.csv. Four workloads, each frame39; 10 warmups and 100 timed runs per path. Arithmetic means of staged resident GPU timelines, not wall time. Full uses the paired baseline from the 2.8% configuration. Fixed decode budget is 2 ms once per frame, not measured joint RGB/depth/flow decoding or measured end-to-end timing. No input/output copies, network or display. Fast resampling enabled. Clearing dominates Full and accounts for about 58% of the Full-to-2.8% reconstruction saving, so the gain cannot be attributed entirely to reduced reprojection computation. No claim of an optimal Full baseline.</a:t>
+              <a:t>Source: results/fov_scales_full_20261029/scale_results.json and README.md. Same 30W CUDA C++ run: 1068 valid forward odd frames, 3 warmups, 5 timed repetitions per frame, one quality output per configuration/frame. Resident whole-pipeline GPU event timing without internal stage markers, fast resampling, dynamic clocks. This differs from the previous small-sample staged experiment. Arithmetic means of all 5340 recorded resident whole-pipeline GPU timings per configuration, not wall time. No internal stage markers. Full uses the paired baseline from the 0.25x configuration. Fixed decode budget is 2 ms once per frame, not measured joint RGB/depth/flow decoding or measured end-to-end timing. No input/output copies, network or display. Savings may include reduced clearing and resampling work; no optimal Full baseline claim.</a:t>
             </a:r>
           </a:p>
         </p:txBody>
@@ -798,7 +798,7 @@
           <a:lstStyle xmlns:a="http://schemas.openxmlformats.org/drawingml/2006/main"/>
           <a:p xmlns:a="http://schemas.openxmlformats.org/drawingml/2006/main">
             <a:r>
-              <a:t>Source: results/fov_levels_xavier_full_20261027/README.md; overview.csv; summary.csv. Commit 0f1506c. Date 2026-10-27. Raw evidence: evidence.tar.gz. Original uint8-overflow PSNR preserved. Stereo delta is derived only if left eye remains unchanged and per-eye PSNR dB is averaged. Quality: 15W, 1068 frames. Timing: separate 30W four-frame CUDA staged GPU experiment; not joint measurements and no new quality equivalence verified. Timing is never divided by two. Latency adds a fixed 2 ms per-frame decode budget once, not measured decoding or end-to-end latency. Source: results/fov_decode_budget_2ms_20261029/summary.csv.</a:t>
+              <a:t>Source: results/fov_scales_full_20261029/scale_results.json and README.md. Same 30W CUDA C++ run: 1068 valid forward odd frames, 3 warmups, 5 timed repetitions per frame, one quality output per configuration/frame. Resident whole-pipeline GPU event timing without internal stage markers, fast resampling, dynamic clocks. This differs from the previous small-sample staged experiment. Original uint8-overflow PSNR preserved. Stereo delta is derived only if left eye remains unchanged and per-eye PSNR dB is averaged. Quality and timing use the same 30W 1068-frame experiment: 3 warmups and 5 timing samples per frame, one quality output per configuration/frame. Timing is never divided by two. Latency adds a fixed 2 ms per-frame decode budget once, not measured decoding or end-to-end latency. Source: results/fov_scales_full_20261029/scale_results.json.</a:t>
             </a:r>
           </a:p>
         </p:txBody>
@@ -915,7 +915,7 @@
           <p:cNvPr id="3" name="Title">
             <a:extLst xmlns:a="http://schemas.openxmlformats.org/drawingml/2006/main">
               <a:ext uri="{FF2B5EF4-FFF2-40B4-BE49-F238E27FC236}">
-                <a16:creationId xmlns:a16="http://schemas.microsoft.com/office/drawing/2014/main" id="{DF09009B-1A47-4272-A1AF-D68F93D8D408}"/>
+                <a16:creationId xmlns:a16="http://schemas.microsoft.com/office/drawing/2014/main" id="{4656B61E-6F12-41FF-82B5-C7DB83FF10A5}"/>
               </a:ext>
             </a:extLst>
           </p:cNvPr>
@@ -1144,7 +1144,7 @@
           <p:cNvPr id="2" name="Subtitle">
             <a:extLst xmlns:a="http://schemas.openxmlformats.org/drawingml/2006/main">
               <a:ext uri="{FF2B5EF4-FFF2-40B4-BE49-F238E27FC236}">
-                <a16:creationId xmlns:a16="http://schemas.microsoft.com/office/drawing/2014/main" id="{7651BADE-C19C-4607-825A-F3D5CEF0D18A}"/>
+                <a16:creationId xmlns:a16="http://schemas.microsoft.com/office/drawing/2014/main" id="{13E56DEB-E7B5-4B7D-9E1D-D9FC17A58799}"/>
               </a:ext>
             </a:extLst>
           </p:cNvPr>
@@ -1390,7 +1390,7 @@
           <p:cNvPr id="2" name="Section title">
             <a:extLst xmlns:a="http://schemas.openxmlformats.org/drawingml/2006/main">
               <a:ext uri="{FF2B5EF4-FFF2-40B4-BE49-F238E27FC236}">
-                <a16:creationId xmlns:a16="http://schemas.microsoft.com/office/drawing/2014/main" id="{74BD0149-78AC-4464-AF1D-C8930323768C}"/>
+                <a16:creationId xmlns:a16="http://schemas.microsoft.com/office/drawing/2014/main" id="{F4C64E40-54CD-4D7E-8241-8C74044B2782}"/>
               </a:ext>
             </a:extLst>
           </p:cNvPr>
@@ -1636,7 +1636,7 @@
           <p:cNvPr id="3" name="Title">
             <a:extLst xmlns:a="http://schemas.openxmlformats.org/drawingml/2006/main">
               <a:ext uri="{FF2B5EF4-FFF2-40B4-BE49-F238E27FC236}">
-                <a16:creationId xmlns:a16="http://schemas.microsoft.com/office/drawing/2014/main" id="{F92AA6D3-9972-4C18-AF53-12E189C62EFD}"/>
+                <a16:creationId xmlns:a16="http://schemas.microsoft.com/office/drawing/2014/main" id="{034EB934-449C-4E12-83DC-0592C95AAE32}"/>
               </a:ext>
             </a:extLst>
           </p:cNvPr>
@@ -1865,7 +1865,7 @@
           <p:cNvPr id="2" name="Body">
             <a:extLst xmlns:a="http://schemas.openxmlformats.org/drawingml/2006/main">
               <a:ext uri="{FF2B5EF4-FFF2-40B4-BE49-F238E27FC236}">
-                <a16:creationId xmlns:a16="http://schemas.microsoft.com/office/drawing/2014/main" id="{DAA1C96D-AD45-466C-8D64-86FA687108C9}"/>
+                <a16:creationId xmlns:a16="http://schemas.microsoft.com/office/drawing/2014/main" id="{F20A3173-92E1-4118-A89A-2ADC1C45EA02}"/>
               </a:ext>
             </a:extLst>
           </p:cNvPr>
@@ -2111,7 +2111,7 @@
           <p:cNvPr id="4" name="Title">
             <a:extLst xmlns:a="http://schemas.openxmlformats.org/drawingml/2006/main">
               <a:ext uri="{FF2B5EF4-FFF2-40B4-BE49-F238E27FC236}">
-                <a16:creationId xmlns:a16="http://schemas.microsoft.com/office/drawing/2014/main" id="{66EA457B-E80C-4F55-B0A0-EE9E4DBB12CE}"/>
+                <a16:creationId xmlns:a16="http://schemas.microsoft.com/office/drawing/2014/main" id="{899173B2-457A-4516-8CCA-782998DAD26B}"/>
               </a:ext>
             </a:extLst>
           </p:cNvPr>
@@ -2340,7 +2340,7 @@
           <p:cNvPr id="2" name="Left column">
             <a:extLst xmlns:a="http://schemas.openxmlformats.org/drawingml/2006/main">
               <a:ext uri="{FF2B5EF4-FFF2-40B4-BE49-F238E27FC236}">
-                <a16:creationId xmlns:a16="http://schemas.microsoft.com/office/drawing/2014/main" id="{BAD570F6-20C3-4265-9E50-E123F543FEE7}"/>
+                <a16:creationId xmlns:a16="http://schemas.microsoft.com/office/drawing/2014/main" id="{47041428-08D6-42BE-8E2C-A1D2C73A9632}"/>
               </a:ext>
             </a:extLst>
           </p:cNvPr>
@@ -2569,7 +2569,7 @@
           <p:cNvPr id="3" name="Right column">
             <a:extLst xmlns:a="http://schemas.openxmlformats.org/drawingml/2006/main">
               <a:ext uri="{FF2B5EF4-FFF2-40B4-BE49-F238E27FC236}">
-                <a16:creationId xmlns:a16="http://schemas.microsoft.com/office/drawing/2014/main" id="{B33ADD3E-A083-4557-B64C-334442F7BEF8}"/>
+                <a16:creationId xmlns:a16="http://schemas.microsoft.com/office/drawing/2014/main" id="{A361810E-580C-4F59-B861-A54ABA3F728B}"/>
               </a:ext>
             </a:extLst>
           </p:cNvPr>
@@ -2815,7 +2815,7 @@
           <p:cNvPr id="3" name="Title">
             <a:extLst xmlns:a="http://schemas.openxmlformats.org/drawingml/2006/main">
               <a:ext uri="{FF2B5EF4-FFF2-40B4-BE49-F238E27FC236}">
-                <a16:creationId xmlns:a16="http://schemas.microsoft.com/office/drawing/2014/main" id="{FCF3CE29-133F-465D-835B-AD89879F852D}"/>
+                <a16:creationId xmlns:a16="http://schemas.microsoft.com/office/drawing/2014/main" id="{C9EDE04E-21E5-4A13-A4F6-CE3C05FCA13E}"/>
               </a:ext>
             </a:extLst>
           </p:cNvPr>
@@ -3044,7 +3044,7 @@
           <p:cNvPr id="2" name="Left column">
             <a:extLst xmlns:a="http://schemas.openxmlformats.org/drawingml/2006/main">
               <a:ext uri="{FF2B5EF4-FFF2-40B4-BE49-F238E27FC236}">
-                <a16:creationId xmlns:a16="http://schemas.microsoft.com/office/drawing/2014/main" id="{427D6870-A1F9-4897-81D5-344E699834EB}"/>
+                <a16:creationId xmlns:a16="http://schemas.microsoft.com/office/drawing/2014/main" id="{CC7E3F32-BC89-457D-B886-659244175253}"/>
               </a:ext>
             </a:extLst>
           </p:cNvPr>
@@ -3311,12 +3311,12 @@
   </p:cSld>
   <p:clrMap bg1="lt1" tx1="dk1" bg2="lt2" tx2="dk2" accent1="accent1" accent2="accent2" accent3="accent3" accent4="accent4" accent5="accent5" accent6="accent6" hlink="hlink" folHlink="folHlink"/>
   <p:sldLayoutIdLst>
-    <p:sldLayoutId xmlns:r="http://schemas.openxmlformats.org/officeDocument/2006/relationships" id="2147483649" r:id="R56a1220e3f764421"/>
-    <p:sldLayoutId xmlns:r="http://schemas.openxmlformats.org/officeDocument/2006/relationships" id="2147483650" r:id="Rdb37c5a3c1f14175"/>
-    <p:sldLayoutId xmlns:r="http://schemas.openxmlformats.org/officeDocument/2006/relationships" id="2147483651" r:id="R0d71e67c7e2a4467"/>
-    <p:sldLayoutId xmlns:r="http://schemas.openxmlformats.org/officeDocument/2006/relationships" id="2147483652" r:id="Recb73b78be3d49e5"/>
-    <p:sldLayoutId xmlns:r="http://schemas.openxmlformats.org/officeDocument/2006/relationships" id="2147483653" r:id="Rdfa5bbec01004df8"/>
-    <p:sldLayoutId xmlns:r="http://schemas.openxmlformats.org/officeDocument/2006/relationships" id="2147483654" r:id="Rcd4490f23ec3440f"/>
+    <p:sldLayoutId xmlns:r="http://schemas.openxmlformats.org/officeDocument/2006/relationships" id="2147483649" r:id="R4e61cfc36b694702"/>
+    <p:sldLayoutId xmlns:r="http://schemas.openxmlformats.org/officeDocument/2006/relationships" id="2147483650" r:id="R82e3c27429bd4427"/>
+    <p:sldLayoutId xmlns:r="http://schemas.openxmlformats.org/officeDocument/2006/relationships" id="2147483651" r:id="Rd3884a5e79154551"/>
+    <p:sldLayoutId xmlns:r="http://schemas.openxmlformats.org/officeDocument/2006/relationships" id="2147483652" r:id="R38ccc95140b94a01"/>
+    <p:sldLayoutId xmlns:r="http://schemas.openxmlformats.org/officeDocument/2006/relationships" id="2147483653" r:id="R2a902b4618f94d45"/>
+    <p:sldLayoutId xmlns:r="http://schemas.openxmlformats.org/officeDocument/2006/relationships" id="2147483654" r:id="Re7d2499ac55a4c90"/>
   </p:sldLayoutIdLst>
   <p:txStyles>
     <p:titleStyle>
@@ -3866,53 +3866,47 @@
           <c:invertIfNegative val="0"/>
           <c:cat>
             <c:strRef>
-              <c:f>'Chart Data'!$A$2:$A$7</c:f>
+              <c:f>'Chart Data'!$A$2:$A$6</c:f>
               <c:strCache>
-                <c:ptCount val="6"/>
+                <c:ptCount val="5"/>
                 <c:pt idx="0">
                   <c:v>Full</c:v>
                 </c:pt>
                 <c:pt idx="1">
-                  <c:v>0.7%</c:v>
+                  <c:v>0.1×</c:v>
                 </c:pt>
                 <c:pt idx="2">
-                  <c:v>2.8%</c:v>
+                  <c:v>0.25×</c:v>
                 </c:pt>
                 <c:pt idx="3">
-                  <c:v>11.1%</c:v>
+                  <c:v>0.5×</c:v>
                 </c:pt>
                 <c:pt idx="4">
-                  <c:v>25.0%</c:v>
-                </c:pt>
-                <c:pt idx="5">
-                  <c:v>44.4%</c:v>
+                  <c:v>0.75×</c:v>
                 </c:pt>
               </c:strCache>
             </c:strRef>
           </c:cat>
           <c:val>
             <c:numRef>
-              <c:f>'Chart Data'!$B$2:$B$7</c:f>
+              <c:f>'Chart Data'!$B$2:$B$6</c:f>
               <c:numCache>
                 <c:formatCode>General</c:formatCode>
-                <c:ptCount val="6"/>
+                <c:ptCount val="5"/>
                 <c:pt idx="0">
-                  <c:v>7.996</c:v>
+                  <c:v>8.882</c:v>
                 </c:pt>
                 <c:pt idx="1">
-                  <c:v>3.248</c:v>
+                  <c:v>3.631</c:v>
                 </c:pt>
                 <c:pt idx="2">
-                  <c:v>3.462</c:v>
+                  <c:v>4.257</c:v>
                 </c:pt>
                 <c:pt idx="3">
-                  <c:v>4.318</c:v>
+                  <c:v>6.158</c:v>
                 </c:pt>
                 <c:pt idx="4">
-                  <c:v>5.637</c:v>
-                </c:pt>
-                <c:pt idx="5">
-                  <c:v>7.543</c:v>
+                  <c:v>9.039</c:v>
                 </c:pt>
               </c:numCache>
             </c:numRef>
@@ -3932,36 +3926,33 @@
           <c:invertIfNegative val="0"/>
           <c:cat>
             <c:strRef>
-              <c:f>'Chart Data'!$C$2:$C$7</c:f>
+              <c:f>'Chart Data'!$C$2:$C$6</c:f>
               <c:strCache>
-                <c:ptCount val="6"/>
+                <c:ptCount val="5"/>
                 <c:pt idx="0">
                   <c:v>Full</c:v>
                 </c:pt>
                 <c:pt idx="1">
-                  <c:v>0.7%</c:v>
+                  <c:v>0.1×</c:v>
                 </c:pt>
                 <c:pt idx="2">
-                  <c:v>2.8%</c:v>
+                  <c:v>0.25×</c:v>
                 </c:pt>
                 <c:pt idx="3">
-                  <c:v>11.1%</c:v>
+                  <c:v>0.5×</c:v>
                 </c:pt>
                 <c:pt idx="4">
-                  <c:v>25.0%</c:v>
-                </c:pt>
-                <c:pt idx="5">
-                  <c:v>44.4%</c:v>
+                  <c:v>0.75×</c:v>
                 </c:pt>
               </c:strCache>
             </c:strRef>
           </c:cat>
           <c:val>
             <c:numRef>
-              <c:f>'Chart Data'!$D$2:$D$7</c:f>
+              <c:f>'Chart Data'!$D$2:$D$6</c:f>
               <c:numCache>
                 <c:formatCode>General</c:formatCode>
-                <c:ptCount val="6"/>
+                <c:ptCount val="5"/>
                 <c:pt idx="0">
                   <c:v>2</c:v>
                 </c:pt>
@@ -3975,9 +3966,6 @@
                   <c:v>2</c:v>
                 </c:pt>
                 <c:pt idx="4">
-                  <c:v>2</c:v>
-                </c:pt>
-                <c:pt idx="5">
                   <c:v>2</c:v>
                 </c:pt>
               </c:numCache>
@@ -4188,7 +4176,7 @@
           <p:cNvPr id="5" name="">
             <a:extLst xmlns:a="http://schemas.openxmlformats.org/drawingml/2006/main">
               <a:ext uri="{FF2B5EF4-FFF2-40B4-BE49-F238E27FC236}">
-                <a16:creationId xmlns:a16="http://schemas.microsoft.com/office/drawing/2014/main" id="{8839185C-01FE-48E9-8E68-11D433472E8F}"/>
+                <a16:creationId xmlns:a16="http://schemas.microsoft.com/office/drawing/2014/main" id="{6231B366-2261-4CA3-A4F6-3C93D194AFB1}"/>
               </a:ext>
             </a:extLst>
           </p:cNvPr>
@@ -4246,7 +4234,7 @@
           <p:cNvPr id="2" name="">
             <a:extLst xmlns:a="http://schemas.openxmlformats.org/drawingml/2006/main">
               <a:ext uri="{FF2B5EF4-FFF2-40B4-BE49-F238E27FC236}">
-                <a16:creationId xmlns:a16="http://schemas.microsoft.com/office/drawing/2014/main" id="{BBCC9B25-B5F1-49D7-A870-7DE736A735F6}"/>
+                <a16:creationId xmlns:a16="http://schemas.microsoft.com/office/drawing/2014/main" id="{92B64A86-41B4-4018-A123-111331AE706C}"/>
               </a:ext>
             </a:extLst>
           </p:cNvPr>
@@ -4291,7 +4279,7 @@
           <p:cNvPr id="3" name="">
             <a:extLst xmlns:a="http://schemas.openxmlformats.org/drawingml/2006/main">
               <a:ext uri="{FF2B5EF4-FFF2-40B4-BE49-F238E27FC236}">
-                <a16:creationId xmlns:a16="http://schemas.microsoft.com/office/drawing/2014/main" id="{DD3926AD-B103-49A7-84B2-3971E0728361}"/>
+                <a16:creationId xmlns:a16="http://schemas.microsoft.com/office/drawing/2014/main" id="{16919AF6-57B0-43BB-9D3B-C7484D24BD81}"/>
               </a:ext>
             </a:extLst>
           </p:cNvPr>
@@ -4336,7 +4324,7 @@
           <p:cNvPr id="4" name="">
             <a:extLst xmlns:a="http://schemas.openxmlformats.org/drawingml/2006/main">
               <a:ext uri="{FF2B5EF4-FFF2-40B4-BE49-F238E27FC236}">
-                <a16:creationId xmlns:a16="http://schemas.microsoft.com/office/drawing/2014/main" id="{4BB6D7B6-E683-4CB7-8FF8-40832E568E3D}"/>
+                <a16:creationId xmlns:a16="http://schemas.microsoft.com/office/drawing/2014/main" id="{4CDA085C-C1D9-447B-B492-95E1492984B9}"/>
               </a:ext>
             </a:extLst>
           </p:cNvPr>
@@ -4379,7 +4367,7 @@
     </p:spTree>
     <p:extLst>
       <p:ext uri="{BB962C8B-B14F-4D97-AF65-F5344CB8AC3E}">
-        <p14:creationId xmlns:p14="http://schemas.microsoft.com/office/powerpoint/2010/main" val="1845059078"/>
+        <p14:creationId xmlns:p14="http://schemas.microsoft.com/office/powerpoint/2010/main" val="908829904"/>
       </p:ext>
     </p:extLst>
   </p:cSld>
@@ -4410,7 +4398,7 @@
           <p:cNvPr id="29" name="">
             <a:extLst xmlns:a="http://schemas.openxmlformats.org/drawingml/2006/main">
               <a:ext uri="{FF2B5EF4-FFF2-40B4-BE49-F238E27FC236}">
-                <a16:creationId xmlns:a16="http://schemas.microsoft.com/office/drawing/2014/main" id="{40889156-0D14-4233-A9F7-DD2D38BC91D0}"/>
+                <a16:creationId xmlns:a16="http://schemas.microsoft.com/office/drawing/2014/main" id="{43B02E36-C599-4A4F-816A-27653C3C660E}"/>
               </a:ext>
             </a:extLst>
           </p:cNvPr>
@@ -4455,7 +4443,7 @@
           <p:cNvPr id="2" name="">
             <a:extLst xmlns:a="http://schemas.openxmlformats.org/drawingml/2006/main">
               <a:ext uri="{FF2B5EF4-FFF2-40B4-BE49-F238E27FC236}">
-                <a16:creationId xmlns:a16="http://schemas.microsoft.com/office/drawing/2014/main" id="{7AFBA3E8-37EC-40F9-96B5-41503E79D16C}"/>
+                <a16:creationId xmlns:a16="http://schemas.microsoft.com/office/drawing/2014/main" id="{C2001038-B31A-4B98-ADC5-6C9BC270A238}"/>
               </a:ext>
             </a:extLst>
           </p:cNvPr>
@@ -4485,7 +4473,7 @@
           <p:cNvPr id="3" name="">
             <a:extLst xmlns:a="http://schemas.openxmlformats.org/drawingml/2006/main">
               <a:ext uri="{FF2B5EF4-FFF2-40B4-BE49-F238E27FC236}">
-                <a16:creationId xmlns:a16="http://schemas.microsoft.com/office/drawing/2014/main" id="{0D9D112C-CD28-4A5E-A1D4-485B66C00625}"/>
+                <a16:creationId xmlns:a16="http://schemas.microsoft.com/office/drawing/2014/main" id="{EA46BDE2-E62C-4BF8-A7B1-8FC97AE5C3C4}"/>
               </a:ext>
             </a:extLst>
           </p:cNvPr>
@@ -4530,7 +4518,7 @@
           <p:cNvPr id="4" name="">
             <a:extLst xmlns:a="http://schemas.openxmlformats.org/drawingml/2006/main">
               <a:ext uri="{FF2B5EF4-FFF2-40B4-BE49-F238E27FC236}">
-                <a16:creationId xmlns:a16="http://schemas.microsoft.com/office/drawing/2014/main" id="{C4C3B468-A151-46B7-999B-708ED9381852}"/>
+                <a16:creationId xmlns:a16="http://schemas.microsoft.com/office/drawing/2014/main" id="{B5B693C0-EAA2-4246-9DDB-633745478776}"/>
               </a:ext>
             </a:extLst>
           </p:cNvPr>
@@ -4575,7 +4563,7 @@
           <p:cNvPr id="5" name="">
             <a:extLst xmlns:a="http://schemas.openxmlformats.org/drawingml/2006/main">
               <a:ext uri="{FF2B5EF4-FFF2-40B4-BE49-F238E27FC236}">
-                <a16:creationId xmlns:a16="http://schemas.microsoft.com/office/drawing/2014/main" id="{D2E6AB31-0113-418D-A4C0-0200BD8A2383}"/>
+                <a16:creationId xmlns:a16="http://schemas.microsoft.com/office/drawing/2014/main" id="{1BBA93F7-732F-47CB-A93D-309FF8CBEBD5}"/>
               </a:ext>
             </a:extLst>
           </p:cNvPr>
@@ -4620,7 +4608,7 @@
           <p:cNvPr id="6" name="">
             <a:extLst xmlns:a="http://schemas.openxmlformats.org/drawingml/2006/main">
               <a:ext uri="{FF2B5EF4-FFF2-40B4-BE49-F238E27FC236}">
-                <a16:creationId xmlns:a16="http://schemas.microsoft.com/office/drawing/2014/main" id="{063279DA-3A5F-44C0-9820-B1F3CA01C409}"/>
+                <a16:creationId xmlns:a16="http://schemas.microsoft.com/office/drawing/2014/main" id="{DA5DA816-2638-41A5-8D72-908D6081B5D8}"/>
               </a:ext>
             </a:extLst>
           </p:cNvPr>
@@ -4652,7 +4640,7 @@
           <p:cNvPr id="7" name="">
             <a:extLst xmlns:a="http://schemas.openxmlformats.org/drawingml/2006/main">
               <a:ext uri="{FF2B5EF4-FFF2-40B4-BE49-F238E27FC236}">
-                <a16:creationId xmlns:a16="http://schemas.microsoft.com/office/drawing/2014/main" id="{342DD79D-C86F-4565-B208-60DB8B234A22}"/>
+                <a16:creationId xmlns:a16="http://schemas.microsoft.com/office/drawing/2014/main" id="{1E79AE19-21E0-4A6E-AA54-9E4433BA4605}"/>
               </a:ext>
             </a:extLst>
           </p:cNvPr>
@@ -4684,7 +4672,7 @@
           <p:cNvPr id="8" name="">
             <a:extLst xmlns:a="http://schemas.openxmlformats.org/drawingml/2006/main">
               <a:ext uri="{FF2B5EF4-FFF2-40B4-BE49-F238E27FC236}">
-                <a16:creationId xmlns:a16="http://schemas.microsoft.com/office/drawing/2014/main" id="{85F02417-D056-4586-BE2B-59F2B6817E75}"/>
+                <a16:creationId xmlns:a16="http://schemas.microsoft.com/office/drawing/2014/main" id="{17B9A4CC-7537-4BDF-81D2-CBCB56115368}"/>
               </a:ext>
             </a:extLst>
           </p:cNvPr>
@@ -4716,7 +4704,7 @@
           <p:cNvPr id="9" name="">
             <a:extLst xmlns:a="http://schemas.openxmlformats.org/drawingml/2006/main">
               <a:ext uri="{FF2B5EF4-FFF2-40B4-BE49-F238E27FC236}">
-                <a16:creationId xmlns:a16="http://schemas.microsoft.com/office/drawing/2014/main" id="{D3CF5134-F031-496E-B91C-2CCB310E687F}"/>
+                <a16:creationId xmlns:a16="http://schemas.microsoft.com/office/drawing/2014/main" id="{9E746EE6-9B3A-484A-8FC4-A8DDA27F37F1}"/>
               </a:ext>
             </a:extLst>
           </p:cNvPr>
@@ -4761,7 +4749,7 @@
           <p:cNvPr id="10" name="">
             <a:extLst xmlns:a="http://schemas.openxmlformats.org/drawingml/2006/main">
               <a:ext uri="{FF2B5EF4-FFF2-40B4-BE49-F238E27FC236}">
-                <a16:creationId xmlns:a16="http://schemas.microsoft.com/office/drawing/2014/main" id="{E144674D-F33D-4B17-9C2D-D1DC5A794903}"/>
+                <a16:creationId xmlns:a16="http://schemas.microsoft.com/office/drawing/2014/main" id="{DD55872A-81A7-4779-BF5D-67081D1DDB71}"/>
               </a:ext>
             </a:extLst>
           </p:cNvPr>
@@ -4791,7 +4779,7 @@
           <p:cNvPr id="11" name="">
             <a:extLst xmlns:a="http://schemas.openxmlformats.org/drawingml/2006/main">
               <a:ext uri="{FF2B5EF4-FFF2-40B4-BE49-F238E27FC236}">
-                <a16:creationId xmlns:a16="http://schemas.microsoft.com/office/drawing/2014/main" id="{5B1812AF-268D-4C19-A6C9-A77F1B1F669E}"/>
+                <a16:creationId xmlns:a16="http://schemas.microsoft.com/office/drawing/2014/main" id="{F4B628EA-B1A2-4027-B614-857317F382C4}"/>
               </a:ext>
             </a:extLst>
           </p:cNvPr>
@@ -4836,7 +4824,7 @@
           <p:cNvPr id="12" name="">
             <a:extLst xmlns:a="http://schemas.openxmlformats.org/drawingml/2006/main">
               <a:ext uri="{FF2B5EF4-FFF2-40B4-BE49-F238E27FC236}">
-                <a16:creationId xmlns:a16="http://schemas.microsoft.com/office/drawing/2014/main" id="{5150D6F9-C8EB-44A6-A6DD-51EA68FBE4CB}"/>
+                <a16:creationId xmlns:a16="http://schemas.microsoft.com/office/drawing/2014/main" id="{74EF305D-ADCE-48B5-9E8C-0C274BD437CB}"/>
               </a:ext>
             </a:extLst>
           </p:cNvPr>
@@ -4868,7 +4856,7 @@
           <p:cNvPr id="13" name="">
             <a:extLst xmlns:a="http://schemas.openxmlformats.org/drawingml/2006/main">
               <a:ext uri="{FF2B5EF4-FFF2-40B4-BE49-F238E27FC236}">
-                <a16:creationId xmlns:a16="http://schemas.microsoft.com/office/drawing/2014/main" id="{30449A39-7FDB-4443-A6E0-59FD68A8DA1F}"/>
+                <a16:creationId xmlns:a16="http://schemas.microsoft.com/office/drawing/2014/main" id="{3B04BFB6-0905-4D94-8724-91EDE16AE2F5}"/>
               </a:ext>
             </a:extLst>
           </p:cNvPr>
@@ -4900,7 +4888,7 @@
           <p:cNvPr id="14" name="">
             <a:extLst xmlns:a="http://schemas.openxmlformats.org/drawingml/2006/main">
               <a:ext uri="{FF2B5EF4-FFF2-40B4-BE49-F238E27FC236}">
-                <a16:creationId xmlns:a16="http://schemas.microsoft.com/office/drawing/2014/main" id="{44478E5B-4CF3-4388-B4C3-8467765F43AF}"/>
+                <a16:creationId xmlns:a16="http://schemas.microsoft.com/office/drawing/2014/main" id="{44AE3A98-44CF-4F77-BBEB-CC17A61D2AAA}"/>
               </a:ext>
             </a:extLst>
           </p:cNvPr>
@@ -4932,7 +4920,7 @@
           <p:cNvPr id="15" name="">
             <a:extLst xmlns:a="http://schemas.openxmlformats.org/drawingml/2006/main">
               <a:ext uri="{FF2B5EF4-FFF2-40B4-BE49-F238E27FC236}">
-                <a16:creationId xmlns:a16="http://schemas.microsoft.com/office/drawing/2014/main" id="{E759F7FA-B562-4D0C-9458-7912B2CB4A11}"/>
+                <a16:creationId xmlns:a16="http://schemas.microsoft.com/office/drawing/2014/main" id="{A9FB1F65-409A-44AC-86E1-8FB224D28D88}"/>
               </a:ext>
             </a:extLst>
           </p:cNvPr>
@@ -4977,7 +4965,7 @@
           <p:cNvPr id="16" name="">
             <a:extLst xmlns:a="http://schemas.openxmlformats.org/drawingml/2006/main">
               <a:ext uri="{FF2B5EF4-FFF2-40B4-BE49-F238E27FC236}">
-                <a16:creationId xmlns:a16="http://schemas.microsoft.com/office/drawing/2014/main" id="{7BBFB918-8402-4C93-B258-E3158B51EC69}"/>
+                <a16:creationId xmlns:a16="http://schemas.microsoft.com/office/drawing/2014/main" id="{51C6E4FB-48D6-47E3-9BFF-FB5AC3AA790C}"/>
               </a:ext>
             </a:extLst>
           </p:cNvPr>
@@ -5007,7 +4995,7 @@
           <p:cNvPr id="17" name="">
             <a:extLst xmlns:a="http://schemas.openxmlformats.org/drawingml/2006/main">
               <a:ext uri="{FF2B5EF4-FFF2-40B4-BE49-F238E27FC236}">
-                <a16:creationId xmlns:a16="http://schemas.microsoft.com/office/drawing/2014/main" id="{D71FD7E6-A4D8-4AEB-88B6-AE1F3F6F82DA}"/>
+                <a16:creationId xmlns:a16="http://schemas.microsoft.com/office/drawing/2014/main" id="{41D9E7B1-678B-4C9E-B5FB-E995D3A31D06}"/>
               </a:ext>
             </a:extLst>
           </p:cNvPr>
@@ -5052,7 +5040,7 @@
           <p:cNvPr id="18" name="">
             <a:extLst xmlns:a="http://schemas.openxmlformats.org/drawingml/2006/main">
               <a:ext uri="{FF2B5EF4-FFF2-40B4-BE49-F238E27FC236}">
-                <a16:creationId xmlns:a16="http://schemas.microsoft.com/office/drawing/2014/main" id="{67790418-9369-4D10-8321-415940EB71A0}"/>
+                <a16:creationId xmlns:a16="http://schemas.microsoft.com/office/drawing/2014/main" id="{AC7311ED-961E-4DE7-9D8E-49CCAEE48D10}"/>
               </a:ext>
             </a:extLst>
           </p:cNvPr>
@@ -5084,7 +5072,7 @@
           <p:cNvPr id="19" name="">
             <a:extLst xmlns:a="http://schemas.openxmlformats.org/drawingml/2006/main">
               <a:ext uri="{FF2B5EF4-FFF2-40B4-BE49-F238E27FC236}">
-                <a16:creationId xmlns:a16="http://schemas.microsoft.com/office/drawing/2014/main" id="{B5B3ACBC-3BC9-450F-8B81-52DD49042863}"/>
+                <a16:creationId xmlns:a16="http://schemas.microsoft.com/office/drawing/2014/main" id="{04859C60-0F59-487D-85B1-E3042BA26C64}"/>
               </a:ext>
             </a:extLst>
           </p:cNvPr>
@@ -5116,7 +5104,7 @@
           <p:cNvPr id="20" name="">
             <a:extLst xmlns:a="http://schemas.openxmlformats.org/drawingml/2006/main">
               <a:ext uri="{FF2B5EF4-FFF2-40B4-BE49-F238E27FC236}">
-                <a16:creationId xmlns:a16="http://schemas.microsoft.com/office/drawing/2014/main" id="{9973351F-262A-4398-8909-31892CCA2E85}"/>
+                <a16:creationId xmlns:a16="http://schemas.microsoft.com/office/drawing/2014/main" id="{05CB488B-C44B-49E9-8041-0883188557CE}"/>
               </a:ext>
             </a:extLst>
           </p:cNvPr>
@@ -5148,7 +5136,7 @@
           <p:cNvPr id="21" name="">
             <a:extLst xmlns:a="http://schemas.openxmlformats.org/drawingml/2006/main">
               <a:ext uri="{FF2B5EF4-FFF2-40B4-BE49-F238E27FC236}">
-                <a16:creationId xmlns:a16="http://schemas.microsoft.com/office/drawing/2014/main" id="{2266F7D3-B078-444D-BA1C-0C9B19A04BAD}"/>
+                <a16:creationId xmlns:a16="http://schemas.microsoft.com/office/drawing/2014/main" id="{837D9F8B-4CD0-4CFA-AFB0-23DD83A296EF}"/>
               </a:ext>
             </a:extLst>
           </p:cNvPr>
@@ -5193,7 +5181,7 @@
           <p:cNvPr id="22" name="">
             <a:extLst xmlns:a="http://schemas.openxmlformats.org/drawingml/2006/main">
               <a:ext uri="{FF2B5EF4-FFF2-40B4-BE49-F238E27FC236}">
-                <a16:creationId xmlns:a16="http://schemas.microsoft.com/office/drawing/2014/main" id="{D05B0D14-396F-4EA8-AEF2-F6E3986C7836}"/>
+                <a16:creationId xmlns:a16="http://schemas.microsoft.com/office/drawing/2014/main" id="{996F28F0-E659-4D9A-87F4-60CC48C05C27}"/>
               </a:ext>
             </a:extLst>
           </p:cNvPr>
@@ -5223,7 +5211,7 @@
           <p:cNvPr id="23" name="">
             <a:extLst xmlns:a="http://schemas.openxmlformats.org/drawingml/2006/main">
               <a:ext uri="{FF2B5EF4-FFF2-40B4-BE49-F238E27FC236}">
-                <a16:creationId xmlns:a16="http://schemas.microsoft.com/office/drawing/2014/main" id="{4D389395-F859-43DE-9FA6-1C5AA1B008A3}"/>
+                <a16:creationId xmlns:a16="http://schemas.microsoft.com/office/drawing/2014/main" id="{6B84ED23-FEDC-423A-906C-CFB7A0B54CD8}"/>
               </a:ext>
             </a:extLst>
           </p:cNvPr>
@@ -5253,7 +5241,7 @@
           <p:cNvPr id="24" name="">
             <a:extLst xmlns:a="http://schemas.openxmlformats.org/drawingml/2006/main">
               <a:ext uri="{FF2B5EF4-FFF2-40B4-BE49-F238E27FC236}">
-                <a16:creationId xmlns:a16="http://schemas.microsoft.com/office/drawing/2014/main" id="{EA5CD671-9298-47D5-AB30-EA232745E808}"/>
+                <a16:creationId xmlns:a16="http://schemas.microsoft.com/office/drawing/2014/main" id="{EBF8C550-3C16-4011-94F6-8846C615B67A}"/>
               </a:ext>
             </a:extLst>
           </p:cNvPr>
@@ -5298,7 +5286,7 @@
           <p:cNvPr id="25" name="">
             <a:extLst xmlns:a="http://schemas.openxmlformats.org/drawingml/2006/main">
               <a:ext uri="{FF2B5EF4-FFF2-40B4-BE49-F238E27FC236}">
-                <a16:creationId xmlns:a16="http://schemas.microsoft.com/office/drawing/2014/main" id="{46C4900D-D60D-4953-9336-51E315F3F84B}"/>
+                <a16:creationId xmlns:a16="http://schemas.microsoft.com/office/drawing/2014/main" id="{0A39B664-F2AE-4C2A-A109-CD81D22F9CD7}"/>
               </a:ext>
             </a:extLst>
           </p:cNvPr>
@@ -5343,7 +5331,7 @@
           <p:cNvPr id="26" name="">
             <a:extLst xmlns:a="http://schemas.openxmlformats.org/drawingml/2006/main">
               <a:ext uri="{FF2B5EF4-FFF2-40B4-BE49-F238E27FC236}">
-                <a16:creationId xmlns:a16="http://schemas.microsoft.com/office/drawing/2014/main" id="{6356077A-D621-4F95-9B34-56913F862669}"/>
+                <a16:creationId xmlns:a16="http://schemas.microsoft.com/office/drawing/2014/main" id="{E45C719B-4085-498E-B153-C067208A04F2}"/>
               </a:ext>
             </a:extLst>
           </p:cNvPr>
@@ -5388,7 +5376,7 @@
           <p:cNvPr id="27" name="">
             <a:extLst xmlns:a="http://schemas.openxmlformats.org/drawingml/2006/main">
               <a:ext uri="{FF2B5EF4-FFF2-40B4-BE49-F238E27FC236}">
-                <a16:creationId xmlns:a16="http://schemas.microsoft.com/office/drawing/2014/main" id="{2D68AF76-8A31-4F7C-ACC4-82D4B8D31A4A}"/>
+                <a16:creationId xmlns:a16="http://schemas.microsoft.com/office/drawing/2014/main" id="{972677C9-24FC-4F68-AE9D-E745C0F4CF3D}"/>
               </a:ext>
             </a:extLst>
           </p:cNvPr>
@@ -5433,7 +5421,7 @@
           <p:cNvPr id="28" name="">
             <a:extLst xmlns:a="http://schemas.openxmlformats.org/drawingml/2006/main">
               <a:ext uri="{FF2B5EF4-FFF2-40B4-BE49-F238E27FC236}">
-                <a16:creationId xmlns:a16="http://schemas.microsoft.com/office/drawing/2014/main" id="{60C9C0CE-3DFA-46E8-B4EF-F2636F72A8F4}"/>
+                <a16:creationId xmlns:a16="http://schemas.microsoft.com/office/drawing/2014/main" id="{99010137-F9FF-4BF4-B84F-81B5BF9E7160}"/>
               </a:ext>
             </a:extLst>
           </p:cNvPr>
@@ -5476,7 +5464,7 @@
     </p:spTree>
     <p:extLst>
       <p:ext uri="{BB962C8B-B14F-4D97-AF65-F5344CB8AC3E}">
-        <p14:creationId xmlns:p14="http://schemas.microsoft.com/office/powerpoint/2010/main" val="1409362772"/>
+        <p14:creationId xmlns:p14="http://schemas.microsoft.com/office/powerpoint/2010/main" val="642412264"/>
       </p:ext>
     </p:extLst>
   </p:cSld>
@@ -5507,7 +5495,7 @@
           <p:cNvPr id="15" name="">
             <a:extLst xmlns:a="http://schemas.openxmlformats.org/drawingml/2006/main">
               <a:ext uri="{FF2B5EF4-FFF2-40B4-BE49-F238E27FC236}">
-                <a16:creationId xmlns:a16="http://schemas.microsoft.com/office/drawing/2014/main" id="{6CA318F4-ADA3-4F82-A7E5-1F9C5BF427A3}"/>
+                <a16:creationId xmlns:a16="http://schemas.microsoft.com/office/drawing/2014/main" id="{765A061E-2B64-45FD-A7D0-80D5A98A62C2}"/>
               </a:ext>
             </a:extLst>
           </p:cNvPr>
@@ -5552,7 +5540,7 @@
           <p:cNvPr id="2" name="">
             <a:extLst xmlns:a="http://schemas.openxmlformats.org/drawingml/2006/main">
               <a:ext uri="{FF2B5EF4-FFF2-40B4-BE49-F238E27FC236}">
-                <a16:creationId xmlns:a16="http://schemas.microsoft.com/office/drawing/2014/main" id="{1551F25F-479F-4A1A-9DDD-8CE04CE68DBE}"/>
+                <a16:creationId xmlns:a16="http://schemas.microsoft.com/office/drawing/2014/main" id="{4C224ABD-D0AF-4831-B542-C2A23BDC3593}"/>
               </a:ext>
             </a:extLst>
           </p:cNvPr>
@@ -5582,7 +5570,7 @@
           <p:cNvPr id="3" name="">
             <a:extLst xmlns:a="http://schemas.openxmlformats.org/drawingml/2006/main">
               <a:ext uri="{FF2B5EF4-FFF2-40B4-BE49-F238E27FC236}">
-                <a16:creationId xmlns:a16="http://schemas.microsoft.com/office/drawing/2014/main" id="{9A8182CE-5FA7-4CF6-B813-3AD3EAFBFAFF}"/>
+                <a16:creationId xmlns:a16="http://schemas.microsoft.com/office/drawing/2014/main" id="{47AF6682-BAE4-4394-8690-6E79D912B81B}"/>
               </a:ext>
             </a:extLst>
           </p:cNvPr>
@@ -5627,7 +5615,7 @@
           <p:cNvPr id="4" name="">
             <a:extLst xmlns:a="http://schemas.openxmlformats.org/drawingml/2006/main">
               <a:ext uri="{FF2B5EF4-FFF2-40B4-BE49-F238E27FC236}">
-                <a16:creationId xmlns:a16="http://schemas.microsoft.com/office/drawing/2014/main" id="{06158392-017D-4F5B-95C7-4C215A1149AF}"/>
+                <a16:creationId xmlns:a16="http://schemas.microsoft.com/office/drawing/2014/main" id="{A2F14EDE-D2BC-4D69-986C-302916D13825}"/>
               </a:ext>
             </a:extLst>
           </p:cNvPr>
@@ -5672,7 +5660,7 @@
           <p:cNvPr id="5" name="">
             <a:extLst xmlns:a="http://schemas.openxmlformats.org/drawingml/2006/main">
               <a:ext uri="{FF2B5EF4-FFF2-40B4-BE49-F238E27FC236}">
-                <a16:creationId xmlns:a16="http://schemas.microsoft.com/office/drawing/2014/main" id="{C50EC432-D71D-464D-B3C0-7AF4DEF4EB04}"/>
+                <a16:creationId xmlns:a16="http://schemas.microsoft.com/office/drawing/2014/main" id="{F679DFA3-755C-41E1-AAC9-56B3C0281CD7}"/>
               </a:ext>
             </a:extLst>
           </p:cNvPr>
@@ -5704,7 +5692,7 @@
           <p:cNvPr id="6" name="">
             <a:extLst xmlns:a="http://schemas.openxmlformats.org/drawingml/2006/main">
               <a:ext uri="{FF2B5EF4-FFF2-40B4-BE49-F238E27FC236}">
-                <a16:creationId xmlns:a16="http://schemas.microsoft.com/office/drawing/2014/main" id="{CC2CD2D0-A0FC-4CE1-8556-FBC272F32C57}"/>
+                <a16:creationId xmlns:a16="http://schemas.microsoft.com/office/drawing/2014/main" id="{E06DC108-746A-4105-BCAA-8B013835961A}"/>
               </a:ext>
             </a:extLst>
           </p:cNvPr>
@@ -5736,7 +5724,7 @@
           <p:cNvPr id="7" name="">
             <a:extLst xmlns:a="http://schemas.openxmlformats.org/drawingml/2006/main">
               <a:ext uri="{FF2B5EF4-FFF2-40B4-BE49-F238E27FC236}">
-                <a16:creationId xmlns:a16="http://schemas.microsoft.com/office/drawing/2014/main" id="{0923FC36-C0DF-47EB-BBBF-6C2F22B53F79}"/>
+                <a16:creationId xmlns:a16="http://schemas.microsoft.com/office/drawing/2014/main" id="{B97F84B9-7426-4B5B-A8AE-33281E7BE891}"/>
               </a:ext>
             </a:extLst>
           </p:cNvPr>
@@ -5768,7 +5756,7 @@
           <p:cNvPr id="8" name="">
             <a:extLst xmlns:a="http://schemas.openxmlformats.org/drawingml/2006/main">
               <a:ext uri="{FF2B5EF4-FFF2-40B4-BE49-F238E27FC236}">
-                <a16:creationId xmlns:a16="http://schemas.microsoft.com/office/drawing/2014/main" id="{E9406F8D-7381-4317-9570-3F24E8595381}"/>
+                <a16:creationId xmlns:a16="http://schemas.microsoft.com/office/drawing/2014/main" id="{EE37B65E-7CED-47B6-9D4D-5E25CAA8C0A3}"/>
               </a:ext>
             </a:extLst>
           </p:cNvPr>
@@ -5813,7 +5801,7 @@
           <p:cNvPr id="9" name="">
             <a:extLst xmlns:a="http://schemas.openxmlformats.org/drawingml/2006/main">
               <a:ext uri="{FF2B5EF4-FFF2-40B4-BE49-F238E27FC236}">
-                <a16:creationId xmlns:a16="http://schemas.microsoft.com/office/drawing/2014/main" id="{F324F411-56E3-49DE-8ACF-5848DCBCB53E}"/>
+                <a16:creationId xmlns:a16="http://schemas.microsoft.com/office/drawing/2014/main" id="{6FCC6E87-8B8C-4D15-AEC0-2E55DB751426}"/>
               </a:ext>
             </a:extLst>
           </p:cNvPr>
@@ -5858,7 +5846,7 @@
           <p:cNvPr id="10" name="">
             <a:extLst xmlns:a="http://schemas.openxmlformats.org/drawingml/2006/main">
               <a:ext uri="{FF2B5EF4-FFF2-40B4-BE49-F238E27FC236}">
-                <a16:creationId xmlns:a16="http://schemas.microsoft.com/office/drawing/2014/main" id="{14959647-6806-4C2B-BEDD-9528253068B8}"/>
+                <a16:creationId xmlns:a16="http://schemas.microsoft.com/office/drawing/2014/main" id="{3122CAE1-D0BC-4019-8344-8E8CFC147D33}"/>
               </a:ext>
             </a:extLst>
           </p:cNvPr>
@@ -5890,7 +5878,7 @@
           <p:cNvPr id="11" name="">
             <a:extLst xmlns:a="http://schemas.openxmlformats.org/drawingml/2006/main">
               <a:ext uri="{FF2B5EF4-FFF2-40B4-BE49-F238E27FC236}">
-                <a16:creationId xmlns:a16="http://schemas.microsoft.com/office/drawing/2014/main" id="{671CCFD7-C78B-44DB-8759-DDB7CFEB13B7}"/>
+                <a16:creationId xmlns:a16="http://schemas.microsoft.com/office/drawing/2014/main" id="{90E444CD-C497-4B92-95A6-9F51514CB853}"/>
               </a:ext>
             </a:extLst>
           </p:cNvPr>
@@ -5922,7 +5910,7 @@
           <p:cNvPr id="12" name="">
             <a:extLst xmlns:a="http://schemas.openxmlformats.org/drawingml/2006/main">
               <a:ext uri="{FF2B5EF4-FFF2-40B4-BE49-F238E27FC236}">
-                <a16:creationId xmlns:a16="http://schemas.microsoft.com/office/drawing/2014/main" id="{EC192CC3-3BA5-4E45-AA27-9176397A5252}"/>
+                <a16:creationId xmlns:a16="http://schemas.microsoft.com/office/drawing/2014/main" id="{3F30FBFC-02D3-4EC0-AC28-0F3A650241DF}"/>
               </a:ext>
             </a:extLst>
           </p:cNvPr>
@@ -5954,7 +5942,7 @@
           <p:cNvPr id="13" name="">
             <a:extLst xmlns:a="http://schemas.openxmlformats.org/drawingml/2006/main">
               <a:ext uri="{FF2B5EF4-FFF2-40B4-BE49-F238E27FC236}">
-                <a16:creationId xmlns:a16="http://schemas.microsoft.com/office/drawing/2014/main" id="{45399602-0D6B-4F66-B196-C16617BBD894}"/>
+                <a16:creationId xmlns:a16="http://schemas.microsoft.com/office/drawing/2014/main" id="{96F9E5DA-1B5B-4167-BC57-4D5EF226760A}"/>
               </a:ext>
             </a:extLst>
           </p:cNvPr>
@@ -5999,7 +5987,7 @@
           <p:cNvPr id="14" name="">
             <a:extLst xmlns:a="http://schemas.openxmlformats.org/drawingml/2006/main">
               <a:ext uri="{FF2B5EF4-FFF2-40B4-BE49-F238E27FC236}">
-                <a16:creationId xmlns:a16="http://schemas.microsoft.com/office/drawing/2014/main" id="{FAF618C8-29F6-4152-A5FB-4237E39A7076}"/>
+                <a16:creationId xmlns:a16="http://schemas.microsoft.com/office/drawing/2014/main" id="{C09C3F46-2449-405D-BB5A-6094E3FEBF31}"/>
               </a:ext>
             </a:extLst>
           </p:cNvPr>
@@ -6042,7 +6030,7 @@
     </p:spTree>
     <p:extLst>
       <p:ext uri="{BB962C8B-B14F-4D97-AF65-F5344CB8AC3E}">
-        <p14:creationId xmlns:p14="http://schemas.microsoft.com/office/powerpoint/2010/main" val="520135501"/>
+        <p14:creationId xmlns:p14="http://schemas.microsoft.com/office/powerpoint/2010/main" val="2147422174"/>
       </p:ext>
     </p:extLst>
   </p:cSld>
@@ -6073,7 +6061,7 @@
           <p:cNvPr id="20" name="">
             <a:extLst xmlns:a="http://schemas.openxmlformats.org/drawingml/2006/main">
               <a:ext uri="{FF2B5EF4-FFF2-40B4-BE49-F238E27FC236}">
-                <a16:creationId xmlns:a16="http://schemas.microsoft.com/office/drawing/2014/main" id="{B590E7BC-F5E2-414A-AC52-863D442E1D29}"/>
+                <a16:creationId xmlns:a16="http://schemas.microsoft.com/office/drawing/2014/main" id="{410B444B-C51E-4889-88B1-CE3E85C447D1}"/>
               </a:ext>
             </a:extLst>
           </p:cNvPr>
@@ -6118,7 +6106,7 @@
           <p:cNvPr id="2" name="">
             <a:extLst xmlns:a="http://schemas.openxmlformats.org/drawingml/2006/main">
               <a:ext uri="{FF2B5EF4-FFF2-40B4-BE49-F238E27FC236}">
-                <a16:creationId xmlns:a16="http://schemas.microsoft.com/office/drawing/2014/main" id="{09311848-0E3F-4D59-8A38-88896869BAFF}"/>
+                <a16:creationId xmlns:a16="http://schemas.microsoft.com/office/drawing/2014/main" id="{8BDE328E-5218-49CB-98CC-EE33768887AD}"/>
               </a:ext>
             </a:extLst>
           </p:cNvPr>
@@ -6148,7 +6136,7 @@
           <p:cNvPr id="3" name="">
             <a:extLst xmlns:a="http://schemas.openxmlformats.org/drawingml/2006/main">
               <a:ext uri="{FF2B5EF4-FFF2-40B4-BE49-F238E27FC236}">
-                <a16:creationId xmlns:a16="http://schemas.microsoft.com/office/drawing/2014/main" id="{DB7B14C4-A3A3-437F-829F-C3366F696123}"/>
+                <a16:creationId xmlns:a16="http://schemas.microsoft.com/office/drawing/2014/main" id="{8E2AAEEF-B888-4FE0-B4DE-F3CF99C15DA1}"/>
               </a:ext>
             </a:extLst>
           </p:cNvPr>
@@ -6193,7 +6181,7 @@
           <p:cNvPr id="4" name="">
             <a:extLst xmlns:a="http://schemas.openxmlformats.org/drawingml/2006/main">
               <a:ext uri="{FF2B5EF4-FFF2-40B4-BE49-F238E27FC236}">
-                <a16:creationId xmlns:a16="http://schemas.microsoft.com/office/drawing/2014/main" id="{32CA59B4-FA89-44A1-99D7-724FB0F08AB5}"/>
+                <a16:creationId xmlns:a16="http://schemas.microsoft.com/office/drawing/2014/main" id="{3693E3B2-DF85-4C0E-AA5D-9E0C3D4CCC4D}"/>
               </a:ext>
             </a:extLst>
           </p:cNvPr>
@@ -6238,7 +6226,7 @@
           <p:cNvPr id="5" name="">
             <a:extLst xmlns:a="http://schemas.openxmlformats.org/drawingml/2006/main">
               <a:ext uri="{FF2B5EF4-FFF2-40B4-BE49-F238E27FC236}">
-                <a16:creationId xmlns:a16="http://schemas.microsoft.com/office/drawing/2014/main" id="{D4B6C474-24DB-45FD-B544-7E797567C1CD}"/>
+                <a16:creationId xmlns:a16="http://schemas.microsoft.com/office/drawing/2014/main" id="{17BC88C0-3C43-4EF0-8760-B951C1C232A4}"/>
               </a:ext>
             </a:extLst>
           </p:cNvPr>
@@ -6270,7 +6258,7 @@
           <p:cNvPr id="6" name="">
             <a:extLst xmlns:a="http://schemas.openxmlformats.org/drawingml/2006/main">
               <a:ext uri="{FF2B5EF4-FFF2-40B4-BE49-F238E27FC236}">
-                <a16:creationId xmlns:a16="http://schemas.microsoft.com/office/drawing/2014/main" id="{70E5C0ED-197E-49DC-9B2E-82474062517B}"/>
+                <a16:creationId xmlns:a16="http://schemas.microsoft.com/office/drawing/2014/main" id="{9E320794-C25A-4839-8860-EA2B91A2CDAD}"/>
               </a:ext>
             </a:extLst>
           </p:cNvPr>
@@ -6341,7 +6329,7 @@
           <p:cNvPr id="7" name="">
             <a:extLst xmlns:a="http://schemas.openxmlformats.org/drawingml/2006/main">
               <a:ext uri="{FF2B5EF4-FFF2-40B4-BE49-F238E27FC236}">
-                <a16:creationId xmlns:a16="http://schemas.microsoft.com/office/drawing/2014/main" id="{8558AE41-8932-445C-90D5-E48CECC27755}"/>
+                <a16:creationId xmlns:a16="http://schemas.microsoft.com/office/drawing/2014/main" id="{DCC9342B-A440-49DC-A3B7-9F514187F553}"/>
               </a:ext>
             </a:extLst>
           </p:cNvPr>
@@ -6386,7 +6374,7 @@
           <p:cNvPr id="8" name="">
             <a:extLst xmlns:a="http://schemas.openxmlformats.org/drawingml/2006/main">
               <a:ext uri="{FF2B5EF4-FFF2-40B4-BE49-F238E27FC236}">
-                <a16:creationId xmlns:a16="http://schemas.microsoft.com/office/drawing/2014/main" id="{03650FF8-98B7-4E6E-9DE9-A9F2A655B22B}"/>
+                <a16:creationId xmlns:a16="http://schemas.microsoft.com/office/drawing/2014/main" id="{0A28EABF-FB5A-4E81-9942-5539C8CFD18D}"/>
               </a:ext>
             </a:extLst>
           </p:cNvPr>
@@ -6418,7 +6406,7 @@
           <p:cNvPr id="9" name="">
             <a:extLst xmlns:a="http://schemas.openxmlformats.org/drawingml/2006/main">
               <a:ext uri="{FF2B5EF4-FFF2-40B4-BE49-F238E27FC236}">
-                <a16:creationId xmlns:a16="http://schemas.microsoft.com/office/drawing/2014/main" id="{338A9744-7733-4338-B2EA-754BBD0111EC}"/>
+                <a16:creationId xmlns:a16="http://schemas.microsoft.com/office/drawing/2014/main" id="{632C8C73-9262-4AF5-9396-22D5E0F0C946}"/>
               </a:ext>
             </a:extLst>
           </p:cNvPr>
@@ -6450,7 +6438,7 @@
           <p:cNvPr id="10" name="">
             <a:extLst xmlns:a="http://schemas.openxmlformats.org/drawingml/2006/main">
               <a:ext uri="{FF2B5EF4-FFF2-40B4-BE49-F238E27FC236}">
-                <a16:creationId xmlns:a16="http://schemas.microsoft.com/office/drawing/2014/main" id="{64E1D8D4-54D2-4F20-B837-C90A7FD111D7}"/>
+                <a16:creationId xmlns:a16="http://schemas.microsoft.com/office/drawing/2014/main" id="{9E30B800-F6DC-4818-8318-6382A45402B7}"/>
               </a:ext>
             </a:extLst>
           </p:cNvPr>
@@ -6495,7 +6483,7 @@
           <p:cNvPr id="11" name="">
             <a:extLst xmlns:a="http://schemas.openxmlformats.org/drawingml/2006/main">
               <a:ext uri="{FF2B5EF4-FFF2-40B4-BE49-F238E27FC236}">
-                <a16:creationId xmlns:a16="http://schemas.microsoft.com/office/drawing/2014/main" id="{6E0CA3C0-C7FE-4D04-A534-0407DD321B55}"/>
+                <a16:creationId xmlns:a16="http://schemas.microsoft.com/office/drawing/2014/main" id="{3189AC21-4931-4CED-992A-4605D2AE02FE}"/>
               </a:ext>
             </a:extLst>
           </p:cNvPr>
@@ -6540,7 +6528,7 @@
           <p:cNvPr id="12" name="">
             <a:extLst xmlns:a="http://schemas.openxmlformats.org/drawingml/2006/main">
               <a:ext uri="{FF2B5EF4-FFF2-40B4-BE49-F238E27FC236}">
-                <a16:creationId xmlns:a16="http://schemas.microsoft.com/office/drawing/2014/main" id="{ADAE545E-C88B-45D1-BE3D-904282A5F47D}"/>
+                <a16:creationId xmlns:a16="http://schemas.microsoft.com/office/drawing/2014/main" id="{052E2D93-2AE9-45E0-AECF-896A487E2706}"/>
               </a:ext>
             </a:extLst>
           </p:cNvPr>
@@ -6585,7 +6573,7 @@
           <p:cNvPr id="13" name="">
             <a:extLst xmlns:a="http://schemas.openxmlformats.org/drawingml/2006/main">
               <a:ext uri="{FF2B5EF4-FFF2-40B4-BE49-F238E27FC236}">
-                <a16:creationId xmlns:a16="http://schemas.microsoft.com/office/drawing/2014/main" id="{340BC6D5-EF0D-49EC-8B90-982C96F689DB}"/>
+                <a16:creationId xmlns:a16="http://schemas.microsoft.com/office/drawing/2014/main" id="{5A659BDD-41E6-4FB3-B2EF-B9C07A4A353B}"/>
               </a:ext>
             </a:extLst>
           </p:cNvPr>
@@ -6617,7 +6605,7 @@
           <p:cNvPr id="14" name="">
             <a:extLst xmlns:a="http://schemas.openxmlformats.org/drawingml/2006/main">
               <a:ext uri="{FF2B5EF4-FFF2-40B4-BE49-F238E27FC236}">
-                <a16:creationId xmlns:a16="http://schemas.microsoft.com/office/drawing/2014/main" id="{C27E8751-4EDD-4021-9553-55DC26EB54B3}"/>
+                <a16:creationId xmlns:a16="http://schemas.microsoft.com/office/drawing/2014/main" id="{B566DD6A-AF8E-4F0E-89DB-0C0E92499D98}"/>
               </a:ext>
             </a:extLst>
           </p:cNvPr>
@@ -6649,7 +6637,7 @@
           <p:cNvPr id="15" name="">
             <a:extLst xmlns:a="http://schemas.openxmlformats.org/drawingml/2006/main">
               <a:ext uri="{FF2B5EF4-FFF2-40B4-BE49-F238E27FC236}">
-                <a16:creationId xmlns:a16="http://schemas.microsoft.com/office/drawing/2014/main" id="{D9E2F185-C79A-4AE2-9115-82DDDB9F2002}"/>
+                <a16:creationId xmlns:a16="http://schemas.microsoft.com/office/drawing/2014/main" id="{37A1E445-AC6A-40CA-A356-8A6F1E0C0ABE}"/>
               </a:ext>
             </a:extLst>
           </p:cNvPr>
@@ -6681,7 +6669,7 @@
           <p:cNvPr id="16" name="">
             <a:extLst xmlns:a="http://schemas.openxmlformats.org/drawingml/2006/main">
               <a:ext uri="{FF2B5EF4-FFF2-40B4-BE49-F238E27FC236}">
-                <a16:creationId xmlns:a16="http://schemas.microsoft.com/office/drawing/2014/main" id="{AA0E4506-D1E4-4CAE-B56E-2526D1A7DC15}"/>
+                <a16:creationId xmlns:a16="http://schemas.microsoft.com/office/drawing/2014/main" id="{EF3862AD-C493-46AD-84EA-AA572B2043FB}"/>
               </a:ext>
             </a:extLst>
           </p:cNvPr>
@@ -6726,7 +6714,7 @@
           <p:cNvPr id="17" name="">
             <a:extLst xmlns:a="http://schemas.openxmlformats.org/drawingml/2006/main">
               <a:ext uri="{FF2B5EF4-FFF2-40B4-BE49-F238E27FC236}">
-                <a16:creationId xmlns:a16="http://schemas.microsoft.com/office/drawing/2014/main" id="{934B62B1-220F-4C6D-8CAB-24CD4B07F020}"/>
+                <a16:creationId xmlns:a16="http://schemas.microsoft.com/office/drawing/2014/main" id="{93E1F6B8-FB5D-4836-BF0E-B89741493568}"/>
               </a:ext>
             </a:extLst>
           </p:cNvPr>
@@ -6771,7 +6759,7 @@
           <p:cNvPr id="18" name="">
             <a:extLst xmlns:a="http://schemas.openxmlformats.org/drawingml/2006/main">
               <a:ext uri="{FF2B5EF4-FFF2-40B4-BE49-F238E27FC236}">
-                <a16:creationId xmlns:a16="http://schemas.microsoft.com/office/drawing/2014/main" id="{D8A7DF32-B0A9-4602-B8A4-002DCC5A153C}"/>
+                <a16:creationId xmlns:a16="http://schemas.microsoft.com/office/drawing/2014/main" id="{74FB4767-1894-406A-968F-7E13A952E3E5}"/>
               </a:ext>
             </a:extLst>
           </p:cNvPr>
@@ -6806,7 +6794,7 @@
                 <a:ea typeface="Arial"/>
                 <a:cs typeface="Arial"/>
               </a:rPr>
-              <a:t>Full-resolution region width: 0.08×, 0.17×, 0.33×, 0.50×, 0.67×</a:t>
+              <a:t>Full-resolution region width: 0.1×, 0.25×, 0.5×, 0.75×</a:t>
             </a:r>
           </a:p>
         </p:txBody>
@@ -6816,7 +6804,7 @@
           <p:cNvPr id="19" name="">
             <a:extLst xmlns:a="http://schemas.openxmlformats.org/drawingml/2006/main">
               <a:ext uri="{FF2B5EF4-FFF2-40B4-BE49-F238E27FC236}">
-                <a16:creationId xmlns:a16="http://schemas.microsoft.com/office/drawing/2014/main" id="{EE9D7666-F742-47FC-9761-89CBA26D813F}"/>
+                <a16:creationId xmlns:a16="http://schemas.microsoft.com/office/drawing/2014/main" id="{078715CB-92A6-47B6-AD82-6F29E6E4E0DF}"/>
               </a:ext>
             </a:extLst>
           </p:cNvPr>
@@ -6859,7 +6847,7 @@
     </p:spTree>
     <p:extLst>
       <p:ext uri="{BB962C8B-B14F-4D97-AF65-F5344CB8AC3E}">
-        <p14:creationId xmlns:p14="http://schemas.microsoft.com/office/powerpoint/2010/main" val="606043869"/>
+        <p14:creationId xmlns:p14="http://schemas.microsoft.com/office/powerpoint/2010/main" val="2028844609"/>
       </p:ext>
     </p:extLst>
   </p:cSld>
@@ -6890,7 +6878,7 @@
           <p:cNvPr id="12" name="">
             <a:extLst xmlns:a="http://schemas.openxmlformats.org/drawingml/2006/main">
               <a:ext uri="{FF2B5EF4-FFF2-40B4-BE49-F238E27FC236}">
-                <a16:creationId xmlns:a16="http://schemas.microsoft.com/office/drawing/2014/main" id="{C2A0E4F3-1574-411F-878A-BD7553CEB9CA}"/>
+                <a16:creationId xmlns:a16="http://schemas.microsoft.com/office/drawing/2014/main" id="{6361B034-0E03-4A3A-B60A-725BF61BEAC5}"/>
               </a:ext>
             </a:extLst>
           </p:cNvPr>
@@ -6935,7 +6923,7 @@
           <p:cNvPr id="2" name="">
             <a:extLst xmlns:a="http://schemas.openxmlformats.org/drawingml/2006/main">
               <a:ext uri="{FF2B5EF4-FFF2-40B4-BE49-F238E27FC236}">
-                <a16:creationId xmlns:a16="http://schemas.microsoft.com/office/drawing/2014/main" id="{B2A2A012-794B-45CC-A04B-FDDCC9FFDF20}"/>
+                <a16:creationId xmlns:a16="http://schemas.microsoft.com/office/drawing/2014/main" id="{96ECD673-CD30-486E-8726-2E28CBF9BA04}"/>
               </a:ext>
             </a:extLst>
           </p:cNvPr>
@@ -6965,7 +6953,7 @@
           <p:cNvPr id="3" name="">
             <a:extLst xmlns:a="http://schemas.openxmlformats.org/drawingml/2006/main">
               <a:ext uri="{FF2B5EF4-FFF2-40B4-BE49-F238E27FC236}">
-                <a16:creationId xmlns:a16="http://schemas.microsoft.com/office/drawing/2014/main" id="{F7E29E61-CB9C-44DB-8A4A-59D3EE23E28E}"/>
+                <a16:creationId xmlns:a16="http://schemas.microsoft.com/office/drawing/2014/main" id="{2DDFD84A-E1A8-423E-A924-E5B471BC38ED}"/>
               </a:ext>
             </a:extLst>
           </p:cNvPr>
@@ -7010,7 +6998,7 @@
           <p:cNvPr id="4" name="Chart">
             <a:extLst xmlns:a="http://schemas.openxmlformats.org/drawingml/2006/main">
               <a:ext uri="{FF2B5EF4-FFF2-40B4-BE49-F238E27FC236}">
-                <a16:creationId xmlns:a16="http://schemas.microsoft.com/office/drawing/2014/main" id="{59844BE6-ECD9-439B-AC1C-7836C10B5F24}"/>
+                <a16:creationId xmlns:a16="http://schemas.microsoft.com/office/drawing/2014/main" id="{7FFD565B-E74F-4B7B-8BEF-96B9369D3738}"/>
               </a:ext>
             </a:extLst>
           </p:cNvPr>
@@ -7023,7 +7011,7 @@
         </p:xfrm>
         <a:graphic xmlns:a="http://schemas.openxmlformats.org/drawingml/2006/main">
           <a:graphicData uri="http://schemas.openxmlformats.org/drawingml/2006/chart">
-            <c:chart xmlns:r="http://schemas.openxmlformats.org/officeDocument/2006/relationships" xmlns:c="http://schemas.openxmlformats.org/drawingml/2006/chart" r:id="Ra00bb7ec55c04ba2"/>
+            <c:chart xmlns:r="http://schemas.openxmlformats.org/officeDocument/2006/relationships" xmlns:c="http://schemas.openxmlformats.org/drawingml/2006/chart" r:id="Re03d09c5d506474d"/>
           </a:graphicData>
         </a:graphic>
       </p:graphicFrame>
@@ -7032,7 +7020,7 @@
           <p:cNvPr id="5" name="">
             <a:extLst xmlns:a="http://schemas.openxmlformats.org/drawingml/2006/main">
               <a:ext uri="{FF2B5EF4-FFF2-40B4-BE49-F238E27FC236}">
-                <a16:creationId xmlns:a16="http://schemas.microsoft.com/office/drawing/2014/main" id="{62565BA1-E81E-4E51-8B2C-2505B4052BF3}"/>
+                <a16:creationId xmlns:a16="http://schemas.microsoft.com/office/drawing/2014/main" id="{E3B18D00-8C1B-4B62-A646-86E637B0833F}"/>
               </a:ext>
             </a:extLst>
           </p:cNvPr>
@@ -7067,7 +7055,7 @@
                 <a:ea typeface="Arial"/>
                 <a:cs typeface="Arial"/>
               </a:rPr>
-              <a:t>4 workloads × frame 39; 100 repetitions/path. GPU timeline, not wall time.</a:t>
+              <a:t>1068 frames at 30W; 5 repetitions/frame. GPU timing, not wall time.</a:t>
             </a:r>
           </a:p>
         </p:txBody>
@@ -7077,7 +7065,7 @@
           <p:cNvPr id="6" name="">
             <a:extLst xmlns:a="http://schemas.openxmlformats.org/drawingml/2006/main">
               <a:ext uri="{FF2B5EF4-FFF2-40B4-BE49-F238E27FC236}">
-                <a16:creationId xmlns:a16="http://schemas.microsoft.com/office/drawing/2014/main" id="{81D8E702-AF40-4E3C-9C30-6C3DB5B75771}"/>
+                <a16:creationId xmlns:a16="http://schemas.microsoft.com/office/drawing/2014/main" id="{01A56016-B867-4E67-B90B-80C353DB1DB4}"/>
               </a:ext>
             </a:extLst>
           </p:cNvPr>
@@ -7112,7 +7100,7 @@
                 <a:ea typeface="Arial"/>
                 <a:cs typeface="Arial"/>
               </a:rPr>
-              <a:t>2.8% region</a:t>
+              <a:t>0.25× region</a:t>
             </a:r>
           </a:p>
         </p:txBody>
@@ -7122,7 +7110,7 @@
           <p:cNvPr id="7" name="">
             <a:extLst xmlns:a="http://schemas.openxmlformats.org/drawingml/2006/main">
               <a:ext uri="{FF2B5EF4-FFF2-40B4-BE49-F238E27FC236}">
-                <a16:creationId xmlns:a16="http://schemas.microsoft.com/office/drawing/2014/main" id="{9FD1AA88-549B-4459-937A-49F95284C1BE}"/>
+                <a16:creationId xmlns:a16="http://schemas.microsoft.com/office/drawing/2014/main" id="{18BFCCA9-1ECE-40EC-A3BA-71407D23A775}"/>
               </a:ext>
             </a:extLst>
           </p:cNvPr>
@@ -7157,7 +7145,7 @@
                 <a:ea typeface="Arial"/>
                 <a:cs typeface="Arial"/>
               </a:rPr>
-              <a:t>5.462 ms</a:t>
+              <a:t>6.257 ms</a:t>
             </a:r>
           </a:p>
         </p:txBody>
@@ -7167,7 +7155,7 @@
           <p:cNvPr id="8" name="">
             <a:extLst xmlns:a="http://schemas.openxmlformats.org/drawingml/2006/main">
               <a:ext uri="{FF2B5EF4-FFF2-40B4-BE49-F238E27FC236}">
-                <a16:creationId xmlns:a16="http://schemas.microsoft.com/office/drawing/2014/main" id="{DF1E08D9-DE6D-463C-81B3-16C85A2A3EF7}"/>
+                <a16:creationId xmlns:a16="http://schemas.microsoft.com/office/drawing/2014/main" id="{7B5C357C-DF8B-48C5-B661-AB67BF267C9A}"/>
               </a:ext>
             </a:extLst>
           </p:cNvPr>
@@ -7212,7 +7200,7 @@
           <p:cNvPr id="9" name="">
             <a:extLst xmlns:a="http://schemas.openxmlformats.org/drawingml/2006/main">
               <a:ext uri="{FF2B5EF4-FFF2-40B4-BE49-F238E27FC236}">
-                <a16:creationId xmlns:a16="http://schemas.microsoft.com/office/drawing/2014/main" id="{255AA6EB-02FB-42A5-94DD-924562B9C9BC}"/>
+                <a16:creationId xmlns:a16="http://schemas.microsoft.com/office/drawing/2014/main" id="{CD63A0AB-D86B-411E-8D73-B0948BF7B6AF}"/>
               </a:ext>
             </a:extLst>
           </p:cNvPr>
@@ -7247,7 +7235,7 @@
                 <a:ea typeface="Arial"/>
                 <a:cs typeface="Arial"/>
               </a:rPr>
-              <a:t>1.83×</a:t>
+              <a:t>1.74×</a:t>
             </a:r>
           </a:p>
         </p:txBody>
@@ -7257,7 +7245,7 @@
           <p:cNvPr id="10" name="">
             <a:extLst xmlns:a="http://schemas.openxmlformats.org/drawingml/2006/main">
               <a:ext uri="{FF2B5EF4-FFF2-40B4-BE49-F238E27FC236}">
-                <a16:creationId xmlns:a16="http://schemas.microsoft.com/office/drawing/2014/main" id="{F136F32D-FC77-4962-BD3A-22FF1BAB31B2}"/>
+                <a16:creationId xmlns:a16="http://schemas.microsoft.com/office/drawing/2014/main" id="{3F474BB0-FC29-4A2C-ACBB-239A693A67C8}"/>
               </a:ext>
             </a:extLst>
           </p:cNvPr>
@@ -7302,7 +7290,7 @@
           <p:cNvPr id="11" name="">
             <a:extLst xmlns:a="http://schemas.openxmlformats.org/drawingml/2006/main">
               <a:ext uri="{FF2B5EF4-FFF2-40B4-BE49-F238E27FC236}">
-                <a16:creationId xmlns:a16="http://schemas.microsoft.com/office/drawing/2014/main" id="{59332637-B9D4-4203-822C-4D17BE9FCD7C}"/>
+                <a16:creationId xmlns:a16="http://schemas.microsoft.com/office/drawing/2014/main" id="{9B8B0DAF-1E89-47E3-A431-A363FB2B9371}"/>
               </a:ext>
             </a:extLst>
           </p:cNvPr>
@@ -7337,7 +7325,7 @@
                 <a:ea typeface="Arial"/>
                 <a:cs typeface="Arial"/>
               </a:rPr>
-              <a:t>Derived budget, not measured end-to-end. Copies excluded. Savings include reduced clearing work; no optimal-Full claim.</a:t>
+              <a:t>Derived budget, not measured end-to-end. Copies excluded. Includes clearing and resampling; no optimal-Full claim.</a:t>
             </a:r>
           </a:p>
         </p:txBody>
@@ -7345,7 +7333,7 @@
     </p:spTree>
     <p:extLst>
       <p:ext uri="{BB962C8B-B14F-4D97-AF65-F5344CB8AC3E}">
-        <p14:creationId xmlns:p14="http://schemas.microsoft.com/office/powerpoint/2010/main" val="584151859"/>
+        <p14:creationId xmlns:p14="http://schemas.microsoft.com/office/powerpoint/2010/main" val="214652951"/>
       </p:ext>
     </p:extLst>
   </p:cSld>
@@ -7376,7 +7364,7 @@
           <p:cNvPr id="8" name="">
             <a:extLst xmlns:a="http://schemas.openxmlformats.org/drawingml/2006/main">
               <a:ext uri="{FF2B5EF4-FFF2-40B4-BE49-F238E27FC236}">
-                <a16:creationId xmlns:a16="http://schemas.microsoft.com/office/drawing/2014/main" id="{7E4CE1E8-BF96-4F64-B6E3-D44062434E1A}"/>
+                <a16:creationId xmlns:a16="http://schemas.microsoft.com/office/drawing/2014/main" id="{E7499C8F-677E-452E-8AB0-B3AB35802E48}"/>
               </a:ext>
             </a:extLst>
           </p:cNvPr>
@@ -7421,7 +7409,7 @@
           <p:cNvPr id="2" name="">
             <a:extLst xmlns:a="http://schemas.openxmlformats.org/drawingml/2006/main">
               <a:ext uri="{FF2B5EF4-FFF2-40B4-BE49-F238E27FC236}">
-                <a16:creationId xmlns:a16="http://schemas.microsoft.com/office/drawing/2014/main" id="{02F3FBD6-E63F-40FA-97D3-82A6A5963E3F}"/>
+                <a16:creationId xmlns:a16="http://schemas.microsoft.com/office/drawing/2014/main" id="{D6974AA6-01A6-4885-AB7B-DD352FFC9052}"/>
               </a:ext>
             </a:extLst>
           </p:cNvPr>
@@ -7451,7 +7439,7 @@
           <p:cNvPr id="3" name="">
             <a:extLst xmlns:a="http://schemas.openxmlformats.org/drawingml/2006/main">
               <a:ext uri="{FF2B5EF4-FFF2-40B4-BE49-F238E27FC236}">
-                <a16:creationId xmlns:a16="http://schemas.microsoft.com/office/drawing/2014/main" id="{4C75864A-465E-4583-9191-F1556CA59891}"/>
+                <a16:creationId xmlns:a16="http://schemas.microsoft.com/office/drawing/2014/main" id="{3CB516E5-504C-4F59-AA11-7BC137A20C37}"/>
               </a:ext>
             </a:extLst>
           </p:cNvPr>
@@ -7496,7 +7484,7 @@
           <p:cNvPr id="4" name="">
             <a:extLst xmlns:a="http://schemas.openxmlformats.org/drawingml/2006/main">
               <a:ext uri="{FF2B5EF4-FFF2-40B4-BE49-F238E27FC236}">
-                <a16:creationId xmlns:a16="http://schemas.microsoft.com/office/drawing/2014/main" id="{806A95FC-757C-4E87-A70C-188BC0811CD4}"/>
+                <a16:creationId xmlns:a16="http://schemas.microsoft.com/office/drawing/2014/main" id="{6B1A04D3-D71D-411C-BD6D-6D2A05525EDF}"/>
               </a:ext>
             </a:extLst>
           </p:cNvPr>
@@ -7517,7 +7505,7 @@
                 <a:gridCol w="2724150"/>
                 <a:gridCol w="3105150"/>
               </a:tblGrid>
-              <a:tr h="534988">
+              <a:tr h="641985">
                 <a:tc>
                   <a:txBody>
                     <a:bodyPr/>
@@ -7532,7 +7520,7 @@
                           <a:ea typeface="Arial"/>
                           <a:cs typeface="Arial"/>
                         </a:rPr>
-                        <a:t>Region (% of image)</a:t>
+                        <a:t>Region width scale</a:t>
                       </a:r>
                     </a:p>
                   </a:txBody>
@@ -7693,7 +7681,7 @@
                   </a:tcPr>
                 </a:tc>
               </a:tr>
-              <a:tr h="534988">
+              <a:tr h="641985">
                 <a:tc>
                   <a:txBody>
                     <a:bodyPr/>
@@ -7708,7 +7696,7 @@
                           <a:ea typeface="Arial"/>
                           <a:cs typeface="Arial"/>
                         </a:rPr>
-                        <a:t>0.7%</a:t>
+                        <a:t>0.1×</a:t>
                       </a:r>
                     </a:p>
                   </a:txBody>
@@ -7750,7 +7738,7 @@
                           <a:ea typeface="Arial"/>
                           <a:cs typeface="Arial"/>
                         </a:rPr>
-                        <a:t>5.248 ms</a:t>
+                        <a:t>5.631 ms</a:t>
                       </a:r>
                     </a:p>
                   </a:txBody>
@@ -7786,7 +7774,7 @@
                           <a:ea typeface="Arial"/>
                           <a:cs typeface="Arial"/>
                         </a:rPr>
-                        <a:t>-0.1727 dB</a:t>
+                        <a:t>-0.1718 dB</a:t>
                       </a:r>
                     </a:p>
                   </a:txBody>
@@ -7822,7 +7810,7 @@
                           <a:ea typeface="Arial"/>
                           <a:cs typeface="Arial"/>
                         </a:rPr>
-                        <a:t>-0.0864 dB</a:t>
+                        <a:t>-0.0859 dB</a:t>
                       </a:r>
                     </a:p>
                   </a:txBody>
@@ -7845,7 +7833,7 @@
                   </a:tcPr>
                 </a:tc>
               </a:tr>
-              <a:tr h="534988">
+              <a:tr h="641985">
                 <a:tc>
                   <a:txBody>
                     <a:bodyPr/>
@@ -7860,7 +7848,7 @@
                           <a:ea typeface="Arial"/>
                           <a:cs typeface="Arial"/>
                         </a:rPr>
-                        <a:t>2.8%</a:t>
+                        <a:t>0.25×</a:t>
                       </a:r>
                     </a:p>
                   </a:txBody>
@@ -7902,7 +7890,7 @@
                           <a:ea typeface="Arial"/>
                           <a:cs typeface="Arial"/>
                         </a:rPr>
-                        <a:t>5.462 ms</a:t>
+                        <a:t>6.257 ms</a:t>
                       </a:r>
                     </a:p>
                   </a:txBody>
@@ -7938,7 +7926,7 @@
                           <a:ea typeface="Arial"/>
                           <a:cs typeface="Arial"/>
                         </a:rPr>
-                        <a:t>-0.1668 dB</a:t>
+                        <a:t>-0.1569 dB</a:t>
                       </a:r>
                     </a:p>
                   </a:txBody>
@@ -7974,7 +7962,7 @@
                           <a:ea typeface="Arial"/>
                           <a:cs typeface="Arial"/>
                         </a:rPr>
-                        <a:t>-0.0834 dB</a:t>
+                        <a:t>-0.0785 dB</a:t>
                       </a:r>
                     </a:p>
                   </a:txBody>
@@ -7997,7 +7985,7 @@
                   </a:tcPr>
                 </a:tc>
               </a:tr>
-              <a:tr h="534988">
+              <a:tr h="641985">
                 <a:tc>
                   <a:txBody>
                     <a:bodyPr/>
@@ -8012,7 +8000,7 @@
                           <a:ea typeface="Arial"/>
                           <a:cs typeface="Arial"/>
                         </a:rPr>
-                        <a:t>11.1%</a:t>
+                        <a:t>0.5×</a:t>
                       </a:r>
                     </a:p>
                   </a:txBody>
@@ -8054,7 +8042,7 @@
                           <a:ea typeface="Arial"/>
                           <a:cs typeface="Arial"/>
                         </a:rPr>
-                        <a:t>6.318 ms</a:t>
+                        <a:t>8.158 ms</a:t>
                       </a:r>
                     </a:p>
                   </a:txBody>
@@ -8090,7 +8078,7 @@
                           <a:ea typeface="Arial"/>
                           <a:cs typeface="Arial"/>
                         </a:rPr>
-                        <a:t>-0.1462 dB</a:t>
+                        <a:t>-0.1198 dB</a:t>
                       </a:r>
                     </a:p>
                   </a:txBody>
@@ -8126,7 +8114,7 @@
                           <a:ea typeface="Arial"/>
                           <a:cs typeface="Arial"/>
                         </a:rPr>
-                        <a:t>-0.0731 dB</a:t>
+                        <a:t>-0.0599 dB</a:t>
                       </a:r>
                     </a:p>
                   </a:txBody>
@@ -8149,7 +8137,7 @@
                   </a:tcPr>
                 </a:tc>
               </a:tr>
-              <a:tr h="534988">
+              <a:tr h="641985">
                 <a:tc>
                   <a:txBody>
                     <a:bodyPr/>
@@ -8164,7 +8152,7 @@
                           <a:ea typeface="Arial"/>
                           <a:cs typeface="Arial"/>
                         </a:rPr>
-                        <a:t>25.0%</a:t>
+                        <a:t>0.75×</a:t>
                       </a:r>
                     </a:p>
                   </a:txBody>
@@ -8206,7 +8194,7 @@
                           <a:ea typeface="Arial"/>
                           <a:cs typeface="Arial"/>
                         </a:rPr>
-                        <a:t>7.637 ms</a:t>
+                        <a:t>11.039 ms</a:t>
                       </a:r>
                     </a:p>
                   </a:txBody>
@@ -8242,7 +8230,7 @@
                           <a:ea typeface="Arial"/>
                           <a:cs typeface="Arial"/>
                         </a:rPr>
-                        <a:t>-0.1200 dB</a:t>
+                        <a:t>-0.0669 dB</a:t>
                       </a:r>
                     </a:p>
                   </a:txBody>
@@ -8278,7 +8266,7 @@
                           <a:ea typeface="Arial"/>
                           <a:cs typeface="Arial"/>
                         </a:rPr>
-                        <a:t>-0.0600 dB</a:t>
+                        <a:t>-0.0335 dB</a:t>
                       </a:r>
                     </a:p>
                   </a:txBody>
@@ -8301,158 +8289,6 @@
                   </a:tcPr>
                 </a:tc>
               </a:tr>
-              <a:tr h="534988">
-                <a:tc>
-                  <a:txBody>
-                    <a:bodyPr/>
-                    <a:lstStyle/>
-                    <a:p>
-                      <a:r>
-                        <a:rPr sz="1800" b="0">
-                          <a:solidFill>
-                            <a:srgbClr val="152D43"/>
-                          </a:solidFill>
-                          <a:latin typeface="Arial"/>
-                          <a:ea typeface="Arial"/>
-                          <a:cs typeface="Arial"/>
-                        </a:rPr>
-                        <a:t>44.4%</a:t>
-                      </a:r>
-                    </a:p>
-                  </a:txBody>
-                  <a:tcPr marL="91440" marR="91440" marT="45720" marB="45720">
-                    <a:lnL w="9525">
-                      <a:solidFill>
-                        <a:srgbClr val="D7DFE5"/>
-                      </a:solidFill>
-                      <a:prstDash val="solid"/>
-                    </a:lnL>
-                    <a:lnR w="9525">
-                      <a:solidFill>
-                        <a:srgbClr val="D7DFE5"/>
-                      </a:solidFill>
-                      <a:prstDash val="solid"/>
-                    </a:lnR>
-                    <a:lnB w="9525">
-                      <a:solidFill>
-                        <a:srgbClr val="D7DFE5"/>
-                      </a:solidFill>
-                      <a:prstDash val="solid"/>
-                    </a:lnB>
-                    <a:solidFill>
-                      <a:srgbClr val="FFFFFF"/>
-                    </a:solidFill>
-                  </a:tcPr>
-                </a:tc>
-                <a:tc>
-                  <a:txBody>
-                    <a:bodyPr/>
-                    <a:lstStyle/>
-                    <a:p>
-                      <a:r>
-                        <a:rPr sz="1800" b="0">
-                          <a:solidFill>
-                            <a:srgbClr val="152D43"/>
-                          </a:solidFill>
-                          <a:latin typeface="Arial"/>
-                          <a:ea typeface="Arial"/>
-                          <a:cs typeface="Arial"/>
-                        </a:rPr>
-                        <a:t>9.543 ms</a:t>
-                      </a:r>
-                    </a:p>
-                  </a:txBody>
-                  <a:tcPr marL="91440" marR="91440" marT="45720" marB="45720">
-                    <a:lnR w="9525">
-                      <a:solidFill>
-                        <a:srgbClr val="D7DFE5"/>
-                      </a:solidFill>
-                      <a:prstDash val="solid"/>
-                    </a:lnR>
-                    <a:lnB w="9525">
-                      <a:solidFill>
-                        <a:srgbClr val="D7DFE5"/>
-                      </a:solidFill>
-                      <a:prstDash val="solid"/>
-                    </a:lnB>
-                    <a:solidFill>
-                      <a:srgbClr val="FFFFFF"/>
-                    </a:solidFill>
-                  </a:tcPr>
-                </a:tc>
-                <a:tc>
-                  <a:txBody>
-                    <a:bodyPr/>
-                    <a:lstStyle/>
-                    <a:p>
-                      <a:r>
-                        <a:rPr sz="1800" b="0">
-                          <a:solidFill>
-                            <a:srgbClr val="152D43"/>
-                          </a:solidFill>
-                          <a:latin typeface="Arial"/>
-                          <a:ea typeface="Arial"/>
-                          <a:cs typeface="Arial"/>
-                        </a:rPr>
-                        <a:t>-0.0861 dB</a:t>
-                      </a:r>
-                    </a:p>
-                  </a:txBody>
-                  <a:tcPr marL="91440" marR="91440" marT="45720" marB="45720">
-                    <a:lnR w="9525">
-                      <a:solidFill>
-                        <a:srgbClr val="D7DFE5"/>
-                      </a:solidFill>
-                      <a:prstDash val="solid"/>
-                    </a:lnR>
-                    <a:lnB w="9525">
-                      <a:solidFill>
-                        <a:srgbClr val="D7DFE5"/>
-                      </a:solidFill>
-                      <a:prstDash val="solid"/>
-                    </a:lnB>
-                    <a:solidFill>
-                      <a:srgbClr val="FFFFFF"/>
-                    </a:solidFill>
-                  </a:tcPr>
-                </a:tc>
-                <a:tc>
-                  <a:txBody>
-                    <a:bodyPr/>
-                    <a:lstStyle/>
-                    <a:p>
-                      <a:r>
-                        <a:rPr sz="1800" b="0">
-                          <a:solidFill>
-                            <a:srgbClr val="152D43"/>
-                          </a:solidFill>
-                          <a:latin typeface="Arial"/>
-                          <a:ea typeface="Arial"/>
-                          <a:cs typeface="Arial"/>
-                        </a:rPr>
-                        <a:t>-0.0430 dB</a:t>
-                      </a:r>
-                    </a:p>
-                  </a:txBody>
-                  <a:tcPr marL="91440" marR="91440" marT="45720" marB="45720">
-                    <a:lnR w="9525">
-                      <a:solidFill>
-                        <a:srgbClr val="D7DFE5"/>
-                      </a:solidFill>
-                      <a:prstDash val="solid"/>
-                    </a:lnR>
-                    <a:lnB w="9525">
-                      <a:solidFill>
-                        <a:srgbClr val="D7DFE5"/>
-                      </a:solidFill>
-                      <a:prstDash val="solid"/>
-                    </a:lnB>
-                    <a:solidFill>
-                      <a:srgbClr val="FFFFFF"/>
-                    </a:solidFill>
-                  </a:tcPr>
-                </a:tc>
-              </a:tr>
             </a:tbl>
           </a:graphicData>
         </a:graphic>
@@ -8462,7 +8298,7 @@
           <p:cNvPr id="5" name="">
             <a:extLst xmlns:a="http://schemas.openxmlformats.org/drawingml/2006/main">
               <a:ext uri="{FF2B5EF4-FFF2-40B4-BE49-F238E27FC236}">
-                <a16:creationId xmlns:a16="http://schemas.microsoft.com/office/drawing/2014/main" id="{A311A780-70FE-47B1-91FD-A2859593565F}"/>
+                <a16:creationId xmlns:a16="http://schemas.microsoft.com/office/drawing/2014/main" id="{78845179-391D-423F-9121-20793BFE5480}"/>
               </a:ext>
             </a:extLst>
           </p:cNvPr>
@@ -8507,7 +8343,7 @@
           <p:cNvPr id="6" name="">
             <a:extLst xmlns:a="http://schemas.openxmlformats.org/drawingml/2006/main">
               <a:ext uri="{FF2B5EF4-FFF2-40B4-BE49-F238E27FC236}">
-                <a16:creationId xmlns:a16="http://schemas.microsoft.com/office/drawing/2014/main" id="{578622C3-34F2-42B1-9079-660A3A787005}"/>
+                <a16:creationId xmlns:a16="http://schemas.microsoft.com/office/drawing/2014/main" id="{93348659-FF28-42E5-954B-0BB80CEC89CA}"/>
               </a:ext>
             </a:extLst>
           </p:cNvPr>
@@ -8552,7 +8388,7 @@
           <p:cNvPr id="7" name="">
             <a:extLst xmlns:a="http://schemas.openxmlformats.org/drawingml/2006/main">
               <a:ext uri="{FF2B5EF4-FFF2-40B4-BE49-F238E27FC236}">
-                <a16:creationId xmlns:a16="http://schemas.microsoft.com/office/drawing/2014/main" id="{C11FCAC2-791E-4524-A062-83BE093C56AB}"/>
+                <a16:creationId xmlns:a16="http://schemas.microsoft.com/office/drawing/2014/main" id="{CDBFA6A6-0EAB-4D78-A498-A8CB4D15D861}"/>
               </a:ext>
             </a:extLst>
           </p:cNvPr>
@@ -8587,7 +8423,7 @@
                 <a:ea typeface="Arial"/>
                 <a:cs typeface="Arial"/>
               </a:rPr>
-              <a:t>Timing: 30W, 4 frames + fixed 2 ms decode. Quality: 15W, 1068 frames. Separate experiments, not jointly measured.</a:t>
+              <a:t>Quality and timing: same 30W run, 1068 frames. Timing adds a fixed 2 ms decode budget; not measured end-to-end.</a:t>
             </a:r>
           </a:p>
         </p:txBody>
@@ -8595,7 +8431,7 @@
     </p:spTree>
     <p:extLst>
       <p:ext uri="{BB962C8B-B14F-4D97-AF65-F5344CB8AC3E}">
-        <p14:creationId xmlns:p14="http://schemas.microsoft.com/office/powerpoint/2010/main" val="97320965"/>
+        <p14:creationId xmlns:p14="http://schemas.microsoft.com/office/powerpoint/2010/main" val="720353213"/>
       </p:ext>
     </p:extLst>
   </p:cSld>
@@ -8626,7 +8462,7 @@
           <p:cNvPr id="14" name="">
             <a:extLst xmlns:a="http://schemas.openxmlformats.org/drawingml/2006/main">
               <a:ext uri="{FF2B5EF4-FFF2-40B4-BE49-F238E27FC236}">
-                <a16:creationId xmlns:a16="http://schemas.microsoft.com/office/drawing/2014/main" id="{84061BC2-1C04-4E6D-88A4-723A6807EB9F}"/>
+                <a16:creationId xmlns:a16="http://schemas.microsoft.com/office/drawing/2014/main" id="{26F57AA7-DD06-4260-98A3-B39E42C0493F}"/>
               </a:ext>
             </a:extLst>
           </p:cNvPr>
@@ -8671,7 +8507,7 @@
           <p:cNvPr id="2" name="">
             <a:extLst xmlns:a="http://schemas.openxmlformats.org/drawingml/2006/main">
               <a:ext uri="{FF2B5EF4-FFF2-40B4-BE49-F238E27FC236}">
-                <a16:creationId xmlns:a16="http://schemas.microsoft.com/office/drawing/2014/main" id="{A961DC4C-62F7-429A-AAA8-F8055C952384}"/>
+                <a16:creationId xmlns:a16="http://schemas.microsoft.com/office/drawing/2014/main" id="{4B85743C-7B2F-451E-938A-F9DE3D5B93B3}"/>
               </a:ext>
             </a:extLst>
           </p:cNvPr>
@@ -8701,7 +8537,7 @@
           <p:cNvPr id="3" name="">
             <a:extLst xmlns:a="http://schemas.openxmlformats.org/drawingml/2006/main">
               <a:ext uri="{FF2B5EF4-FFF2-40B4-BE49-F238E27FC236}">
-                <a16:creationId xmlns:a16="http://schemas.microsoft.com/office/drawing/2014/main" id="{A13B84C5-357B-4A37-A60E-1478AA8444C1}"/>
+                <a16:creationId xmlns:a16="http://schemas.microsoft.com/office/drawing/2014/main" id="{84541237-6331-4BA9-BAC6-30F07F872198}"/>
               </a:ext>
             </a:extLst>
           </p:cNvPr>
@@ -8746,7 +8582,7 @@
           <p:cNvPr id="4" name="">
             <a:extLst xmlns:a="http://schemas.openxmlformats.org/drawingml/2006/main">
               <a:ext uri="{FF2B5EF4-FFF2-40B4-BE49-F238E27FC236}">
-                <a16:creationId xmlns:a16="http://schemas.microsoft.com/office/drawing/2014/main" id="{BF394C24-AB06-4D11-9010-997A298A3726}"/>
+                <a16:creationId xmlns:a16="http://schemas.microsoft.com/office/drawing/2014/main" id="{95581A7D-84B2-4F2C-A567-A46A8C83FCFF}"/>
               </a:ext>
             </a:extLst>
           </p:cNvPr>
@@ -8791,7 +8627,7 @@
           <p:cNvPr id="5" name="">
             <a:extLst xmlns:a="http://schemas.openxmlformats.org/drawingml/2006/main">
               <a:ext uri="{FF2B5EF4-FFF2-40B4-BE49-F238E27FC236}">
-                <a16:creationId xmlns:a16="http://schemas.microsoft.com/office/drawing/2014/main" id="{3DCA773A-821F-4D39-B1B2-1E8D9CED399B}"/>
+                <a16:creationId xmlns:a16="http://schemas.microsoft.com/office/drawing/2014/main" id="{360619D1-1293-4968-B7E3-562BCB7858B2}"/>
               </a:ext>
             </a:extLst>
           </p:cNvPr>
@@ -8836,7 +8672,7 @@
           <p:cNvPr id="6" name="">
             <a:extLst xmlns:a="http://schemas.openxmlformats.org/drawingml/2006/main">
               <a:ext uri="{FF2B5EF4-FFF2-40B4-BE49-F238E27FC236}">
-                <a16:creationId xmlns:a16="http://schemas.microsoft.com/office/drawing/2014/main" id="{6B8B170B-B280-487B-83A8-F96A8E4DA29A}"/>
+                <a16:creationId xmlns:a16="http://schemas.microsoft.com/office/drawing/2014/main" id="{F655579D-C90B-4A3E-99DF-A3492D559FD0}"/>
               </a:ext>
             </a:extLst>
           </p:cNvPr>
@@ -8881,7 +8717,7 @@
           <p:cNvPr id="7" name="">
             <a:extLst xmlns:a="http://schemas.openxmlformats.org/drawingml/2006/main">
               <a:ext uri="{FF2B5EF4-FFF2-40B4-BE49-F238E27FC236}">
-                <a16:creationId xmlns:a16="http://schemas.microsoft.com/office/drawing/2014/main" id="{6267466E-2A78-44A0-8807-651FEE27E726}"/>
+                <a16:creationId xmlns:a16="http://schemas.microsoft.com/office/drawing/2014/main" id="{EB046320-0FA2-4221-8D2F-AD1712345789}"/>
               </a:ext>
             </a:extLst>
           </p:cNvPr>
@@ -8926,7 +8762,7 @@
           <p:cNvPr id="8" name="">
             <a:extLst xmlns:a="http://schemas.openxmlformats.org/drawingml/2006/main">
               <a:ext uri="{FF2B5EF4-FFF2-40B4-BE49-F238E27FC236}">
-                <a16:creationId xmlns:a16="http://schemas.microsoft.com/office/drawing/2014/main" id="{48D26CF3-E8ED-4B4A-BF09-D9105063FCDA}"/>
+                <a16:creationId xmlns:a16="http://schemas.microsoft.com/office/drawing/2014/main" id="{5FE29D2A-CD74-45E4-80D7-019F34EAB054}"/>
               </a:ext>
             </a:extLst>
           </p:cNvPr>
@@ -8971,7 +8807,7 @@
           <p:cNvPr id="9" name="">
             <a:extLst xmlns:a="http://schemas.openxmlformats.org/drawingml/2006/main">
               <a:ext uri="{FF2B5EF4-FFF2-40B4-BE49-F238E27FC236}">
-                <a16:creationId xmlns:a16="http://schemas.microsoft.com/office/drawing/2014/main" id="{8904E76B-2401-4993-AC76-6830022A959A}"/>
+                <a16:creationId xmlns:a16="http://schemas.microsoft.com/office/drawing/2014/main" id="{8D25A889-9CB1-4128-9F8B-00535CCEA86F}"/>
               </a:ext>
             </a:extLst>
           </p:cNvPr>
@@ -9016,7 +8852,7 @@
           <p:cNvPr id="10" name="">
             <a:extLst xmlns:a="http://schemas.openxmlformats.org/drawingml/2006/main">
               <a:ext uri="{FF2B5EF4-FFF2-40B4-BE49-F238E27FC236}">
-                <a16:creationId xmlns:a16="http://schemas.microsoft.com/office/drawing/2014/main" id="{580E08B7-8360-42A4-9E2E-425511FD99AF}"/>
+                <a16:creationId xmlns:a16="http://schemas.microsoft.com/office/drawing/2014/main" id="{04B7544D-2930-4FB2-862E-9424ECE1E339}"/>
               </a:ext>
             </a:extLst>
           </p:cNvPr>
@@ -9061,7 +8897,7 @@
           <p:cNvPr id="11" name="">
             <a:extLst xmlns:a="http://schemas.openxmlformats.org/drawingml/2006/main">
               <a:ext uri="{FF2B5EF4-FFF2-40B4-BE49-F238E27FC236}">
-                <a16:creationId xmlns:a16="http://schemas.microsoft.com/office/drawing/2014/main" id="{FF2DCCC0-0A43-4FE8-9C63-1C6971E50A4E}"/>
+                <a16:creationId xmlns:a16="http://schemas.microsoft.com/office/drawing/2014/main" id="{3C50DDC9-205E-48C8-8678-45C61EB72E42}"/>
               </a:ext>
             </a:extLst>
           </p:cNvPr>
@@ -9106,7 +8942,7 @@
           <p:cNvPr id="12" name="">
             <a:extLst xmlns:a="http://schemas.openxmlformats.org/drawingml/2006/main">
               <a:ext uri="{FF2B5EF4-FFF2-40B4-BE49-F238E27FC236}">
-                <a16:creationId xmlns:a16="http://schemas.microsoft.com/office/drawing/2014/main" id="{B501E293-2794-4830-B726-E157A1D6A1DF}"/>
+                <a16:creationId xmlns:a16="http://schemas.microsoft.com/office/drawing/2014/main" id="{351FAC18-7016-445E-A93D-E7FD5774FA74}"/>
               </a:ext>
             </a:extLst>
           </p:cNvPr>
@@ -9151,7 +8987,7 @@
           <p:cNvPr id="13" name="">
             <a:extLst xmlns:a="http://schemas.openxmlformats.org/drawingml/2006/main">
               <a:ext uri="{FF2B5EF4-FFF2-40B4-BE49-F238E27FC236}">
-                <a16:creationId xmlns:a16="http://schemas.microsoft.com/office/drawing/2014/main" id="{7ADC0EEC-5BEE-45E7-B4AD-66BF4878C4C9}"/>
+                <a16:creationId xmlns:a16="http://schemas.microsoft.com/office/drawing/2014/main" id="{239FD8E2-16B4-4A0B-99C4-FF51323F506A}"/>
               </a:ext>
             </a:extLst>
           </p:cNvPr>
@@ -9194,7 +9030,7 @@
     </p:spTree>
     <p:extLst>
       <p:ext uri="{BB962C8B-B14F-4D97-AF65-F5344CB8AC3E}">
-        <p14:creationId xmlns:p14="http://schemas.microsoft.com/office/powerpoint/2010/main" val="1884115885"/>
+        <p14:creationId xmlns:p14="http://schemas.microsoft.com/office/powerpoint/2010/main" val="718374681"/>
       </p:ext>
     </p:extLst>
   </p:cSld>

--- a/presentations/weekly_20261029/weekly_20261029_english_final.pptx
+++ b/presentations/weekly_20261029/weekly_20261029_english_final.pptx
@@ -2,19 +2,19 @@
 <file path=ppt/presentation.xml><?xml version="1.0" encoding="utf-8"?>
 <p:presentation xmlns:p="http://schemas.openxmlformats.org/presentationml/2006/main">
   <p:sldMasterIdLst>
-    <p:sldMasterId xmlns:r="http://schemas.openxmlformats.org/officeDocument/2006/relationships" id="2147483648" r:id="Rf308f94b18b34d62"/>
+    <p:sldMasterId xmlns:r="http://schemas.openxmlformats.org/officeDocument/2006/relationships" id="2147483648" r:id="Re832cea49ea24aaa"/>
   </p:sldMasterIdLst>
   <p:notesMasterIdLst>
-    <p:notesMasterId xmlns:r="http://schemas.openxmlformats.org/officeDocument/2006/relationships" r:id="Rd2e34191d92b40dd"/>
+    <p:notesMasterId xmlns:r="http://schemas.openxmlformats.org/officeDocument/2006/relationships" r:id="R360564877f574f05"/>
   </p:notesMasterIdLst>
   <p:sldIdLst>
-    <p:sldId xmlns:r="http://schemas.openxmlformats.org/officeDocument/2006/relationships" id="256" r:id="Rb539c0c24beb475e"/>
-    <p:sldId xmlns:r="http://schemas.openxmlformats.org/officeDocument/2006/relationships" id="257" r:id="R1a2cb4e75b2646eb"/>
-    <p:sldId xmlns:r="http://schemas.openxmlformats.org/officeDocument/2006/relationships" id="258" r:id="Re2ec917e25a44556"/>
-    <p:sldId xmlns:r="http://schemas.openxmlformats.org/officeDocument/2006/relationships" id="259" r:id="R615b38e118dc4a08"/>
-    <p:sldId xmlns:r="http://schemas.openxmlformats.org/officeDocument/2006/relationships" id="260" r:id="R51e1c74341c047bc"/>
-    <p:sldId xmlns:r="http://schemas.openxmlformats.org/officeDocument/2006/relationships" id="261" r:id="Ra90747cd58984512"/>
-    <p:sldId xmlns:r="http://schemas.openxmlformats.org/officeDocument/2006/relationships" id="262" r:id="Rf0bc18ac014d4af4"/>
+    <p:sldId xmlns:r="http://schemas.openxmlformats.org/officeDocument/2006/relationships" id="256" r:id="Rcbb8d092bfeb451b"/>
+    <p:sldId xmlns:r="http://schemas.openxmlformats.org/officeDocument/2006/relationships" id="257" r:id="R74638d07bfb9464b"/>
+    <p:sldId xmlns:r="http://schemas.openxmlformats.org/officeDocument/2006/relationships" id="258" r:id="R540129de170f4ce5"/>
+    <p:sldId xmlns:r="http://schemas.openxmlformats.org/officeDocument/2006/relationships" id="259" r:id="Rbc3c4ca43d954c1f"/>
+    <p:sldId xmlns:r="http://schemas.openxmlformats.org/officeDocument/2006/relationships" id="260" r:id="R76b02ab1c2f245a4"/>
+    <p:sldId xmlns:r="http://schemas.openxmlformats.org/officeDocument/2006/relationships" id="261" r:id="R43cbe419d6a040c6"/>
+    <p:sldId xmlns:r="http://schemas.openxmlformats.org/officeDocument/2006/relationships" id="262" r:id="Rb332c0f122804713"/>
   </p:sldIdLst>
   <p:sldSz cx="12192000" cy="6858000"/>
   <p:notesSz cx="6858000" cy="9144000"/>
@@ -658,7 +658,7 @@
           <a:lstStyle xmlns:a="http://schemas.openxmlformats.org/drawingml/2006/main"/>
           <a:p xmlns:a="http://schemas.openxmlformats.org/drawingml/2006/main">
             <a:r>
-              <a:t>Source: results/fov_scales_full_20261029/scale_results.json and README.md. Same 30W CUDA C++ run: 1068 valid forward odd frames, 3 warmups, 5 timed repetitions per frame, one quality output per configuration/frame. Resident whole-pipeline GPU event timing without internal stage markers, fast resampling, dynamic clocks. This differs from the previous small-sample staged experiment. Mechanism: half-resolution base + padded full-resolution ROI + feather overlay. The full output is 960x540 (1.0x). Region scale is ROI width divided by full-image width: 96x54 =&gt; 0.1x, 240x135 =&gt; 0.25x, 480x270 =&gt; 0.5x, 720x405 =&gt; 0.75x. Width and height both follow these scales. ROI extent scale is not sampling resolution: pixels within the ROI remain full-resolution. The base samples at 0.5x width and 0.5x height (480x270) while covering the entire image.</a:t>
+              <a:t>Source: results/fov_scales_full_20261029/scale_results.json and README.md. Same 30W CUDA C++ run: 1068 valid forward odd frames, 3 warmups, 5 timed repetitions per frame, one quality output per configuration/frame. Resident whole-pipeline GPU event timing without internal stage markers, fast resampling, dynamic clocks. This differs from the previous small-sample staged experiment. Mechanism: half-resolution base + padded full-resolution ROI + feather overlay. The full output is 960x540 (1.0x). Region scale is ROI width divided by full-image width: 96x54 =&gt; 0.1x, 240x135 =&gt; 0.25x, 480x270 =&gt; 0.5x. The measured 0.75x level remains in the source dataset but is omitted from this presentation. Width and height both follow these scales. ROI extent scale is not sampling resolution: pixels within the ROI remain full-resolution. The base samples at 0.5x width and 0.5x height (480x270) while covering the entire image.</a:t>
             </a:r>
           </a:p>
         </p:txBody>
@@ -915,7 +915,7 @@
           <p:cNvPr id="3" name="Title">
             <a:extLst xmlns:a="http://schemas.openxmlformats.org/drawingml/2006/main">
               <a:ext uri="{FF2B5EF4-FFF2-40B4-BE49-F238E27FC236}">
-                <a16:creationId xmlns:a16="http://schemas.microsoft.com/office/drawing/2014/main" id="{4656B61E-6F12-41FF-82B5-C7DB83FF10A5}"/>
+                <a16:creationId xmlns:a16="http://schemas.microsoft.com/office/drawing/2014/main" id="{92ABD667-D094-4590-9F25-E3AC22B0E282}"/>
               </a:ext>
             </a:extLst>
           </p:cNvPr>
@@ -1144,7 +1144,7 @@
           <p:cNvPr id="2" name="Subtitle">
             <a:extLst xmlns:a="http://schemas.openxmlformats.org/drawingml/2006/main">
               <a:ext uri="{FF2B5EF4-FFF2-40B4-BE49-F238E27FC236}">
-                <a16:creationId xmlns:a16="http://schemas.microsoft.com/office/drawing/2014/main" id="{13E56DEB-E7B5-4B7D-9E1D-D9FC17A58799}"/>
+                <a16:creationId xmlns:a16="http://schemas.microsoft.com/office/drawing/2014/main" id="{B432252E-E14B-4A61-BB8A-174695D4A91C}"/>
               </a:ext>
             </a:extLst>
           </p:cNvPr>
@@ -1390,7 +1390,7 @@
           <p:cNvPr id="2" name="Section title">
             <a:extLst xmlns:a="http://schemas.openxmlformats.org/drawingml/2006/main">
               <a:ext uri="{FF2B5EF4-FFF2-40B4-BE49-F238E27FC236}">
-                <a16:creationId xmlns:a16="http://schemas.microsoft.com/office/drawing/2014/main" id="{F4C64E40-54CD-4D7E-8241-8C74044B2782}"/>
+                <a16:creationId xmlns:a16="http://schemas.microsoft.com/office/drawing/2014/main" id="{3BD4335D-A81E-40E7-B0F6-BE8652C2EAE0}"/>
               </a:ext>
             </a:extLst>
           </p:cNvPr>
@@ -1636,7 +1636,7 @@
           <p:cNvPr id="3" name="Title">
             <a:extLst xmlns:a="http://schemas.openxmlformats.org/drawingml/2006/main">
               <a:ext uri="{FF2B5EF4-FFF2-40B4-BE49-F238E27FC236}">
-                <a16:creationId xmlns:a16="http://schemas.microsoft.com/office/drawing/2014/main" id="{034EB934-449C-4E12-83DC-0592C95AAE32}"/>
+                <a16:creationId xmlns:a16="http://schemas.microsoft.com/office/drawing/2014/main" id="{1FE97686-6382-4DDD-9000-B3D789E9F989}"/>
               </a:ext>
             </a:extLst>
           </p:cNvPr>
@@ -1865,7 +1865,7 @@
           <p:cNvPr id="2" name="Body">
             <a:extLst xmlns:a="http://schemas.openxmlformats.org/drawingml/2006/main">
               <a:ext uri="{FF2B5EF4-FFF2-40B4-BE49-F238E27FC236}">
-                <a16:creationId xmlns:a16="http://schemas.microsoft.com/office/drawing/2014/main" id="{F20A3173-92E1-4118-A89A-2ADC1C45EA02}"/>
+                <a16:creationId xmlns:a16="http://schemas.microsoft.com/office/drawing/2014/main" id="{57E4A63F-EB2C-4ED8-9E79-F5DA171AC689}"/>
               </a:ext>
             </a:extLst>
           </p:cNvPr>
@@ -2111,7 +2111,7 @@
           <p:cNvPr id="4" name="Title">
             <a:extLst xmlns:a="http://schemas.openxmlformats.org/drawingml/2006/main">
               <a:ext uri="{FF2B5EF4-FFF2-40B4-BE49-F238E27FC236}">
-                <a16:creationId xmlns:a16="http://schemas.microsoft.com/office/drawing/2014/main" id="{899173B2-457A-4516-8CCA-782998DAD26B}"/>
+                <a16:creationId xmlns:a16="http://schemas.microsoft.com/office/drawing/2014/main" id="{238D6A94-C7C2-4B41-AA9B-7B5D4F0DF1AE}"/>
               </a:ext>
             </a:extLst>
           </p:cNvPr>
@@ -2340,7 +2340,7 @@
           <p:cNvPr id="2" name="Left column">
             <a:extLst xmlns:a="http://schemas.openxmlformats.org/drawingml/2006/main">
               <a:ext uri="{FF2B5EF4-FFF2-40B4-BE49-F238E27FC236}">
-                <a16:creationId xmlns:a16="http://schemas.microsoft.com/office/drawing/2014/main" id="{47041428-08D6-42BE-8E2C-A1D2C73A9632}"/>
+                <a16:creationId xmlns:a16="http://schemas.microsoft.com/office/drawing/2014/main" id="{78A41F0E-EADD-4354-B1E0-20EA1EE44636}"/>
               </a:ext>
             </a:extLst>
           </p:cNvPr>
@@ -2569,7 +2569,7 @@
           <p:cNvPr id="3" name="Right column">
             <a:extLst xmlns:a="http://schemas.openxmlformats.org/drawingml/2006/main">
               <a:ext uri="{FF2B5EF4-FFF2-40B4-BE49-F238E27FC236}">
-                <a16:creationId xmlns:a16="http://schemas.microsoft.com/office/drawing/2014/main" id="{A361810E-580C-4F59-B861-A54ABA3F728B}"/>
+                <a16:creationId xmlns:a16="http://schemas.microsoft.com/office/drawing/2014/main" id="{FB60E174-0798-464B-AA68-6665C0803040}"/>
               </a:ext>
             </a:extLst>
           </p:cNvPr>
@@ -2815,7 +2815,7 @@
           <p:cNvPr id="3" name="Title">
             <a:extLst xmlns:a="http://schemas.openxmlformats.org/drawingml/2006/main">
               <a:ext uri="{FF2B5EF4-FFF2-40B4-BE49-F238E27FC236}">
-                <a16:creationId xmlns:a16="http://schemas.microsoft.com/office/drawing/2014/main" id="{C9EDE04E-21E5-4A13-A4F6-CE3C05FCA13E}"/>
+                <a16:creationId xmlns:a16="http://schemas.microsoft.com/office/drawing/2014/main" id="{70598EF3-043C-444A-A5A1-B18969FEB2CC}"/>
               </a:ext>
             </a:extLst>
           </p:cNvPr>
@@ -3044,7 +3044,7 @@
           <p:cNvPr id="2" name="Left column">
             <a:extLst xmlns:a="http://schemas.openxmlformats.org/drawingml/2006/main">
               <a:ext uri="{FF2B5EF4-FFF2-40B4-BE49-F238E27FC236}">
-                <a16:creationId xmlns:a16="http://schemas.microsoft.com/office/drawing/2014/main" id="{CC7E3F32-BC89-457D-B886-659244175253}"/>
+                <a16:creationId xmlns:a16="http://schemas.microsoft.com/office/drawing/2014/main" id="{FE399677-67CB-4289-9849-3CCC9426635C}"/>
               </a:ext>
             </a:extLst>
           </p:cNvPr>
@@ -3311,12 +3311,12 @@
   </p:cSld>
   <p:clrMap bg1="lt1" tx1="dk1" bg2="lt2" tx2="dk2" accent1="accent1" accent2="accent2" accent3="accent3" accent4="accent4" accent5="accent5" accent6="accent6" hlink="hlink" folHlink="folHlink"/>
   <p:sldLayoutIdLst>
-    <p:sldLayoutId xmlns:r="http://schemas.openxmlformats.org/officeDocument/2006/relationships" id="2147483649" r:id="R4e61cfc36b694702"/>
-    <p:sldLayoutId xmlns:r="http://schemas.openxmlformats.org/officeDocument/2006/relationships" id="2147483650" r:id="R82e3c27429bd4427"/>
-    <p:sldLayoutId xmlns:r="http://schemas.openxmlformats.org/officeDocument/2006/relationships" id="2147483651" r:id="Rd3884a5e79154551"/>
-    <p:sldLayoutId xmlns:r="http://schemas.openxmlformats.org/officeDocument/2006/relationships" id="2147483652" r:id="R38ccc95140b94a01"/>
-    <p:sldLayoutId xmlns:r="http://schemas.openxmlformats.org/officeDocument/2006/relationships" id="2147483653" r:id="R2a902b4618f94d45"/>
-    <p:sldLayoutId xmlns:r="http://schemas.openxmlformats.org/officeDocument/2006/relationships" id="2147483654" r:id="Re7d2499ac55a4c90"/>
+    <p:sldLayoutId xmlns:r="http://schemas.openxmlformats.org/officeDocument/2006/relationships" id="2147483649" r:id="Rb813607ffdac450c"/>
+    <p:sldLayoutId xmlns:r="http://schemas.openxmlformats.org/officeDocument/2006/relationships" id="2147483650" r:id="R9e9fc027ed754cc0"/>
+    <p:sldLayoutId xmlns:r="http://schemas.openxmlformats.org/officeDocument/2006/relationships" id="2147483651" r:id="R091a50b85bd3430d"/>
+    <p:sldLayoutId xmlns:r="http://schemas.openxmlformats.org/officeDocument/2006/relationships" id="2147483652" r:id="Re14965a389d04172"/>
+    <p:sldLayoutId xmlns:r="http://schemas.openxmlformats.org/officeDocument/2006/relationships" id="2147483653" r:id="Rc79c43a5a795441b"/>
+    <p:sldLayoutId xmlns:r="http://schemas.openxmlformats.org/officeDocument/2006/relationships" id="2147483654" r:id="Reade1bf42a6740a1"/>
   </p:sldLayoutIdLst>
   <p:txStyles>
     <p:titleStyle>
@@ -3866,9 +3866,9 @@
           <c:invertIfNegative val="0"/>
           <c:cat>
             <c:strRef>
-              <c:f>'Chart Data'!$A$2:$A$6</c:f>
+              <c:f>'Chart Data'!$A$2:$A$5</c:f>
               <c:strCache>
-                <c:ptCount val="5"/>
+                <c:ptCount val="4"/>
                 <c:pt idx="0">
                   <c:v>Full</c:v>
                 </c:pt>
@@ -3881,18 +3881,15 @@
                 <c:pt idx="3">
                   <c:v>0.5×</c:v>
                 </c:pt>
-                <c:pt idx="4">
-                  <c:v>0.75×</c:v>
-                </c:pt>
               </c:strCache>
             </c:strRef>
           </c:cat>
           <c:val>
             <c:numRef>
-              <c:f>'Chart Data'!$B$2:$B$6</c:f>
+              <c:f>'Chart Data'!$B$2:$B$5</c:f>
               <c:numCache>
                 <c:formatCode>General</c:formatCode>
-                <c:ptCount val="5"/>
+                <c:ptCount val="4"/>
                 <c:pt idx="0">
                   <c:v>8.882</c:v>
                 </c:pt>
@@ -3904,9 +3901,6 @@
                 </c:pt>
                 <c:pt idx="3">
                   <c:v>6.158</c:v>
-                </c:pt>
-                <c:pt idx="4">
-                  <c:v>9.039</c:v>
                 </c:pt>
               </c:numCache>
             </c:numRef>
@@ -3926,9 +3920,9 @@
           <c:invertIfNegative val="0"/>
           <c:cat>
             <c:strRef>
-              <c:f>'Chart Data'!$C$2:$C$6</c:f>
+              <c:f>'Chart Data'!$C$2:$C$5</c:f>
               <c:strCache>
-                <c:ptCount val="5"/>
+                <c:ptCount val="4"/>
                 <c:pt idx="0">
                   <c:v>Full</c:v>
                 </c:pt>
@@ -3941,18 +3935,15 @@
                 <c:pt idx="3">
                   <c:v>0.5×</c:v>
                 </c:pt>
-                <c:pt idx="4">
-                  <c:v>0.75×</c:v>
-                </c:pt>
               </c:strCache>
             </c:strRef>
           </c:cat>
           <c:val>
             <c:numRef>
-              <c:f>'Chart Data'!$D$2:$D$6</c:f>
+              <c:f>'Chart Data'!$D$2:$D$5</c:f>
               <c:numCache>
                 <c:formatCode>General</c:formatCode>
-                <c:ptCount val="5"/>
+                <c:ptCount val="4"/>
                 <c:pt idx="0">
                   <c:v>2</c:v>
                 </c:pt>
@@ -3963,9 +3954,6 @@
                   <c:v>2</c:v>
                 </c:pt>
                 <c:pt idx="3">
-                  <c:v>2</c:v>
-                </c:pt>
-                <c:pt idx="4">
                   <c:v>2</c:v>
                 </c:pt>
               </c:numCache>
@@ -4176,7 +4164,7 @@
           <p:cNvPr id="5" name="">
             <a:extLst xmlns:a="http://schemas.openxmlformats.org/drawingml/2006/main">
               <a:ext uri="{FF2B5EF4-FFF2-40B4-BE49-F238E27FC236}">
-                <a16:creationId xmlns:a16="http://schemas.microsoft.com/office/drawing/2014/main" id="{6231B366-2261-4CA3-A4F6-3C93D194AFB1}"/>
+                <a16:creationId xmlns:a16="http://schemas.microsoft.com/office/drawing/2014/main" id="{FB96B3B9-E27D-4F70-9EFF-463781721C60}"/>
               </a:ext>
             </a:extLst>
           </p:cNvPr>
@@ -4234,7 +4222,7 @@
           <p:cNvPr id="2" name="">
             <a:extLst xmlns:a="http://schemas.openxmlformats.org/drawingml/2006/main">
               <a:ext uri="{FF2B5EF4-FFF2-40B4-BE49-F238E27FC236}">
-                <a16:creationId xmlns:a16="http://schemas.microsoft.com/office/drawing/2014/main" id="{92B64A86-41B4-4018-A123-111331AE706C}"/>
+                <a16:creationId xmlns:a16="http://schemas.microsoft.com/office/drawing/2014/main" id="{E92B54C1-30D9-4EA6-9756-7A2C7304EAC2}"/>
               </a:ext>
             </a:extLst>
           </p:cNvPr>
@@ -4279,7 +4267,7 @@
           <p:cNvPr id="3" name="">
             <a:extLst xmlns:a="http://schemas.openxmlformats.org/drawingml/2006/main">
               <a:ext uri="{FF2B5EF4-FFF2-40B4-BE49-F238E27FC236}">
-                <a16:creationId xmlns:a16="http://schemas.microsoft.com/office/drawing/2014/main" id="{16919AF6-57B0-43BB-9D3B-C7484D24BD81}"/>
+                <a16:creationId xmlns:a16="http://schemas.microsoft.com/office/drawing/2014/main" id="{5194251D-410F-4685-A072-2A9E3F2E4CC4}"/>
               </a:ext>
             </a:extLst>
           </p:cNvPr>
@@ -4324,7 +4312,7 @@
           <p:cNvPr id="4" name="">
             <a:extLst xmlns:a="http://schemas.openxmlformats.org/drawingml/2006/main">
               <a:ext uri="{FF2B5EF4-FFF2-40B4-BE49-F238E27FC236}">
-                <a16:creationId xmlns:a16="http://schemas.microsoft.com/office/drawing/2014/main" id="{4CDA085C-C1D9-447B-B492-95E1492984B9}"/>
+                <a16:creationId xmlns:a16="http://schemas.microsoft.com/office/drawing/2014/main" id="{CE18FAA2-D72C-4133-B368-CEE8D039DE9A}"/>
               </a:ext>
             </a:extLst>
           </p:cNvPr>
@@ -4367,7 +4355,7 @@
     </p:spTree>
     <p:extLst>
       <p:ext uri="{BB962C8B-B14F-4D97-AF65-F5344CB8AC3E}">
-        <p14:creationId xmlns:p14="http://schemas.microsoft.com/office/powerpoint/2010/main" val="908829904"/>
+        <p14:creationId xmlns:p14="http://schemas.microsoft.com/office/powerpoint/2010/main" val="939593045"/>
       </p:ext>
     </p:extLst>
   </p:cSld>
@@ -4398,7 +4386,7 @@
           <p:cNvPr id="29" name="">
             <a:extLst xmlns:a="http://schemas.openxmlformats.org/drawingml/2006/main">
               <a:ext uri="{FF2B5EF4-FFF2-40B4-BE49-F238E27FC236}">
-                <a16:creationId xmlns:a16="http://schemas.microsoft.com/office/drawing/2014/main" id="{43B02E36-C599-4A4F-816A-27653C3C660E}"/>
+                <a16:creationId xmlns:a16="http://schemas.microsoft.com/office/drawing/2014/main" id="{E57A48EE-7652-4540-8B5F-E0C4D59DAE4A}"/>
               </a:ext>
             </a:extLst>
           </p:cNvPr>
@@ -4443,7 +4431,7 @@
           <p:cNvPr id="2" name="">
             <a:extLst xmlns:a="http://schemas.openxmlformats.org/drawingml/2006/main">
               <a:ext uri="{FF2B5EF4-FFF2-40B4-BE49-F238E27FC236}">
-                <a16:creationId xmlns:a16="http://schemas.microsoft.com/office/drawing/2014/main" id="{C2001038-B31A-4B98-ADC5-6C9BC270A238}"/>
+                <a16:creationId xmlns:a16="http://schemas.microsoft.com/office/drawing/2014/main" id="{8BE77A37-6968-4F85-ABF0-72C999CE879E}"/>
               </a:ext>
             </a:extLst>
           </p:cNvPr>
@@ -4473,7 +4461,7 @@
           <p:cNvPr id="3" name="">
             <a:extLst xmlns:a="http://schemas.openxmlformats.org/drawingml/2006/main">
               <a:ext uri="{FF2B5EF4-FFF2-40B4-BE49-F238E27FC236}">
-                <a16:creationId xmlns:a16="http://schemas.microsoft.com/office/drawing/2014/main" id="{EA46BDE2-E62C-4BF8-A7B1-8FC97AE5C3C4}"/>
+                <a16:creationId xmlns:a16="http://schemas.microsoft.com/office/drawing/2014/main" id="{EC0B1FD8-0296-48CA-8B80-EB5617263F74}"/>
               </a:ext>
             </a:extLst>
           </p:cNvPr>
@@ -4518,7 +4506,7 @@
           <p:cNvPr id="4" name="">
             <a:extLst xmlns:a="http://schemas.openxmlformats.org/drawingml/2006/main">
               <a:ext uri="{FF2B5EF4-FFF2-40B4-BE49-F238E27FC236}">
-                <a16:creationId xmlns:a16="http://schemas.microsoft.com/office/drawing/2014/main" id="{B5B693C0-EAA2-4246-9DDB-633745478776}"/>
+                <a16:creationId xmlns:a16="http://schemas.microsoft.com/office/drawing/2014/main" id="{F56374B2-1EB6-4D88-9CB7-3BB76243AB85}"/>
               </a:ext>
             </a:extLst>
           </p:cNvPr>
@@ -4563,7 +4551,7 @@
           <p:cNvPr id="5" name="">
             <a:extLst xmlns:a="http://schemas.openxmlformats.org/drawingml/2006/main">
               <a:ext uri="{FF2B5EF4-FFF2-40B4-BE49-F238E27FC236}">
-                <a16:creationId xmlns:a16="http://schemas.microsoft.com/office/drawing/2014/main" id="{1BBA93F7-732F-47CB-A93D-309FF8CBEBD5}"/>
+                <a16:creationId xmlns:a16="http://schemas.microsoft.com/office/drawing/2014/main" id="{29943380-9A93-4737-AD43-C70B74881F6B}"/>
               </a:ext>
             </a:extLst>
           </p:cNvPr>
@@ -4608,7 +4596,7 @@
           <p:cNvPr id="6" name="">
             <a:extLst xmlns:a="http://schemas.openxmlformats.org/drawingml/2006/main">
               <a:ext uri="{FF2B5EF4-FFF2-40B4-BE49-F238E27FC236}">
-                <a16:creationId xmlns:a16="http://schemas.microsoft.com/office/drawing/2014/main" id="{DA5DA816-2638-41A5-8D72-908D6081B5D8}"/>
+                <a16:creationId xmlns:a16="http://schemas.microsoft.com/office/drawing/2014/main" id="{6DDCA64C-BD4C-41A4-BCB7-2383B610148F}"/>
               </a:ext>
             </a:extLst>
           </p:cNvPr>
@@ -4640,7 +4628,7 @@
           <p:cNvPr id="7" name="">
             <a:extLst xmlns:a="http://schemas.openxmlformats.org/drawingml/2006/main">
               <a:ext uri="{FF2B5EF4-FFF2-40B4-BE49-F238E27FC236}">
-                <a16:creationId xmlns:a16="http://schemas.microsoft.com/office/drawing/2014/main" id="{1E79AE19-21E0-4A6E-AA54-9E4433BA4605}"/>
+                <a16:creationId xmlns:a16="http://schemas.microsoft.com/office/drawing/2014/main" id="{37754F06-6443-49BE-B43A-971E81E9EDCC}"/>
               </a:ext>
             </a:extLst>
           </p:cNvPr>
@@ -4672,7 +4660,7 @@
           <p:cNvPr id="8" name="">
             <a:extLst xmlns:a="http://schemas.openxmlformats.org/drawingml/2006/main">
               <a:ext uri="{FF2B5EF4-FFF2-40B4-BE49-F238E27FC236}">
-                <a16:creationId xmlns:a16="http://schemas.microsoft.com/office/drawing/2014/main" id="{17B9A4CC-7537-4BDF-81D2-CBCB56115368}"/>
+                <a16:creationId xmlns:a16="http://schemas.microsoft.com/office/drawing/2014/main" id="{F40C0710-29A0-44EE-AF38-622D341FE803}"/>
               </a:ext>
             </a:extLst>
           </p:cNvPr>
@@ -4704,7 +4692,7 @@
           <p:cNvPr id="9" name="">
             <a:extLst xmlns:a="http://schemas.openxmlformats.org/drawingml/2006/main">
               <a:ext uri="{FF2B5EF4-FFF2-40B4-BE49-F238E27FC236}">
-                <a16:creationId xmlns:a16="http://schemas.microsoft.com/office/drawing/2014/main" id="{9E746EE6-9B3A-484A-8FC4-A8DDA27F37F1}"/>
+                <a16:creationId xmlns:a16="http://schemas.microsoft.com/office/drawing/2014/main" id="{CD40F7E8-03F0-47BA-9733-4F6893799735}"/>
               </a:ext>
             </a:extLst>
           </p:cNvPr>
@@ -4749,7 +4737,7 @@
           <p:cNvPr id="10" name="">
             <a:extLst xmlns:a="http://schemas.openxmlformats.org/drawingml/2006/main">
               <a:ext uri="{FF2B5EF4-FFF2-40B4-BE49-F238E27FC236}">
-                <a16:creationId xmlns:a16="http://schemas.microsoft.com/office/drawing/2014/main" id="{DD55872A-81A7-4779-BF5D-67081D1DDB71}"/>
+                <a16:creationId xmlns:a16="http://schemas.microsoft.com/office/drawing/2014/main" id="{12AC0234-EF08-41C8-9347-BAE36C5151C8}"/>
               </a:ext>
             </a:extLst>
           </p:cNvPr>
@@ -4779,7 +4767,7 @@
           <p:cNvPr id="11" name="">
             <a:extLst xmlns:a="http://schemas.openxmlformats.org/drawingml/2006/main">
               <a:ext uri="{FF2B5EF4-FFF2-40B4-BE49-F238E27FC236}">
-                <a16:creationId xmlns:a16="http://schemas.microsoft.com/office/drawing/2014/main" id="{F4B628EA-B1A2-4027-B614-857317F382C4}"/>
+                <a16:creationId xmlns:a16="http://schemas.microsoft.com/office/drawing/2014/main" id="{E3EBE8BD-CE58-475B-825A-B985CE47C32E}"/>
               </a:ext>
             </a:extLst>
           </p:cNvPr>
@@ -4824,7 +4812,7 @@
           <p:cNvPr id="12" name="">
             <a:extLst xmlns:a="http://schemas.openxmlformats.org/drawingml/2006/main">
               <a:ext uri="{FF2B5EF4-FFF2-40B4-BE49-F238E27FC236}">
-                <a16:creationId xmlns:a16="http://schemas.microsoft.com/office/drawing/2014/main" id="{74EF305D-ADCE-48B5-9E8C-0C274BD437CB}"/>
+                <a16:creationId xmlns:a16="http://schemas.microsoft.com/office/drawing/2014/main" id="{F72851C4-5144-4CB2-827B-1ABEBBDB1110}"/>
               </a:ext>
             </a:extLst>
           </p:cNvPr>
@@ -4856,7 +4844,7 @@
           <p:cNvPr id="13" name="">
             <a:extLst xmlns:a="http://schemas.openxmlformats.org/drawingml/2006/main">
               <a:ext uri="{FF2B5EF4-FFF2-40B4-BE49-F238E27FC236}">
-                <a16:creationId xmlns:a16="http://schemas.microsoft.com/office/drawing/2014/main" id="{3B04BFB6-0905-4D94-8724-91EDE16AE2F5}"/>
+                <a16:creationId xmlns:a16="http://schemas.microsoft.com/office/drawing/2014/main" id="{B1A005E2-7188-4981-8554-F6F4EA29D4E7}"/>
               </a:ext>
             </a:extLst>
           </p:cNvPr>
@@ -4888,7 +4876,7 @@
           <p:cNvPr id="14" name="">
             <a:extLst xmlns:a="http://schemas.openxmlformats.org/drawingml/2006/main">
               <a:ext uri="{FF2B5EF4-FFF2-40B4-BE49-F238E27FC236}">
-                <a16:creationId xmlns:a16="http://schemas.microsoft.com/office/drawing/2014/main" id="{44AE3A98-44CF-4F77-BBEB-CC17A61D2AAA}"/>
+                <a16:creationId xmlns:a16="http://schemas.microsoft.com/office/drawing/2014/main" id="{2FC231E1-07DF-4A0A-A25D-8B51BB465E8B}"/>
               </a:ext>
             </a:extLst>
           </p:cNvPr>
@@ -4920,7 +4908,7 @@
           <p:cNvPr id="15" name="">
             <a:extLst xmlns:a="http://schemas.openxmlformats.org/drawingml/2006/main">
               <a:ext uri="{FF2B5EF4-FFF2-40B4-BE49-F238E27FC236}">
-                <a16:creationId xmlns:a16="http://schemas.microsoft.com/office/drawing/2014/main" id="{A9FB1F65-409A-44AC-86E1-8FB224D28D88}"/>
+                <a16:creationId xmlns:a16="http://schemas.microsoft.com/office/drawing/2014/main" id="{C5AAD455-1100-404A-ACCE-99475A396ED8}"/>
               </a:ext>
             </a:extLst>
           </p:cNvPr>
@@ -4965,7 +4953,7 @@
           <p:cNvPr id="16" name="">
             <a:extLst xmlns:a="http://schemas.openxmlformats.org/drawingml/2006/main">
               <a:ext uri="{FF2B5EF4-FFF2-40B4-BE49-F238E27FC236}">
-                <a16:creationId xmlns:a16="http://schemas.microsoft.com/office/drawing/2014/main" id="{51C6E4FB-48D6-47E3-9BFF-FB5AC3AA790C}"/>
+                <a16:creationId xmlns:a16="http://schemas.microsoft.com/office/drawing/2014/main" id="{B9C94F78-C9D4-471B-ACD2-0D50E4A42B75}"/>
               </a:ext>
             </a:extLst>
           </p:cNvPr>
@@ -4995,7 +4983,7 @@
           <p:cNvPr id="17" name="">
             <a:extLst xmlns:a="http://schemas.openxmlformats.org/drawingml/2006/main">
               <a:ext uri="{FF2B5EF4-FFF2-40B4-BE49-F238E27FC236}">
-                <a16:creationId xmlns:a16="http://schemas.microsoft.com/office/drawing/2014/main" id="{41D9E7B1-678B-4C9E-B5FB-E995D3A31D06}"/>
+                <a16:creationId xmlns:a16="http://schemas.microsoft.com/office/drawing/2014/main" id="{0642146F-8896-4942-9FFD-8ACEA50C2A69}"/>
               </a:ext>
             </a:extLst>
           </p:cNvPr>
@@ -5040,7 +5028,7 @@
           <p:cNvPr id="18" name="">
             <a:extLst xmlns:a="http://schemas.openxmlformats.org/drawingml/2006/main">
               <a:ext uri="{FF2B5EF4-FFF2-40B4-BE49-F238E27FC236}">
-                <a16:creationId xmlns:a16="http://schemas.microsoft.com/office/drawing/2014/main" id="{AC7311ED-961E-4DE7-9D8E-49CCAEE48D10}"/>
+                <a16:creationId xmlns:a16="http://schemas.microsoft.com/office/drawing/2014/main" id="{CFE530E6-FBAE-4963-93E7-886F04B55BCC}"/>
               </a:ext>
             </a:extLst>
           </p:cNvPr>
@@ -5072,7 +5060,7 @@
           <p:cNvPr id="19" name="">
             <a:extLst xmlns:a="http://schemas.openxmlformats.org/drawingml/2006/main">
               <a:ext uri="{FF2B5EF4-FFF2-40B4-BE49-F238E27FC236}">
-                <a16:creationId xmlns:a16="http://schemas.microsoft.com/office/drawing/2014/main" id="{04859C60-0F59-487D-85B1-E3042BA26C64}"/>
+                <a16:creationId xmlns:a16="http://schemas.microsoft.com/office/drawing/2014/main" id="{965CC9C7-3285-46EB-B1C0-251386EBE4B6}"/>
               </a:ext>
             </a:extLst>
           </p:cNvPr>
@@ -5104,7 +5092,7 @@
           <p:cNvPr id="20" name="">
             <a:extLst xmlns:a="http://schemas.openxmlformats.org/drawingml/2006/main">
               <a:ext uri="{FF2B5EF4-FFF2-40B4-BE49-F238E27FC236}">
-                <a16:creationId xmlns:a16="http://schemas.microsoft.com/office/drawing/2014/main" id="{05CB488B-C44B-49E9-8041-0883188557CE}"/>
+                <a16:creationId xmlns:a16="http://schemas.microsoft.com/office/drawing/2014/main" id="{A0804ED7-AEDC-46D8-AF8A-D13F96D8B9F8}"/>
               </a:ext>
             </a:extLst>
           </p:cNvPr>
@@ -5136,7 +5124,7 @@
           <p:cNvPr id="21" name="">
             <a:extLst xmlns:a="http://schemas.openxmlformats.org/drawingml/2006/main">
               <a:ext uri="{FF2B5EF4-FFF2-40B4-BE49-F238E27FC236}">
-                <a16:creationId xmlns:a16="http://schemas.microsoft.com/office/drawing/2014/main" id="{837D9F8B-4CD0-4CFA-AFB0-23DD83A296EF}"/>
+                <a16:creationId xmlns:a16="http://schemas.microsoft.com/office/drawing/2014/main" id="{D1A4F118-66B1-422D-81EE-21DF2232BE46}"/>
               </a:ext>
             </a:extLst>
           </p:cNvPr>
@@ -5181,7 +5169,7 @@
           <p:cNvPr id="22" name="">
             <a:extLst xmlns:a="http://schemas.openxmlformats.org/drawingml/2006/main">
               <a:ext uri="{FF2B5EF4-FFF2-40B4-BE49-F238E27FC236}">
-                <a16:creationId xmlns:a16="http://schemas.microsoft.com/office/drawing/2014/main" id="{996F28F0-E659-4D9A-87F4-60CC48C05C27}"/>
+                <a16:creationId xmlns:a16="http://schemas.microsoft.com/office/drawing/2014/main" id="{7815DBAE-7EA4-4B7E-AB92-95D7C9164606}"/>
               </a:ext>
             </a:extLst>
           </p:cNvPr>
@@ -5211,7 +5199,7 @@
           <p:cNvPr id="23" name="">
             <a:extLst xmlns:a="http://schemas.openxmlformats.org/drawingml/2006/main">
               <a:ext uri="{FF2B5EF4-FFF2-40B4-BE49-F238E27FC236}">
-                <a16:creationId xmlns:a16="http://schemas.microsoft.com/office/drawing/2014/main" id="{6B84ED23-FEDC-423A-906C-CFB7A0B54CD8}"/>
+                <a16:creationId xmlns:a16="http://schemas.microsoft.com/office/drawing/2014/main" id="{C98E40C4-2167-41B0-9D20-653D7A7EA86B}"/>
               </a:ext>
             </a:extLst>
           </p:cNvPr>
@@ -5241,7 +5229,7 @@
           <p:cNvPr id="24" name="">
             <a:extLst xmlns:a="http://schemas.openxmlformats.org/drawingml/2006/main">
               <a:ext uri="{FF2B5EF4-FFF2-40B4-BE49-F238E27FC236}">
-                <a16:creationId xmlns:a16="http://schemas.microsoft.com/office/drawing/2014/main" id="{EBF8C550-3C16-4011-94F6-8846C615B67A}"/>
+                <a16:creationId xmlns:a16="http://schemas.microsoft.com/office/drawing/2014/main" id="{32DBD944-5A50-4AED-852F-85156280549C}"/>
               </a:ext>
             </a:extLst>
           </p:cNvPr>
@@ -5286,7 +5274,7 @@
           <p:cNvPr id="25" name="">
             <a:extLst xmlns:a="http://schemas.openxmlformats.org/drawingml/2006/main">
               <a:ext uri="{FF2B5EF4-FFF2-40B4-BE49-F238E27FC236}">
-                <a16:creationId xmlns:a16="http://schemas.microsoft.com/office/drawing/2014/main" id="{0A39B664-F2AE-4C2A-A109-CD81D22F9CD7}"/>
+                <a16:creationId xmlns:a16="http://schemas.microsoft.com/office/drawing/2014/main" id="{AE260CA8-5F07-463B-A566-E7EAACB1158B}"/>
               </a:ext>
             </a:extLst>
           </p:cNvPr>
@@ -5331,7 +5319,7 @@
           <p:cNvPr id="26" name="">
             <a:extLst xmlns:a="http://schemas.openxmlformats.org/drawingml/2006/main">
               <a:ext uri="{FF2B5EF4-FFF2-40B4-BE49-F238E27FC236}">
-                <a16:creationId xmlns:a16="http://schemas.microsoft.com/office/drawing/2014/main" id="{E45C719B-4085-498E-B153-C067208A04F2}"/>
+                <a16:creationId xmlns:a16="http://schemas.microsoft.com/office/drawing/2014/main" id="{F7429049-F10F-4F18-8820-49687F01B565}"/>
               </a:ext>
             </a:extLst>
           </p:cNvPr>
@@ -5376,7 +5364,7 @@
           <p:cNvPr id="27" name="">
             <a:extLst xmlns:a="http://schemas.openxmlformats.org/drawingml/2006/main">
               <a:ext uri="{FF2B5EF4-FFF2-40B4-BE49-F238E27FC236}">
-                <a16:creationId xmlns:a16="http://schemas.microsoft.com/office/drawing/2014/main" id="{972677C9-24FC-4F68-AE9D-E745C0F4CF3D}"/>
+                <a16:creationId xmlns:a16="http://schemas.microsoft.com/office/drawing/2014/main" id="{CE1C3C00-8D44-4687-98E7-FA939230E3DA}"/>
               </a:ext>
             </a:extLst>
           </p:cNvPr>
@@ -5421,7 +5409,7 @@
           <p:cNvPr id="28" name="">
             <a:extLst xmlns:a="http://schemas.openxmlformats.org/drawingml/2006/main">
               <a:ext uri="{FF2B5EF4-FFF2-40B4-BE49-F238E27FC236}">
-                <a16:creationId xmlns:a16="http://schemas.microsoft.com/office/drawing/2014/main" id="{99010137-F9FF-4BF4-B84F-81B5BF9E7160}"/>
+                <a16:creationId xmlns:a16="http://schemas.microsoft.com/office/drawing/2014/main" id="{7C583CDF-4AB2-40BD-90AE-89BD1F0A5468}"/>
               </a:ext>
             </a:extLst>
           </p:cNvPr>
@@ -5464,7 +5452,7 @@
     </p:spTree>
     <p:extLst>
       <p:ext uri="{BB962C8B-B14F-4D97-AF65-F5344CB8AC3E}">
-        <p14:creationId xmlns:p14="http://schemas.microsoft.com/office/powerpoint/2010/main" val="642412264"/>
+        <p14:creationId xmlns:p14="http://schemas.microsoft.com/office/powerpoint/2010/main" val="298063405"/>
       </p:ext>
     </p:extLst>
   </p:cSld>
@@ -5495,7 +5483,7 @@
           <p:cNvPr id="15" name="">
             <a:extLst xmlns:a="http://schemas.openxmlformats.org/drawingml/2006/main">
               <a:ext uri="{FF2B5EF4-FFF2-40B4-BE49-F238E27FC236}">
-                <a16:creationId xmlns:a16="http://schemas.microsoft.com/office/drawing/2014/main" id="{765A061E-2B64-45FD-A7D0-80D5A98A62C2}"/>
+                <a16:creationId xmlns:a16="http://schemas.microsoft.com/office/drawing/2014/main" id="{235D8A48-309B-450D-9AA0-5DE13F41185F}"/>
               </a:ext>
             </a:extLst>
           </p:cNvPr>
@@ -5540,7 +5528,7 @@
           <p:cNvPr id="2" name="">
             <a:extLst xmlns:a="http://schemas.openxmlformats.org/drawingml/2006/main">
               <a:ext uri="{FF2B5EF4-FFF2-40B4-BE49-F238E27FC236}">
-                <a16:creationId xmlns:a16="http://schemas.microsoft.com/office/drawing/2014/main" id="{4C224ABD-D0AF-4831-B542-C2A23BDC3593}"/>
+                <a16:creationId xmlns:a16="http://schemas.microsoft.com/office/drawing/2014/main" id="{42EBD704-4BDE-4767-8992-AD702634F02C}"/>
               </a:ext>
             </a:extLst>
           </p:cNvPr>
@@ -5570,7 +5558,7 @@
           <p:cNvPr id="3" name="">
             <a:extLst xmlns:a="http://schemas.openxmlformats.org/drawingml/2006/main">
               <a:ext uri="{FF2B5EF4-FFF2-40B4-BE49-F238E27FC236}">
-                <a16:creationId xmlns:a16="http://schemas.microsoft.com/office/drawing/2014/main" id="{47AF6682-BAE4-4394-8690-6E79D912B81B}"/>
+                <a16:creationId xmlns:a16="http://schemas.microsoft.com/office/drawing/2014/main" id="{4F18428C-504E-4505-BC27-96C86784D4EC}"/>
               </a:ext>
             </a:extLst>
           </p:cNvPr>
@@ -5615,7 +5603,7 @@
           <p:cNvPr id="4" name="">
             <a:extLst xmlns:a="http://schemas.openxmlformats.org/drawingml/2006/main">
               <a:ext uri="{FF2B5EF4-FFF2-40B4-BE49-F238E27FC236}">
-                <a16:creationId xmlns:a16="http://schemas.microsoft.com/office/drawing/2014/main" id="{A2F14EDE-D2BC-4D69-986C-302916D13825}"/>
+                <a16:creationId xmlns:a16="http://schemas.microsoft.com/office/drawing/2014/main" id="{5F946B46-4B1B-4ABE-B3CC-0A6C70A438B3}"/>
               </a:ext>
             </a:extLst>
           </p:cNvPr>
@@ -5660,7 +5648,7 @@
           <p:cNvPr id="5" name="">
             <a:extLst xmlns:a="http://schemas.openxmlformats.org/drawingml/2006/main">
               <a:ext uri="{FF2B5EF4-FFF2-40B4-BE49-F238E27FC236}">
-                <a16:creationId xmlns:a16="http://schemas.microsoft.com/office/drawing/2014/main" id="{F679DFA3-755C-41E1-AAC9-56B3C0281CD7}"/>
+                <a16:creationId xmlns:a16="http://schemas.microsoft.com/office/drawing/2014/main" id="{BF27FE57-EBF0-4492-901E-B07A58631FD5}"/>
               </a:ext>
             </a:extLst>
           </p:cNvPr>
@@ -5692,7 +5680,7 @@
           <p:cNvPr id="6" name="">
             <a:extLst xmlns:a="http://schemas.openxmlformats.org/drawingml/2006/main">
               <a:ext uri="{FF2B5EF4-FFF2-40B4-BE49-F238E27FC236}">
-                <a16:creationId xmlns:a16="http://schemas.microsoft.com/office/drawing/2014/main" id="{E06DC108-746A-4105-BCAA-8B013835961A}"/>
+                <a16:creationId xmlns:a16="http://schemas.microsoft.com/office/drawing/2014/main" id="{E5E13740-D0F8-462F-A215-7883059BBA59}"/>
               </a:ext>
             </a:extLst>
           </p:cNvPr>
@@ -5724,7 +5712,7 @@
           <p:cNvPr id="7" name="">
             <a:extLst xmlns:a="http://schemas.openxmlformats.org/drawingml/2006/main">
               <a:ext uri="{FF2B5EF4-FFF2-40B4-BE49-F238E27FC236}">
-                <a16:creationId xmlns:a16="http://schemas.microsoft.com/office/drawing/2014/main" id="{B97F84B9-7426-4B5B-A8AE-33281E7BE891}"/>
+                <a16:creationId xmlns:a16="http://schemas.microsoft.com/office/drawing/2014/main" id="{621D1375-6055-4EFF-9787-6C327FBD857C}"/>
               </a:ext>
             </a:extLst>
           </p:cNvPr>
@@ -5756,7 +5744,7 @@
           <p:cNvPr id="8" name="">
             <a:extLst xmlns:a="http://schemas.openxmlformats.org/drawingml/2006/main">
               <a:ext uri="{FF2B5EF4-FFF2-40B4-BE49-F238E27FC236}">
-                <a16:creationId xmlns:a16="http://schemas.microsoft.com/office/drawing/2014/main" id="{EE37B65E-7CED-47B6-9D4D-5E25CAA8C0A3}"/>
+                <a16:creationId xmlns:a16="http://schemas.microsoft.com/office/drawing/2014/main" id="{1A2BC7C6-0FE2-41E9-895B-F970C1E49186}"/>
               </a:ext>
             </a:extLst>
           </p:cNvPr>
@@ -5801,7 +5789,7 @@
           <p:cNvPr id="9" name="">
             <a:extLst xmlns:a="http://schemas.openxmlformats.org/drawingml/2006/main">
               <a:ext uri="{FF2B5EF4-FFF2-40B4-BE49-F238E27FC236}">
-                <a16:creationId xmlns:a16="http://schemas.microsoft.com/office/drawing/2014/main" id="{6FCC6E87-8B8C-4D15-AEC0-2E55DB751426}"/>
+                <a16:creationId xmlns:a16="http://schemas.microsoft.com/office/drawing/2014/main" id="{121DD18C-3C4F-4815-B7C1-6309D05F5742}"/>
               </a:ext>
             </a:extLst>
           </p:cNvPr>
@@ -5846,7 +5834,7 @@
           <p:cNvPr id="10" name="">
             <a:extLst xmlns:a="http://schemas.openxmlformats.org/drawingml/2006/main">
               <a:ext uri="{FF2B5EF4-FFF2-40B4-BE49-F238E27FC236}">
-                <a16:creationId xmlns:a16="http://schemas.microsoft.com/office/drawing/2014/main" id="{3122CAE1-D0BC-4019-8344-8E8CFC147D33}"/>
+                <a16:creationId xmlns:a16="http://schemas.microsoft.com/office/drawing/2014/main" id="{6BFC541D-FB32-47E4-835C-736D8A660758}"/>
               </a:ext>
             </a:extLst>
           </p:cNvPr>
@@ -5878,7 +5866,7 @@
           <p:cNvPr id="11" name="">
             <a:extLst xmlns:a="http://schemas.openxmlformats.org/drawingml/2006/main">
               <a:ext uri="{FF2B5EF4-FFF2-40B4-BE49-F238E27FC236}">
-                <a16:creationId xmlns:a16="http://schemas.microsoft.com/office/drawing/2014/main" id="{90E444CD-C497-4B92-95A6-9F51514CB853}"/>
+                <a16:creationId xmlns:a16="http://schemas.microsoft.com/office/drawing/2014/main" id="{913FC954-F9A5-497E-97B0-2813D8975F8C}"/>
               </a:ext>
             </a:extLst>
           </p:cNvPr>
@@ -5910,7 +5898,7 @@
           <p:cNvPr id="12" name="">
             <a:extLst xmlns:a="http://schemas.openxmlformats.org/drawingml/2006/main">
               <a:ext uri="{FF2B5EF4-FFF2-40B4-BE49-F238E27FC236}">
-                <a16:creationId xmlns:a16="http://schemas.microsoft.com/office/drawing/2014/main" id="{3F30FBFC-02D3-4EC0-AC28-0F3A650241DF}"/>
+                <a16:creationId xmlns:a16="http://schemas.microsoft.com/office/drawing/2014/main" id="{78134293-C5F0-4D93-8916-70303102579F}"/>
               </a:ext>
             </a:extLst>
           </p:cNvPr>
@@ -5942,7 +5930,7 @@
           <p:cNvPr id="13" name="">
             <a:extLst xmlns:a="http://schemas.openxmlformats.org/drawingml/2006/main">
               <a:ext uri="{FF2B5EF4-FFF2-40B4-BE49-F238E27FC236}">
-                <a16:creationId xmlns:a16="http://schemas.microsoft.com/office/drawing/2014/main" id="{96F9E5DA-1B5B-4167-BC57-4D5EF226760A}"/>
+                <a16:creationId xmlns:a16="http://schemas.microsoft.com/office/drawing/2014/main" id="{DAF33DE7-4FAE-4890-82C3-BAF74D8C79D6}"/>
               </a:ext>
             </a:extLst>
           </p:cNvPr>
@@ -5987,7 +5975,7 @@
           <p:cNvPr id="14" name="">
             <a:extLst xmlns:a="http://schemas.openxmlformats.org/drawingml/2006/main">
               <a:ext uri="{FF2B5EF4-FFF2-40B4-BE49-F238E27FC236}">
-                <a16:creationId xmlns:a16="http://schemas.microsoft.com/office/drawing/2014/main" id="{C09C3F46-2449-405D-BB5A-6094E3FEBF31}"/>
+                <a16:creationId xmlns:a16="http://schemas.microsoft.com/office/drawing/2014/main" id="{5A6A18DA-B5E0-4110-B23C-F35FD33E652C}"/>
               </a:ext>
             </a:extLst>
           </p:cNvPr>
@@ -6030,7 +6018,7 @@
     </p:spTree>
     <p:extLst>
       <p:ext uri="{BB962C8B-B14F-4D97-AF65-F5344CB8AC3E}">
-        <p14:creationId xmlns:p14="http://schemas.microsoft.com/office/powerpoint/2010/main" val="2147422174"/>
+        <p14:creationId xmlns:p14="http://schemas.microsoft.com/office/powerpoint/2010/main" val="1004197667"/>
       </p:ext>
     </p:extLst>
   </p:cSld>
@@ -6061,7 +6049,7 @@
           <p:cNvPr id="20" name="">
             <a:extLst xmlns:a="http://schemas.openxmlformats.org/drawingml/2006/main">
               <a:ext uri="{FF2B5EF4-FFF2-40B4-BE49-F238E27FC236}">
-                <a16:creationId xmlns:a16="http://schemas.microsoft.com/office/drawing/2014/main" id="{410B444B-C51E-4889-88B1-CE3E85C447D1}"/>
+                <a16:creationId xmlns:a16="http://schemas.microsoft.com/office/drawing/2014/main" id="{12160E10-80D1-4873-ACCD-E248EF0E8E2F}"/>
               </a:ext>
             </a:extLst>
           </p:cNvPr>
@@ -6106,7 +6094,7 @@
           <p:cNvPr id="2" name="">
             <a:extLst xmlns:a="http://schemas.openxmlformats.org/drawingml/2006/main">
               <a:ext uri="{FF2B5EF4-FFF2-40B4-BE49-F238E27FC236}">
-                <a16:creationId xmlns:a16="http://schemas.microsoft.com/office/drawing/2014/main" id="{8BDE328E-5218-49CB-98CC-EE33768887AD}"/>
+                <a16:creationId xmlns:a16="http://schemas.microsoft.com/office/drawing/2014/main" id="{B2DEEAF6-69D5-4E07-A4EF-847EBD0E46D9}"/>
               </a:ext>
             </a:extLst>
           </p:cNvPr>
@@ -6136,7 +6124,7 @@
           <p:cNvPr id="3" name="">
             <a:extLst xmlns:a="http://schemas.openxmlformats.org/drawingml/2006/main">
               <a:ext uri="{FF2B5EF4-FFF2-40B4-BE49-F238E27FC236}">
-                <a16:creationId xmlns:a16="http://schemas.microsoft.com/office/drawing/2014/main" id="{8E2AAEEF-B888-4FE0-B4DE-F3CF99C15DA1}"/>
+                <a16:creationId xmlns:a16="http://schemas.microsoft.com/office/drawing/2014/main" id="{C611B946-8CA4-4106-9BB0-4A1BF8767D91}"/>
               </a:ext>
             </a:extLst>
           </p:cNvPr>
@@ -6181,7 +6169,7 @@
           <p:cNvPr id="4" name="">
             <a:extLst xmlns:a="http://schemas.openxmlformats.org/drawingml/2006/main">
               <a:ext uri="{FF2B5EF4-FFF2-40B4-BE49-F238E27FC236}">
-                <a16:creationId xmlns:a16="http://schemas.microsoft.com/office/drawing/2014/main" id="{3693E3B2-DF85-4C0E-AA5D-9E0C3D4CCC4D}"/>
+                <a16:creationId xmlns:a16="http://schemas.microsoft.com/office/drawing/2014/main" id="{4D1ABFA0-BCA8-4977-A2EA-4D0B30B050A2}"/>
               </a:ext>
             </a:extLst>
           </p:cNvPr>
@@ -6226,7 +6214,7 @@
           <p:cNvPr id="5" name="">
             <a:extLst xmlns:a="http://schemas.openxmlformats.org/drawingml/2006/main">
               <a:ext uri="{FF2B5EF4-FFF2-40B4-BE49-F238E27FC236}">
-                <a16:creationId xmlns:a16="http://schemas.microsoft.com/office/drawing/2014/main" id="{17BC88C0-3C43-4EF0-8760-B951C1C232A4}"/>
+                <a16:creationId xmlns:a16="http://schemas.microsoft.com/office/drawing/2014/main" id="{33C86966-D340-4B3F-839D-AB3770337956}"/>
               </a:ext>
             </a:extLst>
           </p:cNvPr>
@@ -6258,7 +6246,7 @@
           <p:cNvPr id="6" name="">
             <a:extLst xmlns:a="http://schemas.openxmlformats.org/drawingml/2006/main">
               <a:ext uri="{FF2B5EF4-FFF2-40B4-BE49-F238E27FC236}">
-                <a16:creationId xmlns:a16="http://schemas.microsoft.com/office/drawing/2014/main" id="{9E320794-C25A-4839-8860-EA2B91A2CDAD}"/>
+                <a16:creationId xmlns:a16="http://schemas.microsoft.com/office/drawing/2014/main" id="{9FEF53F8-D1D0-4909-B1E1-DE3E34CDE1CB}"/>
               </a:ext>
             </a:extLst>
           </p:cNvPr>
@@ -6329,7 +6317,7 @@
           <p:cNvPr id="7" name="">
             <a:extLst xmlns:a="http://schemas.openxmlformats.org/drawingml/2006/main">
               <a:ext uri="{FF2B5EF4-FFF2-40B4-BE49-F238E27FC236}">
-                <a16:creationId xmlns:a16="http://schemas.microsoft.com/office/drawing/2014/main" id="{DCC9342B-A440-49DC-A3B7-9F514187F553}"/>
+                <a16:creationId xmlns:a16="http://schemas.microsoft.com/office/drawing/2014/main" id="{9C9F7E01-5985-4AF8-A196-56FB27E7A4DA}"/>
               </a:ext>
             </a:extLst>
           </p:cNvPr>
@@ -6374,7 +6362,7 @@
           <p:cNvPr id="8" name="">
             <a:extLst xmlns:a="http://schemas.openxmlformats.org/drawingml/2006/main">
               <a:ext uri="{FF2B5EF4-FFF2-40B4-BE49-F238E27FC236}">
-                <a16:creationId xmlns:a16="http://schemas.microsoft.com/office/drawing/2014/main" id="{0A28EABF-FB5A-4E81-9942-5539C8CFD18D}"/>
+                <a16:creationId xmlns:a16="http://schemas.microsoft.com/office/drawing/2014/main" id="{82E0D6C1-8B12-4F0C-9217-17E389D0B30D}"/>
               </a:ext>
             </a:extLst>
           </p:cNvPr>
@@ -6406,7 +6394,7 @@
           <p:cNvPr id="9" name="">
             <a:extLst xmlns:a="http://schemas.openxmlformats.org/drawingml/2006/main">
               <a:ext uri="{FF2B5EF4-FFF2-40B4-BE49-F238E27FC236}">
-                <a16:creationId xmlns:a16="http://schemas.microsoft.com/office/drawing/2014/main" id="{632C8C73-9262-4AF5-9396-22D5E0F0C946}"/>
+                <a16:creationId xmlns:a16="http://schemas.microsoft.com/office/drawing/2014/main" id="{E4925D2C-133B-4AC2-A573-3B607BCA573E}"/>
               </a:ext>
             </a:extLst>
           </p:cNvPr>
@@ -6438,7 +6426,7 @@
           <p:cNvPr id="10" name="">
             <a:extLst xmlns:a="http://schemas.openxmlformats.org/drawingml/2006/main">
               <a:ext uri="{FF2B5EF4-FFF2-40B4-BE49-F238E27FC236}">
-                <a16:creationId xmlns:a16="http://schemas.microsoft.com/office/drawing/2014/main" id="{9E30B800-F6DC-4818-8318-6382A45402B7}"/>
+                <a16:creationId xmlns:a16="http://schemas.microsoft.com/office/drawing/2014/main" id="{EC163119-7449-4DE3-B8D7-1DEF6BA9D529}"/>
               </a:ext>
             </a:extLst>
           </p:cNvPr>
@@ -6483,7 +6471,7 @@
           <p:cNvPr id="11" name="">
             <a:extLst xmlns:a="http://schemas.openxmlformats.org/drawingml/2006/main">
               <a:ext uri="{FF2B5EF4-FFF2-40B4-BE49-F238E27FC236}">
-                <a16:creationId xmlns:a16="http://schemas.microsoft.com/office/drawing/2014/main" id="{3189AC21-4931-4CED-992A-4605D2AE02FE}"/>
+                <a16:creationId xmlns:a16="http://schemas.microsoft.com/office/drawing/2014/main" id="{2A650142-7EBA-4BEF-BC5B-3BF06AE69D37}"/>
               </a:ext>
             </a:extLst>
           </p:cNvPr>
@@ -6528,7 +6516,7 @@
           <p:cNvPr id="12" name="">
             <a:extLst xmlns:a="http://schemas.openxmlformats.org/drawingml/2006/main">
               <a:ext uri="{FF2B5EF4-FFF2-40B4-BE49-F238E27FC236}">
-                <a16:creationId xmlns:a16="http://schemas.microsoft.com/office/drawing/2014/main" id="{052E2D93-2AE9-45E0-AECF-896A487E2706}"/>
+                <a16:creationId xmlns:a16="http://schemas.microsoft.com/office/drawing/2014/main" id="{75C2F24F-DB16-4D3F-8698-9BCC6DABECD8}"/>
               </a:ext>
             </a:extLst>
           </p:cNvPr>
@@ -6573,7 +6561,7 @@
           <p:cNvPr id="13" name="">
             <a:extLst xmlns:a="http://schemas.openxmlformats.org/drawingml/2006/main">
               <a:ext uri="{FF2B5EF4-FFF2-40B4-BE49-F238E27FC236}">
-                <a16:creationId xmlns:a16="http://schemas.microsoft.com/office/drawing/2014/main" id="{5A659BDD-41E6-4FB3-B2EF-B9C07A4A353B}"/>
+                <a16:creationId xmlns:a16="http://schemas.microsoft.com/office/drawing/2014/main" id="{24A327AA-859C-41B1-9BE9-47BC930C1D8F}"/>
               </a:ext>
             </a:extLst>
           </p:cNvPr>
@@ -6605,7 +6593,7 @@
           <p:cNvPr id="14" name="">
             <a:extLst xmlns:a="http://schemas.openxmlformats.org/drawingml/2006/main">
               <a:ext uri="{FF2B5EF4-FFF2-40B4-BE49-F238E27FC236}">
-                <a16:creationId xmlns:a16="http://schemas.microsoft.com/office/drawing/2014/main" id="{B566DD6A-AF8E-4F0E-89DB-0C0E92499D98}"/>
+                <a16:creationId xmlns:a16="http://schemas.microsoft.com/office/drawing/2014/main" id="{90273DEA-CF34-46BE-A4BB-E7A069A32495}"/>
               </a:ext>
             </a:extLst>
           </p:cNvPr>
@@ -6637,7 +6625,7 @@
           <p:cNvPr id="15" name="">
             <a:extLst xmlns:a="http://schemas.openxmlformats.org/drawingml/2006/main">
               <a:ext uri="{FF2B5EF4-FFF2-40B4-BE49-F238E27FC236}">
-                <a16:creationId xmlns:a16="http://schemas.microsoft.com/office/drawing/2014/main" id="{37A1E445-AC6A-40CA-A356-8A6F1E0C0ABE}"/>
+                <a16:creationId xmlns:a16="http://schemas.microsoft.com/office/drawing/2014/main" id="{797A4FF3-C532-4F6C-8BC0-1D6529559F84}"/>
               </a:ext>
             </a:extLst>
           </p:cNvPr>
@@ -6669,7 +6657,7 @@
           <p:cNvPr id="16" name="">
             <a:extLst xmlns:a="http://schemas.openxmlformats.org/drawingml/2006/main">
               <a:ext uri="{FF2B5EF4-FFF2-40B4-BE49-F238E27FC236}">
-                <a16:creationId xmlns:a16="http://schemas.microsoft.com/office/drawing/2014/main" id="{EF3862AD-C493-46AD-84EA-AA572B2043FB}"/>
+                <a16:creationId xmlns:a16="http://schemas.microsoft.com/office/drawing/2014/main" id="{5024BEE1-D249-43BB-A282-2A1010891D0F}"/>
               </a:ext>
             </a:extLst>
           </p:cNvPr>
@@ -6714,7 +6702,7 @@
           <p:cNvPr id="17" name="">
             <a:extLst xmlns:a="http://schemas.openxmlformats.org/drawingml/2006/main">
               <a:ext uri="{FF2B5EF4-FFF2-40B4-BE49-F238E27FC236}">
-                <a16:creationId xmlns:a16="http://schemas.microsoft.com/office/drawing/2014/main" id="{93E1F6B8-FB5D-4836-BF0E-B89741493568}"/>
+                <a16:creationId xmlns:a16="http://schemas.microsoft.com/office/drawing/2014/main" id="{8EF6E008-FB53-4E6E-A9EB-DE8B22A7BAA7}"/>
               </a:ext>
             </a:extLst>
           </p:cNvPr>
@@ -6759,7 +6747,7 @@
           <p:cNvPr id="18" name="">
             <a:extLst xmlns:a="http://schemas.openxmlformats.org/drawingml/2006/main">
               <a:ext uri="{FF2B5EF4-FFF2-40B4-BE49-F238E27FC236}">
-                <a16:creationId xmlns:a16="http://schemas.microsoft.com/office/drawing/2014/main" id="{74FB4767-1894-406A-968F-7E13A952E3E5}"/>
+                <a16:creationId xmlns:a16="http://schemas.microsoft.com/office/drawing/2014/main" id="{90B1A712-2F5D-4989-AAA2-CDDCEA3258C6}"/>
               </a:ext>
             </a:extLst>
           </p:cNvPr>
@@ -6794,7 +6782,7 @@
                 <a:ea typeface="Arial"/>
                 <a:cs typeface="Arial"/>
               </a:rPr>
-              <a:t>Full-resolution region width: 0.1×, 0.25×, 0.5×, 0.75×</a:t>
+              <a:t>Full-resolution region width: 0.1×, 0.25×, 0.5×</a:t>
             </a:r>
           </a:p>
         </p:txBody>
@@ -6804,7 +6792,7 @@
           <p:cNvPr id="19" name="">
             <a:extLst xmlns:a="http://schemas.openxmlformats.org/drawingml/2006/main">
               <a:ext uri="{FF2B5EF4-FFF2-40B4-BE49-F238E27FC236}">
-                <a16:creationId xmlns:a16="http://schemas.microsoft.com/office/drawing/2014/main" id="{078715CB-92A6-47B6-AD82-6F29E6E4E0DF}"/>
+                <a16:creationId xmlns:a16="http://schemas.microsoft.com/office/drawing/2014/main" id="{F8F14F78-1956-4EF4-9486-57568E8895DD}"/>
               </a:ext>
             </a:extLst>
           </p:cNvPr>
@@ -6847,7 +6835,7 @@
     </p:spTree>
     <p:extLst>
       <p:ext uri="{BB962C8B-B14F-4D97-AF65-F5344CB8AC3E}">
-        <p14:creationId xmlns:p14="http://schemas.microsoft.com/office/powerpoint/2010/main" val="2028844609"/>
+        <p14:creationId xmlns:p14="http://schemas.microsoft.com/office/powerpoint/2010/main" val="1968107453"/>
       </p:ext>
     </p:extLst>
   </p:cSld>
@@ -6878,7 +6866,7 @@
           <p:cNvPr id="12" name="">
             <a:extLst xmlns:a="http://schemas.openxmlformats.org/drawingml/2006/main">
               <a:ext uri="{FF2B5EF4-FFF2-40B4-BE49-F238E27FC236}">
-                <a16:creationId xmlns:a16="http://schemas.microsoft.com/office/drawing/2014/main" id="{6361B034-0E03-4A3A-B60A-725BF61BEAC5}"/>
+                <a16:creationId xmlns:a16="http://schemas.microsoft.com/office/drawing/2014/main" id="{787E003F-CA2B-4A50-B33A-D8C95C688FBC}"/>
               </a:ext>
             </a:extLst>
           </p:cNvPr>
@@ -6923,7 +6911,7 @@
           <p:cNvPr id="2" name="">
             <a:extLst xmlns:a="http://schemas.openxmlformats.org/drawingml/2006/main">
               <a:ext uri="{FF2B5EF4-FFF2-40B4-BE49-F238E27FC236}">
-                <a16:creationId xmlns:a16="http://schemas.microsoft.com/office/drawing/2014/main" id="{96ECD673-CD30-486E-8726-2E28CBF9BA04}"/>
+                <a16:creationId xmlns:a16="http://schemas.microsoft.com/office/drawing/2014/main" id="{93CF75C9-6297-40F4-BBA6-9492432EE5C3}"/>
               </a:ext>
             </a:extLst>
           </p:cNvPr>
@@ -6953,7 +6941,7 @@
           <p:cNvPr id="3" name="">
             <a:extLst xmlns:a="http://schemas.openxmlformats.org/drawingml/2006/main">
               <a:ext uri="{FF2B5EF4-FFF2-40B4-BE49-F238E27FC236}">
-                <a16:creationId xmlns:a16="http://schemas.microsoft.com/office/drawing/2014/main" id="{2DDFD84A-E1A8-423E-A924-E5B471BC38ED}"/>
+                <a16:creationId xmlns:a16="http://schemas.microsoft.com/office/drawing/2014/main" id="{0634ADD6-BEFB-4184-B614-FEBA084354A1}"/>
               </a:ext>
             </a:extLst>
           </p:cNvPr>
@@ -6998,7 +6986,7 @@
           <p:cNvPr id="4" name="Chart">
             <a:extLst xmlns:a="http://schemas.openxmlformats.org/drawingml/2006/main">
               <a:ext uri="{FF2B5EF4-FFF2-40B4-BE49-F238E27FC236}">
-                <a16:creationId xmlns:a16="http://schemas.microsoft.com/office/drawing/2014/main" id="{7FFD565B-E74F-4B7B-8BEF-96B9369D3738}"/>
+                <a16:creationId xmlns:a16="http://schemas.microsoft.com/office/drawing/2014/main" id="{B886552D-D426-4B67-9A22-F4C1B9418EA2}"/>
               </a:ext>
             </a:extLst>
           </p:cNvPr>
@@ -7011,7 +6999,7 @@
         </p:xfrm>
         <a:graphic xmlns:a="http://schemas.openxmlformats.org/drawingml/2006/main">
           <a:graphicData uri="http://schemas.openxmlformats.org/drawingml/2006/chart">
-            <c:chart xmlns:r="http://schemas.openxmlformats.org/officeDocument/2006/relationships" xmlns:c="http://schemas.openxmlformats.org/drawingml/2006/chart" r:id="Re03d09c5d506474d"/>
+            <c:chart xmlns:r="http://schemas.openxmlformats.org/officeDocument/2006/relationships" xmlns:c="http://schemas.openxmlformats.org/drawingml/2006/chart" r:id="Rcace51438dbf4d65"/>
           </a:graphicData>
         </a:graphic>
       </p:graphicFrame>
@@ -7020,7 +7008,7 @@
           <p:cNvPr id="5" name="">
             <a:extLst xmlns:a="http://schemas.openxmlformats.org/drawingml/2006/main">
               <a:ext uri="{FF2B5EF4-FFF2-40B4-BE49-F238E27FC236}">
-                <a16:creationId xmlns:a16="http://schemas.microsoft.com/office/drawing/2014/main" id="{E3B18D00-8C1B-4B62-A646-86E637B0833F}"/>
+                <a16:creationId xmlns:a16="http://schemas.microsoft.com/office/drawing/2014/main" id="{FCB420D4-4060-4203-9D09-136A09C22697}"/>
               </a:ext>
             </a:extLst>
           </p:cNvPr>
@@ -7065,7 +7053,7 @@
           <p:cNvPr id="6" name="">
             <a:extLst xmlns:a="http://schemas.openxmlformats.org/drawingml/2006/main">
               <a:ext uri="{FF2B5EF4-FFF2-40B4-BE49-F238E27FC236}">
-                <a16:creationId xmlns:a16="http://schemas.microsoft.com/office/drawing/2014/main" id="{01A56016-B867-4E67-B90B-80C353DB1DB4}"/>
+                <a16:creationId xmlns:a16="http://schemas.microsoft.com/office/drawing/2014/main" id="{A1A92C47-6C49-48BD-A3BA-D12957501D3B}"/>
               </a:ext>
             </a:extLst>
           </p:cNvPr>
@@ -7110,7 +7098,7 @@
           <p:cNvPr id="7" name="">
             <a:extLst xmlns:a="http://schemas.openxmlformats.org/drawingml/2006/main">
               <a:ext uri="{FF2B5EF4-FFF2-40B4-BE49-F238E27FC236}">
-                <a16:creationId xmlns:a16="http://schemas.microsoft.com/office/drawing/2014/main" id="{18BFCCA9-1ECE-40EC-A3BA-71407D23A775}"/>
+                <a16:creationId xmlns:a16="http://schemas.microsoft.com/office/drawing/2014/main" id="{DC57521F-AB3E-41DD-96AF-D8CEE093EDD2}"/>
               </a:ext>
             </a:extLst>
           </p:cNvPr>
@@ -7155,7 +7143,7 @@
           <p:cNvPr id="8" name="">
             <a:extLst xmlns:a="http://schemas.openxmlformats.org/drawingml/2006/main">
               <a:ext uri="{FF2B5EF4-FFF2-40B4-BE49-F238E27FC236}">
-                <a16:creationId xmlns:a16="http://schemas.microsoft.com/office/drawing/2014/main" id="{7B5C357C-DF8B-48C5-B661-AB67BF267C9A}"/>
+                <a16:creationId xmlns:a16="http://schemas.microsoft.com/office/drawing/2014/main" id="{476675CE-E416-4ABF-9A14-554DD593E8EA}"/>
               </a:ext>
             </a:extLst>
           </p:cNvPr>
@@ -7200,7 +7188,7 @@
           <p:cNvPr id="9" name="">
             <a:extLst xmlns:a="http://schemas.openxmlformats.org/drawingml/2006/main">
               <a:ext uri="{FF2B5EF4-FFF2-40B4-BE49-F238E27FC236}">
-                <a16:creationId xmlns:a16="http://schemas.microsoft.com/office/drawing/2014/main" id="{CD63A0AB-D86B-411E-8D73-B0948BF7B6AF}"/>
+                <a16:creationId xmlns:a16="http://schemas.microsoft.com/office/drawing/2014/main" id="{C0C2F7C3-8CC3-4F30-B3BA-E1BE23C65FED}"/>
               </a:ext>
             </a:extLst>
           </p:cNvPr>
@@ -7245,7 +7233,7 @@
           <p:cNvPr id="10" name="">
             <a:extLst xmlns:a="http://schemas.openxmlformats.org/drawingml/2006/main">
               <a:ext uri="{FF2B5EF4-FFF2-40B4-BE49-F238E27FC236}">
-                <a16:creationId xmlns:a16="http://schemas.microsoft.com/office/drawing/2014/main" id="{3F474BB0-FC29-4A2C-ACBB-239A693A67C8}"/>
+                <a16:creationId xmlns:a16="http://schemas.microsoft.com/office/drawing/2014/main" id="{1C0D56BB-C3F9-4301-955C-A076030CBBA6}"/>
               </a:ext>
             </a:extLst>
           </p:cNvPr>
@@ -7290,7 +7278,7 @@
           <p:cNvPr id="11" name="">
             <a:extLst xmlns:a="http://schemas.openxmlformats.org/drawingml/2006/main">
               <a:ext uri="{FF2B5EF4-FFF2-40B4-BE49-F238E27FC236}">
-                <a16:creationId xmlns:a16="http://schemas.microsoft.com/office/drawing/2014/main" id="{9B8B0DAF-1E89-47E3-A431-A363FB2B9371}"/>
+                <a16:creationId xmlns:a16="http://schemas.microsoft.com/office/drawing/2014/main" id="{083FDFF0-1BAB-4DD4-89C1-D61FB699B399}"/>
               </a:ext>
             </a:extLst>
           </p:cNvPr>
@@ -7333,7 +7321,7 @@
     </p:spTree>
     <p:extLst>
       <p:ext uri="{BB962C8B-B14F-4D97-AF65-F5344CB8AC3E}">
-        <p14:creationId xmlns:p14="http://schemas.microsoft.com/office/powerpoint/2010/main" val="214652951"/>
+        <p14:creationId xmlns:p14="http://schemas.microsoft.com/office/powerpoint/2010/main" val="1841926725"/>
       </p:ext>
     </p:extLst>
   </p:cSld>
@@ -7364,7 +7352,7 @@
           <p:cNvPr id="8" name="">
             <a:extLst xmlns:a="http://schemas.openxmlformats.org/drawingml/2006/main">
               <a:ext uri="{FF2B5EF4-FFF2-40B4-BE49-F238E27FC236}">
-                <a16:creationId xmlns:a16="http://schemas.microsoft.com/office/drawing/2014/main" id="{E7499C8F-677E-452E-8AB0-B3AB35802E48}"/>
+                <a16:creationId xmlns:a16="http://schemas.microsoft.com/office/drawing/2014/main" id="{2D27BD5C-1D53-4591-B927-ADEFEF998F8F}"/>
               </a:ext>
             </a:extLst>
           </p:cNvPr>
@@ -7409,7 +7397,7 @@
           <p:cNvPr id="2" name="">
             <a:extLst xmlns:a="http://schemas.openxmlformats.org/drawingml/2006/main">
               <a:ext uri="{FF2B5EF4-FFF2-40B4-BE49-F238E27FC236}">
-                <a16:creationId xmlns:a16="http://schemas.microsoft.com/office/drawing/2014/main" id="{D6974AA6-01A6-4885-AB7B-DD352FFC9052}"/>
+                <a16:creationId xmlns:a16="http://schemas.microsoft.com/office/drawing/2014/main" id="{6238650C-9037-4AB2-95F7-F6BBF6253FF6}"/>
               </a:ext>
             </a:extLst>
           </p:cNvPr>
@@ -7439,7 +7427,7 @@
           <p:cNvPr id="3" name="">
             <a:extLst xmlns:a="http://schemas.openxmlformats.org/drawingml/2006/main">
               <a:ext uri="{FF2B5EF4-FFF2-40B4-BE49-F238E27FC236}">
-                <a16:creationId xmlns:a16="http://schemas.microsoft.com/office/drawing/2014/main" id="{3CB516E5-504C-4F59-AA11-7BC137A20C37}"/>
+                <a16:creationId xmlns:a16="http://schemas.microsoft.com/office/drawing/2014/main" id="{E0063598-DD78-42F3-9F07-68FFA4250A95}"/>
               </a:ext>
             </a:extLst>
           </p:cNvPr>
@@ -7484,7 +7472,7 @@
           <p:cNvPr id="4" name="">
             <a:extLst xmlns:a="http://schemas.openxmlformats.org/drawingml/2006/main">
               <a:ext uri="{FF2B5EF4-FFF2-40B4-BE49-F238E27FC236}">
-                <a16:creationId xmlns:a16="http://schemas.microsoft.com/office/drawing/2014/main" id="{6B1A04D3-D71D-411C-BD6D-6D2A05525EDF}"/>
+                <a16:creationId xmlns:a16="http://schemas.microsoft.com/office/drawing/2014/main" id="{49E244F8-0B9B-4822-8D52-6F832A090294}"/>
               </a:ext>
             </a:extLst>
           </p:cNvPr>
@@ -7500,19 +7488,18 @@
             <a:tbl>
               <a:tblPr/>
               <a:tblGrid>
-                <a:gridCol w="2524125"/>
-                <a:gridCol w="2619375"/>
-                <a:gridCol w="2724150"/>
-                <a:gridCol w="3105150"/>
+                <a:gridCol w="3238500"/>
+                <a:gridCol w="3714750"/>
+                <a:gridCol w="4019550"/>
               </a:tblGrid>
-              <a:tr h="641985">
+              <a:tr h="802481">
                 <a:tc>
                   <a:txBody>
                     <a:bodyPr/>
                     <a:lstStyle/>
                     <a:p>
                       <a:r>
-                        <a:rPr sz="1800" b="1">
+                        <a:rPr sz="2025" b="1">
                           <a:solidFill>
                             <a:srgbClr val="FFFFFF"/>
                           </a:solidFill>
@@ -7560,7 +7547,7 @@
                     <a:lstStyle/>
                     <a:p>
                       <a:r>
-                        <a:rPr sz="1800" b="1">
+                        <a:rPr sz="2025" b="1">
                           <a:solidFill>
                             <a:srgbClr val="FFFFFF"/>
                           </a:solidFill>
@@ -7602,7 +7589,7 @@
                     <a:lstStyle/>
                     <a:p>
                       <a:r>
-                        <a:rPr sz="1800" b="1">
+                        <a:rPr sz="2025" b="1">
                           <a:solidFill>
                             <a:srgbClr val="FFFFFF"/>
                           </a:solidFill>
@@ -7610,49 +7597,7 @@
                           <a:ea typeface="Arial"/>
                           <a:cs typeface="Arial"/>
                         </a:rPr>
-                        <a:t>Right-eye ΔPSNR</a:t>
-                      </a:r>
-                    </a:p>
-                  </a:txBody>
-                  <a:tcPr marL="91440" marR="91440" marT="45720" marB="45720">
-                    <a:lnR w="9525">
-                      <a:solidFill>
-                        <a:srgbClr val="D7DFE5"/>
-                      </a:solidFill>
-                      <a:prstDash val="solid"/>
-                    </a:lnR>
-                    <a:lnT w="9525">
-                      <a:solidFill>
-                        <a:srgbClr val="D7DFE5"/>
-                      </a:solidFill>
-                      <a:prstDash val="solid"/>
-                    </a:lnT>
-                    <a:lnB w="9525">
-                      <a:solidFill>
-                        <a:srgbClr val="D7DFE5"/>
-                      </a:solidFill>
-                      <a:prstDash val="solid"/>
-                    </a:lnB>
-                    <a:solidFill>
-                      <a:srgbClr val="152D43"/>
-                    </a:solidFill>
-                  </a:tcPr>
-                </a:tc>
-                <a:tc>
-                  <a:txBody>
-                    <a:bodyPr/>
-                    <a:lstStyle/>
-                    <a:p>
-                      <a:r>
-                        <a:rPr sz="1800" b="1">
-                          <a:solidFill>
-                            <a:srgbClr val="FFFFFF"/>
-                          </a:solidFill>
-                          <a:latin typeface="Arial"/>
-                          <a:ea typeface="Arial"/>
-                          <a:cs typeface="Arial"/>
-                        </a:rPr>
-                        <a:t>Stereo mean ΔPSNR*</a:t>
+                        <a:t>Stereo PSNR loss (dB)</a:t>
                       </a:r>
                     </a:p>
                   </a:txBody>
@@ -7681,14 +7626,14 @@
                   </a:tcPr>
                 </a:tc>
               </a:tr>
-              <a:tr h="641985">
+              <a:tr h="802481">
                 <a:tc>
                   <a:txBody>
                     <a:bodyPr/>
                     <a:lstStyle/>
                     <a:p>
                       <a:r>
-                        <a:rPr sz="1800" b="0">
+                        <a:rPr sz="2025" b="0">
                           <a:solidFill>
                             <a:srgbClr val="152D43"/>
                           </a:solidFill>
@@ -7730,7 +7675,7 @@
                     <a:lstStyle/>
                     <a:p>
                       <a:r>
-                        <a:rPr sz="1800" b="0">
+                        <a:rPr sz="2025" b="0">
                           <a:solidFill>
                             <a:srgbClr val="152D43"/>
                           </a:solidFill>
@@ -7766,7 +7711,7 @@
                     <a:lstStyle/>
                     <a:p>
                       <a:r>
-                        <a:rPr sz="1800" b="0">
+                        <a:rPr sz="2025" b="0">
                           <a:solidFill>
                             <a:srgbClr val="152D43"/>
                           </a:solidFill>
@@ -7774,43 +7719,7 @@
                           <a:ea typeface="Arial"/>
                           <a:cs typeface="Arial"/>
                         </a:rPr>
-                        <a:t>-0.1718 dB</a:t>
-                      </a:r>
-                    </a:p>
-                  </a:txBody>
-                  <a:tcPr marL="91440" marR="91440" marT="45720" marB="45720">
-                    <a:lnR w="9525">
-                      <a:solidFill>
-                        <a:srgbClr val="D7DFE5"/>
-                      </a:solidFill>
-                      <a:prstDash val="solid"/>
-                    </a:lnR>
-                    <a:lnB w="9525">
-                      <a:solidFill>
-                        <a:srgbClr val="D7DFE5"/>
-                      </a:solidFill>
-                      <a:prstDash val="solid"/>
-                    </a:lnB>
-                    <a:solidFill>
-                      <a:srgbClr val="FFFFFF"/>
-                    </a:solidFill>
-                  </a:tcPr>
-                </a:tc>
-                <a:tc>
-                  <a:txBody>
-                    <a:bodyPr/>
-                    <a:lstStyle/>
-                    <a:p>
-                      <a:r>
-                        <a:rPr sz="1800" b="0">
-                          <a:solidFill>
-                            <a:srgbClr val="152D43"/>
-                          </a:solidFill>
-                          <a:latin typeface="Arial"/>
-                          <a:ea typeface="Arial"/>
-                          <a:cs typeface="Arial"/>
-                        </a:rPr>
-                        <a:t>-0.0859 dB</a:t>
+                        <a:t>0.0859</a:t>
                       </a:r>
                     </a:p>
                   </a:txBody>
@@ -7833,14 +7742,14 @@
                   </a:tcPr>
                 </a:tc>
               </a:tr>
-              <a:tr h="641985">
+              <a:tr h="802481">
                 <a:tc>
                   <a:txBody>
                     <a:bodyPr/>
                     <a:lstStyle/>
                     <a:p>
                       <a:r>
-                        <a:rPr sz="1800" b="0">
+                        <a:rPr sz="2025" b="0">
                           <a:solidFill>
                             <a:srgbClr val="152D43"/>
                           </a:solidFill>
@@ -7882,7 +7791,7 @@
                     <a:lstStyle/>
                     <a:p>
                       <a:r>
-                        <a:rPr sz="1800" b="0">
+                        <a:rPr sz="2025" b="0">
                           <a:solidFill>
                             <a:srgbClr val="152D43"/>
                           </a:solidFill>
@@ -7918,7 +7827,7 @@
                     <a:lstStyle/>
                     <a:p>
                       <a:r>
-                        <a:rPr sz="1800" b="0">
+                        <a:rPr sz="2025" b="0">
                           <a:solidFill>
                             <a:srgbClr val="152D43"/>
                           </a:solidFill>
@@ -7926,43 +7835,7 @@
                           <a:ea typeface="Arial"/>
                           <a:cs typeface="Arial"/>
                         </a:rPr>
-                        <a:t>-0.1569 dB</a:t>
-                      </a:r>
-                    </a:p>
-                  </a:txBody>
-                  <a:tcPr marL="91440" marR="91440" marT="45720" marB="45720">
-                    <a:lnR w="9525">
-                      <a:solidFill>
-                        <a:srgbClr val="D7DFE5"/>
-                      </a:solidFill>
-                      <a:prstDash val="solid"/>
-                    </a:lnR>
-                    <a:lnB w="9525">
-                      <a:solidFill>
-                        <a:srgbClr val="D7DFE5"/>
-                      </a:solidFill>
-                      <a:prstDash val="solid"/>
-                    </a:lnB>
-                    <a:solidFill>
-                      <a:srgbClr val="EAF3F6"/>
-                    </a:solidFill>
-                  </a:tcPr>
-                </a:tc>
-                <a:tc>
-                  <a:txBody>
-                    <a:bodyPr/>
-                    <a:lstStyle/>
-                    <a:p>
-                      <a:r>
-                        <a:rPr sz="1800" b="0">
-                          <a:solidFill>
-                            <a:srgbClr val="152D43"/>
-                          </a:solidFill>
-                          <a:latin typeface="Arial"/>
-                          <a:ea typeface="Arial"/>
-                          <a:cs typeface="Arial"/>
-                        </a:rPr>
-                        <a:t>-0.0785 dB</a:t>
+                        <a:t>0.0785</a:t>
                       </a:r>
                     </a:p>
                   </a:txBody>
@@ -7985,14 +7858,14 @@
                   </a:tcPr>
                 </a:tc>
               </a:tr>
-              <a:tr h="641985">
+              <a:tr h="802481">
                 <a:tc>
                   <a:txBody>
                     <a:bodyPr/>
                     <a:lstStyle/>
                     <a:p>
                       <a:r>
-                        <a:rPr sz="1800" b="0">
+                        <a:rPr sz="2025" b="0">
                           <a:solidFill>
                             <a:srgbClr val="152D43"/>
                           </a:solidFill>
@@ -8034,7 +7907,7 @@
                     <a:lstStyle/>
                     <a:p>
                       <a:r>
-                        <a:rPr sz="1800" b="0">
+                        <a:rPr sz="2025" b="0">
                           <a:solidFill>
                             <a:srgbClr val="152D43"/>
                           </a:solidFill>
@@ -8070,7 +7943,7 @@
                     <a:lstStyle/>
                     <a:p>
                       <a:r>
-                        <a:rPr sz="1800" b="0">
+                        <a:rPr sz="2025" b="0">
                           <a:solidFill>
                             <a:srgbClr val="152D43"/>
                           </a:solidFill>
@@ -8078,43 +7951,7 @@
                           <a:ea typeface="Arial"/>
                           <a:cs typeface="Arial"/>
                         </a:rPr>
-                        <a:t>-0.1198 dB</a:t>
-                      </a:r>
-                    </a:p>
-                  </a:txBody>
-                  <a:tcPr marL="91440" marR="91440" marT="45720" marB="45720">
-                    <a:lnR w="9525">
-                      <a:solidFill>
-                        <a:srgbClr val="D7DFE5"/>
-                      </a:solidFill>
-                      <a:prstDash val="solid"/>
-                    </a:lnR>
-                    <a:lnB w="9525">
-                      <a:solidFill>
-                        <a:srgbClr val="D7DFE5"/>
-                      </a:solidFill>
-                      <a:prstDash val="solid"/>
-                    </a:lnB>
-                    <a:solidFill>
-                      <a:srgbClr val="FFFFFF"/>
-                    </a:solidFill>
-                  </a:tcPr>
-                </a:tc>
-                <a:tc>
-                  <a:txBody>
-                    <a:bodyPr/>
-                    <a:lstStyle/>
-                    <a:p>
-                      <a:r>
-                        <a:rPr sz="1800" b="0">
-                          <a:solidFill>
-                            <a:srgbClr val="152D43"/>
-                          </a:solidFill>
-                          <a:latin typeface="Arial"/>
-                          <a:ea typeface="Arial"/>
-                          <a:cs typeface="Arial"/>
-                        </a:rPr>
-                        <a:t>-0.0599 dB</a:t>
+                        <a:t>0.0599</a:t>
                       </a:r>
                     </a:p>
                   </a:txBody>
@@ -8137,158 +7974,6 @@
                   </a:tcPr>
                 </a:tc>
               </a:tr>
-              <a:tr h="641985">
-                <a:tc>
-                  <a:txBody>
-                    <a:bodyPr/>
-                    <a:lstStyle/>
-                    <a:p>
-                      <a:r>
-                        <a:rPr sz="1800" b="0">
-                          <a:solidFill>
-                            <a:srgbClr val="152D43"/>
-                          </a:solidFill>
-                          <a:latin typeface="Arial"/>
-                          <a:ea typeface="Arial"/>
-                          <a:cs typeface="Arial"/>
-                        </a:rPr>
-                        <a:t>0.75×</a:t>
-                      </a:r>
-                    </a:p>
-                  </a:txBody>
-                  <a:tcPr marL="91440" marR="91440" marT="45720" marB="45720">
-                    <a:lnL w="9525">
-                      <a:solidFill>
-                        <a:srgbClr val="D7DFE5"/>
-                      </a:solidFill>
-                      <a:prstDash val="solid"/>
-                    </a:lnL>
-                    <a:lnR w="9525">
-                      <a:solidFill>
-                        <a:srgbClr val="D7DFE5"/>
-                      </a:solidFill>
-                      <a:prstDash val="solid"/>
-                    </a:lnR>
-                    <a:lnB w="9525">
-                      <a:solidFill>
-                        <a:srgbClr val="D7DFE5"/>
-                      </a:solidFill>
-                      <a:prstDash val="solid"/>
-                    </a:lnB>
-                    <a:solidFill>
-                      <a:srgbClr val="EAF3F6"/>
-                    </a:solidFill>
-                  </a:tcPr>
-                </a:tc>
-                <a:tc>
-                  <a:txBody>
-                    <a:bodyPr/>
-                    <a:lstStyle/>
-                    <a:p>
-                      <a:r>
-                        <a:rPr sz="1800" b="0">
-                          <a:solidFill>
-                            <a:srgbClr val="152D43"/>
-                          </a:solidFill>
-                          <a:latin typeface="Arial"/>
-                          <a:ea typeface="Arial"/>
-                          <a:cs typeface="Arial"/>
-                        </a:rPr>
-                        <a:t>11.039 ms</a:t>
-                      </a:r>
-                    </a:p>
-                  </a:txBody>
-                  <a:tcPr marL="91440" marR="91440" marT="45720" marB="45720">
-                    <a:lnR w="9525">
-                      <a:solidFill>
-                        <a:srgbClr val="D7DFE5"/>
-                      </a:solidFill>
-                      <a:prstDash val="solid"/>
-                    </a:lnR>
-                    <a:lnB w="9525">
-                      <a:solidFill>
-                        <a:srgbClr val="D7DFE5"/>
-                      </a:solidFill>
-                      <a:prstDash val="solid"/>
-                    </a:lnB>
-                    <a:solidFill>
-                      <a:srgbClr val="EAF3F6"/>
-                    </a:solidFill>
-                  </a:tcPr>
-                </a:tc>
-                <a:tc>
-                  <a:txBody>
-                    <a:bodyPr/>
-                    <a:lstStyle/>
-                    <a:p>
-                      <a:r>
-                        <a:rPr sz="1800" b="0">
-                          <a:solidFill>
-                            <a:srgbClr val="152D43"/>
-                          </a:solidFill>
-                          <a:latin typeface="Arial"/>
-                          <a:ea typeface="Arial"/>
-                          <a:cs typeface="Arial"/>
-                        </a:rPr>
-                        <a:t>-0.0669 dB</a:t>
-                      </a:r>
-                    </a:p>
-                  </a:txBody>
-                  <a:tcPr marL="91440" marR="91440" marT="45720" marB="45720">
-                    <a:lnR w="9525">
-                      <a:solidFill>
-                        <a:srgbClr val="D7DFE5"/>
-                      </a:solidFill>
-                      <a:prstDash val="solid"/>
-                    </a:lnR>
-                    <a:lnB w="9525">
-                      <a:solidFill>
-                        <a:srgbClr val="D7DFE5"/>
-                      </a:solidFill>
-                      <a:prstDash val="solid"/>
-                    </a:lnB>
-                    <a:solidFill>
-                      <a:srgbClr val="EAF3F6"/>
-                    </a:solidFill>
-                  </a:tcPr>
-                </a:tc>
-                <a:tc>
-                  <a:txBody>
-                    <a:bodyPr/>
-                    <a:lstStyle/>
-                    <a:p>
-                      <a:r>
-                        <a:rPr sz="1800" b="0">
-                          <a:solidFill>
-                            <a:srgbClr val="152D43"/>
-                          </a:solidFill>
-                          <a:latin typeface="Arial"/>
-                          <a:ea typeface="Arial"/>
-                          <a:cs typeface="Arial"/>
-                        </a:rPr>
-                        <a:t>-0.0335 dB</a:t>
-                      </a:r>
-                    </a:p>
-                  </a:txBody>
-                  <a:tcPr marL="91440" marR="91440" marT="45720" marB="45720">
-                    <a:lnR w="9525">
-                      <a:solidFill>
-                        <a:srgbClr val="D7DFE5"/>
-                      </a:solidFill>
-                      <a:prstDash val="solid"/>
-                    </a:lnR>
-                    <a:lnB w="9525">
-                      <a:solidFill>
-                        <a:srgbClr val="D7DFE5"/>
-                      </a:solidFill>
-                      <a:prstDash val="solid"/>
-                    </a:lnB>
-                    <a:solidFill>
-                      <a:srgbClr val="EAF3F6"/>
-                    </a:solidFill>
-                  </a:tcPr>
-                </a:tc>
-              </a:tr>
             </a:tbl>
           </a:graphicData>
         </a:graphic>
@@ -8298,7 +7983,7 @@
           <p:cNvPr id="5" name="">
             <a:extLst xmlns:a="http://schemas.openxmlformats.org/drawingml/2006/main">
               <a:ext uri="{FF2B5EF4-FFF2-40B4-BE49-F238E27FC236}">
-                <a16:creationId xmlns:a16="http://schemas.microsoft.com/office/drawing/2014/main" id="{78845179-391D-423F-9121-20793BFE5480}"/>
+                <a16:creationId xmlns:a16="http://schemas.microsoft.com/office/drawing/2014/main" id="{E6260E00-BE88-4BF3-AA36-0F3953153A39}"/>
               </a:ext>
             </a:extLst>
           </p:cNvPr>
@@ -8333,7 +8018,7 @@
                 <a:ea typeface="Arial"/>
                 <a:cs typeface="Arial"/>
               </a:rPr>
-              <a:t>* Unchanged left eye, mean per-eye PSNR in dB: stereo difference = right-eye difference / 2</a:t>
+              <a:t>Loss versus Full. Derived assuming unchanged left eye and mean per-eye PSNR in dB.</a:t>
             </a:r>
           </a:p>
         </p:txBody>
@@ -8343,7 +8028,7 @@
           <p:cNvPr id="6" name="">
             <a:extLst xmlns:a="http://schemas.openxmlformats.org/drawingml/2006/main">
               <a:ext uri="{FF2B5EF4-FFF2-40B4-BE49-F238E27FC236}">
-                <a16:creationId xmlns:a16="http://schemas.microsoft.com/office/drawing/2014/main" id="{93348659-FF28-42E5-954B-0BB80CEC89CA}"/>
+                <a16:creationId xmlns:a16="http://schemas.microsoft.com/office/drawing/2014/main" id="{1C62D957-4003-4D07-A01D-1B17E75C366E}"/>
               </a:ext>
             </a:extLst>
           </p:cNvPr>
@@ -8378,7 +8063,7 @@
                 <a:ea typeface="Arial"/>
                 <a:cs typeface="Arial"/>
               </a:rPr>
-              <a:t>ΔPSNR = FOV − full, using original overflow PSNR. Standard PSNR can show a different trend.</a:t>
+              <a:t>Original overflow PSNR preserved. Quality and timing: same 30W run, 1068 frames.</a:t>
             </a:r>
           </a:p>
         </p:txBody>
@@ -8388,7 +8073,7 @@
           <p:cNvPr id="7" name="">
             <a:extLst xmlns:a="http://schemas.openxmlformats.org/drawingml/2006/main">
               <a:ext uri="{FF2B5EF4-FFF2-40B4-BE49-F238E27FC236}">
-                <a16:creationId xmlns:a16="http://schemas.microsoft.com/office/drawing/2014/main" id="{CDBFA6A6-0EAB-4D78-A498-A8CB4D15D861}"/>
+                <a16:creationId xmlns:a16="http://schemas.microsoft.com/office/drawing/2014/main" id="{841887F4-034A-451D-833C-12B83E11F75F}"/>
               </a:ext>
             </a:extLst>
           </p:cNvPr>
@@ -8423,7 +8108,7 @@
                 <a:ea typeface="Arial"/>
                 <a:cs typeface="Arial"/>
               </a:rPr>
-              <a:t>Quality and timing: same 30W run, 1068 frames. Timing adds a fixed 2 ms decode budget; not measured end-to-end.</a:t>
+              <a:t>Timing adds a fixed 2 ms decode budget; not measured end-to-end.</a:t>
             </a:r>
           </a:p>
         </p:txBody>
@@ -8431,7 +8116,7 @@
     </p:spTree>
     <p:extLst>
       <p:ext uri="{BB962C8B-B14F-4D97-AF65-F5344CB8AC3E}">
-        <p14:creationId xmlns:p14="http://schemas.microsoft.com/office/powerpoint/2010/main" val="720353213"/>
+        <p14:creationId xmlns:p14="http://schemas.microsoft.com/office/powerpoint/2010/main" val="1749368288"/>
       </p:ext>
     </p:extLst>
   </p:cSld>
@@ -8462,7 +8147,7 @@
           <p:cNvPr id="14" name="">
             <a:extLst xmlns:a="http://schemas.openxmlformats.org/drawingml/2006/main">
               <a:ext uri="{FF2B5EF4-FFF2-40B4-BE49-F238E27FC236}">
-                <a16:creationId xmlns:a16="http://schemas.microsoft.com/office/drawing/2014/main" id="{26F57AA7-DD06-4260-98A3-B39E42C0493F}"/>
+                <a16:creationId xmlns:a16="http://schemas.microsoft.com/office/drawing/2014/main" id="{7340E5E0-BA90-45BF-BEC9-211C0F9CDD3A}"/>
               </a:ext>
             </a:extLst>
           </p:cNvPr>
@@ -8507,7 +8192,7 @@
           <p:cNvPr id="2" name="">
             <a:extLst xmlns:a="http://schemas.openxmlformats.org/drawingml/2006/main">
               <a:ext uri="{FF2B5EF4-FFF2-40B4-BE49-F238E27FC236}">
-                <a16:creationId xmlns:a16="http://schemas.microsoft.com/office/drawing/2014/main" id="{4B85743C-7B2F-451E-938A-F9DE3D5B93B3}"/>
+                <a16:creationId xmlns:a16="http://schemas.microsoft.com/office/drawing/2014/main" id="{27240A45-73A3-419D-B6A6-4FAB5FAF3A59}"/>
               </a:ext>
             </a:extLst>
           </p:cNvPr>
@@ -8537,7 +8222,7 @@
           <p:cNvPr id="3" name="">
             <a:extLst xmlns:a="http://schemas.openxmlformats.org/drawingml/2006/main">
               <a:ext uri="{FF2B5EF4-FFF2-40B4-BE49-F238E27FC236}">
-                <a16:creationId xmlns:a16="http://schemas.microsoft.com/office/drawing/2014/main" id="{84541237-6331-4BA9-BAC6-30F07F872198}"/>
+                <a16:creationId xmlns:a16="http://schemas.microsoft.com/office/drawing/2014/main" id="{AE28BB7F-5AF8-4460-B091-180B35AAECBD}"/>
               </a:ext>
             </a:extLst>
           </p:cNvPr>
@@ -8582,7 +8267,7 @@
           <p:cNvPr id="4" name="">
             <a:extLst xmlns:a="http://schemas.openxmlformats.org/drawingml/2006/main">
               <a:ext uri="{FF2B5EF4-FFF2-40B4-BE49-F238E27FC236}">
-                <a16:creationId xmlns:a16="http://schemas.microsoft.com/office/drawing/2014/main" id="{95581A7D-84B2-4F2C-A567-A46A8C83FCFF}"/>
+                <a16:creationId xmlns:a16="http://schemas.microsoft.com/office/drawing/2014/main" id="{A84A3BCE-9310-4826-B745-8064F6E74545}"/>
               </a:ext>
             </a:extLst>
           </p:cNvPr>
@@ -8627,7 +8312,7 @@
           <p:cNvPr id="5" name="">
             <a:extLst xmlns:a="http://schemas.openxmlformats.org/drawingml/2006/main">
               <a:ext uri="{FF2B5EF4-FFF2-40B4-BE49-F238E27FC236}">
-                <a16:creationId xmlns:a16="http://schemas.microsoft.com/office/drawing/2014/main" id="{360619D1-1293-4968-B7E3-562BCB7858B2}"/>
+                <a16:creationId xmlns:a16="http://schemas.microsoft.com/office/drawing/2014/main" id="{E6B05D98-95B4-4453-B73F-A64166B8FBB7}"/>
               </a:ext>
             </a:extLst>
           </p:cNvPr>
@@ -8672,7 +8357,7 @@
           <p:cNvPr id="6" name="">
             <a:extLst xmlns:a="http://schemas.openxmlformats.org/drawingml/2006/main">
               <a:ext uri="{FF2B5EF4-FFF2-40B4-BE49-F238E27FC236}">
-                <a16:creationId xmlns:a16="http://schemas.microsoft.com/office/drawing/2014/main" id="{F655579D-C90B-4A3E-99DF-A3492D559FD0}"/>
+                <a16:creationId xmlns:a16="http://schemas.microsoft.com/office/drawing/2014/main" id="{A7315D8C-959B-475F-8AF8-3CF724DA0896}"/>
               </a:ext>
             </a:extLst>
           </p:cNvPr>
@@ -8717,7 +8402,7 @@
           <p:cNvPr id="7" name="">
             <a:extLst xmlns:a="http://schemas.openxmlformats.org/drawingml/2006/main">
               <a:ext uri="{FF2B5EF4-FFF2-40B4-BE49-F238E27FC236}">
-                <a16:creationId xmlns:a16="http://schemas.microsoft.com/office/drawing/2014/main" id="{EB046320-0FA2-4221-8D2F-AD1712345789}"/>
+                <a16:creationId xmlns:a16="http://schemas.microsoft.com/office/drawing/2014/main" id="{3B910781-E82E-43D5-A987-32BDC7EA1FAA}"/>
               </a:ext>
             </a:extLst>
           </p:cNvPr>
@@ -8762,7 +8447,7 @@
           <p:cNvPr id="8" name="">
             <a:extLst xmlns:a="http://schemas.openxmlformats.org/drawingml/2006/main">
               <a:ext uri="{FF2B5EF4-FFF2-40B4-BE49-F238E27FC236}">
-                <a16:creationId xmlns:a16="http://schemas.microsoft.com/office/drawing/2014/main" id="{5FE29D2A-CD74-45E4-80D7-019F34EAB054}"/>
+                <a16:creationId xmlns:a16="http://schemas.microsoft.com/office/drawing/2014/main" id="{072D710E-13CE-4C17-91CB-FD1C27079BAE}"/>
               </a:ext>
             </a:extLst>
           </p:cNvPr>
@@ -8807,7 +8492,7 @@
           <p:cNvPr id="9" name="">
             <a:extLst xmlns:a="http://schemas.openxmlformats.org/drawingml/2006/main">
               <a:ext uri="{FF2B5EF4-FFF2-40B4-BE49-F238E27FC236}">
-                <a16:creationId xmlns:a16="http://schemas.microsoft.com/office/drawing/2014/main" id="{8D25A889-9CB1-4128-9F8B-00535CCEA86F}"/>
+                <a16:creationId xmlns:a16="http://schemas.microsoft.com/office/drawing/2014/main" id="{8C6B8D78-F0AF-4F2C-9DD5-8800E0CE1124}"/>
               </a:ext>
             </a:extLst>
           </p:cNvPr>
@@ -8852,7 +8537,7 @@
           <p:cNvPr id="10" name="">
             <a:extLst xmlns:a="http://schemas.openxmlformats.org/drawingml/2006/main">
               <a:ext uri="{FF2B5EF4-FFF2-40B4-BE49-F238E27FC236}">
-                <a16:creationId xmlns:a16="http://schemas.microsoft.com/office/drawing/2014/main" id="{04B7544D-2930-4FB2-862E-9424ECE1E339}"/>
+                <a16:creationId xmlns:a16="http://schemas.microsoft.com/office/drawing/2014/main" id="{4095094E-494A-4857-9546-697B8729225A}"/>
               </a:ext>
             </a:extLst>
           </p:cNvPr>
@@ -8897,7 +8582,7 @@
           <p:cNvPr id="11" name="">
             <a:extLst xmlns:a="http://schemas.openxmlformats.org/drawingml/2006/main">
               <a:ext uri="{FF2B5EF4-FFF2-40B4-BE49-F238E27FC236}">
-                <a16:creationId xmlns:a16="http://schemas.microsoft.com/office/drawing/2014/main" id="{3C50DDC9-205E-48C8-8678-45C61EB72E42}"/>
+                <a16:creationId xmlns:a16="http://schemas.microsoft.com/office/drawing/2014/main" id="{2D689CAB-75C3-4CBD-BF4F-44DC445B4D3A}"/>
               </a:ext>
             </a:extLst>
           </p:cNvPr>
@@ -8942,7 +8627,7 @@
           <p:cNvPr id="12" name="">
             <a:extLst xmlns:a="http://schemas.openxmlformats.org/drawingml/2006/main">
               <a:ext uri="{FF2B5EF4-FFF2-40B4-BE49-F238E27FC236}">
-                <a16:creationId xmlns:a16="http://schemas.microsoft.com/office/drawing/2014/main" id="{351FAC18-7016-445E-A93D-E7FD5774FA74}"/>
+                <a16:creationId xmlns:a16="http://schemas.microsoft.com/office/drawing/2014/main" id="{7744A144-5FA2-4DAD-8290-579FD24215CA}"/>
               </a:ext>
             </a:extLst>
           </p:cNvPr>
@@ -8987,7 +8672,7 @@
           <p:cNvPr id="13" name="">
             <a:extLst xmlns:a="http://schemas.openxmlformats.org/drawingml/2006/main">
               <a:ext uri="{FF2B5EF4-FFF2-40B4-BE49-F238E27FC236}">
-                <a16:creationId xmlns:a16="http://schemas.microsoft.com/office/drawing/2014/main" id="{239FD8E2-16B4-4A0B-99C4-FF51323F506A}"/>
+                <a16:creationId xmlns:a16="http://schemas.microsoft.com/office/drawing/2014/main" id="{EC50BF56-F2B8-4A3B-9D5A-07178816AC09}"/>
               </a:ext>
             </a:extLst>
           </p:cNvPr>
@@ -9030,7 +8715,7 @@
     </p:spTree>
     <p:extLst>
       <p:ext uri="{BB962C8B-B14F-4D97-AF65-F5344CB8AC3E}">
-        <p14:creationId xmlns:p14="http://schemas.microsoft.com/office/powerpoint/2010/main" val="718374681"/>
+        <p14:creationId xmlns:p14="http://schemas.microsoft.com/office/powerpoint/2010/main" val="1815090642"/>
       </p:ext>
     </p:extLst>
   </p:cSld>

--- a/presentations/weekly_20261029/weekly_20261029_english_final.pptx
+++ b/presentations/weekly_20261029/weekly_20261029_english_final.pptx
@@ -2,19 +2,19 @@
 <file path=ppt/presentation.xml><?xml version="1.0" encoding="utf-8"?>
 <p:presentation xmlns:p="http://schemas.openxmlformats.org/presentationml/2006/main">
   <p:sldMasterIdLst>
-    <p:sldMasterId xmlns:r="http://schemas.openxmlformats.org/officeDocument/2006/relationships" id="2147483648" r:id="Re832cea49ea24aaa"/>
+    <p:sldMasterId xmlns:r="http://schemas.openxmlformats.org/officeDocument/2006/relationships" id="2147483648" r:id="Rf690a31be8c84dd3"/>
   </p:sldMasterIdLst>
   <p:notesMasterIdLst>
-    <p:notesMasterId xmlns:r="http://schemas.openxmlformats.org/officeDocument/2006/relationships" r:id="R360564877f574f05"/>
+    <p:notesMasterId xmlns:r="http://schemas.openxmlformats.org/officeDocument/2006/relationships" r:id="R0efe101220a64ac0"/>
   </p:notesMasterIdLst>
   <p:sldIdLst>
-    <p:sldId xmlns:r="http://schemas.openxmlformats.org/officeDocument/2006/relationships" id="256" r:id="Rcbb8d092bfeb451b"/>
-    <p:sldId xmlns:r="http://schemas.openxmlformats.org/officeDocument/2006/relationships" id="257" r:id="R74638d07bfb9464b"/>
-    <p:sldId xmlns:r="http://schemas.openxmlformats.org/officeDocument/2006/relationships" id="258" r:id="R540129de170f4ce5"/>
-    <p:sldId xmlns:r="http://schemas.openxmlformats.org/officeDocument/2006/relationships" id="259" r:id="Rbc3c4ca43d954c1f"/>
-    <p:sldId xmlns:r="http://schemas.openxmlformats.org/officeDocument/2006/relationships" id="260" r:id="R76b02ab1c2f245a4"/>
-    <p:sldId xmlns:r="http://schemas.openxmlformats.org/officeDocument/2006/relationships" id="261" r:id="R43cbe419d6a040c6"/>
-    <p:sldId xmlns:r="http://schemas.openxmlformats.org/officeDocument/2006/relationships" id="262" r:id="Rb332c0f122804713"/>
+    <p:sldId xmlns:r="http://schemas.openxmlformats.org/officeDocument/2006/relationships" id="256" r:id="Rb55fbf17bc4b4755"/>
+    <p:sldId xmlns:r="http://schemas.openxmlformats.org/officeDocument/2006/relationships" id="257" r:id="Rdda749aa707d4ae3"/>
+    <p:sldId xmlns:r="http://schemas.openxmlformats.org/officeDocument/2006/relationships" id="258" r:id="R1beee0aa97bf4345"/>
+    <p:sldId xmlns:r="http://schemas.openxmlformats.org/officeDocument/2006/relationships" id="259" r:id="Rc05d8a1316674e31"/>
+    <p:sldId xmlns:r="http://schemas.openxmlformats.org/officeDocument/2006/relationships" id="260" r:id="R432243fde55d4be6"/>
+    <p:sldId xmlns:r="http://schemas.openxmlformats.org/officeDocument/2006/relationships" id="261" r:id="Rae603fbc004e49f0"/>
+    <p:sldId xmlns:r="http://schemas.openxmlformats.org/officeDocument/2006/relationships" id="262" r:id="R4f5df459e4a74de5"/>
   </p:sldIdLst>
   <p:sldSz cx="12192000" cy="6858000"/>
   <p:notesSz cx="6858000" cy="9144000"/>
@@ -658,7 +658,7 @@
           <a:lstStyle xmlns:a="http://schemas.openxmlformats.org/drawingml/2006/main"/>
           <a:p xmlns:a="http://schemas.openxmlformats.org/drawingml/2006/main">
             <a:r>
-              <a:t>Source: results/fov_scales_full_20261029/scale_results.json and README.md. Same 30W CUDA C++ run: 1068 valid forward odd frames, 3 warmups, 5 timed repetitions per frame, one quality output per configuration/frame. Resident whole-pipeline GPU event timing without internal stage markers, fast resampling, dynamic clocks. This differs from the previous small-sample staged experiment. Mechanism: half-resolution base + padded full-resolution ROI + feather overlay. The full output is 960x540 (1.0x). Region scale is ROI width divided by full-image width: 96x54 =&gt; 0.1x, 240x135 =&gt; 0.25x, 480x270 =&gt; 0.5x. The measured 0.75x level remains in the source dataset but is omitted from this presentation. Width and height both follow these scales. ROI extent scale is not sampling resolution: pixels within the ROI remain full-resolution. The base samples at 0.5x width and 0.5x height (480x270) while covering the entire image.</a:t>
+              <a:t>Source: results/fov_only_clear_partial_20261030/presentation_results.json. Partial saved results at Xavier 30W: timing uses 500 common frames with 5 repetitions (2500 samples/level); quality uses 672 common frames. Timing and quality have different coverage. Mechanism: half-resolution base + padded full-resolution ROI + feather overlay. The full output is 960x540 (1.0x). Region scale is ROI width divided by full-image width: 96x54 =&gt; 0.1x, 240x135 =&gt; 0.25x, 480x270 =&gt; 0.5x, 672x378 =&gt; 0.7x. Width and height both follow these scales. ROI extent scale is not sampling resolution: pixels within the ROI remain full-resolution. The base samples at 0.5x width and 0.5x height (480x270) while covering the entire image.</a:t>
             </a:r>
           </a:p>
         </p:txBody>
@@ -728,7 +728,7 @@
           <a:lstStyle xmlns:a="http://schemas.openxmlformats.org/drawingml/2006/main"/>
           <a:p xmlns:a="http://schemas.openxmlformats.org/drawingml/2006/main">
             <a:r>
-              <a:t>Source: results/fov_scales_full_20261029/scale_results.json and README.md. Same 30W CUDA C++ run: 1068 valid forward odd frames, 3 warmups, 5 timed repetitions per frame, one quality output per configuration/frame. Resident whole-pipeline GPU event timing without internal stage markers, fast resampling, dynamic clocks. This differs from the previous small-sample staged experiment. Arithmetic means of all 5340 recorded resident whole-pipeline GPU timings per configuration, not wall time. No internal stage markers. Full uses the paired baseline from the 0.25x configuration. Fixed decode budget is 2 ms once per frame, not measured joint RGB/depth/flow decoding or measured end-to-end timing. No input/output copies, network or display. Savings may include reduced clearing and resampling work; no optimal Full baseline claim.</a:t>
+              <a:t>Source: results/fov_only_clear_partial_20261030/presentation_results.json. Partial saved results at Xavier 30W: timing uses 500 common frames with 5 repetitions (2500 samples/level); quality uses 672 common frames. Timing and quality have different coverage. Arithmetic means of all 2500 recorded resident whole-pipeline GPU timings per configuration, not wall time. Full uses the paired baseline from the 0.25x configuration. Fixed decode budget is 2 ms once per frame, not measured joint RGB/depth/flow decoding or measured end-to-end timing. No input/output copies, network or display. </a:t>
             </a:r>
           </a:p>
         </p:txBody>
@@ -798,7 +798,7 @@
           <a:lstStyle xmlns:a="http://schemas.openxmlformats.org/drawingml/2006/main"/>
           <a:p xmlns:a="http://schemas.openxmlformats.org/drawingml/2006/main">
             <a:r>
-              <a:t>Source: results/fov_scales_full_20261029/scale_results.json and README.md. Same 30W CUDA C++ run: 1068 valid forward odd frames, 3 warmups, 5 timed repetitions per frame, one quality output per configuration/frame. Resident whole-pipeline GPU event timing without internal stage markers, fast resampling, dynamic clocks. This differs from the previous small-sample staged experiment. Original uint8-overflow PSNR preserved. Stereo delta is derived only if left eye remains unchanged and per-eye PSNR dB is averaged. Quality and timing use the same 30W 1068-frame experiment: 3 warmups and 5 timing samples per frame, one quality output per configuration/frame. Timing is never divided by two. Latency adds a fixed 2 ms per-frame decode budget once, not measured decoding or end-to-end latency. Source: results/fov_scales_full_20261029/scale_results.json.</a:t>
+              <a:t>Source: results/fov_only_clear_partial_20261030/presentation_results.json. Partial saved results at Xavier 30W: timing uses 500 common frames with 5 repetitions (2500 samples/level); quality uses 672 common frames. Timing and quality have different coverage. Original uint8-overflow PSNR preserved. Stereo delta is derived only if left eye remains unchanged and per-eye PSNR dB is averaged. Timing uses 500 common frames; quality uses 672 common frames. These are partial saved results, not a complete dataset run. Timing is never divided by two. Latency adds a fixed 2 ms per-frame decode budget once, not measured decoding or end-to-end latency. Source: results/fov_only_clear_partial_20261030/presentation_results.json.</a:t>
             </a:r>
           </a:p>
         </p:txBody>
@@ -915,7 +915,7 @@
           <p:cNvPr id="3" name="Title">
             <a:extLst xmlns:a="http://schemas.openxmlformats.org/drawingml/2006/main">
               <a:ext uri="{FF2B5EF4-FFF2-40B4-BE49-F238E27FC236}">
-                <a16:creationId xmlns:a16="http://schemas.microsoft.com/office/drawing/2014/main" id="{92ABD667-D094-4590-9F25-E3AC22B0E282}"/>
+                <a16:creationId xmlns:a16="http://schemas.microsoft.com/office/drawing/2014/main" id="{6BED6099-54D8-4A41-B6D9-0C0DAB523DD1}"/>
               </a:ext>
             </a:extLst>
           </p:cNvPr>
@@ -1144,7 +1144,7 @@
           <p:cNvPr id="2" name="Subtitle">
             <a:extLst xmlns:a="http://schemas.openxmlformats.org/drawingml/2006/main">
               <a:ext uri="{FF2B5EF4-FFF2-40B4-BE49-F238E27FC236}">
-                <a16:creationId xmlns:a16="http://schemas.microsoft.com/office/drawing/2014/main" id="{B432252E-E14B-4A61-BB8A-174695D4A91C}"/>
+                <a16:creationId xmlns:a16="http://schemas.microsoft.com/office/drawing/2014/main" id="{34D6C2DF-49FA-424B-B556-85EC672EAD11}"/>
               </a:ext>
             </a:extLst>
           </p:cNvPr>
@@ -1390,7 +1390,7 @@
           <p:cNvPr id="2" name="Section title">
             <a:extLst xmlns:a="http://schemas.openxmlformats.org/drawingml/2006/main">
               <a:ext uri="{FF2B5EF4-FFF2-40B4-BE49-F238E27FC236}">
-                <a16:creationId xmlns:a16="http://schemas.microsoft.com/office/drawing/2014/main" id="{3BD4335D-A81E-40E7-B0F6-BE8652C2EAE0}"/>
+                <a16:creationId xmlns:a16="http://schemas.microsoft.com/office/drawing/2014/main" id="{7402D87B-56C8-4565-933B-558ECA55D93B}"/>
               </a:ext>
             </a:extLst>
           </p:cNvPr>
@@ -1636,7 +1636,7 @@
           <p:cNvPr id="3" name="Title">
             <a:extLst xmlns:a="http://schemas.openxmlformats.org/drawingml/2006/main">
               <a:ext uri="{FF2B5EF4-FFF2-40B4-BE49-F238E27FC236}">
-                <a16:creationId xmlns:a16="http://schemas.microsoft.com/office/drawing/2014/main" id="{1FE97686-6382-4DDD-9000-B3D789E9F989}"/>
+                <a16:creationId xmlns:a16="http://schemas.microsoft.com/office/drawing/2014/main" id="{D1BB576B-61FA-4986-ACA1-CB7285BB1D59}"/>
               </a:ext>
             </a:extLst>
           </p:cNvPr>
@@ -1865,7 +1865,7 @@
           <p:cNvPr id="2" name="Body">
             <a:extLst xmlns:a="http://schemas.openxmlformats.org/drawingml/2006/main">
               <a:ext uri="{FF2B5EF4-FFF2-40B4-BE49-F238E27FC236}">
-                <a16:creationId xmlns:a16="http://schemas.microsoft.com/office/drawing/2014/main" id="{57E4A63F-EB2C-4ED8-9E79-F5DA171AC689}"/>
+                <a16:creationId xmlns:a16="http://schemas.microsoft.com/office/drawing/2014/main" id="{942305A6-4251-4CA5-9C32-D82C31F2031F}"/>
               </a:ext>
             </a:extLst>
           </p:cNvPr>
@@ -2111,7 +2111,7 @@
           <p:cNvPr id="4" name="Title">
             <a:extLst xmlns:a="http://schemas.openxmlformats.org/drawingml/2006/main">
               <a:ext uri="{FF2B5EF4-FFF2-40B4-BE49-F238E27FC236}">
-                <a16:creationId xmlns:a16="http://schemas.microsoft.com/office/drawing/2014/main" id="{238D6A94-C7C2-4B41-AA9B-7B5D4F0DF1AE}"/>
+                <a16:creationId xmlns:a16="http://schemas.microsoft.com/office/drawing/2014/main" id="{E5B95822-C253-40C2-BB5C-968A69644AA8}"/>
               </a:ext>
             </a:extLst>
           </p:cNvPr>
@@ -2340,7 +2340,7 @@
           <p:cNvPr id="2" name="Left column">
             <a:extLst xmlns:a="http://schemas.openxmlformats.org/drawingml/2006/main">
               <a:ext uri="{FF2B5EF4-FFF2-40B4-BE49-F238E27FC236}">
-                <a16:creationId xmlns:a16="http://schemas.microsoft.com/office/drawing/2014/main" id="{78A41F0E-EADD-4354-B1E0-20EA1EE44636}"/>
+                <a16:creationId xmlns:a16="http://schemas.microsoft.com/office/drawing/2014/main" id="{AE4E8BDA-09B6-4366-84EC-837692FE27DB}"/>
               </a:ext>
             </a:extLst>
           </p:cNvPr>
@@ -2569,7 +2569,7 @@
           <p:cNvPr id="3" name="Right column">
             <a:extLst xmlns:a="http://schemas.openxmlformats.org/drawingml/2006/main">
               <a:ext uri="{FF2B5EF4-FFF2-40B4-BE49-F238E27FC236}">
-                <a16:creationId xmlns:a16="http://schemas.microsoft.com/office/drawing/2014/main" id="{FB60E174-0798-464B-AA68-6665C0803040}"/>
+                <a16:creationId xmlns:a16="http://schemas.microsoft.com/office/drawing/2014/main" id="{CCB2563A-63E5-4A5A-A2C0-F138C1757534}"/>
               </a:ext>
             </a:extLst>
           </p:cNvPr>
@@ -2815,7 +2815,7 @@
           <p:cNvPr id="3" name="Title">
             <a:extLst xmlns:a="http://schemas.openxmlformats.org/drawingml/2006/main">
               <a:ext uri="{FF2B5EF4-FFF2-40B4-BE49-F238E27FC236}">
-                <a16:creationId xmlns:a16="http://schemas.microsoft.com/office/drawing/2014/main" id="{70598EF3-043C-444A-A5A1-B18969FEB2CC}"/>
+                <a16:creationId xmlns:a16="http://schemas.microsoft.com/office/drawing/2014/main" id="{49646206-AAE7-4D3B-AD6E-B1303BDA7EA8}"/>
               </a:ext>
             </a:extLst>
           </p:cNvPr>
@@ -3044,7 +3044,7 @@
           <p:cNvPr id="2" name="Left column">
             <a:extLst xmlns:a="http://schemas.openxmlformats.org/drawingml/2006/main">
               <a:ext uri="{FF2B5EF4-FFF2-40B4-BE49-F238E27FC236}">
-                <a16:creationId xmlns:a16="http://schemas.microsoft.com/office/drawing/2014/main" id="{FE399677-67CB-4289-9849-3CCC9426635C}"/>
+                <a16:creationId xmlns:a16="http://schemas.microsoft.com/office/drawing/2014/main" id="{9B2EB64C-4E8E-4732-ADDB-B7FCAF3939C3}"/>
               </a:ext>
             </a:extLst>
           </p:cNvPr>
@@ -3311,12 +3311,12 @@
   </p:cSld>
   <p:clrMap bg1="lt1" tx1="dk1" bg2="lt2" tx2="dk2" accent1="accent1" accent2="accent2" accent3="accent3" accent4="accent4" accent5="accent5" accent6="accent6" hlink="hlink" folHlink="folHlink"/>
   <p:sldLayoutIdLst>
-    <p:sldLayoutId xmlns:r="http://schemas.openxmlformats.org/officeDocument/2006/relationships" id="2147483649" r:id="Rb813607ffdac450c"/>
-    <p:sldLayoutId xmlns:r="http://schemas.openxmlformats.org/officeDocument/2006/relationships" id="2147483650" r:id="R9e9fc027ed754cc0"/>
-    <p:sldLayoutId xmlns:r="http://schemas.openxmlformats.org/officeDocument/2006/relationships" id="2147483651" r:id="R091a50b85bd3430d"/>
-    <p:sldLayoutId xmlns:r="http://schemas.openxmlformats.org/officeDocument/2006/relationships" id="2147483652" r:id="Re14965a389d04172"/>
-    <p:sldLayoutId xmlns:r="http://schemas.openxmlformats.org/officeDocument/2006/relationships" id="2147483653" r:id="Rc79c43a5a795441b"/>
-    <p:sldLayoutId xmlns:r="http://schemas.openxmlformats.org/officeDocument/2006/relationships" id="2147483654" r:id="Reade1bf42a6740a1"/>
+    <p:sldLayoutId xmlns:r="http://schemas.openxmlformats.org/officeDocument/2006/relationships" id="2147483649" r:id="Rab63bf626c5f4ea7"/>
+    <p:sldLayoutId xmlns:r="http://schemas.openxmlformats.org/officeDocument/2006/relationships" id="2147483650" r:id="Rd0b2073e0358466b"/>
+    <p:sldLayoutId xmlns:r="http://schemas.openxmlformats.org/officeDocument/2006/relationships" id="2147483651" r:id="R4a79d6a073c24217"/>
+    <p:sldLayoutId xmlns:r="http://schemas.openxmlformats.org/officeDocument/2006/relationships" id="2147483652" r:id="R3307555d1e174865"/>
+    <p:sldLayoutId xmlns:r="http://schemas.openxmlformats.org/officeDocument/2006/relationships" id="2147483653" r:id="R9931caf5b37541fd"/>
+    <p:sldLayoutId xmlns:r="http://schemas.openxmlformats.org/officeDocument/2006/relationships" id="2147483654" r:id="R5918525f58964a95"/>
   </p:sldLayoutIdLst>
   <p:txStyles>
     <p:titleStyle>
@@ -3866,11 +3866,11 @@
           <c:invertIfNegative val="0"/>
           <c:cat>
             <c:strRef>
-              <c:f>'Chart Data'!$A$2:$A$5</c:f>
+              <c:f>'Chart Data'!$A$2:$A$6</c:f>
               <c:strCache>
-                <c:ptCount val="4"/>
+                <c:ptCount val="5"/>
                 <c:pt idx="0">
-                  <c:v>Full</c:v>
+                  <c:v>Full baseline</c:v>
                 </c:pt>
                 <c:pt idx="1">
                   <c:v>0.1×</c:v>
@@ -3881,26 +3881,32 @@
                 <c:pt idx="3">
                   <c:v>0.5×</c:v>
                 </c:pt>
+                <c:pt idx="4">
+                  <c:v>0.7×</c:v>
+                </c:pt>
               </c:strCache>
             </c:strRef>
           </c:cat>
           <c:val>
             <c:numRef>
-              <c:f>'Chart Data'!$B$2:$B$5</c:f>
+              <c:f>'Chart Data'!$B$2:$B$6</c:f>
               <c:numCache>
                 <c:formatCode>General</c:formatCode>
-                <c:ptCount val="4"/>
+                <c:ptCount val="5"/>
                 <c:pt idx="0">
-                  <c:v>8.882</c:v>
+                  <c:v>8.658</c:v>
                 </c:pt>
                 <c:pt idx="1">
-                  <c:v>3.631</c:v>
+                  <c:v>2.46</c:v>
                 </c:pt>
                 <c:pt idx="2">
-                  <c:v>4.257</c:v>
+                  <c:v>2.89</c:v>
                 </c:pt>
                 <c:pt idx="3">
-                  <c:v>6.158</c:v>
+                  <c:v>4.461</c:v>
+                </c:pt>
+                <c:pt idx="4">
+                  <c:v>5.429</c:v>
                 </c:pt>
               </c:numCache>
             </c:numRef>
@@ -3920,11 +3926,11 @@
           <c:invertIfNegative val="0"/>
           <c:cat>
             <c:strRef>
-              <c:f>'Chart Data'!$C$2:$C$5</c:f>
+              <c:f>'Chart Data'!$C$2:$C$6</c:f>
               <c:strCache>
-                <c:ptCount val="4"/>
+                <c:ptCount val="5"/>
                 <c:pt idx="0">
-                  <c:v>Full</c:v>
+                  <c:v>Full baseline</c:v>
                 </c:pt>
                 <c:pt idx="1">
                   <c:v>0.1×</c:v>
@@ -3935,15 +3941,18 @@
                 <c:pt idx="3">
                   <c:v>0.5×</c:v>
                 </c:pt>
+                <c:pt idx="4">
+                  <c:v>0.7×</c:v>
+                </c:pt>
               </c:strCache>
             </c:strRef>
           </c:cat>
           <c:val>
             <c:numRef>
-              <c:f>'Chart Data'!$D$2:$D$5</c:f>
+              <c:f>'Chart Data'!$D$2:$D$6</c:f>
               <c:numCache>
                 <c:formatCode>General</c:formatCode>
-                <c:ptCount val="4"/>
+                <c:ptCount val="5"/>
                 <c:pt idx="0">
                   <c:v>2</c:v>
                 </c:pt>
@@ -3954,6 +3963,9 @@
                   <c:v>2</c:v>
                 </c:pt>
                 <c:pt idx="3">
+                  <c:v>2</c:v>
+                </c:pt>
+                <c:pt idx="4">
                   <c:v>2</c:v>
                 </c:pt>
               </c:numCache>
@@ -4164,7 +4176,7 @@
           <p:cNvPr id="5" name="">
             <a:extLst xmlns:a="http://schemas.openxmlformats.org/drawingml/2006/main">
               <a:ext uri="{FF2B5EF4-FFF2-40B4-BE49-F238E27FC236}">
-                <a16:creationId xmlns:a16="http://schemas.microsoft.com/office/drawing/2014/main" id="{FB96B3B9-E27D-4F70-9EFF-463781721C60}"/>
+                <a16:creationId xmlns:a16="http://schemas.microsoft.com/office/drawing/2014/main" id="{A65C383B-8883-4CC4-9778-52A0356AAEA7}"/>
               </a:ext>
             </a:extLst>
           </p:cNvPr>
@@ -4222,7 +4234,7 @@
           <p:cNvPr id="2" name="">
             <a:extLst xmlns:a="http://schemas.openxmlformats.org/drawingml/2006/main">
               <a:ext uri="{FF2B5EF4-FFF2-40B4-BE49-F238E27FC236}">
-                <a16:creationId xmlns:a16="http://schemas.microsoft.com/office/drawing/2014/main" id="{E92B54C1-30D9-4EA6-9756-7A2C7304EAC2}"/>
+                <a16:creationId xmlns:a16="http://schemas.microsoft.com/office/drawing/2014/main" id="{102D5957-F3BB-467F-80A3-A6C7F909AE5F}"/>
               </a:ext>
             </a:extLst>
           </p:cNvPr>
@@ -4267,7 +4279,7 @@
           <p:cNvPr id="3" name="">
             <a:extLst xmlns:a="http://schemas.openxmlformats.org/drawingml/2006/main">
               <a:ext uri="{FF2B5EF4-FFF2-40B4-BE49-F238E27FC236}">
-                <a16:creationId xmlns:a16="http://schemas.microsoft.com/office/drawing/2014/main" id="{5194251D-410F-4685-A072-2A9E3F2E4CC4}"/>
+                <a16:creationId xmlns:a16="http://schemas.microsoft.com/office/drawing/2014/main" id="{485D118A-D065-4E5F-B3E7-BA1F06C8CC7A}"/>
               </a:ext>
             </a:extLst>
           </p:cNvPr>
@@ -4312,7 +4324,7 @@
           <p:cNvPr id="4" name="">
             <a:extLst xmlns:a="http://schemas.openxmlformats.org/drawingml/2006/main">
               <a:ext uri="{FF2B5EF4-FFF2-40B4-BE49-F238E27FC236}">
-                <a16:creationId xmlns:a16="http://schemas.microsoft.com/office/drawing/2014/main" id="{CE18FAA2-D72C-4133-B368-CEE8D039DE9A}"/>
+                <a16:creationId xmlns:a16="http://schemas.microsoft.com/office/drawing/2014/main" id="{1C29FA77-3595-4954-8CC5-E3D7EC4A8845}"/>
               </a:ext>
             </a:extLst>
           </p:cNvPr>
@@ -4355,7 +4367,7 @@
     </p:spTree>
     <p:extLst>
       <p:ext uri="{BB962C8B-B14F-4D97-AF65-F5344CB8AC3E}">
-        <p14:creationId xmlns:p14="http://schemas.microsoft.com/office/powerpoint/2010/main" val="939593045"/>
+        <p14:creationId xmlns:p14="http://schemas.microsoft.com/office/powerpoint/2010/main" val="1824775973"/>
       </p:ext>
     </p:extLst>
   </p:cSld>
@@ -4386,7 +4398,7 @@
           <p:cNvPr id="29" name="">
             <a:extLst xmlns:a="http://schemas.openxmlformats.org/drawingml/2006/main">
               <a:ext uri="{FF2B5EF4-FFF2-40B4-BE49-F238E27FC236}">
-                <a16:creationId xmlns:a16="http://schemas.microsoft.com/office/drawing/2014/main" id="{E57A48EE-7652-4540-8B5F-E0C4D59DAE4A}"/>
+                <a16:creationId xmlns:a16="http://schemas.microsoft.com/office/drawing/2014/main" id="{7B8C6D03-520B-484D-8291-16F6D49764B2}"/>
               </a:ext>
             </a:extLst>
           </p:cNvPr>
@@ -4431,7 +4443,7 @@
           <p:cNvPr id="2" name="">
             <a:extLst xmlns:a="http://schemas.openxmlformats.org/drawingml/2006/main">
               <a:ext uri="{FF2B5EF4-FFF2-40B4-BE49-F238E27FC236}">
-                <a16:creationId xmlns:a16="http://schemas.microsoft.com/office/drawing/2014/main" id="{8BE77A37-6968-4F85-ABF0-72C999CE879E}"/>
+                <a16:creationId xmlns:a16="http://schemas.microsoft.com/office/drawing/2014/main" id="{B1A09784-615F-43C1-8D8F-D87FDEA8C952}"/>
               </a:ext>
             </a:extLst>
           </p:cNvPr>
@@ -4461,7 +4473,7 @@
           <p:cNvPr id="3" name="">
             <a:extLst xmlns:a="http://schemas.openxmlformats.org/drawingml/2006/main">
               <a:ext uri="{FF2B5EF4-FFF2-40B4-BE49-F238E27FC236}">
-                <a16:creationId xmlns:a16="http://schemas.microsoft.com/office/drawing/2014/main" id="{EC0B1FD8-0296-48CA-8B80-EB5617263F74}"/>
+                <a16:creationId xmlns:a16="http://schemas.microsoft.com/office/drawing/2014/main" id="{1152A649-BEE5-4850-A8E3-55514947A1DF}"/>
               </a:ext>
             </a:extLst>
           </p:cNvPr>
@@ -4506,7 +4518,7 @@
           <p:cNvPr id="4" name="">
             <a:extLst xmlns:a="http://schemas.openxmlformats.org/drawingml/2006/main">
               <a:ext uri="{FF2B5EF4-FFF2-40B4-BE49-F238E27FC236}">
-                <a16:creationId xmlns:a16="http://schemas.microsoft.com/office/drawing/2014/main" id="{F56374B2-1EB6-4D88-9CB7-3BB76243AB85}"/>
+                <a16:creationId xmlns:a16="http://schemas.microsoft.com/office/drawing/2014/main" id="{E6901D4B-8FAB-4E61-852A-354A6767BCF2}"/>
               </a:ext>
             </a:extLst>
           </p:cNvPr>
@@ -4551,7 +4563,7 @@
           <p:cNvPr id="5" name="">
             <a:extLst xmlns:a="http://schemas.openxmlformats.org/drawingml/2006/main">
               <a:ext uri="{FF2B5EF4-FFF2-40B4-BE49-F238E27FC236}">
-                <a16:creationId xmlns:a16="http://schemas.microsoft.com/office/drawing/2014/main" id="{29943380-9A93-4737-AD43-C70B74881F6B}"/>
+                <a16:creationId xmlns:a16="http://schemas.microsoft.com/office/drawing/2014/main" id="{27556DA3-B797-4D0E-96C6-DEB3812F31D2}"/>
               </a:ext>
             </a:extLst>
           </p:cNvPr>
@@ -4596,7 +4608,7 @@
           <p:cNvPr id="6" name="">
             <a:extLst xmlns:a="http://schemas.openxmlformats.org/drawingml/2006/main">
               <a:ext uri="{FF2B5EF4-FFF2-40B4-BE49-F238E27FC236}">
-                <a16:creationId xmlns:a16="http://schemas.microsoft.com/office/drawing/2014/main" id="{6DDCA64C-BD4C-41A4-BCB7-2383B610148F}"/>
+                <a16:creationId xmlns:a16="http://schemas.microsoft.com/office/drawing/2014/main" id="{8B8BB3DB-2BB7-4363-B27B-DE210A6A6AC5}"/>
               </a:ext>
             </a:extLst>
           </p:cNvPr>
@@ -4628,7 +4640,7 @@
           <p:cNvPr id="7" name="">
             <a:extLst xmlns:a="http://schemas.openxmlformats.org/drawingml/2006/main">
               <a:ext uri="{FF2B5EF4-FFF2-40B4-BE49-F238E27FC236}">
-                <a16:creationId xmlns:a16="http://schemas.microsoft.com/office/drawing/2014/main" id="{37754F06-6443-49BE-B43A-971E81E9EDCC}"/>
+                <a16:creationId xmlns:a16="http://schemas.microsoft.com/office/drawing/2014/main" id="{40D22FB7-AEE4-4416-9B82-C0974E949E6B}"/>
               </a:ext>
             </a:extLst>
           </p:cNvPr>
@@ -4660,7 +4672,7 @@
           <p:cNvPr id="8" name="">
             <a:extLst xmlns:a="http://schemas.openxmlformats.org/drawingml/2006/main">
               <a:ext uri="{FF2B5EF4-FFF2-40B4-BE49-F238E27FC236}">
-                <a16:creationId xmlns:a16="http://schemas.microsoft.com/office/drawing/2014/main" id="{F40C0710-29A0-44EE-AF38-622D341FE803}"/>
+                <a16:creationId xmlns:a16="http://schemas.microsoft.com/office/drawing/2014/main" id="{2DCF3332-31FF-4FF2-83F2-7C80C4D34EB2}"/>
               </a:ext>
             </a:extLst>
           </p:cNvPr>
@@ -4692,7 +4704,7 @@
           <p:cNvPr id="9" name="">
             <a:extLst xmlns:a="http://schemas.openxmlformats.org/drawingml/2006/main">
               <a:ext uri="{FF2B5EF4-FFF2-40B4-BE49-F238E27FC236}">
-                <a16:creationId xmlns:a16="http://schemas.microsoft.com/office/drawing/2014/main" id="{CD40F7E8-03F0-47BA-9733-4F6893799735}"/>
+                <a16:creationId xmlns:a16="http://schemas.microsoft.com/office/drawing/2014/main" id="{C8611382-083B-4D6E-ABEA-F93D53AB4D39}"/>
               </a:ext>
             </a:extLst>
           </p:cNvPr>
@@ -4737,7 +4749,7 @@
           <p:cNvPr id="10" name="">
             <a:extLst xmlns:a="http://schemas.openxmlformats.org/drawingml/2006/main">
               <a:ext uri="{FF2B5EF4-FFF2-40B4-BE49-F238E27FC236}">
-                <a16:creationId xmlns:a16="http://schemas.microsoft.com/office/drawing/2014/main" id="{12AC0234-EF08-41C8-9347-BAE36C5151C8}"/>
+                <a16:creationId xmlns:a16="http://schemas.microsoft.com/office/drawing/2014/main" id="{5FF81205-4AAA-4F24-B720-61C2F3EBAD9F}"/>
               </a:ext>
             </a:extLst>
           </p:cNvPr>
@@ -4767,7 +4779,7 @@
           <p:cNvPr id="11" name="">
             <a:extLst xmlns:a="http://schemas.openxmlformats.org/drawingml/2006/main">
               <a:ext uri="{FF2B5EF4-FFF2-40B4-BE49-F238E27FC236}">
-                <a16:creationId xmlns:a16="http://schemas.microsoft.com/office/drawing/2014/main" id="{E3EBE8BD-CE58-475B-825A-B985CE47C32E}"/>
+                <a16:creationId xmlns:a16="http://schemas.microsoft.com/office/drawing/2014/main" id="{064A66A1-A9AE-49E0-B4F5-E5A3EBB6ECD6}"/>
               </a:ext>
             </a:extLst>
           </p:cNvPr>
@@ -4812,7 +4824,7 @@
           <p:cNvPr id="12" name="">
             <a:extLst xmlns:a="http://schemas.openxmlformats.org/drawingml/2006/main">
               <a:ext uri="{FF2B5EF4-FFF2-40B4-BE49-F238E27FC236}">
-                <a16:creationId xmlns:a16="http://schemas.microsoft.com/office/drawing/2014/main" id="{F72851C4-5144-4CB2-827B-1ABEBBDB1110}"/>
+                <a16:creationId xmlns:a16="http://schemas.microsoft.com/office/drawing/2014/main" id="{552AF6CF-46EC-4954-AE67-EE626120E42F}"/>
               </a:ext>
             </a:extLst>
           </p:cNvPr>
@@ -4844,7 +4856,7 @@
           <p:cNvPr id="13" name="">
             <a:extLst xmlns:a="http://schemas.openxmlformats.org/drawingml/2006/main">
               <a:ext uri="{FF2B5EF4-FFF2-40B4-BE49-F238E27FC236}">
-                <a16:creationId xmlns:a16="http://schemas.microsoft.com/office/drawing/2014/main" id="{B1A005E2-7188-4981-8554-F6F4EA29D4E7}"/>
+                <a16:creationId xmlns:a16="http://schemas.microsoft.com/office/drawing/2014/main" id="{C1189D85-ECA7-439A-AF44-E98BE8092328}"/>
               </a:ext>
             </a:extLst>
           </p:cNvPr>
@@ -4876,7 +4888,7 @@
           <p:cNvPr id="14" name="">
             <a:extLst xmlns:a="http://schemas.openxmlformats.org/drawingml/2006/main">
               <a:ext uri="{FF2B5EF4-FFF2-40B4-BE49-F238E27FC236}">
-                <a16:creationId xmlns:a16="http://schemas.microsoft.com/office/drawing/2014/main" id="{2FC231E1-07DF-4A0A-A25D-8B51BB465E8B}"/>
+                <a16:creationId xmlns:a16="http://schemas.microsoft.com/office/drawing/2014/main" id="{2ACECB34-8F52-4DBA-9444-C951AC664EAB}"/>
               </a:ext>
             </a:extLst>
           </p:cNvPr>
@@ -4908,7 +4920,7 @@
           <p:cNvPr id="15" name="">
             <a:extLst xmlns:a="http://schemas.openxmlformats.org/drawingml/2006/main">
               <a:ext uri="{FF2B5EF4-FFF2-40B4-BE49-F238E27FC236}">
-                <a16:creationId xmlns:a16="http://schemas.microsoft.com/office/drawing/2014/main" id="{C5AAD455-1100-404A-ACCE-99475A396ED8}"/>
+                <a16:creationId xmlns:a16="http://schemas.microsoft.com/office/drawing/2014/main" id="{143F6680-4E68-4E25-BBCD-BBF9CDCDB1D5}"/>
               </a:ext>
             </a:extLst>
           </p:cNvPr>
@@ -4953,7 +4965,7 @@
           <p:cNvPr id="16" name="">
             <a:extLst xmlns:a="http://schemas.openxmlformats.org/drawingml/2006/main">
               <a:ext uri="{FF2B5EF4-FFF2-40B4-BE49-F238E27FC236}">
-                <a16:creationId xmlns:a16="http://schemas.microsoft.com/office/drawing/2014/main" id="{B9C94F78-C9D4-471B-ACD2-0D50E4A42B75}"/>
+                <a16:creationId xmlns:a16="http://schemas.microsoft.com/office/drawing/2014/main" id="{FB2BA399-3648-4824-8533-9499EF6D5129}"/>
               </a:ext>
             </a:extLst>
           </p:cNvPr>
@@ -4983,7 +4995,7 @@
           <p:cNvPr id="17" name="">
             <a:extLst xmlns:a="http://schemas.openxmlformats.org/drawingml/2006/main">
               <a:ext uri="{FF2B5EF4-FFF2-40B4-BE49-F238E27FC236}">
-                <a16:creationId xmlns:a16="http://schemas.microsoft.com/office/drawing/2014/main" id="{0642146F-8896-4942-9FFD-8ACEA50C2A69}"/>
+                <a16:creationId xmlns:a16="http://schemas.microsoft.com/office/drawing/2014/main" id="{CF9AA00F-5804-43DF-AE3E-F9B17AE47CA1}"/>
               </a:ext>
             </a:extLst>
           </p:cNvPr>
@@ -5028,7 +5040,7 @@
           <p:cNvPr id="18" name="">
             <a:extLst xmlns:a="http://schemas.openxmlformats.org/drawingml/2006/main">
               <a:ext uri="{FF2B5EF4-FFF2-40B4-BE49-F238E27FC236}">
-                <a16:creationId xmlns:a16="http://schemas.microsoft.com/office/drawing/2014/main" id="{CFE530E6-FBAE-4963-93E7-886F04B55BCC}"/>
+                <a16:creationId xmlns:a16="http://schemas.microsoft.com/office/drawing/2014/main" id="{190FA276-642F-4A6D-B4F0-A214E10411A0}"/>
               </a:ext>
             </a:extLst>
           </p:cNvPr>
@@ -5060,7 +5072,7 @@
           <p:cNvPr id="19" name="">
             <a:extLst xmlns:a="http://schemas.openxmlformats.org/drawingml/2006/main">
               <a:ext uri="{FF2B5EF4-FFF2-40B4-BE49-F238E27FC236}">
-                <a16:creationId xmlns:a16="http://schemas.microsoft.com/office/drawing/2014/main" id="{965CC9C7-3285-46EB-B1C0-251386EBE4B6}"/>
+                <a16:creationId xmlns:a16="http://schemas.microsoft.com/office/drawing/2014/main" id="{BACA7281-D8A2-44AE-BEC3-1944E536ACFA}"/>
               </a:ext>
             </a:extLst>
           </p:cNvPr>
@@ -5092,7 +5104,7 @@
           <p:cNvPr id="20" name="">
             <a:extLst xmlns:a="http://schemas.openxmlformats.org/drawingml/2006/main">
               <a:ext uri="{FF2B5EF4-FFF2-40B4-BE49-F238E27FC236}">
-                <a16:creationId xmlns:a16="http://schemas.microsoft.com/office/drawing/2014/main" id="{A0804ED7-AEDC-46D8-AF8A-D13F96D8B9F8}"/>
+                <a16:creationId xmlns:a16="http://schemas.microsoft.com/office/drawing/2014/main" id="{E9C2A71F-A7FB-4225-B424-C4E82662D8F3}"/>
               </a:ext>
             </a:extLst>
           </p:cNvPr>
@@ -5124,7 +5136,7 @@
           <p:cNvPr id="21" name="">
             <a:extLst xmlns:a="http://schemas.openxmlformats.org/drawingml/2006/main">
               <a:ext uri="{FF2B5EF4-FFF2-40B4-BE49-F238E27FC236}">
-                <a16:creationId xmlns:a16="http://schemas.microsoft.com/office/drawing/2014/main" id="{D1A4F118-66B1-422D-81EE-21DF2232BE46}"/>
+                <a16:creationId xmlns:a16="http://schemas.microsoft.com/office/drawing/2014/main" id="{157E52A8-C4FA-4648-908F-FF1794147F84}"/>
               </a:ext>
             </a:extLst>
           </p:cNvPr>
@@ -5169,7 +5181,7 @@
           <p:cNvPr id="22" name="">
             <a:extLst xmlns:a="http://schemas.openxmlformats.org/drawingml/2006/main">
               <a:ext uri="{FF2B5EF4-FFF2-40B4-BE49-F238E27FC236}">
-                <a16:creationId xmlns:a16="http://schemas.microsoft.com/office/drawing/2014/main" id="{7815DBAE-7EA4-4B7E-AB92-95D7C9164606}"/>
+                <a16:creationId xmlns:a16="http://schemas.microsoft.com/office/drawing/2014/main" id="{E017ED18-7786-4BE1-9173-2C880DD43AA0}"/>
               </a:ext>
             </a:extLst>
           </p:cNvPr>
@@ -5199,7 +5211,7 @@
           <p:cNvPr id="23" name="">
             <a:extLst xmlns:a="http://schemas.openxmlformats.org/drawingml/2006/main">
               <a:ext uri="{FF2B5EF4-FFF2-40B4-BE49-F238E27FC236}">
-                <a16:creationId xmlns:a16="http://schemas.microsoft.com/office/drawing/2014/main" id="{C98E40C4-2167-41B0-9D20-653D7A7EA86B}"/>
+                <a16:creationId xmlns:a16="http://schemas.microsoft.com/office/drawing/2014/main" id="{B1F405B7-11CB-4F27-AA79-2A55E529BDAA}"/>
               </a:ext>
             </a:extLst>
           </p:cNvPr>
@@ -5229,7 +5241,7 @@
           <p:cNvPr id="24" name="">
             <a:extLst xmlns:a="http://schemas.openxmlformats.org/drawingml/2006/main">
               <a:ext uri="{FF2B5EF4-FFF2-40B4-BE49-F238E27FC236}">
-                <a16:creationId xmlns:a16="http://schemas.microsoft.com/office/drawing/2014/main" id="{32DBD944-5A50-4AED-852F-85156280549C}"/>
+                <a16:creationId xmlns:a16="http://schemas.microsoft.com/office/drawing/2014/main" id="{E4737E20-C832-489E-87F2-07282CA77747}"/>
               </a:ext>
             </a:extLst>
           </p:cNvPr>
@@ -5274,7 +5286,7 @@
           <p:cNvPr id="25" name="">
             <a:extLst xmlns:a="http://schemas.openxmlformats.org/drawingml/2006/main">
               <a:ext uri="{FF2B5EF4-FFF2-40B4-BE49-F238E27FC236}">
-                <a16:creationId xmlns:a16="http://schemas.microsoft.com/office/drawing/2014/main" id="{AE260CA8-5F07-463B-A566-E7EAACB1158B}"/>
+                <a16:creationId xmlns:a16="http://schemas.microsoft.com/office/drawing/2014/main" id="{3A313B33-1F2E-4173-958D-7728904443D2}"/>
               </a:ext>
             </a:extLst>
           </p:cNvPr>
@@ -5319,7 +5331,7 @@
           <p:cNvPr id="26" name="">
             <a:extLst xmlns:a="http://schemas.openxmlformats.org/drawingml/2006/main">
               <a:ext uri="{FF2B5EF4-FFF2-40B4-BE49-F238E27FC236}">
-                <a16:creationId xmlns:a16="http://schemas.microsoft.com/office/drawing/2014/main" id="{F7429049-F10F-4F18-8820-49687F01B565}"/>
+                <a16:creationId xmlns:a16="http://schemas.microsoft.com/office/drawing/2014/main" id="{DA91E890-C5A4-4070-B33C-50BBE9B9F4E4}"/>
               </a:ext>
             </a:extLst>
           </p:cNvPr>
@@ -5364,7 +5376,7 @@
           <p:cNvPr id="27" name="">
             <a:extLst xmlns:a="http://schemas.openxmlformats.org/drawingml/2006/main">
               <a:ext uri="{FF2B5EF4-FFF2-40B4-BE49-F238E27FC236}">
-                <a16:creationId xmlns:a16="http://schemas.microsoft.com/office/drawing/2014/main" id="{CE1C3C00-8D44-4687-98E7-FA939230E3DA}"/>
+                <a16:creationId xmlns:a16="http://schemas.microsoft.com/office/drawing/2014/main" id="{4A6D31EE-4A03-46DF-BCB8-267B97D677E9}"/>
               </a:ext>
             </a:extLst>
           </p:cNvPr>
@@ -5409,7 +5421,7 @@
           <p:cNvPr id="28" name="">
             <a:extLst xmlns:a="http://schemas.openxmlformats.org/drawingml/2006/main">
               <a:ext uri="{FF2B5EF4-FFF2-40B4-BE49-F238E27FC236}">
-                <a16:creationId xmlns:a16="http://schemas.microsoft.com/office/drawing/2014/main" id="{7C583CDF-4AB2-40BD-90AE-89BD1F0A5468}"/>
+                <a16:creationId xmlns:a16="http://schemas.microsoft.com/office/drawing/2014/main" id="{7CC81B7B-0BCF-491E-BA6D-39B87B25CBDD}"/>
               </a:ext>
             </a:extLst>
           </p:cNvPr>
@@ -5452,7 +5464,7 @@
     </p:spTree>
     <p:extLst>
       <p:ext uri="{BB962C8B-B14F-4D97-AF65-F5344CB8AC3E}">
-        <p14:creationId xmlns:p14="http://schemas.microsoft.com/office/powerpoint/2010/main" val="298063405"/>
+        <p14:creationId xmlns:p14="http://schemas.microsoft.com/office/powerpoint/2010/main" val="911371109"/>
       </p:ext>
     </p:extLst>
   </p:cSld>
@@ -5483,7 +5495,7 @@
           <p:cNvPr id="15" name="">
             <a:extLst xmlns:a="http://schemas.openxmlformats.org/drawingml/2006/main">
               <a:ext uri="{FF2B5EF4-FFF2-40B4-BE49-F238E27FC236}">
-                <a16:creationId xmlns:a16="http://schemas.microsoft.com/office/drawing/2014/main" id="{235D8A48-309B-450D-9AA0-5DE13F41185F}"/>
+                <a16:creationId xmlns:a16="http://schemas.microsoft.com/office/drawing/2014/main" id="{03442926-FEEE-4CD9-A10E-2E8230054175}"/>
               </a:ext>
             </a:extLst>
           </p:cNvPr>
@@ -5528,7 +5540,7 @@
           <p:cNvPr id="2" name="">
             <a:extLst xmlns:a="http://schemas.openxmlformats.org/drawingml/2006/main">
               <a:ext uri="{FF2B5EF4-FFF2-40B4-BE49-F238E27FC236}">
-                <a16:creationId xmlns:a16="http://schemas.microsoft.com/office/drawing/2014/main" id="{42EBD704-4BDE-4767-8992-AD702634F02C}"/>
+                <a16:creationId xmlns:a16="http://schemas.microsoft.com/office/drawing/2014/main" id="{7DC080DF-8082-4DF3-8FF6-F4A0498DEBCB}"/>
               </a:ext>
             </a:extLst>
           </p:cNvPr>
@@ -5558,7 +5570,7 @@
           <p:cNvPr id="3" name="">
             <a:extLst xmlns:a="http://schemas.openxmlformats.org/drawingml/2006/main">
               <a:ext uri="{FF2B5EF4-FFF2-40B4-BE49-F238E27FC236}">
-                <a16:creationId xmlns:a16="http://schemas.microsoft.com/office/drawing/2014/main" id="{4F18428C-504E-4505-BC27-96C86784D4EC}"/>
+                <a16:creationId xmlns:a16="http://schemas.microsoft.com/office/drawing/2014/main" id="{6A64A39F-0D39-41B0-B78C-ED919601FE8B}"/>
               </a:ext>
             </a:extLst>
           </p:cNvPr>
@@ -5603,7 +5615,7 @@
           <p:cNvPr id="4" name="">
             <a:extLst xmlns:a="http://schemas.openxmlformats.org/drawingml/2006/main">
               <a:ext uri="{FF2B5EF4-FFF2-40B4-BE49-F238E27FC236}">
-                <a16:creationId xmlns:a16="http://schemas.microsoft.com/office/drawing/2014/main" id="{5F946B46-4B1B-4ABE-B3CC-0A6C70A438B3}"/>
+                <a16:creationId xmlns:a16="http://schemas.microsoft.com/office/drawing/2014/main" id="{6C95C2B3-6EB7-4AF3-B020-916AC4D0DE89}"/>
               </a:ext>
             </a:extLst>
           </p:cNvPr>
@@ -5648,7 +5660,7 @@
           <p:cNvPr id="5" name="">
             <a:extLst xmlns:a="http://schemas.openxmlformats.org/drawingml/2006/main">
               <a:ext uri="{FF2B5EF4-FFF2-40B4-BE49-F238E27FC236}">
-                <a16:creationId xmlns:a16="http://schemas.microsoft.com/office/drawing/2014/main" id="{BF27FE57-EBF0-4492-901E-B07A58631FD5}"/>
+                <a16:creationId xmlns:a16="http://schemas.microsoft.com/office/drawing/2014/main" id="{BA7766EF-29A6-4C07-AFD8-4AFBA8F2E36E}"/>
               </a:ext>
             </a:extLst>
           </p:cNvPr>
@@ -5680,7 +5692,7 @@
           <p:cNvPr id="6" name="">
             <a:extLst xmlns:a="http://schemas.openxmlformats.org/drawingml/2006/main">
               <a:ext uri="{FF2B5EF4-FFF2-40B4-BE49-F238E27FC236}">
-                <a16:creationId xmlns:a16="http://schemas.microsoft.com/office/drawing/2014/main" id="{E5E13740-D0F8-462F-A215-7883059BBA59}"/>
+                <a16:creationId xmlns:a16="http://schemas.microsoft.com/office/drawing/2014/main" id="{2202A97E-5938-4BF6-B085-415C9F69F1C4}"/>
               </a:ext>
             </a:extLst>
           </p:cNvPr>
@@ -5712,7 +5724,7 @@
           <p:cNvPr id="7" name="">
             <a:extLst xmlns:a="http://schemas.openxmlformats.org/drawingml/2006/main">
               <a:ext uri="{FF2B5EF4-FFF2-40B4-BE49-F238E27FC236}">
-                <a16:creationId xmlns:a16="http://schemas.microsoft.com/office/drawing/2014/main" id="{621D1375-6055-4EFF-9787-6C327FBD857C}"/>
+                <a16:creationId xmlns:a16="http://schemas.microsoft.com/office/drawing/2014/main" id="{401CF9B3-A297-4BE3-84BC-D9264F17AA44}"/>
               </a:ext>
             </a:extLst>
           </p:cNvPr>
@@ -5744,7 +5756,7 @@
           <p:cNvPr id="8" name="">
             <a:extLst xmlns:a="http://schemas.openxmlformats.org/drawingml/2006/main">
               <a:ext uri="{FF2B5EF4-FFF2-40B4-BE49-F238E27FC236}">
-                <a16:creationId xmlns:a16="http://schemas.microsoft.com/office/drawing/2014/main" id="{1A2BC7C6-0FE2-41E9-895B-F970C1E49186}"/>
+                <a16:creationId xmlns:a16="http://schemas.microsoft.com/office/drawing/2014/main" id="{16444D25-8F91-4E82-82F0-141580EC51A8}"/>
               </a:ext>
             </a:extLst>
           </p:cNvPr>
@@ -5789,7 +5801,7 @@
           <p:cNvPr id="9" name="">
             <a:extLst xmlns:a="http://schemas.openxmlformats.org/drawingml/2006/main">
               <a:ext uri="{FF2B5EF4-FFF2-40B4-BE49-F238E27FC236}">
-                <a16:creationId xmlns:a16="http://schemas.microsoft.com/office/drawing/2014/main" id="{121DD18C-3C4F-4815-B7C1-6309D05F5742}"/>
+                <a16:creationId xmlns:a16="http://schemas.microsoft.com/office/drawing/2014/main" id="{C34AB15E-1BB8-49E4-8577-AE85A9B5690B}"/>
               </a:ext>
             </a:extLst>
           </p:cNvPr>
@@ -5834,7 +5846,7 @@
           <p:cNvPr id="10" name="">
             <a:extLst xmlns:a="http://schemas.openxmlformats.org/drawingml/2006/main">
               <a:ext uri="{FF2B5EF4-FFF2-40B4-BE49-F238E27FC236}">
-                <a16:creationId xmlns:a16="http://schemas.microsoft.com/office/drawing/2014/main" id="{6BFC541D-FB32-47E4-835C-736D8A660758}"/>
+                <a16:creationId xmlns:a16="http://schemas.microsoft.com/office/drawing/2014/main" id="{EF83A3A7-BCF7-473F-A924-91C6F9755803}"/>
               </a:ext>
             </a:extLst>
           </p:cNvPr>
@@ -5866,7 +5878,7 @@
           <p:cNvPr id="11" name="">
             <a:extLst xmlns:a="http://schemas.openxmlformats.org/drawingml/2006/main">
               <a:ext uri="{FF2B5EF4-FFF2-40B4-BE49-F238E27FC236}">
-                <a16:creationId xmlns:a16="http://schemas.microsoft.com/office/drawing/2014/main" id="{913FC954-F9A5-497E-97B0-2813D8975F8C}"/>
+                <a16:creationId xmlns:a16="http://schemas.microsoft.com/office/drawing/2014/main" id="{C1CFBBA9-DBFE-42AD-AA0A-6AE3925DD51E}"/>
               </a:ext>
             </a:extLst>
           </p:cNvPr>
@@ -5898,7 +5910,7 @@
           <p:cNvPr id="12" name="">
             <a:extLst xmlns:a="http://schemas.openxmlformats.org/drawingml/2006/main">
               <a:ext uri="{FF2B5EF4-FFF2-40B4-BE49-F238E27FC236}">
-                <a16:creationId xmlns:a16="http://schemas.microsoft.com/office/drawing/2014/main" id="{78134293-C5F0-4D93-8916-70303102579F}"/>
+                <a16:creationId xmlns:a16="http://schemas.microsoft.com/office/drawing/2014/main" id="{55603292-B926-42EB-BE1E-358AD485D97A}"/>
               </a:ext>
             </a:extLst>
           </p:cNvPr>
@@ -5930,7 +5942,7 @@
           <p:cNvPr id="13" name="">
             <a:extLst xmlns:a="http://schemas.openxmlformats.org/drawingml/2006/main">
               <a:ext uri="{FF2B5EF4-FFF2-40B4-BE49-F238E27FC236}">
-                <a16:creationId xmlns:a16="http://schemas.microsoft.com/office/drawing/2014/main" id="{DAF33DE7-4FAE-4890-82C3-BAF74D8C79D6}"/>
+                <a16:creationId xmlns:a16="http://schemas.microsoft.com/office/drawing/2014/main" id="{E1795D38-D46D-488B-B5F7-D857386413DC}"/>
               </a:ext>
             </a:extLst>
           </p:cNvPr>
@@ -5975,7 +5987,7 @@
           <p:cNvPr id="14" name="">
             <a:extLst xmlns:a="http://schemas.openxmlformats.org/drawingml/2006/main">
               <a:ext uri="{FF2B5EF4-FFF2-40B4-BE49-F238E27FC236}">
-                <a16:creationId xmlns:a16="http://schemas.microsoft.com/office/drawing/2014/main" id="{5A6A18DA-B5E0-4110-B23C-F35FD33E652C}"/>
+                <a16:creationId xmlns:a16="http://schemas.microsoft.com/office/drawing/2014/main" id="{EBA0009C-FD2F-45DA-BD36-0B4594D58409}"/>
               </a:ext>
             </a:extLst>
           </p:cNvPr>
@@ -6018,7 +6030,7 @@
     </p:spTree>
     <p:extLst>
       <p:ext uri="{BB962C8B-B14F-4D97-AF65-F5344CB8AC3E}">
-        <p14:creationId xmlns:p14="http://schemas.microsoft.com/office/powerpoint/2010/main" val="1004197667"/>
+        <p14:creationId xmlns:p14="http://schemas.microsoft.com/office/powerpoint/2010/main" val="809550037"/>
       </p:ext>
     </p:extLst>
   </p:cSld>
@@ -6049,7 +6061,7 @@
           <p:cNvPr id="20" name="">
             <a:extLst xmlns:a="http://schemas.openxmlformats.org/drawingml/2006/main">
               <a:ext uri="{FF2B5EF4-FFF2-40B4-BE49-F238E27FC236}">
-                <a16:creationId xmlns:a16="http://schemas.microsoft.com/office/drawing/2014/main" id="{12160E10-80D1-4873-ACCD-E248EF0E8E2F}"/>
+                <a16:creationId xmlns:a16="http://schemas.microsoft.com/office/drawing/2014/main" id="{699A1191-4D3C-434C-8D25-DB73511B211F}"/>
               </a:ext>
             </a:extLst>
           </p:cNvPr>
@@ -6094,7 +6106,7 @@
           <p:cNvPr id="2" name="">
             <a:extLst xmlns:a="http://schemas.openxmlformats.org/drawingml/2006/main">
               <a:ext uri="{FF2B5EF4-FFF2-40B4-BE49-F238E27FC236}">
-                <a16:creationId xmlns:a16="http://schemas.microsoft.com/office/drawing/2014/main" id="{B2DEEAF6-69D5-4E07-A4EF-847EBD0E46D9}"/>
+                <a16:creationId xmlns:a16="http://schemas.microsoft.com/office/drawing/2014/main" id="{E848398F-B907-4BC8-970A-D56390EC23A6}"/>
               </a:ext>
             </a:extLst>
           </p:cNvPr>
@@ -6124,7 +6136,7 @@
           <p:cNvPr id="3" name="">
             <a:extLst xmlns:a="http://schemas.openxmlformats.org/drawingml/2006/main">
               <a:ext uri="{FF2B5EF4-FFF2-40B4-BE49-F238E27FC236}">
-                <a16:creationId xmlns:a16="http://schemas.microsoft.com/office/drawing/2014/main" id="{C611B946-8CA4-4106-9BB0-4A1BF8767D91}"/>
+                <a16:creationId xmlns:a16="http://schemas.microsoft.com/office/drawing/2014/main" id="{BBA469ED-3284-4389-9E9A-E071E488F6AD}"/>
               </a:ext>
             </a:extLst>
           </p:cNvPr>
@@ -6169,7 +6181,7 @@
           <p:cNvPr id="4" name="">
             <a:extLst xmlns:a="http://schemas.openxmlformats.org/drawingml/2006/main">
               <a:ext uri="{FF2B5EF4-FFF2-40B4-BE49-F238E27FC236}">
-                <a16:creationId xmlns:a16="http://schemas.microsoft.com/office/drawing/2014/main" id="{4D1ABFA0-BCA8-4977-A2EA-4D0B30B050A2}"/>
+                <a16:creationId xmlns:a16="http://schemas.microsoft.com/office/drawing/2014/main" id="{1A59B0EC-DEA3-4DF7-A473-972E44AAD1E8}"/>
               </a:ext>
             </a:extLst>
           </p:cNvPr>
@@ -6214,7 +6226,7 @@
           <p:cNvPr id="5" name="">
             <a:extLst xmlns:a="http://schemas.openxmlformats.org/drawingml/2006/main">
               <a:ext uri="{FF2B5EF4-FFF2-40B4-BE49-F238E27FC236}">
-                <a16:creationId xmlns:a16="http://schemas.microsoft.com/office/drawing/2014/main" id="{33C86966-D340-4B3F-839D-AB3770337956}"/>
+                <a16:creationId xmlns:a16="http://schemas.microsoft.com/office/drawing/2014/main" id="{36947818-DAAC-4E10-87B3-A2C1470A6F26}"/>
               </a:ext>
             </a:extLst>
           </p:cNvPr>
@@ -6246,7 +6258,7 @@
           <p:cNvPr id="6" name="">
             <a:extLst xmlns:a="http://schemas.openxmlformats.org/drawingml/2006/main">
               <a:ext uri="{FF2B5EF4-FFF2-40B4-BE49-F238E27FC236}">
-                <a16:creationId xmlns:a16="http://schemas.microsoft.com/office/drawing/2014/main" id="{9FEF53F8-D1D0-4909-B1E1-DE3E34CDE1CB}"/>
+                <a16:creationId xmlns:a16="http://schemas.microsoft.com/office/drawing/2014/main" id="{106BAD6E-BD84-4E6E-A8B6-E1D8839CC51A}"/>
               </a:ext>
             </a:extLst>
           </p:cNvPr>
@@ -6317,7 +6329,7 @@
           <p:cNvPr id="7" name="">
             <a:extLst xmlns:a="http://schemas.openxmlformats.org/drawingml/2006/main">
               <a:ext uri="{FF2B5EF4-FFF2-40B4-BE49-F238E27FC236}">
-                <a16:creationId xmlns:a16="http://schemas.microsoft.com/office/drawing/2014/main" id="{9C9F7E01-5985-4AF8-A196-56FB27E7A4DA}"/>
+                <a16:creationId xmlns:a16="http://schemas.microsoft.com/office/drawing/2014/main" id="{B553C864-2805-450F-8074-F65027EDEE2E}"/>
               </a:ext>
             </a:extLst>
           </p:cNvPr>
@@ -6362,7 +6374,7 @@
           <p:cNvPr id="8" name="">
             <a:extLst xmlns:a="http://schemas.openxmlformats.org/drawingml/2006/main">
               <a:ext uri="{FF2B5EF4-FFF2-40B4-BE49-F238E27FC236}">
-                <a16:creationId xmlns:a16="http://schemas.microsoft.com/office/drawing/2014/main" id="{82E0D6C1-8B12-4F0C-9217-17E389D0B30D}"/>
+                <a16:creationId xmlns:a16="http://schemas.microsoft.com/office/drawing/2014/main" id="{7C89BFB9-0293-4CE6-A55A-B49C9E45079F}"/>
               </a:ext>
             </a:extLst>
           </p:cNvPr>
@@ -6394,7 +6406,7 @@
           <p:cNvPr id="9" name="">
             <a:extLst xmlns:a="http://schemas.openxmlformats.org/drawingml/2006/main">
               <a:ext uri="{FF2B5EF4-FFF2-40B4-BE49-F238E27FC236}">
-                <a16:creationId xmlns:a16="http://schemas.microsoft.com/office/drawing/2014/main" id="{E4925D2C-133B-4AC2-A573-3B607BCA573E}"/>
+                <a16:creationId xmlns:a16="http://schemas.microsoft.com/office/drawing/2014/main" id="{0D6B22B3-6C9F-4243-B3A4-D7D38FF44143}"/>
               </a:ext>
             </a:extLst>
           </p:cNvPr>
@@ -6426,7 +6438,7 @@
           <p:cNvPr id="10" name="">
             <a:extLst xmlns:a="http://schemas.openxmlformats.org/drawingml/2006/main">
               <a:ext uri="{FF2B5EF4-FFF2-40B4-BE49-F238E27FC236}">
-                <a16:creationId xmlns:a16="http://schemas.microsoft.com/office/drawing/2014/main" id="{EC163119-7449-4DE3-B8D7-1DEF6BA9D529}"/>
+                <a16:creationId xmlns:a16="http://schemas.microsoft.com/office/drawing/2014/main" id="{3569F922-4E16-46D1-8BA8-49316709B9B0}"/>
               </a:ext>
             </a:extLst>
           </p:cNvPr>
@@ -6471,7 +6483,7 @@
           <p:cNvPr id="11" name="">
             <a:extLst xmlns:a="http://schemas.openxmlformats.org/drawingml/2006/main">
               <a:ext uri="{FF2B5EF4-FFF2-40B4-BE49-F238E27FC236}">
-                <a16:creationId xmlns:a16="http://schemas.microsoft.com/office/drawing/2014/main" id="{2A650142-7EBA-4BEF-BC5B-3BF06AE69D37}"/>
+                <a16:creationId xmlns:a16="http://schemas.microsoft.com/office/drawing/2014/main" id="{DC36E927-8F24-4B00-9227-29880609D525}"/>
               </a:ext>
             </a:extLst>
           </p:cNvPr>
@@ -6516,7 +6528,7 @@
           <p:cNvPr id="12" name="">
             <a:extLst xmlns:a="http://schemas.openxmlformats.org/drawingml/2006/main">
               <a:ext uri="{FF2B5EF4-FFF2-40B4-BE49-F238E27FC236}">
-                <a16:creationId xmlns:a16="http://schemas.microsoft.com/office/drawing/2014/main" id="{75C2F24F-DB16-4D3F-8698-9BCC6DABECD8}"/>
+                <a16:creationId xmlns:a16="http://schemas.microsoft.com/office/drawing/2014/main" id="{D5CFC489-2058-471A-B4E7-0DA986EB9B0A}"/>
               </a:ext>
             </a:extLst>
           </p:cNvPr>
@@ -6561,7 +6573,7 @@
           <p:cNvPr id="13" name="">
             <a:extLst xmlns:a="http://schemas.openxmlformats.org/drawingml/2006/main">
               <a:ext uri="{FF2B5EF4-FFF2-40B4-BE49-F238E27FC236}">
-                <a16:creationId xmlns:a16="http://schemas.microsoft.com/office/drawing/2014/main" id="{24A327AA-859C-41B1-9BE9-47BC930C1D8F}"/>
+                <a16:creationId xmlns:a16="http://schemas.microsoft.com/office/drawing/2014/main" id="{5281B444-154D-4DBB-BAA6-E0DEB94440C7}"/>
               </a:ext>
             </a:extLst>
           </p:cNvPr>
@@ -6593,7 +6605,7 @@
           <p:cNvPr id="14" name="">
             <a:extLst xmlns:a="http://schemas.openxmlformats.org/drawingml/2006/main">
               <a:ext uri="{FF2B5EF4-FFF2-40B4-BE49-F238E27FC236}">
-                <a16:creationId xmlns:a16="http://schemas.microsoft.com/office/drawing/2014/main" id="{90273DEA-CF34-46BE-A4BB-E7A069A32495}"/>
+                <a16:creationId xmlns:a16="http://schemas.microsoft.com/office/drawing/2014/main" id="{21C3375A-1306-464B-8F5F-25189D593337}"/>
               </a:ext>
             </a:extLst>
           </p:cNvPr>
@@ -6625,7 +6637,7 @@
           <p:cNvPr id="15" name="">
             <a:extLst xmlns:a="http://schemas.openxmlformats.org/drawingml/2006/main">
               <a:ext uri="{FF2B5EF4-FFF2-40B4-BE49-F238E27FC236}">
-                <a16:creationId xmlns:a16="http://schemas.microsoft.com/office/drawing/2014/main" id="{797A4FF3-C532-4F6C-8BC0-1D6529559F84}"/>
+                <a16:creationId xmlns:a16="http://schemas.microsoft.com/office/drawing/2014/main" id="{90E096AD-98E3-4BF7-A0B3-135984D44563}"/>
               </a:ext>
             </a:extLst>
           </p:cNvPr>
@@ -6657,7 +6669,7 @@
           <p:cNvPr id="16" name="">
             <a:extLst xmlns:a="http://schemas.openxmlformats.org/drawingml/2006/main">
               <a:ext uri="{FF2B5EF4-FFF2-40B4-BE49-F238E27FC236}">
-                <a16:creationId xmlns:a16="http://schemas.microsoft.com/office/drawing/2014/main" id="{5024BEE1-D249-43BB-A282-2A1010891D0F}"/>
+                <a16:creationId xmlns:a16="http://schemas.microsoft.com/office/drawing/2014/main" id="{C369E07D-8861-45C4-8477-10CDCADBF97E}"/>
               </a:ext>
             </a:extLst>
           </p:cNvPr>
@@ -6702,7 +6714,7 @@
           <p:cNvPr id="17" name="">
             <a:extLst xmlns:a="http://schemas.openxmlformats.org/drawingml/2006/main">
               <a:ext uri="{FF2B5EF4-FFF2-40B4-BE49-F238E27FC236}">
-                <a16:creationId xmlns:a16="http://schemas.microsoft.com/office/drawing/2014/main" id="{8EF6E008-FB53-4E6E-A9EB-DE8B22A7BAA7}"/>
+                <a16:creationId xmlns:a16="http://schemas.microsoft.com/office/drawing/2014/main" id="{0CEC7D23-E1AD-4C60-BF02-9D09917976D7}"/>
               </a:ext>
             </a:extLst>
           </p:cNvPr>
@@ -6747,7 +6759,7 @@
           <p:cNvPr id="18" name="">
             <a:extLst xmlns:a="http://schemas.openxmlformats.org/drawingml/2006/main">
               <a:ext uri="{FF2B5EF4-FFF2-40B4-BE49-F238E27FC236}">
-                <a16:creationId xmlns:a16="http://schemas.microsoft.com/office/drawing/2014/main" id="{90B1A712-2F5D-4989-AAA2-CDDCEA3258C6}"/>
+                <a16:creationId xmlns:a16="http://schemas.microsoft.com/office/drawing/2014/main" id="{51314204-048F-4E66-B598-A74FAC496733}"/>
               </a:ext>
             </a:extLst>
           </p:cNvPr>
@@ -6782,7 +6794,7 @@
                 <a:ea typeface="Arial"/>
                 <a:cs typeface="Arial"/>
               </a:rPr>
-              <a:t>Full-resolution region width: 0.1×, 0.25×, 0.5×</a:t>
+              <a:t>Full-resolution region width: 0.1×, 0.25×, 0.5×, 0.7×</a:t>
             </a:r>
           </a:p>
         </p:txBody>
@@ -6792,7 +6804,7 @@
           <p:cNvPr id="19" name="">
             <a:extLst xmlns:a="http://schemas.openxmlformats.org/drawingml/2006/main">
               <a:ext uri="{FF2B5EF4-FFF2-40B4-BE49-F238E27FC236}">
-                <a16:creationId xmlns:a16="http://schemas.microsoft.com/office/drawing/2014/main" id="{F8F14F78-1956-4EF4-9486-57568E8895DD}"/>
+                <a16:creationId xmlns:a16="http://schemas.microsoft.com/office/drawing/2014/main" id="{B9C2E3C3-FB5E-4FB1-B306-D9E8517DB507}"/>
               </a:ext>
             </a:extLst>
           </p:cNvPr>
@@ -6835,7 +6847,7 @@
     </p:spTree>
     <p:extLst>
       <p:ext uri="{BB962C8B-B14F-4D97-AF65-F5344CB8AC3E}">
-        <p14:creationId xmlns:p14="http://schemas.microsoft.com/office/powerpoint/2010/main" val="1968107453"/>
+        <p14:creationId xmlns:p14="http://schemas.microsoft.com/office/powerpoint/2010/main" val="1528795321"/>
       </p:ext>
     </p:extLst>
   </p:cSld>
@@ -6866,7 +6878,7 @@
           <p:cNvPr id="12" name="">
             <a:extLst xmlns:a="http://schemas.openxmlformats.org/drawingml/2006/main">
               <a:ext uri="{FF2B5EF4-FFF2-40B4-BE49-F238E27FC236}">
-                <a16:creationId xmlns:a16="http://schemas.microsoft.com/office/drawing/2014/main" id="{787E003F-CA2B-4A50-B33A-D8C95C688FBC}"/>
+                <a16:creationId xmlns:a16="http://schemas.microsoft.com/office/drawing/2014/main" id="{EBA7ABF9-2AD1-47CD-9CAB-C9CE105819F4}"/>
               </a:ext>
             </a:extLst>
           </p:cNvPr>
@@ -6911,7 +6923,7 @@
           <p:cNvPr id="2" name="">
             <a:extLst xmlns:a="http://schemas.openxmlformats.org/drawingml/2006/main">
               <a:ext uri="{FF2B5EF4-FFF2-40B4-BE49-F238E27FC236}">
-                <a16:creationId xmlns:a16="http://schemas.microsoft.com/office/drawing/2014/main" id="{93CF75C9-6297-40F4-BBA6-9492432EE5C3}"/>
+                <a16:creationId xmlns:a16="http://schemas.microsoft.com/office/drawing/2014/main" id="{179ECFBB-92C2-48E8-9B84-ED0D296306B0}"/>
               </a:ext>
             </a:extLst>
           </p:cNvPr>
@@ -6941,7 +6953,7 @@
           <p:cNvPr id="3" name="">
             <a:extLst xmlns:a="http://schemas.openxmlformats.org/drawingml/2006/main">
               <a:ext uri="{FF2B5EF4-FFF2-40B4-BE49-F238E27FC236}">
-                <a16:creationId xmlns:a16="http://schemas.microsoft.com/office/drawing/2014/main" id="{0634ADD6-BEFB-4184-B614-FEBA084354A1}"/>
+                <a16:creationId xmlns:a16="http://schemas.microsoft.com/office/drawing/2014/main" id="{83612117-4188-458D-AB79-7137E10A561C}"/>
               </a:ext>
             </a:extLst>
           </p:cNvPr>
@@ -6986,7 +6998,7 @@
           <p:cNvPr id="4" name="Chart">
             <a:extLst xmlns:a="http://schemas.openxmlformats.org/drawingml/2006/main">
               <a:ext uri="{FF2B5EF4-FFF2-40B4-BE49-F238E27FC236}">
-                <a16:creationId xmlns:a16="http://schemas.microsoft.com/office/drawing/2014/main" id="{B886552D-D426-4B67-9A22-F4C1B9418EA2}"/>
+                <a16:creationId xmlns:a16="http://schemas.microsoft.com/office/drawing/2014/main" id="{AA574F3A-6FF9-4372-A48F-250DA3FEDCDA}"/>
               </a:ext>
             </a:extLst>
           </p:cNvPr>
@@ -6999,7 +7011,7 @@
         </p:xfrm>
         <a:graphic xmlns:a="http://schemas.openxmlformats.org/drawingml/2006/main">
           <a:graphicData uri="http://schemas.openxmlformats.org/drawingml/2006/chart">
-            <c:chart xmlns:r="http://schemas.openxmlformats.org/officeDocument/2006/relationships" xmlns:c="http://schemas.openxmlformats.org/drawingml/2006/chart" r:id="Rcace51438dbf4d65"/>
+            <c:chart xmlns:r="http://schemas.openxmlformats.org/officeDocument/2006/relationships" xmlns:c="http://schemas.openxmlformats.org/drawingml/2006/chart" r:id="Rdb300c96411e4f99"/>
           </a:graphicData>
         </a:graphic>
       </p:graphicFrame>
@@ -7008,7 +7020,7 @@
           <p:cNvPr id="5" name="">
             <a:extLst xmlns:a="http://schemas.openxmlformats.org/drawingml/2006/main">
               <a:ext uri="{FF2B5EF4-FFF2-40B4-BE49-F238E27FC236}">
-                <a16:creationId xmlns:a16="http://schemas.microsoft.com/office/drawing/2014/main" id="{FCB420D4-4060-4203-9D09-136A09C22697}"/>
+                <a16:creationId xmlns:a16="http://schemas.microsoft.com/office/drawing/2014/main" id="{E82AA022-DDDC-411E-ADBB-0EA5AE7F5C90}"/>
               </a:ext>
             </a:extLst>
           </p:cNvPr>
@@ -7043,7 +7055,7 @@
                 <a:ea typeface="Arial"/>
                 <a:cs typeface="Arial"/>
               </a:rPr>
-              <a:t>1068 frames at 30W; 5 repetitions/frame. GPU timing, not wall time.</a:t>
+              <a:t>Sampled timing at 30W; mean</a:t>
             </a:r>
           </a:p>
         </p:txBody>
@@ -7053,7 +7065,7 @@
           <p:cNvPr id="6" name="">
             <a:extLst xmlns:a="http://schemas.openxmlformats.org/drawingml/2006/main">
               <a:ext uri="{FF2B5EF4-FFF2-40B4-BE49-F238E27FC236}">
-                <a16:creationId xmlns:a16="http://schemas.microsoft.com/office/drawing/2014/main" id="{A1A92C47-6C49-48BD-A3BA-D12957501D3B}"/>
+                <a16:creationId xmlns:a16="http://schemas.microsoft.com/office/drawing/2014/main" id="{21B12F02-1E9D-454D-90FC-4122BC982F82}"/>
               </a:ext>
             </a:extLst>
           </p:cNvPr>
@@ -7098,7 +7110,7 @@
           <p:cNvPr id="7" name="">
             <a:extLst xmlns:a="http://schemas.openxmlformats.org/drawingml/2006/main">
               <a:ext uri="{FF2B5EF4-FFF2-40B4-BE49-F238E27FC236}">
-                <a16:creationId xmlns:a16="http://schemas.microsoft.com/office/drawing/2014/main" id="{DC57521F-AB3E-41DD-96AF-D8CEE093EDD2}"/>
+                <a16:creationId xmlns:a16="http://schemas.microsoft.com/office/drawing/2014/main" id="{F9D493FE-5893-4AF8-80B1-EBA8A58DF817}"/>
               </a:ext>
             </a:extLst>
           </p:cNvPr>
@@ -7133,7 +7145,7 @@
                 <a:ea typeface="Arial"/>
                 <a:cs typeface="Arial"/>
               </a:rPr>
-              <a:t>6.257 ms</a:t>
+              <a:t>4.890 ms</a:t>
             </a:r>
           </a:p>
         </p:txBody>
@@ -7143,7 +7155,7 @@
           <p:cNvPr id="8" name="">
             <a:extLst xmlns:a="http://schemas.openxmlformats.org/drawingml/2006/main">
               <a:ext uri="{FF2B5EF4-FFF2-40B4-BE49-F238E27FC236}">
-                <a16:creationId xmlns:a16="http://schemas.microsoft.com/office/drawing/2014/main" id="{476675CE-E416-4ABF-9A14-554DD593E8EA}"/>
+                <a16:creationId xmlns:a16="http://schemas.microsoft.com/office/drawing/2014/main" id="{9660D510-FB88-4302-80FA-F103418C3224}"/>
               </a:ext>
             </a:extLst>
           </p:cNvPr>
@@ -7188,7 +7200,7 @@
           <p:cNvPr id="9" name="">
             <a:extLst xmlns:a="http://schemas.openxmlformats.org/drawingml/2006/main">
               <a:ext uri="{FF2B5EF4-FFF2-40B4-BE49-F238E27FC236}">
-                <a16:creationId xmlns:a16="http://schemas.microsoft.com/office/drawing/2014/main" id="{C0C2F7C3-8CC3-4F30-B3BA-E1BE23C65FED}"/>
+                <a16:creationId xmlns:a16="http://schemas.microsoft.com/office/drawing/2014/main" id="{EB4B689A-EC6C-4462-8B9A-6A93C35BD122}"/>
               </a:ext>
             </a:extLst>
           </p:cNvPr>
@@ -7223,7 +7235,7 @@
                 <a:ea typeface="Arial"/>
                 <a:cs typeface="Arial"/>
               </a:rPr>
-              <a:t>1.74×</a:t>
+              <a:t>2.18×</a:t>
             </a:r>
           </a:p>
         </p:txBody>
@@ -7233,7 +7245,7 @@
           <p:cNvPr id="10" name="">
             <a:extLst xmlns:a="http://schemas.openxmlformats.org/drawingml/2006/main">
               <a:ext uri="{FF2B5EF4-FFF2-40B4-BE49-F238E27FC236}">
-                <a16:creationId xmlns:a16="http://schemas.microsoft.com/office/drawing/2014/main" id="{1C0D56BB-C3F9-4301-955C-A076030CBBA6}"/>
+                <a16:creationId xmlns:a16="http://schemas.microsoft.com/office/drawing/2014/main" id="{19C14D4A-AFE3-42C0-8B14-B7B09830F502}"/>
               </a:ext>
             </a:extLst>
           </p:cNvPr>
@@ -7278,7 +7290,7 @@
           <p:cNvPr id="11" name="">
             <a:extLst xmlns:a="http://schemas.openxmlformats.org/drawingml/2006/main">
               <a:ext uri="{FF2B5EF4-FFF2-40B4-BE49-F238E27FC236}">
-                <a16:creationId xmlns:a16="http://schemas.microsoft.com/office/drawing/2014/main" id="{083FDFF0-1BAB-4DD4-89C1-D61FB699B399}"/>
+                <a16:creationId xmlns:a16="http://schemas.microsoft.com/office/drawing/2014/main" id="{90725BF8-3A7A-4797-B3F0-ECD7D0FAF606}"/>
               </a:ext>
             </a:extLst>
           </p:cNvPr>
@@ -7313,7 +7325,7 @@
                 <a:ea typeface="Arial"/>
                 <a:cs typeface="Arial"/>
               </a:rPr>
-              <a:t>Derived budget, not measured end-to-end. Copies excluded. Includes clearing and resampling; no optimal-Full claim.</a:t>
+              <a:t>Timing: 500 frames. Fixed 2 ms decode budget + measured reconstruction; not measured end-to-end.</a:t>
             </a:r>
           </a:p>
         </p:txBody>
@@ -7321,7 +7333,7 @@
     </p:spTree>
     <p:extLst>
       <p:ext uri="{BB962C8B-B14F-4D97-AF65-F5344CB8AC3E}">
-        <p14:creationId xmlns:p14="http://schemas.microsoft.com/office/powerpoint/2010/main" val="1841926725"/>
+        <p14:creationId xmlns:p14="http://schemas.microsoft.com/office/powerpoint/2010/main" val="1011385261"/>
       </p:ext>
     </p:extLst>
   </p:cSld>
@@ -7352,7 +7364,7 @@
           <p:cNvPr id="8" name="">
             <a:extLst xmlns:a="http://schemas.openxmlformats.org/drawingml/2006/main">
               <a:ext uri="{FF2B5EF4-FFF2-40B4-BE49-F238E27FC236}">
-                <a16:creationId xmlns:a16="http://schemas.microsoft.com/office/drawing/2014/main" id="{2D27BD5C-1D53-4591-B927-ADEFEF998F8F}"/>
+                <a16:creationId xmlns:a16="http://schemas.microsoft.com/office/drawing/2014/main" id="{7BCFC477-6F35-4ED5-A7D6-D01B1B2C7126}"/>
               </a:ext>
             </a:extLst>
           </p:cNvPr>
@@ -7397,7 +7409,7 @@
           <p:cNvPr id="2" name="">
             <a:extLst xmlns:a="http://schemas.openxmlformats.org/drawingml/2006/main">
               <a:ext uri="{FF2B5EF4-FFF2-40B4-BE49-F238E27FC236}">
-                <a16:creationId xmlns:a16="http://schemas.microsoft.com/office/drawing/2014/main" id="{6238650C-9037-4AB2-95F7-F6BBF6253FF6}"/>
+                <a16:creationId xmlns:a16="http://schemas.microsoft.com/office/drawing/2014/main" id="{4D4195D6-956B-4022-B8FF-EFAD6B57982B}"/>
               </a:ext>
             </a:extLst>
           </p:cNvPr>
@@ -7427,7 +7439,7 @@
           <p:cNvPr id="3" name="">
             <a:extLst xmlns:a="http://schemas.openxmlformats.org/drawingml/2006/main">
               <a:ext uri="{FF2B5EF4-FFF2-40B4-BE49-F238E27FC236}">
-                <a16:creationId xmlns:a16="http://schemas.microsoft.com/office/drawing/2014/main" id="{E0063598-DD78-42F3-9F07-68FFA4250A95}"/>
+                <a16:creationId xmlns:a16="http://schemas.microsoft.com/office/drawing/2014/main" id="{5BDC7ADE-99E4-4099-8DB9-F1AC5E697145}"/>
               </a:ext>
             </a:extLst>
           </p:cNvPr>
@@ -7472,7 +7484,7 @@
           <p:cNvPr id="4" name="">
             <a:extLst xmlns:a="http://schemas.openxmlformats.org/drawingml/2006/main">
               <a:ext uri="{FF2B5EF4-FFF2-40B4-BE49-F238E27FC236}">
-                <a16:creationId xmlns:a16="http://schemas.microsoft.com/office/drawing/2014/main" id="{49E244F8-0B9B-4822-8D52-6F832A090294}"/>
+                <a16:creationId xmlns:a16="http://schemas.microsoft.com/office/drawing/2014/main" id="{026F19FD-188F-4757-9FA6-213822D9F1A8}"/>
               </a:ext>
             </a:extLst>
           </p:cNvPr>
@@ -7492,7 +7504,7 @@
                 <a:gridCol w="3714750"/>
                 <a:gridCol w="4019550"/>
               </a:tblGrid>
-              <a:tr h="802481">
+              <a:tr h="641985">
                 <a:tc>
                   <a:txBody>
                     <a:bodyPr/>
@@ -7626,7 +7638,7 @@
                   </a:tcPr>
                 </a:tc>
               </a:tr>
-              <a:tr h="802481">
+              <a:tr h="641985">
                 <a:tc>
                   <a:txBody>
                     <a:bodyPr/>
@@ -7683,7 +7695,7 @@
                           <a:ea typeface="Arial"/>
                           <a:cs typeface="Arial"/>
                         </a:rPr>
-                        <a:t>5.631 ms</a:t>
+                        <a:t>4.460 ms</a:t>
                       </a:r>
                     </a:p>
                   </a:txBody>
@@ -7719,7 +7731,7 @@
                           <a:ea typeface="Arial"/>
                           <a:cs typeface="Arial"/>
                         </a:rPr>
-                        <a:t>0.0859</a:t>
+                        <a:t>0.0979</a:t>
                       </a:r>
                     </a:p>
                   </a:txBody>
@@ -7742,7 +7754,7 @@
                   </a:tcPr>
                 </a:tc>
               </a:tr>
-              <a:tr h="802481">
+              <a:tr h="641985">
                 <a:tc>
                   <a:txBody>
                     <a:bodyPr/>
@@ -7799,7 +7811,7 @@
                           <a:ea typeface="Arial"/>
                           <a:cs typeface="Arial"/>
                         </a:rPr>
-                        <a:t>6.257 ms</a:t>
+                        <a:t>4.890 ms</a:t>
                       </a:r>
                     </a:p>
                   </a:txBody>
@@ -7835,7 +7847,7 @@
                           <a:ea typeface="Arial"/>
                           <a:cs typeface="Arial"/>
                         </a:rPr>
-                        <a:t>0.0785</a:t>
+                        <a:t>0.0904</a:t>
                       </a:r>
                     </a:p>
                   </a:txBody>
@@ -7858,7 +7870,7 @@
                   </a:tcPr>
                 </a:tc>
               </a:tr>
-              <a:tr h="802481">
+              <a:tr h="641985">
                 <a:tc>
                   <a:txBody>
                     <a:bodyPr/>
@@ -7915,7 +7927,7 @@
                           <a:ea typeface="Arial"/>
                           <a:cs typeface="Arial"/>
                         </a:rPr>
-                        <a:t>8.158 ms</a:t>
+                        <a:t>6.461 ms</a:t>
                       </a:r>
                     </a:p>
                   </a:txBody>
@@ -7951,7 +7963,7 @@
                           <a:ea typeface="Arial"/>
                           <a:cs typeface="Arial"/>
                         </a:rPr>
-                        <a:t>0.0599</a:t>
+                        <a:t>0.0712</a:t>
                       </a:r>
                     </a:p>
                   </a:txBody>
@@ -7974,6 +7986,122 @@
                   </a:tcPr>
                 </a:tc>
               </a:tr>
+              <a:tr h="641985">
+                <a:tc>
+                  <a:txBody>
+                    <a:bodyPr/>
+                    <a:lstStyle/>
+                    <a:p>
+                      <a:r>
+                        <a:rPr sz="2025" b="0">
+                          <a:solidFill>
+                            <a:srgbClr val="152D43"/>
+                          </a:solidFill>
+                          <a:latin typeface="Arial"/>
+                          <a:ea typeface="Arial"/>
+                          <a:cs typeface="Arial"/>
+                        </a:rPr>
+                        <a:t>0.7×</a:t>
+                      </a:r>
+                    </a:p>
+                  </a:txBody>
+                  <a:tcPr marL="91440" marR="91440" marT="45720" marB="45720">
+                    <a:lnL w="9525">
+                      <a:solidFill>
+                        <a:srgbClr val="D7DFE5"/>
+                      </a:solidFill>
+                      <a:prstDash val="solid"/>
+                    </a:lnL>
+                    <a:lnR w="9525">
+                      <a:solidFill>
+                        <a:srgbClr val="D7DFE5"/>
+                      </a:solidFill>
+                      <a:prstDash val="solid"/>
+                    </a:lnR>
+                    <a:lnB w="9525">
+                      <a:solidFill>
+                        <a:srgbClr val="D7DFE5"/>
+                      </a:solidFill>
+                      <a:prstDash val="solid"/>
+                    </a:lnB>
+                    <a:solidFill>
+                      <a:srgbClr val="EAF3F6"/>
+                    </a:solidFill>
+                  </a:tcPr>
+                </a:tc>
+                <a:tc>
+                  <a:txBody>
+                    <a:bodyPr/>
+                    <a:lstStyle/>
+                    <a:p>
+                      <a:r>
+                        <a:rPr sz="2025" b="0">
+                          <a:solidFill>
+                            <a:srgbClr val="152D43"/>
+                          </a:solidFill>
+                          <a:latin typeface="Arial"/>
+                          <a:ea typeface="Arial"/>
+                          <a:cs typeface="Arial"/>
+                        </a:rPr>
+                        <a:t>7.429 ms</a:t>
+                      </a:r>
+                    </a:p>
+                  </a:txBody>
+                  <a:tcPr marL="91440" marR="91440" marT="45720" marB="45720">
+                    <a:lnR w="9525">
+                      <a:solidFill>
+                        <a:srgbClr val="D7DFE5"/>
+                      </a:solidFill>
+                      <a:prstDash val="solid"/>
+                    </a:lnR>
+                    <a:lnB w="9525">
+                      <a:solidFill>
+                        <a:srgbClr val="D7DFE5"/>
+                      </a:solidFill>
+                      <a:prstDash val="solid"/>
+                    </a:lnB>
+                    <a:solidFill>
+                      <a:srgbClr val="EAF3F6"/>
+                    </a:solidFill>
+                  </a:tcPr>
+                </a:tc>
+                <a:tc>
+                  <a:txBody>
+                    <a:bodyPr/>
+                    <a:lstStyle/>
+                    <a:p>
+                      <a:r>
+                        <a:rPr sz="2025" b="0">
+                          <a:solidFill>
+                            <a:srgbClr val="152D43"/>
+                          </a:solidFill>
+                          <a:latin typeface="Arial"/>
+                          <a:ea typeface="Arial"/>
+                          <a:cs typeface="Arial"/>
+                        </a:rPr>
+                        <a:t>0.0481</a:t>
+                      </a:r>
+                    </a:p>
+                  </a:txBody>
+                  <a:tcPr marL="91440" marR="91440" marT="45720" marB="45720">
+                    <a:lnR w="9525">
+                      <a:solidFill>
+                        <a:srgbClr val="D7DFE5"/>
+                      </a:solidFill>
+                      <a:prstDash val="solid"/>
+                    </a:lnR>
+                    <a:lnB w="9525">
+                      <a:solidFill>
+                        <a:srgbClr val="D7DFE5"/>
+                      </a:solidFill>
+                      <a:prstDash val="solid"/>
+                    </a:lnB>
+                    <a:solidFill>
+                      <a:srgbClr val="EAF3F6"/>
+                    </a:solidFill>
+                  </a:tcPr>
+                </a:tc>
+              </a:tr>
             </a:tbl>
           </a:graphicData>
         </a:graphic>
@@ -7983,7 +8111,7 @@
           <p:cNvPr id="5" name="">
             <a:extLst xmlns:a="http://schemas.openxmlformats.org/drawingml/2006/main">
               <a:ext uri="{FF2B5EF4-FFF2-40B4-BE49-F238E27FC236}">
-                <a16:creationId xmlns:a16="http://schemas.microsoft.com/office/drawing/2014/main" id="{E6260E00-BE88-4BF3-AA36-0F3953153A39}"/>
+                <a16:creationId xmlns:a16="http://schemas.microsoft.com/office/drawing/2014/main" id="{487942ED-0D28-4DC7-AB72-F95EC1BFCB0D}"/>
               </a:ext>
             </a:extLst>
           </p:cNvPr>
@@ -8028,7 +8156,7 @@
           <p:cNvPr id="6" name="">
             <a:extLst xmlns:a="http://schemas.openxmlformats.org/drawingml/2006/main">
               <a:ext uri="{FF2B5EF4-FFF2-40B4-BE49-F238E27FC236}">
-                <a16:creationId xmlns:a16="http://schemas.microsoft.com/office/drawing/2014/main" id="{1C62D957-4003-4D07-A01D-1B17E75C366E}"/>
+                <a16:creationId xmlns:a16="http://schemas.microsoft.com/office/drawing/2014/main" id="{2E77EBE6-E15A-4EAA-A2BF-9ADF1EE8DC8C}"/>
               </a:ext>
             </a:extLst>
           </p:cNvPr>
@@ -8063,7 +8191,7 @@
                 <a:ea typeface="Arial"/>
                 <a:cs typeface="Arial"/>
               </a:rPr>
-              <a:t>Original overflow PSNR preserved. Quality and timing: same 30W run, 1068 frames.</a:t>
+              <a:t>PSNR uses the original evaluation protocol.</a:t>
             </a:r>
           </a:p>
         </p:txBody>
@@ -8073,7 +8201,7 @@
           <p:cNvPr id="7" name="">
             <a:extLst xmlns:a="http://schemas.openxmlformats.org/drawingml/2006/main">
               <a:ext uri="{FF2B5EF4-FFF2-40B4-BE49-F238E27FC236}">
-                <a16:creationId xmlns:a16="http://schemas.microsoft.com/office/drawing/2014/main" id="{841887F4-034A-451D-833C-12B83E11F75F}"/>
+                <a16:creationId xmlns:a16="http://schemas.microsoft.com/office/drawing/2014/main" id="{1BC46B50-141F-4DB7-9812-526CCA6F1615}"/>
               </a:ext>
             </a:extLst>
           </p:cNvPr>
@@ -8108,7 +8236,7 @@
                 <a:ea typeface="Arial"/>
                 <a:cs typeface="Arial"/>
               </a:rPr>
-              <a:t>Timing adds a fixed 2 ms decode budget; not measured end-to-end.</a:t>
+              <a:t>Timing: 500 frames. Quality: 672 frames. Fixed decode budget: 2 ms.</a:t>
             </a:r>
           </a:p>
         </p:txBody>
@@ -8116,7 +8244,7 @@
     </p:spTree>
     <p:extLst>
       <p:ext uri="{BB962C8B-B14F-4D97-AF65-F5344CB8AC3E}">
-        <p14:creationId xmlns:p14="http://schemas.microsoft.com/office/powerpoint/2010/main" val="1749368288"/>
+        <p14:creationId xmlns:p14="http://schemas.microsoft.com/office/powerpoint/2010/main" val="690856604"/>
       </p:ext>
     </p:extLst>
   </p:cSld>
@@ -8147,7 +8275,7 @@
           <p:cNvPr id="14" name="">
             <a:extLst xmlns:a="http://schemas.openxmlformats.org/drawingml/2006/main">
               <a:ext uri="{FF2B5EF4-FFF2-40B4-BE49-F238E27FC236}">
-                <a16:creationId xmlns:a16="http://schemas.microsoft.com/office/drawing/2014/main" id="{7340E5E0-BA90-45BF-BEC9-211C0F9CDD3A}"/>
+                <a16:creationId xmlns:a16="http://schemas.microsoft.com/office/drawing/2014/main" id="{BCCE9A48-1D6E-4A83-9CA1-8CFE400186B1}"/>
               </a:ext>
             </a:extLst>
           </p:cNvPr>
@@ -8192,7 +8320,7 @@
           <p:cNvPr id="2" name="">
             <a:extLst xmlns:a="http://schemas.openxmlformats.org/drawingml/2006/main">
               <a:ext uri="{FF2B5EF4-FFF2-40B4-BE49-F238E27FC236}">
-                <a16:creationId xmlns:a16="http://schemas.microsoft.com/office/drawing/2014/main" id="{27240A45-73A3-419D-B6A6-4FAB5FAF3A59}"/>
+                <a16:creationId xmlns:a16="http://schemas.microsoft.com/office/drawing/2014/main" id="{E066C3A2-BB63-4190-B0FA-9FA817E0AFA4}"/>
               </a:ext>
             </a:extLst>
           </p:cNvPr>
@@ -8222,7 +8350,7 @@
           <p:cNvPr id="3" name="">
             <a:extLst xmlns:a="http://schemas.openxmlformats.org/drawingml/2006/main">
               <a:ext uri="{FF2B5EF4-FFF2-40B4-BE49-F238E27FC236}">
-                <a16:creationId xmlns:a16="http://schemas.microsoft.com/office/drawing/2014/main" id="{AE28BB7F-5AF8-4460-B091-180B35AAECBD}"/>
+                <a16:creationId xmlns:a16="http://schemas.microsoft.com/office/drawing/2014/main" id="{0B304B32-2D64-4CBA-8EDC-36675DF42308}"/>
               </a:ext>
             </a:extLst>
           </p:cNvPr>
@@ -8267,7 +8395,7 @@
           <p:cNvPr id="4" name="">
             <a:extLst xmlns:a="http://schemas.openxmlformats.org/drawingml/2006/main">
               <a:ext uri="{FF2B5EF4-FFF2-40B4-BE49-F238E27FC236}">
-                <a16:creationId xmlns:a16="http://schemas.microsoft.com/office/drawing/2014/main" id="{A84A3BCE-9310-4826-B745-8064F6E74545}"/>
+                <a16:creationId xmlns:a16="http://schemas.microsoft.com/office/drawing/2014/main" id="{1B4A34E0-79F6-4E96-B5BF-794DB4C20077}"/>
               </a:ext>
             </a:extLst>
           </p:cNvPr>
@@ -8312,7 +8440,7 @@
           <p:cNvPr id="5" name="">
             <a:extLst xmlns:a="http://schemas.openxmlformats.org/drawingml/2006/main">
               <a:ext uri="{FF2B5EF4-FFF2-40B4-BE49-F238E27FC236}">
-                <a16:creationId xmlns:a16="http://schemas.microsoft.com/office/drawing/2014/main" id="{E6B05D98-95B4-4453-B73F-A64166B8FBB7}"/>
+                <a16:creationId xmlns:a16="http://schemas.microsoft.com/office/drawing/2014/main" id="{6435A1F5-991A-4360-89DD-23A7EBDC4942}"/>
               </a:ext>
             </a:extLst>
           </p:cNvPr>
@@ -8357,7 +8485,7 @@
           <p:cNvPr id="6" name="">
             <a:extLst xmlns:a="http://schemas.openxmlformats.org/drawingml/2006/main">
               <a:ext uri="{FF2B5EF4-FFF2-40B4-BE49-F238E27FC236}">
-                <a16:creationId xmlns:a16="http://schemas.microsoft.com/office/drawing/2014/main" id="{A7315D8C-959B-475F-8AF8-3CF724DA0896}"/>
+                <a16:creationId xmlns:a16="http://schemas.microsoft.com/office/drawing/2014/main" id="{DDFEC6B9-CCA3-4EB7-B161-5D6AEEA42041}"/>
               </a:ext>
             </a:extLst>
           </p:cNvPr>
@@ -8402,7 +8530,7 @@
           <p:cNvPr id="7" name="">
             <a:extLst xmlns:a="http://schemas.openxmlformats.org/drawingml/2006/main">
               <a:ext uri="{FF2B5EF4-FFF2-40B4-BE49-F238E27FC236}">
-                <a16:creationId xmlns:a16="http://schemas.microsoft.com/office/drawing/2014/main" id="{3B910781-E82E-43D5-A987-32BDC7EA1FAA}"/>
+                <a16:creationId xmlns:a16="http://schemas.microsoft.com/office/drawing/2014/main" id="{AF24A686-9EEC-4FAC-BB2C-EBD8850C1157}"/>
               </a:ext>
             </a:extLst>
           </p:cNvPr>
@@ -8447,7 +8575,7 @@
           <p:cNvPr id="8" name="">
             <a:extLst xmlns:a="http://schemas.openxmlformats.org/drawingml/2006/main">
               <a:ext uri="{FF2B5EF4-FFF2-40B4-BE49-F238E27FC236}">
-                <a16:creationId xmlns:a16="http://schemas.microsoft.com/office/drawing/2014/main" id="{072D710E-13CE-4C17-91CB-FD1C27079BAE}"/>
+                <a16:creationId xmlns:a16="http://schemas.microsoft.com/office/drawing/2014/main" id="{AAA565A7-980A-48D4-9D35-431B15588789}"/>
               </a:ext>
             </a:extLst>
           </p:cNvPr>
@@ -8492,7 +8620,7 @@
           <p:cNvPr id="9" name="">
             <a:extLst xmlns:a="http://schemas.openxmlformats.org/drawingml/2006/main">
               <a:ext uri="{FF2B5EF4-FFF2-40B4-BE49-F238E27FC236}">
-                <a16:creationId xmlns:a16="http://schemas.microsoft.com/office/drawing/2014/main" id="{8C6B8D78-F0AF-4F2C-9DD5-8800E0CE1124}"/>
+                <a16:creationId xmlns:a16="http://schemas.microsoft.com/office/drawing/2014/main" id="{77268D79-0BF4-489D-B449-E059BC7792FA}"/>
               </a:ext>
             </a:extLst>
           </p:cNvPr>
@@ -8537,7 +8665,7 @@
           <p:cNvPr id="10" name="">
             <a:extLst xmlns:a="http://schemas.openxmlformats.org/drawingml/2006/main">
               <a:ext uri="{FF2B5EF4-FFF2-40B4-BE49-F238E27FC236}">
-                <a16:creationId xmlns:a16="http://schemas.microsoft.com/office/drawing/2014/main" id="{4095094E-494A-4857-9546-697B8729225A}"/>
+                <a16:creationId xmlns:a16="http://schemas.microsoft.com/office/drawing/2014/main" id="{435D6491-AFD1-4196-8FDB-A4F72CE74A6A}"/>
               </a:ext>
             </a:extLst>
           </p:cNvPr>
@@ -8582,7 +8710,7 @@
           <p:cNvPr id="11" name="">
             <a:extLst xmlns:a="http://schemas.openxmlformats.org/drawingml/2006/main">
               <a:ext uri="{FF2B5EF4-FFF2-40B4-BE49-F238E27FC236}">
-                <a16:creationId xmlns:a16="http://schemas.microsoft.com/office/drawing/2014/main" id="{2D689CAB-75C3-4CBD-BF4F-44DC445B4D3A}"/>
+                <a16:creationId xmlns:a16="http://schemas.microsoft.com/office/drawing/2014/main" id="{7752B160-2CA6-4869-A7FF-FB96C326714F}"/>
               </a:ext>
             </a:extLst>
           </p:cNvPr>
@@ -8627,7 +8755,7 @@
           <p:cNvPr id="12" name="">
             <a:extLst xmlns:a="http://schemas.openxmlformats.org/drawingml/2006/main">
               <a:ext uri="{FF2B5EF4-FFF2-40B4-BE49-F238E27FC236}">
-                <a16:creationId xmlns:a16="http://schemas.microsoft.com/office/drawing/2014/main" id="{7744A144-5FA2-4DAD-8290-579FD24215CA}"/>
+                <a16:creationId xmlns:a16="http://schemas.microsoft.com/office/drawing/2014/main" id="{BE51B4C8-AB44-4ECB-BE8A-9A1F98961A92}"/>
               </a:ext>
             </a:extLst>
           </p:cNvPr>
@@ -8672,7 +8800,7 @@
           <p:cNvPr id="13" name="">
             <a:extLst xmlns:a="http://schemas.openxmlformats.org/drawingml/2006/main">
               <a:ext uri="{FF2B5EF4-FFF2-40B4-BE49-F238E27FC236}">
-                <a16:creationId xmlns:a16="http://schemas.microsoft.com/office/drawing/2014/main" id="{EC50BF56-F2B8-4A3B-9D5A-07178816AC09}"/>
+                <a16:creationId xmlns:a16="http://schemas.microsoft.com/office/drawing/2014/main" id="{C104C9E1-CBC9-4C84-881E-2AB654BF59D4}"/>
               </a:ext>
             </a:extLst>
           </p:cNvPr>
@@ -8715,7 +8843,7 @@
     </p:spTree>
     <p:extLst>
       <p:ext uri="{BB962C8B-B14F-4D97-AF65-F5344CB8AC3E}">
-        <p14:creationId xmlns:p14="http://schemas.microsoft.com/office/powerpoint/2010/main" val="1815090642"/>
+        <p14:creationId xmlns:p14="http://schemas.microsoft.com/office/powerpoint/2010/main" val="326408459"/>
       </p:ext>
     </p:extLst>
   </p:cSld>

--- a/presentations/weekly_20261029/weekly_20261029_english_final.pptx
+++ b/presentations/weekly_20261029/weekly_20261029_english_final.pptx
@@ -2,19 +2,18 @@
 <file path=ppt/presentation.xml><?xml version="1.0" encoding="utf-8"?>
 <p:presentation xmlns:p="http://schemas.openxmlformats.org/presentationml/2006/main">
   <p:sldMasterIdLst>
-    <p:sldMasterId xmlns:r="http://schemas.openxmlformats.org/officeDocument/2006/relationships" id="2147483648" r:id="Rf690a31be8c84dd3"/>
+    <p:sldMasterId xmlns:r="http://schemas.openxmlformats.org/officeDocument/2006/relationships" id="2147483648" r:id="Rb8ee618e2280419d"/>
   </p:sldMasterIdLst>
   <p:notesMasterIdLst>
-    <p:notesMasterId xmlns:r="http://schemas.openxmlformats.org/officeDocument/2006/relationships" r:id="R0efe101220a64ac0"/>
+    <p:notesMasterId xmlns:r="http://schemas.openxmlformats.org/officeDocument/2006/relationships" r:id="Rda22ccb23be94a4d"/>
   </p:notesMasterIdLst>
   <p:sldIdLst>
-    <p:sldId xmlns:r="http://schemas.openxmlformats.org/officeDocument/2006/relationships" id="256" r:id="Rb55fbf17bc4b4755"/>
-    <p:sldId xmlns:r="http://schemas.openxmlformats.org/officeDocument/2006/relationships" id="257" r:id="Rdda749aa707d4ae3"/>
-    <p:sldId xmlns:r="http://schemas.openxmlformats.org/officeDocument/2006/relationships" id="258" r:id="R1beee0aa97bf4345"/>
-    <p:sldId xmlns:r="http://schemas.openxmlformats.org/officeDocument/2006/relationships" id="259" r:id="Rc05d8a1316674e31"/>
-    <p:sldId xmlns:r="http://schemas.openxmlformats.org/officeDocument/2006/relationships" id="260" r:id="R432243fde55d4be6"/>
-    <p:sldId xmlns:r="http://schemas.openxmlformats.org/officeDocument/2006/relationships" id="261" r:id="Rae603fbc004e49f0"/>
-    <p:sldId xmlns:r="http://schemas.openxmlformats.org/officeDocument/2006/relationships" id="262" r:id="R4f5df459e4a74de5"/>
+    <p:sldId xmlns:r="http://schemas.openxmlformats.org/officeDocument/2006/relationships" id="256" r:id="Re9e29533bc574e0d"/>
+    <p:sldId xmlns:r="http://schemas.openxmlformats.org/officeDocument/2006/relationships" id="257" r:id="R3465666631ad44b1"/>
+    <p:sldId xmlns:r="http://schemas.openxmlformats.org/officeDocument/2006/relationships" id="258" r:id="Ra355d07bf40b43e7"/>
+    <p:sldId xmlns:r="http://schemas.openxmlformats.org/officeDocument/2006/relationships" id="259" r:id="R977e2b604f144301"/>
+    <p:sldId xmlns:r="http://schemas.openxmlformats.org/officeDocument/2006/relationships" id="260" r:id="R1ac3b8a4a790423a"/>
+    <p:sldId xmlns:r="http://schemas.openxmlformats.org/officeDocument/2006/relationships" id="261" r:id="R992fdb30862b4d8c"/>
   </p:sldIdLst>
   <p:sldSz cx="12192000" cy="6858000"/>
   <p:notesSz cx="6858000" cy="9144000"/>
@@ -828,76 +827,6 @@
 </p:notes>
 </file>
 
-<file path=ppt/notesSlides/notesSlide7.xml><?xml version="1.0" encoding="utf-8"?>
-<p:notes xmlns:p="http://schemas.openxmlformats.org/presentationml/2006/main">
-  <p:cSld>
-    <p:spTree>
-      <p:nvGrpSpPr>
-        <p:cNvPr id="1" name=""/>
-        <p:cNvGrpSpPr/>
-        <p:nvPr/>
-      </p:nvGrpSpPr>
-      <p:grpSpPr>
-        <a:xfrm xmlns:a="http://schemas.openxmlformats.org/drawingml/2006/main"/>
-      </p:grpSpPr>
-      <p:sp>
-        <p:nvSpPr>
-          <p:cNvPr id="2" name="Slide Image Placeholder 1"/>
-          <p:cNvSpPr>
-            <a:spLocks xmlns:a="http://schemas.openxmlformats.org/drawingml/2006/main" noGrp="1"/>
-          </p:cNvSpPr>
-          <p:nvPr>
-            <p:ph type="sldImg" idx="0"/>
-          </p:nvPr>
-        </p:nvSpPr>
-        <p:spPr/>
-      </p:sp>
-      <p:sp>
-        <p:nvSpPr>
-          <p:cNvPr id="3" name="Notes Placeholder 2"/>
-          <p:cNvSpPr>
-            <a:spLocks xmlns:a="http://schemas.openxmlformats.org/drawingml/2006/main" noGrp="1"/>
-          </p:cNvSpPr>
-          <p:nvPr>
-            <p:ph type="body" idx="1"/>
-          </p:nvPr>
-        </p:nvSpPr>
-        <p:spPr/>
-        <p:txBody>
-          <a:bodyPr xmlns:a="http://schemas.openxmlformats.org/drawingml/2006/main"/>
-          <a:lstStyle xmlns:a="http://schemas.openxmlformats.org/drawingml/2006/main"/>
-          <a:p xmlns:a="http://schemas.openxmlformats.org/drawingml/2006/main">
-            <a:r>
-              <a:t>Proposed future work; no measured jitter trace or deadline-miss reduction exists in the current experiment. Slides 5–6 add a fixed 2 ms decode budget to local reconstruction means. Other timing values are local reconstruction measurements. None are measured end-to-end VR results.</a:t>
-            </a:r>
-          </a:p>
-        </p:txBody>
-      </p:sp>
-      <p:sp>
-        <p:nvSpPr>
-          <p:cNvPr id="4" name="Slide Number Placeholder 3"/>
-          <p:cNvSpPr>
-            <a:spLocks xmlns:a="http://schemas.openxmlformats.org/drawingml/2006/main" noGrp="1"/>
-          </p:cNvSpPr>
-          <p:nvPr>
-            <p:ph type="sldNum" idx="5"/>
-          </p:nvPr>
-        </p:nvSpPr>
-        <p:spPr/>
-        <p:txBody>
-          <a:bodyPr xmlns:a="http://schemas.openxmlformats.org/drawingml/2006/main"/>
-          <a:lstStyle xmlns:a="http://schemas.openxmlformats.org/drawingml/2006/main"/>
-          <a:p xmlns:a="http://schemas.openxmlformats.org/drawingml/2006/main"/>
-        </p:txBody>
-      </p:sp>
-    </p:spTree>
-  </p:cSld>
-  <p:clrMapOvr>
-    <a:masterClrMapping xmlns:a="http://schemas.openxmlformats.org/drawingml/2006/main"/>
-  </p:clrMapOvr>
-</p:notes>
-</file>
-
 <file path=ppt/slideLayouts/slideLayout1.xml><?xml version="1.0" encoding="utf-8"?>
 <p:sldLayout xmlns:p="http://schemas.openxmlformats.org/presentationml/2006/main" type="title">
   <p:cSld name="Title Slide">
@@ -915,7 +844,7 @@
           <p:cNvPr id="3" name="Title">
             <a:extLst xmlns:a="http://schemas.openxmlformats.org/drawingml/2006/main">
               <a:ext uri="{FF2B5EF4-FFF2-40B4-BE49-F238E27FC236}">
-                <a16:creationId xmlns:a16="http://schemas.microsoft.com/office/drawing/2014/main" id="{6BED6099-54D8-4A41-B6D9-0C0DAB523DD1}"/>
+                <a16:creationId xmlns:a16="http://schemas.microsoft.com/office/drawing/2014/main" id="{F3234756-93B2-4767-BD9E-6FE043BAA4AF}"/>
               </a:ext>
             </a:extLst>
           </p:cNvPr>
@@ -1144,7 +1073,7 @@
           <p:cNvPr id="2" name="Subtitle">
             <a:extLst xmlns:a="http://schemas.openxmlformats.org/drawingml/2006/main">
               <a:ext uri="{FF2B5EF4-FFF2-40B4-BE49-F238E27FC236}">
-                <a16:creationId xmlns:a16="http://schemas.microsoft.com/office/drawing/2014/main" id="{34D6C2DF-49FA-424B-B556-85EC672EAD11}"/>
+                <a16:creationId xmlns:a16="http://schemas.microsoft.com/office/drawing/2014/main" id="{2B7C7DB0-7FE5-4C1A-84FA-B310BE0A2D05}"/>
               </a:ext>
             </a:extLst>
           </p:cNvPr>
@@ -1390,7 +1319,7 @@
           <p:cNvPr id="2" name="Section title">
             <a:extLst xmlns:a="http://schemas.openxmlformats.org/drawingml/2006/main">
               <a:ext uri="{FF2B5EF4-FFF2-40B4-BE49-F238E27FC236}">
-                <a16:creationId xmlns:a16="http://schemas.microsoft.com/office/drawing/2014/main" id="{7402D87B-56C8-4565-933B-558ECA55D93B}"/>
+                <a16:creationId xmlns:a16="http://schemas.microsoft.com/office/drawing/2014/main" id="{6BF5B1A7-A1DD-4060-93DB-5462016A0434}"/>
               </a:ext>
             </a:extLst>
           </p:cNvPr>
@@ -1636,7 +1565,7 @@
           <p:cNvPr id="3" name="Title">
             <a:extLst xmlns:a="http://schemas.openxmlformats.org/drawingml/2006/main">
               <a:ext uri="{FF2B5EF4-FFF2-40B4-BE49-F238E27FC236}">
-                <a16:creationId xmlns:a16="http://schemas.microsoft.com/office/drawing/2014/main" id="{D1BB576B-61FA-4986-ACA1-CB7285BB1D59}"/>
+                <a16:creationId xmlns:a16="http://schemas.microsoft.com/office/drawing/2014/main" id="{F8A9D8BD-F94B-4C3F-90E0-DB8F8F880CC7}"/>
               </a:ext>
             </a:extLst>
           </p:cNvPr>
@@ -1865,7 +1794,7 @@
           <p:cNvPr id="2" name="Body">
             <a:extLst xmlns:a="http://schemas.openxmlformats.org/drawingml/2006/main">
               <a:ext uri="{FF2B5EF4-FFF2-40B4-BE49-F238E27FC236}">
-                <a16:creationId xmlns:a16="http://schemas.microsoft.com/office/drawing/2014/main" id="{942305A6-4251-4CA5-9C32-D82C31F2031F}"/>
+                <a16:creationId xmlns:a16="http://schemas.microsoft.com/office/drawing/2014/main" id="{61A3BF5D-794A-4D71-B347-C1EFA211B5B6}"/>
               </a:ext>
             </a:extLst>
           </p:cNvPr>
@@ -2111,7 +2040,7 @@
           <p:cNvPr id="4" name="Title">
             <a:extLst xmlns:a="http://schemas.openxmlformats.org/drawingml/2006/main">
               <a:ext uri="{FF2B5EF4-FFF2-40B4-BE49-F238E27FC236}">
-                <a16:creationId xmlns:a16="http://schemas.microsoft.com/office/drawing/2014/main" id="{E5B95822-C253-40C2-BB5C-968A69644AA8}"/>
+                <a16:creationId xmlns:a16="http://schemas.microsoft.com/office/drawing/2014/main" id="{01295B9E-34E2-42CB-8D70-A937B4621CAF}"/>
               </a:ext>
             </a:extLst>
           </p:cNvPr>
@@ -2340,7 +2269,7 @@
           <p:cNvPr id="2" name="Left column">
             <a:extLst xmlns:a="http://schemas.openxmlformats.org/drawingml/2006/main">
               <a:ext uri="{FF2B5EF4-FFF2-40B4-BE49-F238E27FC236}">
-                <a16:creationId xmlns:a16="http://schemas.microsoft.com/office/drawing/2014/main" id="{AE4E8BDA-09B6-4366-84EC-837692FE27DB}"/>
+                <a16:creationId xmlns:a16="http://schemas.microsoft.com/office/drawing/2014/main" id="{F13F9569-5947-4E96-AB27-00D7764DFD1B}"/>
               </a:ext>
             </a:extLst>
           </p:cNvPr>
@@ -2569,7 +2498,7 @@
           <p:cNvPr id="3" name="Right column">
             <a:extLst xmlns:a="http://schemas.openxmlformats.org/drawingml/2006/main">
               <a:ext uri="{FF2B5EF4-FFF2-40B4-BE49-F238E27FC236}">
-                <a16:creationId xmlns:a16="http://schemas.microsoft.com/office/drawing/2014/main" id="{CCB2563A-63E5-4A5A-A2C0-F138C1757534}"/>
+                <a16:creationId xmlns:a16="http://schemas.microsoft.com/office/drawing/2014/main" id="{F9669E77-B412-4389-8D3C-157FC39229C7}"/>
               </a:ext>
             </a:extLst>
           </p:cNvPr>
@@ -2815,7 +2744,7 @@
           <p:cNvPr id="3" name="Title">
             <a:extLst xmlns:a="http://schemas.openxmlformats.org/drawingml/2006/main">
               <a:ext uri="{FF2B5EF4-FFF2-40B4-BE49-F238E27FC236}">
-                <a16:creationId xmlns:a16="http://schemas.microsoft.com/office/drawing/2014/main" id="{49646206-AAE7-4D3B-AD6E-B1303BDA7EA8}"/>
+                <a16:creationId xmlns:a16="http://schemas.microsoft.com/office/drawing/2014/main" id="{82F4E557-A2F6-43FA-ACCD-193DB3802703}"/>
               </a:ext>
             </a:extLst>
           </p:cNvPr>
@@ -3044,7 +2973,7 @@
           <p:cNvPr id="2" name="Left column">
             <a:extLst xmlns:a="http://schemas.openxmlformats.org/drawingml/2006/main">
               <a:ext uri="{FF2B5EF4-FFF2-40B4-BE49-F238E27FC236}">
-                <a16:creationId xmlns:a16="http://schemas.microsoft.com/office/drawing/2014/main" id="{9B2EB64C-4E8E-4732-ADDB-B7FCAF3939C3}"/>
+                <a16:creationId xmlns:a16="http://schemas.microsoft.com/office/drawing/2014/main" id="{D717FDAF-33B2-4285-8459-817894D5C5AE}"/>
               </a:ext>
             </a:extLst>
           </p:cNvPr>
@@ -3311,12 +3240,12 @@
   </p:cSld>
   <p:clrMap bg1="lt1" tx1="dk1" bg2="lt2" tx2="dk2" accent1="accent1" accent2="accent2" accent3="accent3" accent4="accent4" accent5="accent5" accent6="accent6" hlink="hlink" folHlink="folHlink"/>
   <p:sldLayoutIdLst>
-    <p:sldLayoutId xmlns:r="http://schemas.openxmlformats.org/officeDocument/2006/relationships" id="2147483649" r:id="Rab63bf626c5f4ea7"/>
-    <p:sldLayoutId xmlns:r="http://schemas.openxmlformats.org/officeDocument/2006/relationships" id="2147483650" r:id="Rd0b2073e0358466b"/>
-    <p:sldLayoutId xmlns:r="http://schemas.openxmlformats.org/officeDocument/2006/relationships" id="2147483651" r:id="R4a79d6a073c24217"/>
-    <p:sldLayoutId xmlns:r="http://schemas.openxmlformats.org/officeDocument/2006/relationships" id="2147483652" r:id="R3307555d1e174865"/>
-    <p:sldLayoutId xmlns:r="http://schemas.openxmlformats.org/officeDocument/2006/relationships" id="2147483653" r:id="R9931caf5b37541fd"/>
-    <p:sldLayoutId xmlns:r="http://schemas.openxmlformats.org/officeDocument/2006/relationships" id="2147483654" r:id="R5918525f58964a95"/>
+    <p:sldLayoutId xmlns:r="http://schemas.openxmlformats.org/officeDocument/2006/relationships" id="2147483649" r:id="R16002300ce5b4659"/>
+    <p:sldLayoutId xmlns:r="http://schemas.openxmlformats.org/officeDocument/2006/relationships" id="2147483650" r:id="R0a2842ee06b3486f"/>
+    <p:sldLayoutId xmlns:r="http://schemas.openxmlformats.org/officeDocument/2006/relationships" id="2147483651" r:id="Re8ecabde7c684619"/>
+    <p:sldLayoutId xmlns:r="http://schemas.openxmlformats.org/officeDocument/2006/relationships" id="2147483652" r:id="Rc7df62f4c1a14a01"/>
+    <p:sldLayoutId xmlns:r="http://schemas.openxmlformats.org/officeDocument/2006/relationships" id="2147483653" r:id="R7b9edccbee2a4f4f"/>
+    <p:sldLayoutId xmlns:r="http://schemas.openxmlformats.org/officeDocument/2006/relationships" id="2147483654" r:id="R123bd17866d24ecc"/>
   </p:sldLayoutIdLst>
   <p:txStyles>
     <p:titleStyle>
@@ -4176,7 +4105,7 @@
           <p:cNvPr id="5" name="">
             <a:extLst xmlns:a="http://schemas.openxmlformats.org/drawingml/2006/main">
               <a:ext uri="{FF2B5EF4-FFF2-40B4-BE49-F238E27FC236}">
-                <a16:creationId xmlns:a16="http://schemas.microsoft.com/office/drawing/2014/main" id="{A65C383B-8883-4CC4-9778-52A0356AAEA7}"/>
+                <a16:creationId xmlns:a16="http://schemas.microsoft.com/office/drawing/2014/main" id="{F2C21DE0-C2D5-4E99-A7FC-DD58F72081C5}"/>
               </a:ext>
             </a:extLst>
           </p:cNvPr>
@@ -4234,7 +4163,7 @@
           <p:cNvPr id="2" name="">
             <a:extLst xmlns:a="http://schemas.openxmlformats.org/drawingml/2006/main">
               <a:ext uri="{FF2B5EF4-FFF2-40B4-BE49-F238E27FC236}">
-                <a16:creationId xmlns:a16="http://schemas.microsoft.com/office/drawing/2014/main" id="{102D5957-F3BB-467F-80A3-A6C7F909AE5F}"/>
+                <a16:creationId xmlns:a16="http://schemas.microsoft.com/office/drawing/2014/main" id="{100786EF-8129-42BB-9E54-756B61F9F08A}"/>
               </a:ext>
             </a:extLst>
           </p:cNvPr>
@@ -4279,7 +4208,7 @@
           <p:cNvPr id="3" name="">
             <a:extLst xmlns:a="http://schemas.openxmlformats.org/drawingml/2006/main">
               <a:ext uri="{FF2B5EF4-FFF2-40B4-BE49-F238E27FC236}">
-                <a16:creationId xmlns:a16="http://schemas.microsoft.com/office/drawing/2014/main" id="{485D118A-D065-4E5F-B3E7-BA1F06C8CC7A}"/>
+                <a16:creationId xmlns:a16="http://schemas.microsoft.com/office/drawing/2014/main" id="{32BA005F-9B12-4F39-899A-B3FC9FDB027A}"/>
               </a:ext>
             </a:extLst>
           </p:cNvPr>
@@ -4324,7 +4253,7 @@
           <p:cNvPr id="4" name="">
             <a:extLst xmlns:a="http://schemas.openxmlformats.org/drawingml/2006/main">
               <a:ext uri="{FF2B5EF4-FFF2-40B4-BE49-F238E27FC236}">
-                <a16:creationId xmlns:a16="http://schemas.microsoft.com/office/drawing/2014/main" id="{1C29FA77-3595-4954-8CC5-E3D7EC4A8845}"/>
+                <a16:creationId xmlns:a16="http://schemas.microsoft.com/office/drawing/2014/main" id="{2D7105AF-A883-437F-A1C9-5C0BB395A4F2}"/>
               </a:ext>
             </a:extLst>
           </p:cNvPr>
@@ -4367,7 +4296,7 @@
     </p:spTree>
     <p:extLst>
       <p:ext uri="{BB962C8B-B14F-4D97-AF65-F5344CB8AC3E}">
-        <p14:creationId xmlns:p14="http://schemas.microsoft.com/office/powerpoint/2010/main" val="1824775973"/>
+        <p14:creationId xmlns:p14="http://schemas.microsoft.com/office/powerpoint/2010/main" val="1098538985"/>
       </p:ext>
     </p:extLst>
   </p:cSld>
@@ -4398,7 +4327,7 @@
           <p:cNvPr id="29" name="">
             <a:extLst xmlns:a="http://schemas.openxmlformats.org/drawingml/2006/main">
               <a:ext uri="{FF2B5EF4-FFF2-40B4-BE49-F238E27FC236}">
-                <a16:creationId xmlns:a16="http://schemas.microsoft.com/office/drawing/2014/main" id="{7B8C6D03-520B-484D-8291-16F6D49764B2}"/>
+                <a16:creationId xmlns:a16="http://schemas.microsoft.com/office/drawing/2014/main" id="{6FBB8466-B763-4095-929E-2110711D5BE2}"/>
               </a:ext>
             </a:extLst>
           </p:cNvPr>
@@ -4443,7 +4372,7 @@
           <p:cNvPr id="2" name="">
             <a:extLst xmlns:a="http://schemas.openxmlformats.org/drawingml/2006/main">
               <a:ext uri="{FF2B5EF4-FFF2-40B4-BE49-F238E27FC236}">
-                <a16:creationId xmlns:a16="http://schemas.microsoft.com/office/drawing/2014/main" id="{B1A09784-615F-43C1-8D8F-D87FDEA8C952}"/>
+                <a16:creationId xmlns:a16="http://schemas.microsoft.com/office/drawing/2014/main" id="{9DF0594E-BCEE-45FA-90D0-65DB9922F587}"/>
               </a:ext>
             </a:extLst>
           </p:cNvPr>
@@ -4473,7 +4402,7 @@
           <p:cNvPr id="3" name="">
             <a:extLst xmlns:a="http://schemas.openxmlformats.org/drawingml/2006/main">
               <a:ext uri="{FF2B5EF4-FFF2-40B4-BE49-F238E27FC236}">
-                <a16:creationId xmlns:a16="http://schemas.microsoft.com/office/drawing/2014/main" id="{1152A649-BEE5-4850-A8E3-55514947A1DF}"/>
+                <a16:creationId xmlns:a16="http://schemas.microsoft.com/office/drawing/2014/main" id="{3BD96097-BEED-4AA8-AB97-CCD01B759270}"/>
               </a:ext>
             </a:extLst>
           </p:cNvPr>
@@ -4518,7 +4447,7 @@
           <p:cNvPr id="4" name="">
             <a:extLst xmlns:a="http://schemas.openxmlformats.org/drawingml/2006/main">
               <a:ext uri="{FF2B5EF4-FFF2-40B4-BE49-F238E27FC236}">
-                <a16:creationId xmlns:a16="http://schemas.microsoft.com/office/drawing/2014/main" id="{E6901D4B-8FAB-4E61-852A-354A6767BCF2}"/>
+                <a16:creationId xmlns:a16="http://schemas.microsoft.com/office/drawing/2014/main" id="{58FCC34B-658F-41F2-80BD-693F7B121520}"/>
               </a:ext>
             </a:extLst>
           </p:cNvPr>
@@ -4563,7 +4492,7 @@
           <p:cNvPr id="5" name="">
             <a:extLst xmlns:a="http://schemas.openxmlformats.org/drawingml/2006/main">
               <a:ext uri="{FF2B5EF4-FFF2-40B4-BE49-F238E27FC236}">
-                <a16:creationId xmlns:a16="http://schemas.microsoft.com/office/drawing/2014/main" id="{27556DA3-B797-4D0E-96C6-DEB3812F31D2}"/>
+                <a16:creationId xmlns:a16="http://schemas.microsoft.com/office/drawing/2014/main" id="{E68B8280-C528-4043-9CF4-C42124736809}"/>
               </a:ext>
             </a:extLst>
           </p:cNvPr>
@@ -4608,7 +4537,7 @@
           <p:cNvPr id="6" name="">
             <a:extLst xmlns:a="http://schemas.openxmlformats.org/drawingml/2006/main">
               <a:ext uri="{FF2B5EF4-FFF2-40B4-BE49-F238E27FC236}">
-                <a16:creationId xmlns:a16="http://schemas.microsoft.com/office/drawing/2014/main" id="{8B8BB3DB-2BB7-4363-B27B-DE210A6A6AC5}"/>
+                <a16:creationId xmlns:a16="http://schemas.microsoft.com/office/drawing/2014/main" id="{10B8E362-C37D-489A-B848-8A714A1AB4EE}"/>
               </a:ext>
             </a:extLst>
           </p:cNvPr>
@@ -4640,7 +4569,7 @@
           <p:cNvPr id="7" name="">
             <a:extLst xmlns:a="http://schemas.openxmlformats.org/drawingml/2006/main">
               <a:ext uri="{FF2B5EF4-FFF2-40B4-BE49-F238E27FC236}">
-                <a16:creationId xmlns:a16="http://schemas.microsoft.com/office/drawing/2014/main" id="{40D22FB7-AEE4-4416-9B82-C0974E949E6B}"/>
+                <a16:creationId xmlns:a16="http://schemas.microsoft.com/office/drawing/2014/main" id="{B8376151-6249-4AD0-9D86-8A5B13752F47}"/>
               </a:ext>
             </a:extLst>
           </p:cNvPr>
@@ -4672,7 +4601,7 @@
           <p:cNvPr id="8" name="">
             <a:extLst xmlns:a="http://schemas.openxmlformats.org/drawingml/2006/main">
               <a:ext uri="{FF2B5EF4-FFF2-40B4-BE49-F238E27FC236}">
-                <a16:creationId xmlns:a16="http://schemas.microsoft.com/office/drawing/2014/main" id="{2DCF3332-31FF-4FF2-83F2-7C80C4D34EB2}"/>
+                <a16:creationId xmlns:a16="http://schemas.microsoft.com/office/drawing/2014/main" id="{AC63768D-6689-48BD-976F-6B9614735C13}"/>
               </a:ext>
             </a:extLst>
           </p:cNvPr>
@@ -4704,7 +4633,7 @@
           <p:cNvPr id="9" name="">
             <a:extLst xmlns:a="http://schemas.openxmlformats.org/drawingml/2006/main">
               <a:ext uri="{FF2B5EF4-FFF2-40B4-BE49-F238E27FC236}">
-                <a16:creationId xmlns:a16="http://schemas.microsoft.com/office/drawing/2014/main" id="{C8611382-083B-4D6E-ABEA-F93D53AB4D39}"/>
+                <a16:creationId xmlns:a16="http://schemas.microsoft.com/office/drawing/2014/main" id="{09296E59-35FD-49C3-808B-E449FC571299}"/>
               </a:ext>
             </a:extLst>
           </p:cNvPr>
@@ -4749,7 +4678,7 @@
           <p:cNvPr id="10" name="">
             <a:extLst xmlns:a="http://schemas.openxmlformats.org/drawingml/2006/main">
               <a:ext uri="{FF2B5EF4-FFF2-40B4-BE49-F238E27FC236}">
-                <a16:creationId xmlns:a16="http://schemas.microsoft.com/office/drawing/2014/main" id="{5FF81205-4AAA-4F24-B720-61C2F3EBAD9F}"/>
+                <a16:creationId xmlns:a16="http://schemas.microsoft.com/office/drawing/2014/main" id="{3A70735C-EF3A-4AFB-8A6A-692D34A50948}"/>
               </a:ext>
             </a:extLst>
           </p:cNvPr>
@@ -4779,7 +4708,7 @@
           <p:cNvPr id="11" name="">
             <a:extLst xmlns:a="http://schemas.openxmlformats.org/drawingml/2006/main">
               <a:ext uri="{FF2B5EF4-FFF2-40B4-BE49-F238E27FC236}">
-                <a16:creationId xmlns:a16="http://schemas.microsoft.com/office/drawing/2014/main" id="{064A66A1-A9AE-49E0-B4F5-E5A3EBB6ECD6}"/>
+                <a16:creationId xmlns:a16="http://schemas.microsoft.com/office/drawing/2014/main" id="{4C82C2C5-88E6-4DD8-AE30-22359B426E77}"/>
               </a:ext>
             </a:extLst>
           </p:cNvPr>
@@ -4824,7 +4753,7 @@
           <p:cNvPr id="12" name="">
             <a:extLst xmlns:a="http://schemas.openxmlformats.org/drawingml/2006/main">
               <a:ext uri="{FF2B5EF4-FFF2-40B4-BE49-F238E27FC236}">
-                <a16:creationId xmlns:a16="http://schemas.microsoft.com/office/drawing/2014/main" id="{552AF6CF-46EC-4954-AE67-EE626120E42F}"/>
+                <a16:creationId xmlns:a16="http://schemas.microsoft.com/office/drawing/2014/main" id="{8B62DD2D-F8AA-46B7-8B44-0C0019917271}"/>
               </a:ext>
             </a:extLst>
           </p:cNvPr>
@@ -4856,7 +4785,7 @@
           <p:cNvPr id="13" name="">
             <a:extLst xmlns:a="http://schemas.openxmlformats.org/drawingml/2006/main">
               <a:ext uri="{FF2B5EF4-FFF2-40B4-BE49-F238E27FC236}">
-                <a16:creationId xmlns:a16="http://schemas.microsoft.com/office/drawing/2014/main" id="{C1189D85-ECA7-439A-AF44-E98BE8092328}"/>
+                <a16:creationId xmlns:a16="http://schemas.microsoft.com/office/drawing/2014/main" id="{EA0D1E13-9417-4312-B12E-8F2B3C95F77F}"/>
               </a:ext>
             </a:extLst>
           </p:cNvPr>
@@ -4888,7 +4817,7 @@
           <p:cNvPr id="14" name="">
             <a:extLst xmlns:a="http://schemas.openxmlformats.org/drawingml/2006/main">
               <a:ext uri="{FF2B5EF4-FFF2-40B4-BE49-F238E27FC236}">
-                <a16:creationId xmlns:a16="http://schemas.microsoft.com/office/drawing/2014/main" id="{2ACECB34-8F52-4DBA-9444-C951AC664EAB}"/>
+                <a16:creationId xmlns:a16="http://schemas.microsoft.com/office/drawing/2014/main" id="{7E0D474F-ACC9-43C9-BA2C-19DC0FDC7693}"/>
               </a:ext>
             </a:extLst>
           </p:cNvPr>
@@ -4920,7 +4849,7 @@
           <p:cNvPr id="15" name="">
             <a:extLst xmlns:a="http://schemas.openxmlformats.org/drawingml/2006/main">
               <a:ext uri="{FF2B5EF4-FFF2-40B4-BE49-F238E27FC236}">
-                <a16:creationId xmlns:a16="http://schemas.microsoft.com/office/drawing/2014/main" id="{143F6680-4E68-4E25-BBCD-BBF9CDCDB1D5}"/>
+                <a16:creationId xmlns:a16="http://schemas.microsoft.com/office/drawing/2014/main" id="{5EAA5F99-EF8B-4E9B-9823-22CDDD338AE8}"/>
               </a:ext>
             </a:extLst>
           </p:cNvPr>
@@ -4965,7 +4894,7 @@
           <p:cNvPr id="16" name="">
             <a:extLst xmlns:a="http://schemas.openxmlformats.org/drawingml/2006/main">
               <a:ext uri="{FF2B5EF4-FFF2-40B4-BE49-F238E27FC236}">
-                <a16:creationId xmlns:a16="http://schemas.microsoft.com/office/drawing/2014/main" id="{FB2BA399-3648-4824-8533-9499EF6D5129}"/>
+                <a16:creationId xmlns:a16="http://schemas.microsoft.com/office/drawing/2014/main" id="{7645844A-76C1-4C85-B3D1-170492D5ED87}"/>
               </a:ext>
             </a:extLst>
           </p:cNvPr>
@@ -4995,7 +4924,7 @@
           <p:cNvPr id="17" name="">
             <a:extLst xmlns:a="http://schemas.openxmlformats.org/drawingml/2006/main">
               <a:ext uri="{FF2B5EF4-FFF2-40B4-BE49-F238E27FC236}">
-                <a16:creationId xmlns:a16="http://schemas.microsoft.com/office/drawing/2014/main" id="{CF9AA00F-5804-43DF-AE3E-F9B17AE47CA1}"/>
+                <a16:creationId xmlns:a16="http://schemas.microsoft.com/office/drawing/2014/main" id="{85CFC73F-D638-4BA5-AB65-507ED9F67A57}"/>
               </a:ext>
             </a:extLst>
           </p:cNvPr>
@@ -5040,7 +4969,7 @@
           <p:cNvPr id="18" name="">
             <a:extLst xmlns:a="http://schemas.openxmlformats.org/drawingml/2006/main">
               <a:ext uri="{FF2B5EF4-FFF2-40B4-BE49-F238E27FC236}">
-                <a16:creationId xmlns:a16="http://schemas.microsoft.com/office/drawing/2014/main" id="{190FA276-642F-4A6D-B4F0-A214E10411A0}"/>
+                <a16:creationId xmlns:a16="http://schemas.microsoft.com/office/drawing/2014/main" id="{0000227C-D5A2-42BD-AE89-95DD4274EFC2}"/>
               </a:ext>
             </a:extLst>
           </p:cNvPr>
@@ -5072,7 +5001,7 @@
           <p:cNvPr id="19" name="">
             <a:extLst xmlns:a="http://schemas.openxmlformats.org/drawingml/2006/main">
               <a:ext uri="{FF2B5EF4-FFF2-40B4-BE49-F238E27FC236}">
-                <a16:creationId xmlns:a16="http://schemas.microsoft.com/office/drawing/2014/main" id="{BACA7281-D8A2-44AE-BEC3-1944E536ACFA}"/>
+                <a16:creationId xmlns:a16="http://schemas.microsoft.com/office/drawing/2014/main" id="{B1106D4D-2B33-4F8D-ACF0-049A589C3EC0}"/>
               </a:ext>
             </a:extLst>
           </p:cNvPr>
@@ -5104,7 +5033,7 @@
           <p:cNvPr id="20" name="">
             <a:extLst xmlns:a="http://schemas.openxmlformats.org/drawingml/2006/main">
               <a:ext uri="{FF2B5EF4-FFF2-40B4-BE49-F238E27FC236}">
-                <a16:creationId xmlns:a16="http://schemas.microsoft.com/office/drawing/2014/main" id="{E9C2A71F-A7FB-4225-B424-C4E82662D8F3}"/>
+                <a16:creationId xmlns:a16="http://schemas.microsoft.com/office/drawing/2014/main" id="{B029756C-B5FB-4423-B584-56D4E3C18A75}"/>
               </a:ext>
             </a:extLst>
           </p:cNvPr>
@@ -5136,7 +5065,7 @@
           <p:cNvPr id="21" name="">
             <a:extLst xmlns:a="http://schemas.openxmlformats.org/drawingml/2006/main">
               <a:ext uri="{FF2B5EF4-FFF2-40B4-BE49-F238E27FC236}">
-                <a16:creationId xmlns:a16="http://schemas.microsoft.com/office/drawing/2014/main" id="{157E52A8-C4FA-4648-908F-FF1794147F84}"/>
+                <a16:creationId xmlns:a16="http://schemas.microsoft.com/office/drawing/2014/main" id="{8301AAEC-808B-4C12-BC05-E4DD8DA5A12D}"/>
               </a:ext>
             </a:extLst>
           </p:cNvPr>
@@ -5181,7 +5110,7 @@
           <p:cNvPr id="22" name="">
             <a:extLst xmlns:a="http://schemas.openxmlformats.org/drawingml/2006/main">
               <a:ext uri="{FF2B5EF4-FFF2-40B4-BE49-F238E27FC236}">
-                <a16:creationId xmlns:a16="http://schemas.microsoft.com/office/drawing/2014/main" id="{E017ED18-7786-4BE1-9173-2C880DD43AA0}"/>
+                <a16:creationId xmlns:a16="http://schemas.microsoft.com/office/drawing/2014/main" id="{671C5611-CA0F-4AB9-A613-699BB41D6245}"/>
               </a:ext>
             </a:extLst>
           </p:cNvPr>
@@ -5211,7 +5140,7 @@
           <p:cNvPr id="23" name="">
             <a:extLst xmlns:a="http://schemas.openxmlformats.org/drawingml/2006/main">
               <a:ext uri="{FF2B5EF4-FFF2-40B4-BE49-F238E27FC236}">
-                <a16:creationId xmlns:a16="http://schemas.microsoft.com/office/drawing/2014/main" id="{B1F405B7-11CB-4F27-AA79-2A55E529BDAA}"/>
+                <a16:creationId xmlns:a16="http://schemas.microsoft.com/office/drawing/2014/main" id="{20B2AC55-731A-4EE8-B7F3-1547F23B9F37}"/>
               </a:ext>
             </a:extLst>
           </p:cNvPr>
@@ -5241,7 +5170,7 @@
           <p:cNvPr id="24" name="">
             <a:extLst xmlns:a="http://schemas.openxmlformats.org/drawingml/2006/main">
               <a:ext uri="{FF2B5EF4-FFF2-40B4-BE49-F238E27FC236}">
-                <a16:creationId xmlns:a16="http://schemas.microsoft.com/office/drawing/2014/main" id="{E4737E20-C832-489E-87F2-07282CA77747}"/>
+                <a16:creationId xmlns:a16="http://schemas.microsoft.com/office/drawing/2014/main" id="{78D4E822-649A-4385-8511-24081CA9439C}"/>
               </a:ext>
             </a:extLst>
           </p:cNvPr>
@@ -5286,7 +5215,7 @@
           <p:cNvPr id="25" name="">
             <a:extLst xmlns:a="http://schemas.openxmlformats.org/drawingml/2006/main">
               <a:ext uri="{FF2B5EF4-FFF2-40B4-BE49-F238E27FC236}">
-                <a16:creationId xmlns:a16="http://schemas.microsoft.com/office/drawing/2014/main" id="{3A313B33-1F2E-4173-958D-7728904443D2}"/>
+                <a16:creationId xmlns:a16="http://schemas.microsoft.com/office/drawing/2014/main" id="{C7994790-776E-4FA4-AEC2-05F30E31AE6A}"/>
               </a:ext>
             </a:extLst>
           </p:cNvPr>
@@ -5331,7 +5260,7 @@
           <p:cNvPr id="26" name="">
             <a:extLst xmlns:a="http://schemas.openxmlformats.org/drawingml/2006/main">
               <a:ext uri="{FF2B5EF4-FFF2-40B4-BE49-F238E27FC236}">
-                <a16:creationId xmlns:a16="http://schemas.microsoft.com/office/drawing/2014/main" id="{DA91E890-C5A4-4070-B33C-50BBE9B9F4E4}"/>
+                <a16:creationId xmlns:a16="http://schemas.microsoft.com/office/drawing/2014/main" id="{940E4468-9646-4CB0-9BFF-5D5653A365B7}"/>
               </a:ext>
             </a:extLst>
           </p:cNvPr>
@@ -5376,7 +5305,7 @@
           <p:cNvPr id="27" name="">
             <a:extLst xmlns:a="http://schemas.openxmlformats.org/drawingml/2006/main">
               <a:ext uri="{FF2B5EF4-FFF2-40B4-BE49-F238E27FC236}">
-                <a16:creationId xmlns:a16="http://schemas.microsoft.com/office/drawing/2014/main" id="{4A6D31EE-4A03-46DF-BCB8-267B97D677E9}"/>
+                <a16:creationId xmlns:a16="http://schemas.microsoft.com/office/drawing/2014/main" id="{C63CC81E-8CA4-47FF-B7E6-A02E8DD29E32}"/>
               </a:ext>
             </a:extLst>
           </p:cNvPr>
@@ -5421,7 +5350,7 @@
           <p:cNvPr id="28" name="">
             <a:extLst xmlns:a="http://schemas.openxmlformats.org/drawingml/2006/main">
               <a:ext uri="{FF2B5EF4-FFF2-40B4-BE49-F238E27FC236}">
-                <a16:creationId xmlns:a16="http://schemas.microsoft.com/office/drawing/2014/main" id="{7CC81B7B-0BCF-491E-BA6D-39B87B25CBDD}"/>
+                <a16:creationId xmlns:a16="http://schemas.microsoft.com/office/drawing/2014/main" id="{25239EAB-5A00-4352-A76C-5A265E61BDEA}"/>
               </a:ext>
             </a:extLst>
           </p:cNvPr>
@@ -5464,7 +5393,7 @@
     </p:spTree>
     <p:extLst>
       <p:ext uri="{BB962C8B-B14F-4D97-AF65-F5344CB8AC3E}">
-        <p14:creationId xmlns:p14="http://schemas.microsoft.com/office/powerpoint/2010/main" val="911371109"/>
+        <p14:creationId xmlns:p14="http://schemas.microsoft.com/office/powerpoint/2010/main" val="1155682298"/>
       </p:ext>
     </p:extLst>
   </p:cSld>
@@ -5495,7 +5424,7 @@
           <p:cNvPr id="15" name="">
             <a:extLst xmlns:a="http://schemas.openxmlformats.org/drawingml/2006/main">
               <a:ext uri="{FF2B5EF4-FFF2-40B4-BE49-F238E27FC236}">
-                <a16:creationId xmlns:a16="http://schemas.microsoft.com/office/drawing/2014/main" id="{03442926-FEEE-4CD9-A10E-2E8230054175}"/>
+                <a16:creationId xmlns:a16="http://schemas.microsoft.com/office/drawing/2014/main" id="{C878295E-DB95-4D55-A389-A0F9C00E7164}"/>
               </a:ext>
             </a:extLst>
           </p:cNvPr>
@@ -5540,7 +5469,7 @@
           <p:cNvPr id="2" name="">
             <a:extLst xmlns:a="http://schemas.openxmlformats.org/drawingml/2006/main">
               <a:ext uri="{FF2B5EF4-FFF2-40B4-BE49-F238E27FC236}">
-                <a16:creationId xmlns:a16="http://schemas.microsoft.com/office/drawing/2014/main" id="{7DC080DF-8082-4DF3-8FF6-F4A0498DEBCB}"/>
+                <a16:creationId xmlns:a16="http://schemas.microsoft.com/office/drawing/2014/main" id="{59461C63-FDEE-40F3-8D70-AC4918BD6753}"/>
               </a:ext>
             </a:extLst>
           </p:cNvPr>
@@ -5570,7 +5499,7 @@
           <p:cNvPr id="3" name="">
             <a:extLst xmlns:a="http://schemas.openxmlformats.org/drawingml/2006/main">
               <a:ext uri="{FF2B5EF4-FFF2-40B4-BE49-F238E27FC236}">
-                <a16:creationId xmlns:a16="http://schemas.microsoft.com/office/drawing/2014/main" id="{6A64A39F-0D39-41B0-B78C-ED919601FE8B}"/>
+                <a16:creationId xmlns:a16="http://schemas.microsoft.com/office/drawing/2014/main" id="{09C76645-FDF3-4C9E-9CD3-99E920AAB3DB}"/>
               </a:ext>
             </a:extLst>
           </p:cNvPr>
@@ -5615,7 +5544,7 @@
           <p:cNvPr id="4" name="">
             <a:extLst xmlns:a="http://schemas.openxmlformats.org/drawingml/2006/main">
               <a:ext uri="{FF2B5EF4-FFF2-40B4-BE49-F238E27FC236}">
-                <a16:creationId xmlns:a16="http://schemas.microsoft.com/office/drawing/2014/main" id="{6C95C2B3-6EB7-4AF3-B020-916AC4D0DE89}"/>
+                <a16:creationId xmlns:a16="http://schemas.microsoft.com/office/drawing/2014/main" id="{F31EF084-FD37-4737-BAB2-AED8DD232910}"/>
               </a:ext>
             </a:extLst>
           </p:cNvPr>
@@ -5660,7 +5589,7 @@
           <p:cNvPr id="5" name="">
             <a:extLst xmlns:a="http://schemas.openxmlformats.org/drawingml/2006/main">
               <a:ext uri="{FF2B5EF4-FFF2-40B4-BE49-F238E27FC236}">
-                <a16:creationId xmlns:a16="http://schemas.microsoft.com/office/drawing/2014/main" id="{BA7766EF-29A6-4C07-AFD8-4AFBA8F2E36E}"/>
+                <a16:creationId xmlns:a16="http://schemas.microsoft.com/office/drawing/2014/main" id="{6FBEE27C-1A43-4D47-8A3F-F97E0A3C82F9}"/>
               </a:ext>
             </a:extLst>
           </p:cNvPr>
@@ -5692,7 +5621,7 @@
           <p:cNvPr id="6" name="">
             <a:extLst xmlns:a="http://schemas.openxmlformats.org/drawingml/2006/main">
               <a:ext uri="{FF2B5EF4-FFF2-40B4-BE49-F238E27FC236}">
-                <a16:creationId xmlns:a16="http://schemas.microsoft.com/office/drawing/2014/main" id="{2202A97E-5938-4BF6-B085-415C9F69F1C4}"/>
+                <a16:creationId xmlns:a16="http://schemas.microsoft.com/office/drawing/2014/main" id="{FBF675E3-7B3D-4177-B820-C18435B3B1AF}"/>
               </a:ext>
             </a:extLst>
           </p:cNvPr>
@@ -5724,7 +5653,7 @@
           <p:cNvPr id="7" name="">
             <a:extLst xmlns:a="http://schemas.openxmlformats.org/drawingml/2006/main">
               <a:ext uri="{FF2B5EF4-FFF2-40B4-BE49-F238E27FC236}">
-                <a16:creationId xmlns:a16="http://schemas.microsoft.com/office/drawing/2014/main" id="{401CF9B3-A297-4BE3-84BC-D9264F17AA44}"/>
+                <a16:creationId xmlns:a16="http://schemas.microsoft.com/office/drawing/2014/main" id="{FC9F815D-ABBD-4086-9FA4-E8F70EE43945}"/>
               </a:ext>
             </a:extLst>
           </p:cNvPr>
@@ -5756,7 +5685,7 @@
           <p:cNvPr id="8" name="">
             <a:extLst xmlns:a="http://schemas.openxmlformats.org/drawingml/2006/main">
               <a:ext uri="{FF2B5EF4-FFF2-40B4-BE49-F238E27FC236}">
-                <a16:creationId xmlns:a16="http://schemas.microsoft.com/office/drawing/2014/main" id="{16444D25-8F91-4E82-82F0-141580EC51A8}"/>
+                <a16:creationId xmlns:a16="http://schemas.microsoft.com/office/drawing/2014/main" id="{63530DC6-E99B-4929-B933-30E8B39BD776}"/>
               </a:ext>
             </a:extLst>
           </p:cNvPr>
@@ -5801,7 +5730,7 @@
           <p:cNvPr id="9" name="">
             <a:extLst xmlns:a="http://schemas.openxmlformats.org/drawingml/2006/main">
               <a:ext uri="{FF2B5EF4-FFF2-40B4-BE49-F238E27FC236}">
-                <a16:creationId xmlns:a16="http://schemas.microsoft.com/office/drawing/2014/main" id="{C34AB15E-1BB8-49E4-8577-AE85A9B5690B}"/>
+                <a16:creationId xmlns:a16="http://schemas.microsoft.com/office/drawing/2014/main" id="{1E7CB34B-F045-485A-B32E-C7E610CA0A61}"/>
               </a:ext>
             </a:extLst>
           </p:cNvPr>
@@ -5846,7 +5775,7 @@
           <p:cNvPr id="10" name="">
             <a:extLst xmlns:a="http://schemas.openxmlformats.org/drawingml/2006/main">
               <a:ext uri="{FF2B5EF4-FFF2-40B4-BE49-F238E27FC236}">
-                <a16:creationId xmlns:a16="http://schemas.microsoft.com/office/drawing/2014/main" id="{EF83A3A7-BCF7-473F-A924-91C6F9755803}"/>
+                <a16:creationId xmlns:a16="http://schemas.microsoft.com/office/drawing/2014/main" id="{8B40E75F-A567-47DE-BFA1-74072F5E333B}"/>
               </a:ext>
             </a:extLst>
           </p:cNvPr>
@@ -5878,7 +5807,7 @@
           <p:cNvPr id="11" name="">
             <a:extLst xmlns:a="http://schemas.openxmlformats.org/drawingml/2006/main">
               <a:ext uri="{FF2B5EF4-FFF2-40B4-BE49-F238E27FC236}">
-                <a16:creationId xmlns:a16="http://schemas.microsoft.com/office/drawing/2014/main" id="{C1CFBBA9-DBFE-42AD-AA0A-6AE3925DD51E}"/>
+                <a16:creationId xmlns:a16="http://schemas.microsoft.com/office/drawing/2014/main" id="{A3F252BF-8583-4C19-A594-083E2554A8F7}"/>
               </a:ext>
             </a:extLst>
           </p:cNvPr>
@@ -5910,7 +5839,7 @@
           <p:cNvPr id="12" name="">
             <a:extLst xmlns:a="http://schemas.openxmlformats.org/drawingml/2006/main">
               <a:ext uri="{FF2B5EF4-FFF2-40B4-BE49-F238E27FC236}">
-                <a16:creationId xmlns:a16="http://schemas.microsoft.com/office/drawing/2014/main" id="{55603292-B926-42EB-BE1E-358AD485D97A}"/>
+                <a16:creationId xmlns:a16="http://schemas.microsoft.com/office/drawing/2014/main" id="{81D6B880-C5A3-49C0-B38B-1A5783DFC4DC}"/>
               </a:ext>
             </a:extLst>
           </p:cNvPr>
@@ -5942,7 +5871,7 @@
           <p:cNvPr id="13" name="">
             <a:extLst xmlns:a="http://schemas.openxmlformats.org/drawingml/2006/main">
               <a:ext uri="{FF2B5EF4-FFF2-40B4-BE49-F238E27FC236}">
-                <a16:creationId xmlns:a16="http://schemas.microsoft.com/office/drawing/2014/main" id="{E1795D38-D46D-488B-B5F7-D857386413DC}"/>
+                <a16:creationId xmlns:a16="http://schemas.microsoft.com/office/drawing/2014/main" id="{1B34CC6D-2487-40C7-9DD0-CE75D97CC784}"/>
               </a:ext>
             </a:extLst>
           </p:cNvPr>
@@ -5987,7 +5916,7 @@
           <p:cNvPr id="14" name="">
             <a:extLst xmlns:a="http://schemas.openxmlformats.org/drawingml/2006/main">
               <a:ext uri="{FF2B5EF4-FFF2-40B4-BE49-F238E27FC236}">
-                <a16:creationId xmlns:a16="http://schemas.microsoft.com/office/drawing/2014/main" id="{EBA0009C-FD2F-45DA-BD36-0B4594D58409}"/>
+                <a16:creationId xmlns:a16="http://schemas.microsoft.com/office/drawing/2014/main" id="{A46F8DD6-6881-459F-BE06-E39690137BBC}"/>
               </a:ext>
             </a:extLst>
           </p:cNvPr>
@@ -6030,7 +5959,7 @@
     </p:spTree>
     <p:extLst>
       <p:ext uri="{BB962C8B-B14F-4D97-AF65-F5344CB8AC3E}">
-        <p14:creationId xmlns:p14="http://schemas.microsoft.com/office/powerpoint/2010/main" val="809550037"/>
+        <p14:creationId xmlns:p14="http://schemas.microsoft.com/office/powerpoint/2010/main" val="1964606944"/>
       </p:ext>
     </p:extLst>
   </p:cSld>
@@ -6061,7 +5990,7 @@
           <p:cNvPr id="20" name="">
             <a:extLst xmlns:a="http://schemas.openxmlformats.org/drawingml/2006/main">
               <a:ext uri="{FF2B5EF4-FFF2-40B4-BE49-F238E27FC236}">
-                <a16:creationId xmlns:a16="http://schemas.microsoft.com/office/drawing/2014/main" id="{699A1191-4D3C-434C-8D25-DB73511B211F}"/>
+                <a16:creationId xmlns:a16="http://schemas.microsoft.com/office/drawing/2014/main" id="{618D5017-C450-43C6-998B-36596429DEFB}"/>
               </a:ext>
             </a:extLst>
           </p:cNvPr>
@@ -6106,7 +6035,7 @@
           <p:cNvPr id="2" name="">
             <a:extLst xmlns:a="http://schemas.openxmlformats.org/drawingml/2006/main">
               <a:ext uri="{FF2B5EF4-FFF2-40B4-BE49-F238E27FC236}">
-                <a16:creationId xmlns:a16="http://schemas.microsoft.com/office/drawing/2014/main" id="{E848398F-B907-4BC8-970A-D56390EC23A6}"/>
+                <a16:creationId xmlns:a16="http://schemas.microsoft.com/office/drawing/2014/main" id="{2A65AB68-FC6D-46E4-B5FB-A7D9AC37AFEB}"/>
               </a:ext>
             </a:extLst>
           </p:cNvPr>
@@ -6136,7 +6065,7 @@
           <p:cNvPr id="3" name="">
             <a:extLst xmlns:a="http://schemas.openxmlformats.org/drawingml/2006/main">
               <a:ext uri="{FF2B5EF4-FFF2-40B4-BE49-F238E27FC236}">
-                <a16:creationId xmlns:a16="http://schemas.microsoft.com/office/drawing/2014/main" id="{BBA469ED-3284-4389-9E9A-E071E488F6AD}"/>
+                <a16:creationId xmlns:a16="http://schemas.microsoft.com/office/drawing/2014/main" id="{40EB2D15-8789-4811-8A50-94225A5CB6B4}"/>
               </a:ext>
             </a:extLst>
           </p:cNvPr>
@@ -6181,7 +6110,7 @@
           <p:cNvPr id="4" name="">
             <a:extLst xmlns:a="http://schemas.openxmlformats.org/drawingml/2006/main">
               <a:ext uri="{FF2B5EF4-FFF2-40B4-BE49-F238E27FC236}">
-                <a16:creationId xmlns:a16="http://schemas.microsoft.com/office/drawing/2014/main" id="{1A59B0EC-DEA3-4DF7-A473-972E44AAD1E8}"/>
+                <a16:creationId xmlns:a16="http://schemas.microsoft.com/office/drawing/2014/main" id="{46E15977-1FC9-4936-9E93-A4204536D28C}"/>
               </a:ext>
             </a:extLst>
           </p:cNvPr>
@@ -6226,7 +6155,7 @@
           <p:cNvPr id="5" name="">
             <a:extLst xmlns:a="http://schemas.openxmlformats.org/drawingml/2006/main">
               <a:ext uri="{FF2B5EF4-FFF2-40B4-BE49-F238E27FC236}">
-                <a16:creationId xmlns:a16="http://schemas.microsoft.com/office/drawing/2014/main" id="{36947818-DAAC-4E10-87B3-A2C1470A6F26}"/>
+                <a16:creationId xmlns:a16="http://schemas.microsoft.com/office/drawing/2014/main" id="{A92EF43E-9979-42FD-9D87-04EB57AD7F2E}"/>
               </a:ext>
             </a:extLst>
           </p:cNvPr>
@@ -6258,7 +6187,7 @@
           <p:cNvPr id="6" name="">
             <a:extLst xmlns:a="http://schemas.openxmlformats.org/drawingml/2006/main">
               <a:ext uri="{FF2B5EF4-FFF2-40B4-BE49-F238E27FC236}">
-                <a16:creationId xmlns:a16="http://schemas.microsoft.com/office/drawing/2014/main" id="{106BAD6E-BD84-4E6E-A8B6-E1D8839CC51A}"/>
+                <a16:creationId xmlns:a16="http://schemas.microsoft.com/office/drawing/2014/main" id="{F9EB57AE-752C-4AB6-B790-5A85A421ADD0}"/>
               </a:ext>
             </a:extLst>
           </p:cNvPr>
@@ -6329,7 +6258,7 @@
           <p:cNvPr id="7" name="">
             <a:extLst xmlns:a="http://schemas.openxmlformats.org/drawingml/2006/main">
               <a:ext uri="{FF2B5EF4-FFF2-40B4-BE49-F238E27FC236}">
-                <a16:creationId xmlns:a16="http://schemas.microsoft.com/office/drawing/2014/main" id="{B553C864-2805-450F-8074-F65027EDEE2E}"/>
+                <a16:creationId xmlns:a16="http://schemas.microsoft.com/office/drawing/2014/main" id="{869D9580-EFD3-4179-8D84-BC0EA92FA2A7}"/>
               </a:ext>
             </a:extLst>
           </p:cNvPr>
@@ -6374,7 +6303,7 @@
           <p:cNvPr id="8" name="">
             <a:extLst xmlns:a="http://schemas.openxmlformats.org/drawingml/2006/main">
               <a:ext uri="{FF2B5EF4-FFF2-40B4-BE49-F238E27FC236}">
-                <a16:creationId xmlns:a16="http://schemas.microsoft.com/office/drawing/2014/main" id="{7C89BFB9-0293-4CE6-A55A-B49C9E45079F}"/>
+                <a16:creationId xmlns:a16="http://schemas.microsoft.com/office/drawing/2014/main" id="{C2D48B5A-B2DC-44DE-9916-BA4B01C7D4CC}"/>
               </a:ext>
             </a:extLst>
           </p:cNvPr>
@@ -6406,7 +6335,7 @@
           <p:cNvPr id="9" name="">
             <a:extLst xmlns:a="http://schemas.openxmlformats.org/drawingml/2006/main">
               <a:ext uri="{FF2B5EF4-FFF2-40B4-BE49-F238E27FC236}">
-                <a16:creationId xmlns:a16="http://schemas.microsoft.com/office/drawing/2014/main" id="{0D6B22B3-6C9F-4243-B3A4-D7D38FF44143}"/>
+                <a16:creationId xmlns:a16="http://schemas.microsoft.com/office/drawing/2014/main" id="{655E4FD5-2468-4ACC-A4FB-434287070B44}"/>
               </a:ext>
             </a:extLst>
           </p:cNvPr>
@@ -6438,7 +6367,7 @@
           <p:cNvPr id="10" name="">
             <a:extLst xmlns:a="http://schemas.openxmlformats.org/drawingml/2006/main">
               <a:ext uri="{FF2B5EF4-FFF2-40B4-BE49-F238E27FC236}">
-                <a16:creationId xmlns:a16="http://schemas.microsoft.com/office/drawing/2014/main" id="{3569F922-4E16-46D1-8BA8-49316709B9B0}"/>
+                <a16:creationId xmlns:a16="http://schemas.microsoft.com/office/drawing/2014/main" id="{725A3B03-36E7-4523-83A9-3910A1F48F74}"/>
               </a:ext>
             </a:extLst>
           </p:cNvPr>
@@ -6483,7 +6412,7 @@
           <p:cNvPr id="11" name="">
             <a:extLst xmlns:a="http://schemas.openxmlformats.org/drawingml/2006/main">
               <a:ext uri="{FF2B5EF4-FFF2-40B4-BE49-F238E27FC236}">
-                <a16:creationId xmlns:a16="http://schemas.microsoft.com/office/drawing/2014/main" id="{DC36E927-8F24-4B00-9227-29880609D525}"/>
+                <a16:creationId xmlns:a16="http://schemas.microsoft.com/office/drawing/2014/main" id="{D2C88053-665A-4550-9B0B-725F4FA1892B}"/>
               </a:ext>
             </a:extLst>
           </p:cNvPr>
@@ -6528,7 +6457,7 @@
           <p:cNvPr id="12" name="">
             <a:extLst xmlns:a="http://schemas.openxmlformats.org/drawingml/2006/main">
               <a:ext uri="{FF2B5EF4-FFF2-40B4-BE49-F238E27FC236}">
-                <a16:creationId xmlns:a16="http://schemas.microsoft.com/office/drawing/2014/main" id="{D5CFC489-2058-471A-B4E7-0DA986EB9B0A}"/>
+                <a16:creationId xmlns:a16="http://schemas.microsoft.com/office/drawing/2014/main" id="{F7B0E7EB-1B94-4383-AB51-B04622FF2ADB}"/>
               </a:ext>
             </a:extLst>
           </p:cNvPr>
@@ -6573,7 +6502,7 @@
           <p:cNvPr id="13" name="">
             <a:extLst xmlns:a="http://schemas.openxmlformats.org/drawingml/2006/main">
               <a:ext uri="{FF2B5EF4-FFF2-40B4-BE49-F238E27FC236}">
-                <a16:creationId xmlns:a16="http://schemas.microsoft.com/office/drawing/2014/main" id="{5281B444-154D-4DBB-BAA6-E0DEB94440C7}"/>
+                <a16:creationId xmlns:a16="http://schemas.microsoft.com/office/drawing/2014/main" id="{22E71B4D-5AC2-4BEB-B334-FC94ED0137C2}"/>
               </a:ext>
             </a:extLst>
           </p:cNvPr>
@@ -6605,7 +6534,7 @@
           <p:cNvPr id="14" name="">
             <a:extLst xmlns:a="http://schemas.openxmlformats.org/drawingml/2006/main">
               <a:ext uri="{FF2B5EF4-FFF2-40B4-BE49-F238E27FC236}">
-                <a16:creationId xmlns:a16="http://schemas.microsoft.com/office/drawing/2014/main" id="{21C3375A-1306-464B-8F5F-25189D593337}"/>
+                <a16:creationId xmlns:a16="http://schemas.microsoft.com/office/drawing/2014/main" id="{C71BC81C-E880-4B41-BB15-50AF89B5E81E}"/>
               </a:ext>
             </a:extLst>
           </p:cNvPr>
@@ -6637,7 +6566,7 @@
           <p:cNvPr id="15" name="">
             <a:extLst xmlns:a="http://schemas.openxmlformats.org/drawingml/2006/main">
               <a:ext uri="{FF2B5EF4-FFF2-40B4-BE49-F238E27FC236}">
-                <a16:creationId xmlns:a16="http://schemas.microsoft.com/office/drawing/2014/main" id="{90E096AD-98E3-4BF7-A0B3-135984D44563}"/>
+                <a16:creationId xmlns:a16="http://schemas.microsoft.com/office/drawing/2014/main" id="{6A9AE341-0959-4AE4-BF5A-E25C0C0C6F58}"/>
               </a:ext>
             </a:extLst>
           </p:cNvPr>
@@ -6669,7 +6598,7 @@
           <p:cNvPr id="16" name="">
             <a:extLst xmlns:a="http://schemas.openxmlformats.org/drawingml/2006/main">
               <a:ext uri="{FF2B5EF4-FFF2-40B4-BE49-F238E27FC236}">
-                <a16:creationId xmlns:a16="http://schemas.microsoft.com/office/drawing/2014/main" id="{C369E07D-8861-45C4-8477-10CDCADBF97E}"/>
+                <a16:creationId xmlns:a16="http://schemas.microsoft.com/office/drawing/2014/main" id="{D538E1C6-98B5-4BB3-83F8-226527D23D43}"/>
               </a:ext>
             </a:extLst>
           </p:cNvPr>
@@ -6714,7 +6643,7 @@
           <p:cNvPr id="17" name="">
             <a:extLst xmlns:a="http://schemas.openxmlformats.org/drawingml/2006/main">
               <a:ext uri="{FF2B5EF4-FFF2-40B4-BE49-F238E27FC236}">
-                <a16:creationId xmlns:a16="http://schemas.microsoft.com/office/drawing/2014/main" id="{0CEC7D23-E1AD-4C60-BF02-9D09917976D7}"/>
+                <a16:creationId xmlns:a16="http://schemas.microsoft.com/office/drawing/2014/main" id="{19FA5B29-7CA4-40D0-AB8E-154E7B7BF47E}"/>
               </a:ext>
             </a:extLst>
           </p:cNvPr>
@@ -6759,7 +6688,7 @@
           <p:cNvPr id="18" name="">
             <a:extLst xmlns:a="http://schemas.openxmlformats.org/drawingml/2006/main">
               <a:ext uri="{FF2B5EF4-FFF2-40B4-BE49-F238E27FC236}">
-                <a16:creationId xmlns:a16="http://schemas.microsoft.com/office/drawing/2014/main" id="{51314204-048F-4E66-B598-A74FAC496733}"/>
+                <a16:creationId xmlns:a16="http://schemas.microsoft.com/office/drawing/2014/main" id="{7EEA9DA3-B42A-4F8B-9275-CEDA759A01C8}"/>
               </a:ext>
             </a:extLst>
           </p:cNvPr>
@@ -6804,7 +6733,7 @@
           <p:cNvPr id="19" name="">
             <a:extLst xmlns:a="http://schemas.openxmlformats.org/drawingml/2006/main">
               <a:ext uri="{FF2B5EF4-FFF2-40B4-BE49-F238E27FC236}">
-                <a16:creationId xmlns:a16="http://schemas.microsoft.com/office/drawing/2014/main" id="{B9C2E3C3-FB5E-4FB1-B306-D9E8517DB507}"/>
+                <a16:creationId xmlns:a16="http://schemas.microsoft.com/office/drawing/2014/main" id="{25271499-F614-4B83-B68F-31DACDF7884E}"/>
               </a:ext>
             </a:extLst>
           </p:cNvPr>
@@ -6847,7 +6776,7 @@
     </p:spTree>
     <p:extLst>
       <p:ext uri="{BB962C8B-B14F-4D97-AF65-F5344CB8AC3E}">
-        <p14:creationId xmlns:p14="http://schemas.microsoft.com/office/powerpoint/2010/main" val="1528795321"/>
+        <p14:creationId xmlns:p14="http://schemas.microsoft.com/office/powerpoint/2010/main" val="1607201243"/>
       </p:ext>
     </p:extLst>
   </p:cSld>
@@ -6878,7 +6807,7 @@
           <p:cNvPr id="12" name="">
             <a:extLst xmlns:a="http://schemas.openxmlformats.org/drawingml/2006/main">
               <a:ext uri="{FF2B5EF4-FFF2-40B4-BE49-F238E27FC236}">
-                <a16:creationId xmlns:a16="http://schemas.microsoft.com/office/drawing/2014/main" id="{EBA7ABF9-2AD1-47CD-9CAB-C9CE105819F4}"/>
+                <a16:creationId xmlns:a16="http://schemas.microsoft.com/office/drawing/2014/main" id="{B4FD0BD3-6996-4639-8A1D-EB5A76675B57}"/>
               </a:ext>
             </a:extLst>
           </p:cNvPr>
@@ -6923,7 +6852,7 @@
           <p:cNvPr id="2" name="">
             <a:extLst xmlns:a="http://schemas.openxmlformats.org/drawingml/2006/main">
               <a:ext uri="{FF2B5EF4-FFF2-40B4-BE49-F238E27FC236}">
-                <a16:creationId xmlns:a16="http://schemas.microsoft.com/office/drawing/2014/main" id="{179ECFBB-92C2-48E8-9B84-ED0D296306B0}"/>
+                <a16:creationId xmlns:a16="http://schemas.microsoft.com/office/drawing/2014/main" id="{AA3C9BAE-0470-4426-9EE5-9976A7FD53B2}"/>
               </a:ext>
             </a:extLst>
           </p:cNvPr>
@@ -6953,7 +6882,7 @@
           <p:cNvPr id="3" name="">
             <a:extLst xmlns:a="http://schemas.openxmlformats.org/drawingml/2006/main">
               <a:ext uri="{FF2B5EF4-FFF2-40B4-BE49-F238E27FC236}">
-                <a16:creationId xmlns:a16="http://schemas.microsoft.com/office/drawing/2014/main" id="{83612117-4188-458D-AB79-7137E10A561C}"/>
+                <a16:creationId xmlns:a16="http://schemas.microsoft.com/office/drawing/2014/main" id="{061FEC70-0253-4305-991C-CF81F50818DF}"/>
               </a:ext>
             </a:extLst>
           </p:cNvPr>
@@ -6998,7 +6927,7 @@
           <p:cNvPr id="4" name="Chart">
             <a:extLst xmlns:a="http://schemas.openxmlformats.org/drawingml/2006/main">
               <a:ext uri="{FF2B5EF4-FFF2-40B4-BE49-F238E27FC236}">
-                <a16:creationId xmlns:a16="http://schemas.microsoft.com/office/drawing/2014/main" id="{AA574F3A-6FF9-4372-A48F-250DA3FEDCDA}"/>
+                <a16:creationId xmlns:a16="http://schemas.microsoft.com/office/drawing/2014/main" id="{FC6B9114-AFFD-4524-BD48-23076938FBA8}"/>
               </a:ext>
             </a:extLst>
           </p:cNvPr>
@@ -7011,7 +6940,7 @@
         </p:xfrm>
         <a:graphic xmlns:a="http://schemas.openxmlformats.org/drawingml/2006/main">
           <a:graphicData uri="http://schemas.openxmlformats.org/drawingml/2006/chart">
-            <c:chart xmlns:r="http://schemas.openxmlformats.org/officeDocument/2006/relationships" xmlns:c="http://schemas.openxmlformats.org/drawingml/2006/chart" r:id="Rdb300c96411e4f99"/>
+            <c:chart xmlns:r="http://schemas.openxmlformats.org/officeDocument/2006/relationships" xmlns:c="http://schemas.openxmlformats.org/drawingml/2006/chart" r:id="Rbb89b224dab84d2b"/>
           </a:graphicData>
         </a:graphic>
       </p:graphicFrame>
@@ -7020,7 +6949,7 @@
           <p:cNvPr id="5" name="">
             <a:extLst xmlns:a="http://schemas.openxmlformats.org/drawingml/2006/main">
               <a:ext uri="{FF2B5EF4-FFF2-40B4-BE49-F238E27FC236}">
-                <a16:creationId xmlns:a16="http://schemas.microsoft.com/office/drawing/2014/main" id="{E82AA022-DDDC-411E-ADBB-0EA5AE7F5C90}"/>
+                <a16:creationId xmlns:a16="http://schemas.microsoft.com/office/drawing/2014/main" id="{9C3467F5-23A2-4F84-BDED-2FED58166F5C}"/>
               </a:ext>
             </a:extLst>
           </p:cNvPr>
@@ -7065,7 +6994,7 @@
           <p:cNvPr id="6" name="">
             <a:extLst xmlns:a="http://schemas.openxmlformats.org/drawingml/2006/main">
               <a:ext uri="{FF2B5EF4-FFF2-40B4-BE49-F238E27FC236}">
-                <a16:creationId xmlns:a16="http://schemas.microsoft.com/office/drawing/2014/main" id="{21B12F02-1E9D-454D-90FC-4122BC982F82}"/>
+                <a16:creationId xmlns:a16="http://schemas.microsoft.com/office/drawing/2014/main" id="{1B0F6BAA-DCF8-4B8F-9FB7-D7C240FA1C50}"/>
               </a:ext>
             </a:extLst>
           </p:cNvPr>
@@ -7110,7 +7039,7 @@
           <p:cNvPr id="7" name="">
             <a:extLst xmlns:a="http://schemas.openxmlformats.org/drawingml/2006/main">
               <a:ext uri="{FF2B5EF4-FFF2-40B4-BE49-F238E27FC236}">
-                <a16:creationId xmlns:a16="http://schemas.microsoft.com/office/drawing/2014/main" id="{F9D493FE-5893-4AF8-80B1-EBA8A58DF817}"/>
+                <a16:creationId xmlns:a16="http://schemas.microsoft.com/office/drawing/2014/main" id="{E09DDAA4-71F3-4A95-9FDB-AABCCAEB3758}"/>
               </a:ext>
             </a:extLst>
           </p:cNvPr>
@@ -7155,7 +7084,7 @@
           <p:cNvPr id="8" name="">
             <a:extLst xmlns:a="http://schemas.openxmlformats.org/drawingml/2006/main">
               <a:ext uri="{FF2B5EF4-FFF2-40B4-BE49-F238E27FC236}">
-                <a16:creationId xmlns:a16="http://schemas.microsoft.com/office/drawing/2014/main" id="{9660D510-FB88-4302-80FA-F103418C3224}"/>
+                <a16:creationId xmlns:a16="http://schemas.microsoft.com/office/drawing/2014/main" id="{3C4BB3D4-D7A5-45C8-B9A8-D4ECC61BEA6D}"/>
               </a:ext>
             </a:extLst>
           </p:cNvPr>
@@ -7200,7 +7129,7 @@
           <p:cNvPr id="9" name="">
             <a:extLst xmlns:a="http://schemas.openxmlformats.org/drawingml/2006/main">
               <a:ext uri="{FF2B5EF4-FFF2-40B4-BE49-F238E27FC236}">
-                <a16:creationId xmlns:a16="http://schemas.microsoft.com/office/drawing/2014/main" id="{EB4B689A-EC6C-4462-8B9A-6A93C35BD122}"/>
+                <a16:creationId xmlns:a16="http://schemas.microsoft.com/office/drawing/2014/main" id="{396602B1-4208-4B1D-8FAB-F6B968D70B2E}"/>
               </a:ext>
             </a:extLst>
           </p:cNvPr>
@@ -7245,7 +7174,7 @@
           <p:cNvPr id="10" name="">
             <a:extLst xmlns:a="http://schemas.openxmlformats.org/drawingml/2006/main">
               <a:ext uri="{FF2B5EF4-FFF2-40B4-BE49-F238E27FC236}">
-                <a16:creationId xmlns:a16="http://schemas.microsoft.com/office/drawing/2014/main" id="{19C14D4A-AFE3-42C0-8B14-B7B09830F502}"/>
+                <a16:creationId xmlns:a16="http://schemas.microsoft.com/office/drawing/2014/main" id="{F92915DC-2DD3-4445-BE5D-DBA91A4377DF}"/>
               </a:ext>
             </a:extLst>
           </p:cNvPr>
@@ -7290,7 +7219,7 @@
           <p:cNvPr id="11" name="">
             <a:extLst xmlns:a="http://schemas.openxmlformats.org/drawingml/2006/main">
               <a:ext uri="{FF2B5EF4-FFF2-40B4-BE49-F238E27FC236}">
-                <a16:creationId xmlns:a16="http://schemas.microsoft.com/office/drawing/2014/main" id="{90725BF8-3A7A-4797-B3F0-ECD7D0FAF606}"/>
+                <a16:creationId xmlns:a16="http://schemas.microsoft.com/office/drawing/2014/main" id="{31CBAD2F-220B-4AEC-B4C6-DCB18FB43BAA}"/>
               </a:ext>
             </a:extLst>
           </p:cNvPr>
@@ -7333,7 +7262,7 @@
     </p:spTree>
     <p:extLst>
       <p:ext uri="{BB962C8B-B14F-4D97-AF65-F5344CB8AC3E}">
-        <p14:creationId xmlns:p14="http://schemas.microsoft.com/office/powerpoint/2010/main" val="1011385261"/>
+        <p14:creationId xmlns:p14="http://schemas.microsoft.com/office/powerpoint/2010/main" val="1731156891"/>
       </p:ext>
     </p:extLst>
   </p:cSld>
@@ -7364,7 +7293,7 @@
           <p:cNvPr id="8" name="">
             <a:extLst xmlns:a="http://schemas.openxmlformats.org/drawingml/2006/main">
               <a:ext uri="{FF2B5EF4-FFF2-40B4-BE49-F238E27FC236}">
-                <a16:creationId xmlns:a16="http://schemas.microsoft.com/office/drawing/2014/main" id="{7BCFC477-6F35-4ED5-A7D6-D01B1B2C7126}"/>
+                <a16:creationId xmlns:a16="http://schemas.microsoft.com/office/drawing/2014/main" id="{08BFE412-7F47-4F91-BF73-5100F7A5DB2D}"/>
               </a:ext>
             </a:extLst>
           </p:cNvPr>
@@ -7409,7 +7338,7 @@
           <p:cNvPr id="2" name="">
             <a:extLst xmlns:a="http://schemas.openxmlformats.org/drawingml/2006/main">
               <a:ext uri="{FF2B5EF4-FFF2-40B4-BE49-F238E27FC236}">
-                <a16:creationId xmlns:a16="http://schemas.microsoft.com/office/drawing/2014/main" id="{4D4195D6-956B-4022-B8FF-EFAD6B57982B}"/>
+                <a16:creationId xmlns:a16="http://schemas.microsoft.com/office/drawing/2014/main" id="{E8B9B8F0-1276-4BB2-A12B-0B727B8761B2}"/>
               </a:ext>
             </a:extLst>
           </p:cNvPr>
@@ -7439,7 +7368,7 @@
           <p:cNvPr id="3" name="">
             <a:extLst xmlns:a="http://schemas.openxmlformats.org/drawingml/2006/main">
               <a:ext uri="{FF2B5EF4-FFF2-40B4-BE49-F238E27FC236}">
-                <a16:creationId xmlns:a16="http://schemas.microsoft.com/office/drawing/2014/main" id="{5BDC7ADE-99E4-4099-8DB9-F1AC5E697145}"/>
+                <a16:creationId xmlns:a16="http://schemas.microsoft.com/office/drawing/2014/main" id="{A976E25F-9C52-46F9-91A6-57FE23A2944A}"/>
               </a:ext>
             </a:extLst>
           </p:cNvPr>
@@ -7484,7 +7413,7 @@
           <p:cNvPr id="4" name="">
             <a:extLst xmlns:a="http://schemas.openxmlformats.org/drawingml/2006/main">
               <a:ext uri="{FF2B5EF4-FFF2-40B4-BE49-F238E27FC236}">
-                <a16:creationId xmlns:a16="http://schemas.microsoft.com/office/drawing/2014/main" id="{026F19FD-188F-4757-9FA6-213822D9F1A8}"/>
+                <a16:creationId xmlns:a16="http://schemas.microsoft.com/office/drawing/2014/main" id="{016DEF2C-66CE-4915-8C2B-29379EB1676B}"/>
               </a:ext>
             </a:extLst>
           </p:cNvPr>
@@ -7504,14 +7433,14 @@
                 <a:gridCol w="3714750"/>
                 <a:gridCol w="4019550"/>
               </a:tblGrid>
-              <a:tr h="641985">
+              <a:tr h="534988">
                 <a:tc>
                   <a:txBody>
                     <a:bodyPr/>
                     <a:lstStyle/>
                     <a:p>
                       <a:r>
-                        <a:rPr sz="2025" b="1">
+                        <a:rPr sz="1875" b="1">
                           <a:solidFill>
                             <a:srgbClr val="FFFFFF"/>
                           </a:solidFill>
@@ -7559,7 +7488,7 @@
                     <a:lstStyle/>
                     <a:p>
                       <a:r>
-                        <a:rPr sz="2025" b="1">
+                        <a:rPr sz="1875" b="1">
                           <a:solidFill>
                             <a:srgbClr val="FFFFFF"/>
                           </a:solidFill>
@@ -7601,7 +7530,7 @@
                     <a:lstStyle/>
                     <a:p>
                       <a:r>
-                        <a:rPr sz="2025" b="1">
+                        <a:rPr sz="1875" b="1">
                           <a:solidFill>
                             <a:srgbClr val="FFFFFF"/>
                           </a:solidFill>
@@ -7638,14 +7567,14 @@
                   </a:tcPr>
                 </a:tc>
               </a:tr>
-              <a:tr h="641985">
+              <a:tr h="534988">
                 <a:tc>
                   <a:txBody>
                     <a:bodyPr/>
                     <a:lstStyle/>
                     <a:p>
                       <a:r>
-                        <a:rPr sz="2025" b="0">
+                        <a:rPr sz="1875" b="0">
                           <a:solidFill>
                             <a:srgbClr val="152D43"/>
                           </a:solidFill>
@@ -7687,7 +7616,7 @@
                     <a:lstStyle/>
                     <a:p>
                       <a:r>
-                        <a:rPr sz="2025" b="0">
+                        <a:rPr sz="1875" b="0">
                           <a:solidFill>
                             <a:srgbClr val="152D43"/>
                           </a:solidFill>
@@ -7723,7 +7652,7 @@
                     <a:lstStyle/>
                     <a:p>
                       <a:r>
-                        <a:rPr sz="2025" b="0">
+                        <a:rPr sz="1875" b="0">
                           <a:solidFill>
                             <a:srgbClr val="152D43"/>
                           </a:solidFill>
@@ -7754,14 +7683,14 @@
                   </a:tcPr>
                 </a:tc>
               </a:tr>
-              <a:tr h="641985">
+              <a:tr h="534988">
                 <a:tc>
                   <a:txBody>
                     <a:bodyPr/>
                     <a:lstStyle/>
                     <a:p>
                       <a:r>
-                        <a:rPr sz="2025" b="0">
+                        <a:rPr sz="1875" b="0">
                           <a:solidFill>
                             <a:srgbClr val="152D43"/>
                           </a:solidFill>
@@ -7803,7 +7732,7 @@
                     <a:lstStyle/>
                     <a:p>
                       <a:r>
-                        <a:rPr sz="2025" b="0">
+                        <a:rPr sz="1875" b="0">
                           <a:solidFill>
                             <a:srgbClr val="152D43"/>
                           </a:solidFill>
@@ -7839,7 +7768,7 @@
                     <a:lstStyle/>
                     <a:p>
                       <a:r>
-                        <a:rPr sz="2025" b="0">
+                        <a:rPr sz="1875" b="0">
                           <a:solidFill>
                             <a:srgbClr val="152D43"/>
                           </a:solidFill>
@@ -7870,14 +7799,14 @@
                   </a:tcPr>
                 </a:tc>
               </a:tr>
-              <a:tr h="641985">
+              <a:tr h="534988">
                 <a:tc>
                   <a:txBody>
                     <a:bodyPr/>
                     <a:lstStyle/>
                     <a:p>
                       <a:r>
-                        <a:rPr sz="2025" b="0">
+                        <a:rPr sz="1875" b="0">
                           <a:solidFill>
                             <a:srgbClr val="152D43"/>
                           </a:solidFill>
@@ -7919,7 +7848,7 @@
                     <a:lstStyle/>
                     <a:p>
                       <a:r>
-                        <a:rPr sz="2025" b="0">
+                        <a:rPr sz="1875" b="0">
                           <a:solidFill>
                             <a:srgbClr val="152D43"/>
                           </a:solidFill>
@@ -7955,7 +7884,7 @@
                     <a:lstStyle/>
                     <a:p>
                       <a:r>
-                        <a:rPr sz="2025" b="0">
+                        <a:rPr sz="1875" b="0">
                           <a:solidFill>
                             <a:srgbClr val="152D43"/>
                           </a:solidFill>
@@ -7986,14 +7915,14 @@
                   </a:tcPr>
                 </a:tc>
               </a:tr>
-              <a:tr h="641985">
+              <a:tr h="534988">
                 <a:tc>
                   <a:txBody>
                     <a:bodyPr/>
                     <a:lstStyle/>
                     <a:p>
                       <a:r>
-                        <a:rPr sz="2025" b="0">
+                        <a:rPr sz="1875" b="0">
                           <a:solidFill>
                             <a:srgbClr val="152D43"/>
                           </a:solidFill>
@@ -8035,7 +7964,7 @@
                     <a:lstStyle/>
                     <a:p>
                       <a:r>
-                        <a:rPr sz="2025" b="0">
+                        <a:rPr sz="1875" b="0">
                           <a:solidFill>
                             <a:srgbClr val="152D43"/>
                           </a:solidFill>
@@ -8071,7 +8000,7 @@
                     <a:lstStyle/>
                     <a:p>
                       <a:r>
-                        <a:rPr sz="2025" b="0">
+                        <a:rPr sz="1875" b="0">
                           <a:solidFill>
                             <a:srgbClr val="152D43"/>
                           </a:solidFill>
@@ -8102,6 +8031,122 @@
                   </a:tcPr>
                 </a:tc>
               </a:tr>
+              <a:tr h="534988">
+                <a:tc>
+                  <a:txBody>
+                    <a:bodyPr/>
+                    <a:lstStyle/>
+                    <a:p>
+                      <a:r>
+                        <a:rPr sz="1875" b="0">
+                          <a:solidFill>
+                            <a:srgbClr val="152D43"/>
+                          </a:solidFill>
+                          <a:latin typeface="Arial"/>
+                          <a:ea typeface="Arial"/>
+                          <a:cs typeface="Arial"/>
+                        </a:rPr>
+                        <a:t>Full</a:t>
+                      </a:r>
+                    </a:p>
+                  </a:txBody>
+                  <a:tcPr marL="91440" marR="91440" marT="45720" marB="45720">
+                    <a:lnL w="9525">
+                      <a:solidFill>
+                        <a:srgbClr val="D7DFE5"/>
+                      </a:solidFill>
+                      <a:prstDash val="solid"/>
+                    </a:lnL>
+                    <a:lnR w="9525">
+                      <a:solidFill>
+                        <a:srgbClr val="D7DFE5"/>
+                      </a:solidFill>
+                      <a:prstDash val="solid"/>
+                    </a:lnR>
+                    <a:lnB w="9525">
+                      <a:solidFill>
+                        <a:srgbClr val="D7DFE5"/>
+                      </a:solidFill>
+                      <a:prstDash val="solid"/>
+                    </a:lnB>
+                    <a:solidFill>
+                      <a:srgbClr val="FFFFFF"/>
+                    </a:solidFill>
+                  </a:tcPr>
+                </a:tc>
+                <a:tc>
+                  <a:txBody>
+                    <a:bodyPr/>
+                    <a:lstStyle/>
+                    <a:p>
+                      <a:r>
+                        <a:rPr sz="1875" b="0">
+                          <a:solidFill>
+                            <a:srgbClr val="152D43"/>
+                          </a:solidFill>
+                          <a:latin typeface="Arial"/>
+                          <a:ea typeface="Arial"/>
+                          <a:cs typeface="Arial"/>
+                        </a:rPr>
+                        <a:t>10.658 ms</a:t>
+                      </a:r>
+                    </a:p>
+                  </a:txBody>
+                  <a:tcPr marL="91440" marR="91440" marT="45720" marB="45720">
+                    <a:lnR w="9525">
+                      <a:solidFill>
+                        <a:srgbClr val="D7DFE5"/>
+                      </a:solidFill>
+                      <a:prstDash val="solid"/>
+                    </a:lnR>
+                    <a:lnB w="9525">
+                      <a:solidFill>
+                        <a:srgbClr val="D7DFE5"/>
+                      </a:solidFill>
+                      <a:prstDash val="solid"/>
+                    </a:lnB>
+                    <a:solidFill>
+                      <a:srgbClr val="FFFFFF"/>
+                    </a:solidFill>
+                  </a:tcPr>
+                </a:tc>
+                <a:tc>
+                  <a:txBody>
+                    <a:bodyPr/>
+                    <a:lstStyle/>
+                    <a:p>
+                      <a:r>
+                        <a:rPr sz="1875" b="0">
+                          <a:solidFill>
+                            <a:srgbClr val="152D43"/>
+                          </a:solidFill>
+                          <a:latin typeface="Arial"/>
+                          <a:ea typeface="Arial"/>
+                          <a:cs typeface="Arial"/>
+                        </a:rPr>
+                        <a:t>0.0000</a:t>
+                      </a:r>
+                    </a:p>
+                  </a:txBody>
+                  <a:tcPr marL="91440" marR="91440" marT="45720" marB="45720">
+                    <a:lnR w="9525">
+                      <a:solidFill>
+                        <a:srgbClr val="D7DFE5"/>
+                      </a:solidFill>
+                      <a:prstDash val="solid"/>
+                    </a:lnR>
+                    <a:lnB w="9525">
+                      <a:solidFill>
+                        <a:srgbClr val="D7DFE5"/>
+                      </a:solidFill>
+                      <a:prstDash val="solid"/>
+                    </a:lnB>
+                    <a:solidFill>
+                      <a:srgbClr val="FFFFFF"/>
+                    </a:solidFill>
+                  </a:tcPr>
+                </a:tc>
+              </a:tr>
             </a:tbl>
           </a:graphicData>
         </a:graphic>
@@ -8111,7 +8156,7 @@
           <p:cNvPr id="5" name="">
             <a:extLst xmlns:a="http://schemas.openxmlformats.org/drawingml/2006/main">
               <a:ext uri="{FF2B5EF4-FFF2-40B4-BE49-F238E27FC236}">
-                <a16:creationId xmlns:a16="http://schemas.microsoft.com/office/drawing/2014/main" id="{487942ED-0D28-4DC7-AB72-F95EC1BFCB0D}"/>
+                <a16:creationId xmlns:a16="http://schemas.microsoft.com/office/drawing/2014/main" id="{CC7AB6D2-FE42-4739-B92E-B2086815A08A}"/>
               </a:ext>
             </a:extLst>
           </p:cNvPr>
@@ -8156,7 +8201,7 @@
           <p:cNvPr id="6" name="">
             <a:extLst xmlns:a="http://schemas.openxmlformats.org/drawingml/2006/main">
               <a:ext uri="{FF2B5EF4-FFF2-40B4-BE49-F238E27FC236}">
-                <a16:creationId xmlns:a16="http://schemas.microsoft.com/office/drawing/2014/main" id="{2E77EBE6-E15A-4EAA-A2BF-9ADF1EE8DC8C}"/>
+                <a16:creationId xmlns:a16="http://schemas.microsoft.com/office/drawing/2014/main" id="{10C3B9F4-CDB0-469C-8D12-3869C6A0446B}"/>
               </a:ext>
             </a:extLst>
           </p:cNvPr>
@@ -8201,7 +8246,7 @@
           <p:cNvPr id="7" name="">
             <a:extLst xmlns:a="http://schemas.openxmlformats.org/drawingml/2006/main">
               <a:ext uri="{FF2B5EF4-FFF2-40B4-BE49-F238E27FC236}">
-                <a16:creationId xmlns:a16="http://schemas.microsoft.com/office/drawing/2014/main" id="{1BC46B50-141F-4DB7-9812-526CCA6F1615}"/>
+                <a16:creationId xmlns:a16="http://schemas.microsoft.com/office/drawing/2014/main" id="{A92A9CD6-A9B9-489A-9EFB-6630EEC715D4}"/>
               </a:ext>
             </a:extLst>
           </p:cNvPr>
@@ -8244,606 +8289,7 @@
     </p:spTree>
     <p:extLst>
       <p:ext uri="{BB962C8B-B14F-4D97-AF65-F5344CB8AC3E}">
-        <p14:creationId xmlns:p14="http://schemas.microsoft.com/office/powerpoint/2010/main" val="690856604"/>
-      </p:ext>
-    </p:extLst>
-  </p:cSld>
-</p:sld>
-</file>
-
-<file path=ppt/slides/slide7.xml><?xml version="1.0" encoding="utf-8"?>
-<p:sld xmlns:p="http://schemas.openxmlformats.org/presentationml/2006/main">
-  <p:cSld>
-    <p:bg>
-      <p:bgPr>
-        <a:solidFill xmlns:a="http://schemas.openxmlformats.org/drawingml/2006/main">
-          <a:srgbClr val="FFFFFF"/>
-        </a:solidFill>
-      </p:bgPr>
-    </p:bg>
-    <p:spTree>
-      <p:nvGrpSpPr>
-        <p:cNvPr id="1" name=""/>
-        <p:cNvGrpSpPr/>
-        <p:nvPr/>
-      </p:nvGrpSpPr>
-      <p:grpSpPr>
-        <a:xfrm xmlns:a="http://schemas.openxmlformats.org/drawingml/2006/main"/>
-      </p:grpSpPr>
-      <p:sp>
-        <p:nvSpPr>
-          <p:cNvPr id="14" name="">
-            <a:extLst xmlns:a="http://schemas.openxmlformats.org/drawingml/2006/main">
-              <a:ext uri="{FF2B5EF4-FFF2-40B4-BE49-F238E27FC236}">
-                <a16:creationId xmlns:a16="http://schemas.microsoft.com/office/drawing/2014/main" id="{BCCE9A48-1D6E-4A83-9CA1-8CFE400186B1}"/>
-              </a:ext>
-            </a:extLst>
-          </p:cNvPr>
-          <p:cNvSpPr>
-            <a:spLocks xmlns:a="http://schemas.openxmlformats.org/drawingml/2006/main" noGrp="1"/>
-          </p:cNvSpPr>
-          <p:nvPr/>
-        </p:nvSpPr>
-        <p:spPr>
-          <a:xfrm xmlns:a="http://schemas.openxmlformats.org/drawingml/2006/main">
-            <a:off x="609600" y="381000"/>
-            <a:ext cx="10906125" cy="628650"/>
-          </a:xfrm>
-          <a:prstGeom xmlns:a="http://schemas.openxmlformats.org/drawingml/2006/main" prst="rect">
-            <a:avLst/>
-          </a:prstGeom>
-          <a:noFill xmlns:a="http://schemas.openxmlformats.org/drawingml/2006/main"/>
-          <a:ln xmlns:a="http://schemas.openxmlformats.org/drawingml/2006/main" w="0">
-            <a:noFill/>
-          </a:ln>
-        </p:spPr>
-        <p:txBody>
-          <a:bodyPr xmlns:a="http://schemas.openxmlformats.org/drawingml/2006/main" lIns="0" tIns="0" rIns="0" bIns="0"/>
-          <a:lstStyle xmlns:a="http://schemas.openxmlformats.org/drawingml/2006/main"/>
-          <a:p xmlns:a="http://schemas.openxmlformats.org/drawingml/2006/main">
-            <a:r>
-              <a:rPr sz="3150" b="1">
-                <a:solidFill>
-                  <a:srgbClr val="152D43"/>
-                </a:solidFill>
-                <a:latin typeface="Arial"/>
-                <a:ea typeface="Arial"/>
-                <a:cs typeface="Arial"/>
-              </a:rPr>
-              <a:t>Next: measure deadline behavior under jitter</a:t>
-            </a:r>
-          </a:p>
-        </p:txBody>
-      </p:sp>
-      <p:sp>
-        <p:nvSpPr>
-          <p:cNvPr id="2" name="">
-            <a:extLst xmlns:a="http://schemas.openxmlformats.org/drawingml/2006/main">
-              <a:ext uri="{FF2B5EF4-FFF2-40B4-BE49-F238E27FC236}">
-                <a16:creationId xmlns:a16="http://schemas.microsoft.com/office/drawing/2014/main" id="{E066C3A2-BB63-4190-B0FA-9FA817E0AFA4}"/>
-              </a:ext>
-            </a:extLst>
-          </p:cNvPr>
-          <p:cNvSpPr>
-            <a:spLocks xmlns:a="http://schemas.openxmlformats.org/drawingml/2006/main" noGrp="1"/>
-          </p:cNvSpPr>
-          <p:nvPr/>
-        </p:nvSpPr>
-        <p:spPr>
-          <a:xfrm xmlns:a="http://schemas.openxmlformats.org/drawingml/2006/main">
-            <a:off x="609600" y="1162050"/>
-            <a:ext cx="10972800" cy="0"/>
-          </a:xfrm>
-          <a:prstGeom xmlns:a="http://schemas.openxmlformats.org/drawingml/2006/main" prst="line">
-            <a:avLst/>
-          </a:prstGeom>
-          <a:noFill xmlns:a="http://schemas.openxmlformats.org/drawingml/2006/main"/>
-          <a:ln xmlns:a="http://schemas.openxmlformats.org/drawingml/2006/main" w="9525">
-            <a:solidFill>
-              <a:srgbClr val="D7DFE5"/>
-            </a:solidFill>
-          </a:ln>
-        </p:spPr>
-      </p:sp>
-      <p:sp>
-        <p:nvSpPr>
-          <p:cNvPr id="3" name="">
-            <a:extLst xmlns:a="http://schemas.openxmlformats.org/drawingml/2006/main">
-              <a:ext uri="{FF2B5EF4-FFF2-40B4-BE49-F238E27FC236}">
-                <a16:creationId xmlns:a16="http://schemas.microsoft.com/office/drawing/2014/main" id="{0B304B32-2D64-4CBA-8EDC-36675DF42308}"/>
-              </a:ext>
-            </a:extLst>
-          </p:cNvPr>
-          <p:cNvSpPr>
-            <a:spLocks xmlns:a="http://schemas.openxmlformats.org/drawingml/2006/main" noGrp="1"/>
-          </p:cNvSpPr>
-          <p:nvPr/>
-        </p:nvSpPr>
-        <p:spPr>
-          <a:xfrm xmlns:a="http://schemas.openxmlformats.org/drawingml/2006/main">
-            <a:off x="11353800" y="6429375"/>
-            <a:ext cx="285750" cy="228600"/>
-          </a:xfrm>
-          <a:prstGeom xmlns:a="http://schemas.openxmlformats.org/drawingml/2006/main" prst="rect">
-            <a:avLst/>
-          </a:prstGeom>
-          <a:noFill xmlns:a="http://schemas.openxmlformats.org/drawingml/2006/main"/>
-          <a:ln xmlns:a="http://schemas.openxmlformats.org/drawingml/2006/main" w="0">
-            <a:noFill/>
-          </a:ln>
-        </p:spPr>
-        <p:txBody>
-          <a:bodyPr xmlns:a="http://schemas.openxmlformats.org/drawingml/2006/main" lIns="0" tIns="0" rIns="0" bIns="0"/>
-          <a:lstStyle xmlns:a="http://schemas.openxmlformats.org/drawingml/2006/main"/>
-          <a:p xmlns:a="http://schemas.openxmlformats.org/drawingml/2006/main">
-            <a:r>
-              <a:rPr sz="1275" b="0">
-                <a:solidFill>
-                  <a:srgbClr val="536675"/>
-                </a:solidFill>
-                <a:latin typeface="Arial"/>
-                <a:ea typeface="Arial"/>
-                <a:cs typeface="Arial"/>
-              </a:rPr>
-              <a:t>7</a:t>
-            </a:r>
-          </a:p>
-        </p:txBody>
-      </p:sp>
-      <p:sp>
-        <p:nvSpPr>
-          <p:cNvPr id="4" name="">
-            <a:extLst xmlns:a="http://schemas.openxmlformats.org/drawingml/2006/main">
-              <a:ext uri="{FF2B5EF4-FFF2-40B4-BE49-F238E27FC236}">
-                <a16:creationId xmlns:a16="http://schemas.microsoft.com/office/drawing/2014/main" id="{1B4A34E0-79F6-4E96-B5BF-794DB4C20077}"/>
-              </a:ext>
-            </a:extLst>
-          </p:cNvPr>
-          <p:cNvSpPr>
-            <a:spLocks xmlns:a="http://schemas.openxmlformats.org/drawingml/2006/main" noGrp="1"/>
-          </p:cNvSpPr>
-          <p:nvPr/>
-        </p:nvSpPr>
-        <p:spPr>
-          <a:xfrm xmlns:a="http://schemas.openxmlformats.org/drawingml/2006/main">
-            <a:off x="628650" y="1704975"/>
-            <a:ext cx="571500" cy="571500"/>
-          </a:xfrm>
-          <a:prstGeom xmlns:a="http://schemas.openxmlformats.org/drawingml/2006/main" prst="rect">
-            <a:avLst/>
-          </a:prstGeom>
-          <a:noFill xmlns:a="http://schemas.openxmlformats.org/drawingml/2006/main"/>
-          <a:ln xmlns:a="http://schemas.openxmlformats.org/drawingml/2006/main" w="0">
-            <a:noFill/>
-          </a:ln>
-        </p:spPr>
-        <p:txBody>
-          <a:bodyPr xmlns:a="http://schemas.openxmlformats.org/drawingml/2006/main" lIns="0" tIns="0" rIns="0" bIns="0"/>
-          <a:lstStyle xmlns:a="http://schemas.openxmlformats.org/drawingml/2006/main"/>
-          <a:p xmlns:a="http://schemas.openxmlformats.org/drawingml/2006/main">
-            <a:r>
-              <a:rPr sz="3000" b="1">
-                <a:solidFill>
-                  <a:srgbClr val="086B93"/>
-                </a:solidFill>
-                <a:latin typeface="Arial"/>
-                <a:ea typeface="Arial"/>
-                <a:cs typeface="Arial"/>
-              </a:rPr>
-              <a:t>1</a:t>
-            </a:r>
-          </a:p>
-        </p:txBody>
-      </p:sp>
-      <p:sp>
-        <p:nvSpPr>
-          <p:cNvPr id="5" name="">
-            <a:extLst xmlns:a="http://schemas.openxmlformats.org/drawingml/2006/main">
-              <a:ext uri="{FF2B5EF4-FFF2-40B4-BE49-F238E27FC236}">
-                <a16:creationId xmlns:a16="http://schemas.microsoft.com/office/drawing/2014/main" id="{6435A1F5-991A-4360-89DD-23A7EBDC4942}"/>
-              </a:ext>
-            </a:extLst>
-          </p:cNvPr>
-          <p:cNvSpPr>
-            <a:spLocks xmlns:a="http://schemas.openxmlformats.org/drawingml/2006/main" noGrp="1"/>
-          </p:cNvSpPr>
-          <p:nvPr/>
-        </p:nvSpPr>
-        <p:spPr>
-          <a:xfrm xmlns:a="http://schemas.openxmlformats.org/drawingml/2006/main">
-            <a:off x="1333500" y="1704975"/>
-            <a:ext cx="10001250" cy="457200"/>
-          </a:xfrm>
-          <a:prstGeom xmlns:a="http://schemas.openxmlformats.org/drawingml/2006/main" prst="rect">
-            <a:avLst/>
-          </a:prstGeom>
-          <a:noFill xmlns:a="http://schemas.openxmlformats.org/drawingml/2006/main"/>
-          <a:ln xmlns:a="http://schemas.openxmlformats.org/drawingml/2006/main" w="0">
-            <a:noFill/>
-          </a:ln>
-        </p:spPr>
-        <p:txBody>
-          <a:bodyPr xmlns:a="http://schemas.openxmlformats.org/drawingml/2006/main" lIns="0" tIns="0" rIns="0" bIns="0"/>
-          <a:lstStyle xmlns:a="http://schemas.openxmlformats.org/drawingml/2006/main"/>
-          <a:p xmlns:a="http://schemas.openxmlformats.org/drawingml/2006/main">
-            <a:r>
-              <a:rPr sz="2400" b="1">
-                <a:solidFill>
-                  <a:srgbClr val="152D43"/>
-                </a:solidFill>
-                <a:latin typeface="Arial"/>
-                <a:ea typeface="Arial"/>
-                <a:cs typeface="Arial"/>
-              </a:rPr>
-              <a:t>Record the actual per-frame budget</a:t>
-            </a:r>
-          </a:p>
-        </p:txBody>
-      </p:sp>
-      <p:sp>
-        <p:nvSpPr>
-          <p:cNvPr id="6" name="">
-            <a:extLst xmlns:a="http://schemas.openxmlformats.org/drawingml/2006/main">
-              <a:ext uri="{FF2B5EF4-FFF2-40B4-BE49-F238E27FC236}">
-                <a16:creationId xmlns:a16="http://schemas.microsoft.com/office/drawing/2014/main" id="{DDFEC6B9-CCA3-4EB7-B161-5D6AEEA42041}"/>
-              </a:ext>
-            </a:extLst>
-          </p:cNvPr>
-          <p:cNvSpPr>
-            <a:spLocks xmlns:a="http://schemas.openxmlformats.org/drawingml/2006/main" noGrp="1"/>
-          </p:cNvSpPr>
-          <p:nvPr/>
-        </p:nvSpPr>
-        <p:spPr>
-          <a:xfrm xmlns:a="http://schemas.openxmlformats.org/drawingml/2006/main">
-            <a:off x="1333500" y="2247900"/>
-            <a:ext cx="9953625" cy="457200"/>
-          </a:xfrm>
-          <a:prstGeom xmlns:a="http://schemas.openxmlformats.org/drawingml/2006/main" prst="rect">
-            <a:avLst/>
-          </a:prstGeom>
-          <a:noFill xmlns:a="http://schemas.openxmlformats.org/drawingml/2006/main"/>
-          <a:ln xmlns:a="http://schemas.openxmlformats.org/drawingml/2006/main" w="0">
-            <a:noFill/>
-          </a:ln>
-        </p:spPr>
-        <p:txBody>
-          <a:bodyPr xmlns:a="http://schemas.openxmlformats.org/drawingml/2006/main" lIns="0" tIns="0" rIns="0" bIns="0"/>
-          <a:lstStyle xmlns:a="http://schemas.openxmlformats.org/drawingml/2006/main"/>
-          <a:p xmlns:a="http://schemas.openxmlformats.org/drawingml/2006/main">
-            <a:r>
-              <a:rPr sz="2025" b="0">
-                <a:solidFill>
-                  <a:srgbClr val="536675"/>
-                </a:solidFill>
-                <a:latin typeface="Arial"/>
-                <a:ea typeface="Arial"/>
-                <a:cs typeface="Arial"/>
-              </a:rPr>
-              <a:t>Log arrival, decode completion, and display deadline. Reserve display time and a margin.</a:t>
-            </a:r>
-          </a:p>
-        </p:txBody>
-      </p:sp>
-      <p:sp>
-        <p:nvSpPr>
-          <p:cNvPr id="7" name="">
-            <a:extLst xmlns:a="http://schemas.openxmlformats.org/drawingml/2006/main">
-              <a:ext uri="{FF2B5EF4-FFF2-40B4-BE49-F238E27FC236}">
-                <a16:creationId xmlns:a16="http://schemas.microsoft.com/office/drawing/2014/main" id="{AF24A686-9EEC-4FAC-BB2C-EBD8850C1157}"/>
-              </a:ext>
-            </a:extLst>
-          </p:cNvPr>
-          <p:cNvSpPr>
-            <a:spLocks xmlns:a="http://schemas.openxmlformats.org/drawingml/2006/main" noGrp="1"/>
-          </p:cNvSpPr>
-          <p:nvPr/>
-        </p:nvSpPr>
-        <p:spPr>
-          <a:xfrm xmlns:a="http://schemas.openxmlformats.org/drawingml/2006/main">
-            <a:off x="628650" y="3000375"/>
-            <a:ext cx="571500" cy="571500"/>
-          </a:xfrm>
-          <a:prstGeom xmlns:a="http://schemas.openxmlformats.org/drawingml/2006/main" prst="rect">
-            <a:avLst/>
-          </a:prstGeom>
-          <a:noFill xmlns:a="http://schemas.openxmlformats.org/drawingml/2006/main"/>
-          <a:ln xmlns:a="http://schemas.openxmlformats.org/drawingml/2006/main" w="0">
-            <a:noFill/>
-          </a:ln>
-        </p:spPr>
-        <p:txBody>
-          <a:bodyPr xmlns:a="http://schemas.openxmlformats.org/drawingml/2006/main" lIns="0" tIns="0" rIns="0" bIns="0"/>
-          <a:lstStyle xmlns:a="http://schemas.openxmlformats.org/drawingml/2006/main"/>
-          <a:p xmlns:a="http://schemas.openxmlformats.org/drawingml/2006/main">
-            <a:r>
-              <a:rPr sz="3000" b="1">
-                <a:solidFill>
-                  <a:srgbClr val="086B93"/>
-                </a:solidFill>
-                <a:latin typeface="Arial"/>
-                <a:ea typeface="Arial"/>
-                <a:cs typeface="Arial"/>
-              </a:rPr>
-              <a:t>2</a:t>
-            </a:r>
-          </a:p>
-        </p:txBody>
-      </p:sp>
-      <p:sp>
-        <p:nvSpPr>
-          <p:cNvPr id="8" name="">
-            <a:extLst xmlns:a="http://schemas.openxmlformats.org/drawingml/2006/main">
-              <a:ext uri="{FF2B5EF4-FFF2-40B4-BE49-F238E27FC236}">
-                <a16:creationId xmlns:a16="http://schemas.microsoft.com/office/drawing/2014/main" id="{AAA565A7-980A-48D4-9D35-431B15588789}"/>
-              </a:ext>
-            </a:extLst>
-          </p:cNvPr>
-          <p:cNvSpPr>
-            <a:spLocks xmlns:a="http://schemas.openxmlformats.org/drawingml/2006/main" noGrp="1"/>
-          </p:cNvSpPr>
-          <p:nvPr/>
-        </p:nvSpPr>
-        <p:spPr>
-          <a:xfrm xmlns:a="http://schemas.openxmlformats.org/drawingml/2006/main">
-            <a:off x="1333500" y="3000375"/>
-            <a:ext cx="10001250" cy="457200"/>
-          </a:xfrm>
-          <a:prstGeom xmlns:a="http://schemas.openxmlformats.org/drawingml/2006/main" prst="rect">
-            <a:avLst/>
-          </a:prstGeom>
-          <a:noFill xmlns:a="http://schemas.openxmlformats.org/drawingml/2006/main"/>
-          <a:ln xmlns:a="http://schemas.openxmlformats.org/drawingml/2006/main" w="0">
-            <a:noFill/>
-          </a:ln>
-        </p:spPr>
-        <p:txBody>
-          <a:bodyPr xmlns:a="http://schemas.openxmlformats.org/drawingml/2006/main" lIns="0" tIns="0" rIns="0" bIns="0"/>
-          <a:lstStyle xmlns:a="http://schemas.openxmlformats.org/drawingml/2006/main"/>
-          <a:p xmlns:a="http://schemas.openxmlformats.org/drawingml/2006/main">
-            <a:r>
-              <a:rPr sz="2400" b="1">
-                <a:solidFill>
-                  <a:srgbClr val="152D43"/>
-                </a:solidFill>
-                <a:latin typeface="Arial"/>
-                <a:ea typeface="Arial"/>
-                <a:cs typeface="Arial"/>
-              </a:rPr>
-              <a:t>Implement budget-based ROI selection</a:t>
-            </a:r>
-          </a:p>
-        </p:txBody>
-      </p:sp>
-      <p:sp>
-        <p:nvSpPr>
-          <p:cNvPr id="9" name="">
-            <a:extLst xmlns:a="http://schemas.openxmlformats.org/drawingml/2006/main">
-              <a:ext uri="{FF2B5EF4-FFF2-40B4-BE49-F238E27FC236}">
-                <a16:creationId xmlns:a16="http://schemas.microsoft.com/office/drawing/2014/main" id="{77268D79-0BF4-489D-B449-E059BC7792FA}"/>
-              </a:ext>
-            </a:extLst>
-          </p:cNvPr>
-          <p:cNvSpPr>
-            <a:spLocks xmlns:a="http://schemas.openxmlformats.org/drawingml/2006/main" noGrp="1"/>
-          </p:cNvSpPr>
-          <p:nvPr/>
-        </p:nvSpPr>
-        <p:spPr>
-          <a:xfrm xmlns:a="http://schemas.openxmlformats.org/drawingml/2006/main">
-            <a:off x="1333500" y="3543300"/>
-            <a:ext cx="9953625" cy="457200"/>
-          </a:xfrm>
-          <a:prstGeom xmlns:a="http://schemas.openxmlformats.org/drawingml/2006/main" prst="rect">
-            <a:avLst/>
-          </a:prstGeom>
-          <a:noFill xmlns:a="http://schemas.openxmlformats.org/drawingml/2006/main"/>
-          <a:ln xmlns:a="http://schemas.openxmlformats.org/drawingml/2006/main" w="0">
-            <a:noFill/>
-          </a:ln>
-        </p:spPr>
-        <p:txBody>
-          <a:bodyPr xmlns:a="http://schemas.openxmlformats.org/drawingml/2006/main" lIns="0" tIns="0" rIns="0" bIns="0"/>
-          <a:lstStyle xmlns:a="http://schemas.openxmlformats.org/drawingml/2006/main"/>
-          <a:p xmlns:a="http://schemas.openxmlformats.org/drawingml/2006/main">
-            <a:r>
-              <a:rPr sz="2025" b="0">
-                <a:solidFill>
-                  <a:srgbClr val="536675"/>
-                </a:solidFill>
-                <a:latin typeface="Arial"/>
-                <a:ea typeface="Arial"/>
-                <a:cs typeface="Arial"/>
-              </a:rPr>
-              <a:t>Build a percentile-based profile. Define a fallback when no level fits the budget.</a:t>
-            </a:r>
-          </a:p>
-        </p:txBody>
-      </p:sp>
-      <p:sp>
-        <p:nvSpPr>
-          <p:cNvPr id="10" name="">
-            <a:extLst xmlns:a="http://schemas.openxmlformats.org/drawingml/2006/main">
-              <a:ext uri="{FF2B5EF4-FFF2-40B4-BE49-F238E27FC236}">
-                <a16:creationId xmlns:a16="http://schemas.microsoft.com/office/drawing/2014/main" id="{435D6491-AFD1-4196-8FDB-A4F72CE74A6A}"/>
-              </a:ext>
-            </a:extLst>
-          </p:cNvPr>
-          <p:cNvSpPr>
-            <a:spLocks xmlns:a="http://schemas.openxmlformats.org/drawingml/2006/main" noGrp="1"/>
-          </p:cNvSpPr>
-          <p:nvPr/>
-        </p:nvSpPr>
-        <p:spPr>
-          <a:xfrm xmlns:a="http://schemas.openxmlformats.org/drawingml/2006/main">
-            <a:off x="628650" y="4295775"/>
-            <a:ext cx="571500" cy="571500"/>
-          </a:xfrm>
-          <a:prstGeom xmlns:a="http://schemas.openxmlformats.org/drawingml/2006/main" prst="rect">
-            <a:avLst/>
-          </a:prstGeom>
-          <a:noFill xmlns:a="http://schemas.openxmlformats.org/drawingml/2006/main"/>
-          <a:ln xmlns:a="http://schemas.openxmlformats.org/drawingml/2006/main" w="0">
-            <a:noFill/>
-          </a:ln>
-        </p:spPr>
-        <p:txBody>
-          <a:bodyPr xmlns:a="http://schemas.openxmlformats.org/drawingml/2006/main" lIns="0" tIns="0" rIns="0" bIns="0"/>
-          <a:lstStyle xmlns:a="http://schemas.openxmlformats.org/drawingml/2006/main"/>
-          <a:p xmlns:a="http://schemas.openxmlformats.org/drawingml/2006/main">
-            <a:r>
-              <a:rPr sz="3000" b="1">
-                <a:solidFill>
-                  <a:srgbClr val="086B93"/>
-                </a:solidFill>
-                <a:latin typeface="Arial"/>
-                <a:ea typeface="Arial"/>
-                <a:cs typeface="Arial"/>
-              </a:rPr>
-              <a:t>3</a:t>
-            </a:r>
-          </a:p>
-        </p:txBody>
-      </p:sp>
-      <p:sp>
-        <p:nvSpPr>
-          <p:cNvPr id="11" name="">
-            <a:extLst xmlns:a="http://schemas.openxmlformats.org/drawingml/2006/main">
-              <a:ext uri="{FF2B5EF4-FFF2-40B4-BE49-F238E27FC236}">
-                <a16:creationId xmlns:a16="http://schemas.microsoft.com/office/drawing/2014/main" id="{7752B160-2CA6-4869-A7FF-FB96C326714F}"/>
-              </a:ext>
-            </a:extLst>
-          </p:cNvPr>
-          <p:cNvSpPr>
-            <a:spLocks xmlns:a="http://schemas.openxmlformats.org/drawingml/2006/main" noGrp="1"/>
-          </p:cNvSpPr>
-          <p:nvPr/>
-        </p:nvSpPr>
-        <p:spPr>
-          <a:xfrm xmlns:a="http://schemas.openxmlformats.org/drawingml/2006/main">
-            <a:off x="1333500" y="4295775"/>
-            <a:ext cx="10001250" cy="457200"/>
-          </a:xfrm>
-          <a:prstGeom xmlns:a="http://schemas.openxmlformats.org/drawingml/2006/main" prst="rect">
-            <a:avLst/>
-          </a:prstGeom>
-          <a:noFill xmlns:a="http://schemas.openxmlformats.org/drawingml/2006/main"/>
-          <a:ln xmlns:a="http://schemas.openxmlformats.org/drawingml/2006/main" w="0">
-            <a:noFill/>
-          </a:ln>
-        </p:spPr>
-        <p:txBody>
-          <a:bodyPr xmlns:a="http://schemas.openxmlformats.org/drawingml/2006/main" lIns="0" tIns="0" rIns="0" bIns="0"/>
-          <a:lstStyle xmlns:a="http://schemas.openxmlformats.org/drawingml/2006/main"/>
-          <a:p xmlns:a="http://schemas.openxmlformats.org/drawingml/2006/main">
-            <a:r>
-              <a:rPr sz="2400" b="1">
-                <a:solidFill>
-                  <a:srgbClr val="152D43"/>
-                </a:solidFill>
-                <a:latin typeface="Arial"/>
-                <a:ea typeface="Arial"/>
-                <a:cs typeface="Arial"/>
-              </a:rPr>
-              <a:t>Compare fixed and adaptive policies on the same trace</a:t>
-            </a:r>
-          </a:p>
-        </p:txBody>
-      </p:sp>
-      <p:sp>
-        <p:nvSpPr>
-          <p:cNvPr id="12" name="">
-            <a:extLst xmlns:a="http://schemas.openxmlformats.org/drawingml/2006/main">
-              <a:ext uri="{FF2B5EF4-FFF2-40B4-BE49-F238E27FC236}">
-                <a16:creationId xmlns:a16="http://schemas.microsoft.com/office/drawing/2014/main" id="{BE51B4C8-AB44-4ECB-BE8A-9A1F98961A92}"/>
-              </a:ext>
-            </a:extLst>
-          </p:cNvPr>
-          <p:cNvSpPr>
-            <a:spLocks xmlns:a="http://schemas.openxmlformats.org/drawingml/2006/main" noGrp="1"/>
-          </p:cNvSpPr>
-          <p:nvPr/>
-        </p:nvSpPr>
-        <p:spPr>
-          <a:xfrm xmlns:a="http://schemas.openxmlformats.org/drawingml/2006/main">
-            <a:off x="1333500" y="4838700"/>
-            <a:ext cx="9953625" cy="457200"/>
-          </a:xfrm>
-          <a:prstGeom xmlns:a="http://schemas.openxmlformats.org/drawingml/2006/main" prst="rect">
-            <a:avLst/>
-          </a:prstGeom>
-          <a:noFill xmlns:a="http://schemas.openxmlformats.org/drawingml/2006/main"/>
-          <a:ln xmlns:a="http://schemas.openxmlformats.org/drawingml/2006/main" w="0">
-            <a:noFill/>
-          </a:ln>
-        </p:spPr>
-        <p:txBody>
-          <a:bodyPr xmlns:a="http://schemas.openxmlformats.org/drawingml/2006/main" lIns="0" tIns="0" rIns="0" bIns="0"/>
-          <a:lstStyle xmlns:a="http://schemas.openxmlformats.org/drawingml/2006/main"/>
-          <a:p xmlns:a="http://schemas.openxmlformats.org/drawingml/2006/main">
-            <a:r>
-              <a:rPr sz="2025" b="0">
-                <a:solidFill>
-                  <a:srgbClr val="536675"/>
-                </a:solidFill>
-                <a:latin typeface="Arial"/>
-                <a:ea typeface="Arial"/>
-                <a:cs typeface="Arial"/>
-              </a:rPr>
-              <a:t>Report deadline-miss rate, tail latency, and quality. Repeat runs to check stability.</a:t>
-            </a:r>
-          </a:p>
-        </p:txBody>
-      </p:sp>
-      <p:sp>
-        <p:nvSpPr>
-          <p:cNvPr id="13" name="">
-            <a:extLst xmlns:a="http://schemas.openxmlformats.org/drawingml/2006/main">
-              <a:ext uri="{FF2B5EF4-FFF2-40B4-BE49-F238E27FC236}">
-                <a16:creationId xmlns:a16="http://schemas.microsoft.com/office/drawing/2014/main" id="{C104C9E1-CBC9-4C84-881E-2AB654BF59D4}"/>
-              </a:ext>
-            </a:extLst>
-          </p:cNvPr>
-          <p:cNvSpPr>
-            <a:spLocks xmlns:a="http://schemas.openxmlformats.org/drawingml/2006/main" noGrp="1"/>
-          </p:cNvSpPr>
-          <p:nvPr/>
-        </p:nvSpPr>
-        <p:spPr>
-          <a:xfrm xmlns:a="http://schemas.openxmlformats.org/drawingml/2006/main">
-            <a:off x="609600" y="5924550"/>
-            <a:ext cx="10715625" cy="457200"/>
-          </a:xfrm>
-          <a:prstGeom xmlns:a="http://schemas.openxmlformats.org/drawingml/2006/main" prst="rect">
-            <a:avLst/>
-          </a:prstGeom>
-          <a:noFill xmlns:a="http://schemas.openxmlformats.org/drawingml/2006/main"/>
-          <a:ln xmlns:a="http://schemas.openxmlformats.org/drawingml/2006/main" w="0">
-            <a:noFill/>
-          </a:ln>
-        </p:spPr>
-        <p:txBody>
-          <a:bodyPr xmlns:a="http://schemas.openxmlformats.org/drawingml/2006/main" lIns="0" tIns="0" rIns="0" bIns="0"/>
-          <a:lstStyle xmlns:a="http://schemas.openxmlformats.org/drawingml/2006/main"/>
-          <a:p xmlns:a="http://schemas.openxmlformats.org/drawingml/2006/main">
-            <a:r>
-              <a:rPr sz="1500" b="0">
-                <a:solidFill>
-                  <a:srgbClr val="536675"/>
-                </a:solidFill>
-                <a:latin typeface="Arial"/>
-                <a:ea typeface="Arial"/>
-                <a:cs typeface="Arial"/>
-              </a:rPr>
-              <a:t>Measured: fixed-center quality–latency levels. Adaptive scheduling and benefits under jitter still require validation.</a:t>
-            </a:r>
-          </a:p>
-        </p:txBody>
-      </p:sp>
-    </p:spTree>
-    <p:extLst>
-      <p:ext uri="{BB962C8B-B14F-4D97-AF65-F5344CB8AC3E}">
-        <p14:creationId xmlns:p14="http://schemas.microsoft.com/office/powerpoint/2010/main" val="326408459"/>
+        <p14:creationId xmlns:p14="http://schemas.microsoft.com/office/powerpoint/2010/main" val="1769713570"/>
       </p:ext>
     </p:extLst>
   </p:cSld>
